--- a/Bases de Datos II/Clases/Clase 13 - Analisis de casos reales/Presentacion.pptx
+++ b/Bases de Datos II/Clases/Clase 13 - Analisis de casos reales/Presentacion.pptx
@@ -19,6 +19,19 @@
     <p:sldId id="267" r:id="rId18"/>
     <p:sldId id="268" r:id="rId19"/>
     <p:sldId id="269" r:id="rId20"/>
+    <p:sldId id="270" r:id="rId21"/>
+    <p:sldId id="271" r:id="rId22"/>
+    <p:sldId id="272" r:id="rId23"/>
+    <p:sldId id="273" r:id="rId24"/>
+    <p:sldId id="274" r:id="rId25"/>
+    <p:sldId id="275" r:id="rId26"/>
+    <p:sldId id="276" r:id="rId27"/>
+    <p:sldId id="277" r:id="rId28"/>
+    <p:sldId id="278" r:id="rId29"/>
+    <p:sldId id="279" r:id="rId30"/>
+    <p:sldId id="280" r:id="rId31"/>
+    <p:sldId id="281" r:id="rId32"/>
+    <p:sldId id="282" r:id="rId33"/>
   </p:sldIdLst>
   <p:sldSz cx="12191695" cy="6858000" type="screen4x3"/>
   <p:notesSz cx="6858000" cy="9144000"/>
@@ -3619,111 +3632,21 @@
                 </a:solidFill>
                 <a:latin typeface="Calibri"/>
               </a:rPr>
-              <a:t>Actividad autonoma — pasos guiados</a:t>
-            </a:r>
-          </a:p>
-        </p:txBody>
-      </p:sp>
-      <p:sp>
-        <p:nvSpPr>
-          <p:cNvPr id="5" name="Rounded Rectangle 4"/>
-          <p:cNvSpPr/>
-          <p:nvPr/>
-        </p:nvSpPr>
-        <p:spPr>
-          <a:xfrm>
-            <a:off x="457200" y="1554480"/>
-            <a:ext cx="11277295" cy="1051560"/>
-          </a:xfrm>
-          <a:prstGeom prst="roundRect">
-            <a:avLst>
-              <a:gd name="adj" fmla="val 12000"/>
-            </a:avLst>
-          </a:prstGeom>
-          <a:solidFill>
-            <a:srgbClr val="F2F2F2"/>
-          </a:solidFill>
-          <a:ln>
-            <a:noFill/>
-          </a:ln>
-        </p:spPr>
-        <p:style>
-          <a:lnRef idx="1">
-            <a:schemeClr val="accent1"/>
-          </a:lnRef>
-          <a:fillRef idx="3">
-            <a:schemeClr val="accent1"/>
-          </a:fillRef>
-          <a:effectRef idx="2">
-            <a:schemeClr val="accent1"/>
-          </a:effectRef>
-          <a:fontRef idx="minor">
-            <a:schemeClr val="lt1"/>
-          </a:fontRef>
-        </p:style>
-        <p:txBody>
-          <a:bodyPr rtlCol="0" anchor="ctr"/>
-          <a:lstStyle/>
-          <a:p>
-            <a:pPr algn="ctr"/>
-          </a:p>
-        </p:txBody>
-      </p:sp>
-      <p:sp>
-        <p:nvSpPr>
-          <p:cNvPr id="6" name="Rounded Rectangle 5"/>
-          <p:cNvSpPr/>
-          <p:nvPr/>
-        </p:nvSpPr>
-        <p:spPr>
-          <a:xfrm>
-            <a:off x="594360" y="1860804"/>
-            <a:ext cx="438912" cy="438912"/>
-          </a:xfrm>
-          <a:prstGeom prst="roundRect">
-            <a:avLst>
-              <a:gd name="adj" fmla="val 12000"/>
-            </a:avLst>
-          </a:prstGeom>
-          <a:solidFill>
-            <a:srgbClr val="095292"/>
-          </a:solidFill>
-          <a:ln>
-            <a:noFill/>
-          </a:ln>
-        </p:spPr>
-        <p:style>
-          <a:lnRef idx="1">
-            <a:schemeClr val="accent1"/>
-          </a:lnRef>
-          <a:fillRef idx="3">
-            <a:schemeClr val="accent1"/>
-          </a:fillRef>
-          <a:effectRef idx="2">
-            <a:schemeClr val="accent1"/>
-          </a:effectRef>
-          <a:fontRef idx="minor">
-            <a:schemeClr val="lt1"/>
-          </a:fontRef>
-        </p:style>
-        <p:txBody>
-          <a:bodyPr rtlCol="0" anchor="ctr"/>
-          <a:lstStyle/>
-          <a:p>
-            <a:pPr algn="ctr"/>
-          </a:p>
-        </p:txBody>
-      </p:sp>
-      <p:sp>
-        <p:nvSpPr>
-          <p:cNvPr id="7" name="TextBox 6"/>
+              <a:t>Caso dos: permisos excesivos (Capital One, 2019) (1/2)</a:t>
+            </a:r>
+          </a:p>
+        </p:txBody>
+      </p:sp>
+      <p:sp>
+        <p:nvSpPr>
+          <p:cNvPr id="5" name="TextBox 4"/>
           <p:cNvSpPr txBox="1"/>
           <p:nvPr/>
         </p:nvSpPr>
         <p:spPr>
           <a:xfrm>
-            <a:off x="594360" y="1860804"/>
-            <a:ext cx="438912" cy="438912"/>
+            <a:off x="457200" y="1170432"/>
+            <a:ext cx="11277295" cy="5230368"/>
           </a:xfrm>
           <a:prstGeom prst="rect">
             <a:avLst/>
@@ -3731,522 +3654,95 @@
           <a:noFill/>
         </p:spPr>
         <p:txBody>
-          <a:bodyPr wrap="square" anchor="ctr"/>
-          <a:lstStyle/>
-          <a:p>
-            <a:pPr algn="ctr"/>
-            <a:r>
-              <a:rPr sz="1600" b="1" i="0">
-                <a:solidFill>
-                  <a:srgbClr val="FFFFFF"/>
-                </a:solidFill>
-                <a:latin typeface="Calibri"/>
-              </a:rPr>
-              <a:t>1</a:t>
-            </a:r>
-          </a:p>
-        </p:txBody>
-      </p:sp>
-      <p:sp>
-        <p:nvSpPr>
-          <p:cNvPr id="8" name="TextBox 7"/>
-          <p:cNvSpPr txBox="1"/>
-          <p:nvPr/>
-        </p:nvSpPr>
-        <p:spPr>
-          <a:xfrm>
-            <a:off x="1188720" y="1645920"/>
-            <a:ext cx="10271455" cy="886968"/>
-          </a:xfrm>
-          <a:prstGeom prst="rect">
-            <a:avLst/>
-          </a:prstGeom>
-          <a:noFill/>
-        </p:spPr>
-        <p:txBody>
-          <a:bodyPr wrap="square" anchor="ctr"/>
-          <a:lstStyle/>
-          <a:p>
-            <a:r>
-              <a:rPr sz="1500" b="1" i="0">
-                <a:solidFill>
-                  <a:srgbClr val="095292"/>
-                </a:solidFill>
-                <a:latin typeface="Calibri"/>
-              </a:rPr>
-              <a:t>Elegir 1 caso (backup, rendimiento o seguridad).</a:t>
-            </a:r>
-          </a:p>
-        </p:txBody>
-      </p:sp>
-      <p:sp>
-        <p:nvSpPr>
-          <p:cNvPr id="9" name="Rounded Rectangle 8"/>
-          <p:cNvSpPr/>
-          <p:nvPr/>
-        </p:nvSpPr>
-        <p:spPr>
-          <a:xfrm>
-            <a:off x="457200" y="2697480"/>
-            <a:ext cx="11277295" cy="1051560"/>
-          </a:xfrm>
-          <a:prstGeom prst="roundRect">
-            <a:avLst>
-              <a:gd name="adj" fmla="val 12000"/>
-            </a:avLst>
-          </a:prstGeom>
-          <a:solidFill>
-            <a:srgbClr val="E8F4FA"/>
-          </a:solidFill>
-          <a:ln>
-            <a:noFill/>
-          </a:ln>
-        </p:spPr>
-        <p:style>
-          <a:lnRef idx="1">
-            <a:schemeClr val="accent1"/>
-          </a:lnRef>
-          <a:fillRef idx="3">
-            <a:schemeClr val="accent1"/>
-          </a:fillRef>
-          <a:effectRef idx="2">
-            <a:schemeClr val="accent1"/>
-          </a:effectRef>
-          <a:fontRef idx="minor">
-            <a:schemeClr val="lt1"/>
-          </a:fontRef>
-        </p:style>
-        <p:txBody>
-          <a:bodyPr rtlCol="0" anchor="ctr"/>
-          <a:lstStyle/>
-          <a:p>
-            <a:pPr algn="ctr"/>
-          </a:p>
-        </p:txBody>
-      </p:sp>
-      <p:sp>
-        <p:nvSpPr>
-          <p:cNvPr id="10" name="Rounded Rectangle 9"/>
-          <p:cNvSpPr/>
-          <p:nvPr/>
-        </p:nvSpPr>
-        <p:spPr>
-          <a:xfrm>
-            <a:off x="594360" y="3003804"/>
-            <a:ext cx="438912" cy="438912"/>
-          </a:xfrm>
-          <a:prstGeom prst="roundRect">
-            <a:avLst>
-              <a:gd name="adj" fmla="val 12000"/>
-            </a:avLst>
-          </a:prstGeom>
-          <a:solidFill>
-            <a:srgbClr val="095292"/>
-          </a:solidFill>
-          <a:ln>
-            <a:noFill/>
-          </a:ln>
-        </p:spPr>
-        <p:style>
-          <a:lnRef idx="1">
-            <a:schemeClr val="accent1"/>
-          </a:lnRef>
-          <a:fillRef idx="3">
-            <a:schemeClr val="accent1"/>
-          </a:fillRef>
-          <a:effectRef idx="2">
-            <a:schemeClr val="accent1"/>
-          </a:effectRef>
-          <a:fontRef idx="minor">
-            <a:schemeClr val="lt1"/>
-          </a:fontRef>
-        </p:style>
-        <p:txBody>
-          <a:bodyPr rtlCol="0" anchor="ctr"/>
-          <a:lstStyle/>
-          <a:p>
-            <a:pPr algn="ctr"/>
-          </a:p>
-        </p:txBody>
-      </p:sp>
-      <p:sp>
-        <p:nvSpPr>
-          <p:cNvPr id="11" name="TextBox 10"/>
-          <p:cNvSpPr txBox="1"/>
-          <p:nvPr/>
-        </p:nvSpPr>
-        <p:spPr>
-          <a:xfrm>
-            <a:off x="594360" y="3003804"/>
-            <a:ext cx="438912" cy="438912"/>
-          </a:xfrm>
-          <a:prstGeom prst="rect">
-            <a:avLst/>
-          </a:prstGeom>
-          <a:noFill/>
-        </p:spPr>
-        <p:txBody>
-          <a:bodyPr wrap="square" anchor="ctr"/>
-          <a:lstStyle/>
-          <a:p>
-            <a:pPr algn="ctr"/>
-            <a:r>
-              <a:rPr sz="1600" b="1" i="0">
-                <a:solidFill>
-                  <a:srgbClr val="FFFFFF"/>
-                </a:solidFill>
-                <a:latin typeface="Calibri"/>
-              </a:rPr>
-              <a:t>2</a:t>
-            </a:r>
-          </a:p>
-        </p:txBody>
-      </p:sp>
-      <p:sp>
-        <p:nvSpPr>
-          <p:cNvPr id="12" name="TextBox 11"/>
-          <p:cNvSpPr txBox="1"/>
-          <p:nvPr/>
-        </p:nvSpPr>
-        <p:spPr>
-          <a:xfrm>
-            <a:off x="1188720" y="2788920"/>
-            <a:ext cx="10271455" cy="886968"/>
-          </a:xfrm>
-          <a:prstGeom prst="rect">
-            <a:avLst/>
-          </a:prstGeom>
-          <a:noFill/>
-        </p:spPr>
-        <p:txBody>
-          <a:bodyPr wrap="square" anchor="ctr"/>
-          <a:lstStyle/>
-          <a:p>
-            <a:r>
-              <a:rPr sz="1500" b="1" i="0">
-                <a:solidFill>
-                  <a:srgbClr val="095292"/>
-                </a:solidFill>
-                <a:latin typeface="Calibri"/>
-              </a:rPr>
-              <a:t>Resumir en media pagina que paso.</a:t>
-            </a:r>
-          </a:p>
-        </p:txBody>
-      </p:sp>
-      <p:sp>
-        <p:nvSpPr>
-          <p:cNvPr id="13" name="Rounded Rectangle 12"/>
-          <p:cNvSpPr/>
-          <p:nvPr/>
-        </p:nvSpPr>
-        <p:spPr>
-          <a:xfrm>
-            <a:off x="457200" y="3840480"/>
-            <a:ext cx="11277295" cy="1051560"/>
-          </a:xfrm>
-          <a:prstGeom prst="roundRect">
-            <a:avLst>
-              <a:gd name="adj" fmla="val 12000"/>
-            </a:avLst>
-          </a:prstGeom>
-          <a:solidFill>
-            <a:srgbClr val="F2F2F2"/>
-          </a:solidFill>
-          <a:ln>
-            <a:noFill/>
-          </a:ln>
-        </p:spPr>
-        <p:style>
-          <a:lnRef idx="1">
-            <a:schemeClr val="accent1"/>
-          </a:lnRef>
-          <a:fillRef idx="3">
-            <a:schemeClr val="accent1"/>
-          </a:fillRef>
-          <a:effectRef idx="2">
-            <a:schemeClr val="accent1"/>
-          </a:effectRef>
-          <a:fontRef idx="minor">
-            <a:schemeClr val="lt1"/>
-          </a:fontRef>
-        </p:style>
-        <p:txBody>
-          <a:bodyPr rtlCol="0" anchor="ctr"/>
-          <a:lstStyle/>
-          <a:p>
-            <a:pPr algn="ctr"/>
-          </a:p>
-        </p:txBody>
-      </p:sp>
-      <p:sp>
-        <p:nvSpPr>
-          <p:cNvPr id="14" name="Rounded Rectangle 13"/>
-          <p:cNvSpPr/>
-          <p:nvPr/>
-        </p:nvSpPr>
-        <p:spPr>
-          <a:xfrm>
-            <a:off x="594360" y="4146804"/>
-            <a:ext cx="438912" cy="438912"/>
-          </a:xfrm>
-          <a:prstGeom prst="roundRect">
-            <a:avLst>
-              <a:gd name="adj" fmla="val 12000"/>
-            </a:avLst>
-          </a:prstGeom>
-          <a:solidFill>
-            <a:srgbClr val="095292"/>
-          </a:solidFill>
-          <a:ln>
-            <a:noFill/>
-          </a:ln>
-        </p:spPr>
-        <p:style>
-          <a:lnRef idx="1">
-            <a:schemeClr val="accent1"/>
-          </a:lnRef>
-          <a:fillRef idx="3">
-            <a:schemeClr val="accent1"/>
-          </a:fillRef>
-          <a:effectRef idx="2">
-            <a:schemeClr val="accent1"/>
-          </a:effectRef>
-          <a:fontRef idx="minor">
-            <a:schemeClr val="lt1"/>
-          </a:fontRef>
-        </p:style>
-        <p:txBody>
-          <a:bodyPr rtlCol="0" anchor="ctr"/>
-          <a:lstStyle/>
-          <a:p>
-            <a:pPr algn="ctr"/>
-          </a:p>
-        </p:txBody>
-      </p:sp>
-      <p:sp>
-        <p:nvSpPr>
-          <p:cNvPr id="15" name="TextBox 14"/>
-          <p:cNvSpPr txBox="1"/>
-          <p:nvPr/>
-        </p:nvSpPr>
-        <p:spPr>
-          <a:xfrm>
-            <a:off x="594360" y="4146804"/>
-            <a:ext cx="438912" cy="438912"/>
-          </a:xfrm>
-          <a:prstGeom prst="rect">
-            <a:avLst/>
-          </a:prstGeom>
-          <a:noFill/>
-        </p:spPr>
-        <p:txBody>
-          <a:bodyPr wrap="square" anchor="ctr"/>
-          <a:lstStyle/>
-          <a:p>
-            <a:pPr algn="ctr"/>
-            <a:r>
-              <a:rPr sz="1600" b="1" i="0">
-                <a:solidFill>
-                  <a:srgbClr val="FFFFFF"/>
-                </a:solidFill>
-                <a:latin typeface="Calibri"/>
-              </a:rPr>
-              <a:t>3</a:t>
-            </a:r>
-          </a:p>
-        </p:txBody>
-      </p:sp>
-      <p:sp>
-        <p:nvSpPr>
-          <p:cNvPr id="16" name="TextBox 15"/>
-          <p:cNvSpPr txBox="1"/>
-          <p:nvPr/>
-        </p:nvSpPr>
-        <p:spPr>
-          <a:xfrm>
-            <a:off x="1188720" y="3931920"/>
-            <a:ext cx="10271455" cy="886968"/>
-          </a:xfrm>
-          <a:prstGeom prst="rect">
-            <a:avLst/>
-          </a:prstGeom>
-          <a:noFill/>
-        </p:spPr>
-        <p:txBody>
-          <a:bodyPr wrap="square" anchor="ctr"/>
-          <a:lstStyle/>
-          <a:p>
-            <a:r>
-              <a:rPr sz="1500" b="1" i="0">
-                <a:solidFill>
-                  <a:srgbClr val="095292"/>
-                </a:solidFill>
-                <a:latin typeface="Calibri"/>
-              </a:rPr>
-              <a:t>Proponer 3 mejoras concretas a su VetCare.</a:t>
-            </a:r>
-          </a:p>
-        </p:txBody>
-      </p:sp>
-      <p:sp>
-        <p:nvSpPr>
-          <p:cNvPr id="17" name="Rounded Rectangle 16"/>
-          <p:cNvSpPr/>
-          <p:nvPr/>
-        </p:nvSpPr>
-        <p:spPr>
-          <a:xfrm>
-            <a:off x="457200" y="4983480"/>
-            <a:ext cx="11277295" cy="1051560"/>
-          </a:xfrm>
-          <a:prstGeom prst="roundRect">
-            <a:avLst>
-              <a:gd name="adj" fmla="val 12000"/>
-            </a:avLst>
-          </a:prstGeom>
-          <a:solidFill>
-            <a:srgbClr val="E8F4FA"/>
-          </a:solidFill>
-          <a:ln>
-            <a:noFill/>
-          </a:ln>
-        </p:spPr>
-        <p:style>
-          <a:lnRef idx="1">
-            <a:schemeClr val="accent1"/>
-          </a:lnRef>
-          <a:fillRef idx="3">
-            <a:schemeClr val="accent1"/>
-          </a:fillRef>
-          <a:effectRef idx="2">
-            <a:schemeClr val="accent1"/>
-          </a:effectRef>
-          <a:fontRef idx="minor">
-            <a:schemeClr val="lt1"/>
-          </a:fontRef>
-        </p:style>
-        <p:txBody>
-          <a:bodyPr rtlCol="0" anchor="ctr"/>
-          <a:lstStyle/>
-          <a:p>
-            <a:pPr algn="ctr"/>
-          </a:p>
-        </p:txBody>
-      </p:sp>
-      <p:sp>
-        <p:nvSpPr>
-          <p:cNvPr id="18" name="Rounded Rectangle 17"/>
-          <p:cNvSpPr/>
-          <p:nvPr/>
-        </p:nvSpPr>
-        <p:spPr>
-          <a:xfrm>
-            <a:off x="594360" y="5289804"/>
-            <a:ext cx="438912" cy="438912"/>
-          </a:xfrm>
-          <a:prstGeom prst="roundRect">
-            <a:avLst>
-              <a:gd name="adj" fmla="val 12000"/>
-            </a:avLst>
-          </a:prstGeom>
-          <a:solidFill>
-            <a:srgbClr val="095292"/>
-          </a:solidFill>
-          <a:ln>
-            <a:noFill/>
-          </a:ln>
-        </p:spPr>
-        <p:style>
-          <a:lnRef idx="1">
-            <a:schemeClr val="accent1"/>
-          </a:lnRef>
-          <a:fillRef idx="3">
-            <a:schemeClr val="accent1"/>
-          </a:fillRef>
-          <a:effectRef idx="2">
-            <a:schemeClr val="accent1"/>
-          </a:effectRef>
-          <a:fontRef idx="minor">
-            <a:schemeClr val="lt1"/>
-          </a:fontRef>
-        </p:style>
-        <p:txBody>
-          <a:bodyPr rtlCol="0" anchor="ctr"/>
-          <a:lstStyle/>
-          <a:p>
-            <a:pPr algn="ctr"/>
-          </a:p>
-        </p:txBody>
-      </p:sp>
-      <p:sp>
-        <p:nvSpPr>
-          <p:cNvPr id="19" name="TextBox 18"/>
-          <p:cNvSpPr txBox="1"/>
-          <p:nvPr/>
-        </p:nvSpPr>
-        <p:spPr>
-          <a:xfrm>
-            <a:off x="594360" y="5289804"/>
-            <a:ext cx="438912" cy="438912"/>
-          </a:xfrm>
-          <a:prstGeom prst="rect">
-            <a:avLst/>
-          </a:prstGeom>
-          <a:noFill/>
-        </p:spPr>
-        <p:txBody>
-          <a:bodyPr wrap="square" anchor="ctr"/>
-          <a:lstStyle/>
-          <a:p>
-            <a:pPr algn="ctr"/>
-            <a:r>
-              <a:rPr sz="1600" b="1" i="0">
-                <a:solidFill>
-                  <a:srgbClr val="FFFFFF"/>
-                </a:solidFill>
-                <a:latin typeface="Calibri"/>
-              </a:rPr>
-              <a:t>4</a:t>
-            </a:r>
-          </a:p>
-        </p:txBody>
-      </p:sp>
-      <p:sp>
-        <p:nvSpPr>
-          <p:cNvPr id="20" name="TextBox 19"/>
-          <p:cNvSpPr txBox="1"/>
-          <p:nvPr/>
-        </p:nvSpPr>
-        <p:spPr>
-          <a:xfrm>
-            <a:off x="1188720" y="5074920"/>
-            <a:ext cx="10271455" cy="886968"/>
-          </a:xfrm>
-          <a:prstGeom prst="rect">
-            <a:avLst/>
-          </a:prstGeom>
-          <a:noFill/>
-        </p:spPr>
-        <p:txBody>
-          <a:bodyPr wrap="square" anchor="ctr"/>
-          <a:lstStyle/>
-          <a:p>
-            <a:r>
-              <a:rPr sz="1500" b="1" i="0">
-                <a:solidFill>
-                  <a:srgbClr val="095292"/>
-                </a:solidFill>
-                <a:latin typeface="Calibri"/>
-              </a:rPr>
-              <a:t>Actualizar informe PI con lecciones de casos.</a:t>
-            </a:r>
-          </a:p>
-        </p:txBody>
-      </p:sp>
-      <p:sp>
-        <p:nvSpPr>
-          <p:cNvPr id="21" name="TextBox 20"/>
+          <a:bodyPr wrap="square">
+            <a:spAutoFit/>
+          </a:bodyPr>
+          <a:lstStyle/>
+          <a:p>
+            <a:pPr>
+              <a:spcAft>
+                <a:spcPts val="800"/>
+              </a:spcAft>
+            </a:pPr>
+            <a:r>
+              <a:rPr sz="2000" b="0" i="0">
+                <a:solidFill>
+                  <a:srgbClr val="333333"/>
+                </a:solidFill>
+                <a:latin typeface="Calibri"/>
+              </a:rPr>
+              <a:t>–   Caso dos, permisos excesivos.</a:t>
+            </a:r>
+          </a:p>
+          <a:p>
+            <a:pPr>
+              <a:spcAft>
+                <a:spcPts val="800"/>
+              </a:spcAft>
+            </a:pPr>
+            <a:r>
+              <a:rPr sz="2000" b="0" i="0">
+                <a:solidFill>
+                  <a:srgbClr val="333333"/>
+                </a:solidFill>
+                <a:latin typeface="Calibri"/>
+              </a:rPr>
+              <a:t>–   En julio de 2019 Capital One informo un acceso no autorizado que afecto informacion de aproximadamente cien millones de personas en Estados Unidos y varios millones en Canada, incluyendo solicitudes de credito.</a:t>
+            </a:r>
+          </a:p>
+          <a:p>
+            <a:pPr>
+              <a:spcAft>
+                <a:spcPts val="800"/>
+              </a:spcAft>
+            </a:pPr>
+            <a:r>
+              <a:rPr sz="2000" b="0" i="0">
+                <a:solidFill>
+                  <a:srgbClr val="333333"/>
+                </a:solidFill>
+                <a:latin typeface="Calibri"/>
+              </a:rPr>
+              <a:t>–   La cadena tecnica publicada es instructiva porque no hubo ninguna hazana: una configuracion incorrecta en un cortafuegos de aplicaciones permitio que se le hiciera hacer peticiones internas en nombre del servidor, con eso se obtuvieron credenciales temporales de un rol de servicio</a:t>
+            </a:r>
+          </a:p>
+          <a:p>
+            <a:pPr>
+              <a:spcAft>
+                <a:spcPts val="800"/>
+              </a:spcAft>
+            </a:pPr>
+            <a:r>
+              <a:rPr sz="2000" b="0" i="0">
+                <a:solidFill>
+                  <a:srgbClr val="333333"/>
+                </a:solidFill>
+                <a:latin typeface="Calibri"/>
+              </a:rPr>
+              <a:t>–   Y ese rol tenia permiso para listar y leer todos los buckets de almacenamiento, muchos mas de los que necesitaba para su trabajo.</a:t>
+            </a:r>
+          </a:p>
+          <a:p>
+            <a:pPr>
+              <a:spcAft>
+                <a:spcPts val="800"/>
+              </a:spcAft>
+            </a:pPr>
+            <a:r>
+              <a:rPr sz="2000" b="0" i="0">
+                <a:solidFill>
+                  <a:srgbClr val="333333"/>
+                </a:solidFill>
+                <a:latin typeface="Calibri"/>
+              </a:rPr>
+              <a:t>–   El regulador bancario estadounidense impuso una multa de ochenta millones de dolares en 2020.</a:t>
+            </a:r>
+          </a:p>
+        </p:txBody>
+      </p:sp>
+      <p:sp>
+        <p:nvSpPr>
+          <p:cNvPr id="6" name="TextBox 5"/>
           <p:cNvSpPr txBox="1"/>
           <p:nvPr/>
         </p:nvSpPr>
@@ -4420,154 +3916,21 @@
                 </a:solidFill>
                 <a:latin typeface="Calibri"/>
               </a:rPr>
-              <a:t>Actividad autonoma — pistas (checklist vacio)</a:t>
-            </a:r>
-          </a:p>
-        </p:txBody>
-      </p:sp>
-      <p:sp>
-        <p:nvSpPr>
-          <p:cNvPr id="5" name="Rounded Rectangle 4"/>
-          <p:cNvSpPr/>
-          <p:nvPr/>
-        </p:nvSpPr>
-        <p:spPr>
-          <a:xfrm>
-            <a:off x="457200" y="1261872"/>
-            <a:ext cx="11277295" cy="566928"/>
-          </a:xfrm>
-          <a:prstGeom prst="roundRect">
-            <a:avLst>
-              <a:gd name="adj" fmla="val 12000"/>
-            </a:avLst>
-          </a:prstGeom>
-          <a:solidFill>
-            <a:srgbClr val="F2F2F2"/>
-          </a:solidFill>
-          <a:ln>
-            <a:noFill/>
-          </a:ln>
-        </p:spPr>
-        <p:style>
-          <a:lnRef idx="1">
-            <a:schemeClr val="accent1"/>
-          </a:lnRef>
-          <a:fillRef idx="3">
-            <a:schemeClr val="accent1"/>
-          </a:fillRef>
-          <a:effectRef idx="2">
-            <a:schemeClr val="accent1"/>
-          </a:effectRef>
-          <a:fontRef idx="minor">
-            <a:schemeClr val="lt1"/>
-          </a:fontRef>
-        </p:style>
-        <p:txBody>
-          <a:bodyPr rtlCol="0" anchor="ctr"/>
-          <a:lstStyle/>
-          <a:p>
-            <a:pPr algn="ctr"/>
-          </a:p>
-        </p:txBody>
-      </p:sp>
-      <p:sp>
-        <p:nvSpPr>
-          <p:cNvPr id="6" name="Rectangle 5"/>
-          <p:cNvSpPr/>
-          <p:nvPr/>
-        </p:nvSpPr>
-        <p:spPr>
-          <a:xfrm>
-            <a:off x="640080" y="1408175"/>
-            <a:ext cx="274320" cy="274320"/>
-          </a:xfrm>
-          <a:prstGeom prst="rect">
-            <a:avLst/>
-          </a:prstGeom>
-          <a:solidFill>
-            <a:srgbClr val="FFFFFF"/>
-          </a:solidFill>
-          <a:ln>
-            <a:solidFill>
-              <a:srgbClr val="333333"/>
-            </a:solidFill>
-          </a:ln>
-        </p:spPr>
-        <p:style>
-          <a:lnRef idx="1">
-            <a:schemeClr val="accent1"/>
-          </a:lnRef>
-          <a:fillRef idx="3">
-            <a:schemeClr val="accent1"/>
-          </a:fillRef>
-          <a:effectRef idx="2">
-            <a:schemeClr val="accent1"/>
-          </a:effectRef>
-          <a:fontRef idx="minor">
-            <a:schemeClr val="lt1"/>
-          </a:fontRef>
-        </p:style>
-        <p:txBody>
-          <a:bodyPr rtlCol="0" anchor="ctr"/>
-          <a:lstStyle/>
-          <a:p>
-            <a:pPr algn="ctr"/>
-          </a:p>
-        </p:txBody>
-      </p:sp>
-      <p:sp>
-        <p:nvSpPr>
-          <p:cNvPr id="7" name="Rectangle 6"/>
-          <p:cNvSpPr/>
-          <p:nvPr/>
-        </p:nvSpPr>
-        <p:spPr>
-          <a:xfrm>
-            <a:off x="640080" y="1408175"/>
-            <a:ext cx="73152" cy="274320"/>
-          </a:xfrm>
-          <a:prstGeom prst="rect">
-            <a:avLst/>
-          </a:prstGeom>
-          <a:solidFill>
-            <a:srgbClr val="269CCB"/>
-          </a:solidFill>
-          <a:ln>
-            <a:noFill/>
-          </a:ln>
-        </p:spPr>
-        <p:style>
-          <a:lnRef idx="1">
-            <a:schemeClr val="accent1"/>
-          </a:lnRef>
-          <a:fillRef idx="3">
-            <a:schemeClr val="accent1"/>
-          </a:fillRef>
-          <a:effectRef idx="2">
-            <a:schemeClr val="accent1"/>
-          </a:effectRef>
-          <a:fontRef idx="minor">
-            <a:schemeClr val="lt1"/>
-          </a:fontRef>
-        </p:style>
-        <p:txBody>
-          <a:bodyPr rtlCol="0" anchor="ctr"/>
-          <a:lstStyle/>
-          <a:p>
-            <a:pPr algn="ctr"/>
-          </a:p>
-        </p:txBody>
-      </p:sp>
-      <p:sp>
-        <p:nvSpPr>
-          <p:cNvPr id="8" name="TextBox 7"/>
+              <a:t>Caso dos: permisos excesivos (Capital One, 2019) (2/2)</a:t>
+            </a:r>
+          </a:p>
+        </p:txBody>
+      </p:sp>
+      <p:sp>
+        <p:nvSpPr>
+          <p:cNvPr id="5" name="TextBox 4"/>
           <p:cNvSpPr txBox="1"/>
           <p:nvPr/>
         </p:nvSpPr>
         <p:spPr>
           <a:xfrm>
-            <a:off x="1097280" y="1353312"/>
-            <a:ext cx="10362895" cy="402336"/>
+            <a:off x="457200" y="1170432"/>
+            <a:ext cx="11277295" cy="5230368"/>
           </a:xfrm>
           <a:prstGeom prst="rect">
             <a:avLst/>
@@ -4575,354 +3938,79 @@
           <a:noFill/>
         </p:spPr>
         <p:txBody>
-          <a:bodyPr wrap="square" anchor="ctr"/>
-          <a:lstStyle/>
-          <a:p>
-            <a:r>
-              <a:rPr sz="1500" b="0" i="0">
-                <a:solidFill>
-                  <a:srgbClr val="333333"/>
-                </a:solidFill>
-                <a:latin typeface="Calibri"/>
-              </a:rPr>
-              <a:t>□ Mejoras accionables?</a:t>
-            </a:r>
-          </a:p>
-        </p:txBody>
-      </p:sp>
-      <p:sp>
-        <p:nvSpPr>
-          <p:cNvPr id="9" name="Rounded Rectangle 8"/>
-          <p:cNvSpPr/>
-          <p:nvPr/>
-        </p:nvSpPr>
-        <p:spPr>
-          <a:xfrm>
-            <a:off x="457200" y="1938528"/>
-            <a:ext cx="11277295" cy="566928"/>
-          </a:xfrm>
-          <a:prstGeom prst="roundRect">
-            <a:avLst>
-              <a:gd name="adj" fmla="val 12000"/>
-            </a:avLst>
-          </a:prstGeom>
-          <a:solidFill>
-            <a:srgbClr val="F2F2F2"/>
-          </a:solidFill>
-          <a:ln>
-            <a:noFill/>
-          </a:ln>
-        </p:spPr>
-        <p:style>
-          <a:lnRef idx="1">
-            <a:schemeClr val="accent1"/>
-          </a:lnRef>
-          <a:fillRef idx="3">
-            <a:schemeClr val="accent1"/>
-          </a:fillRef>
-          <a:effectRef idx="2">
-            <a:schemeClr val="accent1"/>
-          </a:effectRef>
-          <a:fontRef idx="minor">
-            <a:schemeClr val="lt1"/>
-          </a:fontRef>
-        </p:style>
-        <p:txBody>
-          <a:bodyPr rtlCol="0" anchor="ctr"/>
-          <a:lstStyle/>
-          <a:p>
-            <a:pPr algn="ctr"/>
-          </a:p>
-        </p:txBody>
-      </p:sp>
-      <p:sp>
-        <p:nvSpPr>
-          <p:cNvPr id="10" name="Rectangle 9"/>
-          <p:cNvSpPr/>
-          <p:nvPr/>
-        </p:nvSpPr>
-        <p:spPr>
-          <a:xfrm>
-            <a:off x="640080" y="2084832"/>
-            <a:ext cx="274320" cy="274320"/>
-          </a:xfrm>
-          <a:prstGeom prst="rect">
-            <a:avLst/>
-          </a:prstGeom>
-          <a:solidFill>
-            <a:srgbClr val="FFFFFF"/>
-          </a:solidFill>
-          <a:ln>
-            <a:solidFill>
-              <a:srgbClr val="333333"/>
-            </a:solidFill>
-          </a:ln>
-        </p:spPr>
-        <p:style>
-          <a:lnRef idx="1">
-            <a:schemeClr val="accent1"/>
-          </a:lnRef>
-          <a:fillRef idx="3">
-            <a:schemeClr val="accent1"/>
-          </a:fillRef>
-          <a:effectRef idx="2">
-            <a:schemeClr val="accent1"/>
-          </a:effectRef>
-          <a:fontRef idx="minor">
-            <a:schemeClr val="lt1"/>
-          </a:fontRef>
-        </p:style>
-        <p:txBody>
-          <a:bodyPr rtlCol="0" anchor="ctr"/>
-          <a:lstStyle/>
-          <a:p>
-            <a:pPr algn="ctr"/>
-          </a:p>
-        </p:txBody>
-      </p:sp>
-      <p:sp>
-        <p:nvSpPr>
-          <p:cNvPr id="11" name="Rectangle 10"/>
-          <p:cNvSpPr/>
-          <p:nvPr/>
-        </p:nvSpPr>
-        <p:spPr>
-          <a:xfrm>
-            <a:off x="640080" y="2084832"/>
-            <a:ext cx="73152" cy="274320"/>
-          </a:xfrm>
-          <a:prstGeom prst="rect">
-            <a:avLst/>
-          </a:prstGeom>
-          <a:solidFill>
-            <a:srgbClr val="269CCB"/>
-          </a:solidFill>
-          <a:ln>
-            <a:noFill/>
-          </a:ln>
-        </p:spPr>
-        <p:style>
-          <a:lnRef idx="1">
-            <a:schemeClr val="accent1"/>
-          </a:lnRef>
-          <a:fillRef idx="3">
-            <a:schemeClr val="accent1"/>
-          </a:fillRef>
-          <a:effectRef idx="2">
-            <a:schemeClr val="accent1"/>
-          </a:effectRef>
-          <a:fontRef idx="minor">
-            <a:schemeClr val="lt1"/>
-          </a:fontRef>
-        </p:style>
-        <p:txBody>
-          <a:bodyPr rtlCol="0" anchor="ctr"/>
-          <a:lstStyle/>
-          <a:p>
-            <a:pPr algn="ctr"/>
-          </a:p>
-        </p:txBody>
-      </p:sp>
-      <p:sp>
-        <p:nvSpPr>
-          <p:cNvPr id="12" name="TextBox 11"/>
-          <p:cNvSpPr txBox="1"/>
-          <p:nvPr/>
-        </p:nvSpPr>
-        <p:spPr>
-          <a:xfrm>
-            <a:off x="1097280" y="2029968"/>
-            <a:ext cx="10362895" cy="402336"/>
-          </a:xfrm>
-          <a:prstGeom prst="rect">
-            <a:avLst/>
-          </a:prstGeom>
-          <a:noFill/>
-        </p:spPr>
-        <p:txBody>
-          <a:bodyPr wrap="square" anchor="ctr"/>
-          <a:lstStyle/>
-          <a:p>
-            <a:r>
-              <a:rPr sz="1500" b="0" i="0">
-                <a:solidFill>
-                  <a:srgbClr val="333333"/>
-                </a:solidFill>
-                <a:latin typeface="Calibri"/>
-              </a:rPr>
-              <a:t>□ Conectan al PI?</a:t>
-            </a:r>
-          </a:p>
-        </p:txBody>
-      </p:sp>
-      <p:sp>
-        <p:nvSpPr>
-          <p:cNvPr id="13" name="Rounded Rectangle 12"/>
-          <p:cNvSpPr/>
-          <p:nvPr/>
-        </p:nvSpPr>
-        <p:spPr>
-          <a:xfrm>
-            <a:off x="457200" y="2615184"/>
-            <a:ext cx="11277295" cy="566928"/>
-          </a:xfrm>
-          <a:prstGeom prst="roundRect">
-            <a:avLst>
-              <a:gd name="adj" fmla="val 12000"/>
-            </a:avLst>
-          </a:prstGeom>
-          <a:solidFill>
-            <a:srgbClr val="F2F2F2"/>
-          </a:solidFill>
-          <a:ln>
-            <a:noFill/>
-          </a:ln>
-        </p:spPr>
-        <p:style>
-          <a:lnRef idx="1">
-            <a:schemeClr val="accent1"/>
-          </a:lnRef>
-          <a:fillRef idx="3">
-            <a:schemeClr val="accent1"/>
-          </a:fillRef>
-          <a:effectRef idx="2">
-            <a:schemeClr val="accent1"/>
-          </a:effectRef>
-          <a:fontRef idx="minor">
-            <a:schemeClr val="lt1"/>
-          </a:fontRef>
-        </p:style>
-        <p:txBody>
-          <a:bodyPr rtlCol="0" anchor="ctr"/>
-          <a:lstStyle/>
-          <a:p>
-            <a:pPr algn="ctr"/>
-          </a:p>
-        </p:txBody>
-      </p:sp>
-      <p:sp>
-        <p:nvSpPr>
-          <p:cNvPr id="14" name="Rectangle 13"/>
-          <p:cNvSpPr/>
-          <p:nvPr/>
-        </p:nvSpPr>
-        <p:spPr>
-          <a:xfrm>
-            <a:off x="640080" y="2761488"/>
-            <a:ext cx="274320" cy="274320"/>
-          </a:xfrm>
-          <a:prstGeom prst="rect">
-            <a:avLst/>
-          </a:prstGeom>
-          <a:solidFill>
-            <a:srgbClr val="FFFFFF"/>
-          </a:solidFill>
-          <a:ln>
-            <a:solidFill>
-              <a:srgbClr val="333333"/>
-            </a:solidFill>
-          </a:ln>
-        </p:spPr>
-        <p:style>
-          <a:lnRef idx="1">
-            <a:schemeClr val="accent1"/>
-          </a:lnRef>
-          <a:fillRef idx="3">
-            <a:schemeClr val="accent1"/>
-          </a:fillRef>
-          <a:effectRef idx="2">
-            <a:schemeClr val="accent1"/>
-          </a:effectRef>
-          <a:fontRef idx="minor">
-            <a:schemeClr val="lt1"/>
-          </a:fontRef>
-        </p:style>
-        <p:txBody>
-          <a:bodyPr rtlCol="0" anchor="ctr"/>
-          <a:lstStyle/>
-          <a:p>
-            <a:pPr algn="ctr"/>
-          </a:p>
-        </p:txBody>
-      </p:sp>
-      <p:sp>
-        <p:nvSpPr>
-          <p:cNvPr id="15" name="Rectangle 14"/>
-          <p:cNvSpPr/>
-          <p:nvPr/>
-        </p:nvSpPr>
-        <p:spPr>
-          <a:xfrm>
-            <a:off x="640080" y="2761488"/>
-            <a:ext cx="73152" cy="274320"/>
-          </a:xfrm>
-          <a:prstGeom prst="rect">
-            <a:avLst/>
-          </a:prstGeom>
-          <a:solidFill>
-            <a:srgbClr val="269CCB"/>
-          </a:solidFill>
-          <a:ln>
-            <a:noFill/>
-          </a:ln>
-        </p:spPr>
-        <p:style>
-          <a:lnRef idx="1">
-            <a:schemeClr val="accent1"/>
-          </a:lnRef>
-          <a:fillRef idx="3">
-            <a:schemeClr val="accent1"/>
-          </a:fillRef>
-          <a:effectRef idx="2">
-            <a:schemeClr val="accent1"/>
-          </a:effectRef>
-          <a:fontRef idx="minor">
-            <a:schemeClr val="lt1"/>
-          </a:fontRef>
-        </p:style>
-        <p:txBody>
-          <a:bodyPr rtlCol="0" anchor="ctr"/>
-          <a:lstStyle/>
-          <a:p>
-            <a:pPr algn="ctr"/>
-          </a:p>
-        </p:txBody>
-      </p:sp>
-      <p:sp>
-        <p:nvSpPr>
-          <p:cNvPr id="16" name="TextBox 15"/>
-          <p:cNvSpPr txBox="1"/>
-          <p:nvPr/>
-        </p:nvSpPr>
-        <p:spPr>
-          <a:xfrm>
-            <a:off x="1097280" y="2706624"/>
-            <a:ext cx="10362895" cy="402336"/>
-          </a:xfrm>
-          <a:prstGeom prst="rect">
-            <a:avLst/>
-          </a:prstGeom>
-          <a:noFill/>
-        </p:spPr>
-        <p:txBody>
-          <a:bodyPr wrap="square" anchor="ctr"/>
-          <a:lstStyle/>
-          <a:p>
-            <a:r>
-              <a:rPr sz="1500" b="0" i="0">
-                <a:solidFill>
-                  <a:srgbClr val="333333"/>
-                </a:solidFill>
-                <a:latin typeface="Calibri"/>
-              </a:rPr>
-              <a:t>□ Evidencia de lectura?</a:t>
-            </a:r>
-          </a:p>
-        </p:txBody>
-      </p:sp>
-      <p:sp>
-        <p:nvSpPr>
-          <p:cNvPr id="17" name="TextBox 16"/>
+          <a:bodyPr wrap="square">
+            <a:spAutoFit/>
+          </a:bodyPr>
+          <a:lstStyle/>
+          <a:p>
+            <a:pPr>
+              <a:spcAft>
+                <a:spcPts val="800"/>
+              </a:spcAft>
+            </a:pPr>
+            <a:r>
+              <a:rPr sz="2000" b="0" i="0">
+                <a:solidFill>
+                  <a:srgbClr val="333333"/>
+                </a:solidFill>
+                <a:latin typeface="Calibri"/>
+              </a:rPr>
+              <a:t>–   La causa proxima es la mala configuracion del cortafuegos; la causa raiz es que un componente tenia privilegios mucho mayores que su funcion.</a:t>
+            </a:r>
+          </a:p>
+          <a:p>
+            <a:pPr>
+              <a:spcAft>
+                <a:spcPts val="800"/>
+              </a:spcAft>
+            </a:pPr>
+            <a:r>
+              <a:rPr sz="2000" b="0" i="0">
+                <a:solidFill>
+                  <a:srgbClr val="333333"/>
+                </a:solidFill>
+                <a:latin typeface="Calibri"/>
+              </a:rPr>
+              <a:t>–   La leccion, en el vocabulario de la Clase 2, es el principio de privilegio minimo: cada actor recibe exactamente los permisos que necesita para su tarea y nada mas.</a:t>
+            </a:r>
+          </a:p>
+          <a:p>
+            <a:pPr>
+              <a:spcAft>
+                <a:spcPts val="800"/>
+              </a:spcAft>
+            </a:pPr>
+            <a:r>
+              <a:rPr sz="2000" b="0" i="0">
+                <a:solidFill>
+                  <a:srgbClr val="333333"/>
+                </a:solidFill>
+                <a:latin typeface="Calibri"/>
+              </a:rPr>
+              <a:t>–   Y hay que decir la parte incomoda, porque es la que se repite en los proyectos de curso: casi todos los estudiantes hacen que la aplicacion se conecte con un usuario que tiene todo, porque asi nunca aparece un error de permisos y se avanza mas rapido.</a:t>
+            </a:r>
+          </a:p>
+          <a:p>
+            <a:pPr>
+              <a:spcAft>
+                <a:spcPts val="800"/>
+              </a:spcAft>
+            </a:pPr>
+            <a:r>
+              <a:rPr sz="2000" b="0" i="0">
+                <a:solidFill>
+                  <a:srgbClr val="333333"/>
+                </a:solidFill>
+                <a:latin typeface="Calibri"/>
+              </a:rPr>
+              <a:t>–   Ese atajo es exactamente el que convierte una vulnerabilidad menor en una fuga total.</a:t>
+            </a:r>
+          </a:p>
+        </p:txBody>
+      </p:sp>
+      <p:sp>
+        <p:nvSpPr>
+          <p:cNvPr id="6" name="TextBox 5"/>
           <p:cNvSpPr txBox="1"/>
           <p:nvPr/>
         </p:nvSpPr>
@@ -5096,7 +4184,7 @@
                 </a:solidFill>
                 <a:latin typeface="Calibri"/>
               </a:rPr>
-              <a:t>Criterios de exito / entregable</a:t>
+              <a:t>Caso tres: perdida de datos en una migracion (MySpace, 2019) (1/2)</a:t>
             </a:r>
           </a:p>
         </p:txBody>
@@ -5135,25 +4223,7 @@
                 </a:solidFill>
                 <a:latin typeface="Calibri"/>
               </a:rPr>
-              <a:t>–   </a:t>
-            </a:r>
-            <a:r>
-              <a:rPr sz="2000" b="1" i="0">
-                <a:solidFill>
-                  <a:srgbClr val="333333"/>
-                </a:solidFill>
-                <a:latin typeface="Calibri"/>
-              </a:rPr>
-              <a:t>Entregable:</a:t>
-            </a:r>
-            <a:r>
-              <a:rPr sz="2000" b="0" i="0">
-                <a:solidFill>
-                  <a:srgbClr val="333333"/>
-                </a:solidFill>
-                <a:latin typeface="Calibri"/>
-              </a:rPr>
-              <a:t> Informe 1-2 pag.: caso + 3 mejoras aplicables a VetCare</a:t>
+              <a:t>–   Caso tres, perdida de datos durante una migracion.</a:t>
             </a:r>
           </a:p>
           <a:p>
@@ -5169,7 +4239,7 @@
                 </a:solidFill>
                 <a:latin typeface="Calibri"/>
               </a:rPr>
-              <a:t>–   Evidencia: el SQL y su salida quedan guardados en cada pregunta de la plataforma del curso.</a:t>
+              <a:t>–   En marzo de 2019 MySpace reconocio que habia perdido la musica subida a la plataforma entre 2003 y 2015, del orden de cincuenta millones de archivos de unos catorce millones de artistas, durante una migracion de servidores</a:t>
             </a:r>
           </a:p>
           <a:p>
@@ -5185,7 +4255,7 @@
                 </a:solidFill>
                 <a:latin typeface="Calibri"/>
               </a:rPr>
-              <a:t>–   Conserva copia en tu carpeta del PI (los .sql que pide el entregable).</a:t>
+              <a:t>–   No hubo ataque ni desastre natural, solo una migracion sin copia verificada de la que ya no se podia volver atras.</a:t>
             </a:r>
           </a:p>
           <a:p>
@@ -5201,7 +4271,7 @@
                 </a:solidFill>
                 <a:latin typeface="Calibri"/>
               </a:rPr>
-              <a:t>–   Actualizar checklist PI (que criterio de rubrica avanzo).</a:t>
+              <a:t>–   En la banca hay un caso paralelo y bien documentado con el sistema de TSB en Reino Unido en 2018, donde el paso a una plataforma nueva dejo a millones de clientes sin acceso confiable durante semanas</a:t>
             </a:r>
           </a:p>
           <a:p>
@@ -5217,25 +4287,7 @@
                 </a:solidFill>
                 <a:latin typeface="Calibri"/>
               </a:rPr>
-              <a:t>–   </a:t>
-            </a:r>
-            <a:r>
-              <a:rPr sz="2000" b="1" i="0">
-                <a:solidFill>
-                  <a:srgbClr val="333333"/>
-                </a:solidFill>
-                <a:latin typeface="Calibri"/>
-              </a:rPr>
-              <a:t>Entrega en la plataforma del curso</a:t>
-            </a:r>
-            <a:r>
-              <a:rPr sz="2000" b="0" i="0">
-                <a:solidFill>
-                  <a:srgbClr val="333333"/>
-                </a:solidFill>
-                <a:latin typeface="Calibri"/>
-              </a:rPr>
-              <a:t> — en la fecha que indique el docente.</a:t>
+              <a:t>–   Con costos reportados del orden de cientos de millones de libras y sanciones posteriores del regulador</a:t>
             </a:r>
           </a:p>
         </p:txBody>
@@ -5416,109 +4468,21 @@
                 </a:solidFill>
                 <a:latin typeface="Calibri"/>
               </a:rPr>
-              <a:t>Para el PI esta semana</a:t>
-            </a:r>
-          </a:p>
-        </p:txBody>
-      </p:sp>
-      <p:sp>
-        <p:nvSpPr>
-          <p:cNvPr id="5" name="Rounded Rectangle 4"/>
-          <p:cNvSpPr/>
-          <p:nvPr/>
-        </p:nvSpPr>
-        <p:spPr>
-          <a:xfrm>
-            <a:off x="457200" y="1261872"/>
-            <a:ext cx="11277295" cy="1051560"/>
-          </a:xfrm>
-          <a:prstGeom prst="roundRect">
-            <a:avLst>
-              <a:gd name="adj" fmla="val 12000"/>
-            </a:avLst>
-          </a:prstGeom>
-          <a:solidFill>
-            <a:srgbClr val="E8F4FA"/>
-          </a:solidFill>
-          <a:ln>
-            <a:noFill/>
-          </a:ln>
-        </p:spPr>
-        <p:style>
-          <a:lnRef idx="1">
-            <a:schemeClr val="accent1"/>
-          </a:lnRef>
-          <a:fillRef idx="3">
-            <a:schemeClr val="accent1"/>
-          </a:fillRef>
-          <a:effectRef idx="2">
-            <a:schemeClr val="accent1"/>
-          </a:effectRef>
-          <a:fontRef idx="minor">
-            <a:schemeClr val="lt1"/>
-          </a:fontRef>
-        </p:style>
-        <p:txBody>
-          <a:bodyPr rtlCol="0" anchor="ctr"/>
-          <a:lstStyle/>
-          <a:p>
-            <a:pPr algn="ctr"/>
-          </a:p>
-        </p:txBody>
-      </p:sp>
-      <p:sp>
-        <p:nvSpPr>
-          <p:cNvPr id="6" name="Rectangle 5"/>
-          <p:cNvSpPr/>
-          <p:nvPr/>
-        </p:nvSpPr>
-        <p:spPr>
-          <a:xfrm>
-            <a:off x="457200" y="1261872"/>
-            <a:ext cx="128016" cy="1051560"/>
-          </a:xfrm>
-          <a:prstGeom prst="rect">
-            <a:avLst/>
-          </a:prstGeom>
-          <a:solidFill>
-            <a:srgbClr val="269CCB"/>
-          </a:solidFill>
-          <a:ln>
-            <a:noFill/>
-          </a:ln>
-        </p:spPr>
-        <p:style>
-          <a:lnRef idx="1">
-            <a:schemeClr val="accent1"/>
-          </a:lnRef>
-          <a:fillRef idx="3">
-            <a:schemeClr val="accent1"/>
-          </a:fillRef>
-          <a:effectRef idx="2">
-            <a:schemeClr val="accent1"/>
-          </a:effectRef>
-          <a:fontRef idx="minor">
-            <a:schemeClr val="lt1"/>
-          </a:fontRef>
-        </p:style>
-        <p:txBody>
-          <a:bodyPr rtlCol="0" anchor="ctr"/>
-          <a:lstStyle/>
-          <a:p>
-            <a:pPr algn="ctr"/>
-          </a:p>
-        </p:txBody>
-      </p:sp>
-      <p:sp>
-        <p:nvSpPr>
-          <p:cNvPr id="7" name="TextBox 6"/>
+              <a:t>Caso tres: perdida de datos en una migracion (MySpace, 2019) (2/2)</a:t>
+            </a:r>
+          </a:p>
+        </p:txBody>
+      </p:sp>
+      <p:sp>
+        <p:nvSpPr>
+          <p:cNvPr id="5" name="TextBox 4"/>
           <p:cNvSpPr txBox="1"/>
           <p:nvPr/>
         </p:nvSpPr>
         <p:spPr>
           <a:xfrm>
-            <a:off x="777240" y="1399031"/>
-            <a:ext cx="10774375" cy="822959"/>
+            <a:off x="457200" y="1170432"/>
+            <a:ext cx="11277295" cy="5230368"/>
           </a:xfrm>
           <a:prstGeom prst="rect">
             <a:avLst/>
@@ -5531,313 +4495,58 @@
           </a:bodyPr>
           <a:lstStyle/>
           <a:p>
-            <a:r>
-              <a:rPr sz="1200" b="1" i="0">
-                <a:solidFill>
-                  <a:srgbClr val="269CCB"/>
-                </a:solidFill>
-                <a:latin typeface="Calibri"/>
-              </a:rPr>
-              <a:t>Info</a:t>
-            </a:r>
-          </a:p>
-          <a:p>
             <a:pPr>
-              <a:spcBef>
-                <a:spcPts val="400"/>
-              </a:spcBef>
+              <a:spcAft>
+                <a:spcPts val="800"/>
+              </a:spcAft>
             </a:pPr>
             <a:r>
-              <a:rPr sz="1400" b="0" i="0">
-                <a:solidFill>
-                  <a:srgbClr val="333333"/>
-                </a:solidFill>
-                <a:latin typeface="Calibri"/>
-              </a:rPr>
-              <a:t>Hito: Informe de caso -&gt; mejoras concretas al PI</a:t>
-            </a:r>
-          </a:p>
-        </p:txBody>
-      </p:sp>
-      <p:sp>
-        <p:nvSpPr>
-          <p:cNvPr id="8" name="Rounded Rectangle 7"/>
-          <p:cNvSpPr/>
-          <p:nvPr/>
-        </p:nvSpPr>
-        <p:spPr>
-          <a:xfrm>
-            <a:off x="457200" y="2478024"/>
-            <a:ext cx="11277295" cy="1051560"/>
-          </a:xfrm>
-          <a:prstGeom prst="roundRect">
-            <a:avLst>
-              <a:gd name="adj" fmla="val 12000"/>
-            </a:avLst>
-          </a:prstGeom>
-          <a:solidFill>
-            <a:srgbClr val="FFF8E1"/>
-          </a:solidFill>
-          <a:ln>
-            <a:noFill/>
-          </a:ln>
-        </p:spPr>
-        <p:style>
-          <a:lnRef idx="1">
-            <a:schemeClr val="accent1"/>
-          </a:lnRef>
-          <a:fillRef idx="3">
-            <a:schemeClr val="accent1"/>
-          </a:fillRef>
-          <a:effectRef idx="2">
-            <a:schemeClr val="accent1"/>
-          </a:effectRef>
-          <a:fontRef idx="minor">
-            <a:schemeClr val="lt1"/>
-          </a:fontRef>
-        </p:style>
-        <p:txBody>
-          <a:bodyPr rtlCol="0" anchor="ctr"/>
-          <a:lstStyle/>
-          <a:p>
-            <a:pPr algn="ctr"/>
-          </a:p>
-        </p:txBody>
-      </p:sp>
-      <p:sp>
-        <p:nvSpPr>
-          <p:cNvPr id="9" name="Rectangle 8"/>
-          <p:cNvSpPr/>
-          <p:nvPr/>
-        </p:nvSpPr>
-        <p:spPr>
-          <a:xfrm>
-            <a:off x="457200" y="2478024"/>
-            <a:ext cx="128016" cy="1051560"/>
-          </a:xfrm>
-          <a:prstGeom prst="rect">
-            <a:avLst/>
-          </a:prstGeom>
-          <a:solidFill>
-            <a:srgbClr val="FFD000"/>
-          </a:solidFill>
-          <a:ln>
-            <a:noFill/>
-          </a:ln>
-        </p:spPr>
-        <p:style>
-          <a:lnRef idx="1">
-            <a:schemeClr val="accent1"/>
-          </a:lnRef>
-          <a:fillRef idx="3">
-            <a:schemeClr val="accent1"/>
-          </a:fillRef>
-          <a:effectRef idx="2">
-            <a:schemeClr val="accent1"/>
-          </a:effectRef>
-          <a:fontRef idx="minor">
-            <a:schemeClr val="lt1"/>
-          </a:fontRef>
-        </p:style>
-        <p:txBody>
-          <a:bodyPr rtlCol="0" anchor="ctr"/>
-          <a:lstStyle/>
-          <a:p>
-            <a:pPr algn="ctr"/>
-          </a:p>
-        </p:txBody>
-      </p:sp>
-      <p:sp>
-        <p:nvSpPr>
-          <p:cNvPr id="10" name="TextBox 9"/>
-          <p:cNvSpPr txBox="1"/>
-          <p:nvPr/>
-        </p:nvSpPr>
-        <p:spPr>
-          <a:xfrm>
-            <a:off x="777240" y="2615184"/>
-            <a:ext cx="10774375" cy="822959"/>
-          </a:xfrm>
-          <a:prstGeom prst="rect">
-            <a:avLst/>
-          </a:prstGeom>
-          <a:noFill/>
-        </p:spPr>
-        <p:txBody>
-          <a:bodyPr wrap="square">
-            <a:spAutoFit/>
-          </a:bodyPr>
-          <a:lstStyle/>
-          <a:p>
-            <a:r>
-              <a:rPr sz="1200" b="1" i="0">
-                <a:solidFill>
-                  <a:srgbClr val="FFD000"/>
-                </a:solidFill>
-                <a:latin typeface="Calibri"/>
-              </a:rPr>
-              <a:t>Aclaración</a:t>
+              <a:rPr sz="2000" b="0" i="0">
+                <a:solidFill>
+                  <a:srgbClr val="333333"/>
+                </a:solidFill>
+                <a:latin typeface="Calibri"/>
+              </a:rPr>
+              <a:t>–   La causa raiz senalada en los informes no fue un error puntual de programacion sino una migracion probada de forma insuficiente y sin un camino de retorno real.</a:t>
             </a:r>
           </a:p>
           <a:p>
             <a:pPr>
-              <a:spcBef>
-                <a:spcPts val="400"/>
-              </a:spcBef>
+              <a:spcAft>
+                <a:spcPts val="800"/>
+              </a:spcAft>
             </a:pPr>
             <a:r>
-              <a:rPr sz="1400" b="0" i="0">
-                <a:solidFill>
-                  <a:srgbClr val="333333"/>
-                </a:solidFill>
-                <a:latin typeface="Calibri"/>
-              </a:rPr>
-              <a:t>Enunciado completo: Clases/Proyecto Integrador/ (VetCare DB).</a:t>
-            </a:r>
-          </a:p>
-        </p:txBody>
-      </p:sp>
-      <p:sp>
-        <p:nvSpPr>
-          <p:cNvPr id="11" name="Rounded Rectangle 10"/>
-          <p:cNvSpPr/>
-          <p:nvPr/>
-        </p:nvSpPr>
-        <p:spPr>
-          <a:xfrm>
-            <a:off x="457200" y="3694176"/>
-            <a:ext cx="11277295" cy="1051560"/>
-          </a:xfrm>
-          <a:prstGeom prst="roundRect">
-            <a:avLst>
-              <a:gd name="adj" fmla="val 12000"/>
-            </a:avLst>
-          </a:prstGeom>
-          <a:solidFill>
-            <a:srgbClr val="FBE4E4"/>
-          </a:solidFill>
-          <a:ln>
-            <a:noFill/>
-          </a:ln>
-        </p:spPr>
-        <p:style>
-          <a:lnRef idx="1">
-            <a:schemeClr val="accent1"/>
-          </a:lnRef>
-          <a:fillRef idx="3">
-            <a:schemeClr val="accent1"/>
-          </a:fillRef>
-          <a:effectRef idx="2">
-            <a:schemeClr val="accent1"/>
-          </a:effectRef>
-          <a:fontRef idx="minor">
-            <a:schemeClr val="lt1"/>
-          </a:fontRef>
-        </p:style>
-        <p:txBody>
-          <a:bodyPr rtlCol="0" anchor="ctr"/>
-          <a:lstStyle/>
-          <a:p>
-            <a:pPr algn="ctr"/>
-          </a:p>
-        </p:txBody>
-      </p:sp>
-      <p:sp>
-        <p:nvSpPr>
-          <p:cNvPr id="12" name="Rectangle 11"/>
-          <p:cNvSpPr/>
-          <p:nvPr/>
-        </p:nvSpPr>
-        <p:spPr>
-          <a:xfrm>
-            <a:off x="457200" y="3694176"/>
-            <a:ext cx="128016" cy="1051560"/>
-          </a:xfrm>
-          <a:prstGeom prst="rect">
-            <a:avLst/>
-          </a:prstGeom>
-          <a:solidFill>
-            <a:srgbClr val="A02030"/>
-          </a:solidFill>
-          <a:ln>
-            <a:noFill/>
-          </a:ln>
-        </p:spPr>
-        <p:style>
-          <a:lnRef idx="1">
-            <a:schemeClr val="accent1"/>
-          </a:lnRef>
-          <a:fillRef idx="3">
-            <a:schemeClr val="accent1"/>
-          </a:fillRef>
-          <a:effectRef idx="2">
-            <a:schemeClr val="accent1"/>
-          </a:effectRef>
-          <a:fontRef idx="minor">
-            <a:schemeClr val="lt1"/>
-          </a:fontRef>
-        </p:style>
-        <p:txBody>
-          <a:bodyPr rtlCol="0" anchor="ctr"/>
-          <a:lstStyle/>
-          <a:p>
-            <a:pPr algn="ctr"/>
-          </a:p>
-        </p:txBody>
-      </p:sp>
-      <p:sp>
-        <p:nvSpPr>
-          <p:cNvPr id="13" name="TextBox 12"/>
-          <p:cNvSpPr txBox="1"/>
-          <p:nvPr/>
-        </p:nvSpPr>
-        <p:spPr>
-          <a:xfrm>
-            <a:off x="777240" y="3831336"/>
-            <a:ext cx="10774375" cy="822959"/>
-          </a:xfrm>
-          <a:prstGeom prst="rect">
-            <a:avLst/>
-          </a:prstGeom>
-          <a:noFill/>
-        </p:spPr>
-        <p:txBody>
-          <a:bodyPr wrap="square">
-            <a:spAutoFit/>
-          </a:bodyPr>
-          <a:lstStyle/>
-          <a:p>
-            <a:r>
-              <a:rPr sz="1200" b="1" i="0">
-                <a:solidFill>
-                  <a:srgbClr val="A02030"/>
-                </a:solidFill>
-                <a:latin typeface="Calibri"/>
-              </a:rPr>
-              <a:t>Atención</a:t>
+              <a:rPr sz="2000" b="0" i="0">
+                <a:solidFill>
+                  <a:srgbClr val="333333"/>
+                </a:solidFill>
+                <a:latin typeface="Calibri"/>
+              </a:rPr>
+              <a:t>–   La leccion tecnica es la misma en los dos casos y conecta con la Clase 12: una migracion sin plan de retorno probado es una apuesta, y el plan de retorno se prueba antes, no el dia del cambio.</a:t>
             </a:r>
           </a:p>
           <a:p>
             <a:pPr>
-              <a:spcBef>
-                <a:spcPts val="400"/>
-              </a:spcBef>
+              <a:spcAft>
+                <a:spcPts val="800"/>
+              </a:spcAft>
             </a:pPr>
             <a:r>
-              <a:rPr sz="1400" b="0" i="0">
-                <a:solidFill>
-                  <a:srgbClr val="333333"/>
-                </a:solidFill>
-                <a:latin typeface="Calibri"/>
-              </a:rPr>
-              <a:t>Si el docente asigna taller esta semana, él indica el canal y la fecha.</a:t>
-            </a:r>
-          </a:p>
-        </p:txBody>
-      </p:sp>
-      <p:sp>
-        <p:nvSpPr>
-          <p:cNvPr id="14" name="TextBox 13"/>
+              <a:rPr sz="2000" b="0" i="0">
+                <a:solidFill>
+                  <a:srgbClr val="333333"/>
+                </a:solidFill>
+                <a:latin typeface="Calibri"/>
+              </a:rPr>
+              <a:t>–   La forma disciplinada de hacerlo es la secuencia de expandir, migrar y contraer, con las dos versiones conviviendo, mas una verificacion de conteos entre origen y destino antes de eliminar nada.</a:t>
+            </a:r>
+          </a:p>
+        </p:txBody>
+      </p:sp>
+      <p:sp>
+        <p:nvSpPr>
+          <p:cNvPr id="6" name="TextBox 5"/>
           <p:cNvSpPr txBox="1"/>
           <p:nvPr/>
         </p:nvSpPr>
@@ -5905,13 +4614,13 @@
         <p:spPr>
           <a:xfrm>
             <a:off x="0" y="0"/>
-            <a:ext cx="12191695" cy="164592"/>
+            <a:ext cx="12191695" cy="960120"/>
           </a:xfrm>
           <a:prstGeom prst="rect">
             <a:avLst/>
           </a:prstGeom>
           <a:solidFill>
-            <a:srgbClr val="269CCB"/>
+            <a:srgbClr val="095292"/>
           </a:solidFill>
           <a:ln>
             <a:noFill/>
@@ -5939,9 +4648,1771 @@
           </a:p>
         </p:txBody>
       </p:sp>
+      <p:sp>
+        <p:nvSpPr>
+          <p:cNvPr id="3" name="Rectangle 2"/>
+          <p:cNvSpPr/>
+          <p:nvPr/>
+        </p:nvSpPr>
+        <p:spPr>
+          <a:xfrm>
+            <a:off x="0" y="960120"/>
+            <a:ext cx="12191695" cy="41148"/>
+          </a:xfrm>
+          <a:prstGeom prst="rect">
+            <a:avLst/>
+          </a:prstGeom>
+          <a:solidFill>
+            <a:srgbClr val="FFD000"/>
+          </a:solidFill>
+          <a:ln>
+            <a:noFill/>
+          </a:ln>
+        </p:spPr>
+        <p:style>
+          <a:lnRef idx="1">
+            <a:schemeClr val="accent1"/>
+          </a:lnRef>
+          <a:fillRef idx="3">
+            <a:schemeClr val="accent1"/>
+          </a:fillRef>
+          <a:effectRef idx="2">
+            <a:schemeClr val="accent1"/>
+          </a:effectRef>
+          <a:fontRef idx="minor">
+            <a:schemeClr val="lt1"/>
+          </a:fontRef>
+        </p:style>
+        <p:txBody>
+          <a:bodyPr rtlCol="0" anchor="ctr"/>
+          <a:lstStyle/>
+          <a:p>
+            <a:pPr algn="ctr"/>
+          </a:p>
+        </p:txBody>
+      </p:sp>
+      <p:sp>
+        <p:nvSpPr>
+          <p:cNvPr id="4" name="TextBox 3"/>
+          <p:cNvSpPr txBox="1"/>
+          <p:nvPr/>
+        </p:nvSpPr>
+        <p:spPr>
+          <a:xfrm>
+            <a:off x="457200" y="164592"/>
+            <a:ext cx="11277295" cy="502920"/>
+          </a:xfrm>
+          <a:prstGeom prst="rect">
+            <a:avLst/>
+          </a:prstGeom>
+          <a:noFill/>
+        </p:spPr>
+        <p:txBody>
+          <a:bodyPr wrap="square">
+            <a:spAutoFit/>
+          </a:bodyPr>
+          <a:lstStyle/>
+          <a:p>
+            <a:r>
+              <a:rPr sz="2600" b="1" i="0">
+                <a:solidFill>
+                  <a:srgbClr val="FFFFFF"/>
+                </a:solidFill>
+                <a:latin typeface="Calibri"/>
+              </a:rPr>
+              <a:t>Caso cuatro: concurrencia, el que no llega a los titulares (1/2)</a:t>
+            </a:r>
+          </a:p>
+        </p:txBody>
+      </p:sp>
+      <p:sp>
+        <p:nvSpPr>
+          <p:cNvPr id="5" name="TextBox 4"/>
+          <p:cNvSpPr txBox="1"/>
+          <p:nvPr/>
+        </p:nvSpPr>
+        <p:spPr>
+          <a:xfrm>
+            <a:off x="457200" y="1170432"/>
+            <a:ext cx="11277295" cy="5230368"/>
+          </a:xfrm>
+          <a:prstGeom prst="rect">
+            <a:avLst/>
+          </a:prstGeom>
+          <a:noFill/>
+        </p:spPr>
+        <p:txBody>
+          <a:bodyPr wrap="square">
+            <a:spAutoFit/>
+          </a:bodyPr>
+          <a:lstStyle/>
+          <a:p>
+            <a:pPr>
+              <a:spcAft>
+                <a:spcPts val="800"/>
+              </a:spcAft>
+            </a:pPr>
+            <a:r>
+              <a:rPr sz="2000" b="0" i="0">
+                <a:solidFill>
+                  <a:srgbClr val="333333"/>
+                </a:solidFill>
+                <a:latin typeface="Calibri"/>
+              </a:rPr>
+              <a:t>–   Caso cuatro, concurrencia.</a:t>
+            </a:r>
+          </a:p>
+          <a:p>
+            <a:pPr>
+              <a:spcAft>
+                <a:spcPts val="800"/>
+              </a:spcAft>
+            </a:pPr>
+            <a:r>
+              <a:rPr sz="2000" b="0" i="0">
+                <a:solidFill>
+                  <a:srgbClr val="333333"/>
+                </a:solidFill>
+                <a:latin typeface="Calibri"/>
+              </a:rPr>
+              <a:t>–   Este merece un tratamiento distinto porque su rasgo caracteristico es que no llega a los titulares con nombre propio tan facilmente: son fallos que no producen mensajes de error y por eso se descubren semanas despues</a:t>
+            </a:r>
+          </a:p>
+          <a:p>
+            <a:pPr>
+              <a:spcAft>
+                <a:spcPts val="800"/>
+              </a:spcAft>
+            </a:pPr>
+            <a:r>
+              <a:rPr sz="2000" b="0" i="0">
+                <a:solidFill>
+                  <a:srgbClr val="333333"/>
+                </a:solidFill>
+                <a:latin typeface="Calibri"/>
+              </a:rPr>
+              <a:t>–   Cuando el inventario fisico no coincide con el del sistema o cuando dos clientes reclaman el mismo cupo.</a:t>
+            </a:r>
+          </a:p>
+          <a:p>
+            <a:pPr>
+              <a:spcAft>
+                <a:spcPts val="800"/>
+              </a:spcAft>
+            </a:pPr>
+            <a:r>
+              <a:rPr sz="2000" b="0" i="0">
+                <a:solidFill>
+                  <a:srgbClr val="333333"/>
+                </a:solidFill>
+                <a:latin typeface="Calibri"/>
+              </a:rPr>
+              <a:t>–   El patron es siempre uno de los tres que se estudiaron en la Clase 10.</a:t>
+            </a:r>
+          </a:p>
+          <a:p>
+            <a:pPr>
+              <a:spcAft>
+                <a:spcPts val="800"/>
+              </a:spcAft>
+            </a:pPr>
+            <a:r>
+              <a:rPr sz="2000" b="0" i="0">
+                <a:solidFill>
+                  <a:srgbClr val="333333"/>
+                </a:solidFill>
+                <a:latin typeface="Calibri"/>
+              </a:rPr>
+              <a:t>–   Actualizacion perdida: dos procesos leen el mismo stock de Insumo, digamos cinco unidades, ambos restan tres y ambos escriben dos, con lo cual se despacharon seis unidades y el sistema declara dos existencias que no estan.</a:t>
+            </a:r>
+          </a:p>
+          <a:p>
+            <a:pPr>
+              <a:spcAft>
+                <a:spcPts val="800"/>
+              </a:spcAft>
+            </a:pPr>
+            <a:r>
+              <a:rPr sz="2000" b="0" i="0">
+                <a:solidFill>
+                  <a:srgbClr val="333333"/>
+                </a:solidFill>
+                <a:latin typeface="Calibri"/>
+              </a:rPr>
+              <a:t>–   Doble reserva: dos recepcionistas consultan la franja del martes a las diez del veterinario Ruiz, ambas reciben cero filas, ambas insertan.</a:t>
+            </a:r>
+          </a:p>
+        </p:txBody>
+      </p:sp>
+      <p:sp>
+        <p:nvSpPr>
+          <p:cNvPr id="6" name="TextBox 5"/>
+          <p:cNvSpPr txBox="1"/>
+          <p:nvPr/>
+        </p:nvSpPr>
+        <p:spPr>
+          <a:xfrm>
+            <a:off x="11185855" y="6473952"/>
+            <a:ext cx="640080" cy="274320"/>
+          </a:xfrm>
+          <a:prstGeom prst="rect">
+            <a:avLst/>
+          </a:prstGeom>
+          <a:noFill/>
+        </p:spPr>
+        <p:txBody>
+          <a:bodyPr wrap="square">
+            <a:spAutoFit/>
+          </a:bodyPr>
+          <a:lstStyle/>
+          <a:p>
+            <a:pPr algn="r"/>
+            <a:r>
+              <a:rPr sz="1100" b="0" i="0">
+                <a:solidFill>
+                  <a:srgbClr val="666666"/>
+                </a:solidFill>
+                <a:latin typeface="Calibri"/>
+              </a:rPr>
+              <a:t>14</a:t>
+            </a:r>
+          </a:p>
+        </p:txBody>
+      </p:sp>
+    </p:spTree>
+  </p:cSld>
+  <p:clrMapOvr>
+    <a:masterClrMapping/>
+  </p:clrMapOvr>
+</p:sld>
+</file>
+
+<file path=ppt/slides/slide15.xml><?xml version="1.0" encoding="utf-8"?>
+<p:sld xmlns:a="http://schemas.openxmlformats.org/drawingml/2006/main" xmlns:p="http://schemas.openxmlformats.org/presentationml/2006/main" xmlns:r="http://schemas.openxmlformats.org/officeDocument/2006/relationships">
+  <p:cSld>
+    <p:bg>
+      <p:bgPr>
+        <a:solidFill>
+          <a:srgbClr val="FFFFFF"/>
+        </a:solidFill>
+        <a:effectLst/>
+      </p:bgPr>
+    </p:bg>
+    <p:spTree>
+      <p:nvGrpSpPr>
+        <p:cNvPr id="1" name=""/>
+        <p:cNvGrpSpPr/>
+        <p:nvPr/>
+      </p:nvGrpSpPr>
+      <p:grpSpPr/>
+      <p:sp>
+        <p:nvSpPr>
+          <p:cNvPr id="2" name="Rectangle 1"/>
+          <p:cNvSpPr/>
+          <p:nvPr/>
+        </p:nvSpPr>
+        <p:spPr>
+          <a:xfrm>
+            <a:off x="0" y="0"/>
+            <a:ext cx="12191695" cy="960120"/>
+          </a:xfrm>
+          <a:prstGeom prst="rect">
+            <a:avLst/>
+          </a:prstGeom>
+          <a:solidFill>
+            <a:srgbClr val="095292"/>
+          </a:solidFill>
+          <a:ln>
+            <a:noFill/>
+          </a:ln>
+        </p:spPr>
+        <p:style>
+          <a:lnRef idx="1">
+            <a:schemeClr val="accent1"/>
+          </a:lnRef>
+          <a:fillRef idx="3">
+            <a:schemeClr val="accent1"/>
+          </a:fillRef>
+          <a:effectRef idx="2">
+            <a:schemeClr val="accent1"/>
+          </a:effectRef>
+          <a:fontRef idx="minor">
+            <a:schemeClr val="lt1"/>
+          </a:fontRef>
+        </p:style>
+        <p:txBody>
+          <a:bodyPr rtlCol="0" anchor="ctr"/>
+          <a:lstStyle/>
+          <a:p>
+            <a:pPr algn="ctr"/>
+          </a:p>
+        </p:txBody>
+      </p:sp>
+      <p:sp>
+        <p:nvSpPr>
+          <p:cNvPr id="3" name="Rectangle 2"/>
+          <p:cNvSpPr/>
+          <p:nvPr/>
+        </p:nvSpPr>
+        <p:spPr>
+          <a:xfrm>
+            <a:off x="0" y="960120"/>
+            <a:ext cx="12191695" cy="41148"/>
+          </a:xfrm>
+          <a:prstGeom prst="rect">
+            <a:avLst/>
+          </a:prstGeom>
+          <a:solidFill>
+            <a:srgbClr val="FFD000"/>
+          </a:solidFill>
+          <a:ln>
+            <a:noFill/>
+          </a:ln>
+        </p:spPr>
+        <p:style>
+          <a:lnRef idx="1">
+            <a:schemeClr val="accent1"/>
+          </a:lnRef>
+          <a:fillRef idx="3">
+            <a:schemeClr val="accent1"/>
+          </a:fillRef>
+          <a:effectRef idx="2">
+            <a:schemeClr val="accent1"/>
+          </a:effectRef>
+          <a:fontRef idx="minor">
+            <a:schemeClr val="lt1"/>
+          </a:fontRef>
+        </p:style>
+        <p:txBody>
+          <a:bodyPr rtlCol="0" anchor="ctr"/>
+          <a:lstStyle/>
+          <a:p>
+            <a:pPr algn="ctr"/>
+          </a:p>
+        </p:txBody>
+      </p:sp>
+      <p:sp>
+        <p:nvSpPr>
+          <p:cNvPr id="4" name="TextBox 3"/>
+          <p:cNvSpPr txBox="1"/>
+          <p:nvPr/>
+        </p:nvSpPr>
+        <p:spPr>
+          <a:xfrm>
+            <a:off x="457200" y="164592"/>
+            <a:ext cx="11277295" cy="502920"/>
+          </a:xfrm>
+          <a:prstGeom prst="rect">
+            <a:avLst/>
+          </a:prstGeom>
+          <a:noFill/>
+        </p:spPr>
+        <p:txBody>
+          <a:bodyPr wrap="square">
+            <a:spAutoFit/>
+          </a:bodyPr>
+          <a:lstStyle/>
+          <a:p>
+            <a:r>
+              <a:rPr sz="2600" b="1" i="0">
+                <a:solidFill>
+                  <a:srgbClr val="FFFFFF"/>
+                </a:solidFill>
+                <a:latin typeface="Calibri"/>
+              </a:rPr>
+              <a:t>Caso cuatro: concurrencia, el que no llega a los titulares (2/2)</a:t>
+            </a:r>
+          </a:p>
+        </p:txBody>
+      </p:sp>
+      <p:sp>
+        <p:nvSpPr>
+          <p:cNvPr id="5" name="TextBox 4"/>
+          <p:cNvSpPr txBox="1"/>
+          <p:nvPr/>
+        </p:nvSpPr>
+        <p:spPr>
+          <a:xfrm>
+            <a:off x="457200" y="1170432"/>
+            <a:ext cx="11277295" cy="5230368"/>
+          </a:xfrm>
+          <a:prstGeom prst="rect">
+            <a:avLst/>
+          </a:prstGeom>
+          <a:noFill/>
+        </p:spPr>
+        <p:txBody>
+          <a:bodyPr wrap="square">
+            <a:spAutoFit/>
+          </a:bodyPr>
+          <a:lstStyle/>
+          <a:p>
+            <a:pPr>
+              <a:spcAft>
+                <a:spcPts val="800"/>
+              </a:spcAft>
+            </a:pPr>
+            <a:r>
+              <a:rPr sz="2000" b="0" i="0">
+                <a:solidFill>
+                  <a:srgbClr val="333333"/>
+                </a:solidFill>
+                <a:latin typeface="Calibri"/>
+              </a:rPr>
+              <a:t>–   Bloqueo mutuo o deadlock: dos transacciones se esperan en orden cruzado y el motor mata una.</a:t>
+            </a:r>
+          </a:p>
+          <a:p>
+            <a:pPr>
+              <a:spcAft>
+                <a:spcPts val="800"/>
+              </a:spcAft>
+            </a:pPr>
+            <a:r>
+              <a:rPr sz="2000" b="0" i="0">
+                <a:solidFill>
+                  <a:srgbClr val="333333"/>
+                </a:solidFill>
+                <a:latin typeface="Calibri"/>
+              </a:rPr>
+              <a:t>–   La leccion es que ninguna cantidad de validacion previa en la aplicacion resuelve esto</a:t>
+            </a:r>
+          </a:p>
+          <a:p>
+            <a:pPr>
+              <a:spcAft>
+                <a:spcPts val="800"/>
+              </a:spcAft>
+            </a:pPr>
+            <a:r>
+              <a:rPr sz="2000" b="0" i="0">
+                <a:solidFill>
+                  <a:srgbClr val="333333"/>
+                </a:solidFill>
+                <a:latin typeface="Calibri"/>
+              </a:rPr>
+              <a:t>–   Porque entre la consulta y la escritura hay una ventana de tiempo en la que el mundo cambio; se resuelve en la base con restricciones, con bloqueo explicito al leer lo que se va a modificar o con el nivel de aislamiento adecuado.</a:t>
+            </a:r>
+          </a:p>
+          <a:p>
+            <a:pPr>
+              <a:spcAft>
+                <a:spcPts val="800"/>
+              </a:spcAft>
+            </a:pPr>
+            <a:r>
+              <a:rPr sz="2000" b="0" i="0">
+                <a:solidFill>
+                  <a:srgbClr val="333333"/>
+                </a:solidFill>
+                <a:latin typeface="Calibri"/>
+              </a:rPr>
+              <a:t>–   Y hay una leccion organizacional gratis: estos defectos jamas aparecen probando con un usuario, asi que si el estudiante solo probo VetCare desde una sola maquina, no lo probo.</a:t>
+            </a:r>
+          </a:p>
+        </p:txBody>
+      </p:sp>
+      <p:sp>
+        <p:nvSpPr>
+          <p:cNvPr id="6" name="TextBox 5"/>
+          <p:cNvSpPr txBox="1"/>
+          <p:nvPr/>
+        </p:nvSpPr>
+        <p:spPr>
+          <a:xfrm>
+            <a:off x="11185855" y="6473952"/>
+            <a:ext cx="640080" cy="274320"/>
+          </a:xfrm>
+          <a:prstGeom prst="rect">
+            <a:avLst/>
+          </a:prstGeom>
+          <a:noFill/>
+        </p:spPr>
+        <p:txBody>
+          <a:bodyPr wrap="square">
+            <a:spAutoFit/>
+          </a:bodyPr>
+          <a:lstStyle/>
+          <a:p>
+            <a:pPr algn="r"/>
+            <a:r>
+              <a:rPr sz="1100" b="0" i="0">
+                <a:solidFill>
+                  <a:srgbClr val="666666"/>
+                </a:solidFill>
+                <a:latin typeface="Calibri"/>
+              </a:rPr>
+              <a:t>15</a:t>
+            </a:r>
+          </a:p>
+        </p:txBody>
+      </p:sp>
+    </p:spTree>
+  </p:cSld>
+  <p:clrMapOvr>
+    <a:masterClrMapping/>
+  </p:clrMapOvr>
+</p:sld>
+</file>
+
+<file path=ppt/slides/slide16.xml><?xml version="1.0" encoding="utf-8"?>
+<p:sld xmlns:a="http://schemas.openxmlformats.org/drawingml/2006/main" xmlns:p="http://schemas.openxmlformats.org/presentationml/2006/main" xmlns:r="http://schemas.openxmlformats.org/officeDocument/2006/relationships">
+  <p:cSld>
+    <p:bg>
+      <p:bgPr>
+        <a:solidFill>
+          <a:srgbClr val="FFFFFF"/>
+        </a:solidFill>
+        <a:effectLst/>
+      </p:bgPr>
+    </p:bg>
+    <p:spTree>
+      <p:nvGrpSpPr>
+        <p:cNvPr id="1" name=""/>
+        <p:cNvGrpSpPr/>
+        <p:nvPr/>
+      </p:nvGrpSpPr>
+      <p:grpSpPr/>
+      <p:sp>
+        <p:nvSpPr>
+          <p:cNvPr id="2" name="Rectangle 1"/>
+          <p:cNvSpPr/>
+          <p:nvPr/>
+        </p:nvSpPr>
+        <p:spPr>
+          <a:xfrm>
+            <a:off x="0" y="0"/>
+            <a:ext cx="12191695" cy="960120"/>
+          </a:xfrm>
+          <a:prstGeom prst="rect">
+            <a:avLst/>
+          </a:prstGeom>
+          <a:solidFill>
+            <a:srgbClr val="095292"/>
+          </a:solidFill>
+          <a:ln>
+            <a:noFill/>
+          </a:ln>
+        </p:spPr>
+        <p:style>
+          <a:lnRef idx="1">
+            <a:schemeClr val="accent1"/>
+          </a:lnRef>
+          <a:fillRef idx="3">
+            <a:schemeClr val="accent1"/>
+          </a:fillRef>
+          <a:effectRef idx="2">
+            <a:schemeClr val="accent1"/>
+          </a:effectRef>
+          <a:fontRef idx="minor">
+            <a:schemeClr val="lt1"/>
+          </a:fontRef>
+        </p:style>
+        <p:txBody>
+          <a:bodyPr rtlCol="0" anchor="ctr"/>
+          <a:lstStyle/>
+          <a:p>
+            <a:pPr algn="ctr"/>
+          </a:p>
+        </p:txBody>
+      </p:sp>
+      <p:sp>
+        <p:nvSpPr>
+          <p:cNvPr id="3" name="Rectangle 2"/>
+          <p:cNvSpPr/>
+          <p:nvPr/>
+        </p:nvSpPr>
+        <p:spPr>
+          <a:xfrm>
+            <a:off x="0" y="960120"/>
+            <a:ext cx="12191695" cy="41148"/>
+          </a:xfrm>
+          <a:prstGeom prst="rect">
+            <a:avLst/>
+          </a:prstGeom>
+          <a:solidFill>
+            <a:srgbClr val="FFD000"/>
+          </a:solidFill>
+          <a:ln>
+            <a:noFill/>
+          </a:ln>
+        </p:spPr>
+        <p:style>
+          <a:lnRef idx="1">
+            <a:schemeClr val="accent1"/>
+          </a:lnRef>
+          <a:fillRef idx="3">
+            <a:schemeClr val="accent1"/>
+          </a:fillRef>
+          <a:effectRef idx="2">
+            <a:schemeClr val="accent1"/>
+          </a:effectRef>
+          <a:fontRef idx="minor">
+            <a:schemeClr val="lt1"/>
+          </a:fontRef>
+        </p:style>
+        <p:txBody>
+          <a:bodyPr rtlCol="0" anchor="ctr"/>
+          <a:lstStyle/>
+          <a:p>
+            <a:pPr algn="ctr"/>
+          </a:p>
+        </p:txBody>
+      </p:sp>
+      <p:sp>
+        <p:nvSpPr>
+          <p:cNvPr id="4" name="TextBox 3"/>
+          <p:cNvSpPr txBox="1"/>
+          <p:nvPr/>
+        </p:nvSpPr>
+        <p:spPr>
+          <a:xfrm>
+            <a:off x="457200" y="164592"/>
+            <a:ext cx="11277295" cy="502920"/>
+          </a:xfrm>
+          <a:prstGeom prst="rect">
+            <a:avLst/>
+          </a:prstGeom>
+          <a:noFill/>
+        </p:spPr>
+        <p:txBody>
+          <a:bodyPr wrap="square">
+            <a:spAutoFit/>
+          </a:bodyPr>
+          <a:lstStyle/>
+          <a:p>
+            <a:r>
+              <a:rPr sz="2600" b="1" i="0">
+                <a:solidFill>
+                  <a:srgbClr val="FFFFFF"/>
+                </a:solidFill>
+                <a:latin typeface="Calibri"/>
+              </a:rPr>
+              <a:t>Lo que decide la calificacion: lecciones accionables (1/2)</a:t>
+            </a:r>
+          </a:p>
+        </p:txBody>
+      </p:sp>
+      <p:sp>
+        <p:nvSpPr>
+          <p:cNvPr id="5" name="TextBox 4"/>
+          <p:cNvSpPr txBox="1"/>
+          <p:nvPr/>
+        </p:nvSpPr>
+        <p:spPr>
+          <a:xfrm>
+            <a:off x="457200" y="1170432"/>
+            <a:ext cx="11277295" cy="5230368"/>
+          </a:xfrm>
+          <a:prstGeom prst="rect">
+            <a:avLst/>
+          </a:prstGeom>
+          <a:noFill/>
+        </p:spPr>
+        <p:txBody>
+          <a:bodyPr wrap="square">
+            <a:spAutoFit/>
+          </a:bodyPr>
+          <a:lstStyle/>
+          <a:p>
+            <a:pPr>
+              <a:spcAft>
+                <a:spcPts val="800"/>
+              </a:spcAft>
+            </a:pPr>
+            <a:r>
+              <a:rPr sz="2000" b="0" i="0">
+                <a:solidFill>
+                  <a:srgbClr val="333333"/>
+                </a:solidFill>
+                <a:latin typeface="Calibri"/>
+              </a:rPr>
+              <a:t>–   Lo que decide la calificacion de hoy no es reunir casos sino escribir lecciones accionables, y esa es la habilidad que el estudiante debe practicar sin ayuda.</a:t>
+            </a:r>
+          </a:p>
+          <a:p>
+            <a:pPr>
+              <a:spcAft>
+                <a:spcPts val="800"/>
+              </a:spcAft>
+            </a:pPr>
+            <a:r>
+              <a:rPr sz="2000" b="0" i="0">
+                <a:solidFill>
+                  <a:srgbClr val="333333"/>
+                </a:solidFill>
+                <a:latin typeface="Calibri"/>
+              </a:rPr>
+              <a:t>–   Una leccion es un lugar comun cuando podria haberse escrito antes de conocer el caso: hay que hacer respaldos, hay que cuidar los permisos, hay que probar bien.</a:t>
+            </a:r>
+          </a:p>
+          <a:p>
+            <a:pPr>
+              <a:spcAft>
+                <a:spcPts val="800"/>
+              </a:spcAft>
+            </a:pPr>
+            <a:r>
+              <a:rPr sz="2000" b="0" i="0">
+                <a:solidFill>
+                  <a:srgbClr val="333333"/>
+                </a:solidFill>
+                <a:latin typeface="Calibri"/>
+              </a:rPr>
+              <a:t>–   Una leccion es accionable cuando tiene cuatro elementos verificables: un verbo concreto, el artefacto sobre el cual se actua, una frecuencia o un umbral, y la manera de comprobar que se hizo.</a:t>
+            </a:r>
+          </a:p>
+          <a:p>
+            <a:pPr>
+              <a:spcAft>
+                <a:spcPts val="800"/>
+              </a:spcAft>
+            </a:pPr>
+            <a:r>
+              <a:rPr sz="2000" b="0" i="0">
+                <a:solidFill>
+                  <a:srgbClr val="333333"/>
+                </a:solidFill>
+                <a:latin typeface="Calibri"/>
+              </a:rPr>
+              <a:t>–   Compare las dos versiones.</a:t>
+            </a:r>
+          </a:p>
+          <a:p>
+            <a:pPr>
+              <a:spcAft>
+                <a:spcPts val="800"/>
+              </a:spcAft>
+            </a:pPr>
+            <a:r>
+              <a:rPr sz="2000" b="0" i="0">
+                <a:solidFill>
+                  <a:srgbClr val="333333"/>
+                </a:solidFill>
+                <a:latin typeface="Calibri"/>
+              </a:rPr>
+              <a:t>–   Version inutil: hay que probar los respaldos.</a:t>
+            </a:r>
+          </a:p>
+          <a:p>
+            <a:pPr>
+              <a:spcAft>
+                <a:spcPts val="800"/>
+              </a:spcAft>
+            </a:pPr>
+            <a:r>
+              <a:rPr sz="2000" b="0" i="0">
+                <a:solidFill>
+                  <a:srgbClr val="333333"/>
+                </a:solidFill>
+                <a:latin typeface="Calibri"/>
+              </a:rPr>
+              <a:t>–   Version accionable: el primer lunes de cada mes se restaura el respaldo mas reciente en un esquema temporal de Oracle Live SQL o del entorno de pruebas, se comparan los conteos de filas de Dueno, Mascota, Cita y Factura contra produccion</a:t>
+            </a:r>
+          </a:p>
+          <a:p>
+            <a:pPr>
+              <a:spcAft>
+                <a:spcPts val="800"/>
+              </a:spcAft>
+            </a:pPr>
+            <a:r>
+              <a:rPr sz="2000" b="0" i="0">
+                <a:solidFill>
+                  <a:srgbClr val="333333"/>
+                </a:solidFill>
+                <a:latin typeface="Calibri"/>
+              </a:rPr>
+              <a:t>–   Y se registra fecha y resultado en la bitacora del proyecto; si no hay registro del mes, se declara que no hay respaldo.</a:t>
+            </a:r>
+          </a:p>
+          <a:p>
+            <a:pPr>
+              <a:spcAft>
+                <a:spcPts val="800"/>
+              </a:spcAft>
+            </a:pPr>
+            <a:r>
+              <a:rPr sz="2000" b="0" i="0">
+                <a:solidFill>
+                  <a:srgbClr val="333333"/>
+                </a:solidFill>
+                <a:latin typeface="Calibri"/>
+              </a:rPr>
+              <a:t>–   La segunda se puede auditar, la primera es una intencion.</a:t>
+            </a:r>
+          </a:p>
+        </p:txBody>
+      </p:sp>
+      <p:sp>
+        <p:nvSpPr>
+          <p:cNvPr id="6" name="TextBox 5"/>
+          <p:cNvSpPr txBox="1"/>
+          <p:nvPr/>
+        </p:nvSpPr>
+        <p:spPr>
+          <a:xfrm>
+            <a:off x="11185855" y="6473952"/>
+            <a:ext cx="640080" cy="274320"/>
+          </a:xfrm>
+          <a:prstGeom prst="rect">
+            <a:avLst/>
+          </a:prstGeom>
+          <a:noFill/>
+        </p:spPr>
+        <p:txBody>
+          <a:bodyPr wrap="square">
+            <a:spAutoFit/>
+          </a:bodyPr>
+          <a:lstStyle/>
+          <a:p>
+            <a:pPr algn="r"/>
+            <a:r>
+              <a:rPr sz="1100" b="0" i="0">
+                <a:solidFill>
+                  <a:srgbClr val="666666"/>
+                </a:solidFill>
+                <a:latin typeface="Calibri"/>
+              </a:rPr>
+              <a:t>16</a:t>
+            </a:r>
+          </a:p>
+        </p:txBody>
+      </p:sp>
+    </p:spTree>
+  </p:cSld>
+  <p:clrMapOvr>
+    <a:masterClrMapping/>
+  </p:clrMapOvr>
+</p:sld>
+</file>
+
+<file path=ppt/slides/slide17.xml><?xml version="1.0" encoding="utf-8"?>
+<p:sld xmlns:a="http://schemas.openxmlformats.org/drawingml/2006/main" xmlns:p="http://schemas.openxmlformats.org/presentationml/2006/main" xmlns:r="http://schemas.openxmlformats.org/officeDocument/2006/relationships">
+  <p:cSld>
+    <p:bg>
+      <p:bgPr>
+        <a:solidFill>
+          <a:srgbClr val="FFFFFF"/>
+        </a:solidFill>
+        <a:effectLst/>
+      </p:bgPr>
+    </p:bg>
+    <p:spTree>
+      <p:nvGrpSpPr>
+        <p:cNvPr id="1" name=""/>
+        <p:cNvGrpSpPr/>
+        <p:nvPr/>
+      </p:nvGrpSpPr>
+      <p:grpSpPr/>
+      <p:sp>
+        <p:nvSpPr>
+          <p:cNvPr id="2" name="Rectangle 1"/>
+          <p:cNvSpPr/>
+          <p:nvPr/>
+        </p:nvSpPr>
+        <p:spPr>
+          <a:xfrm>
+            <a:off x="0" y="0"/>
+            <a:ext cx="12191695" cy="960120"/>
+          </a:xfrm>
+          <a:prstGeom prst="rect">
+            <a:avLst/>
+          </a:prstGeom>
+          <a:solidFill>
+            <a:srgbClr val="095292"/>
+          </a:solidFill>
+          <a:ln>
+            <a:noFill/>
+          </a:ln>
+        </p:spPr>
+        <p:style>
+          <a:lnRef idx="1">
+            <a:schemeClr val="accent1"/>
+          </a:lnRef>
+          <a:fillRef idx="3">
+            <a:schemeClr val="accent1"/>
+          </a:fillRef>
+          <a:effectRef idx="2">
+            <a:schemeClr val="accent1"/>
+          </a:effectRef>
+          <a:fontRef idx="minor">
+            <a:schemeClr val="lt1"/>
+          </a:fontRef>
+        </p:style>
+        <p:txBody>
+          <a:bodyPr rtlCol="0" anchor="ctr"/>
+          <a:lstStyle/>
+          <a:p>
+            <a:pPr algn="ctr"/>
+          </a:p>
+        </p:txBody>
+      </p:sp>
+      <p:sp>
+        <p:nvSpPr>
+          <p:cNvPr id="3" name="Rectangle 2"/>
+          <p:cNvSpPr/>
+          <p:nvPr/>
+        </p:nvSpPr>
+        <p:spPr>
+          <a:xfrm>
+            <a:off x="0" y="960120"/>
+            <a:ext cx="12191695" cy="41148"/>
+          </a:xfrm>
+          <a:prstGeom prst="rect">
+            <a:avLst/>
+          </a:prstGeom>
+          <a:solidFill>
+            <a:srgbClr val="FFD000"/>
+          </a:solidFill>
+          <a:ln>
+            <a:noFill/>
+          </a:ln>
+        </p:spPr>
+        <p:style>
+          <a:lnRef idx="1">
+            <a:schemeClr val="accent1"/>
+          </a:lnRef>
+          <a:fillRef idx="3">
+            <a:schemeClr val="accent1"/>
+          </a:fillRef>
+          <a:effectRef idx="2">
+            <a:schemeClr val="accent1"/>
+          </a:effectRef>
+          <a:fontRef idx="minor">
+            <a:schemeClr val="lt1"/>
+          </a:fontRef>
+        </p:style>
+        <p:txBody>
+          <a:bodyPr rtlCol="0" anchor="ctr"/>
+          <a:lstStyle/>
+          <a:p>
+            <a:pPr algn="ctr"/>
+          </a:p>
+        </p:txBody>
+      </p:sp>
+      <p:sp>
+        <p:nvSpPr>
+          <p:cNvPr id="4" name="TextBox 3"/>
+          <p:cNvSpPr txBox="1"/>
+          <p:nvPr/>
+        </p:nvSpPr>
+        <p:spPr>
+          <a:xfrm>
+            <a:off x="457200" y="164592"/>
+            <a:ext cx="11277295" cy="502920"/>
+          </a:xfrm>
+          <a:prstGeom prst="rect">
+            <a:avLst/>
+          </a:prstGeom>
+          <a:noFill/>
+        </p:spPr>
+        <p:txBody>
+          <a:bodyPr wrap="square">
+            <a:spAutoFit/>
+          </a:bodyPr>
+          <a:lstStyle/>
+          <a:p>
+            <a:r>
+              <a:rPr sz="2600" b="1" i="0">
+                <a:solidFill>
+                  <a:srgbClr val="FFFFFF"/>
+                </a:solidFill>
+                <a:latin typeface="Calibri"/>
+              </a:rPr>
+              <a:t>Lo que decide la calificacion: lecciones accionables (2/2)</a:t>
+            </a:r>
+          </a:p>
+        </p:txBody>
+      </p:sp>
+      <p:sp>
+        <p:nvSpPr>
+          <p:cNvPr id="5" name="TextBox 4"/>
+          <p:cNvSpPr txBox="1"/>
+          <p:nvPr/>
+        </p:nvSpPr>
+        <p:spPr>
+          <a:xfrm>
+            <a:off x="457200" y="1170432"/>
+            <a:ext cx="11277295" cy="5230368"/>
+          </a:xfrm>
+          <a:prstGeom prst="rect">
+            <a:avLst/>
+          </a:prstGeom>
+          <a:noFill/>
+        </p:spPr>
+        <p:txBody>
+          <a:bodyPr wrap="square">
+            <a:spAutoFit/>
+          </a:bodyPr>
+          <a:lstStyle/>
+          <a:p>
+            <a:pPr>
+              <a:spcAft>
+                <a:spcPts val="800"/>
+              </a:spcAft>
+            </a:pPr>
+            <a:r>
+              <a:rPr sz="2000" b="0" i="0">
+                <a:solidFill>
+                  <a:srgbClr val="333333"/>
+                </a:solidFill>
+                <a:latin typeface="Calibri"/>
+              </a:rPr>
+              <a:t>–   Aplique el mismo molde a los otros casos y ya tiene la cuarta columna de la tabla: del caso de permisos sale crear el rol rol_vetcare_app con GRANT EXECUTE sobre los procedimientos y revocar todo SELECT</a:t>
+            </a:r>
+          </a:p>
+          <a:p>
+            <a:pPr>
+              <a:spcAft>
+                <a:spcPts val="800"/>
+              </a:spcAft>
+            </a:pPr>
+            <a:r>
+              <a:rPr sz="2000" b="0" i="0">
+                <a:solidFill>
+                  <a:srgbClr val="333333"/>
+                </a:solidFill>
+                <a:latin typeface="Calibri"/>
+              </a:rPr>
+              <a:t>–   INSERT, UPDATE y DELETE directo sobre las tablas, verificado consultando las vistas de privilegios</a:t>
+            </a:r>
+          </a:p>
+          <a:p>
+            <a:pPr>
+              <a:spcAft>
+                <a:spcPts val="800"/>
+              </a:spcAft>
+            </a:pPr>
+            <a:r>
+              <a:rPr sz="2000" b="0" i="0">
+                <a:solidFill>
+                  <a:srgbClr val="333333"/>
+                </a:solidFill>
+                <a:latin typeface="Calibri"/>
+              </a:rPr>
+              <a:t>–   Del caso de concurrencia sale ALTER TABLE Cita ADD CONSTRAINT uq_cita_vet_franja UNIQUE (id_veterinario, fecha_hora) mas SELECT FOR UPDATE al descontar stock, verificado con dos sesiones simultaneas</a:t>
+            </a:r>
+          </a:p>
+          <a:p>
+            <a:pPr>
+              <a:spcAft>
+                <a:spcPts val="800"/>
+              </a:spcAft>
+            </a:pPr>
+            <a:r>
+              <a:rPr sz="2000" b="0" i="0">
+                <a:solidFill>
+                  <a:srgbClr val="333333"/>
+                </a:solidFill>
+                <a:latin typeface="Calibri"/>
+              </a:rPr>
+              <a:t>–   Del caso de migracion sale que todo cambio de esquema tenga script de ida, script de retorno y conteo de verificacion.</a:t>
+            </a:r>
+          </a:p>
+          <a:p>
+            <a:pPr>
+              <a:spcAft>
+                <a:spcPts val="800"/>
+              </a:spcAft>
+            </a:pPr>
+            <a:r>
+              <a:rPr sz="2000" b="0" i="0">
+                <a:solidFill>
+                  <a:srgbClr val="333333"/>
+                </a:solidFill>
+                <a:latin typeface="Calibri"/>
+              </a:rPr>
+              <a:t>–   Sobre las preguntas que llegaran por el canal del curso: si piden inventar un caso, la respuesta es no, cada caso debe ser verificable con una fuente publica o declararse explicitamente como hipotetico</a:t>
+            </a:r>
+          </a:p>
+          <a:p>
+            <a:pPr>
+              <a:spcAft>
+                <a:spcPts val="800"/>
+              </a:spcAft>
+            </a:pPr>
+            <a:r>
+              <a:rPr sz="2000" b="0" i="0">
+                <a:solidFill>
+                  <a:srgbClr val="333333"/>
+                </a:solidFill>
+                <a:latin typeface="Calibri"/>
+              </a:rPr>
+              <a:t>–   Si el caso no tiene detalle tecnico publicado, se escribe solo lo documentado y se marca aparte lo que es inferencia propia</a:t>
+            </a:r>
+          </a:p>
+          <a:p>
+            <a:pPr>
+              <a:spcAft>
+                <a:spcPts val="800"/>
+              </a:spcAft>
+            </a:pPr>
+            <a:r>
+              <a:rPr sz="2000" b="0" i="0">
+                <a:solidFill>
+                  <a:srgbClr val="333333"/>
+                </a:solidFill>
+                <a:latin typeface="Calibri"/>
+              </a:rPr>
+              <a:t>–   Porque separar hecho de suposicion es parte de la nota; y si preguntan cuanto debe medir cada celda, la convencion de este entregable es de tres a cinco lineas.</a:t>
+            </a:r>
+          </a:p>
+        </p:txBody>
+      </p:sp>
+      <p:sp>
+        <p:nvSpPr>
+          <p:cNvPr id="6" name="TextBox 5"/>
+          <p:cNvSpPr txBox="1"/>
+          <p:nvPr/>
+        </p:nvSpPr>
+        <p:spPr>
+          <a:xfrm>
+            <a:off x="11185855" y="6473952"/>
+            <a:ext cx="640080" cy="274320"/>
+          </a:xfrm>
+          <a:prstGeom prst="rect">
+            <a:avLst/>
+          </a:prstGeom>
+          <a:noFill/>
+        </p:spPr>
+        <p:txBody>
+          <a:bodyPr wrap="square">
+            <a:spAutoFit/>
+          </a:bodyPr>
+          <a:lstStyle/>
+          <a:p>
+            <a:pPr algn="r"/>
+            <a:r>
+              <a:rPr sz="1100" b="0" i="0">
+                <a:solidFill>
+                  <a:srgbClr val="666666"/>
+                </a:solidFill>
+                <a:latin typeface="Calibri"/>
+              </a:rPr>
+              <a:t>17</a:t>
+            </a:r>
+          </a:p>
+        </p:txBody>
+      </p:sp>
+    </p:spTree>
+  </p:cSld>
+  <p:clrMapOvr>
+    <a:masterClrMapping/>
+  </p:clrMapOvr>
+</p:sld>
+</file>
+
+<file path=ppt/slides/slide18.xml><?xml version="1.0" encoding="utf-8"?>
+<p:sld xmlns:a="http://schemas.openxmlformats.org/drawingml/2006/main" xmlns:p="http://schemas.openxmlformats.org/presentationml/2006/main" xmlns:r="http://schemas.openxmlformats.org/officeDocument/2006/relationships">
+  <p:cSld>
+    <p:bg>
+      <p:bgPr>
+        <a:solidFill>
+          <a:srgbClr val="FFFFFF"/>
+        </a:solidFill>
+        <a:effectLst/>
+      </p:bgPr>
+    </p:bg>
+    <p:spTree>
+      <p:nvGrpSpPr>
+        <p:cNvPr id="1" name=""/>
+        <p:cNvGrpSpPr/>
+        <p:nvPr/>
+      </p:nvGrpSpPr>
+      <p:grpSpPr/>
+      <p:sp>
+        <p:nvSpPr>
+          <p:cNvPr id="2" name="Rectangle 1"/>
+          <p:cNvSpPr/>
+          <p:nvPr/>
+        </p:nvSpPr>
+        <p:spPr>
+          <a:xfrm>
+            <a:off x="0" y="0"/>
+            <a:ext cx="12191695" cy="960120"/>
+          </a:xfrm>
+          <a:prstGeom prst="rect">
+            <a:avLst/>
+          </a:prstGeom>
+          <a:solidFill>
+            <a:srgbClr val="095292"/>
+          </a:solidFill>
+          <a:ln>
+            <a:noFill/>
+          </a:ln>
+        </p:spPr>
+        <p:style>
+          <a:lnRef idx="1">
+            <a:schemeClr val="accent1"/>
+          </a:lnRef>
+          <a:fillRef idx="3">
+            <a:schemeClr val="accent1"/>
+          </a:fillRef>
+          <a:effectRef idx="2">
+            <a:schemeClr val="accent1"/>
+          </a:effectRef>
+          <a:fontRef idx="minor">
+            <a:schemeClr val="lt1"/>
+          </a:fontRef>
+        </p:style>
+        <p:txBody>
+          <a:bodyPr rtlCol="0" anchor="ctr"/>
+          <a:lstStyle/>
+          <a:p>
+            <a:pPr algn="ctr"/>
+          </a:p>
+        </p:txBody>
+      </p:sp>
+      <p:sp>
+        <p:nvSpPr>
+          <p:cNvPr id="3" name="Rectangle 2"/>
+          <p:cNvSpPr/>
+          <p:nvPr/>
+        </p:nvSpPr>
+        <p:spPr>
+          <a:xfrm>
+            <a:off x="0" y="960120"/>
+            <a:ext cx="12191695" cy="41148"/>
+          </a:xfrm>
+          <a:prstGeom prst="rect">
+            <a:avLst/>
+          </a:prstGeom>
+          <a:solidFill>
+            <a:srgbClr val="FFD000"/>
+          </a:solidFill>
+          <a:ln>
+            <a:noFill/>
+          </a:ln>
+        </p:spPr>
+        <p:style>
+          <a:lnRef idx="1">
+            <a:schemeClr val="accent1"/>
+          </a:lnRef>
+          <a:fillRef idx="3">
+            <a:schemeClr val="accent1"/>
+          </a:fillRef>
+          <a:effectRef idx="2">
+            <a:schemeClr val="accent1"/>
+          </a:effectRef>
+          <a:fontRef idx="minor">
+            <a:schemeClr val="lt1"/>
+          </a:fontRef>
+        </p:style>
+        <p:txBody>
+          <a:bodyPr rtlCol="0" anchor="ctr"/>
+          <a:lstStyle/>
+          <a:p>
+            <a:pPr algn="ctr"/>
+          </a:p>
+        </p:txBody>
+      </p:sp>
+      <p:sp>
+        <p:nvSpPr>
+          <p:cNvPr id="4" name="TextBox 3"/>
+          <p:cNvSpPr txBox="1"/>
+          <p:nvPr/>
+        </p:nvSpPr>
+        <p:spPr>
+          <a:xfrm>
+            <a:off x="457200" y="164592"/>
+            <a:ext cx="11277295" cy="502920"/>
+          </a:xfrm>
+          <a:prstGeom prst="rect">
+            <a:avLst/>
+          </a:prstGeom>
+          <a:noFill/>
+        </p:spPr>
+        <p:txBody>
+          <a:bodyPr wrap="square">
+            <a:spAutoFit/>
+          </a:bodyPr>
+          <a:lstStyle/>
+          <a:p>
+            <a:r>
+              <a:rPr sz="2600" b="1" i="0">
+                <a:solidFill>
+                  <a:srgbClr val="FFFFFF"/>
+                </a:solidFill>
+                <a:latin typeface="Calibri"/>
+              </a:rPr>
+              <a:t>Demo del dia</a:t>
+            </a:r>
+          </a:p>
+        </p:txBody>
+      </p:sp>
+      <p:sp>
+        <p:nvSpPr>
+          <p:cNvPr id="5" name="TextBox 4"/>
+          <p:cNvSpPr txBox="1"/>
+          <p:nvPr/>
+        </p:nvSpPr>
+        <p:spPr>
+          <a:xfrm>
+            <a:off x="457200" y="1170432"/>
+            <a:ext cx="11277295" cy="5230368"/>
+          </a:xfrm>
+          <a:prstGeom prst="rect">
+            <a:avLst/>
+          </a:prstGeom>
+          <a:noFill/>
+        </p:spPr>
+        <p:txBody>
+          <a:bodyPr wrap="square">
+            <a:spAutoFit/>
+          </a:bodyPr>
+          <a:lstStyle/>
+          <a:p>
+            <a:pPr>
+              <a:spcAft>
+                <a:spcPts val="800"/>
+              </a:spcAft>
+            </a:pPr>
+            <a:r>
+              <a:rPr sz="2000" b="0" i="0">
+                <a:solidFill>
+                  <a:srgbClr val="333333"/>
+                </a:solidFill>
+                <a:latin typeface="Calibri"/>
+              </a:rPr>
+              <a:t>–   </a:t>
+            </a:r>
+            <a:r>
+              <a:rPr sz="2000" b="1" i="0">
+                <a:solidFill>
+                  <a:srgbClr val="333333"/>
+                </a:solidFill>
+                <a:latin typeface="Calibri"/>
+              </a:rPr>
+              <a:t>Herramienta:</a:t>
+            </a:r>
+            <a:r>
+              <a:rPr sz="2000" b="0" i="0">
+                <a:solidFill>
+                  <a:srgbClr val="333333"/>
+                </a:solidFill>
+                <a:latin typeface="Calibri"/>
+              </a:rPr>
+              <a:t> Google Docs</a:t>
+            </a:r>
+          </a:p>
+          <a:p>
+            <a:pPr>
+              <a:spcAft>
+                <a:spcPts val="800"/>
+              </a:spcAft>
+            </a:pPr>
+            <a:r>
+              <a:rPr sz="2000" b="0" i="0">
+                <a:solidFill>
+                  <a:srgbClr val="333333"/>
+                </a:solidFill>
+                <a:latin typeface="Calibri"/>
+              </a:rPr>
+              <a:t>–   </a:t>
+            </a:r>
+            <a:r>
+              <a:rPr sz="2000" b="1" i="0">
+                <a:solidFill>
+                  <a:srgbClr val="333333"/>
+                </a:solidFill>
+                <a:latin typeface="Calibri"/>
+              </a:rPr>
+              <a:t>Demo:</a:t>
+            </a:r>
+            <a:r>
+              <a:rPr sz="2000" b="0" i="0">
+                <a:solidFill>
+                  <a:srgbClr val="333333"/>
+                </a:solidFill>
+                <a:latin typeface="Calibri"/>
+              </a:rPr>
+              <a:t> Plantilla: contexto -&gt; fallo -&gt; leccion -&gt; cambio en VetCare.</a:t>
+            </a:r>
+          </a:p>
+          <a:p>
+            <a:pPr>
+              <a:spcAft>
+                <a:spcPts val="800"/>
+              </a:spcAft>
+            </a:pPr>
+            <a:r>
+              <a:rPr sz="2000" b="0" i="0">
+                <a:solidFill>
+                  <a:srgbClr val="333333"/>
+                </a:solidFill>
+                <a:latin typeface="Calibri"/>
+              </a:rPr>
+              <a:t>–   Sigan el mismo dominio VetCare (no inventen otro caso).</a:t>
+            </a:r>
+          </a:p>
+          <a:p>
+            <a:pPr>
+              <a:spcAft>
+                <a:spcPts val="800"/>
+              </a:spcAft>
+            </a:pPr>
+            <a:r>
+              <a:rPr sz="2000" b="0" i="0">
+                <a:solidFill>
+                  <a:srgbClr val="333333"/>
+                </a:solidFill>
+                <a:latin typeface="Calibri"/>
+              </a:rPr>
+              <a:t>–   Al final de la demo: dejar enlace/script compartible al grupo.</a:t>
+            </a:r>
+          </a:p>
+        </p:txBody>
+      </p:sp>
+      <p:sp>
+        <p:nvSpPr>
+          <p:cNvPr id="6" name="TextBox 5"/>
+          <p:cNvSpPr txBox="1"/>
+          <p:nvPr/>
+        </p:nvSpPr>
+        <p:spPr>
+          <a:xfrm>
+            <a:off x="11185855" y="6473952"/>
+            <a:ext cx="640080" cy="274320"/>
+          </a:xfrm>
+          <a:prstGeom prst="rect">
+            <a:avLst/>
+          </a:prstGeom>
+          <a:noFill/>
+        </p:spPr>
+        <p:txBody>
+          <a:bodyPr wrap="square">
+            <a:spAutoFit/>
+          </a:bodyPr>
+          <a:lstStyle/>
+          <a:p>
+            <a:pPr algn="r"/>
+            <a:r>
+              <a:rPr sz="1100" b="0" i="0">
+                <a:solidFill>
+                  <a:srgbClr val="666666"/>
+                </a:solidFill>
+                <a:latin typeface="Calibri"/>
+              </a:rPr>
+              <a:t>18</a:t>
+            </a:r>
+          </a:p>
+        </p:txBody>
+      </p:sp>
+    </p:spTree>
+  </p:cSld>
+  <p:clrMapOvr>
+    <a:masterClrMapping/>
+  </p:clrMapOvr>
+</p:sld>
+</file>
+
+<file path=ppt/slides/slide19.xml><?xml version="1.0" encoding="utf-8"?>
+<p:sld xmlns:a="http://schemas.openxmlformats.org/drawingml/2006/main" xmlns:p="http://schemas.openxmlformats.org/presentationml/2006/main" xmlns:r="http://schemas.openxmlformats.org/officeDocument/2006/relationships">
+  <p:cSld>
+    <p:bg>
+      <p:bgPr>
+        <a:solidFill>
+          <a:srgbClr val="FFFFFF"/>
+        </a:solidFill>
+        <a:effectLst/>
+      </p:bgPr>
+    </p:bg>
+    <p:spTree>
+      <p:nvGrpSpPr>
+        <p:cNvPr id="1" name=""/>
+        <p:cNvGrpSpPr/>
+        <p:nvPr/>
+      </p:nvGrpSpPr>
+      <p:grpSpPr/>
+      <p:sp>
+        <p:nvSpPr>
+          <p:cNvPr id="2" name="Rectangle 1"/>
+          <p:cNvSpPr/>
+          <p:nvPr/>
+        </p:nvSpPr>
+        <p:spPr>
+          <a:xfrm>
+            <a:off x="0" y="0"/>
+            <a:ext cx="12191695" cy="1170432"/>
+          </a:xfrm>
+          <a:prstGeom prst="rect">
+            <a:avLst/>
+          </a:prstGeom>
+          <a:solidFill>
+            <a:srgbClr val="095292"/>
+          </a:solidFill>
+          <a:ln>
+            <a:noFill/>
+          </a:ln>
+        </p:spPr>
+        <p:style>
+          <a:lnRef idx="1">
+            <a:schemeClr val="accent1"/>
+          </a:lnRef>
+          <a:fillRef idx="3">
+            <a:schemeClr val="accent1"/>
+          </a:fillRef>
+          <a:effectRef idx="2">
+            <a:schemeClr val="accent1"/>
+          </a:effectRef>
+          <a:fontRef idx="minor">
+            <a:schemeClr val="lt1"/>
+          </a:fontRef>
+        </p:style>
+        <p:txBody>
+          <a:bodyPr rtlCol="0" anchor="ctr"/>
+          <a:lstStyle/>
+          <a:p>
+            <a:pPr algn="ctr"/>
+          </a:p>
+        </p:txBody>
+      </p:sp>
+      <p:sp>
+        <p:nvSpPr>
+          <p:cNvPr id="3" name="Rectangle 2"/>
+          <p:cNvSpPr/>
+          <p:nvPr/>
+        </p:nvSpPr>
+        <p:spPr>
+          <a:xfrm>
+            <a:off x="0" y="1170432"/>
+            <a:ext cx="12191695" cy="41148"/>
+          </a:xfrm>
+          <a:prstGeom prst="rect">
+            <a:avLst/>
+          </a:prstGeom>
+          <a:solidFill>
+            <a:srgbClr val="FFD000"/>
+          </a:solidFill>
+          <a:ln>
+            <a:noFill/>
+          </a:ln>
+        </p:spPr>
+        <p:style>
+          <a:lnRef idx="1">
+            <a:schemeClr val="accent1"/>
+          </a:lnRef>
+          <a:fillRef idx="3">
+            <a:schemeClr val="accent1"/>
+          </a:fillRef>
+          <a:effectRef idx="2">
+            <a:schemeClr val="accent1"/>
+          </a:effectRef>
+          <a:fontRef idx="minor">
+            <a:schemeClr val="lt1"/>
+          </a:fontRef>
+        </p:style>
+        <p:txBody>
+          <a:bodyPr rtlCol="0" anchor="ctr"/>
+          <a:lstStyle/>
+          <a:p>
+            <a:pPr algn="ctr"/>
+          </a:p>
+        </p:txBody>
+      </p:sp>
+      <p:sp>
+        <p:nvSpPr>
+          <p:cNvPr id="4" name="TextBox 3"/>
+          <p:cNvSpPr txBox="1"/>
+          <p:nvPr/>
+        </p:nvSpPr>
+        <p:spPr>
+          <a:xfrm>
+            <a:off x="457200" y="164592"/>
+            <a:ext cx="11277295" cy="384048"/>
+          </a:xfrm>
+          <a:prstGeom prst="rect">
+            <a:avLst/>
+          </a:prstGeom>
+          <a:noFill/>
+        </p:spPr>
+        <p:txBody>
+          <a:bodyPr wrap="square">
+            <a:spAutoFit/>
+          </a:bodyPr>
+          <a:lstStyle/>
+          <a:p>
+            <a:r>
+              <a:rPr sz="2600" b="1" i="0">
+                <a:solidFill>
+                  <a:srgbClr val="FFFFFF"/>
+                </a:solidFill>
+                <a:latin typeface="Calibri"/>
+              </a:rPr>
+              <a:t>Herramientas de hoy</a:t>
+            </a:r>
+          </a:p>
+        </p:txBody>
+      </p:sp>
+      <p:sp>
+        <p:nvSpPr>
+          <p:cNvPr id="5" name="TextBox 4"/>
+          <p:cNvSpPr txBox="1"/>
+          <p:nvPr/>
+        </p:nvSpPr>
+        <p:spPr>
+          <a:xfrm>
+            <a:off x="457200" y="566928"/>
+            <a:ext cx="11277295" cy="411480"/>
+          </a:xfrm>
+          <a:prstGeom prst="rect">
+            <a:avLst/>
+          </a:prstGeom>
+          <a:noFill/>
+        </p:spPr>
+        <p:txBody>
+          <a:bodyPr wrap="square">
+            <a:spAutoFit/>
+          </a:bodyPr>
+          <a:lstStyle/>
+          <a:p>
+            <a:r>
+              <a:rPr sz="1400" b="0" i="0">
+                <a:solidFill>
+                  <a:srgbClr val="B8D8EE"/>
+                </a:solidFill>
+                <a:latin typeface="Calibri"/>
+              </a:rPr>
+              <a:t>Gratis · navegador o free tier</a:t>
+            </a:r>
+          </a:p>
+        </p:txBody>
+      </p:sp>
+      <p:sp>
+        <p:nvSpPr>
+          <p:cNvPr id="6" name="Rounded Rectangle 5"/>
+          <p:cNvSpPr/>
+          <p:nvPr/>
+        </p:nvSpPr>
+        <p:spPr>
+          <a:xfrm>
+            <a:off x="457200" y="1591056"/>
+            <a:ext cx="3624986" cy="2331720"/>
+          </a:xfrm>
+          <a:prstGeom prst="roundRect">
+            <a:avLst>
+              <a:gd name="adj" fmla="val 12000"/>
+            </a:avLst>
+          </a:prstGeom>
+          <a:solidFill>
+            <a:srgbClr val="F2F2F2"/>
+          </a:solidFill>
+          <a:ln>
+            <a:noFill/>
+          </a:ln>
+        </p:spPr>
+        <p:style>
+          <a:lnRef idx="1">
+            <a:schemeClr val="accent1"/>
+          </a:lnRef>
+          <a:fillRef idx="3">
+            <a:schemeClr val="accent1"/>
+          </a:fillRef>
+          <a:effectRef idx="2">
+            <a:schemeClr val="accent1"/>
+          </a:effectRef>
+          <a:fontRef idx="minor">
+            <a:schemeClr val="lt1"/>
+          </a:fontRef>
+        </p:style>
+        <p:txBody>
+          <a:bodyPr rtlCol="0" anchor="ctr"/>
+          <a:lstStyle/>
+          <a:p>
+            <a:pPr algn="ctr"/>
+          </a:p>
+        </p:txBody>
+      </p:sp>
+      <p:sp>
+        <p:nvSpPr>
+          <p:cNvPr id="7" name="Rectangle 6"/>
+          <p:cNvSpPr/>
+          <p:nvPr/>
+        </p:nvSpPr>
+        <p:spPr>
+          <a:xfrm>
+            <a:off x="457200" y="1591056"/>
+            <a:ext cx="3624986" cy="64008"/>
+          </a:xfrm>
+          <a:prstGeom prst="rect">
+            <a:avLst/>
+          </a:prstGeom>
+          <a:solidFill>
+            <a:srgbClr val="095292"/>
+          </a:solidFill>
+          <a:ln>
+            <a:noFill/>
+          </a:ln>
+        </p:spPr>
+        <p:style>
+          <a:lnRef idx="1">
+            <a:schemeClr val="accent1"/>
+          </a:lnRef>
+          <a:fillRef idx="3">
+            <a:schemeClr val="accent1"/>
+          </a:fillRef>
+          <a:effectRef idx="2">
+            <a:schemeClr val="accent1"/>
+          </a:effectRef>
+          <a:fontRef idx="minor">
+            <a:schemeClr val="lt1"/>
+          </a:fontRef>
+        </p:style>
+        <p:txBody>
+          <a:bodyPr rtlCol="0" anchor="ctr"/>
+          <a:lstStyle/>
+          <a:p>
+            <a:pPr algn="ctr"/>
+          </a:p>
+        </p:txBody>
+      </p:sp>
+      <p:sp>
+        <p:nvSpPr>
+          <p:cNvPr id="8" name="Rectangle 7"/>
+          <p:cNvSpPr/>
+          <p:nvPr/>
+        </p:nvSpPr>
+        <p:spPr>
+          <a:xfrm>
+            <a:off x="457200" y="1655064"/>
+            <a:ext cx="3624986" cy="27432"/>
+          </a:xfrm>
+          <a:prstGeom prst="rect">
+            <a:avLst/>
+          </a:prstGeom>
+          <a:solidFill>
+            <a:srgbClr val="FFD000"/>
+          </a:solidFill>
+          <a:ln>
+            <a:noFill/>
+          </a:ln>
+        </p:spPr>
+        <p:style>
+          <a:lnRef idx="1">
+            <a:schemeClr val="accent1"/>
+          </a:lnRef>
+          <a:fillRef idx="3">
+            <a:schemeClr val="accent1"/>
+          </a:fillRef>
+          <a:effectRef idx="2">
+            <a:schemeClr val="accent1"/>
+          </a:effectRef>
+          <a:fontRef idx="minor">
+            <a:schemeClr val="lt1"/>
+          </a:fontRef>
+        </p:style>
+        <p:txBody>
+          <a:bodyPr rtlCol="0" anchor="ctr"/>
+          <a:lstStyle/>
+          <a:p>
+            <a:pPr algn="ctr"/>
+          </a:p>
+        </p:txBody>
+      </p:sp>
       <p:pic>
         <p:nvPicPr>
-          <p:cNvPr id="3" name="Picture 2" descr="logo_uniajc_color.png"/>
+          <p:cNvPr id="9" name="Picture 8" descr="google_docs.png"/>
           <p:cNvPicPr>
             <a:picLocks noChangeAspect="1"/>
           </p:cNvPicPr>
@@ -5955,8 +6426,8 @@
         </p:blipFill>
         <p:spPr>
           <a:xfrm>
-            <a:off x="10271455" y="5998464"/>
-            <a:ext cx="1463040" cy="643233"/>
+            <a:off x="1643329" y="1847087"/>
+            <a:ext cx="1252728" cy="1252728"/>
           </a:xfrm>
           <a:prstGeom prst="rect">
             <a:avLst/>
@@ -5965,14 +6436,14 @@
       </p:pic>
       <p:sp>
         <p:nvSpPr>
-          <p:cNvPr id="4" name="TextBox 3"/>
+          <p:cNvPr id="10" name="TextBox 9"/>
           <p:cNvSpPr txBox="1"/>
           <p:nvPr/>
         </p:nvSpPr>
         <p:spPr>
           <a:xfrm>
-            <a:off x="457200" y="1737360"/>
-            <a:ext cx="11277295" cy="1097280"/>
+            <a:off x="530352" y="3191256"/>
+            <a:ext cx="3478682" cy="621792"/>
           </a:xfrm>
           <a:prstGeom prst="rect">
             <a:avLst/>
@@ -5980,32 +6451,456 @@
           <a:noFill/>
         </p:spPr>
         <p:txBody>
-          <a:bodyPr wrap="square" anchor="ctr"/>
+          <a:bodyPr wrap="square" anchor="t"/>
           <a:lstStyle/>
           <a:p>
             <a:pPr algn="ctr"/>
             <a:r>
-              <a:rPr sz="3400" b="1" i="0">
+              <a:rPr sz="1300" b="1" i="0">
                 <a:solidFill>
                   <a:srgbClr val="095292"/>
                 </a:solidFill>
                 <a:latin typeface="Calibri"/>
               </a:rPr>
-              <a:t>Clase 13 · VetCare avanza</a:t>
-            </a:r>
-          </a:p>
-        </p:txBody>
-      </p:sp>
-      <p:sp>
-        <p:nvSpPr>
-          <p:cNvPr id="5" name="TextBox 4"/>
+              <a:t>Google Docs</a:t>
+            </a:r>
+          </a:p>
+          <a:p>
+            <a:pPr algn="ctr">
+              <a:spcBef>
+                <a:spcPts val="200"/>
+              </a:spcBef>
+            </a:pPr>
+            <a:r>
+              <a:rPr sz="1000" b="0" i="0">
+                <a:solidFill>
+                  <a:srgbClr val="666666"/>
+                </a:solidFill>
+                <a:latin typeface="Calibri"/>
+              </a:rPr>
+              <a:t>Caso real</a:t>
+            </a:r>
+          </a:p>
+        </p:txBody>
+      </p:sp>
+      <p:sp>
+        <p:nvSpPr>
+          <p:cNvPr id="11" name="Rounded Rectangle 10"/>
+          <p:cNvSpPr/>
+          <p:nvPr/>
+        </p:nvSpPr>
+        <p:spPr>
+          <a:xfrm>
+            <a:off x="4283354" y="1591056"/>
+            <a:ext cx="3624986" cy="2331720"/>
+          </a:xfrm>
+          <a:prstGeom prst="roundRect">
+            <a:avLst>
+              <a:gd name="adj" fmla="val 12000"/>
+            </a:avLst>
+          </a:prstGeom>
+          <a:solidFill>
+            <a:srgbClr val="F2F2F2"/>
+          </a:solidFill>
+          <a:ln>
+            <a:noFill/>
+          </a:ln>
+        </p:spPr>
+        <p:style>
+          <a:lnRef idx="1">
+            <a:schemeClr val="accent1"/>
+          </a:lnRef>
+          <a:fillRef idx="3">
+            <a:schemeClr val="accent1"/>
+          </a:fillRef>
+          <a:effectRef idx="2">
+            <a:schemeClr val="accent1"/>
+          </a:effectRef>
+          <a:fontRef idx="minor">
+            <a:schemeClr val="lt1"/>
+          </a:fontRef>
+        </p:style>
+        <p:txBody>
+          <a:bodyPr rtlCol="0" anchor="ctr"/>
+          <a:lstStyle/>
+          <a:p>
+            <a:pPr algn="ctr"/>
+          </a:p>
+        </p:txBody>
+      </p:sp>
+      <p:sp>
+        <p:nvSpPr>
+          <p:cNvPr id="12" name="Rectangle 11"/>
+          <p:cNvSpPr/>
+          <p:nvPr/>
+        </p:nvSpPr>
+        <p:spPr>
+          <a:xfrm>
+            <a:off x="4283354" y="1591056"/>
+            <a:ext cx="3624986" cy="64008"/>
+          </a:xfrm>
+          <a:prstGeom prst="rect">
+            <a:avLst/>
+          </a:prstGeom>
+          <a:solidFill>
+            <a:srgbClr val="095292"/>
+          </a:solidFill>
+          <a:ln>
+            <a:noFill/>
+          </a:ln>
+        </p:spPr>
+        <p:style>
+          <a:lnRef idx="1">
+            <a:schemeClr val="accent1"/>
+          </a:lnRef>
+          <a:fillRef idx="3">
+            <a:schemeClr val="accent1"/>
+          </a:fillRef>
+          <a:effectRef idx="2">
+            <a:schemeClr val="accent1"/>
+          </a:effectRef>
+          <a:fontRef idx="minor">
+            <a:schemeClr val="lt1"/>
+          </a:fontRef>
+        </p:style>
+        <p:txBody>
+          <a:bodyPr rtlCol="0" anchor="ctr"/>
+          <a:lstStyle/>
+          <a:p>
+            <a:pPr algn="ctr"/>
+          </a:p>
+        </p:txBody>
+      </p:sp>
+      <p:sp>
+        <p:nvSpPr>
+          <p:cNvPr id="13" name="Rectangle 12"/>
+          <p:cNvSpPr/>
+          <p:nvPr/>
+        </p:nvSpPr>
+        <p:spPr>
+          <a:xfrm>
+            <a:off x="4283354" y="1655064"/>
+            <a:ext cx="3624986" cy="27432"/>
+          </a:xfrm>
+          <a:prstGeom prst="rect">
+            <a:avLst/>
+          </a:prstGeom>
+          <a:solidFill>
+            <a:srgbClr val="FFD000"/>
+          </a:solidFill>
+          <a:ln>
+            <a:noFill/>
+          </a:ln>
+        </p:spPr>
+        <p:style>
+          <a:lnRef idx="1">
+            <a:schemeClr val="accent1"/>
+          </a:lnRef>
+          <a:fillRef idx="3">
+            <a:schemeClr val="accent1"/>
+          </a:fillRef>
+          <a:effectRef idx="2">
+            <a:schemeClr val="accent1"/>
+          </a:effectRef>
+          <a:fontRef idx="minor">
+            <a:schemeClr val="lt1"/>
+          </a:fontRef>
+        </p:style>
+        <p:txBody>
+          <a:bodyPr rtlCol="0" anchor="ctr"/>
+          <a:lstStyle/>
+          <a:p>
+            <a:pPr algn="ctr"/>
+          </a:p>
+        </p:txBody>
+      </p:sp>
+      <p:pic>
+        <p:nvPicPr>
+          <p:cNvPr id="14" name="Picture 13" descr="drawio.png"/>
+          <p:cNvPicPr>
+            <a:picLocks noChangeAspect="1"/>
+          </p:cNvPicPr>
+          <p:nvPr/>
+        </p:nvPicPr>
+        <p:blipFill>
+          <a:blip r:embed="rId3"/>
+          <a:stretch>
+            <a:fillRect/>
+          </a:stretch>
+        </p:blipFill>
+        <p:spPr>
+          <a:xfrm>
+            <a:off x="5469483" y="1847087"/>
+            <a:ext cx="1252728" cy="1252728"/>
+          </a:xfrm>
+          <a:prstGeom prst="rect">
+            <a:avLst/>
+          </a:prstGeom>
+        </p:spPr>
+      </p:pic>
+      <p:sp>
+        <p:nvSpPr>
+          <p:cNvPr id="15" name="TextBox 14"/>
           <p:cNvSpPr txBox="1"/>
           <p:nvPr/>
         </p:nvSpPr>
         <p:spPr>
           <a:xfrm>
-            <a:off x="457200" y="3017520"/>
-            <a:ext cx="11277295" cy="1645920"/>
+            <a:off x="4356506" y="3191256"/>
+            <a:ext cx="3478682" cy="621792"/>
+          </a:xfrm>
+          <a:prstGeom prst="rect">
+            <a:avLst/>
+          </a:prstGeom>
+          <a:noFill/>
+        </p:spPr>
+        <p:txBody>
+          <a:bodyPr wrap="square" anchor="t"/>
+          <a:lstStyle/>
+          <a:p>
+            <a:pPr algn="ctr"/>
+            <a:r>
+              <a:rPr sz="1300" b="1" i="0">
+                <a:solidFill>
+                  <a:srgbClr val="095292"/>
+                </a:solidFill>
+                <a:latin typeface="Calibri"/>
+              </a:rPr>
+              <a:t>draw.io</a:t>
+            </a:r>
+          </a:p>
+          <a:p>
+            <a:pPr algn="ctr">
+              <a:spcBef>
+                <a:spcPts val="200"/>
+              </a:spcBef>
+            </a:pPr>
+            <a:r>
+              <a:rPr sz="1000" b="0" i="0">
+                <a:solidFill>
+                  <a:srgbClr val="666666"/>
+                </a:solidFill>
+                <a:latin typeface="Calibri"/>
+              </a:rPr>
+              <a:t>Leccion</a:t>
+            </a:r>
+          </a:p>
+        </p:txBody>
+      </p:sp>
+      <p:sp>
+        <p:nvSpPr>
+          <p:cNvPr id="16" name="Rounded Rectangle 15"/>
+          <p:cNvSpPr/>
+          <p:nvPr/>
+        </p:nvSpPr>
+        <p:spPr>
+          <a:xfrm>
+            <a:off x="8109508" y="1591056"/>
+            <a:ext cx="3624986" cy="2331720"/>
+          </a:xfrm>
+          <a:prstGeom prst="roundRect">
+            <a:avLst>
+              <a:gd name="adj" fmla="val 12000"/>
+            </a:avLst>
+          </a:prstGeom>
+          <a:solidFill>
+            <a:srgbClr val="F2F2F2"/>
+          </a:solidFill>
+          <a:ln>
+            <a:noFill/>
+          </a:ln>
+        </p:spPr>
+        <p:style>
+          <a:lnRef idx="1">
+            <a:schemeClr val="accent1"/>
+          </a:lnRef>
+          <a:fillRef idx="3">
+            <a:schemeClr val="accent1"/>
+          </a:fillRef>
+          <a:effectRef idx="2">
+            <a:schemeClr val="accent1"/>
+          </a:effectRef>
+          <a:fontRef idx="minor">
+            <a:schemeClr val="lt1"/>
+          </a:fontRef>
+        </p:style>
+        <p:txBody>
+          <a:bodyPr rtlCol="0" anchor="ctr"/>
+          <a:lstStyle/>
+          <a:p>
+            <a:pPr algn="ctr"/>
+          </a:p>
+        </p:txBody>
+      </p:sp>
+      <p:sp>
+        <p:nvSpPr>
+          <p:cNvPr id="17" name="Rectangle 16"/>
+          <p:cNvSpPr/>
+          <p:nvPr/>
+        </p:nvSpPr>
+        <p:spPr>
+          <a:xfrm>
+            <a:off x="8109508" y="1591056"/>
+            <a:ext cx="3624986" cy="64008"/>
+          </a:xfrm>
+          <a:prstGeom prst="rect">
+            <a:avLst/>
+          </a:prstGeom>
+          <a:solidFill>
+            <a:srgbClr val="095292"/>
+          </a:solidFill>
+          <a:ln>
+            <a:noFill/>
+          </a:ln>
+        </p:spPr>
+        <p:style>
+          <a:lnRef idx="1">
+            <a:schemeClr val="accent1"/>
+          </a:lnRef>
+          <a:fillRef idx="3">
+            <a:schemeClr val="accent1"/>
+          </a:fillRef>
+          <a:effectRef idx="2">
+            <a:schemeClr val="accent1"/>
+          </a:effectRef>
+          <a:fontRef idx="minor">
+            <a:schemeClr val="lt1"/>
+          </a:fontRef>
+        </p:style>
+        <p:txBody>
+          <a:bodyPr rtlCol="0" anchor="ctr"/>
+          <a:lstStyle/>
+          <a:p>
+            <a:pPr algn="ctr"/>
+          </a:p>
+        </p:txBody>
+      </p:sp>
+      <p:sp>
+        <p:nvSpPr>
+          <p:cNvPr id="18" name="Rectangle 17"/>
+          <p:cNvSpPr/>
+          <p:nvPr/>
+        </p:nvSpPr>
+        <p:spPr>
+          <a:xfrm>
+            <a:off x="8109508" y="1655064"/>
+            <a:ext cx="3624986" cy="27432"/>
+          </a:xfrm>
+          <a:prstGeom prst="rect">
+            <a:avLst/>
+          </a:prstGeom>
+          <a:solidFill>
+            <a:srgbClr val="FFD000"/>
+          </a:solidFill>
+          <a:ln>
+            <a:noFill/>
+          </a:ln>
+        </p:spPr>
+        <p:style>
+          <a:lnRef idx="1">
+            <a:schemeClr val="accent1"/>
+          </a:lnRef>
+          <a:fillRef idx="3">
+            <a:schemeClr val="accent1"/>
+          </a:fillRef>
+          <a:effectRef idx="2">
+            <a:schemeClr val="accent1"/>
+          </a:effectRef>
+          <a:fontRef idx="minor">
+            <a:schemeClr val="lt1"/>
+          </a:fontRef>
+        </p:style>
+        <p:txBody>
+          <a:bodyPr rtlCol="0" anchor="ctr"/>
+          <a:lstStyle/>
+          <a:p>
+            <a:pPr algn="ctr"/>
+          </a:p>
+        </p:txBody>
+      </p:sp>
+      <p:pic>
+        <p:nvPicPr>
+          <p:cNvPr id="19" name="Picture 18" descr="dbfiddle.png"/>
+          <p:cNvPicPr>
+            <a:picLocks noChangeAspect="1"/>
+          </p:cNvPicPr>
+          <p:nvPr/>
+        </p:nvPicPr>
+        <p:blipFill>
+          <a:blip r:embed="rId4"/>
+          <a:stretch>
+            <a:fillRect/>
+          </a:stretch>
+        </p:blipFill>
+        <p:spPr>
+          <a:xfrm>
+            <a:off x="9295638" y="1847087"/>
+            <a:ext cx="1252728" cy="1252728"/>
+          </a:xfrm>
+          <a:prstGeom prst="rect">
+            <a:avLst/>
+          </a:prstGeom>
+        </p:spPr>
+      </p:pic>
+      <p:sp>
+        <p:nvSpPr>
+          <p:cNvPr id="20" name="TextBox 19"/>
+          <p:cNvSpPr txBox="1"/>
+          <p:nvPr/>
+        </p:nvSpPr>
+        <p:spPr>
+          <a:xfrm>
+            <a:off x="8182660" y="3191256"/>
+            <a:ext cx="3478682" cy="621792"/>
+          </a:xfrm>
+          <a:prstGeom prst="rect">
+            <a:avLst/>
+          </a:prstGeom>
+          <a:noFill/>
+        </p:spPr>
+        <p:txBody>
+          <a:bodyPr wrap="square" anchor="t"/>
+          <a:lstStyle/>
+          <a:p>
+            <a:pPr algn="ctr"/>
+            <a:r>
+              <a:rPr sz="1300" b="1" i="0">
+                <a:solidFill>
+                  <a:srgbClr val="095292"/>
+                </a:solidFill>
+                <a:latin typeface="Calibri"/>
+              </a:rPr>
+              <a:t>DB Fiddle</a:t>
+            </a:r>
+          </a:p>
+          <a:p>
+            <a:pPr algn="ctr">
+              <a:spcBef>
+                <a:spcPts val="200"/>
+              </a:spcBef>
+            </a:pPr>
+            <a:r>
+              <a:rPr sz="1000" b="0" i="0">
+                <a:solidFill>
+                  <a:srgbClr val="666666"/>
+                </a:solidFill>
+                <a:latin typeface="Calibri"/>
+              </a:rPr>
+              <a:t>Opcional SQL</a:t>
+            </a:r>
+          </a:p>
+        </p:txBody>
+      </p:sp>
+      <p:sp>
+        <p:nvSpPr>
+          <p:cNvPr id="21" name="TextBox 20"/>
+          <p:cNvSpPr txBox="1"/>
+          <p:nvPr/>
+        </p:nvSpPr>
+        <p:spPr>
+          <a:xfrm>
+            <a:off x="11185855" y="6473952"/>
+            <a:ext cx="640080" cy="274320"/>
           </a:xfrm>
           <a:prstGeom prst="rect">
             <a:avLst/>
@@ -6018,86 +6913,15 @@
           </a:bodyPr>
           <a:lstStyle/>
           <a:p>
-            <a:pPr algn="ctr">
-              <a:spcAft>
-                <a:spcPts val="600"/>
-              </a:spcAft>
-            </a:pPr>
-            <a:r>
-              <a:rPr sz="1600" b="0" i="0">
-                <a:solidFill>
-                  <a:srgbClr val="333333"/>
-                </a:solidFill>
-                <a:latin typeface="Calibri"/>
-              </a:rPr>
-              <a:t>Informe de caso -&gt; mejoras concretas al PI</a:t>
-            </a:r>
-          </a:p>
-          <a:p>
-            <a:pPr algn="ctr">
-              <a:spcAft>
-                <a:spcPts val="600"/>
-              </a:spcAft>
-            </a:pPr>
-            <a:r>
-              <a:rPr sz="1600" b="0" i="0">
-                <a:solidFill>
-                  <a:srgbClr val="333333"/>
-                </a:solidFill>
-                <a:latin typeface="Calibri"/>
-              </a:rPr>
-              <a:t>Entregable: Informe 1-2 pag.: caso + 3 mejoras aplicables a VetCare</a:t>
-            </a:r>
-          </a:p>
-          <a:p>
-            <a:pPr algn="ctr">
-              <a:spcAft>
-                <a:spcPts val="600"/>
-              </a:spcAft>
-            </a:pPr>
-            <a:r>
-              <a:rPr sz="1600" b="0" i="0">
-                <a:solidFill>
-                  <a:srgbClr val="333333"/>
-                </a:solidFill>
-                <a:latin typeface="Calibri"/>
-              </a:rPr>
-              <a:t>Siguiente clase: continuar el hilo del PI segun plan</a:t>
-            </a:r>
-          </a:p>
-        </p:txBody>
-      </p:sp>
-      <p:sp>
-        <p:nvSpPr>
-          <p:cNvPr id="6" name="TextBox 5"/>
-          <p:cNvSpPr txBox="1"/>
-          <p:nvPr/>
-        </p:nvSpPr>
-        <p:spPr>
-          <a:xfrm>
-            <a:off x="457200" y="4754880"/>
-            <a:ext cx="11277295" cy="640080"/>
-          </a:xfrm>
-          <a:prstGeom prst="rect">
-            <a:avLst/>
-          </a:prstGeom>
-          <a:noFill/>
-        </p:spPr>
-        <p:txBody>
-          <a:bodyPr wrap="square">
-            <a:spAutoFit/>
-          </a:bodyPr>
-          <a:lstStyle/>
-          <a:p>
-            <a:pPr algn="ctr"/>
-            <a:r>
-              <a:rPr sz="2000" b="1" i="0">
-                <a:solidFill>
-                  <a:srgbClr val="269CCB"/>
-                </a:solidFill>
-                <a:latin typeface="Calibri"/>
-              </a:rPr>
-              <a:t>Teoria breve · practica = PI</a:t>
+            <a:pPr algn="r"/>
+            <a:r>
+              <a:rPr sz="1100" b="0" i="0">
+                <a:solidFill>
+                  <a:srgbClr val="666666"/>
+                </a:solidFill>
+                <a:latin typeface="Calibri"/>
+              </a:rPr>
+              <a:t>19</a:t>
             </a:r>
           </a:p>
         </p:txBody>
@@ -6482,6 +7306,3512 @@
 </p:sld>
 </file>
 
+<file path=ppt/slides/slide20.xml><?xml version="1.0" encoding="utf-8"?>
+<p:sld xmlns:a="http://schemas.openxmlformats.org/drawingml/2006/main" xmlns:p="http://schemas.openxmlformats.org/presentationml/2006/main" xmlns:r="http://schemas.openxmlformats.org/officeDocument/2006/relationships">
+  <p:cSld>
+    <p:bg>
+      <p:bgPr>
+        <a:solidFill>
+          <a:srgbClr val="FFFFFF"/>
+        </a:solidFill>
+        <a:effectLst/>
+      </p:bgPr>
+    </p:bg>
+    <p:spTree>
+      <p:nvGrpSpPr>
+        <p:cNvPr id="1" name=""/>
+        <p:cNvGrpSpPr/>
+        <p:nvPr/>
+      </p:nvGrpSpPr>
+      <p:grpSpPr/>
+      <p:sp>
+        <p:nvSpPr>
+          <p:cNvPr id="2" name="Rectangle 1"/>
+          <p:cNvSpPr/>
+          <p:nvPr/>
+        </p:nvSpPr>
+        <p:spPr>
+          <a:xfrm>
+            <a:off x="0" y="0"/>
+            <a:ext cx="12191695" cy="960120"/>
+          </a:xfrm>
+          <a:prstGeom prst="rect">
+            <a:avLst/>
+          </a:prstGeom>
+          <a:solidFill>
+            <a:srgbClr val="095292"/>
+          </a:solidFill>
+          <a:ln>
+            <a:noFill/>
+          </a:ln>
+        </p:spPr>
+        <p:style>
+          <a:lnRef idx="1">
+            <a:schemeClr val="accent1"/>
+          </a:lnRef>
+          <a:fillRef idx="3">
+            <a:schemeClr val="accent1"/>
+          </a:fillRef>
+          <a:effectRef idx="2">
+            <a:schemeClr val="accent1"/>
+          </a:effectRef>
+          <a:fontRef idx="minor">
+            <a:schemeClr val="lt1"/>
+          </a:fontRef>
+        </p:style>
+        <p:txBody>
+          <a:bodyPr rtlCol="0" anchor="ctr"/>
+          <a:lstStyle/>
+          <a:p>
+            <a:pPr algn="ctr"/>
+          </a:p>
+        </p:txBody>
+      </p:sp>
+      <p:sp>
+        <p:nvSpPr>
+          <p:cNvPr id="3" name="Rectangle 2"/>
+          <p:cNvSpPr/>
+          <p:nvPr/>
+        </p:nvSpPr>
+        <p:spPr>
+          <a:xfrm>
+            <a:off x="0" y="960120"/>
+            <a:ext cx="12191695" cy="41148"/>
+          </a:xfrm>
+          <a:prstGeom prst="rect">
+            <a:avLst/>
+          </a:prstGeom>
+          <a:solidFill>
+            <a:srgbClr val="FFD000"/>
+          </a:solidFill>
+          <a:ln>
+            <a:noFill/>
+          </a:ln>
+        </p:spPr>
+        <p:style>
+          <a:lnRef idx="1">
+            <a:schemeClr val="accent1"/>
+          </a:lnRef>
+          <a:fillRef idx="3">
+            <a:schemeClr val="accent1"/>
+          </a:fillRef>
+          <a:effectRef idx="2">
+            <a:schemeClr val="accent1"/>
+          </a:effectRef>
+          <a:fontRef idx="minor">
+            <a:schemeClr val="lt1"/>
+          </a:fontRef>
+        </p:style>
+        <p:txBody>
+          <a:bodyPr rtlCol="0" anchor="ctr"/>
+          <a:lstStyle/>
+          <a:p>
+            <a:pPr algn="ctr"/>
+          </a:p>
+        </p:txBody>
+      </p:sp>
+      <p:sp>
+        <p:nvSpPr>
+          <p:cNvPr id="4" name="TextBox 3"/>
+          <p:cNvSpPr txBox="1"/>
+          <p:nvPr/>
+        </p:nvSpPr>
+        <p:spPr>
+          <a:xfrm>
+            <a:off x="457200" y="164592"/>
+            <a:ext cx="11277295" cy="502920"/>
+          </a:xfrm>
+          <a:prstGeom prst="rect">
+            <a:avLst/>
+          </a:prstGeom>
+          <a:noFill/>
+        </p:spPr>
+        <p:txBody>
+          <a:bodyPr wrap="square">
+            <a:spAutoFit/>
+          </a:bodyPr>
+          <a:lstStyle/>
+          <a:p>
+            <a:r>
+              <a:rPr sz="2600" b="1" i="0">
+                <a:solidFill>
+                  <a:srgbClr val="FFFFFF"/>
+                </a:solidFill>
+                <a:latin typeface="Calibri"/>
+              </a:rPr>
+              <a:t>Actividad autonoma — contexto / por que importa</a:t>
+            </a:r>
+          </a:p>
+        </p:txBody>
+      </p:sp>
+      <p:sp>
+        <p:nvSpPr>
+          <p:cNvPr id="5" name="TextBox 4"/>
+          <p:cNvSpPr txBox="1"/>
+          <p:nvPr/>
+        </p:nvSpPr>
+        <p:spPr>
+          <a:xfrm>
+            <a:off x="457200" y="1170432"/>
+            <a:ext cx="11277295" cy="5230368"/>
+          </a:xfrm>
+          <a:prstGeom prst="rect">
+            <a:avLst/>
+          </a:prstGeom>
+          <a:noFill/>
+        </p:spPr>
+        <p:txBody>
+          <a:bodyPr wrap="square">
+            <a:spAutoFit/>
+          </a:bodyPr>
+          <a:lstStyle/>
+          <a:p>
+            <a:pPr>
+              <a:spcAft>
+                <a:spcPts val="800"/>
+              </a:spcAft>
+            </a:pPr>
+            <a:r>
+              <a:rPr sz="2000" b="0" i="0">
+                <a:solidFill>
+                  <a:srgbClr val="333333"/>
+                </a:solidFill>
+                <a:latin typeface="Calibri"/>
+              </a:rPr>
+              <a:t>–   </a:t>
+            </a:r>
+            <a:r>
+              <a:rPr sz="2000" b="1" i="0">
+                <a:solidFill>
+                  <a:srgbClr val="333333"/>
+                </a:solidFill>
+                <a:latin typeface="Calibri"/>
+              </a:rPr>
+              <a:t>Por qué importa al PI:</a:t>
+            </a:r>
+            <a:r>
+              <a:rPr sz="2000" b="0" i="0">
+                <a:solidFill>
+                  <a:srgbClr val="333333"/>
+                </a:solidFill>
+                <a:latin typeface="Calibri"/>
+              </a:rPr>
+              <a:t> lecciónes accionables.</a:t>
+            </a:r>
+          </a:p>
+          <a:p>
+            <a:pPr>
+              <a:spcAft>
+                <a:spcPts val="800"/>
+              </a:spcAft>
+            </a:pPr>
+            <a:r>
+              <a:rPr sz="2000" b="0" i="0">
+                <a:solidFill>
+                  <a:srgbClr val="333333"/>
+                </a:solidFill>
+                <a:latin typeface="Calibri"/>
+              </a:rPr>
+              <a:t>–   Autónoma: 1 caso -&gt; 3 mejoras.</a:t>
+            </a:r>
+          </a:p>
+        </p:txBody>
+      </p:sp>
+      <p:sp>
+        <p:nvSpPr>
+          <p:cNvPr id="6" name="TextBox 5"/>
+          <p:cNvSpPr txBox="1"/>
+          <p:nvPr/>
+        </p:nvSpPr>
+        <p:spPr>
+          <a:xfrm>
+            <a:off x="11185855" y="6473952"/>
+            <a:ext cx="640080" cy="274320"/>
+          </a:xfrm>
+          <a:prstGeom prst="rect">
+            <a:avLst/>
+          </a:prstGeom>
+          <a:noFill/>
+        </p:spPr>
+        <p:txBody>
+          <a:bodyPr wrap="square">
+            <a:spAutoFit/>
+          </a:bodyPr>
+          <a:lstStyle/>
+          <a:p>
+            <a:pPr algn="r"/>
+            <a:r>
+              <a:rPr sz="1100" b="0" i="0">
+                <a:solidFill>
+                  <a:srgbClr val="666666"/>
+                </a:solidFill>
+                <a:latin typeface="Calibri"/>
+              </a:rPr>
+              <a:t>20</a:t>
+            </a:r>
+          </a:p>
+        </p:txBody>
+      </p:sp>
+    </p:spTree>
+  </p:cSld>
+  <p:clrMapOvr>
+    <a:masterClrMapping/>
+  </p:clrMapOvr>
+</p:sld>
+</file>
+
+<file path=ppt/slides/slide21.xml><?xml version="1.0" encoding="utf-8"?>
+<p:sld xmlns:a="http://schemas.openxmlformats.org/drawingml/2006/main" xmlns:p="http://schemas.openxmlformats.org/presentationml/2006/main" xmlns:r="http://schemas.openxmlformats.org/officeDocument/2006/relationships">
+  <p:cSld>
+    <p:bg>
+      <p:bgPr>
+        <a:solidFill>
+          <a:srgbClr val="FFFFFF"/>
+        </a:solidFill>
+        <a:effectLst/>
+      </p:bgPr>
+    </p:bg>
+    <p:spTree>
+      <p:nvGrpSpPr>
+        <p:cNvPr id="1" name=""/>
+        <p:cNvGrpSpPr/>
+        <p:nvPr/>
+      </p:nvGrpSpPr>
+      <p:grpSpPr/>
+      <p:sp>
+        <p:nvSpPr>
+          <p:cNvPr id="2" name="Rectangle 1"/>
+          <p:cNvSpPr/>
+          <p:nvPr/>
+        </p:nvSpPr>
+        <p:spPr>
+          <a:xfrm>
+            <a:off x="0" y="0"/>
+            <a:ext cx="12191695" cy="960120"/>
+          </a:xfrm>
+          <a:prstGeom prst="rect">
+            <a:avLst/>
+          </a:prstGeom>
+          <a:solidFill>
+            <a:srgbClr val="095292"/>
+          </a:solidFill>
+          <a:ln>
+            <a:noFill/>
+          </a:ln>
+        </p:spPr>
+        <p:style>
+          <a:lnRef idx="1">
+            <a:schemeClr val="accent1"/>
+          </a:lnRef>
+          <a:fillRef idx="3">
+            <a:schemeClr val="accent1"/>
+          </a:fillRef>
+          <a:effectRef idx="2">
+            <a:schemeClr val="accent1"/>
+          </a:effectRef>
+          <a:fontRef idx="minor">
+            <a:schemeClr val="lt1"/>
+          </a:fontRef>
+        </p:style>
+        <p:txBody>
+          <a:bodyPr rtlCol="0" anchor="ctr"/>
+          <a:lstStyle/>
+          <a:p>
+            <a:pPr algn="ctr"/>
+          </a:p>
+        </p:txBody>
+      </p:sp>
+      <p:sp>
+        <p:nvSpPr>
+          <p:cNvPr id="3" name="Rectangle 2"/>
+          <p:cNvSpPr/>
+          <p:nvPr/>
+        </p:nvSpPr>
+        <p:spPr>
+          <a:xfrm>
+            <a:off x="0" y="960120"/>
+            <a:ext cx="12191695" cy="41148"/>
+          </a:xfrm>
+          <a:prstGeom prst="rect">
+            <a:avLst/>
+          </a:prstGeom>
+          <a:solidFill>
+            <a:srgbClr val="FFD000"/>
+          </a:solidFill>
+          <a:ln>
+            <a:noFill/>
+          </a:ln>
+        </p:spPr>
+        <p:style>
+          <a:lnRef idx="1">
+            <a:schemeClr val="accent1"/>
+          </a:lnRef>
+          <a:fillRef idx="3">
+            <a:schemeClr val="accent1"/>
+          </a:fillRef>
+          <a:effectRef idx="2">
+            <a:schemeClr val="accent1"/>
+          </a:effectRef>
+          <a:fontRef idx="minor">
+            <a:schemeClr val="lt1"/>
+          </a:fontRef>
+        </p:style>
+        <p:txBody>
+          <a:bodyPr rtlCol="0" anchor="ctr"/>
+          <a:lstStyle/>
+          <a:p>
+            <a:pPr algn="ctr"/>
+          </a:p>
+        </p:txBody>
+      </p:sp>
+      <p:sp>
+        <p:nvSpPr>
+          <p:cNvPr id="4" name="TextBox 3"/>
+          <p:cNvSpPr txBox="1"/>
+          <p:nvPr/>
+        </p:nvSpPr>
+        <p:spPr>
+          <a:xfrm>
+            <a:off x="457200" y="164592"/>
+            <a:ext cx="11277295" cy="502920"/>
+          </a:xfrm>
+          <a:prstGeom prst="rect">
+            <a:avLst/>
+          </a:prstGeom>
+          <a:noFill/>
+        </p:spPr>
+        <p:txBody>
+          <a:bodyPr wrap="square">
+            <a:spAutoFit/>
+          </a:bodyPr>
+          <a:lstStyle/>
+          <a:p>
+            <a:r>
+              <a:rPr sz="2600" b="1" i="0">
+                <a:solidFill>
+                  <a:srgbClr val="FFFFFF"/>
+                </a:solidFill>
+                <a:latin typeface="Calibri"/>
+              </a:rPr>
+              <a:t>Actividad autonoma — objetivo y criterios</a:t>
+            </a:r>
+          </a:p>
+        </p:txBody>
+      </p:sp>
+      <p:sp>
+        <p:nvSpPr>
+          <p:cNvPr id="5" name="TextBox 4"/>
+          <p:cNvSpPr txBox="1"/>
+          <p:nvPr/>
+        </p:nvSpPr>
+        <p:spPr>
+          <a:xfrm>
+            <a:off x="457200" y="1170432"/>
+            <a:ext cx="11277295" cy="5230368"/>
+          </a:xfrm>
+          <a:prstGeom prst="rect">
+            <a:avLst/>
+          </a:prstGeom>
+          <a:noFill/>
+        </p:spPr>
+        <p:txBody>
+          <a:bodyPr wrap="square">
+            <a:spAutoFit/>
+          </a:bodyPr>
+          <a:lstStyle/>
+          <a:p>
+            <a:pPr>
+              <a:spcAft>
+                <a:spcPts val="800"/>
+              </a:spcAft>
+            </a:pPr>
+            <a:r>
+              <a:rPr sz="2000" b="0" i="0">
+                <a:solidFill>
+                  <a:srgbClr val="333333"/>
+                </a:solidFill>
+                <a:latin typeface="Calibri"/>
+              </a:rPr>
+              <a:t>–   </a:t>
+            </a:r>
+            <a:r>
+              <a:rPr sz="2000" b="1" i="0">
+                <a:solidFill>
+                  <a:srgbClr val="333333"/>
+                </a:solidFill>
+                <a:latin typeface="Calibri"/>
+              </a:rPr>
+              <a:t>Objetivo:</a:t>
+            </a:r>
+            <a:r>
+              <a:rPr sz="2000" b="0" i="0">
+                <a:solidFill>
+                  <a:srgbClr val="333333"/>
+                </a:solidFill>
+                <a:latin typeface="Calibri"/>
+              </a:rPr>
+              <a:t> Caso real -&gt; 3 mejoras VetCare.</a:t>
+            </a:r>
+          </a:p>
+          <a:p>
+            <a:pPr>
+              <a:spcAft>
+                <a:spcPts val="800"/>
+              </a:spcAft>
+            </a:pPr>
+            <a:r>
+              <a:rPr sz="2000" b="0" i="0">
+                <a:solidFill>
+                  <a:srgbClr val="333333"/>
+                </a:solidFill>
+                <a:latin typeface="Calibri"/>
+              </a:rPr>
+              <a:t>–   </a:t>
+            </a:r>
+            <a:r>
+              <a:rPr sz="2000" b="1" i="0">
+                <a:solidFill>
+                  <a:srgbClr val="333333"/>
+                </a:solidFill>
+                <a:latin typeface="Calibri"/>
+              </a:rPr>
+              <a:t>Exito:</a:t>
+            </a:r>
+            <a:r>
+              <a:rPr sz="2000" b="0" i="0">
+                <a:solidFill>
+                  <a:srgbClr val="333333"/>
+                </a:solidFill>
+                <a:latin typeface="Calibri"/>
+              </a:rPr>
+              <a:t> Caso elegido.</a:t>
+            </a:r>
+          </a:p>
+          <a:p>
+            <a:pPr>
+              <a:spcAft>
+                <a:spcPts val="800"/>
+              </a:spcAft>
+            </a:pPr>
+            <a:r>
+              <a:rPr sz="2000" b="0" i="0">
+                <a:solidFill>
+                  <a:srgbClr val="333333"/>
+                </a:solidFill>
+                <a:latin typeface="Calibri"/>
+              </a:rPr>
+              <a:t>–   </a:t>
+            </a:r>
+            <a:r>
+              <a:rPr sz="2000" b="1" i="0">
+                <a:solidFill>
+                  <a:srgbClr val="333333"/>
+                </a:solidFill>
+                <a:latin typeface="Calibri"/>
+              </a:rPr>
+              <a:t>Exito:</a:t>
+            </a:r>
+            <a:r>
+              <a:rPr sz="2000" b="0" i="0">
+                <a:solidFill>
+                  <a:srgbClr val="333333"/>
+                </a:solidFill>
+                <a:latin typeface="Calibri"/>
+              </a:rPr>
+              <a:t> Resumen.</a:t>
+            </a:r>
+          </a:p>
+          <a:p>
+            <a:pPr>
+              <a:spcAft>
+                <a:spcPts val="800"/>
+              </a:spcAft>
+            </a:pPr>
+            <a:r>
+              <a:rPr sz="2000" b="0" i="0">
+                <a:solidFill>
+                  <a:srgbClr val="333333"/>
+                </a:solidFill>
+                <a:latin typeface="Calibri"/>
+              </a:rPr>
+              <a:t>–   </a:t>
+            </a:r>
+            <a:r>
+              <a:rPr sz="2000" b="1" i="0">
+                <a:solidFill>
+                  <a:srgbClr val="333333"/>
+                </a:solidFill>
+                <a:latin typeface="Calibri"/>
+              </a:rPr>
+              <a:t>Exito:</a:t>
+            </a:r>
+            <a:r>
+              <a:rPr sz="2000" b="0" i="0">
+                <a:solidFill>
+                  <a:srgbClr val="333333"/>
+                </a:solidFill>
+                <a:latin typeface="Calibri"/>
+              </a:rPr>
+              <a:t> 3 mejoras.</a:t>
+            </a:r>
+          </a:p>
+          <a:p>
+            <a:pPr>
+              <a:spcAft>
+                <a:spcPts val="800"/>
+              </a:spcAft>
+            </a:pPr>
+            <a:r>
+              <a:rPr sz="2000" b="0" i="0">
+                <a:solidFill>
+                  <a:srgbClr val="333333"/>
+                </a:solidFill>
+                <a:latin typeface="Calibri"/>
+              </a:rPr>
+              <a:t>–   </a:t>
+            </a:r>
+            <a:r>
+              <a:rPr sz="2000" b="1" i="0">
+                <a:solidFill>
+                  <a:srgbClr val="333333"/>
+                </a:solidFill>
+                <a:latin typeface="Calibri"/>
+              </a:rPr>
+              <a:t>Exito:</a:t>
+            </a:r>
+            <a:r>
+              <a:rPr sz="2000" b="0" i="0">
+                <a:solidFill>
+                  <a:srgbClr val="333333"/>
+                </a:solidFill>
+                <a:latin typeface="Calibri"/>
+              </a:rPr>
+              <a:t> Informe.</a:t>
+            </a:r>
+          </a:p>
+          <a:p>
+            <a:pPr>
+              <a:spcAft>
+                <a:spcPts val="800"/>
+              </a:spcAft>
+            </a:pPr>
+            <a:r>
+              <a:rPr sz="2000" b="0" i="0">
+                <a:solidFill>
+                  <a:srgbClr val="333333"/>
+                </a:solidFill>
+                <a:latin typeface="Calibri"/>
+              </a:rPr>
+              <a:t>–   </a:t>
+            </a:r>
+            <a:r>
+              <a:rPr sz="2000" b="1" i="0">
+                <a:solidFill>
+                  <a:srgbClr val="333333"/>
+                </a:solidFill>
+                <a:latin typeface="Calibri"/>
+              </a:rPr>
+              <a:t>Exito:</a:t>
+            </a:r>
+            <a:r>
+              <a:rPr sz="2000" b="0" i="0">
+                <a:solidFill>
+                  <a:srgbClr val="333333"/>
+                </a:solidFill>
+                <a:latin typeface="Calibri"/>
+              </a:rPr>
+              <a:t> en la fecha que indique el docente.</a:t>
+            </a:r>
+          </a:p>
+        </p:txBody>
+      </p:sp>
+      <p:sp>
+        <p:nvSpPr>
+          <p:cNvPr id="6" name="TextBox 5"/>
+          <p:cNvSpPr txBox="1"/>
+          <p:nvPr/>
+        </p:nvSpPr>
+        <p:spPr>
+          <a:xfrm>
+            <a:off x="11185855" y="6473952"/>
+            <a:ext cx="640080" cy="274320"/>
+          </a:xfrm>
+          <a:prstGeom prst="rect">
+            <a:avLst/>
+          </a:prstGeom>
+          <a:noFill/>
+        </p:spPr>
+        <p:txBody>
+          <a:bodyPr wrap="square">
+            <a:spAutoFit/>
+          </a:bodyPr>
+          <a:lstStyle/>
+          <a:p>
+            <a:pPr algn="r"/>
+            <a:r>
+              <a:rPr sz="1100" b="0" i="0">
+                <a:solidFill>
+                  <a:srgbClr val="666666"/>
+                </a:solidFill>
+                <a:latin typeface="Calibri"/>
+              </a:rPr>
+              <a:t>21</a:t>
+            </a:r>
+          </a:p>
+        </p:txBody>
+      </p:sp>
+    </p:spTree>
+  </p:cSld>
+  <p:clrMapOvr>
+    <a:masterClrMapping/>
+  </p:clrMapOvr>
+</p:sld>
+</file>
+
+<file path=ppt/slides/slide22.xml><?xml version="1.0" encoding="utf-8"?>
+<p:sld xmlns:a="http://schemas.openxmlformats.org/drawingml/2006/main" xmlns:p="http://schemas.openxmlformats.org/presentationml/2006/main" xmlns:r="http://schemas.openxmlformats.org/officeDocument/2006/relationships">
+  <p:cSld>
+    <p:bg>
+      <p:bgPr>
+        <a:solidFill>
+          <a:srgbClr val="FFFFFF"/>
+        </a:solidFill>
+        <a:effectLst/>
+      </p:bgPr>
+    </p:bg>
+    <p:spTree>
+      <p:nvGrpSpPr>
+        <p:cNvPr id="1" name=""/>
+        <p:cNvGrpSpPr/>
+        <p:nvPr/>
+      </p:nvGrpSpPr>
+      <p:grpSpPr/>
+      <p:sp>
+        <p:nvSpPr>
+          <p:cNvPr id="2" name="Rectangle 1"/>
+          <p:cNvSpPr/>
+          <p:nvPr/>
+        </p:nvSpPr>
+        <p:spPr>
+          <a:xfrm>
+            <a:off x="0" y="0"/>
+            <a:ext cx="12191695" cy="960120"/>
+          </a:xfrm>
+          <a:prstGeom prst="rect">
+            <a:avLst/>
+          </a:prstGeom>
+          <a:solidFill>
+            <a:srgbClr val="095292"/>
+          </a:solidFill>
+          <a:ln>
+            <a:noFill/>
+          </a:ln>
+        </p:spPr>
+        <p:style>
+          <a:lnRef idx="1">
+            <a:schemeClr val="accent1"/>
+          </a:lnRef>
+          <a:fillRef idx="3">
+            <a:schemeClr val="accent1"/>
+          </a:fillRef>
+          <a:effectRef idx="2">
+            <a:schemeClr val="accent1"/>
+          </a:effectRef>
+          <a:fontRef idx="minor">
+            <a:schemeClr val="lt1"/>
+          </a:fontRef>
+        </p:style>
+        <p:txBody>
+          <a:bodyPr rtlCol="0" anchor="ctr"/>
+          <a:lstStyle/>
+          <a:p>
+            <a:pPr algn="ctr"/>
+          </a:p>
+        </p:txBody>
+      </p:sp>
+      <p:sp>
+        <p:nvSpPr>
+          <p:cNvPr id="3" name="Rectangle 2"/>
+          <p:cNvSpPr/>
+          <p:nvPr/>
+        </p:nvSpPr>
+        <p:spPr>
+          <a:xfrm>
+            <a:off x="0" y="960120"/>
+            <a:ext cx="12191695" cy="41148"/>
+          </a:xfrm>
+          <a:prstGeom prst="rect">
+            <a:avLst/>
+          </a:prstGeom>
+          <a:solidFill>
+            <a:srgbClr val="FFD000"/>
+          </a:solidFill>
+          <a:ln>
+            <a:noFill/>
+          </a:ln>
+        </p:spPr>
+        <p:style>
+          <a:lnRef idx="1">
+            <a:schemeClr val="accent1"/>
+          </a:lnRef>
+          <a:fillRef idx="3">
+            <a:schemeClr val="accent1"/>
+          </a:fillRef>
+          <a:effectRef idx="2">
+            <a:schemeClr val="accent1"/>
+          </a:effectRef>
+          <a:fontRef idx="minor">
+            <a:schemeClr val="lt1"/>
+          </a:fontRef>
+        </p:style>
+        <p:txBody>
+          <a:bodyPr rtlCol="0" anchor="ctr"/>
+          <a:lstStyle/>
+          <a:p>
+            <a:pPr algn="ctr"/>
+          </a:p>
+        </p:txBody>
+      </p:sp>
+      <p:sp>
+        <p:nvSpPr>
+          <p:cNvPr id="4" name="TextBox 3"/>
+          <p:cNvSpPr txBox="1"/>
+          <p:nvPr/>
+        </p:nvSpPr>
+        <p:spPr>
+          <a:xfrm>
+            <a:off x="457200" y="164592"/>
+            <a:ext cx="11277295" cy="502920"/>
+          </a:xfrm>
+          <a:prstGeom prst="rect">
+            <a:avLst/>
+          </a:prstGeom>
+          <a:noFill/>
+        </p:spPr>
+        <p:txBody>
+          <a:bodyPr wrap="square">
+            <a:spAutoFit/>
+          </a:bodyPr>
+          <a:lstStyle/>
+          <a:p>
+            <a:r>
+              <a:rPr sz="2600" b="1" i="0">
+                <a:solidFill>
+                  <a:srgbClr val="FFFFFF"/>
+                </a:solidFill>
+                <a:latin typeface="Calibri"/>
+              </a:rPr>
+              <a:t>Actividad autonoma — escenario / datos de partida</a:t>
+            </a:r>
+          </a:p>
+        </p:txBody>
+      </p:sp>
+      <p:sp>
+        <p:nvSpPr>
+          <p:cNvPr id="5" name="TextBox 4"/>
+          <p:cNvSpPr txBox="1"/>
+          <p:nvPr/>
+        </p:nvSpPr>
+        <p:spPr>
+          <a:xfrm>
+            <a:off x="457200" y="1170432"/>
+            <a:ext cx="11277295" cy="5230368"/>
+          </a:xfrm>
+          <a:prstGeom prst="rect">
+            <a:avLst/>
+          </a:prstGeom>
+          <a:noFill/>
+        </p:spPr>
+        <p:txBody>
+          <a:bodyPr wrap="square">
+            <a:spAutoFit/>
+          </a:bodyPr>
+          <a:lstStyle/>
+          <a:p>
+            <a:pPr>
+              <a:spcAft>
+                <a:spcPts val="800"/>
+              </a:spcAft>
+            </a:pPr>
+            <a:r>
+              <a:rPr sz="2000" b="0" i="0">
+                <a:solidFill>
+                  <a:srgbClr val="333333"/>
+                </a:solidFill>
+                <a:latin typeface="Calibri"/>
+              </a:rPr>
+              <a:t>–   Plantilla: contexto-&gt;fallo-&gt;lección-&gt;cambio.</a:t>
+            </a:r>
+          </a:p>
+        </p:txBody>
+      </p:sp>
+      <p:sp>
+        <p:nvSpPr>
+          <p:cNvPr id="6" name="TextBox 5"/>
+          <p:cNvSpPr txBox="1"/>
+          <p:nvPr/>
+        </p:nvSpPr>
+        <p:spPr>
+          <a:xfrm>
+            <a:off x="11185855" y="6473952"/>
+            <a:ext cx="640080" cy="274320"/>
+          </a:xfrm>
+          <a:prstGeom prst="rect">
+            <a:avLst/>
+          </a:prstGeom>
+          <a:noFill/>
+        </p:spPr>
+        <p:txBody>
+          <a:bodyPr wrap="square">
+            <a:spAutoFit/>
+          </a:bodyPr>
+          <a:lstStyle/>
+          <a:p>
+            <a:pPr algn="r"/>
+            <a:r>
+              <a:rPr sz="1100" b="0" i="0">
+                <a:solidFill>
+                  <a:srgbClr val="666666"/>
+                </a:solidFill>
+                <a:latin typeface="Calibri"/>
+              </a:rPr>
+              <a:t>22</a:t>
+            </a:r>
+          </a:p>
+        </p:txBody>
+      </p:sp>
+    </p:spTree>
+  </p:cSld>
+  <p:clrMapOvr>
+    <a:masterClrMapping/>
+  </p:clrMapOvr>
+</p:sld>
+</file>
+
+<file path=ppt/slides/slide23.xml><?xml version="1.0" encoding="utf-8"?>
+<p:sld xmlns:a="http://schemas.openxmlformats.org/drawingml/2006/main" xmlns:p="http://schemas.openxmlformats.org/presentationml/2006/main" xmlns:r="http://schemas.openxmlformats.org/officeDocument/2006/relationships">
+  <p:cSld>
+    <p:bg>
+      <p:bgPr>
+        <a:solidFill>
+          <a:srgbClr val="FFFFFF"/>
+        </a:solidFill>
+        <a:effectLst/>
+      </p:bgPr>
+    </p:bg>
+    <p:spTree>
+      <p:nvGrpSpPr>
+        <p:cNvPr id="1" name=""/>
+        <p:cNvGrpSpPr/>
+        <p:nvPr/>
+      </p:nvGrpSpPr>
+      <p:grpSpPr/>
+      <p:sp>
+        <p:nvSpPr>
+          <p:cNvPr id="2" name="Rectangle 1"/>
+          <p:cNvSpPr/>
+          <p:nvPr/>
+        </p:nvSpPr>
+        <p:spPr>
+          <a:xfrm>
+            <a:off x="0" y="0"/>
+            <a:ext cx="12191695" cy="960120"/>
+          </a:xfrm>
+          <a:prstGeom prst="rect">
+            <a:avLst/>
+          </a:prstGeom>
+          <a:solidFill>
+            <a:srgbClr val="095292"/>
+          </a:solidFill>
+          <a:ln>
+            <a:noFill/>
+          </a:ln>
+        </p:spPr>
+        <p:style>
+          <a:lnRef idx="1">
+            <a:schemeClr val="accent1"/>
+          </a:lnRef>
+          <a:fillRef idx="3">
+            <a:schemeClr val="accent1"/>
+          </a:fillRef>
+          <a:effectRef idx="2">
+            <a:schemeClr val="accent1"/>
+          </a:effectRef>
+          <a:fontRef idx="minor">
+            <a:schemeClr val="lt1"/>
+          </a:fontRef>
+        </p:style>
+        <p:txBody>
+          <a:bodyPr rtlCol="0" anchor="ctr"/>
+          <a:lstStyle/>
+          <a:p>
+            <a:pPr algn="ctr"/>
+          </a:p>
+        </p:txBody>
+      </p:sp>
+      <p:sp>
+        <p:nvSpPr>
+          <p:cNvPr id="3" name="Rectangle 2"/>
+          <p:cNvSpPr/>
+          <p:nvPr/>
+        </p:nvSpPr>
+        <p:spPr>
+          <a:xfrm>
+            <a:off x="0" y="960120"/>
+            <a:ext cx="12191695" cy="41148"/>
+          </a:xfrm>
+          <a:prstGeom prst="rect">
+            <a:avLst/>
+          </a:prstGeom>
+          <a:solidFill>
+            <a:srgbClr val="FFD000"/>
+          </a:solidFill>
+          <a:ln>
+            <a:noFill/>
+          </a:ln>
+        </p:spPr>
+        <p:style>
+          <a:lnRef idx="1">
+            <a:schemeClr val="accent1"/>
+          </a:lnRef>
+          <a:fillRef idx="3">
+            <a:schemeClr val="accent1"/>
+          </a:fillRef>
+          <a:effectRef idx="2">
+            <a:schemeClr val="accent1"/>
+          </a:effectRef>
+          <a:fontRef idx="minor">
+            <a:schemeClr val="lt1"/>
+          </a:fontRef>
+        </p:style>
+        <p:txBody>
+          <a:bodyPr rtlCol="0" anchor="ctr"/>
+          <a:lstStyle/>
+          <a:p>
+            <a:pPr algn="ctr"/>
+          </a:p>
+        </p:txBody>
+      </p:sp>
+      <p:sp>
+        <p:nvSpPr>
+          <p:cNvPr id="4" name="TextBox 3"/>
+          <p:cNvSpPr txBox="1"/>
+          <p:nvPr/>
+        </p:nvSpPr>
+        <p:spPr>
+          <a:xfrm>
+            <a:off x="457200" y="164592"/>
+            <a:ext cx="11277295" cy="502920"/>
+          </a:xfrm>
+          <a:prstGeom prst="rect">
+            <a:avLst/>
+          </a:prstGeom>
+          <a:noFill/>
+        </p:spPr>
+        <p:txBody>
+          <a:bodyPr wrap="square">
+            <a:spAutoFit/>
+          </a:bodyPr>
+          <a:lstStyle/>
+          <a:p>
+            <a:r>
+              <a:rPr sz="2600" b="1" i="0">
+                <a:solidFill>
+                  <a:srgbClr val="FFFFFF"/>
+                </a:solidFill>
+                <a:latin typeface="Calibri"/>
+              </a:rPr>
+              <a:t>Actividad autonoma — pasos guiados</a:t>
+            </a:r>
+          </a:p>
+        </p:txBody>
+      </p:sp>
+      <p:sp>
+        <p:nvSpPr>
+          <p:cNvPr id="5" name="Rounded Rectangle 4"/>
+          <p:cNvSpPr/>
+          <p:nvPr/>
+        </p:nvSpPr>
+        <p:spPr>
+          <a:xfrm>
+            <a:off x="457200" y="1554480"/>
+            <a:ext cx="11277295" cy="1051560"/>
+          </a:xfrm>
+          <a:prstGeom prst="roundRect">
+            <a:avLst>
+              <a:gd name="adj" fmla="val 12000"/>
+            </a:avLst>
+          </a:prstGeom>
+          <a:solidFill>
+            <a:srgbClr val="F2F2F2"/>
+          </a:solidFill>
+          <a:ln>
+            <a:noFill/>
+          </a:ln>
+        </p:spPr>
+        <p:style>
+          <a:lnRef idx="1">
+            <a:schemeClr val="accent1"/>
+          </a:lnRef>
+          <a:fillRef idx="3">
+            <a:schemeClr val="accent1"/>
+          </a:fillRef>
+          <a:effectRef idx="2">
+            <a:schemeClr val="accent1"/>
+          </a:effectRef>
+          <a:fontRef idx="minor">
+            <a:schemeClr val="lt1"/>
+          </a:fontRef>
+        </p:style>
+        <p:txBody>
+          <a:bodyPr rtlCol="0" anchor="ctr"/>
+          <a:lstStyle/>
+          <a:p>
+            <a:pPr algn="ctr"/>
+          </a:p>
+        </p:txBody>
+      </p:sp>
+      <p:sp>
+        <p:nvSpPr>
+          <p:cNvPr id="6" name="Rounded Rectangle 5"/>
+          <p:cNvSpPr/>
+          <p:nvPr/>
+        </p:nvSpPr>
+        <p:spPr>
+          <a:xfrm>
+            <a:off x="594360" y="1860804"/>
+            <a:ext cx="438912" cy="438912"/>
+          </a:xfrm>
+          <a:prstGeom prst="roundRect">
+            <a:avLst>
+              <a:gd name="adj" fmla="val 12000"/>
+            </a:avLst>
+          </a:prstGeom>
+          <a:solidFill>
+            <a:srgbClr val="095292"/>
+          </a:solidFill>
+          <a:ln>
+            <a:noFill/>
+          </a:ln>
+        </p:spPr>
+        <p:style>
+          <a:lnRef idx="1">
+            <a:schemeClr val="accent1"/>
+          </a:lnRef>
+          <a:fillRef idx="3">
+            <a:schemeClr val="accent1"/>
+          </a:fillRef>
+          <a:effectRef idx="2">
+            <a:schemeClr val="accent1"/>
+          </a:effectRef>
+          <a:fontRef idx="minor">
+            <a:schemeClr val="lt1"/>
+          </a:fontRef>
+        </p:style>
+        <p:txBody>
+          <a:bodyPr rtlCol="0" anchor="ctr"/>
+          <a:lstStyle/>
+          <a:p>
+            <a:pPr algn="ctr"/>
+          </a:p>
+        </p:txBody>
+      </p:sp>
+      <p:sp>
+        <p:nvSpPr>
+          <p:cNvPr id="7" name="TextBox 6"/>
+          <p:cNvSpPr txBox="1"/>
+          <p:nvPr/>
+        </p:nvSpPr>
+        <p:spPr>
+          <a:xfrm>
+            <a:off x="594360" y="1860804"/>
+            <a:ext cx="438912" cy="438912"/>
+          </a:xfrm>
+          <a:prstGeom prst="rect">
+            <a:avLst/>
+          </a:prstGeom>
+          <a:noFill/>
+        </p:spPr>
+        <p:txBody>
+          <a:bodyPr wrap="square" anchor="ctr"/>
+          <a:lstStyle/>
+          <a:p>
+            <a:pPr algn="ctr"/>
+            <a:r>
+              <a:rPr sz="1600" b="1" i="0">
+                <a:solidFill>
+                  <a:srgbClr val="FFFFFF"/>
+                </a:solidFill>
+                <a:latin typeface="Calibri"/>
+              </a:rPr>
+              <a:t>1</a:t>
+            </a:r>
+          </a:p>
+        </p:txBody>
+      </p:sp>
+      <p:sp>
+        <p:nvSpPr>
+          <p:cNvPr id="8" name="TextBox 7"/>
+          <p:cNvSpPr txBox="1"/>
+          <p:nvPr/>
+        </p:nvSpPr>
+        <p:spPr>
+          <a:xfrm>
+            <a:off x="1188720" y="1645920"/>
+            <a:ext cx="10271455" cy="886968"/>
+          </a:xfrm>
+          <a:prstGeom prst="rect">
+            <a:avLst/>
+          </a:prstGeom>
+          <a:noFill/>
+        </p:spPr>
+        <p:txBody>
+          <a:bodyPr wrap="square" anchor="ctr"/>
+          <a:lstStyle/>
+          <a:p>
+            <a:r>
+              <a:rPr sz="1500" b="1" i="0">
+                <a:solidFill>
+                  <a:srgbClr val="095292"/>
+                </a:solidFill>
+                <a:latin typeface="Calibri"/>
+              </a:rPr>
+              <a:t>Elegir 1 caso (backup, rendimiento o seguridad).</a:t>
+            </a:r>
+          </a:p>
+        </p:txBody>
+      </p:sp>
+      <p:sp>
+        <p:nvSpPr>
+          <p:cNvPr id="9" name="Rounded Rectangle 8"/>
+          <p:cNvSpPr/>
+          <p:nvPr/>
+        </p:nvSpPr>
+        <p:spPr>
+          <a:xfrm>
+            <a:off x="457200" y="2697480"/>
+            <a:ext cx="11277295" cy="1051560"/>
+          </a:xfrm>
+          <a:prstGeom prst="roundRect">
+            <a:avLst>
+              <a:gd name="adj" fmla="val 12000"/>
+            </a:avLst>
+          </a:prstGeom>
+          <a:solidFill>
+            <a:srgbClr val="E8F4FA"/>
+          </a:solidFill>
+          <a:ln>
+            <a:noFill/>
+          </a:ln>
+        </p:spPr>
+        <p:style>
+          <a:lnRef idx="1">
+            <a:schemeClr val="accent1"/>
+          </a:lnRef>
+          <a:fillRef idx="3">
+            <a:schemeClr val="accent1"/>
+          </a:fillRef>
+          <a:effectRef idx="2">
+            <a:schemeClr val="accent1"/>
+          </a:effectRef>
+          <a:fontRef idx="minor">
+            <a:schemeClr val="lt1"/>
+          </a:fontRef>
+        </p:style>
+        <p:txBody>
+          <a:bodyPr rtlCol="0" anchor="ctr"/>
+          <a:lstStyle/>
+          <a:p>
+            <a:pPr algn="ctr"/>
+          </a:p>
+        </p:txBody>
+      </p:sp>
+      <p:sp>
+        <p:nvSpPr>
+          <p:cNvPr id="10" name="Rounded Rectangle 9"/>
+          <p:cNvSpPr/>
+          <p:nvPr/>
+        </p:nvSpPr>
+        <p:spPr>
+          <a:xfrm>
+            <a:off x="594360" y="3003804"/>
+            <a:ext cx="438912" cy="438912"/>
+          </a:xfrm>
+          <a:prstGeom prst="roundRect">
+            <a:avLst>
+              <a:gd name="adj" fmla="val 12000"/>
+            </a:avLst>
+          </a:prstGeom>
+          <a:solidFill>
+            <a:srgbClr val="095292"/>
+          </a:solidFill>
+          <a:ln>
+            <a:noFill/>
+          </a:ln>
+        </p:spPr>
+        <p:style>
+          <a:lnRef idx="1">
+            <a:schemeClr val="accent1"/>
+          </a:lnRef>
+          <a:fillRef idx="3">
+            <a:schemeClr val="accent1"/>
+          </a:fillRef>
+          <a:effectRef idx="2">
+            <a:schemeClr val="accent1"/>
+          </a:effectRef>
+          <a:fontRef idx="minor">
+            <a:schemeClr val="lt1"/>
+          </a:fontRef>
+        </p:style>
+        <p:txBody>
+          <a:bodyPr rtlCol="0" anchor="ctr"/>
+          <a:lstStyle/>
+          <a:p>
+            <a:pPr algn="ctr"/>
+          </a:p>
+        </p:txBody>
+      </p:sp>
+      <p:sp>
+        <p:nvSpPr>
+          <p:cNvPr id="11" name="TextBox 10"/>
+          <p:cNvSpPr txBox="1"/>
+          <p:nvPr/>
+        </p:nvSpPr>
+        <p:spPr>
+          <a:xfrm>
+            <a:off x="594360" y="3003804"/>
+            <a:ext cx="438912" cy="438912"/>
+          </a:xfrm>
+          <a:prstGeom prst="rect">
+            <a:avLst/>
+          </a:prstGeom>
+          <a:noFill/>
+        </p:spPr>
+        <p:txBody>
+          <a:bodyPr wrap="square" anchor="ctr"/>
+          <a:lstStyle/>
+          <a:p>
+            <a:pPr algn="ctr"/>
+            <a:r>
+              <a:rPr sz="1600" b="1" i="0">
+                <a:solidFill>
+                  <a:srgbClr val="FFFFFF"/>
+                </a:solidFill>
+                <a:latin typeface="Calibri"/>
+              </a:rPr>
+              <a:t>2</a:t>
+            </a:r>
+          </a:p>
+        </p:txBody>
+      </p:sp>
+      <p:sp>
+        <p:nvSpPr>
+          <p:cNvPr id="12" name="TextBox 11"/>
+          <p:cNvSpPr txBox="1"/>
+          <p:nvPr/>
+        </p:nvSpPr>
+        <p:spPr>
+          <a:xfrm>
+            <a:off x="1188720" y="2788920"/>
+            <a:ext cx="10271455" cy="886968"/>
+          </a:xfrm>
+          <a:prstGeom prst="rect">
+            <a:avLst/>
+          </a:prstGeom>
+          <a:noFill/>
+        </p:spPr>
+        <p:txBody>
+          <a:bodyPr wrap="square" anchor="ctr"/>
+          <a:lstStyle/>
+          <a:p>
+            <a:r>
+              <a:rPr sz="1500" b="1" i="0">
+                <a:solidFill>
+                  <a:srgbClr val="095292"/>
+                </a:solidFill>
+                <a:latin typeface="Calibri"/>
+              </a:rPr>
+              <a:t>Resumir en media pagina que paso.</a:t>
+            </a:r>
+          </a:p>
+        </p:txBody>
+      </p:sp>
+      <p:sp>
+        <p:nvSpPr>
+          <p:cNvPr id="13" name="Rounded Rectangle 12"/>
+          <p:cNvSpPr/>
+          <p:nvPr/>
+        </p:nvSpPr>
+        <p:spPr>
+          <a:xfrm>
+            <a:off x="457200" y="3840480"/>
+            <a:ext cx="11277295" cy="1051560"/>
+          </a:xfrm>
+          <a:prstGeom prst="roundRect">
+            <a:avLst>
+              <a:gd name="adj" fmla="val 12000"/>
+            </a:avLst>
+          </a:prstGeom>
+          <a:solidFill>
+            <a:srgbClr val="F2F2F2"/>
+          </a:solidFill>
+          <a:ln>
+            <a:noFill/>
+          </a:ln>
+        </p:spPr>
+        <p:style>
+          <a:lnRef idx="1">
+            <a:schemeClr val="accent1"/>
+          </a:lnRef>
+          <a:fillRef idx="3">
+            <a:schemeClr val="accent1"/>
+          </a:fillRef>
+          <a:effectRef idx="2">
+            <a:schemeClr val="accent1"/>
+          </a:effectRef>
+          <a:fontRef idx="minor">
+            <a:schemeClr val="lt1"/>
+          </a:fontRef>
+        </p:style>
+        <p:txBody>
+          <a:bodyPr rtlCol="0" anchor="ctr"/>
+          <a:lstStyle/>
+          <a:p>
+            <a:pPr algn="ctr"/>
+          </a:p>
+        </p:txBody>
+      </p:sp>
+      <p:sp>
+        <p:nvSpPr>
+          <p:cNvPr id="14" name="Rounded Rectangle 13"/>
+          <p:cNvSpPr/>
+          <p:nvPr/>
+        </p:nvSpPr>
+        <p:spPr>
+          <a:xfrm>
+            <a:off x="594360" y="4146804"/>
+            <a:ext cx="438912" cy="438912"/>
+          </a:xfrm>
+          <a:prstGeom prst="roundRect">
+            <a:avLst>
+              <a:gd name="adj" fmla="val 12000"/>
+            </a:avLst>
+          </a:prstGeom>
+          <a:solidFill>
+            <a:srgbClr val="095292"/>
+          </a:solidFill>
+          <a:ln>
+            <a:noFill/>
+          </a:ln>
+        </p:spPr>
+        <p:style>
+          <a:lnRef idx="1">
+            <a:schemeClr val="accent1"/>
+          </a:lnRef>
+          <a:fillRef idx="3">
+            <a:schemeClr val="accent1"/>
+          </a:fillRef>
+          <a:effectRef idx="2">
+            <a:schemeClr val="accent1"/>
+          </a:effectRef>
+          <a:fontRef idx="minor">
+            <a:schemeClr val="lt1"/>
+          </a:fontRef>
+        </p:style>
+        <p:txBody>
+          <a:bodyPr rtlCol="0" anchor="ctr"/>
+          <a:lstStyle/>
+          <a:p>
+            <a:pPr algn="ctr"/>
+          </a:p>
+        </p:txBody>
+      </p:sp>
+      <p:sp>
+        <p:nvSpPr>
+          <p:cNvPr id="15" name="TextBox 14"/>
+          <p:cNvSpPr txBox="1"/>
+          <p:nvPr/>
+        </p:nvSpPr>
+        <p:spPr>
+          <a:xfrm>
+            <a:off x="594360" y="4146804"/>
+            <a:ext cx="438912" cy="438912"/>
+          </a:xfrm>
+          <a:prstGeom prst="rect">
+            <a:avLst/>
+          </a:prstGeom>
+          <a:noFill/>
+        </p:spPr>
+        <p:txBody>
+          <a:bodyPr wrap="square" anchor="ctr"/>
+          <a:lstStyle/>
+          <a:p>
+            <a:pPr algn="ctr"/>
+            <a:r>
+              <a:rPr sz="1600" b="1" i="0">
+                <a:solidFill>
+                  <a:srgbClr val="FFFFFF"/>
+                </a:solidFill>
+                <a:latin typeface="Calibri"/>
+              </a:rPr>
+              <a:t>3</a:t>
+            </a:r>
+          </a:p>
+        </p:txBody>
+      </p:sp>
+      <p:sp>
+        <p:nvSpPr>
+          <p:cNvPr id="16" name="TextBox 15"/>
+          <p:cNvSpPr txBox="1"/>
+          <p:nvPr/>
+        </p:nvSpPr>
+        <p:spPr>
+          <a:xfrm>
+            <a:off x="1188720" y="3931920"/>
+            <a:ext cx="10271455" cy="886968"/>
+          </a:xfrm>
+          <a:prstGeom prst="rect">
+            <a:avLst/>
+          </a:prstGeom>
+          <a:noFill/>
+        </p:spPr>
+        <p:txBody>
+          <a:bodyPr wrap="square" anchor="ctr"/>
+          <a:lstStyle/>
+          <a:p>
+            <a:r>
+              <a:rPr sz="1500" b="1" i="0">
+                <a:solidFill>
+                  <a:srgbClr val="095292"/>
+                </a:solidFill>
+                <a:latin typeface="Calibri"/>
+              </a:rPr>
+              <a:t>Proponer 3 mejoras concretas a su VetCare.</a:t>
+            </a:r>
+          </a:p>
+        </p:txBody>
+      </p:sp>
+      <p:sp>
+        <p:nvSpPr>
+          <p:cNvPr id="17" name="Rounded Rectangle 16"/>
+          <p:cNvSpPr/>
+          <p:nvPr/>
+        </p:nvSpPr>
+        <p:spPr>
+          <a:xfrm>
+            <a:off x="457200" y="4983480"/>
+            <a:ext cx="11277295" cy="1051560"/>
+          </a:xfrm>
+          <a:prstGeom prst="roundRect">
+            <a:avLst>
+              <a:gd name="adj" fmla="val 12000"/>
+            </a:avLst>
+          </a:prstGeom>
+          <a:solidFill>
+            <a:srgbClr val="E8F4FA"/>
+          </a:solidFill>
+          <a:ln>
+            <a:noFill/>
+          </a:ln>
+        </p:spPr>
+        <p:style>
+          <a:lnRef idx="1">
+            <a:schemeClr val="accent1"/>
+          </a:lnRef>
+          <a:fillRef idx="3">
+            <a:schemeClr val="accent1"/>
+          </a:fillRef>
+          <a:effectRef idx="2">
+            <a:schemeClr val="accent1"/>
+          </a:effectRef>
+          <a:fontRef idx="minor">
+            <a:schemeClr val="lt1"/>
+          </a:fontRef>
+        </p:style>
+        <p:txBody>
+          <a:bodyPr rtlCol="0" anchor="ctr"/>
+          <a:lstStyle/>
+          <a:p>
+            <a:pPr algn="ctr"/>
+          </a:p>
+        </p:txBody>
+      </p:sp>
+      <p:sp>
+        <p:nvSpPr>
+          <p:cNvPr id="18" name="Rounded Rectangle 17"/>
+          <p:cNvSpPr/>
+          <p:nvPr/>
+        </p:nvSpPr>
+        <p:spPr>
+          <a:xfrm>
+            <a:off x="594360" y="5289804"/>
+            <a:ext cx="438912" cy="438912"/>
+          </a:xfrm>
+          <a:prstGeom prst="roundRect">
+            <a:avLst>
+              <a:gd name="adj" fmla="val 12000"/>
+            </a:avLst>
+          </a:prstGeom>
+          <a:solidFill>
+            <a:srgbClr val="095292"/>
+          </a:solidFill>
+          <a:ln>
+            <a:noFill/>
+          </a:ln>
+        </p:spPr>
+        <p:style>
+          <a:lnRef idx="1">
+            <a:schemeClr val="accent1"/>
+          </a:lnRef>
+          <a:fillRef idx="3">
+            <a:schemeClr val="accent1"/>
+          </a:fillRef>
+          <a:effectRef idx="2">
+            <a:schemeClr val="accent1"/>
+          </a:effectRef>
+          <a:fontRef idx="minor">
+            <a:schemeClr val="lt1"/>
+          </a:fontRef>
+        </p:style>
+        <p:txBody>
+          <a:bodyPr rtlCol="0" anchor="ctr"/>
+          <a:lstStyle/>
+          <a:p>
+            <a:pPr algn="ctr"/>
+          </a:p>
+        </p:txBody>
+      </p:sp>
+      <p:sp>
+        <p:nvSpPr>
+          <p:cNvPr id="19" name="TextBox 18"/>
+          <p:cNvSpPr txBox="1"/>
+          <p:nvPr/>
+        </p:nvSpPr>
+        <p:spPr>
+          <a:xfrm>
+            <a:off x="594360" y="5289804"/>
+            <a:ext cx="438912" cy="438912"/>
+          </a:xfrm>
+          <a:prstGeom prst="rect">
+            <a:avLst/>
+          </a:prstGeom>
+          <a:noFill/>
+        </p:spPr>
+        <p:txBody>
+          <a:bodyPr wrap="square" anchor="ctr"/>
+          <a:lstStyle/>
+          <a:p>
+            <a:pPr algn="ctr"/>
+            <a:r>
+              <a:rPr sz="1600" b="1" i="0">
+                <a:solidFill>
+                  <a:srgbClr val="FFFFFF"/>
+                </a:solidFill>
+                <a:latin typeface="Calibri"/>
+              </a:rPr>
+              <a:t>4</a:t>
+            </a:r>
+          </a:p>
+        </p:txBody>
+      </p:sp>
+      <p:sp>
+        <p:nvSpPr>
+          <p:cNvPr id="20" name="TextBox 19"/>
+          <p:cNvSpPr txBox="1"/>
+          <p:nvPr/>
+        </p:nvSpPr>
+        <p:spPr>
+          <a:xfrm>
+            <a:off x="1188720" y="5074920"/>
+            <a:ext cx="10271455" cy="886968"/>
+          </a:xfrm>
+          <a:prstGeom prst="rect">
+            <a:avLst/>
+          </a:prstGeom>
+          <a:noFill/>
+        </p:spPr>
+        <p:txBody>
+          <a:bodyPr wrap="square" anchor="ctr"/>
+          <a:lstStyle/>
+          <a:p>
+            <a:r>
+              <a:rPr sz="1500" b="1" i="0">
+                <a:solidFill>
+                  <a:srgbClr val="095292"/>
+                </a:solidFill>
+                <a:latin typeface="Calibri"/>
+              </a:rPr>
+              <a:t>Actualizar informe PI con lecciones de casos.</a:t>
+            </a:r>
+          </a:p>
+        </p:txBody>
+      </p:sp>
+      <p:sp>
+        <p:nvSpPr>
+          <p:cNvPr id="21" name="TextBox 20"/>
+          <p:cNvSpPr txBox="1"/>
+          <p:nvPr/>
+        </p:nvSpPr>
+        <p:spPr>
+          <a:xfrm>
+            <a:off x="11185855" y="6473952"/>
+            <a:ext cx="640080" cy="274320"/>
+          </a:xfrm>
+          <a:prstGeom prst="rect">
+            <a:avLst/>
+          </a:prstGeom>
+          <a:noFill/>
+        </p:spPr>
+        <p:txBody>
+          <a:bodyPr wrap="square">
+            <a:spAutoFit/>
+          </a:bodyPr>
+          <a:lstStyle/>
+          <a:p>
+            <a:pPr algn="r"/>
+            <a:r>
+              <a:rPr sz="1100" b="0" i="0">
+                <a:solidFill>
+                  <a:srgbClr val="666666"/>
+                </a:solidFill>
+                <a:latin typeface="Calibri"/>
+              </a:rPr>
+              <a:t>23</a:t>
+            </a:r>
+          </a:p>
+        </p:txBody>
+      </p:sp>
+    </p:spTree>
+  </p:cSld>
+  <p:clrMapOvr>
+    <a:masterClrMapping/>
+  </p:clrMapOvr>
+</p:sld>
+</file>
+
+<file path=ppt/slides/slide24.xml><?xml version="1.0" encoding="utf-8"?>
+<p:sld xmlns:a="http://schemas.openxmlformats.org/drawingml/2006/main" xmlns:p="http://schemas.openxmlformats.org/presentationml/2006/main" xmlns:r="http://schemas.openxmlformats.org/officeDocument/2006/relationships">
+  <p:cSld>
+    <p:bg>
+      <p:bgPr>
+        <a:solidFill>
+          <a:srgbClr val="FFFFFF"/>
+        </a:solidFill>
+        <a:effectLst/>
+      </p:bgPr>
+    </p:bg>
+    <p:spTree>
+      <p:nvGrpSpPr>
+        <p:cNvPr id="1" name=""/>
+        <p:cNvGrpSpPr/>
+        <p:nvPr/>
+      </p:nvGrpSpPr>
+      <p:grpSpPr/>
+      <p:sp>
+        <p:nvSpPr>
+          <p:cNvPr id="2" name="Rectangle 1"/>
+          <p:cNvSpPr/>
+          <p:nvPr/>
+        </p:nvSpPr>
+        <p:spPr>
+          <a:xfrm>
+            <a:off x="0" y="0"/>
+            <a:ext cx="12191695" cy="960120"/>
+          </a:xfrm>
+          <a:prstGeom prst="rect">
+            <a:avLst/>
+          </a:prstGeom>
+          <a:solidFill>
+            <a:srgbClr val="095292"/>
+          </a:solidFill>
+          <a:ln>
+            <a:noFill/>
+          </a:ln>
+        </p:spPr>
+        <p:style>
+          <a:lnRef idx="1">
+            <a:schemeClr val="accent1"/>
+          </a:lnRef>
+          <a:fillRef idx="3">
+            <a:schemeClr val="accent1"/>
+          </a:fillRef>
+          <a:effectRef idx="2">
+            <a:schemeClr val="accent1"/>
+          </a:effectRef>
+          <a:fontRef idx="minor">
+            <a:schemeClr val="lt1"/>
+          </a:fontRef>
+        </p:style>
+        <p:txBody>
+          <a:bodyPr rtlCol="0" anchor="ctr"/>
+          <a:lstStyle/>
+          <a:p>
+            <a:pPr algn="ctr"/>
+          </a:p>
+        </p:txBody>
+      </p:sp>
+      <p:sp>
+        <p:nvSpPr>
+          <p:cNvPr id="3" name="Rectangle 2"/>
+          <p:cNvSpPr/>
+          <p:nvPr/>
+        </p:nvSpPr>
+        <p:spPr>
+          <a:xfrm>
+            <a:off x="0" y="960120"/>
+            <a:ext cx="12191695" cy="41148"/>
+          </a:xfrm>
+          <a:prstGeom prst="rect">
+            <a:avLst/>
+          </a:prstGeom>
+          <a:solidFill>
+            <a:srgbClr val="FFD000"/>
+          </a:solidFill>
+          <a:ln>
+            <a:noFill/>
+          </a:ln>
+        </p:spPr>
+        <p:style>
+          <a:lnRef idx="1">
+            <a:schemeClr val="accent1"/>
+          </a:lnRef>
+          <a:fillRef idx="3">
+            <a:schemeClr val="accent1"/>
+          </a:fillRef>
+          <a:effectRef idx="2">
+            <a:schemeClr val="accent1"/>
+          </a:effectRef>
+          <a:fontRef idx="minor">
+            <a:schemeClr val="lt1"/>
+          </a:fontRef>
+        </p:style>
+        <p:txBody>
+          <a:bodyPr rtlCol="0" anchor="ctr"/>
+          <a:lstStyle/>
+          <a:p>
+            <a:pPr algn="ctr"/>
+          </a:p>
+        </p:txBody>
+      </p:sp>
+      <p:sp>
+        <p:nvSpPr>
+          <p:cNvPr id="4" name="TextBox 3"/>
+          <p:cNvSpPr txBox="1"/>
+          <p:nvPr/>
+        </p:nvSpPr>
+        <p:spPr>
+          <a:xfrm>
+            <a:off x="457200" y="164592"/>
+            <a:ext cx="11277295" cy="502920"/>
+          </a:xfrm>
+          <a:prstGeom prst="rect">
+            <a:avLst/>
+          </a:prstGeom>
+          <a:noFill/>
+        </p:spPr>
+        <p:txBody>
+          <a:bodyPr wrap="square">
+            <a:spAutoFit/>
+          </a:bodyPr>
+          <a:lstStyle/>
+          <a:p>
+            <a:r>
+              <a:rPr sz="2600" b="1" i="0">
+                <a:solidFill>
+                  <a:srgbClr val="FFFFFF"/>
+                </a:solidFill>
+                <a:latin typeface="Calibri"/>
+              </a:rPr>
+              <a:t>Actividad autonoma — pistas (checklist vacio)</a:t>
+            </a:r>
+          </a:p>
+        </p:txBody>
+      </p:sp>
+      <p:sp>
+        <p:nvSpPr>
+          <p:cNvPr id="5" name="Rounded Rectangle 4"/>
+          <p:cNvSpPr/>
+          <p:nvPr/>
+        </p:nvSpPr>
+        <p:spPr>
+          <a:xfrm>
+            <a:off x="457200" y="1261872"/>
+            <a:ext cx="11277295" cy="566928"/>
+          </a:xfrm>
+          <a:prstGeom prst="roundRect">
+            <a:avLst>
+              <a:gd name="adj" fmla="val 12000"/>
+            </a:avLst>
+          </a:prstGeom>
+          <a:solidFill>
+            <a:srgbClr val="F2F2F2"/>
+          </a:solidFill>
+          <a:ln>
+            <a:noFill/>
+          </a:ln>
+        </p:spPr>
+        <p:style>
+          <a:lnRef idx="1">
+            <a:schemeClr val="accent1"/>
+          </a:lnRef>
+          <a:fillRef idx="3">
+            <a:schemeClr val="accent1"/>
+          </a:fillRef>
+          <a:effectRef idx="2">
+            <a:schemeClr val="accent1"/>
+          </a:effectRef>
+          <a:fontRef idx="minor">
+            <a:schemeClr val="lt1"/>
+          </a:fontRef>
+        </p:style>
+        <p:txBody>
+          <a:bodyPr rtlCol="0" anchor="ctr"/>
+          <a:lstStyle/>
+          <a:p>
+            <a:pPr algn="ctr"/>
+          </a:p>
+        </p:txBody>
+      </p:sp>
+      <p:sp>
+        <p:nvSpPr>
+          <p:cNvPr id="6" name="Rectangle 5"/>
+          <p:cNvSpPr/>
+          <p:nvPr/>
+        </p:nvSpPr>
+        <p:spPr>
+          <a:xfrm>
+            <a:off x="640080" y="1408175"/>
+            <a:ext cx="274320" cy="274320"/>
+          </a:xfrm>
+          <a:prstGeom prst="rect">
+            <a:avLst/>
+          </a:prstGeom>
+          <a:solidFill>
+            <a:srgbClr val="FFFFFF"/>
+          </a:solidFill>
+          <a:ln>
+            <a:solidFill>
+              <a:srgbClr val="333333"/>
+            </a:solidFill>
+          </a:ln>
+        </p:spPr>
+        <p:style>
+          <a:lnRef idx="1">
+            <a:schemeClr val="accent1"/>
+          </a:lnRef>
+          <a:fillRef idx="3">
+            <a:schemeClr val="accent1"/>
+          </a:fillRef>
+          <a:effectRef idx="2">
+            <a:schemeClr val="accent1"/>
+          </a:effectRef>
+          <a:fontRef idx="minor">
+            <a:schemeClr val="lt1"/>
+          </a:fontRef>
+        </p:style>
+        <p:txBody>
+          <a:bodyPr rtlCol="0" anchor="ctr"/>
+          <a:lstStyle/>
+          <a:p>
+            <a:pPr algn="ctr"/>
+          </a:p>
+        </p:txBody>
+      </p:sp>
+      <p:sp>
+        <p:nvSpPr>
+          <p:cNvPr id="7" name="Rectangle 6"/>
+          <p:cNvSpPr/>
+          <p:nvPr/>
+        </p:nvSpPr>
+        <p:spPr>
+          <a:xfrm>
+            <a:off x="640080" y="1408175"/>
+            <a:ext cx="73152" cy="274320"/>
+          </a:xfrm>
+          <a:prstGeom prst="rect">
+            <a:avLst/>
+          </a:prstGeom>
+          <a:solidFill>
+            <a:srgbClr val="269CCB"/>
+          </a:solidFill>
+          <a:ln>
+            <a:noFill/>
+          </a:ln>
+        </p:spPr>
+        <p:style>
+          <a:lnRef idx="1">
+            <a:schemeClr val="accent1"/>
+          </a:lnRef>
+          <a:fillRef idx="3">
+            <a:schemeClr val="accent1"/>
+          </a:fillRef>
+          <a:effectRef idx="2">
+            <a:schemeClr val="accent1"/>
+          </a:effectRef>
+          <a:fontRef idx="minor">
+            <a:schemeClr val="lt1"/>
+          </a:fontRef>
+        </p:style>
+        <p:txBody>
+          <a:bodyPr rtlCol="0" anchor="ctr"/>
+          <a:lstStyle/>
+          <a:p>
+            <a:pPr algn="ctr"/>
+          </a:p>
+        </p:txBody>
+      </p:sp>
+      <p:sp>
+        <p:nvSpPr>
+          <p:cNvPr id="8" name="TextBox 7"/>
+          <p:cNvSpPr txBox="1"/>
+          <p:nvPr/>
+        </p:nvSpPr>
+        <p:spPr>
+          <a:xfrm>
+            <a:off x="1097280" y="1353312"/>
+            <a:ext cx="10362895" cy="402336"/>
+          </a:xfrm>
+          <a:prstGeom prst="rect">
+            <a:avLst/>
+          </a:prstGeom>
+          <a:noFill/>
+        </p:spPr>
+        <p:txBody>
+          <a:bodyPr wrap="square" anchor="ctr"/>
+          <a:lstStyle/>
+          <a:p>
+            <a:r>
+              <a:rPr sz="1500" b="0" i="0">
+                <a:solidFill>
+                  <a:srgbClr val="333333"/>
+                </a:solidFill>
+                <a:latin typeface="Calibri"/>
+              </a:rPr>
+              <a:t>□ Mejoras accionables?</a:t>
+            </a:r>
+          </a:p>
+        </p:txBody>
+      </p:sp>
+      <p:sp>
+        <p:nvSpPr>
+          <p:cNvPr id="9" name="Rounded Rectangle 8"/>
+          <p:cNvSpPr/>
+          <p:nvPr/>
+        </p:nvSpPr>
+        <p:spPr>
+          <a:xfrm>
+            <a:off x="457200" y="1938528"/>
+            <a:ext cx="11277295" cy="566928"/>
+          </a:xfrm>
+          <a:prstGeom prst="roundRect">
+            <a:avLst>
+              <a:gd name="adj" fmla="val 12000"/>
+            </a:avLst>
+          </a:prstGeom>
+          <a:solidFill>
+            <a:srgbClr val="F2F2F2"/>
+          </a:solidFill>
+          <a:ln>
+            <a:noFill/>
+          </a:ln>
+        </p:spPr>
+        <p:style>
+          <a:lnRef idx="1">
+            <a:schemeClr val="accent1"/>
+          </a:lnRef>
+          <a:fillRef idx="3">
+            <a:schemeClr val="accent1"/>
+          </a:fillRef>
+          <a:effectRef idx="2">
+            <a:schemeClr val="accent1"/>
+          </a:effectRef>
+          <a:fontRef idx="minor">
+            <a:schemeClr val="lt1"/>
+          </a:fontRef>
+        </p:style>
+        <p:txBody>
+          <a:bodyPr rtlCol="0" anchor="ctr"/>
+          <a:lstStyle/>
+          <a:p>
+            <a:pPr algn="ctr"/>
+          </a:p>
+        </p:txBody>
+      </p:sp>
+      <p:sp>
+        <p:nvSpPr>
+          <p:cNvPr id="10" name="Rectangle 9"/>
+          <p:cNvSpPr/>
+          <p:nvPr/>
+        </p:nvSpPr>
+        <p:spPr>
+          <a:xfrm>
+            <a:off x="640080" y="2084832"/>
+            <a:ext cx="274320" cy="274320"/>
+          </a:xfrm>
+          <a:prstGeom prst="rect">
+            <a:avLst/>
+          </a:prstGeom>
+          <a:solidFill>
+            <a:srgbClr val="FFFFFF"/>
+          </a:solidFill>
+          <a:ln>
+            <a:solidFill>
+              <a:srgbClr val="333333"/>
+            </a:solidFill>
+          </a:ln>
+        </p:spPr>
+        <p:style>
+          <a:lnRef idx="1">
+            <a:schemeClr val="accent1"/>
+          </a:lnRef>
+          <a:fillRef idx="3">
+            <a:schemeClr val="accent1"/>
+          </a:fillRef>
+          <a:effectRef idx="2">
+            <a:schemeClr val="accent1"/>
+          </a:effectRef>
+          <a:fontRef idx="minor">
+            <a:schemeClr val="lt1"/>
+          </a:fontRef>
+        </p:style>
+        <p:txBody>
+          <a:bodyPr rtlCol="0" anchor="ctr"/>
+          <a:lstStyle/>
+          <a:p>
+            <a:pPr algn="ctr"/>
+          </a:p>
+        </p:txBody>
+      </p:sp>
+      <p:sp>
+        <p:nvSpPr>
+          <p:cNvPr id="11" name="Rectangle 10"/>
+          <p:cNvSpPr/>
+          <p:nvPr/>
+        </p:nvSpPr>
+        <p:spPr>
+          <a:xfrm>
+            <a:off x="640080" y="2084832"/>
+            <a:ext cx="73152" cy="274320"/>
+          </a:xfrm>
+          <a:prstGeom prst="rect">
+            <a:avLst/>
+          </a:prstGeom>
+          <a:solidFill>
+            <a:srgbClr val="269CCB"/>
+          </a:solidFill>
+          <a:ln>
+            <a:noFill/>
+          </a:ln>
+        </p:spPr>
+        <p:style>
+          <a:lnRef idx="1">
+            <a:schemeClr val="accent1"/>
+          </a:lnRef>
+          <a:fillRef idx="3">
+            <a:schemeClr val="accent1"/>
+          </a:fillRef>
+          <a:effectRef idx="2">
+            <a:schemeClr val="accent1"/>
+          </a:effectRef>
+          <a:fontRef idx="minor">
+            <a:schemeClr val="lt1"/>
+          </a:fontRef>
+        </p:style>
+        <p:txBody>
+          <a:bodyPr rtlCol="0" anchor="ctr"/>
+          <a:lstStyle/>
+          <a:p>
+            <a:pPr algn="ctr"/>
+          </a:p>
+        </p:txBody>
+      </p:sp>
+      <p:sp>
+        <p:nvSpPr>
+          <p:cNvPr id="12" name="TextBox 11"/>
+          <p:cNvSpPr txBox="1"/>
+          <p:nvPr/>
+        </p:nvSpPr>
+        <p:spPr>
+          <a:xfrm>
+            <a:off x="1097280" y="2029968"/>
+            <a:ext cx="10362895" cy="402336"/>
+          </a:xfrm>
+          <a:prstGeom prst="rect">
+            <a:avLst/>
+          </a:prstGeom>
+          <a:noFill/>
+        </p:spPr>
+        <p:txBody>
+          <a:bodyPr wrap="square" anchor="ctr"/>
+          <a:lstStyle/>
+          <a:p>
+            <a:r>
+              <a:rPr sz="1500" b="0" i="0">
+                <a:solidFill>
+                  <a:srgbClr val="333333"/>
+                </a:solidFill>
+                <a:latin typeface="Calibri"/>
+              </a:rPr>
+              <a:t>□ Conectan al PI?</a:t>
+            </a:r>
+          </a:p>
+        </p:txBody>
+      </p:sp>
+      <p:sp>
+        <p:nvSpPr>
+          <p:cNvPr id="13" name="Rounded Rectangle 12"/>
+          <p:cNvSpPr/>
+          <p:nvPr/>
+        </p:nvSpPr>
+        <p:spPr>
+          <a:xfrm>
+            <a:off x="457200" y="2615184"/>
+            <a:ext cx="11277295" cy="566928"/>
+          </a:xfrm>
+          <a:prstGeom prst="roundRect">
+            <a:avLst>
+              <a:gd name="adj" fmla="val 12000"/>
+            </a:avLst>
+          </a:prstGeom>
+          <a:solidFill>
+            <a:srgbClr val="F2F2F2"/>
+          </a:solidFill>
+          <a:ln>
+            <a:noFill/>
+          </a:ln>
+        </p:spPr>
+        <p:style>
+          <a:lnRef idx="1">
+            <a:schemeClr val="accent1"/>
+          </a:lnRef>
+          <a:fillRef idx="3">
+            <a:schemeClr val="accent1"/>
+          </a:fillRef>
+          <a:effectRef idx="2">
+            <a:schemeClr val="accent1"/>
+          </a:effectRef>
+          <a:fontRef idx="minor">
+            <a:schemeClr val="lt1"/>
+          </a:fontRef>
+        </p:style>
+        <p:txBody>
+          <a:bodyPr rtlCol="0" anchor="ctr"/>
+          <a:lstStyle/>
+          <a:p>
+            <a:pPr algn="ctr"/>
+          </a:p>
+        </p:txBody>
+      </p:sp>
+      <p:sp>
+        <p:nvSpPr>
+          <p:cNvPr id="14" name="Rectangle 13"/>
+          <p:cNvSpPr/>
+          <p:nvPr/>
+        </p:nvSpPr>
+        <p:spPr>
+          <a:xfrm>
+            <a:off x="640080" y="2761488"/>
+            <a:ext cx="274320" cy="274320"/>
+          </a:xfrm>
+          <a:prstGeom prst="rect">
+            <a:avLst/>
+          </a:prstGeom>
+          <a:solidFill>
+            <a:srgbClr val="FFFFFF"/>
+          </a:solidFill>
+          <a:ln>
+            <a:solidFill>
+              <a:srgbClr val="333333"/>
+            </a:solidFill>
+          </a:ln>
+        </p:spPr>
+        <p:style>
+          <a:lnRef idx="1">
+            <a:schemeClr val="accent1"/>
+          </a:lnRef>
+          <a:fillRef idx="3">
+            <a:schemeClr val="accent1"/>
+          </a:fillRef>
+          <a:effectRef idx="2">
+            <a:schemeClr val="accent1"/>
+          </a:effectRef>
+          <a:fontRef idx="minor">
+            <a:schemeClr val="lt1"/>
+          </a:fontRef>
+        </p:style>
+        <p:txBody>
+          <a:bodyPr rtlCol="0" anchor="ctr"/>
+          <a:lstStyle/>
+          <a:p>
+            <a:pPr algn="ctr"/>
+          </a:p>
+        </p:txBody>
+      </p:sp>
+      <p:sp>
+        <p:nvSpPr>
+          <p:cNvPr id="15" name="Rectangle 14"/>
+          <p:cNvSpPr/>
+          <p:nvPr/>
+        </p:nvSpPr>
+        <p:spPr>
+          <a:xfrm>
+            <a:off x="640080" y="2761488"/>
+            <a:ext cx="73152" cy="274320"/>
+          </a:xfrm>
+          <a:prstGeom prst="rect">
+            <a:avLst/>
+          </a:prstGeom>
+          <a:solidFill>
+            <a:srgbClr val="269CCB"/>
+          </a:solidFill>
+          <a:ln>
+            <a:noFill/>
+          </a:ln>
+        </p:spPr>
+        <p:style>
+          <a:lnRef idx="1">
+            <a:schemeClr val="accent1"/>
+          </a:lnRef>
+          <a:fillRef idx="3">
+            <a:schemeClr val="accent1"/>
+          </a:fillRef>
+          <a:effectRef idx="2">
+            <a:schemeClr val="accent1"/>
+          </a:effectRef>
+          <a:fontRef idx="minor">
+            <a:schemeClr val="lt1"/>
+          </a:fontRef>
+        </p:style>
+        <p:txBody>
+          <a:bodyPr rtlCol="0" anchor="ctr"/>
+          <a:lstStyle/>
+          <a:p>
+            <a:pPr algn="ctr"/>
+          </a:p>
+        </p:txBody>
+      </p:sp>
+      <p:sp>
+        <p:nvSpPr>
+          <p:cNvPr id="16" name="TextBox 15"/>
+          <p:cNvSpPr txBox="1"/>
+          <p:nvPr/>
+        </p:nvSpPr>
+        <p:spPr>
+          <a:xfrm>
+            <a:off x="1097280" y="2706624"/>
+            <a:ext cx="10362895" cy="402336"/>
+          </a:xfrm>
+          <a:prstGeom prst="rect">
+            <a:avLst/>
+          </a:prstGeom>
+          <a:noFill/>
+        </p:spPr>
+        <p:txBody>
+          <a:bodyPr wrap="square" anchor="ctr"/>
+          <a:lstStyle/>
+          <a:p>
+            <a:r>
+              <a:rPr sz="1500" b="0" i="0">
+                <a:solidFill>
+                  <a:srgbClr val="333333"/>
+                </a:solidFill>
+                <a:latin typeface="Calibri"/>
+              </a:rPr>
+              <a:t>□ Evidencia de lectura?</a:t>
+            </a:r>
+          </a:p>
+        </p:txBody>
+      </p:sp>
+      <p:sp>
+        <p:nvSpPr>
+          <p:cNvPr id="17" name="TextBox 16"/>
+          <p:cNvSpPr txBox="1"/>
+          <p:nvPr/>
+        </p:nvSpPr>
+        <p:spPr>
+          <a:xfrm>
+            <a:off x="11185855" y="6473952"/>
+            <a:ext cx="640080" cy="274320"/>
+          </a:xfrm>
+          <a:prstGeom prst="rect">
+            <a:avLst/>
+          </a:prstGeom>
+          <a:noFill/>
+        </p:spPr>
+        <p:txBody>
+          <a:bodyPr wrap="square">
+            <a:spAutoFit/>
+          </a:bodyPr>
+          <a:lstStyle/>
+          <a:p>
+            <a:pPr algn="r"/>
+            <a:r>
+              <a:rPr sz="1100" b="0" i="0">
+                <a:solidFill>
+                  <a:srgbClr val="666666"/>
+                </a:solidFill>
+                <a:latin typeface="Calibri"/>
+              </a:rPr>
+              <a:t>24</a:t>
+            </a:r>
+          </a:p>
+        </p:txBody>
+      </p:sp>
+    </p:spTree>
+  </p:cSld>
+  <p:clrMapOvr>
+    <a:masterClrMapping/>
+  </p:clrMapOvr>
+</p:sld>
+</file>
+
+<file path=ppt/slides/slide25.xml><?xml version="1.0" encoding="utf-8"?>
+<p:sld xmlns:a="http://schemas.openxmlformats.org/drawingml/2006/main" xmlns:p="http://schemas.openxmlformats.org/presentationml/2006/main" xmlns:r="http://schemas.openxmlformats.org/officeDocument/2006/relationships">
+  <p:cSld>
+    <p:bg>
+      <p:bgPr>
+        <a:solidFill>
+          <a:srgbClr val="FFFFFF"/>
+        </a:solidFill>
+        <a:effectLst/>
+      </p:bgPr>
+    </p:bg>
+    <p:spTree>
+      <p:nvGrpSpPr>
+        <p:cNvPr id="1" name=""/>
+        <p:cNvGrpSpPr/>
+        <p:nvPr/>
+      </p:nvGrpSpPr>
+      <p:grpSpPr/>
+      <p:sp>
+        <p:nvSpPr>
+          <p:cNvPr id="2" name="Rectangle 1"/>
+          <p:cNvSpPr/>
+          <p:nvPr/>
+        </p:nvSpPr>
+        <p:spPr>
+          <a:xfrm>
+            <a:off x="0" y="0"/>
+            <a:ext cx="12191695" cy="960120"/>
+          </a:xfrm>
+          <a:prstGeom prst="rect">
+            <a:avLst/>
+          </a:prstGeom>
+          <a:solidFill>
+            <a:srgbClr val="095292"/>
+          </a:solidFill>
+          <a:ln>
+            <a:noFill/>
+          </a:ln>
+        </p:spPr>
+        <p:style>
+          <a:lnRef idx="1">
+            <a:schemeClr val="accent1"/>
+          </a:lnRef>
+          <a:fillRef idx="3">
+            <a:schemeClr val="accent1"/>
+          </a:fillRef>
+          <a:effectRef idx="2">
+            <a:schemeClr val="accent1"/>
+          </a:effectRef>
+          <a:fontRef idx="minor">
+            <a:schemeClr val="lt1"/>
+          </a:fontRef>
+        </p:style>
+        <p:txBody>
+          <a:bodyPr rtlCol="0" anchor="ctr"/>
+          <a:lstStyle/>
+          <a:p>
+            <a:pPr algn="ctr"/>
+          </a:p>
+        </p:txBody>
+      </p:sp>
+      <p:sp>
+        <p:nvSpPr>
+          <p:cNvPr id="3" name="Rectangle 2"/>
+          <p:cNvSpPr/>
+          <p:nvPr/>
+        </p:nvSpPr>
+        <p:spPr>
+          <a:xfrm>
+            <a:off x="0" y="960120"/>
+            <a:ext cx="12191695" cy="41148"/>
+          </a:xfrm>
+          <a:prstGeom prst="rect">
+            <a:avLst/>
+          </a:prstGeom>
+          <a:solidFill>
+            <a:srgbClr val="FFD000"/>
+          </a:solidFill>
+          <a:ln>
+            <a:noFill/>
+          </a:ln>
+        </p:spPr>
+        <p:style>
+          <a:lnRef idx="1">
+            <a:schemeClr val="accent1"/>
+          </a:lnRef>
+          <a:fillRef idx="3">
+            <a:schemeClr val="accent1"/>
+          </a:fillRef>
+          <a:effectRef idx="2">
+            <a:schemeClr val="accent1"/>
+          </a:effectRef>
+          <a:fontRef idx="minor">
+            <a:schemeClr val="lt1"/>
+          </a:fontRef>
+        </p:style>
+        <p:txBody>
+          <a:bodyPr rtlCol="0" anchor="ctr"/>
+          <a:lstStyle/>
+          <a:p>
+            <a:pPr algn="ctr"/>
+          </a:p>
+        </p:txBody>
+      </p:sp>
+      <p:sp>
+        <p:nvSpPr>
+          <p:cNvPr id="4" name="TextBox 3"/>
+          <p:cNvSpPr txBox="1"/>
+          <p:nvPr/>
+        </p:nvSpPr>
+        <p:spPr>
+          <a:xfrm>
+            <a:off x="457200" y="164592"/>
+            <a:ext cx="11277295" cy="502920"/>
+          </a:xfrm>
+          <a:prstGeom prst="rect">
+            <a:avLst/>
+          </a:prstGeom>
+          <a:noFill/>
+        </p:spPr>
+        <p:txBody>
+          <a:bodyPr wrap="square">
+            <a:spAutoFit/>
+          </a:bodyPr>
+          <a:lstStyle/>
+          <a:p>
+            <a:r>
+              <a:rPr sz="2600" b="1" i="0">
+                <a:solidFill>
+                  <a:srgbClr val="FFFFFF"/>
+                </a:solidFill>
+                <a:latin typeface="Calibri"/>
+              </a:rPr>
+              <a:t>Criterios de exito / entregable</a:t>
+            </a:r>
+          </a:p>
+        </p:txBody>
+      </p:sp>
+      <p:sp>
+        <p:nvSpPr>
+          <p:cNvPr id="5" name="TextBox 4"/>
+          <p:cNvSpPr txBox="1"/>
+          <p:nvPr/>
+        </p:nvSpPr>
+        <p:spPr>
+          <a:xfrm>
+            <a:off x="457200" y="1170432"/>
+            <a:ext cx="11277295" cy="5230368"/>
+          </a:xfrm>
+          <a:prstGeom prst="rect">
+            <a:avLst/>
+          </a:prstGeom>
+          <a:noFill/>
+        </p:spPr>
+        <p:txBody>
+          <a:bodyPr wrap="square">
+            <a:spAutoFit/>
+          </a:bodyPr>
+          <a:lstStyle/>
+          <a:p>
+            <a:pPr>
+              <a:spcAft>
+                <a:spcPts val="800"/>
+              </a:spcAft>
+            </a:pPr>
+            <a:r>
+              <a:rPr sz="2000" b="0" i="0">
+                <a:solidFill>
+                  <a:srgbClr val="333333"/>
+                </a:solidFill>
+                <a:latin typeface="Calibri"/>
+              </a:rPr>
+              <a:t>–   </a:t>
+            </a:r>
+            <a:r>
+              <a:rPr sz="2000" b="1" i="0">
+                <a:solidFill>
+                  <a:srgbClr val="333333"/>
+                </a:solidFill>
+                <a:latin typeface="Calibri"/>
+              </a:rPr>
+              <a:t>Entregable:</a:t>
+            </a:r>
+            <a:r>
+              <a:rPr sz="2000" b="0" i="0">
+                <a:solidFill>
+                  <a:srgbClr val="333333"/>
+                </a:solidFill>
+                <a:latin typeface="Calibri"/>
+              </a:rPr>
+              <a:t> Informe 1-2 pag.: caso + 3 mejoras aplicables a VetCare</a:t>
+            </a:r>
+          </a:p>
+          <a:p>
+            <a:pPr>
+              <a:spcAft>
+                <a:spcPts val="800"/>
+              </a:spcAft>
+            </a:pPr>
+            <a:r>
+              <a:rPr sz="2000" b="0" i="0">
+                <a:solidFill>
+                  <a:srgbClr val="333333"/>
+                </a:solidFill>
+                <a:latin typeface="Calibri"/>
+              </a:rPr>
+              <a:t>–   Evidencia: el SQL y su salida quedan guardados en cada pregunta de la plataforma del curso.</a:t>
+            </a:r>
+          </a:p>
+          <a:p>
+            <a:pPr>
+              <a:spcAft>
+                <a:spcPts val="800"/>
+              </a:spcAft>
+            </a:pPr>
+            <a:r>
+              <a:rPr sz="2000" b="0" i="0">
+                <a:solidFill>
+                  <a:srgbClr val="333333"/>
+                </a:solidFill>
+                <a:latin typeface="Calibri"/>
+              </a:rPr>
+              <a:t>–   Conserva copia en tu carpeta del PI (los .sql que pide el entregable).</a:t>
+            </a:r>
+          </a:p>
+          <a:p>
+            <a:pPr>
+              <a:spcAft>
+                <a:spcPts val="800"/>
+              </a:spcAft>
+            </a:pPr>
+            <a:r>
+              <a:rPr sz="2000" b="0" i="0">
+                <a:solidFill>
+                  <a:srgbClr val="333333"/>
+                </a:solidFill>
+                <a:latin typeface="Calibri"/>
+              </a:rPr>
+              <a:t>–   Actualizar checklist PI (que criterio de rubrica avanzo).</a:t>
+            </a:r>
+          </a:p>
+          <a:p>
+            <a:pPr>
+              <a:spcAft>
+                <a:spcPts val="800"/>
+              </a:spcAft>
+            </a:pPr>
+            <a:r>
+              <a:rPr sz="2000" b="0" i="0">
+                <a:solidFill>
+                  <a:srgbClr val="333333"/>
+                </a:solidFill>
+                <a:latin typeface="Calibri"/>
+              </a:rPr>
+              <a:t>–   </a:t>
+            </a:r>
+            <a:r>
+              <a:rPr sz="2000" b="1" i="0">
+                <a:solidFill>
+                  <a:srgbClr val="333333"/>
+                </a:solidFill>
+                <a:latin typeface="Calibri"/>
+              </a:rPr>
+              <a:t>Entrega en la plataforma del curso</a:t>
+            </a:r>
+            <a:r>
+              <a:rPr sz="2000" b="0" i="0">
+                <a:solidFill>
+                  <a:srgbClr val="333333"/>
+                </a:solidFill>
+                <a:latin typeface="Calibri"/>
+              </a:rPr>
+              <a:t> — en la fecha que indique el docente.</a:t>
+            </a:r>
+          </a:p>
+        </p:txBody>
+      </p:sp>
+      <p:sp>
+        <p:nvSpPr>
+          <p:cNvPr id="6" name="TextBox 5"/>
+          <p:cNvSpPr txBox="1"/>
+          <p:nvPr/>
+        </p:nvSpPr>
+        <p:spPr>
+          <a:xfrm>
+            <a:off x="11185855" y="6473952"/>
+            <a:ext cx="640080" cy="274320"/>
+          </a:xfrm>
+          <a:prstGeom prst="rect">
+            <a:avLst/>
+          </a:prstGeom>
+          <a:noFill/>
+        </p:spPr>
+        <p:txBody>
+          <a:bodyPr wrap="square">
+            <a:spAutoFit/>
+          </a:bodyPr>
+          <a:lstStyle/>
+          <a:p>
+            <a:pPr algn="r"/>
+            <a:r>
+              <a:rPr sz="1100" b="0" i="0">
+                <a:solidFill>
+                  <a:srgbClr val="666666"/>
+                </a:solidFill>
+                <a:latin typeface="Calibri"/>
+              </a:rPr>
+              <a:t>25</a:t>
+            </a:r>
+          </a:p>
+        </p:txBody>
+      </p:sp>
+    </p:spTree>
+  </p:cSld>
+  <p:clrMapOvr>
+    <a:masterClrMapping/>
+  </p:clrMapOvr>
+</p:sld>
+</file>
+
+<file path=ppt/slides/slide26.xml><?xml version="1.0" encoding="utf-8"?>
+<p:sld xmlns:a="http://schemas.openxmlformats.org/drawingml/2006/main" xmlns:p="http://schemas.openxmlformats.org/presentationml/2006/main" xmlns:r="http://schemas.openxmlformats.org/officeDocument/2006/relationships">
+  <p:cSld>
+    <p:bg>
+      <p:bgPr>
+        <a:solidFill>
+          <a:srgbClr val="FFFFFF"/>
+        </a:solidFill>
+        <a:effectLst/>
+      </p:bgPr>
+    </p:bg>
+    <p:spTree>
+      <p:nvGrpSpPr>
+        <p:cNvPr id="1" name=""/>
+        <p:cNvGrpSpPr/>
+        <p:nvPr/>
+      </p:nvGrpSpPr>
+      <p:grpSpPr/>
+      <p:sp>
+        <p:nvSpPr>
+          <p:cNvPr id="2" name="Rectangle 1"/>
+          <p:cNvSpPr/>
+          <p:nvPr/>
+        </p:nvSpPr>
+        <p:spPr>
+          <a:xfrm>
+            <a:off x="0" y="0"/>
+            <a:ext cx="12191695" cy="960120"/>
+          </a:xfrm>
+          <a:prstGeom prst="rect">
+            <a:avLst/>
+          </a:prstGeom>
+          <a:solidFill>
+            <a:srgbClr val="095292"/>
+          </a:solidFill>
+          <a:ln>
+            <a:noFill/>
+          </a:ln>
+        </p:spPr>
+        <p:style>
+          <a:lnRef idx="1">
+            <a:schemeClr val="accent1"/>
+          </a:lnRef>
+          <a:fillRef idx="3">
+            <a:schemeClr val="accent1"/>
+          </a:fillRef>
+          <a:effectRef idx="2">
+            <a:schemeClr val="accent1"/>
+          </a:effectRef>
+          <a:fontRef idx="minor">
+            <a:schemeClr val="lt1"/>
+          </a:fontRef>
+        </p:style>
+        <p:txBody>
+          <a:bodyPr rtlCol="0" anchor="ctr"/>
+          <a:lstStyle/>
+          <a:p>
+            <a:pPr algn="ctr"/>
+          </a:p>
+        </p:txBody>
+      </p:sp>
+      <p:sp>
+        <p:nvSpPr>
+          <p:cNvPr id="3" name="Rectangle 2"/>
+          <p:cNvSpPr/>
+          <p:nvPr/>
+        </p:nvSpPr>
+        <p:spPr>
+          <a:xfrm>
+            <a:off x="0" y="960120"/>
+            <a:ext cx="12191695" cy="41148"/>
+          </a:xfrm>
+          <a:prstGeom prst="rect">
+            <a:avLst/>
+          </a:prstGeom>
+          <a:solidFill>
+            <a:srgbClr val="FFD000"/>
+          </a:solidFill>
+          <a:ln>
+            <a:noFill/>
+          </a:ln>
+        </p:spPr>
+        <p:style>
+          <a:lnRef idx="1">
+            <a:schemeClr val="accent1"/>
+          </a:lnRef>
+          <a:fillRef idx="3">
+            <a:schemeClr val="accent1"/>
+          </a:fillRef>
+          <a:effectRef idx="2">
+            <a:schemeClr val="accent1"/>
+          </a:effectRef>
+          <a:fontRef idx="minor">
+            <a:schemeClr val="lt1"/>
+          </a:fontRef>
+        </p:style>
+        <p:txBody>
+          <a:bodyPr rtlCol="0" anchor="ctr"/>
+          <a:lstStyle/>
+          <a:p>
+            <a:pPr algn="ctr"/>
+          </a:p>
+        </p:txBody>
+      </p:sp>
+      <p:sp>
+        <p:nvSpPr>
+          <p:cNvPr id="4" name="TextBox 3"/>
+          <p:cNvSpPr txBox="1"/>
+          <p:nvPr/>
+        </p:nvSpPr>
+        <p:spPr>
+          <a:xfrm>
+            <a:off x="457200" y="164592"/>
+            <a:ext cx="11277295" cy="502920"/>
+          </a:xfrm>
+          <a:prstGeom prst="rect">
+            <a:avLst/>
+          </a:prstGeom>
+          <a:noFill/>
+        </p:spPr>
+        <p:txBody>
+          <a:bodyPr wrap="square">
+            <a:spAutoFit/>
+          </a:bodyPr>
+          <a:lstStyle/>
+          <a:p>
+            <a:r>
+              <a:rPr sz="2600" b="1" i="0">
+                <a:solidFill>
+                  <a:srgbClr val="FFFFFF"/>
+                </a:solidFill>
+                <a:latin typeface="Calibri"/>
+              </a:rPr>
+              <a:t>Para el PI esta semana</a:t>
+            </a:r>
+          </a:p>
+        </p:txBody>
+      </p:sp>
+      <p:sp>
+        <p:nvSpPr>
+          <p:cNvPr id="5" name="Rounded Rectangle 4"/>
+          <p:cNvSpPr/>
+          <p:nvPr/>
+        </p:nvSpPr>
+        <p:spPr>
+          <a:xfrm>
+            <a:off x="457200" y="1261872"/>
+            <a:ext cx="11277295" cy="1051560"/>
+          </a:xfrm>
+          <a:prstGeom prst="roundRect">
+            <a:avLst>
+              <a:gd name="adj" fmla="val 12000"/>
+            </a:avLst>
+          </a:prstGeom>
+          <a:solidFill>
+            <a:srgbClr val="E8F4FA"/>
+          </a:solidFill>
+          <a:ln>
+            <a:noFill/>
+          </a:ln>
+        </p:spPr>
+        <p:style>
+          <a:lnRef idx="1">
+            <a:schemeClr val="accent1"/>
+          </a:lnRef>
+          <a:fillRef idx="3">
+            <a:schemeClr val="accent1"/>
+          </a:fillRef>
+          <a:effectRef idx="2">
+            <a:schemeClr val="accent1"/>
+          </a:effectRef>
+          <a:fontRef idx="minor">
+            <a:schemeClr val="lt1"/>
+          </a:fontRef>
+        </p:style>
+        <p:txBody>
+          <a:bodyPr rtlCol="0" anchor="ctr"/>
+          <a:lstStyle/>
+          <a:p>
+            <a:pPr algn="ctr"/>
+          </a:p>
+        </p:txBody>
+      </p:sp>
+      <p:sp>
+        <p:nvSpPr>
+          <p:cNvPr id="6" name="Rectangle 5"/>
+          <p:cNvSpPr/>
+          <p:nvPr/>
+        </p:nvSpPr>
+        <p:spPr>
+          <a:xfrm>
+            <a:off x="457200" y="1261872"/>
+            <a:ext cx="128016" cy="1051560"/>
+          </a:xfrm>
+          <a:prstGeom prst="rect">
+            <a:avLst/>
+          </a:prstGeom>
+          <a:solidFill>
+            <a:srgbClr val="269CCB"/>
+          </a:solidFill>
+          <a:ln>
+            <a:noFill/>
+          </a:ln>
+        </p:spPr>
+        <p:style>
+          <a:lnRef idx="1">
+            <a:schemeClr val="accent1"/>
+          </a:lnRef>
+          <a:fillRef idx="3">
+            <a:schemeClr val="accent1"/>
+          </a:fillRef>
+          <a:effectRef idx="2">
+            <a:schemeClr val="accent1"/>
+          </a:effectRef>
+          <a:fontRef idx="minor">
+            <a:schemeClr val="lt1"/>
+          </a:fontRef>
+        </p:style>
+        <p:txBody>
+          <a:bodyPr rtlCol="0" anchor="ctr"/>
+          <a:lstStyle/>
+          <a:p>
+            <a:pPr algn="ctr"/>
+          </a:p>
+        </p:txBody>
+      </p:sp>
+      <p:sp>
+        <p:nvSpPr>
+          <p:cNvPr id="7" name="TextBox 6"/>
+          <p:cNvSpPr txBox="1"/>
+          <p:nvPr/>
+        </p:nvSpPr>
+        <p:spPr>
+          <a:xfrm>
+            <a:off x="777240" y="1399031"/>
+            <a:ext cx="10774375" cy="822959"/>
+          </a:xfrm>
+          <a:prstGeom prst="rect">
+            <a:avLst/>
+          </a:prstGeom>
+          <a:noFill/>
+        </p:spPr>
+        <p:txBody>
+          <a:bodyPr wrap="square">
+            <a:spAutoFit/>
+          </a:bodyPr>
+          <a:lstStyle/>
+          <a:p>
+            <a:r>
+              <a:rPr sz="1200" b="1" i="0">
+                <a:solidFill>
+                  <a:srgbClr val="269CCB"/>
+                </a:solidFill>
+                <a:latin typeface="Calibri"/>
+              </a:rPr>
+              <a:t>Info</a:t>
+            </a:r>
+          </a:p>
+          <a:p>
+            <a:pPr>
+              <a:spcBef>
+                <a:spcPts val="400"/>
+              </a:spcBef>
+            </a:pPr>
+            <a:r>
+              <a:rPr sz="1400" b="0" i="0">
+                <a:solidFill>
+                  <a:srgbClr val="333333"/>
+                </a:solidFill>
+                <a:latin typeface="Calibri"/>
+              </a:rPr>
+              <a:t>Hito: Informe de caso -&gt; mejoras concretas al PI</a:t>
+            </a:r>
+          </a:p>
+        </p:txBody>
+      </p:sp>
+      <p:sp>
+        <p:nvSpPr>
+          <p:cNvPr id="8" name="Rounded Rectangle 7"/>
+          <p:cNvSpPr/>
+          <p:nvPr/>
+        </p:nvSpPr>
+        <p:spPr>
+          <a:xfrm>
+            <a:off x="457200" y="2478024"/>
+            <a:ext cx="11277295" cy="1051560"/>
+          </a:xfrm>
+          <a:prstGeom prst="roundRect">
+            <a:avLst>
+              <a:gd name="adj" fmla="val 12000"/>
+            </a:avLst>
+          </a:prstGeom>
+          <a:solidFill>
+            <a:srgbClr val="FFF8E1"/>
+          </a:solidFill>
+          <a:ln>
+            <a:noFill/>
+          </a:ln>
+        </p:spPr>
+        <p:style>
+          <a:lnRef idx="1">
+            <a:schemeClr val="accent1"/>
+          </a:lnRef>
+          <a:fillRef idx="3">
+            <a:schemeClr val="accent1"/>
+          </a:fillRef>
+          <a:effectRef idx="2">
+            <a:schemeClr val="accent1"/>
+          </a:effectRef>
+          <a:fontRef idx="minor">
+            <a:schemeClr val="lt1"/>
+          </a:fontRef>
+        </p:style>
+        <p:txBody>
+          <a:bodyPr rtlCol="0" anchor="ctr"/>
+          <a:lstStyle/>
+          <a:p>
+            <a:pPr algn="ctr"/>
+          </a:p>
+        </p:txBody>
+      </p:sp>
+      <p:sp>
+        <p:nvSpPr>
+          <p:cNvPr id="9" name="Rectangle 8"/>
+          <p:cNvSpPr/>
+          <p:nvPr/>
+        </p:nvSpPr>
+        <p:spPr>
+          <a:xfrm>
+            <a:off x="457200" y="2478024"/>
+            <a:ext cx="128016" cy="1051560"/>
+          </a:xfrm>
+          <a:prstGeom prst="rect">
+            <a:avLst/>
+          </a:prstGeom>
+          <a:solidFill>
+            <a:srgbClr val="FFD000"/>
+          </a:solidFill>
+          <a:ln>
+            <a:noFill/>
+          </a:ln>
+        </p:spPr>
+        <p:style>
+          <a:lnRef idx="1">
+            <a:schemeClr val="accent1"/>
+          </a:lnRef>
+          <a:fillRef idx="3">
+            <a:schemeClr val="accent1"/>
+          </a:fillRef>
+          <a:effectRef idx="2">
+            <a:schemeClr val="accent1"/>
+          </a:effectRef>
+          <a:fontRef idx="minor">
+            <a:schemeClr val="lt1"/>
+          </a:fontRef>
+        </p:style>
+        <p:txBody>
+          <a:bodyPr rtlCol="0" anchor="ctr"/>
+          <a:lstStyle/>
+          <a:p>
+            <a:pPr algn="ctr"/>
+          </a:p>
+        </p:txBody>
+      </p:sp>
+      <p:sp>
+        <p:nvSpPr>
+          <p:cNvPr id="10" name="TextBox 9"/>
+          <p:cNvSpPr txBox="1"/>
+          <p:nvPr/>
+        </p:nvSpPr>
+        <p:spPr>
+          <a:xfrm>
+            <a:off x="777240" y="2615184"/>
+            <a:ext cx="10774375" cy="822959"/>
+          </a:xfrm>
+          <a:prstGeom prst="rect">
+            <a:avLst/>
+          </a:prstGeom>
+          <a:noFill/>
+        </p:spPr>
+        <p:txBody>
+          <a:bodyPr wrap="square">
+            <a:spAutoFit/>
+          </a:bodyPr>
+          <a:lstStyle/>
+          <a:p>
+            <a:r>
+              <a:rPr sz="1200" b="1" i="0">
+                <a:solidFill>
+                  <a:srgbClr val="FFD000"/>
+                </a:solidFill>
+                <a:latin typeface="Calibri"/>
+              </a:rPr>
+              <a:t>Aclaración</a:t>
+            </a:r>
+          </a:p>
+          <a:p>
+            <a:pPr>
+              <a:spcBef>
+                <a:spcPts val="400"/>
+              </a:spcBef>
+            </a:pPr>
+            <a:r>
+              <a:rPr sz="1400" b="0" i="0">
+                <a:solidFill>
+                  <a:srgbClr val="333333"/>
+                </a:solidFill>
+                <a:latin typeface="Calibri"/>
+              </a:rPr>
+              <a:t>Enunciado completo: Clases/Proyecto Integrador/ (VetCare DB).</a:t>
+            </a:r>
+          </a:p>
+        </p:txBody>
+      </p:sp>
+      <p:sp>
+        <p:nvSpPr>
+          <p:cNvPr id="11" name="Rounded Rectangle 10"/>
+          <p:cNvSpPr/>
+          <p:nvPr/>
+        </p:nvSpPr>
+        <p:spPr>
+          <a:xfrm>
+            <a:off x="457200" y="3694176"/>
+            <a:ext cx="11277295" cy="1051560"/>
+          </a:xfrm>
+          <a:prstGeom prst="roundRect">
+            <a:avLst>
+              <a:gd name="adj" fmla="val 12000"/>
+            </a:avLst>
+          </a:prstGeom>
+          <a:solidFill>
+            <a:srgbClr val="FBE4E4"/>
+          </a:solidFill>
+          <a:ln>
+            <a:noFill/>
+          </a:ln>
+        </p:spPr>
+        <p:style>
+          <a:lnRef idx="1">
+            <a:schemeClr val="accent1"/>
+          </a:lnRef>
+          <a:fillRef idx="3">
+            <a:schemeClr val="accent1"/>
+          </a:fillRef>
+          <a:effectRef idx="2">
+            <a:schemeClr val="accent1"/>
+          </a:effectRef>
+          <a:fontRef idx="minor">
+            <a:schemeClr val="lt1"/>
+          </a:fontRef>
+        </p:style>
+        <p:txBody>
+          <a:bodyPr rtlCol="0" anchor="ctr"/>
+          <a:lstStyle/>
+          <a:p>
+            <a:pPr algn="ctr"/>
+          </a:p>
+        </p:txBody>
+      </p:sp>
+      <p:sp>
+        <p:nvSpPr>
+          <p:cNvPr id="12" name="Rectangle 11"/>
+          <p:cNvSpPr/>
+          <p:nvPr/>
+        </p:nvSpPr>
+        <p:spPr>
+          <a:xfrm>
+            <a:off x="457200" y="3694176"/>
+            <a:ext cx="128016" cy="1051560"/>
+          </a:xfrm>
+          <a:prstGeom prst="rect">
+            <a:avLst/>
+          </a:prstGeom>
+          <a:solidFill>
+            <a:srgbClr val="A02030"/>
+          </a:solidFill>
+          <a:ln>
+            <a:noFill/>
+          </a:ln>
+        </p:spPr>
+        <p:style>
+          <a:lnRef idx="1">
+            <a:schemeClr val="accent1"/>
+          </a:lnRef>
+          <a:fillRef idx="3">
+            <a:schemeClr val="accent1"/>
+          </a:fillRef>
+          <a:effectRef idx="2">
+            <a:schemeClr val="accent1"/>
+          </a:effectRef>
+          <a:fontRef idx="minor">
+            <a:schemeClr val="lt1"/>
+          </a:fontRef>
+        </p:style>
+        <p:txBody>
+          <a:bodyPr rtlCol="0" anchor="ctr"/>
+          <a:lstStyle/>
+          <a:p>
+            <a:pPr algn="ctr"/>
+          </a:p>
+        </p:txBody>
+      </p:sp>
+      <p:sp>
+        <p:nvSpPr>
+          <p:cNvPr id="13" name="TextBox 12"/>
+          <p:cNvSpPr txBox="1"/>
+          <p:nvPr/>
+        </p:nvSpPr>
+        <p:spPr>
+          <a:xfrm>
+            <a:off x="777240" y="3831336"/>
+            <a:ext cx="10774375" cy="822959"/>
+          </a:xfrm>
+          <a:prstGeom prst="rect">
+            <a:avLst/>
+          </a:prstGeom>
+          <a:noFill/>
+        </p:spPr>
+        <p:txBody>
+          <a:bodyPr wrap="square">
+            <a:spAutoFit/>
+          </a:bodyPr>
+          <a:lstStyle/>
+          <a:p>
+            <a:r>
+              <a:rPr sz="1200" b="1" i="0">
+                <a:solidFill>
+                  <a:srgbClr val="A02030"/>
+                </a:solidFill>
+                <a:latin typeface="Calibri"/>
+              </a:rPr>
+              <a:t>Atención</a:t>
+            </a:r>
+          </a:p>
+          <a:p>
+            <a:pPr>
+              <a:spcBef>
+                <a:spcPts val="400"/>
+              </a:spcBef>
+            </a:pPr>
+            <a:r>
+              <a:rPr sz="1400" b="0" i="0">
+                <a:solidFill>
+                  <a:srgbClr val="333333"/>
+                </a:solidFill>
+                <a:latin typeface="Calibri"/>
+              </a:rPr>
+              <a:t>Si el docente asigna taller esta semana, él indica el canal y la fecha.</a:t>
+            </a:r>
+          </a:p>
+        </p:txBody>
+      </p:sp>
+      <p:sp>
+        <p:nvSpPr>
+          <p:cNvPr id="14" name="TextBox 13"/>
+          <p:cNvSpPr txBox="1"/>
+          <p:nvPr/>
+        </p:nvSpPr>
+        <p:spPr>
+          <a:xfrm>
+            <a:off x="11185855" y="6473952"/>
+            <a:ext cx="640080" cy="274320"/>
+          </a:xfrm>
+          <a:prstGeom prst="rect">
+            <a:avLst/>
+          </a:prstGeom>
+          <a:noFill/>
+        </p:spPr>
+        <p:txBody>
+          <a:bodyPr wrap="square">
+            <a:spAutoFit/>
+          </a:bodyPr>
+          <a:lstStyle/>
+          <a:p>
+            <a:pPr algn="r"/>
+            <a:r>
+              <a:rPr sz="1100" b="0" i="0">
+                <a:solidFill>
+                  <a:srgbClr val="666666"/>
+                </a:solidFill>
+                <a:latin typeface="Calibri"/>
+              </a:rPr>
+              <a:t>26</a:t>
+            </a:r>
+          </a:p>
+        </p:txBody>
+      </p:sp>
+    </p:spTree>
+  </p:cSld>
+  <p:clrMapOvr>
+    <a:masterClrMapping/>
+  </p:clrMapOvr>
+</p:sld>
+</file>
+
+<file path=ppt/slides/slide27.xml><?xml version="1.0" encoding="utf-8"?>
+<p:sld xmlns:a="http://schemas.openxmlformats.org/drawingml/2006/main" xmlns:p="http://schemas.openxmlformats.org/presentationml/2006/main" xmlns:r="http://schemas.openxmlformats.org/officeDocument/2006/relationships">
+  <p:cSld>
+    <p:bg>
+      <p:bgPr>
+        <a:solidFill>
+          <a:srgbClr val="FFFFFF"/>
+        </a:solidFill>
+        <a:effectLst/>
+      </p:bgPr>
+    </p:bg>
+    <p:spTree>
+      <p:nvGrpSpPr>
+        <p:cNvPr id="1" name=""/>
+        <p:cNvGrpSpPr/>
+        <p:nvPr/>
+      </p:nvGrpSpPr>
+      <p:grpSpPr/>
+      <p:sp>
+        <p:nvSpPr>
+          <p:cNvPr id="2" name="Rectangle 1"/>
+          <p:cNvSpPr/>
+          <p:nvPr/>
+        </p:nvSpPr>
+        <p:spPr>
+          <a:xfrm>
+            <a:off x="0" y="0"/>
+            <a:ext cx="12191695" cy="164592"/>
+          </a:xfrm>
+          <a:prstGeom prst="rect">
+            <a:avLst/>
+          </a:prstGeom>
+          <a:solidFill>
+            <a:srgbClr val="269CCB"/>
+          </a:solidFill>
+          <a:ln>
+            <a:noFill/>
+          </a:ln>
+        </p:spPr>
+        <p:style>
+          <a:lnRef idx="1">
+            <a:schemeClr val="accent1"/>
+          </a:lnRef>
+          <a:fillRef idx="3">
+            <a:schemeClr val="accent1"/>
+          </a:fillRef>
+          <a:effectRef idx="2">
+            <a:schemeClr val="accent1"/>
+          </a:effectRef>
+          <a:fontRef idx="minor">
+            <a:schemeClr val="lt1"/>
+          </a:fontRef>
+        </p:style>
+        <p:txBody>
+          <a:bodyPr rtlCol="0" anchor="ctr"/>
+          <a:lstStyle/>
+          <a:p>
+            <a:pPr algn="ctr"/>
+          </a:p>
+        </p:txBody>
+      </p:sp>
+      <p:pic>
+        <p:nvPicPr>
+          <p:cNvPr id="3" name="Picture 2" descr="logo_uniajc_color.png"/>
+          <p:cNvPicPr>
+            <a:picLocks noChangeAspect="1"/>
+          </p:cNvPicPr>
+          <p:nvPr/>
+        </p:nvPicPr>
+        <p:blipFill>
+          <a:blip r:embed="rId2"/>
+          <a:stretch>
+            <a:fillRect/>
+          </a:stretch>
+        </p:blipFill>
+        <p:spPr>
+          <a:xfrm>
+            <a:off x="10271455" y="5998464"/>
+            <a:ext cx="1463040" cy="643233"/>
+          </a:xfrm>
+          <a:prstGeom prst="rect">
+            <a:avLst/>
+          </a:prstGeom>
+        </p:spPr>
+      </p:pic>
+      <p:sp>
+        <p:nvSpPr>
+          <p:cNvPr id="4" name="TextBox 3"/>
+          <p:cNvSpPr txBox="1"/>
+          <p:nvPr/>
+        </p:nvSpPr>
+        <p:spPr>
+          <a:xfrm>
+            <a:off x="457200" y="1737360"/>
+            <a:ext cx="11277295" cy="1097280"/>
+          </a:xfrm>
+          <a:prstGeom prst="rect">
+            <a:avLst/>
+          </a:prstGeom>
+          <a:noFill/>
+        </p:spPr>
+        <p:txBody>
+          <a:bodyPr wrap="square" anchor="ctr"/>
+          <a:lstStyle/>
+          <a:p>
+            <a:pPr algn="ctr"/>
+            <a:r>
+              <a:rPr sz="3400" b="1" i="0">
+                <a:solidFill>
+                  <a:srgbClr val="095292"/>
+                </a:solidFill>
+                <a:latin typeface="Calibri"/>
+              </a:rPr>
+              <a:t>Clase 13 · VetCare avanza</a:t>
+            </a:r>
+          </a:p>
+        </p:txBody>
+      </p:sp>
+      <p:sp>
+        <p:nvSpPr>
+          <p:cNvPr id="5" name="TextBox 4"/>
+          <p:cNvSpPr txBox="1"/>
+          <p:nvPr/>
+        </p:nvSpPr>
+        <p:spPr>
+          <a:xfrm>
+            <a:off x="457200" y="3017520"/>
+            <a:ext cx="11277295" cy="1645920"/>
+          </a:xfrm>
+          <a:prstGeom prst="rect">
+            <a:avLst/>
+          </a:prstGeom>
+          <a:noFill/>
+        </p:spPr>
+        <p:txBody>
+          <a:bodyPr wrap="square">
+            <a:spAutoFit/>
+          </a:bodyPr>
+          <a:lstStyle/>
+          <a:p>
+            <a:pPr algn="ctr">
+              <a:spcAft>
+                <a:spcPts val="600"/>
+              </a:spcAft>
+            </a:pPr>
+            <a:r>
+              <a:rPr sz="1600" b="0" i="0">
+                <a:solidFill>
+                  <a:srgbClr val="333333"/>
+                </a:solidFill>
+                <a:latin typeface="Calibri"/>
+              </a:rPr>
+              <a:t>Informe de caso -&gt; mejoras concretas al PI</a:t>
+            </a:r>
+          </a:p>
+          <a:p>
+            <a:pPr algn="ctr">
+              <a:spcAft>
+                <a:spcPts val="600"/>
+              </a:spcAft>
+            </a:pPr>
+            <a:r>
+              <a:rPr sz="1600" b="0" i="0">
+                <a:solidFill>
+                  <a:srgbClr val="333333"/>
+                </a:solidFill>
+                <a:latin typeface="Calibri"/>
+              </a:rPr>
+              <a:t>Entregable: Informe 1-2 pag.: caso + 3 mejoras aplicables a VetCare</a:t>
+            </a:r>
+          </a:p>
+          <a:p>
+            <a:pPr algn="ctr">
+              <a:spcAft>
+                <a:spcPts val="600"/>
+              </a:spcAft>
+            </a:pPr>
+            <a:r>
+              <a:rPr sz="1600" b="0" i="0">
+                <a:solidFill>
+                  <a:srgbClr val="333333"/>
+                </a:solidFill>
+                <a:latin typeface="Calibri"/>
+              </a:rPr>
+              <a:t>Siguiente clase: continuar el hilo del PI segun plan</a:t>
+            </a:r>
+          </a:p>
+        </p:txBody>
+      </p:sp>
+      <p:sp>
+        <p:nvSpPr>
+          <p:cNvPr id="6" name="TextBox 5"/>
+          <p:cNvSpPr txBox="1"/>
+          <p:nvPr/>
+        </p:nvSpPr>
+        <p:spPr>
+          <a:xfrm>
+            <a:off x="457200" y="4754880"/>
+            <a:ext cx="11277295" cy="640080"/>
+          </a:xfrm>
+          <a:prstGeom prst="rect">
+            <a:avLst/>
+          </a:prstGeom>
+          <a:noFill/>
+        </p:spPr>
+        <p:txBody>
+          <a:bodyPr wrap="square">
+            <a:spAutoFit/>
+          </a:bodyPr>
+          <a:lstStyle/>
+          <a:p>
+            <a:pPr algn="ctr"/>
+            <a:r>
+              <a:rPr sz="2000" b="1" i="0">
+                <a:solidFill>
+                  <a:srgbClr val="269CCB"/>
+                </a:solidFill>
+                <a:latin typeface="Calibri"/>
+              </a:rPr>
+              <a:t>Teoria breve · practica = PI</a:t>
+            </a:r>
+          </a:p>
+        </p:txBody>
+      </p:sp>
+    </p:spTree>
+  </p:cSld>
+  <p:clrMapOvr>
+    <a:masterClrMapping/>
+  </p:clrMapOvr>
+</p:sld>
+</file>
+
 <file path=ppt/slides/slide3.xml><?xml version="1.0" encoding="utf-8"?>
 <p:sld xmlns:a="http://schemas.openxmlformats.org/drawingml/2006/main" xmlns:p="http://schemas.openxmlformats.org/presentationml/2006/main" xmlns:r="http://schemas.openxmlformats.org/officeDocument/2006/relationships">
   <p:cSld>
@@ -7467,7 +11797,7 @@
                 </a:solidFill>
                 <a:latin typeface="Calibri"/>
               </a:rPr>
-              <a:t>Teoria Core (breve)</a:t>
+              <a:t>Clase autonoma: este texto es fundamento y guia a la vez (1/2)</a:t>
             </a:r>
           </a:p>
         </p:txBody>
@@ -7506,7 +11836,7 @@
                 </a:solidFill>
                 <a:latin typeface="Calibri"/>
               </a:rPr>
-              <a:t>–   Caso 1 — falta de backup real: una organizacion que 'hacia backup' copiando el archivo de datos una vez al…</a:t>
+              <a:t>–   Esta clase es autonoma y cae en festivo, asi que no hay encuentro sincronico: este texto es a la vez el fundamento del docente y la lectura que el estudiante recibe, y por eso debe alcanzar para trabajar solo.</a:t>
             </a:r>
           </a:p>
           <a:p>
@@ -7522,7 +11852,7 @@
                 </a:solidFill>
                 <a:latin typeface="Calibri"/>
               </a:rPr>
-              <a:t>–   Caso 2 — indices mal disenados: un sistema con un indice sobre CADA columna 'por si acaso', que volvia cada…</a:t>
+              <a:t>–   El tema es el analisis de casos reales, y el primer punto es que esto no es relleno de fin de semestre sino una practica profesional con nombre propio.</a:t>
             </a:r>
           </a:p>
           <a:p>
@@ -7538,7 +11868,7 @@
                 </a:solidFill>
                 <a:latin typeface="Calibri"/>
               </a:rPr>
-              <a:t>–   Caso 3 — inyeccion SQL: una aplicacion que concatenaba directamente el texto escrito por el usuario dentro de…</a:t>
+              <a:t>–   Cuando un sistema falla en produccion, los equipos serios escriben un post-mortem</a:t>
             </a:r>
           </a:p>
           <a:p>
@@ -7554,7 +11884,7 @@
                 </a:solidFill>
                 <a:latin typeface="Calibri"/>
               </a:rPr>
-              <a:t>–   Estructura para analizar cualquier caso real: (1) contexto — que sistema era y que se suponia que hacia bien…</a:t>
+              <a:t>–   Que es un documento breve producido despues del incidente y que responde cuatro preguntas: que paso, cuando y con que impacto medible, por que fue posible, y que se va a cambiar para que no vuelva a ocurrir de la misma manera.</a:t>
             </a:r>
           </a:p>
           <a:p>
@@ -7570,7 +11900,7 @@
                 </a:solidFill>
                 <a:latin typeface="Calibri"/>
               </a:rPr>
-              <a:t>–   Esta clase es autonoma (sin encuentro sincrono) precisamente porque no introduce tecnica nueva: aplica en…</a:t>
+              <a:t>–   La palabra clave del oficio es blameless, sin culpables: la regla es que se analiza el sistema y no la persona.</a:t>
             </a:r>
           </a:p>
         </p:txBody>
@@ -7751,7 +12081,7 @@
                 </a:solidFill>
                 <a:latin typeface="Calibri"/>
               </a:rPr>
-              <a:t>Demo del dia</a:t>
+              <a:t>Clase autonoma: este texto es fundamento y guia a la vez (2/2)</a:t>
             </a:r>
           </a:p>
         </p:txBody>
@@ -7790,25 +12120,7 @@
                 </a:solidFill>
                 <a:latin typeface="Calibri"/>
               </a:rPr>
-              <a:t>–   </a:t>
-            </a:r>
-            <a:r>
-              <a:rPr sz="2000" b="1" i="0">
-                <a:solidFill>
-                  <a:srgbClr val="333333"/>
-                </a:solidFill>
-                <a:latin typeface="Calibri"/>
-              </a:rPr>
-              <a:t>Herramienta:</a:t>
-            </a:r>
-            <a:r>
-              <a:rPr sz="2000" b="0" i="0">
-                <a:solidFill>
-                  <a:srgbClr val="333333"/>
-                </a:solidFill>
-                <a:latin typeface="Calibri"/>
-              </a:rPr>
-              <a:t> Google Docs</a:t>
+              <a:t>–   No es cortesia ni buena onda corporativa, es un calculo practico, porque en cuanto el documento sirve para castigar a alguien la gente deja de reportar los errores pequenos y la organizacion pierde la unica fuente de informacion que tiene para evitar los grandes.</a:t>
             </a:r>
           </a:p>
           <a:p>
@@ -7824,25 +12136,7 @@
                 </a:solidFill>
                 <a:latin typeface="Calibri"/>
               </a:rPr>
-              <a:t>–   </a:t>
-            </a:r>
-            <a:r>
-              <a:rPr sz="2000" b="1" i="0">
-                <a:solidFill>
-                  <a:srgbClr val="333333"/>
-                </a:solidFill>
-                <a:latin typeface="Calibri"/>
-              </a:rPr>
-              <a:t>Demo:</a:t>
-            </a:r>
-            <a:r>
-              <a:rPr sz="2000" b="0" i="0">
-                <a:solidFill>
-                  <a:srgbClr val="333333"/>
-                </a:solidFill>
-                <a:latin typeface="Calibri"/>
-              </a:rPr>
-              <a:t> Plantilla: contexto -&gt; fallo -&gt; leccion -&gt; cambio en VetCare.</a:t>
+              <a:t>–   Un incidente, para nuestros fines, es cualquier evento que degrada el servicio o pone en riesgo los datos, y merece post-mortem tanto el que llego al usuario como el que se detuvo a tiempo.</a:t>
             </a:r>
           </a:p>
           <a:p>
@@ -7858,23 +12152,7 @@
                 </a:solidFill>
                 <a:latin typeface="Calibri"/>
               </a:rPr>
-              <a:t>–   Sigan el mismo dominio VetCare (no inventen otro caso).</a:t>
-            </a:r>
-          </a:p>
-          <a:p>
-            <a:pPr>
-              <a:spcAft>
-                <a:spcPts val="800"/>
-              </a:spcAft>
-            </a:pPr>
-            <a:r>
-              <a:rPr sz="2000" b="0" i="0">
-                <a:solidFill>
-                  <a:srgbClr val="333333"/>
-                </a:solidFill>
-                <a:latin typeface="Calibri"/>
-              </a:rPr>
-              <a:t>–   Al final de la demo: dejar enlace/script compartible al grupo.</a:t>
+              <a:t>–   El entregable de hoy es una tabla de cuatro columnas, Contexto, Fallo, Leccion y Cambio en VetCare, con tres casos, y se sube a la plataforma del curso.</a:t>
             </a:r>
           </a:p>
         </p:txBody>
@@ -7949,7 +12227,7 @@
         <p:spPr>
           <a:xfrm>
             <a:off x="0" y="0"/>
-            <a:ext cx="12191695" cy="1170432"/>
+            <a:ext cx="12191695" cy="960120"/>
           </a:xfrm>
           <a:prstGeom prst="rect">
             <a:avLst/>
@@ -7991,7 +12269,7 @@
         </p:nvSpPr>
         <p:spPr>
           <a:xfrm>
-            <a:off x="0" y="1170432"/>
+            <a:off x="0" y="960120"/>
             <a:ext cx="12191695" cy="41148"/>
           </a:xfrm>
           <a:prstGeom prst="rect">
@@ -8035,7 +12313,7 @@
         <p:spPr>
           <a:xfrm>
             <a:off x="457200" y="164592"/>
-            <a:ext cx="11277295" cy="384048"/>
+            <a:ext cx="11277295" cy="502920"/>
           </a:xfrm>
           <a:prstGeom prst="rect">
             <a:avLst/>
@@ -8055,7 +12333,7 @@
                 </a:solidFill>
                 <a:latin typeface="Calibri"/>
               </a:rPr>
-              <a:t>Herramientas de hoy</a:t>
+              <a:t>Causa proxima y causa raiz: la distincion que separa el analisis de la anecdota (1/2)</a:t>
             </a:r>
           </a:p>
         </p:txBody>
@@ -8068,8 +12346,8 @@
         </p:nvSpPr>
         <p:spPr>
           <a:xfrm>
-            <a:off x="457200" y="566928"/>
-            <a:ext cx="11277295" cy="411480"/>
+            <a:off x="457200" y="1170432"/>
+            <a:ext cx="11277295" cy="5230368"/>
           </a:xfrm>
           <a:prstGeom prst="rect">
             <a:avLst/>
@@ -8082,633 +12360,106 @@
           </a:bodyPr>
           <a:lstStyle/>
           <a:p>
-            <a:r>
-              <a:rPr sz="1400" b="0" i="0">
-                <a:solidFill>
-                  <a:srgbClr val="B8D8EE"/>
-                </a:solidFill>
-                <a:latin typeface="Calibri"/>
-              </a:rPr>
-              <a:t>Gratis · navegador o free tier</a:t>
-            </a:r>
-          </a:p>
-        </p:txBody>
-      </p:sp>
-      <p:sp>
-        <p:nvSpPr>
-          <p:cNvPr id="6" name="Rounded Rectangle 5"/>
-          <p:cNvSpPr/>
-          <p:nvPr/>
-        </p:nvSpPr>
-        <p:spPr>
-          <a:xfrm>
-            <a:off x="457200" y="1591056"/>
-            <a:ext cx="3624986" cy="2331720"/>
-          </a:xfrm>
-          <a:prstGeom prst="roundRect">
-            <a:avLst>
-              <a:gd name="adj" fmla="val 12000"/>
-            </a:avLst>
-          </a:prstGeom>
-          <a:solidFill>
-            <a:srgbClr val="F2F2F2"/>
-          </a:solidFill>
-          <a:ln>
-            <a:noFill/>
-          </a:ln>
-        </p:spPr>
-        <p:style>
-          <a:lnRef idx="1">
-            <a:schemeClr val="accent1"/>
-          </a:lnRef>
-          <a:fillRef idx="3">
-            <a:schemeClr val="accent1"/>
-          </a:fillRef>
-          <a:effectRef idx="2">
-            <a:schemeClr val="accent1"/>
-          </a:effectRef>
-          <a:fontRef idx="minor">
-            <a:schemeClr val="lt1"/>
-          </a:fontRef>
-        </p:style>
-        <p:txBody>
-          <a:bodyPr rtlCol="0" anchor="ctr"/>
-          <a:lstStyle/>
-          <a:p>
-            <a:pPr algn="ctr"/>
-          </a:p>
-        </p:txBody>
-      </p:sp>
-      <p:sp>
-        <p:nvSpPr>
-          <p:cNvPr id="7" name="Rectangle 6"/>
-          <p:cNvSpPr/>
-          <p:nvPr/>
-        </p:nvSpPr>
-        <p:spPr>
-          <a:xfrm>
-            <a:off x="457200" y="1591056"/>
-            <a:ext cx="3624986" cy="64008"/>
-          </a:xfrm>
-          <a:prstGeom prst="rect">
-            <a:avLst/>
-          </a:prstGeom>
-          <a:solidFill>
-            <a:srgbClr val="095292"/>
-          </a:solidFill>
-          <a:ln>
-            <a:noFill/>
-          </a:ln>
-        </p:spPr>
-        <p:style>
-          <a:lnRef idx="1">
-            <a:schemeClr val="accent1"/>
-          </a:lnRef>
-          <a:fillRef idx="3">
-            <a:schemeClr val="accent1"/>
-          </a:fillRef>
-          <a:effectRef idx="2">
-            <a:schemeClr val="accent1"/>
-          </a:effectRef>
-          <a:fontRef idx="minor">
-            <a:schemeClr val="lt1"/>
-          </a:fontRef>
-        </p:style>
-        <p:txBody>
-          <a:bodyPr rtlCol="0" anchor="ctr"/>
-          <a:lstStyle/>
-          <a:p>
-            <a:pPr algn="ctr"/>
-          </a:p>
-        </p:txBody>
-      </p:sp>
-      <p:sp>
-        <p:nvSpPr>
-          <p:cNvPr id="8" name="Rectangle 7"/>
-          <p:cNvSpPr/>
-          <p:nvPr/>
-        </p:nvSpPr>
-        <p:spPr>
-          <a:xfrm>
-            <a:off x="457200" y="1655064"/>
-            <a:ext cx="3624986" cy="27432"/>
-          </a:xfrm>
-          <a:prstGeom prst="rect">
-            <a:avLst/>
-          </a:prstGeom>
-          <a:solidFill>
-            <a:srgbClr val="FFD000"/>
-          </a:solidFill>
-          <a:ln>
-            <a:noFill/>
-          </a:ln>
-        </p:spPr>
-        <p:style>
-          <a:lnRef idx="1">
-            <a:schemeClr val="accent1"/>
-          </a:lnRef>
-          <a:fillRef idx="3">
-            <a:schemeClr val="accent1"/>
-          </a:fillRef>
-          <a:effectRef idx="2">
-            <a:schemeClr val="accent1"/>
-          </a:effectRef>
-          <a:fontRef idx="minor">
-            <a:schemeClr val="lt1"/>
-          </a:fontRef>
-        </p:style>
-        <p:txBody>
-          <a:bodyPr rtlCol="0" anchor="ctr"/>
-          <a:lstStyle/>
-          <a:p>
-            <a:pPr algn="ctr"/>
-          </a:p>
-        </p:txBody>
-      </p:sp>
-      <p:pic>
-        <p:nvPicPr>
-          <p:cNvPr id="9" name="Picture 8" descr="google_docs.png"/>
-          <p:cNvPicPr>
-            <a:picLocks noChangeAspect="1"/>
-          </p:cNvPicPr>
-          <p:nvPr/>
-        </p:nvPicPr>
-        <p:blipFill>
-          <a:blip r:embed="rId2"/>
-          <a:stretch>
-            <a:fillRect/>
-          </a:stretch>
-        </p:blipFill>
-        <p:spPr>
-          <a:xfrm>
-            <a:off x="1643329" y="1847087"/>
-            <a:ext cx="1252728" cy="1252728"/>
-          </a:xfrm>
-          <a:prstGeom prst="rect">
-            <a:avLst/>
-          </a:prstGeom>
-        </p:spPr>
-      </p:pic>
-      <p:sp>
-        <p:nvSpPr>
-          <p:cNvPr id="10" name="TextBox 9"/>
-          <p:cNvSpPr txBox="1"/>
-          <p:nvPr/>
-        </p:nvSpPr>
-        <p:spPr>
-          <a:xfrm>
-            <a:off x="530352" y="3191256"/>
-            <a:ext cx="3478682" cy="621792"/>
-          </a:xfrm>
-          <a:prstGeom prst="rect">
-            <a:avLst/>
-          </a:prstGeom>
-          <a:noFill/>
-        </p:spPr>
-        <p:txBody>
-          <a:bodyPr wrap="square" anchor="t"/>
-          <a:lstStyle/>
-          <a:p>
-            <a:pPr algn="ctr"/>
-            <a:r>
-              <a:rPr sz="1300" b="1" i="0">
-                <a:solidFill>
-                  <a:srgbClr val="095292"/>
-                </a:solidFill>
-                <a:latin typeface="Calibri"/>
-              </a:rPr>
-              <a:t>Google Docs</a:t>
-            </a:r>
-          </a:p>
-          <a:p>
-            <a:pPr algn="ctr">
-              <a:spcBef>
-                <a:spcPts val="200"/>
-              </a:spcBef>
+            <a:pPr>
+              <a:spcAft>
+                <a:spcPts val="800"/>
+              </a:spcAft>
             </a:pPr>
             <a:r>
-              <a:rPr sz="1000" b="0" i="0">
-                <a:solidFill>
-                  <a:srgbClr val="666666"/>
-                </a:solidFill>
-                <a:latin typeface="Calibri"/>
-              </a:rPr>
-              <a:t>Caso real</a:t>
-            </a:r>
-          </a:p>
-        </p:txBody>
-      </p:sp>
-      <p:sp>
-        <p:nvSpPr>
-          <p:cNvPr id="11" name="Rounded Rectangle 10"/>
-          <p:cNvSpPr/>
-          <p:nvPr/>
-        </p:nvSpPr>
-        <p:spPr>
-          <a:xfrm>
-            <a:off x="4283354" y="1591056"/>
-            <a:ext cx="3624986" cy="2331720"/>
-          </a:xfrm>
-          <a:prstGeom prst="roundRect">
-            <a:avLst>
-              <a:gd name="adj" fmla="val 12000"/>
-            </a:avLst>
-          </a:prstGeom>
-          <a:solidFill>
-            <a:srgbClr val="F2F2F2"/>
-          </a:solidFill>
-          <a:ln>
-            <a:noFill/>
-          </a:ln>
-        </p:spPr>
-        <p:style>
-          <a:lnRef idx="1">
-            <a:schemeClr val="accent1"/>
-          </a:lnRef>
-          <a:fillRef idx="3">
-            <a:schemeClr val="accent1"/>
-          </a:fillRef>
-          <a:effectRef idx="2">
-            <a:schemeClr val="accent1"/>
-          </a:effectRef>
-          <a:fontRef idx="minor">
-            <a:schemeClr val="lt1"/>
-          </a:fontRef>
-        </p:style>
-        <p:txBody>
-          <a:bodyPr rtlCol="0" anchor="ctr"/>
-          <a:lstStyle/>
-          <a:p>
-            <a:pPr algn="ctr"/>
-          </a:p>
-        </p:txBody>
-      </p:sp>
-      <p:sp>
-        <p:nvSpPr>
-          <p:cNvPr id="12" name="Rectangle 11"/>
-          <p:cNvSpPr/>
-          <p:nvPr/>
-        </p:nvSpPr>
-        <p:spPr>
-          <a:xfrm>
-            <a:off x="4283354" y="1591056"/>
-            <a:ext cx="3624986" cy="64008"/>
-          </a:xfrm>
-          <a:prstGeom prst="rect">
-            <a:avLst/>
-          </a:prstGeom>
-          <a:solidFill>
-            <a:srgbClr val="095292"/>
-          </a:solidFill>
-          <a:ln>
-            <a:noFill/>
-          </a:ln>
-        </p:spPr>
-        <p:style>
-          <a:lnRef idx="1">
-            <a:schemeClr val="accent1"/>
-          </a:lnRef>
-          <a:fillRef idx="3">
-            <a:schemeClr val="accent1"/>
-          </a:fillRef>
-          <a:effectRef idx="2">
-            <a:schemeClr val="accent1"/>
-          </a:effectRef>
-          <a:fontRef idx="minor">
-            <a:schemeClr val="lt1"/>
-          </a:fontRef>
-        </p:style>
-        <p:txBody>
-          <a:bodyPr rtlCol="0" anchor="ctr"/>
-          <a:lstStyle/>
-          <a:p>
-            <a:pPr algn="ctr"/>
-          </a:p>
-        </p:txBody>
-      </p:sp>
-      <p:sp>
-        <p:nvSpPr>
-          <p:cNvPr id="13" name="Rectangle 12"/>
-          <p:cNvSpPr/>
-          <p:nvPr/>
-        </p:nvSpPr>
-        <p:spPr>
-          <a:xfrm>
-            <a:off x="4283354" y="1655064"/>
-            <a:ext cx="3624986" cy="27432"/>
-          </a:xfrm>
-          <a:prstGeom prst="rect">
-            <a:avLst/>
-          </a:prstGeom>
-          <a:solidFill>
-            <a:srgbClr val="FFD000"/>
-          </a:solidFill>
-          <a:ln>
-            <a:noFill/>
-          </a:ln>
-        </p:spPr>
-        <p:style>
-          <a:lnRef idx="1">
-            <a:schemeClr val="accent1"/>
-          </a:lnRef>
-          <a:fillRef idx="3">
-            <a:schemeClr val="accent1"/>
-          </a:fillRef>
-          <a:effectRef idx="2">
-            <a:schemeClr val="accent1"/>
-          </a:effectRef>
-          <a:fontRef idx="minor">
-            <a:schemeClr val="lt1"/>
-          </a:fontRef>
-        </p:style>
-        <p:txBody>
-          <a:bodyPr rtlCol="0" anchor="ctr"/>
-          <a:lstStyle/>
-          <a:p>
-            <a:pPr algn="ctr"/>
-          </a:p>
-        </p:txBody>
-      </p:sp>
-      <p:pic>
-        <p:nvPicPr>
-          <p:cNvPr id="14" name="Picture 13" descr="drawio.png"/>
-          <p:cNvPicPr>
-            <a:picLocks noChangeAspect="1"/>
-          </p:cNvPicPr>
-          <p:nvPr/>
-        </p:nvPicPr>
-        <p:blipFill>
-          <a:blip r:embed="rId3"/>
-          <a:stretch>
-            <a:fillRect/>
-          </a:stretch>
-        </p:blipFill>
-        <p:spPr>
-          <a:xfrm>
-            <a:off x="5469483" y="1847087"/>
-            <a:ext cx="1252728" cy="1252728"/>
-          </a:xfrm>
-          <a:prstGeom prst="rect">
-            <a:avLst/>
-          </a:prstGeom>
-        </p:spPr>
-      </p:pic>
-      <p:sp>
-        <p:nvSpPr>
-          <p:cNvPr id="15" name="TextBox 14"/>
-          <p:cNvSpPr txBox="1"/>
-          <p:nvPr/>
-        </p:nvSpPr>
-        <p:spPr>
-          <a:xfrm>
-            <a:off x="4356506" y="3191256"/>
-            <a:ext cx="3478682" cy="621792"/>
-          </a:xfrm>
-          <a:prstGeom prst="rect">
-            <a:avLst/>
-          </a:prstGeom>
-          <a:noFill/>
-        </p:spPr>
-        <p:txBody>
-          <a:bodyPr wrap="square" anchor="t"/>
-          <a:lstStyle/>
-          <a:p>
-            <a:pPr algn="ctr"/>
-            <a:r>
-              <a:rPr sz="1300" b="1" i="0">
-                <a:solidFill>
-                  <a:srgbClr val="095292"/>
-                </a:solidFill>
-                <a:latin typeface="Calibri"/>
-              </a:rPr>
-              <a:t>draw.io</a:t>
-            </a:r>
-          </a:p>
-          <a:p>
-            <a:pPr algn="ctr">
-              <a:spcBef>
-                <a:spcPts val="200"/>
-              </a:spcBef>
+              <a:rPr sz="2000" b="0" i="0">
+                <a:solidFill>
+                  <a:srgbClr val="333333"/>
+                </a:solidFill>
+                <a:latin typeface="Calibri"/>
+              </a:rPr>
+              <a:t>–   Antes de mirar los casos hay que instalar la distincion que separa un buen analisis de una anecdota: causa proxima y causa raiz.</a:t>
+            </a:r>
+          </a:p>
+          <a:p>
+            <a:pPr>
+              <a:spcAft>
+                <a:spcPts val="800"/>
+              </a:spcAft>
             </a:pPr>
             <a:r>
-              <a:rPr sz="1000" b="0" i="0">
-                <a:solidFill>
-                  <a:srgbClr val="666666"/>
-                </a:solidFill>
-                <a:latin typeface="Calibri"/>
-              </a:rPr>
-              <a:t>Leccion</a:t>
-            </a:r>
-          </a:p>
-        </p:txBody>
-      </p:sp>
-      <p:sp>
-        <p:nvSpPr>
-          <p:cNvPr id="16" name="Rounded Rectangle 15"/>
-          <p:cNvSpPr/>
-          <p:nvPr/>
-        </p:nvSpPr>
-        <p:spPr>
-          <a:xfrm>
-            <a:off x="8109508" y="1591056"/>
-            <a:ext cx="3624986" cy="2331720"/>
-          </a:xfrm>
-          <a:prstGeom prst="roundRect">
-            <a:avLst>
-              <a:gd name="adj" fmla="val 12000"/>
-            </a:avLst>
-          </a:prstGeom>
-          <a:solidFill>
-            <a:srgbClr val="F2F2F2"/>
-          </a:solidFill>
-          <a:ln>
-            <a:noFill/>
-          </a:ln>
-        </p:spPr>
-        <p:style>
-          <a:lnRef idx="1">
-            <a:schemeClr val="accent1"/>
-          </a:lnRef>
-          <a:fillRef idx="3">
-            <a:schemeClr val="accent1"/>
-          </a:fillRef>
-          <a:effectRef idx="2">
-            <a:schemeClr val="accent1"/>
-          </a:effectRef>
-          <a:fontRef idx="minor">
-            <a:schemeClr val="lt1"/>
-          </a:fontRef>
-        </p:style>
-        <p:txBody>
-          <a:bodyPr rtlCol="0" anchor="ctr"/>
-          <a:lstStyle/>
-          <a:p>
-            <a:pPr algn="ctr"/>
-          </a:p>
-        </p:txBody>
-      </p:sp>
-      <p:sp>
-        <p:nvSpPr>
-          <p:cNvPr id="17" name="Rectangle 16"/>
-          <p:cNvSpPr/>
-          <p:nvPr/>
-        </p:nvSpPr>
-        <p:spPr>
-          <a:xfrm>
-            <a:off x="8109508" y="1591056"/>
-            <a:ext cx="3624986" cy="64008"/>
-          </a:xfrm>
-          <a:prstGeom prst="rect">
-            <a:avLst/>
-          </a:prstGeom>
-          <a:solidFill>
-            <a:srgbClr val="095292"/>
-          </a:solidFill>
-          <a:ln>
-            <a:noFill/>
-          </a:ln>
-        </p:spPr>
-        <p:style>
-          <a:lnRef idx="1">
-            <a:schemeClr val="accent1"/>
-          </a:lnRef>
-          <a:fillRef idx="3">
-            <a:schemeClr val="accent1"/>
-          </a:fillRef>
-          <a:effectRef idx="2">
-            <a:schemeClr val="accent1"/>
-          </a:effectRef>
-          <a:fontRef idx="minor">
-            <a:schemeClr val="lt1"/>
-          </a:fontRef>
-        </p:style>
-        <p:txBody>
-          <a:bodyPr rtlCol="0" anchor="ctr"/>
-          <a:lstStyle/>
-          <a:p>
-            <a:pPr algn="ctr"/>
-          </a:p>
-        </p:txBody>
-      </p:sp>
-      <p:sp>
-        <p:nvSpPr>
-          <p:cNvPr id="18" name="Rectangle 17"/>
-          <p:cNvSpPr/>
-          <p:nvPr/>
-        </p:nvSpPr>
-        <p:spPr>
-          <a:xfrm>
-            <a:off x="8109508" y="1655064"/>
-            <a:ext cx="3624986" cy="27432"/>
-          </a:xfrm>
-          <a:prstGeom prst="rect">
-            <a:avLst/>
-          </a:prstGeom>
-          <a:solidFill>
-            <a:srgbClr val="FFD000"/>
-          </a:solidFill>
-          <a:ln>
-            <a:noFill/>
-          </a:ln>
-        </p:spPr>
-        <p:style>
-          <a:lnRef idx="1">
-            <a:schemeClr val="accent1"/>
-          </a:lnRef>
-          <a:fillRef idx="3">
-            <a:schemeClr val="accent1"/>
-          </a:fillRef>
-          <a:effectRef idx="2">
-            <a:schemeClr val="accent1"/>
-          </a:effectRef>
-          <a:fontRef idx="minor">
-            <a:schemeClr val="lt1"/>
-          </a:fontRef>
-        </p:style>
-        <p:txBody>
-          <a:bodyPr rtlCol="0" anchor="ctr"/>
-          <a:lstStyle/>
-          <a:p>
-            <a:pPr algn="ctr"/>
-          </a:p>
-        </p:txBody>
-      </p:sp>
-      <p:pic>
-        <p:nvPicPr>
-          <p:cNvPr id="19" name="Picture 18" descr="dbfiddle.png"/>
-          <p:cNvPicPr>
-            <a:picLocks noChangeAspect="1"/>
-          </p:cNvPicPr>
-          <p:nvPr/>
-        </p:nvPicPr>
-        <p:blipFill>
-          <a:blip r:embed="rId4"/>
-          <a:stretch>
-            <a:fillRect/>
-          </a:stretch>
-        </p:blipFill>
-        <p:spPr>
-          <a:xfrm>
-            <a:off x="9295638" y="1847087"/>
-            <a:ext cx="1252728" cy="1252728"/>
-          </a:xfrm>
-          <a:prstGeom prst="rect">
-            <a:avLst/>
-          </a:prstGeom>
-        </p:spPr>
-      </p:pic>
-      <p:sp>
-        <p:nvSpPr>
-          <p:cNvPr id="20" name="TextBox 19"/>
-          <p:cNvSpPr txBox="1"/>
-          <p:nvPr/>
-        </p:nvSpPr>
-        <p:spPr>
-          <a:xfrm>
-            <a:off x="8182660" y="3191256"/>
-            <a:ext cx="3478682" cy="621792"/>
-          </a:xfrm>
-          <a:prstGeom prst="rect">
-            <a:avLst/>
-          </a:prstGeom>
-          <a:noFill/>
-        </p:spPr>
-        <p:txBody>
-          <a:bodyPr wrap="square" anchor="t"/>
-          <a:lstStyle/>
-          <a:p>
-            <a:pPr algn="ctr"/>
-            <a:r>
-              <a:rPr sz="1300" b="1" i="0">
-                <a:solidFill>
-                  <a:srgbClr val="095292"/>
-                </a:solidFill>
-                <a:latin typeface="Calibri"/>
-              </a:rPr>
-              <a:t>DB Fiddle</a:t>
-            </a:r>
-          </a:p>
-          <a:p>
-            <a:pPr algn="ctr">
-              <a:spcBef>
-                <a:spcPts val="200"/>
-              </a:spcBef>
+              <a:rPr sz="2000" b="0" i="0">
+                <a:solidFill>
+                  <a:srgbClr val="333333"/>
+                </a:solidFill>
+                <a:latin typeface="Calibri"/>
+              </a:rPr>
+              <a:t>–   La causa proxima es el ultimo evento de la cadena, el que se ve.</a:t>
+            </a:r>
+          </a:p>
+          <a:p>
+            <a:pPr>
+              <a:spcAft>
+                <a:spcPts val="800"/>
+              </a:spcAft>
             </a:pPr>
             <a:r>
-              <a:rPr sz="1000" b="0" i="0">
-                <a:solidFill>
-                  <a:srgbClr val="666666"/>
-                </a:solidFill>
-                <a:latin typeface="Calibri"/>
-              </a:rPr>
-              <a:t>Opcional SQL</a:t>
-            </a:r>
-          </a:p>
-        </p:txBody>
-      </p:sp>
-      <p:sp>
-        <p:nvSpPr>
-          <p:cNvPr id="21" name="TextBox 20"/>
+              <a:rPr sz="2000" b="0" i="0">
+                <a:solidFill>
+                  <a:srgbClr val="333333"/>
+                </a:solidFill>
+                <a:latin typeface="Calibri"/>
+              </a:rPr>
+              <a:t>–   La causa raiz es la condicion que permitio que ese evento tuviera consecuencias.</a:t>
+            </a:r>
+          </a:p>
+          <a:p>
+            <a:pPr>
+              <a:spcAft>
+                <a:spcPts val="800"/>
+              </a:spcAft>
+            </a:pPr>
+            <a:r>
+              <a:rPr sz="2000" b="0" i="0">
+                <a:solidFill>
+                  <a:srgbClr val="333333"/>
+                </a:solidFill>
+                <a:latin typeface="Calibri"/>
+              </a:rPr>
+              <a:t>–   Un ejemplo con VetCare: el disco del servidor falla un viernes y se pierden tres semanas de historias clinicas.</a:t>
+            </a:r>
+          </a:p>
+          <a:p>
+            <a:pPr>
+              <a:spcAft>
+                <a:spcPts val="800"/>
+              </a:spcAft>
+            </a:pPr>
+            <a:r>
+              <a:rPr sz="2000" b="0" i="0">
+                <a:solidFill>
+                  <a:srgbClr val="333333"/>
+                </a:solidFill>
+                <a:latin typeface="Calibri"/>
+              </a:rPr>
+              <a:t>–   La causa proxima es el disco.</a:t>
+            </a:r>
+          </a:p>
+          <a:p>
+            <a:pPr>
+              <a:spcAft>
+                <a:spcPts val="800"/>
+              </a:spcAft>
+            </a:pPr>
+            <a:r>
+              <a:rPr sz="2000" b="0" i="0">
+                <a:solidFill>
+                  <a:srgbClr val="333333"/>
+                </a:solidFill>
+                <a:latin typeface="Calibri"/>
+              </a:rPr>
+              <a:t>–   La causa raiz es que existia un archivo de respaldo que nadie habia restaurado nunca para comprobar que sirviera, y que nadie vigilaba si el respaldo del dia se habia ejecutado.</a:t>
+            </a:r>
+          </a:p>
+        </p:txBody>
+      </p:sp>
+      <p:sp>
+        <p:nvSpPr>
+          <p:cNvPr id="6" name="TextBox 5"/>
           <p:cNvSpPr txBox="1"/>
           <p:nvPr/>
         </p:nvSpPr>
@@ -8882,7 +12633,7 @@
                 </a:solidFill>
                 <a:latin typeface="Calibri"/>
               </a:rPr>
-              <a:t>Actividad autonoma — contexto / por que importa</a:t>
+              <a:t>Causa proxima y causa raiz: la distincion que separa el analisis de la anecdota (2/2)</a:t>
             </a:r>
           </a:p>
         </p:txBody>
@@ -8921,25 +12672,7 @@
                 </a:solidFill>
                 <a:latin typeface="Calibri"/>
               </a:rPr>
-              <a:t>–   </a:t>
-            </a:r>
-            <a:r>
-              <a:rPr sz="2000" b="1" i="0">
-                <a:solidFill>
-                  <a:srgbClr val="333333"/>
-                </a:solidFill>
-                <a:latin typeface="Calibri"/>
-              </a:rPr>
-              <a:t>Por qué importa al PI:</a:t>
-            </a:r>
-            <a:r>
-              <a:rPr sz="2000" b="0" i="0">
-                <a:solidFill>
-                  <a:srgbClr val="333333"/>
-                </a:solidFill>
-                <a:latin typeface="Calibri"/>
-              </a:rPr>
-              <a:t> lecciónes accionables.</a:t>
+              <a:t>–   Los discos fallan siempre, eso no es noticia; lo que se puede cambiar es lo segundo.</a:t>
             </a:r>
           </a:p>
           <a:p>
@@ -8955,7 +12688,39 @@
                 </a:solidFill>
                 <a:latin typeface="Calibri"/>
               </a:rPr>
-              <a:t>–   Autónoma: 1 caso -&gt; 3 mejoras.</a:t>
+              <a:t>–   La tecnica mas simple para llegar ahi es preguntar por que cinco veces seguidas, y hay dos criterios de parada utiles: si la respuesta nombra una persona, todavia no llego a la causa raiz</a:t>
+            </a:r>
+          </a:p>
+          <a:p>
+            <a:pPr>
+              <a:spcAft>
+                <a:spcPts val="800"/>
+              </a:spcAft>
+            </a:pPr>
+            <a:r>
+              <a:rPr sz="2000" b="0" i="0">
+                <a:solidFill>
+                  <a:srgbClr val="333333"/>
+                </a:solidFill>
+                <a:latin typeface="Calibri"/>
+              </a:rPr>
+              <a:t>–   Porque senalar a quien ejecuto el comando equivocado no explica por que el sistema permitia ejecutarlo sin confirmacion ni por que no habia como volver atras</a:t>
+            </a:r>
+          </a:p>
+          <a:p>
+            <a:pPr>
+              <a:spcAft>
+                <a:spcPts val="800"/>
+              </a:spcAft>
+            </a:pPr>
+            <a:r>
+              <a:rPr sz="2000" b="0" i="0">
+                <a:solidFill>
+                  <a:srgbClr val="333333"/>
+                </a:solidFill>
+                <a:latin typeface="Calibri"/>
+              </a:rPr>
+              <a:t>–   Y si la respuesta describe algo que se puede cambiar en un procedimiento, un permiso, una restriccion o una alarma, entonces si llego.</a:t>
             </a:r>
           </a:p>
         </p:txBody>
@@ -9136,7 +12901,7 @@
                 </a:solidFill>
                 <a:latin typeface="Calibri"/>
               </a:rPr>
-              <a:t>Actividad autonoma — objetivo y criterios</a:t>
+              <a:t>Caso uno: el respaldo que nunca se restauro (GitLab, 2017) (1/2)</a:t>
             </a:r>
           </a:p>
         </p:txBody>
@@ -9175,25 +12940,7 @@
                 </a:solidFill>
                 <a:latin typeface="Calibri"/>
               </a:rPr>
-              <a:t>–   </a:t>
-            </a:r>
-            <a:r>
-              <a:rPr sz="2000" b="1" i="0">
-                <a:solidFill>
-                  <a:srgbClr val="333333"/>
-                </a:solidFill>
-                <a:latin typeface="Calibri"/>
-              </a:rPr>
-              <a:t>Objetivo:</a:t>
-            </a:r>
-            <a:r>
-              <a:rPr sz="2000" b="0" i="0">
-                <a:solidFill>
-                  <a:srgbClr val="333333"/>
-                </a:solidFill>
-                <a:latin typeface="Calibri"/>
-              </a:rPr>
-              <a:t> Caso real -&gt; 3 mejoras VetCare.</a:t>
+              <a:t>–   Caso uno, el respaldo que nunca se restauro, con el ejemplo publico mejor documentado que existe.</a:t>
             </a:r>
           </a:p>
           <a:p>
@@ -9209,25 +12956,7 @@
                 </a:solidFill>
                 <a:latin typeface="Calibri"/>
               </a:rPr>
-              <a:t>–   </a:t>
-            </a:r>
-            <a:r>
-              <a:rPr sz="2000" b="1" i="0">
-                <a:solidFill>
-                  <a:srgbClr val="333333"/>
-                </a:solidFill>
-                <a:latin typeface="Calibri"/>
-              </a:rPr>
-              <a:t>Exito:</a:t>
-            </a:r>
-            <a:r>
-              <a:rPr sz="2000" b="0" i="0">
-                <a:solidFill>
-                  <a:srgbClr val="333333"/>
-                </a:solidFill>
-                <a:latin typeface="Calibri"/>
-              </a:rPr>
-              <a:t> Caso elegido.</a:t>
+              <a:t>–   El 31 de enero de 2017 GitLab sufrio la perdida de datos de su servicio en la nube: durante la atencion de un problema de replicacion</a:t>
             </a:r>
           </a:p>
           <a:p>
@@ -9243,25 +12972,7 @@
                 </a:solidFill>
                 <a:latin typeface="Calibri"/>
               </a:rPr>
-              <a:t>–   </a:t>
-            </a:r>
-            <a:r>
-              <a:rPr sz="2000" b="1" i="0">
-                <a:solidFill>
-                  <a:srgbClr val="333333"/>
-                </a:solidFill>
-                <a:latin typeface="Calibri"/>
-              </a:rPr>
-              <a:t>Exito:</a:t>
-            </a:r>
-            <a:r>
-              <a:rPr sz="2000" b="0" i="0">
-                <a:solidFill>
-                  <a:srgbClr val="333333"/>
-                </a:solidFill>
-                <a:latin typeface="Calibri"/>
-              </a:rPr>
-              <a:t> Resumen.</a:t>
+              <a:t>–   Un ingeniero ejecuto un borrado recursivo sobre el directorio de datos del servidor equivocado y elimino cerca de trescientos gigabytes.</a:t>
             </a:r>
           </a:p>
           <a:p>
@@ -9277,25 +12988,7 @@
                 </a:solidFill>
                 <a:latin typeface="Calibri"/>
               </a:rPr>
-              <a:t>–   </a:t>
-            </a:r>
-            <a:r>
-              <a:rPr sz="2000" b="1" i="0">
-                <a:solidFill>
-                  <a:srgbClr val="333333"/>
-                </a:solidFill>
-                <a:latin typeface="Calibri"/>
-              </a:rPr>
-              <a:t>Exito:</a:t>
-            </a:r>
-            <a:r>
-              <a:rPr sz="2000" b="0" i="0">
-                <a:solidFill>
-                  <a:srgbClr val="333333"/>
-                </a:solidFill>
-                <a:latin typeface="Calibri"/>
-              </a:rPr>
-              <a:t> 3 mejoras.</a:t>
+              <a:t>–   Eso es la causa proxima.</a:t>
             </a:r>
           </a:p>
           <a:p>
@@ -9311,25 +13004,7 @@
                 </a:solidFill>
                 <a:latin typeface="Calibri"/>
               </a:rPr>
-              <a:t>–   </a:t>
-            </a:r>
-            <a:r>
-              <a:rPr sz="2000" b="1" i="0">
-                <a:solidFill>
-                  <a:srgbClr val="333333"/>
-                </a:solidFill>
-                <a:latin typeface="Calibri"/>
-              </a:rPr>
-              <a:t>Exito:</a:t>
-            </a:r>
-            <a:r>
-              <a:rPr sz="2000" b="0" i="0">
-                <a:solidFill>
-                  <a:srgbClr val="333333"/>
-                </a:solidFill>
-                <a:latin typeface="Calibri"/>
-              </a:rPr>
-              <a:t> Informe.</a:t>
+              <a:t>–   Lo que convirtio un error humano corriente en un incidente historico fue que, al intentar recuperar, la compania descubrio que sus cinco mecanismos de respaldo y replicacion fallaban de una u otra forma: entre otras cosas</a:t>
             </a:r>
           </a:p>
           <a:p>
@@ -9345,17 +13020,15 @@
                 </a:solidFill>
                 <a:latin typeface="Calibri"/>
               </a:rPr>
-              <a:t>–   </a:t>
-            </a:r>
-            <a:r>
-              <a:rPr sz="2000" b="1" i="0">
-                <a:solidFill>
-                  <a:srgbClr val="333333"/>
-                </a:solidFill>
-                <a:latin typeface="Calibri"/>
-              </a:rPr>
-              <a:t>Exito:</a:t>
-            </a:r>
+              <a:t>–   La herramienta de volcado logico fallaba en silencio por una diferencia de version entre cliente y servidor, y las copias que debian estar en almacenamiento remoto estaban vacias.</a:t>
+            </a:r>
+          </a:p>
+          <a:p>
+            <a:pPr>
+              <a:spcAft>
+                <a:spcPts val="800"/>
+              </a:spcAft>
+            </a:pPr>
             <a:r>
               <a:rPr sz="2000" b="0" i="0">
                 <a:solidFill>
@@ -9363,7 +13036,7 @@
                 </a:solidFill>
                 <a:latin typeface="Calibri"/>
               </a:rPr>
-              <a:t> en la fecha que indique el docente.</a:t>
+              <a:t>–   Terminaron restaurando desde una copia de trabajo de unas seis horas antes y perdieron de forma definitiva la informacion creada en esa ventana, del orden de miles de proyectos y comentarios.</a:t>
             </a:r>
           </a:p>
         </p:txBody>
@@ -9544,7 +13217,7 @@
                 </a:solidFill>
                 <a:latin typeface="Calibri"/>
               </a:rPr>
-              <a:t>Actividad autonoma — escenario / datos de partida</a:t>
+              <a:t>Caso uno: el respaldo que nunca se restauro (GitLab, 2017) (2/2)</a:t>
             </a:r>
           </a:p>
         </p:txBody>
@@ -9583,7 +13256,55 @@
                 </a:solidFill>
                 <a:latin typeface="Calibri"/>
               </a:rPr>
-              <a:t>–   Plantilla: contexto-&gt;fallo-&gt;lección-&gt;cambio.</a:t>
+              <a:t>–   La leccion tecnica es exacta: un respaldo que nunca se restauro de prueba no es un respaldo, es una carpeta con un nombre tranquilizador.</a:t>
+            </a:r>
+          </a:p>
+          <a:p>
+            <a:pPr>
+              <a:spcAft>
+                <a:spcPts val="800"/>
+              </a:spcAft>
+            </a:pPr>
+            <a:r>
+              <a:rPr sz="2000" b="0" i="0">
+                <a:solidFill>
+                  <a:srgbClr val="333333"/>
+                </a:solidFill>
+                <a:latin typeface="Calibri"/>
+              </a:rPr>
+              <a:t>–   Y hay una segunda leccion igual de importante: un proceso de respaldo que puede fallar sin avisar es peor que no tenerlo, porque produce confianza injustificada.</a:t>
+            </a:r>
+          </a:p>
+          <a:p>
+            <a:pPr>
+              <a:spcAft>
+                <a:spcPts val="800"/>
+              </a:spcAft>
+            </a:pPr>
+            <a:r>
+              <a:rPr sz="2000" b="0" i="0">
+                <a:solidFill>
+                  <a:srgbClr val="333333"/>
+                </a:solidFill>
+                <a:latin typeface="Calibri"/>
+              </a:rPr>
+              <a:t>–   Esto conecta con la Clase 4, donde se definieron RPO, la cantidad maxima de datos que la organizacion acepta perder medida en tiempo, y RTO, el tiempo maximo que acepta estar caida.</a:t>
+            </a:r>
+          </a:p>
+          <a:p>
+            <a:pPr>
+              <a:spcAft>
+                <a:spcPts val="800"/>
+              </a:spcAft>
+            </a:pPr>
+            <a:r>
+              <a:rPr sz="2000" b="0" i="0">
+                <a:solidFill>
+                  <a:srgbClr val="333333"/>
+                </a:solidFill>
+                <a:latin typeface="Calibri"/>
+              </a:rPr>
+              <a:t>–   GitLab descubrio su RPO real el dia del incidente, y ese es justo el error que no se debe repetir: el RPO no se declara, se demuestra restaurando.</a:t>
             </a:r>
           </a:p>
         </p:txBody>

--- a/Bases de Datos II/Clases/Clase 13 - Analisis de casos reales/Presentacion.pptx
+++ b/Bases de Datos II/Clases/Clase 13 - Analisis de casos reales/Presentacion.pptx
@@ -32,6 +32,7 @@
     <p:sldId id="280" r:id="rId31"/>
     <p:sldId id="281" r:id="rId32"/>
     <p:sldId id="282" r:id="rId33"/>
+    <p:sldId id="283" r:id="rId34"/>
   </p:sldIdLst>
   <p:sldSz cx="12191695" cy="6858000" type="screen4x3"/>
   <p:notesSz cx="6858000" cy="9144000"/>
@@ -3671,7 +3672,7 @@
                 </a:solidFill>
                 <a:latin typeface="Calibri"/>
               </a:rPr>
-              <a:t>–   Caso dos, permisos excesivos.</a:t>
+              <a:t>–   En julio de 2019 Capital One informo un acceso no autorizado que afecto informacion de aproximadamente cien millones de personas en Estados Unidos y varios millones en Canada, incluyendo solicitudes de credito.</a:t>
             </a:r>
           </a:p>
           <a:p>
@@ -3687,7 +3688,7 @@
                 </a:solidFill>
                 <a:latin typeface="Calibri"/>
               </a:rPr>
-              <a:t>–   En julio de 2019 Capital One informo un acceso no autorizado que afecto informacion de aproximadamente cien millones de personas en Estados Unidos y varios millones en Canada, incluyendo solicitudes de credito.</a:t>
+              <a:t>–   La cadena tecnica publicada es instructiva porque no hubo ninguna hazana: una configuracion incorrecta en un cortafuegos de aplicaciones permitio que se le hiciera hacer peticiones internas en nombre del servidor, con eso se obtuvieron credenciales temporales de un rol de servicio</a:t>
             </a:r>
           </a:p>
           <a:p>
@@ -3703,39 +3704,7 @@
                 </a:solidFill>
                 <a:latin typeface="Calibri"/>
               </a:rPr>
-              <a:t>–   La cadena tecnica publicada es instructiva porque no hubo ninguna hazana: una configuracion incorrecta en un cortafuegos de aplicaciones permitio que se le hiciera hacer peticiones internas en nombre del servidor, con eso se obtuvieron credenciales temporales de un rol de servicio</a:t>
-            </a:r>
-          </a:p>
-          <a:p>
-            <a:pPr>
-              <a:spcAft>
-                <a:spcPts val="800"/>
-              </a:spcAft>
-            </a:pPr>
-            <a:r>
-              <a:rPr sz="2000" b="0" i="0">
-                <a:solidFill>
-                  <a:srgbClr val="333333"/>
-                </a:solidFill>
-                <a:latin typeface="Calibri"/>
-              </a:rPr>
               <a:t>–   Y ese rol tenia permiso para listar y leer todos los buckets de almacenamiento, muchos mas de los que necesitaba para su trabajo.</a:t>
-            </a:r>
-          </a:p>
-          <a:p>
-            <a:pPr>
-              <a:spcAft>
-                <a:spcPts val="800"/>
-              </a:spcAft>
-            </a:pPr>
-            <a:r>
-              <a:rPr sz="2000" b="0" i="0">
-                <a:solidFill>
-                  <a:srgbClr val="333333"/>
-                </a:solidFill>
-                <a:latin typeface="Calibri"/>
-              </a:rPr>
-              <a:t>–   El regulador bancario estadounidense impuso una multa de ochenta millones de dolares en 2020.</a:t>
             </a:r>
           </a:p>
         </p:txBody>
@@ -3955,7 +3924,7 @@
                 </a:solidFill>
                 <a:latin typeface="Calibri"/>
               </a:rPr>
-              <a:t>–   La causa proxima es la mala configuracion del cortafuegos; la causa raiz es que un componente tenia privilegios mucho mayores que su funcion.</a:t>
+              <a:t>–   El regulador bancario estadounidense impuso una multa de ochenta millones de dolares en 2020.</a:t>
             </a:r>
           </a:p>
           <a:p>
@@ -3971,7 +3940,7 @@
                 </a:solidFill>
                 <a:latin typeface="Calibri"/>
               </a:rPr>
-              <a:t>–   La leccion, en el vocabulario de la Clase 2, es el principio de privilegio minimo: cada actor recibe exactamente los permisos que necesita para su tarea y nada mas.</a:t>
+              <a:t>–   La causa proxima es la mala configuracion del cortafuegos; la causa raiz es que un componente tenia privilegios mucho mayores que su funcion.</a:t>
             </a:r>
           </a:p>
           <a:p>
@@ -3987,7 +3956,7 @@
                 </a:solidFill>
                 <a:latin typeface="Calibri"/>
               </a:rPr>
-              <a:t>–   Y hay que decir la parte incomoda, porque es la que se repite en los proyectos de curso: casi todos los estudiantes hacen que la aplicacion se conecte con un usuario que tiene todo, porque asi nunca aparece un error de permisos y se avanza mas rapido.</a:t>
+              <a:t>–   La leccion, en el vocabulario de la Clase 2, es el principio de privilegio minimo: cada actor recibe exactamente los permisos que necesita para su tarea y nada mas.</a:t>
             </a:r>
           </a:p>
           <a:p>
@@ -4223,22 +4192,6 @@
                 </a:solidFill>
                 <a:latin typeface="Calibri"/>
               </a:rPr>
-              <a:t>–   Caso tres, perdida de datos durante una migracion.</a:t>
-            </a:r>
-          </a:p>
-          <a:p>
-            <a:pPr>
-              <a:spcAft>
-                <a:spcPts val="800"/>
-              </a:spcAft>
-            </a:pPr>
-            <a:r>
-              <a:rPr sz="2000" b="0" i="0">
-                <a:solidFill>
-                  <a:srgbClr val="333333"/>
-                </a:solidFill>
-                <a:latin typeface="Calibri"/>
-              </a:rPr>
               <a:t>–   En marzo de 2019 MySpace reconocio que habia perdido la musica subida a la plataforma entre 2003 y 2015, del orden de cincuenta millones de archivos de unos catorce millones de artistas, durante una migracion de servidores</a:t>
             </a:r>
           </a:p>
@@ -4759,22 +4712,6 @@
                 </a:solidFill>
                 <a:latin typeface="Calibri"/>
               </a:rPr>
-              <a:t>–   Caso cuatro, concurrencia.</a:t>
-            </a:r>
-          </a:p>
-          <a:p>
-            <a:pPr>
-              <a:spcAft>
-                <a:spcPts val="800"/>
-              </a:spcAft>
-            </a:pPr>
-            <a:r>
-              <a:rPr sz="2000" b="0" i="0">
-                <a:solidFill>
-                  <a:srgbClr val="333333"/>
-                </a:solidFill>
-                <a:latin typeface="Calibri"/>
-              </a:rPr>
               <a:t>–   Este merece un tratamiento distinto porque su rasgo caracteristico es que no llega a los titulares con nombre propio tan facilmente: son fallos que no producen mensajes de error y por eso se descubren semanas despues</a:t>
             </a:r>
           </a:p>
@@ -5288,7 +5225,7 @@
                 </a:solidFill>
                 <a:latin typeface="Calibri"/>
               </a:rPr>
-              <a:t>Lo que decide la calificacion: lecciones accionables (1/2)</a:t>
+              <a:t>Lo que decide la calificacion: lecciones accionables (1/3)</a:t>
             </a:r>
           </a:p>
         </p:txBody>
@@ -5327,7 +5264,7 @@
                 </a:solidFill>
                 <a:latin typeface="Calibri"/>
               </a:rPr>
-              <a:t>–   Lo que decide la calificacion de hoy no es reunir casos sino escribir lecciones accionables, y esa es la habilidad que el estudiante debe practicar sin ayuda.</a:t>
+              <a:t>–   Una leccion es un lugar comun cuando podria haberse escrito antes de conocer el caso: hay que hacer respaldos, hay que cuidar los permisos, hay que probar bien.</a:t>
             </a:r>
           </a:p>
           <a:p>
@@ -5343,7 +5280,7 @@
                 </a:solidFill>
                 <a:latin typeface="Calibri"/>
               </a:rPr>
-              <a:t>–   Una leccion es un lugar comun cuando podria haberse escrito antes de conocer el caso: hay que hacer respaldos, hay que cuidar los permisos, hay que probar bien.</a:t>
+              <a:t>–   Una leccion es accionable cuando tiene cuatro elementos verificables: un verbo concreto, el artefacto sobre el cual se actua, una frecuencia o un umbral, y la manera de comprobar que se hizo.</a:t>
             </a:r>
           </a:p>
           <a:p>
@@ -5359,7 +5296,7 @@
                 </a:solidFill>
                 <a:latin typeface="Calibri"/>
               </a:rPr>
-              <a:t>–   Una leccion es accionable cuando tiene cuatro elementos verificables: un verbo concreto, el artefacto sobre el cual se actua, una frecuencia o un umbral, y la manera de comprobar que se hizo.</a:t>
+              <a:t>–   Version inutil: hay que probar los respaldos.</a:t>
             </a:r>
           </a:p>
           <a:p>
@@ -5375,7 +5312,7 @@
                 </a:solidFill>
                 <a:latin typeface="Calibri"/>
               </a:rPr>
-              <a:t>–   Compare las dos versiones.</a:t>
+              <a:t>–   Version accionable: el primer lunes de cada mes se restaura el respaldo mas reciente en un esquema temporal de Oracle Live SQL o del entorno de pruebas, se comparan los conteos de filas de Dueno, Mascota, Cita y Factura contra produccion</a:t>
             </a:r>
           </a:p>
           <a:p>
@@ -5391,55 +5328,7 @@
                 </a:solidFill>
                 <a:latin typeface="Calibri"/>
               </a:rPr>
-              <a:t>–   Version inutil: hay que probar los respaldos.</a:t>
-            </a:r>
-          </a:p>
-          <a:p>
-            <a:pPr>
-              <a:spcAft>
-                <a:spcPts val="800"/>
-              </a:spcAft>
-            </a:pPr>
-            <a:r>
-              <a:rPr sz="2000" b="0" i="0">
-                <a:solidFill>
-                  <a:srgbClr val="333333"/>
-                </a:solidFill>
-                <a:latin typeface="Calibri"/>
-              </a:rPr>
-              <a:t>–   Version accionable: el primer lunes de cada mes se restaura el respaldo mas reciente en un esquema temporal de Oracle Live SQL o del entorno de pruebas, se comparan los conteos de filas de Dueno, Mascota, Cita y Factura contra produccion</a:t>
-            </a:r>
-          </a:p>
-          <a:p>
-            <a:pPr>
-              <a:spcAft>
-                <a:spcPts val="800"/>
-              </a:spcAft>
-            </a:pPr>
-            <a:r>
-              <a:rPr sz="2000" b="0" i="0">
-                <a:solidFill>
-                  <a:srgbClr val="333333"/>
-                </a:solidFill>
-                <a:latin typeface="Calibri"/>
-              </a:rPr>
               <a:t>–   Y se registra fecha y resultado en la bitacora del proyecto; si no hay registro del mes, se declara que no hay respaldo.</a:t>
-            </a:r>
-          </a:p>
-          <a:p>
-            <a:pPr>
-              <a:spcAft>
-                <a:spcPts val="800"/>
-              </a:spcAft>
-            </a:pPr>
-            <a:r>
-              <a:rPr sz="2000" b="0" i="0">
-                <a:solidFill>
-                  <a:srgbClr val="333333"/>
-                </a:solidFill>
-                <a:latin typeface="Calibri"/>
-              </a:rPr>
-              <a:t>–   La segunda se puede auditar, la primera es una intencion.</a:t>
             </a:r>
           </a:p>
         </p:txBody>
@@ -5620,7 +5509,7 @@
                 </a:solidFill>
                 <a:latin typeface="Calibri"/>
               </a:rPr>
-              <a:t>Lo que decide la calificacion: lecciones accionables (2/2)</a:t>
+              <a:t>Lo que decide la calificacion: lecciones accionables (2/3)</a:t>
             </a:r>
           </a:p>
         </p:txBody>
@@ -5659,7 +5548,7 @@
                 </a:solidFill>
                 <a:latin typeface="Calibri"/>
               </a:rPr>
-              <a:t>–   Aplique el mismo molde a los otros casos y ya tiene la cuarta columna de la tabla: del caso de permisos sale crear el rol rol_vetcare_app con GRANT EXECUTE sobre los procedimientos y revocar todo SELECT</a:t>
+              <a:t>–   La segunda se puede auditar, la primera es una intencion.</a:t>
             </a:r>
           </a:p>
           <a:p>
@@ -5675,7 +5564,7 @@
                 </a:solidFill>
                 <a:latin typeface="Calibri"/>
               </a:rPr>
-              <a:t>–   INSERT, UPDATE y DELETE directo sobre las tablas, verificado consultando las vistas de privilegios</a:t>
+              <a:t>–   Aplique el mismo molde a los otros casos y ya tiene la cuarta columna de la tabla: del caso de permisos sale crear el rol rol_vetcare_app con GRANT EXECUTE sobre los procedimientos y revocar todo SELECT</a:t>
             </a:r>
           </a:p>
           <a:p>
@@ -5691,7 +5580,7 @@
                 </a:solidFill>
                 <a:latin typeface="Calibri"/>
               </a:rPr>
-              <a:t>–   Del caso de concurrencia sale ALTER TABLE Cita ADD CONSTRAINT uq_cita_vet_franja UNIQUE (id_veterinario, fecha_hora) mas SELECT FOR UPDATE al descontar stock, verificado con dos sesiones simultaneas</a:t>
+              <a:t>–   INSERT, UPDATE y DELETE directo sobre las tablas, verificado consultando las vistas de privilegios</a:t>
             </a:r>
           </a:p>
           <a:p>
@@ -5707,7 +5596,7 @@
                 </a:solidFill>
                 <a:latin typeface="Calibri"/>
               </a:rPr>
-              <a:t>–   Del caso de migracion sale que todo cambio de esquema tenga script de ida, script de retorno y conteo de verificacion.</a:t>
+              <a:t>–   Del caso de concurrencia sale ALTER TABLE Cita ADD CONSTRAINT uq_cita_vet_franja UNIQUE (id_veterinario, fecha_hora) mas SELECT FOR UPDATE al descontar stock, verificado con dos sesiones simultaneas</a:t>
             </a:r>
           </a:p>
           <a:p>
@@ -5723,39 +5612,7 @@
                 </a:solidFill>
                 <a:latin typeface="Calibri"/>
               </a:rPr>
-              <a:t>–   Sobre las preguntas que llegaran por el canal del curso: si piden inventar un caso, la respuesta es no, cada caso debe ser verificable con una fuente publica o declararse explicitamente como hipotetico</a:t>
-            </a:r>
-          </a:p>
-          <a:p>
-            <a:pPr>
-              <a:spcAft>
-                <a:spcPts val="800"/>
-              </a:spcAft>
-            </a:pPr>
-            <a:r>
-              <a:rPr sz="2000" b="0" i="0">
-                <a:solidFill>
-                  <a:srgbClr val="333333"/>
-                </a:solidFill>
-                <a:latin typeface="Calibri"/>
-              </a:rPr>
-              <a:t>–   Si el caso no tiene detalle tecnico publicado, se escribe solo lo documentado y se marca aparte lo que es inferencia propia</a:t>
-            </a:r>
-          </a:p>
-          <a:p>
-            <a:pPr>
-              <a:spcAft>
-                <a:spcPts val="800"/>
-              </a:spcAft>
-            </a:pPr>
-            <a:r>
-              <a:rPr sz="2000" b="0" i="0">
-                <a:solidFill>
-                  <a:srgbClr val="333333"/>
-                </a:solidFill>
-                <a:latin typeface="Calibri"/>
-              </a:rPr>
-              <a:t>–   Porque separar hecho de suposicion es parte de la nota; y si preguntan cuanto debe medir cada celda, la convencion de este entregable es de tres a cinco lineas.</a:t>
+              <a:t>–   Del caso de migracion sale que todo cambio de esquema tenga script de ida, script de retorno y conteo de verificacion.</a:t>
             </a:r>
           </a:p>
         </p:txBody>
@@ -5936,7 +5793,7 @@
                 </a:solidFill>
                 <a:latin typeface="Calibri"/>
               </a:rPr>
-              <a:t>Demo del dia</a:t>
+              <a:t>Lo que decide la calificacion: lecciones accionables (3/3)</a:t>
             </a:r>
           </a:p>
         </p:txBody>
@@ -5975,25 +5832,7 @@
                 </a:solidFill>
                 <a:latin typeface="Calibri"/>
               </a:rPr>
-              <a:t>–   </a:t>
-            </a:r>
-            <a:r>
-              <a:rPr sz="2000" b="1" i="0">
-                <a:solidFill>
-                  <a:srgbClr val="333333"/>
-                </a:solidFill>
-                <a:latin typeface="Calibri"/>
-              </a:rPr>
-              <a:t>Herramienta:</a:t>
-            </a:r>
-            <a:r>
-              <a:rPr sz="2000" b="0" i="0">
-                <a:solidFill>
-                  <a:srgbClr val="333333"/>
-                </a:solidFill>
-                <a:latin typeface="Calibri"/>
-              </a:rPr>
-              <a:t> Google Docs</a:t>
+              <a:t>–   Sobre las preguntas que llegaran por el canal del curso: si piden inventar un caso, la respuesta es no, cada caso debe ser verificable con una fuente publica o declararse explicitamente como hipotetico</a:t>
             </a:r>
           </a:p>
           <a:p>
@@ -6009,25 +5848,7 @@
                 </a:solidFill>
                 <a:latin typeface="Calibri"/>
               </a:rPr>
-              <a:t>–   </a:t>
-            </a:r>
-            <a:r>
-              <a:rPr sz="2000" b="1" i="0">
-                <a:solidFill>
-                  <a:srgbClr val="333333"/>
-                </a:solidFill>
-                <a:latin typeface="Calibri"/>
-              </a:rPr>
-              <a:t>Demo:</a:t>
-            </a:r>
-            <a:r>
-              <a:rPr sz="2000" b="0" i="0">
-                <a:solidFill>
-                  <a:srgbClr val="333333"/>
-                </a:solidFill>
-                <a:latin typeface="Calibri"/>
-              </a:rPr>
-              <a:t> Plantilla: contexto -&gt; fallo -&gt; leccion -&gt; cambio en VetCare.</a:t>
+              <a:t>–   Si el caso no tiene detalle tecnico publicado, se escribe solo lo documentado y se marca aparte lo que es inferencia propia</a:t>
             </a:r>
           </a:p>
           <a:p>
@@ -6043,23 +5864,7 @@
                 </a:solidFill>
                 <a:latin typeface="Calibri"/>
               </a:rPr>
-              <a:t>–   Sigan el mismo dominio VetCare (no inventen otro caso).</a:t>
-            </a:r>
-          </a:p>
-          <a:p>
-            <a:pPr>
-              <a:spcAft>
-                <a:spcPts val="800"/>
-              </a:spcAft>
-            </a:pPr>
-            <a:r>
-              <a:rPr sz="2000" b="0" i="0">
-                <a:solidFill>
-                  <a:srgbClr val="333333"/>
-                </a:solidFill>
-                <a:latin typeface="Calibri"/>
-              </a:rPr>
-              <a:t>–   Al final de la demo: dejar enlace/script compartible al grupo.</a:t>
+              <a:t>–   Porque separar hecho de suposicion es parte de la nota; y si preguntan cuanto debe medir cada celda, la convencion de este entregable es de tres a cinco lineas.</a:t>
             </a:r>
           </a:p>
         </p:txBody>
@@ -6134,7 +5939,7 @@
         <p:spPr>
           <a:xfrm>
             <a:off x="0" y="0"/>
-            <a:ext cx="12191695" cy="1170432"/>
+            <a:ext cx="12191695" cy="960120"/>
           </a:xfrm>
           <a:prstGeom prst="rect">
             <a:avLst/>
@@ -6176,7 +5981,7 @@
         </p:nvSpPr>
         <p:spPr>
           <a:xfrm>
-            <a:off x="0" y="1170432"/>
+            <a:off x="0" y="960120"/>
             <a:ext cx="12191695" cy="41148"/>
           </a:xfrm>
           <a:prstGeom prst="rect">
@@ -6220,7 +6025,7 @@
         <p:spPr>
           <a:xfrm>
             <a:off x="457200" y="164592"/>
-            <a:ext cx="11277295" cy="384048"/>
+            <a:ext cx="11277295" cy="502920"/>
           </a:xfrm>
           <a:prstGeom prst="rect">
             <a:avLst/>
@@ -6240,7 +6045,7 @@
                 </a:solidFill>
                 <a:latin typeface="Calibri"/>
               </a:rPr>
-              <a:t>Herramientas de hoy</a:t>
+              <a:t>Demo del dia</a:t>
             </a:r>
           </a:p>
         </p:txBody>
@@ -6253,8 +6058,8 @@
         </p:nvSpPr>
         <p:spPr>
           <a:xfrm>
-            <a:off x="457200" y="566928"/>
-            <a:ext cx="11277295" cy="411480"/>
+            <a:off x="457200" y="1170432"/>
+            <a:ext cx="11277295" cy="5230368"/>
           </a:xfrm>
           <a:prstGeom prst="rect">
             <a:avLst/>
@@ -6267,633 +6072,110 @@
           </a:bodyPr>
           <a:lstStyle/>
           <a:p>
-            <a:r>
-              <a:rPr sz="1400" b="0" i="0">
-                <a:solidFill>
-                  <a:srgbClr val="B8D8EE"/>
-                </a:solidFill>
-                <a:latin typeface="Calibri"/>
-              </a:rPr>
-              <a:t>Gratis · navegador o free tier</a:t>
-            </a:r>
-          </a:p>
-        </p:txBody>
-      </p:sp>
-      <p:sp>
-        <p:nvSpPr>
-          <p:cNvPr id="6" name="Rounded Rectangle 5"/>
-          <p:cNvSpPr/>
-          <p:nvPr/>
-        </p:nvSpPr>
-        <p:spPr>
-          <a:xfrm>
-            <a:off x="457200" y="1591056"/>
-            <a:ext cx="3624986" cy="2331720"/>
-          </a:xfrm>
-          <a:prstGeom prst="roundRect">
-            <a:avLst>
-              <a:gd name="adj" fmla="val 12000"/>
-            </a:avLst>
-          </a:prstGeom>
-          <a:solidFill>
-            <a:srgbClr val="F2F2F2"/>
-          </a:solidFill>
-          <a:ln>
-            <a:noFill/>
-          </a:ln>
-        </p:spPr>
-        <p:style>
-          <a:lnRef idx="1">
-            <a:schemeClr val="accent1"/>
-          </a:lnRef>
-          <a:fillRef idx="3">
-            <a:schemeClr val="accent1"/>
-          </a:fillRef>
-          <a:effectRef idx="2">
-            <a:schemeClr val="accent1"/>
-          </a:effectRef>
-          <a:fontRef idx="minor">
-            <a:schemeClr val="lt1"/>
-          </a:fontRef>
-        </p:style>
-        <p:txBody>
-          <a:bodyPr rtlCol="0" anchor="ctr"/>
-          <a:lstStyle/>
-          <a:p>
-            <a:pPr algn="ctr"/>
-          </a:p>
-        </p:txBody>
-      </p:sp>
-      <p:sp>
-        <p:nvSpPr>
-          <p:cNvPr id="7" name="Rectangle 6"/>
-          <p:cNvSpPr/>
-          <p:nvPr/>
-        </p:nvSpPr>
-        <p:spPr>
-          <a:xfrm>
-            <a:off x="457200" y="1591056"/>
-            <a:ext cx="3624986" cy="64008"/>
-          </a:xfrm>
-          <a:prstGeom prst="rect">
-            <a:avLst/>
-          </a:prstGeom>
-          <a:solidFill>
-            <a:srgbClr val="095292"/>
-          </a:solidFill>
-          <a:ln>
-            <a:noFill/>
-          </a:ln>
-        </p:spPr>
-        <p:style>
-          <a:lnRef idx="1">
-            <a:schemeClr val="accent1"/>
-          </a:lnRef>
-          <a:fillRef idx="3">
-            <a:schemeClr val="accent1"/>
-          </a:fillRef>
-          <a:effectRef idx="2">
-            <a:schemeClr val="accent1"/>
-          </a:effectRef>
-          <a:fontRef idx="minor">
-            <a:schemeClr val="lt1"/>
-          </a:fontRef>
-        </p:style>
-        <p:txBody>
-          <a:bodyPr rtlCol="0" anchor="ctr"/>
-          <a:lstStyle/>
-          <a:p>
-            <a:pPr algn="ctr"/>
-          </a:p>
-        </p:txBody>
-      </p:sp>
-      <p:sp>
-        <p:nvSpPr>
-          <p:cNvPr id="8" name="Rectangle 7"/>
-          <p:cNvSpPr/>
-          <p:nvPr/>
-        </p:nvSpPr>
-        <p:spPr>
-          <a:xfrm>
-            <a:off x="457200" y="1655064"/>
-            <a:ext cx="3624986" cy="27432"/>
-          </a:xfrm>
-          <a:prstGeom prst="rect">
-            <a:avLst/>
-          </a:prstGeom>
-          <a:solidFill>
-            <a:srgbClr val="FFD000"/>
-          </a:solidFill>
-          <a:ln>
-            <a:noFill/>
-          </a:ln>
-        </p:spPr>
-        <p:style>
-          <a:lnRef idx="1">
-            <a:schemeClr val="accent1"/>
-          </a:lnRef>
-          <a:fillRef idx="3">
-            <a:schemeClr val="accent1"/>
-          </a:fillRef>
-          <a:effectRef idx="2">
-            <a:schemeClr val="accent1"/>
-          </a:effectRef>
-          <a:fontRef idx="minor">
-            <a:schemeClr val="lt1"/>
-          </a:fontRef>
-        </p:style>
-        <p:txBody>
-          <a:bodyPr rtlCol="0" anchor="ctr"/>
-          <a:lstStyle/>
-          <a:p>
-            <a:pPr algn="ctr"/>
-          </a:p>
-        </p:txBody>
-      </p:sp>
-      <p:pic>
-        <p:nvPicPr>
-          <p:cNvPr id="9" name="Picture 8" descr="google_docs.png"/>
-          <p:cNvPicPr>
-            <a:picLocks noChangeAspect="1"/>
-          </p:cNvPicPr>
-          <p:nvPr/>
-        </p:nvPicPr>
-        <p:blipFill>
-          <a:blip r:embed="rId2"/>
-          <a:stretch>
-            <a:fillRect/>
-          </a:stretch>
-        </p:blipFill>
-        <p:spPr>
-          <a:xfrm>
-            <a:off x="1643329" y="1847087"/>
-            <a:ext cx="1252728" cy="1252728"/>
-          </a:xfrm>
-          <a:prstGeom prst="rect">
-            <a:avLst/>
-          </a:prstGeom>
-        </p:spPr>
-      </p:pic>
-      <p:sp>
-        <p:nvSpPr>
-          <p:cNvPr id="10" name="TextBox 9"/>
-          <p:cNvSpPr txBox="1"/>
-          <p:nvPr/>
-        </p:nvSpPr>
-        <p:spPr>
-          <a:xfrm>
-            <a:off x="530352" y="3191256"/>
-            <a:ext cx="3478682" cy="621792"/>
-          </a:xfrm>
-          <a:prstGeom prst="rect">
-            <a:avLst/>
-          </a:prstGeom>
-          <a:noFill/>
-        </p:spPr>
-        <p:txBody>
-          <a:bodyPr wrap="square" anchor="t"/>
-          <a:lstStyle/>
-          <a:p>
-            <a:pPr algn="ctr"/>
-            <a:r>
-              <a:rPr sz="1300" b="1" i="0">
-                <a:solidFill>
-                  <a:srgbClr val="095292"/>
-                </a:solidFill>
-                <a:latin typeface="Calibri"/>
-              </a:rPr>
-              <a:t>Google Docs</a:t>
-            </a:r>
-          </a:p>
-          <a:p>
-            <a:pPr algn="ctr">
-              <a:spcBef>
-                <a:spcPts val="200"/>
-              </a:spcBef>
+            <a:pPr>
+              <a:spcAft>
+                <a:spcPts val="800"/>
+              </a:spcAft>
             </a:pPr>
             <a:r>
-              <a:rPr sz="1000" b="0" i="0">
-                <a:solidFill>
-                  <a:srgbClr val="666666"/>
-                </a:solidFill>
-                <a:latin typeface="Calibri"/>
-              </a:rPr>
-              <a:t>Caso real</a:t>
-            </a:r>
-          </a:p>
-        </p:txBody>
-      </p:sp>
-      <p:sp>
-        <p:nvSpPr>
-          <p:cNvPr id="11" name="Rounded Rectangle 10"/>
-          <p:cNvSpPr/>
-          <p:nvPr/>
-        </p:nvSpPr>
-        <p:spPr>
-          <a:xfrm>
-            <a:off x="4283354" y="1591056"/>
-            <a:ext cx="3624986" cy="2331720"/>
-          </a:xfrm>
-          <a:prstGeom prst="roundRect">
-            <a:avLst>
-              <a:gd name="adj" fmla="val 12000"/>
-            </a:avLst>
-          </a:prstGeom>
-          <a:solidFill>
-            <a:srgbClr val="F2F2F2"/>
-          </a:solidFill>
-          <a:ln>
-            <a:noFill/>
-          </a:ln>
-        </p:spPr>
-        <p:style>
-          <a:lnRef idx="1">
-            <a:schemeClr val="accent1"/>
-          </a:lnRef>
-          <a:fillRef idx="3">
-            <a:schemeClr val="accent1"/>
-          </a:fillRef>
-          <a:effectRef idx="2">
-            <a:schemeClr val="accent1"/>
-          </a:effectRef>
-          <a:fontRef idx="minor">
-            <a:schemeClr val="lt1"/>
-          </a:fontRef>
-        </p:style>
-        <p:txBody>
-          <a:bodyPr rtlCol="0" anchor="ctr"/>
-          <a:lstStyle/>
-          <a:p>
-            <a:pPr algn="ctr"/>
-          </a:p>
-        </p:txBody>
-      </p:sp>
-      <p:sp>
-        <p:nvSpPr>
-          <p:cNvPr id="12" name="Rectangle 11"/>
-          <p:cNvSpPr/>
-          <p:nvPr/>
-        </p:nvSpPr>
-        <p:spPr>
-          <a:xfrm>
-            <a:off x="4283354" y="1591056"/>
-            <a:ext cx="3624986" cy="64008"/>
-          </a:xfrm>
-          <a:prstGeom prst="rect">
-            <a:avLst/>
-          </a:prstGeom>
-          <a:solidFill>
-            <a:srgbClr val="095292"/>
-          </a:solidFill>
-          <a:ln>
-            <a:noFill/>
-          </a:ln>
-        </p:spPr>
-        <p:style>
-          <a:lnRef idx="1">
-            <a:schemeClr val="accent1"/>
-          </a:lnRef>
-          <a:fillRef idx="3">
-            <a:schemeClr val="accent1"/>
-          </a:fillRef>
-          <a:effectRef idx="2">
-            <a:schemeClr val="accent1"/>
-          </a:effectRef>
-          <a:fontRef idx="minor">
-            <a:schemeClr val="lt1"/>
-          </a:fontRef>
-        </p:style>
-        <p:txBody>
-          <a:bodyPr rtlCol="0" anchor="ctr"/>
-          <a:lstStyle/>
-          <a:p>
-            <a:pPr algn="ctr"/>
-          </a:p>
-        </p:txBody>
-      </p:sp>
-      <p:sp>
-        <p:nvSpPr>
-          <p:cNvPr id="13" name="Rectangle 12"/>
-          <p:cNvSpPr/>
-          <p:nvPr/>
-        </p:nvSpPr>
-        <p:spPr>
-          <a:xfrm>
-            <a:off x="4283354" y="1655064"/>
-            <a:ext cx="3624986" cy="27432"/>
-          </a:xfrm>
-          <a:prstGeom prst="rect">
-            <a:avLst/>
-          </a:prstGeom>
-          <a:solidFill>
-            <a:srgbClr val="FFD000"/>
-          </a:solidFill>
-          <a:ln>
-            <a:noFill/>
-          </a:ln>
-        </p:spPr>
-        <p:style>
-          <a:lnRef idx="1">
-            <a:schemeClr val="accent1"/>
-          </a:lnRef>
-          <a:fillRef idx="3">
-            <a:schemeClr val="accent1"/>
-          </a:fillRef>
-          <a:effectRef idx="2">
-            <a:schemeClr val="accent1"/>
-          </a:effectRef>
-          <a:fontRef idx="minor">
-            <a:schemeClr val="lt1"/>
-          </a:fontRef>
-        </p:style>
-        <p:txBody>
-          <a:bodyPr rtlCol="0" anchor="ctr"/>
-          <a:lstStyle/>
-          <a:p>
-            <a:pPr algn="ctr"/>
-          </a:p>
-        </p:txBody>
-      </p:sp>
-      <p:pic>
-        <p:nvPicPr>
-          <p:cNvPr id="14" name="Picture 13" descr="drawio.png"/>
-          <p:cNvPicPr>
-            <a:picLocks noChangeAspect="1"/>
-          </p:cNvPicPr>
-          <p:nvPr/>
-        </p:nvPicPr>
-        <p:blipFill>
-          <a:blip r:embed="rId3"/>
-          <a:stretch>
-            <a:fillRect/>
-          </a:stretch>
-        </p:blipFill>
-        <p:spPr>
-          <a:xfrm>
-            <a:off x="5469483" y="1847087"/>
-            <a:ext cx="1252728" cy="1252728"/>
-          </a:xfrm>
-          <a:prstGeom prst="rect">
-            <a:avLst/>
-          </a:prstGeom>
-        </p:spPr>
-      </p:pic>
-      <p:sp>
-        <p:nvSpPr>
-          <p:cNvPr id="15" name="TextBox 14"/>
-          <p:cNvSpPr txBox="1"/>
-          <p:nvPr/>
-        </p:nvSpPr>
-        <p:spPr>
-          <a:xfrm>
-            <a:off x="4356506" y="3191256"/>
-            <a:ext cx="3478682" cy="621792"/>
-          </a:xfrm>
-          <a:prstGeom prst="rect">
-            <a:avLst/>
-          </a:prstGeom>
-          <a:noFill/>
-        </p:spPr>
-        <p:txBody>
-          <a:bodyPr wrap="square" anchor="t"/>
-          <a:lstStyle/>
-          <a:p>
-            <a:pPr algn="ctr"/>
-            <a:r>
-              <a:rPr sz="1300" b="1" i="0">
-                <a:solidFill>
-                  <a:srgbClr val="095292"/>
-                </a:solidFill>
-                <a:latin typeface="Calibri"/>
-              </a:rPr>
-              <a:t>draw.io</a:t>
-            </a:r>
-          </a:p>
-          <a:p>
-            <a:pPr algn="ctr">
-              <a:spcBef>
-                <a:spcPts val="200"/>
-              </a:spcBef>
+              <a:rPr sz="2000" b="0" i="0">
+                <a:solidFill>
+                  <a:srgbClr val="333333"/>
+                </a:solidFill>
+                <a:latin typeface="Calibri"/>
+              </a:rPr>
+              <a:t>–   </a:t>
+            </a:r>
+            <a:r>
+              <a:rPr sz="2000" b="1" i="0">
+                <a:solidFill>
+                  <a:srgbClr val="333333"/>
+                </a:solidFill>
+                <a:latin typeface="Calibri"/>
+              </a:rPr>
+              <a:t>Herramienta:</a:t>
+            </a:r>
+            <a:r>
+              <a:rPr sz="2000" b="0" i="0">
+                <a:solidFill>
+                  <a:srgbClr val="333333"/>
+                </a:solidFill>
+                <a:latin typeface="Calibri"/>
+              </a:rPr>
+              <a:t> Google Docs</a:t>
+            </a:r>
+          </a:p>
+          <a:p>
+            <a:pPr>
+              <a:spcAft>
+                <a:spcPts val="800"/>
+              </a:spcAft>
             </a:pPr>
             <a:r>
-              <a:rPr sz="1000" b="0" i="0">
-                <a:solidFill>
-                  <a:srgbClr val="666666"/>
-                </a:solidFill>
-                <a:latin typeface="Calibri"/>
-              </a:rPr>
-              <a:t>Leccion</a:t>
-            </a:r>
-          </a:p>
-        </p:txBody>
-      </p:sp>
-      <p:sp>
-        <p:nvSpPr>
-          <p:cNvPr id="16" name="Rounded Rectangle 15"/>
-          <p:cNvSpPr/>
-          <p:nvPr/>
-        </p:nvSpPr>
-        <p:spPr>
-          <a:xfrm>
-            <a:off x="8109508" y="1591056"/>
-            <a:ext cx="3624986" cy="2331720"/>
-          </a:xfrm>
-          <a:prstGeom prst="roundRect">
-            <a:avLst>
-              <a:gd name="adj" fmla="val 12000"/>
-            </a:avLst>
-          </a:prstGeom>
-          <a:solidFill>
-            <a:srgbClr val="F2F2F2"/>
-          </a:solidFill>
-          <a:ln>
-            <a:noFill/>
-          </a:ln>
-        </p:spPr>
-        <p:style>
-          <a:lnRef idx="1">
-            <a:schemeClr val="accent1"/>
-          </a:lnRef>
-          <a:fillRef idx="3">
-            <a:schemeClr val="accent1"/>
-          </a:fillRef>
-          <a:effectRef idx="2">
-            <a:schemeClr val="accent1"/>
-          </a:effectRef>
-          <a:fontRef idx="minor">
-            <a:schemeClr val="lt1"/>
-          </a:fontRef>
-        </p:style>
-        <p:txBody>
-          <a:bodyPr rtlCol="0" anchor="ctr"/>
-          <a:lstStyle/>
-          <a:p>
-            <a:pPr algn="ctr"/>
-          </a:p>
-        </p:txBody>
-      </p:sp>
-      <p:sp>
-        <p:nvSpPr>
-          <p:cNvPr id="17" name="Rectangle 16"/>
-          <p:cNvSpPr/>
-          <p:nvPr/>
-        </p:nvSpPr>
-        <p:spPr>
-          <a:xfrm>
-            <a:off x="8109508" y="1591056"/>
-            <a:ext cx="3624986" cy="64008"/>
-          </a:xfrm>
-          <a:prstGeom prst="rect">
-            <a:avLst/>
-          </a:prstGeom>
-          <a:solidFill>
-            <a:srgbClr val="095292"/>
-          </a:solidFill>
-          <a:ln>
-            <a:noFill/>
-          </a:ln>
-        </p:spPr>
-        <p:style>
-          <a:lnRef idx="1">
-            <a:schemeClr val="accent1"/>
-          </a:lnRef>
-          <a:fillRef idx="3">
-            <a:schemeClr val="accent1"/>
-          </a:fillRef>
-          <a:effectRef idx="2">
-            <a:schemeClr val="accent1"/>
-          </a:effectRef>
-          <a:fontRef idx="minor">
-            <a:schemeClr val="lt1"/>
-          </a:fontRef>
-        </p:style>
-        <p:txBody>
-          <a:bodyPr rtlCol="0" anchor="ctr"/>
-          <a:lstStyle/>
-          <a:p>
-            <a:pPr algn="ctr"/>
-          </a:p>
-        </p:txBody>
-      </p:sp>
-      <p:sp>
-        <p:nvSpPr>
-          <p:cNvPr id="18" name="Rectangle 17"/>
-          <p:cNvSpPr/>
-          <p:nvPr/>
-        </p:nvSpPr>
-        <p:spPr>
-          <a:xfrm>
-            <a:off x="8109508" y="1655064"/>
-            <a:ext cx="3624986" cy="27432"/>
-          </a:xfrm>
-          <a:prstGeom prst="rect">
-            <a:avLst/>
-          </a:prstGeom>
-          <a:solidFill>
-            <a:srgbClr val="FFD000"/>
-          </a:solidFill>
-          <a:ln>
-            <a:noFill/>
-          </a:ln>
-        </p:spPr>
-        <p:style>
-          <a:lnRef idx="1">
-            <a:schemeClr val="accent1"/>
-          </a:lnRef>
-          <a:fillRef idx="3">
-            <a:schemeClr val="accent1"/>
-          </a:fillRef>
-          <a:effectRef idx="2">
-            <a:schemeClr val="accent1"/>
-          </a:effectRef>
-          <a:fontRef idx="minor">
-            <a:schemeClr val="lt1"/>
-          </a:fontRef>
-        </p:style>
-        <p:txBody>
-          <a:bodyPr rtlCol="0" anchor="ctr"/>
-          <a:lstStyle/>
-          <a:p>
-            <a:pPr algn="ctr"/>
-          </a:p>
-        </p:txBody>
-      </p:sp>
-      <p:pic>
-        <p:nvPicPr>
-          <p:cNvPr id="19" name="Picture 18" descr="dbfiddle.png"/>
-          <p:cNvPicPr>
-            <a:picLocks noChangeAspect="1"/>
-          </p:cNvPicPr>
-          <p:nvPr/>
-        </p:nvPicPr>
-        <p:blipFill>
-          <a:blip r:embed="rId4"/>
-          <a:stretch>
-            <a:fillRect/>
-          </a:stretch>
-        </p:blipFill>
-        <p:spPr>
-          <a:xfrm>
-            <a:off x="9295638" y="1847087"/>
-            <a:ext cx="1252728" cy="1252728"/>
-          </a:xfrm>
-          <a:prstGeom prst="rect">
-            <a:avLst/>
-          </a:prstGeom>
-        </p:spPr>
-      </p:pic>
-      <p:sp>
-        <p:nvSpPr>
-          <p:cNvPr id="20" name="TextBox 19"/>
-          <p:cNvSpPr txBox="1"/>
-          <p:nvPr/>
-        </p:nvSpPr>
-        <p:spPr>
-          <a:xfrm>
-            <a:off x="8182660" y="3191256"/>
-            <a:ext cx="3478682" cy="621792"/>
-          </a:xfrm>
-          <a:prstGeom prst="rect">
-            <a:avLst/>
-          </a:prstGeom>
-          <a:noFill/>
-        </p:spPr>
-        <p:txBody>
-          <a:bodyPr wrap="square" anchor="t"/>
-          <a:lstStyle/>
-          <a:p>
-            <a:pPr algn="ctr"/>
-            <a:r>
-              <a:rPr sz="1300" b="1" i="0">
-                <a:solidFill>
-                  <a:srgbClr val="095292"/>
-                </a:solidFill>
-                <a:latin typeface="Calibri"/>
-              </a:rPr>
-              <a:t>DB Fiddle</a:t>
-            </a:r>
-          </a:p>
-          <a:p>
-            <a:pPr algn="ctr">
-              <a:spcBef>
-                <a:spcPts val="200"/>
-              </a:spcBef>
+              <a:rPr sz="2000" b="0" i="0">
+                <a:solidFill>
+                  <a:srgbClr val="333333"/>
+                </a:solidFill>
+                <a:latin typeface="Calibri"/>
+              </a:rPr>
+              <a:t>–   </a:t>
+            </a:r>
+            <a:r>
+              <a:rPr sz="2000" b="1" i="0">
+                <a:solidFill>
+                  <a:srgbClr val="333333"/>
+                </a:solidFill>
+                <a:latin typeface="Calibri"/>
+              </a:rPr>
+              <a:t>Demo:</a:t>
+            </a:r>
+            <a:r>
+              <a:rPr sz="2000" b="0" i="0">
+                <a:solidFill>
+                  <a:srgbClr val="333333"/>
+                </a:solidFill>
+                <a:latin typeface="Calibri"/>
+              </a:rPr>
+              <a:t> Plantilla: contexto -&gt; fallo -&gt; leccion -&gt; cambio en VetCare.</a:t>
+            </a:r>
+          </a:p>
+          <a:p>
+            <a:pPr>
+              <a:spcAft>
+                <a:spcPts val="800"/>
+              </a:spcAft>
             </a:pPr>
             <a:r>
-              <a:rPr sz="1000" b="0" i="0">
-                <a:solidFill>
-                  <a:srgbClr val="666666"/>
-                </a:solidFill>
-                <a:latin typeface="Calibri"/>
-              </a:rPr>
-              <a:t>Opcional SQL</a:t>
-            </a:r>
-          </a:p>
-        </p:txBody>
-      </p:sp>
-      <p:sp>
-        <p:nvSpPr>
-          <p:cNvPr id="21" name="TextBox 20"/>
+              <a:rPr sz="2000" b="0" i="0">
+                <a:solidFill>
+                  <a:srgbClr val="333333"/>
+                </a:solidFill>
+                <a:latin typeface="Calibri"/>
+              </a:rPr>
+              <a:t>–   Sigan el mismo dominio VetCare (no inventen otro caso).</a:t>
+            </a:r>
+          </a:p>
+          <a:p>
+            <a:pPr>
+              <a:spcAft>
+                <a:spcPts val="800"/>
+              </a:spcAft>
+            </a:pPr>
+            <a:r>
+              <a:rPr sz="2000" b="0" i="0">
+                <a:solidFill>
+                  <a:srgbClr val="333333"/>
+                </a:solidFill>
+                <a:latin typeface="Calibri"/>
+              </a:rPr>
+              <a:t>–   Al final de la demo: dejar enlace/script compartible al grupo.</a:t>
+            </a:r>
+          </a:p>
+        </p:txBody>
+      </p:sp>
+      <p:sp>
+        <p:nvSpPr>
+          <p:cNvPr id="6" name="TextBox 5"/>
           <p:cNvSpPr txBox="1"/>
           <p:nvPr/>
         </p:nvSpPr>
@@ -7333,7 +6615,7 @@
         <p:spPr>
           <a:xfrm>
             <a:off x="0" y="0"/>
-            <a:ext cx="12191695" cy="960120"/>
+            <a:ext cx="12191695" cy="1170432"/>
           </a:xfrm>
           <a:prstGeom prst="rect">
             <a:avLst/>
@@ -7375,7 +6657,7 @@
         </p:nvSpPr>
         <p:spPr>
           <a:xfrm>
-            <a:off x="0" y="960120"/>
+            <a:off x="0" y="1170432"/>
             <a:ext cx="12191695" cy="41148"/>
           </a:xfrm>
           <a:prstGeom prst="rect">
@@ -7419,7 +6701,7 @@
         <p:spPr>
           <a:xfrm>
             <a:off x="457200" y="164592"/>
-            <a:ext cx="11277295" cy="502920"/>
+            <a:ext cx="11277295" cy="384048"/>
           </a:xfrm>
           <a:prstGeom prst="rect">
             <a:avLst/>
@@ -7439,7 +6721,7 @@
                 </a:solidFill>
                 <a:latin typeface="Calibri"/>
               </a:rPr>
-              <a:t>Actividad autonoma — contexto / por que importa</a:t>
+              <a:t>Herramientas de hoy</a:t>
             </a:r>
           </a:p>
         </p:txBody>
@@ -7452,8 +6734,8 @@
         </p:nvSpPr>
         <p:spPr>
           <a:xfrm>
-            <a:off x="457200" y="1170432"/>
-            <a:ext cx="11277295" cy="5230368"/>
+            <a:off x="457200" y="566928"/>
+            <a:ext cx="11277295" cy="411480"/>
           </a:xfrm>
           <a:prstGeom prst="rect">
             <a:avLst/>
@@ -7466,60 +6748,633 @@
           </a:bodyPr>
           <a:lstStyle/>
           <a:p>
-            <a:pPr>
-              <a:spcAft>
-                <a:spcPts val="800"/>
-              </a:spcAft>
+            <a:r>
+              <a:rPr sz="1400" b="0" i="0">
+                <a:solidFill>
+                  <a:srgbClr val="B8D8EE"/>
+                </a:solidFill>
+                <a:latin typeface="Calibri"/>
+              </a:rPr>
+              <a:t>Gratis · navegador o free tier</a:t>
+            </a:r>
+          </a:p>
+        </p:txBody>
+      </p:sp>
+      <p:sp>
+        <p:nvSpPr>
+          <p:cNvPr id="6" name="Rounded Rectangle 5"/>
+          <p:cNvSpPr/>
+          <p:nvPr/>
+        </p:nvSpPr>
+        <p:spPr>
+          <a:xfrm>
+            <a:off x="457200" y="1591056"/>
+            <a:ext cx="3624986" cy="2331720"/>
+          </a:xfrm>
+          <a:prstGeom prst="roundRect">
+            <a:avLst>
+              <a:gd name="adj" fmla="val 12000"/>
+            </a:avLst>
+          </a:prstGeom>
+          <a:solidFill>
+            <a:srgbClr val="F2F2F2"/>
+          </a:solidFill>
+          <a:ln>
+            <a:noFill/>
+          </a:ln>
+        </p:spPr>
+        <p:style>
+          <a:lnRef idx="1">
+            <a:schemeClr val="accent1"/>
+          </a:lnRef>
+          <a:fillRef idx="3">
+            <a:schemeClr val="accent1"/>
+          </a:fillRef>
+          <a:effectRef idx="2">
+            <a:schemeClr val="accent1"/>
+          </a:effectRef>
+          <a:fontRef idx="minor">
+            <a:schemeClr val="lt1"/>
+          </a:fontRef>
+        </p:style>
+        <p:txBody>
+          <a:bodyPr rtlCol="0" anchor="ctr"/>
+          <a:lstStyle/>
+          <a:p>
+            <a:pPr algn="ctr"/>
+          </a:p>
+        </p:txBody>
+      </p:sp>
+      <p:sp>
+        <p:nvSpPr>
+          <p:cNvPr id="7" name="Rectangle 6"/>
+          <p:cNvSpPr/>
+          <p:nvPr/>
+        </p:nvSpPr>
+        <p:spPr>
+          <a:xfrm>
+            <a:off x="457200" y="1591056"/>
+            <a:ext cx="3624986" cy="64008"/>
+          </a:xfrm>
+          <a:prstGeom prst="rect">
+            <a:avLst/>
+          </a:prstGeom>
+          <a:solidFill>
+            <a:srgbClr val="095292"/>
+          </a:solidFill>
+          <a:ln>
+            <a:noFill/>
+          </a:ln>
+        </p:spPr>
+        <p:style>
+          <a:lnRef idx="1">
+            <a:schemeClr val="accent1"/>
+          </a:lnRef>
+          <a:fillRef idx="3">
+            <a:schemeClr val="accent1"/>
+          </a:fillRef>
+          <a:effectRef idx="2">
+            <a:schemeClr val="accent1"/>
+          </a:effectRef>
+          <a:fontRef idx="minor">
+            <a:schemeClr val="lt1"/>
+          </a:fontRef>
+        </p:style>
+        <p:txBody>
+          <a:bodyPr rtlCol="0" anchor="ctr"/>
+          <a:lstStyle/>
+          <a:p>
+            <a:pPr algn="ctr"/>
+          </a:p>
+        </p:txBody>
+      </p:sp>
+      <p:sp>
+        <p:nvSpPr>
+          <p:cNvPr id="8" name="Rectangle 7"/>
+          <p:cNvSpPr/>
+          <p:nvPr/>
+        </p:nvSpPr>
+        <p:spPr>
+          <a:xfrm>
+            <a:off x="457200" y="1655064"/>
+            <a:ext cx="3624986" cy="27432"/>
+          </a:xfrm>
+          <a:prstGeom prst="rect">
+            <a:avLst/>
+          </a:prstGeom>
+          <a:solidFill>
+            <a:srgbClr val="FFD000"/>
+          </a:solidFill>
+          <a:ln>
+            <a:noFill/>
+          </a:ln>
+        </p:spPr>
+        <p:style>
+          <a:lnRef idx="1">
+            <a:schemeClr val="accent1"/>
+          </a:lnRef>
+          <a:fillRef idx="3">
+            <a:schemeClr val="accent1"/>
+          </a:fillRef>
+          <a:effectRef idx="2">
+            <a:schemeClr val="accent1"/>
+          </a:effectRef>
+          <a:fontRef idx="minor">
+            <a:schemeClr val="lt1"/>
+          </a:fontRef>
+        </p:style>
+        <p:txBody>
+          <a:bodyPr rtlCol="0" anchor="ctr"/>
+          <a:lstStyle/>
+          <a:p>
+            <a:pPr algn="ctr"/>
+          </a:p>
+        </p:txBody>
+      </p:sp>
+      <p:pic>
+        <p:nvPicPr>
+          <p:cNvPr id="9" name="Picture 8" descr="google_docs.png"/>
+          <p:cNvPicPr>
+            <a:picLocks noChangeAspect="1"/>
+          </p:cNvPicPr>
+          <p:nvPr/>
+        </p:nvPicPr>
+        <p:blipFill>
+          <a:blip r:embed="rId2"/>
+          <a:stretch>
+            <a:fillRect/>
+          </a:stretch>
+        </p:blipFill>
+        <p:spPr>
+          <a:xfrm>
+            <a:off x="1643329" y="1847087"/>
+            <a:ext cx="1252728" cy="1252728"/>
+          </a:xfrm>
+          <a:prstGeom prst="rect">
+            <a:avLst/>
+          </a:prstGeom>
+        </p:spPr>
+      </p:pic>
+      <p:sp>
+        <p:nvSpPr>
+          <p:cNvPr id="10" name="TextBox 9"/>
+          <p:cNvSpPr txBox="1"/>
+          <p:nvPr/>
+        </p:nvSpPr>
+        <p:spPr>
+          <a:xfrm>
+            <a:off x="530352" y="3191256"/>
+            <a:ext cx="3478682" cy="621792"/>
+          </a:xfrm>
+          <a:prstGeom prst="rect">
+            <a:avLst/>
+          </a:prstGeom>
+          <a:noFill/>
+        </p:spPr>
+        <p:txBody>
+          <a:bodyPr wrap="square" anchor="t"/>
+          <a:lstStyle/>
+          <a:p>
+            <a:pPr algn="ctr"/>
+            <a:r>
+              <a:rPr sz="1300" b="1" i="0">
+                <a:solidFill>
+                  <a:srgbClr val="095292"/>
+                </a:solidFill>
+                <a:latin typeface="Calibri"/>
+              </a:rPr>
+              <a:t>Google Docs</a:t>
+            </a:r>
+          </a:p>
+          <a:p>
+            <a:pPr algn="ctr">
+              <a:spcBef>
+                <a:spcPts val="200"/>
+              </a:spcBef>
             </a:pPr>
             <a:r>
-              <a:rPr sz="2000" b="0" i="0">
-                <a:solidFill>
-                  <a:srgbClr val="333333"/>
-                </a:solidFill>
-                <a:latin typeface="Calibri"/>
-              </a:rPr>
-              <a:t>–   </a:t>
-            </a:r>
-            <a:r>
-              <a:rPr sz="2000" b="1" i="0">
-                <a:solidFill>
-                  <a:srgbClr val="333333"/>
-                </a:solidFill>
-                <a:latin typeface="Calibri"/>
-              </a:rPr>
-              <a:t>Por qué importa al PI:</a:t>
-            </a:r>
-            <a:r>
-              <a:rPr sz="2000" b="0" i="0">
-                <a:solidFill>
-                  <a:srgbClr val="333333"/>
-                </a:solidFill>
-                <a:latin typeface="Calibri"/>
-              </a:rPr>
-              <a:t> lecciónes accionables.</a:t>
-            </a:r>
-          </a:p>
-          <a:p>
-            <a:pPr>
-              <a:spcAft>
-                <a:spcPts val="800"/>
-              </a:spcAft>
+              <a:rPr sz="1000" b="0" i="0">
+                <a:solidFill>
+                  <a:srgbClr val="666666"/>
+                </a:solidFill>
+                <a:latin typeface="Calibri"/>
+              </a:rPr>
+              <a:t>Caso real</a:t>
+            </a:r>
+          </a:p>
+        </p:txBody>
+      </p:sp>
+      <p:sp>
+        <p:nvSpPr>
+          <p:cNvPr id="11" name="Rounded Rectangle 10"/>
+          <p:cNvSpPr/>
+          <p:nvPr/>
+        </p:nvSpPr>
+        <p:spPr>
+          <a:xfrm>
+            <a:off x="4283354" y="1591056"/>
+            <a:ext cx="3624986" cy="2331720"/>
+          </a:xfrm>
+          <a:prstGeom prst="roundRect">
+            <a:avLst>
+              <a:gd name="adj" fmla="val 12000"/>
+            </a:avLst>
+          </a:prstGeom>
+          <a:solidFill>
+            <a:srgbClr val="F2F2F2"/>
+          </a:solidFill>
+          <a:ln>
+            <a:noFill/>
+          </a:ln>
+        </p:spPr>
+        <p:style>
+          <a:lnRef idx="1">
+            <a:schemeClr val="accent1"/>
+          </a:lnRef>
+          <a:fillRef idx="3">
+            <a:schemeClr val="accent1"/>
+          </a:fillRef>
+          <a:effectRef idx="2">
+            <a:schemeClr val="accent1"/>
+          </a:effectRef>
+          <a:fontRef idx="minor">
+            <a:schemeClr val="lt1"/>
+          </a:fontRef>
+        </p:style>
+        <p:txBody>
+          <a:bodyPr rtlCol="0" anchor="ctr"/>
+          <a:lstStyle/>
+          <a:p>
+            <a:pPr algn="ctr"/>
+          </a:p>
+        </p:txBody>
+      </p:sp>
+      <p:sp>
+        <p:nvSpPr>
+          <p:cNvPr id="12" name="Rectangle 11"/>
+          <p:cNvSpPr/>
+          <p:nvPr/>
+        </p:nvSpPr>
+        <p:spPr>
+          <a:xfrm>
+            <a:off x="4283354" y="1591056"/>
+            <a:ext cx="3624986" cy="64008"/>
+          </a:xfrm>
+          <a:prstGeom prst="rect">
+            <a:avLst/>
+          </a:prstGeom>
+          <a:solidFill>
+            <a:srgbClr val="095292"/>
+          </a:solidFill>
+          <a:ln>
+            <a:noFill/>
+          </a:ln>
+        </p:spPr>
+        <p:style>
+          <a:lnRef idx="1">
+            <a:schemeClr val="accent1"/>
+          </a:lnRef>
+          <a:fillRef idx="3">
+            <a:schemeClr val="accent1"/>
+          </a:fillRef>
+          <a:effectRef idx="2">
+            <a:schemeClr val="accent1"/>
+          </a:effectRef>
+          <a:fontRef idx="minor">
+            <a:schemeClr val="lt1"/>
+          </a:fontRef>
+        </p:style>
+        <p:txBody>
+          <a:bodyPr rtlCol="0" anchor="ctr"/>
+          <a:lstStyle/>
+          <a:p>
+            <a:pPr algn="ctr"/>
+          </a:p>
+        </p:txBody>
+      </p:sp>
+      <p:sp>
+        <p:nvSpPr>
+          <p:cNvPr id="13" name="Rectangle 12"/>
+          <p:cNvSpPr/>
+          <p:nvPr/>
+        </p:nvSpPr>
+        <p:spPr>
+          <a:xfrm>
+            <a:off x="4283354" y="1655064"/>
+            <a:ext cx="3624986" cy="27432"/>
+          </a:xfrm>
+          <a:prstGeom prst="rect">
+            <a:avLst/>
+          </a:prstGeom>
+          <a:solidFill>
+            <a:srgbClr val="FFD000"/>
+          </a:solidFill>
+          <a:ln>
+            <a:noFill/>
+          </a:ln>
+        </p:spPr>
+        <p:style>
+          <a:lnRef idx="1">
+            <a:schemeClr val="accent1"/>
+          </a:lnRef>
+          <a:fillRef idx="3">
+            <a:schemeClr val="accent1"/>
+          </a:fillRef>
+          <a:effectRef idx="2">
+            <a:schemeClr val="accent1"/>
+          </a:effectRef>
+          <a:fontRef idx="minor">
+            <a:schemeClr val="lt1"/>
+          </a:fontRef>
+        </p:style>
+        <p:txBody>
+          <a:bodyPr rtlCol="0" anchor="ctr"/>
+          <a:lstStyle/>
+          <a:p>
+            <a:pPr algn="ctr"/>
+          </a:p>
+        </p:txBody>
+      </p:sp>
+      <p:pic>
+        <p:nvPicPr>
+          <p:cNvPr id="14" name="Picture 13" descr="drawio.png"/>
+          <p:cNvPicPr>
+            <a:picLocks noChangeAspect="1"/>
+          </p:cNvPicPr>
+          <p:nvPr/>
+        </p:nvPicPr>
+        <p:blipFill>
+          <a:blip r:embed="rId3"/>
+          <a:stretch>
+            <a:fillRect/>
+          </a:stretch>
+        </p:blipFill>
+        <p:spPr>
+          <a:xfrm>
+            <a:off x="5469483" y="1847087"/>
+            <a:ext cx="1252728" cy="1252728"/>
+          </a:xfrm>
+          <a:prstGeom prst="rect">
+            <a:avLst/>
+          </a:prstGeom>
+        </p:spPr>
+      </p:pic>
+      <p:sp>
+        <p:nvSpPr>
+          <p:cNvPr id="15" name="TextBox 14"/>
+          <p:cNvSpPr txBox="1"/>
+          <p:nvPr/>
+        </p:nvSpPr>
+        <p:spPr>
+          <a:xfrm>
+            <a:off x="4356506" y="3191256"/>
+            <a:ext cx="3478682" cy="621792"/>
+          </a:xfrm>
+          <a:prstGeom prst="rect">
+            <a:avLst/>
+          </a:prstGeom>
+          <a:noFill/>
+        </p:spPr>
+        <p:txBody>
+          <a:bodyPr wrap="square" anchor="t"/>
+          <a:lstStyle/>
+          <a:p>
+            <a:pPr algn="ctr"/>
+            <a:r>
+              <a:rPr sz="1300" b="1" i="0">
+                <a:solidFill>
+                  <a:srgbClr val="095292"/>
+                </a:solidFill>
+                <a:latin typeface="Calibri"/>
+              </a:rPr>
+              <a:t>draw.io</a:t>
+            </a:r>
+          </a:p>
+          <a:p>
+            <a:pPr algn="ctr">
+              <a:spcBef>
+                <a:spcPts val="200"/>
+              </a:spcBef>
             </a:pPr>
             <a:r>
-              <a:rPr sz="2000" b="0" i="0">
-                <a:solidFill>
-                  <a:srgbClr val="333333"/>
-                </a:solidFill>
-                <a:latin typeface="Calibri"/>
-              </a:rPr>
-              <a:t>–   Autónoma: 1 caso -&gt; 3 mejoras.</a:t>
-            </a:r>
-          </a:p>
-        </p:txBody>
-      </p:sp>
-      <p:sp>
-        <p:nvSpPr>
-          <p:cNvPr id="6" name="TextBox 5"/>
+              <a:rPr sz="1000" b="0" i="0">
+                <a:solidFill>
+                  <a:srgbClr val="666666"/>
+                </a:solidFill>
+                <a:latin typeface="Calibri"/>
+              </a:rPr>
+              <a:t>Leccion</a:t>
+            </a:r>
+          </a:p>
+        </p:txBody>
+      </p:sp>
+      <p:sp>
+        <p:nvSpPr>
+          <p:cNvPr id="16" name="Rounded Rectangle 15"/>
+          <p:cNvSpPr/>
+          <p:nvPr/>
+        </p:nvSpPr>
+        <p:spPr>
+          <a:xfrm>
+            <a:off x="8109508" y="1591056"/>
+            <a:ext cx="3624986" cy="2331720"/>
+          </a:xfrm>
+          <a:prstGeom prst="roundRect">
+            <a:avLst>
+              <a:gd name="adj" fmla="val 12000"/>
+            </a:avLst>
+          </a:prstGeom>
+          <a:solidFill>
+            <a:srgbClr val="F2F2F2"/>
+          </a:solidFill>
+          <a:ln>
+            <a:noFill/>
+          </a:ln>
+        </p:spPr>
+        <p:style>
+          <a:lnRef idx="1">
+            <a:schemeClr val="accent1"/>
+          </a:lnRef>
+          <a:fillRef idx="3">
+            <a:schemeClr val="accent1"/>
+          </a:fillRef>
+          <a:effectRef idx="2">
+            <a:schemeClr val="accent1"/>
+          </a:effectRef>
+          <a:fontRef idx="minor">
+            <a:schemeClr val="lt1"/>
+          </a:fontRef>
+        </p:style>
+        <p:txBody>
+          <a:bodyPr rtlCol="0" anchor="ctr"/>
+          <a:lstStyle/>
+          <a:p>
+            <a:pPr algn="ctr"/>
+          </a:p>
+        </p:txBody>
+      </p:sp>
+      <p:sp>
+        <p:nvSpPr>
+          <p:cNvPr id="17" name="Rectangle 16"/>
+          <p:cNvSpPr/>
+          <p:nvPr/>
+        </p:nvSpPr>
+        <p:spPr>
+          <a:xfrm>
+            <a:off x="8109508" y="1591056"/>
+            <a:ext cx="3624986" cy="64008"/>
+          </a:xfrm>
+          <a:prstGeom prst="rect">
+            <a:avLst/>
+          </a:prstGeom>
+          <a:solidFill>
+            <a:srgbClr val="095292"/>
+          </a:solidFill>
+          <a:ln>
+            <a:noFill/>
+          </a:ln>
+        </p:spPr>
+        <p:style>
+          <a:lnRef idx="1">
+            <a:schemeClr val="accent1"/>
+          </a:lnRef>
+          <a:fillRef idx="3">
+            <a:schemeClr val="accent1"/>
+          </a:fillRef>
+          <a:effectRef idx="2">
+            <a:schemeClr val="accent1"/>
+          </a:effectRef>
+          <a:fontRef idx="minor">
+            <a:schemeClr val="lt1"/>
+          </a:fontRef>
+        </p:style>
+        <p:txBody>
+          <a:bodyPr rtlCol="0" anchor="ctr"/>
+          <a:lstStyle/>
+          <a:p>
+            <a:pPr algn="ctr"/>
+          </a:p>
+        </p:txBody>
+      </p:sp>
+      <p:sp>
+        <p:nvSpPr>
+          <p:cNvPr id="18" name="Rectangle 17"/>
+          <p:cNvSpPr/>
+          <p:nvPr/>
+        </p:nvSpPr>
+        <p:spPr>
+          <a:xfrm>
+            <a:off x="8109508" y="1655064"/>
+            <a:ext cx="3624986" cy="27432"/>
+          </a:xfrm>
+          <a:prstGeom prst="rect">
+            <a:avLst/>
+          </a:prstGeom>
+          <a:solidFill>
+            <a:srgbClr val="FFD000"/>
+          </a:solidFill>
+          <a:ln>
+            <a:noFill/>
+          </a:ln>
+        </p:spPr>
+        <p:style>
+          <a:lnRef idx="1">
+            <a:schemeClr val="accent1"/>
+          </a:lnRef>
+          <a:fillRef idx="3">
+            <a:schemeClr val="accent1"/>
+          </a:fillRef>
+          <a:effectRef idx="2">
+            <a:schemeClr val="accent1"/>
+          </a:effectRef>
+          <a:fontRef idx="minor">
+            <a:schemeClr val="lt1"/>
+          </a:fontRef>
+        </p:style>
+        <p:txBody>
+          <a:bodyPr rtlCol="0" anchor="ctr"/>
+          <a:lstStyle/>
+          <a:p>
+            <a:pPr algn="ctr"/>
+          </a:p>
+        </p:txBody>
+      </p:sp>
+      <p:pic>
+        <p:nvPicPr>
+          <p:cNvPr id="19" name="Picture 18" descr="dbfiddle.png"/>
+          <p:cNvPicPr>
+            <a:picLocks noChangeAspect="1"/>
+          </p:cNvPicPr>
+          <p:nvPr/>
+        </p:nvPicPr>
+        <p:blipFill>
+          <a:blip r:embed="rId4"/>
+          <a:stretch>
+            <a:fillRect/>
+          </a:stretch>
+        </p:blipFill>
+        <p:spPr>
+          <a:xfrm>
+            <a:off x="9295638" y="1847087"/>
+            <a:ext cx="1252728" cy="1252728"/>
+          </a:xfrm>
+          <a:prstGeom prst="rect">
+            <a:avLst/>
+          </a:prstGeom>
+        </p:spPr>
+      </p:pic>
+      <p:sp>
+        <p:nvSpPr>
+          <p:cNvPr id="20" name="TextBox 19"/>
+          <p:cNvSpPr txBox="1"/>
+          <p:nvPr/>
+        </p:nvSpPr>
+        <p:spPr>
+          <a:xfrm>
+            <a:off x="8182660" y="3191256"/>
+            <a:ext cx="3478682" cy="621792"/>
+          </a:xfrm>
+          <a:prstGeom prst="rect">
+            <a:avLst/>
+          </a:prstGeom>
+          <a:noFill/>
+        </p:spPr>
+        <p:txBody>
+          <a:bodyPr wrap="square" anchor="t"/>
+          <a:lstStyle/>
+          <a:p>
+            <a:pPr algn="ctr"/>
+            <a:r>
+              <a:rPr sz="1300" b="1" i="0">
+                <a:solidFill>
+                  <a:srgbClr val="095292"/>
+                </a:solidFill>
+                <a:latin typeface="Calibri"/>
+              </a:rPr>
+              <a:t>DB Fiddle</a:t>
+            </a:r>
+          </a:p>
+          <a:p>
+            <a:pPr algn="ctr">
+              <a:spcBef>
+                <a:spcPts val="200"/>
+              </a:spcBef>
+            </a:pPr>
+            <a:r>
+              <a:rPr sz="1000" b="0" i="0">
+                <a:solidFill>
+                  <a:srgbClr val="666666"/>
+                </a:solidFill>
+                <a:latin typeface="Calibri"/>
+              </a:rPr>
+              <a:t>Opcional SQL</a:t>
+            </a:r>
+          </a:p>
+        </p:txBody>
+      </p:sp>
+      <p:sp>
+        <p:nvSpPr>
+          <p:cNvPr id="21" name="TextBox 20"/>
           <p:cNvSpPr txBox="1"/>
           <p:nvPr/>
         </p:nvSpPr>
@@ -7693,7 +7548,7 @@
                 </a:solidFill>
                 <a:latin typeface="Calibri"/>
               </a:rPr>
-              <a:t>Actividad autonoma — objetivo y criterios</a:t>
+              <a:t>Actividad autonoma — contexto / por que importa</a:t>
             </a:r>
           </a:p>
         </p:txBody>
@@ -7741,7 +7596,7 @@
                 </a:solidFill>
                 <a:latin typeface="Calibri"/>
               </a:rPr>
-              <a:t>Objetivo:</a:t>
+              <a:t>Por qué importa al PI:</a:t>
             </a:r>
             <a:r>
               <a:rPr sz="2000" b="0" i="0">
@@ -7750,7 +7605,7 @@
                 </a:solidFill>
                 <a:latin typeface="Calibri"/>
               </a:rPr>
-              <a:t> Caso real -&gt; 3 mejoras VetCare.</a:t>
+              <a:t> lecciónes accionables.</a:t>
             </a:r>
           </a:p>
           <a:p>
@@ -7766,161 +7621,7 @@
                 </a:solidFill>
                 <a:latin typeface="Calibri"/>
               </a:rPr>
-              <a:t>–   </a:t>
-            </a:r>
-            <a:r>
-              <a:rPr sz="2000" b="1" i="0">
-                <a:solidFill>
-                  <a:srgbClr val="333333"/>
-                </a:solidFill>
-                <a:latin typeface="Calibri"/>
-              </a:rPr>
-              <a:t>Exito:</a:t>
-            </a:r>
-            <a:r>
-              <a:rPr sz="2000" b="0" i="0">
-                <a:solidFill>
-                  <a:srgbClr val="333333"/>
-                </a:solidFill>
-                <a:latin typeface="Calibri"/>
-              </a:rPr>
-              <a:t> Caso elegido.</a:t>
-            </a:r>
-          </a:p>
-          <a:p>
-            <a:pPr>
-              <a:spcAft>
-                <a:spcPts val="800"/>
-              </a:spcAft>
-            </a:pPr>
-            <a:r>
-              <a:rPr sz="2000" b="0" i="0">
-                <a:solidFill>
-                  <a:srgbClr val="333333"/>
-                </a:solidFill>
-                <a:latin typeface="Calibri"/>
-              </a:rPr>
-              <a:t>–   </a:t>
-            </a:r>
-            <a:r>
-              <a:rPr sz="2000" b="1" i="0">
-                <a:solidFill>
-                  <a:srgbClr val="333333"/>
-                </a:solidFill>
-                <a:latin typeface="Calibri"/>
-              </a:rPr>
-              <a:t>Exito:</a:t>
-            </a:r>
-            <a:r>
-              <a:rPr sz="2000" b="0" i="0">
-                <a:solidFill>
-                  <a:srgbClr val="333333"/>
-                </a:solidFill>
-                <a:latin typeface="Calibri"/>
-              </a:rPr>
-              <a:t> Resumen.</a:t>
-            </a:r>
-          </a:p>
-          <a:p>
-            <a:pPr>
-              <a:spcAft>
-                <a:spcPts val="800"/>
-              </a:spcAft>
-            </a:pPr>
-            <a:r>
-              <a:rPr sz="2000" b="0" i="0">
-                <a:solidFill>
-                  <a:srgbClr val="333333"/>
-                </a:solidFill>
-                <a:latin typeface="Calibri"/>
-              </a:rPr>
-              <a:t>–   </a:t>
-            </a:r>
-            <a:r>
-              <a:rPr sz="2000" b="1" i="0">
-                <a:solidFill>
-                  <a:srgbClr val="333333"/>
-                </a:solidFill>
-                <a:latin typeface="Calibri"/>
-              </a:rPr>
-              <a:t>Exito:</a:t>
-            </a:r>
-            <a:r>
-              <a:rPr sz="2000" b="0" i="0">
-                <a:solidFill>
-                  <a:srgbClr val="333333"/>
-                </a:solidFill>
-                <a:latin typeface="Calibri"/>
-              </a:rPr>
-              <a:t> 3 mejoras.</a:t>
-            </a:r>
-          </a:p>
-          <a:p>
-            <a:pPr>
-              <a:spcAft>
-                <a:spcPts val="800"/>
-              </a:spcAft>
-            </a:pPr>
-            <a:r>
-              <a:rPr sz="2000" b="0" i="0">
-                <a:solidFill>
-                  <a:srgbClr val="333333"/>
-                </a:solidFill>
-                <a:latin typeface="Calibri"/>
-              </a:rPr>
-              <a:t>–   </a:t>
-            </a:r>
-            <a:r>
-              <a:rPr sz="2000" b="1" i="0">
-                <a:solidFill>
-                  <a:srgbClr val="333333"/>
-                </a:solidFill>
-                <a:latin typeface="Calibri"/>
-              </a:rPr>
-              <a:t>Exito:</a:t>
-            </a:r>
-            <a:r>
-              <a:rPr sz="2000" b="0" i="0">
-                <a:solidFill>
-                  <a:srgbClr val="333333"/>
-                </a:solidFill>
-                <a:latin typeface="Calibri"/>
-              </a:rPr>
-              <a:t> Informe.</a:t>
-            </a:r>
-          </a:p>
-          <a:p>
-            <a:pPr>
-              <a:spcAft>
-                <a:spcPts val="800"/>
-              </a:spcAft>
-            </a:pPr>
-            <a:r>
-              <a:rPr sz="2000" b="0" i="0">
-                <a:solidFill>
-                  <a:srgbClr val="333333"/>
-                </a:solidFill>
-                <a:latin typeface="Calibri"/>
-              </a:rPr>
-              <a:t>–   </a:t>
-            </a:r>
-            <a:r>
-              <a:rPr sz="2000" b="1" i="0">
-                <a:solidFill>
-                  <a:srgbClr val="333333"/>
-                </a:solidFill>
-                <a:latin typeface="Calibri"/>
-              </a:rPr>
-              <a:t>Exito:</a:t>
-            </a:r>
-            <a:r>
-              <a:rPr sz="2000" b="0" i="0">
-                <a:solidFill>
-                  <a:srgbClr val="333333"/>
-                </a:solidFill>
-                <a:latin typeface="Calibri"/>
-              </a:rPr>
-              <a:t> en la fecha que indique el docente.</a:t>
+              <a:t>–   Autónoma: 1 caso -&gt; 3 mejoras.</a:t>
             </a:r>
           </a:p>
         </p:txBody>
@@ -8101,7 +7802,7 @@
                 </a:solidFill>
                 <a:latin typeface="Calibri"/>
               </a:rPr>
-              <a:t>Actividad autonoma — escenario / datos de partida</a:t>
+              <a:t>Actividad autonoma — objetivo y criterios</a:t>
             </a:r>
           </a:p>
         </p:txBody>
@@ -8140,7 +7841,195 @@
                 </a:solidFill>
                 <a:latin typeface="Calibri"/>
               </a:rPr>
-              <a:t>–   Plantilla: contexto-&gt;fallo-&gt;lección-&gt;cambio.</a:t>
+              <a:t>–   </a:t>
+            </a:r>
+            <a:r>
+              <a:rPr sz="2000" b="1" i="0">
+                <a:solidFill>
+                  <a:srgbClr val="333333"/>
+                </a:solidFill>
+                <a:latin typeface="Calibri"/>
+              </a:rPr>
+              <a:t>Objetivo:</a:t>
+            </a:r>
+            <a:r>
+              <a:rPr sz="2000" b="0" i="0">
+                <a:solidFill>
+                  <a:srgbClr val="333333"/>
+                </a:solidFill>
+                <a:latin typeface="Calibri"/>
+              </a:rPr>
+              <a:t> Caso real -&gt; 3 mejoras VetCare.</a:t>
+            </a:r>
+          </a:p>
+          <a:p>
+            <a:pPr>
+              <a:spcAft>
+                <a:spcPts val="800"/>
+              </a:spcAft>
+            </a:pPr>
+            <a:r>
+              <a:rPr sz="2000" b="0" i="0">
+                <a:solidFill>
+                  <a:srgbClr val="333333"/>
+                </a:solidFill>
+                <a:latin typeface="Calibri"/>
+              </a:rPr>
+              <a:t>–   </a:t>
+            </a:r>
+            <a:r>
+              <a:rPr sz="2000" b="1" i="0">
+                <a:solidFill>
+                  <a:srgbClr val="333333"/>
+                </a:solidFill>
+                <a:latin typeface="Calibri"/>
+              </a:rPr>
+              <a:t>Exito:</a:t>
+            </a:r>
+            <a:r>
+              <a:rPr sz="2000" b="0" i="0">
+                <a:solidFill>
+                  <a:srgbClr val="333333"/>
+                </a:solidFill>
+                <a:latin typeface="Calibri"/>
+              </a:rPr>
+              <a:t> Caso elegido.</a:t>
+            </a:r>
+          </a:p>
+          <a:p>
+            <a:pPr>
+              <a:spcAft>
+                <a:spcPts val="800"/>
+              </a:spcAft>
+            </a:pPr>
+            <a:r>
+              <a:rPr sz="2000" b="0" i="0">
+                <a:solidFill>
+                  <a:srgbClr val="333333"/>
+                </a:solidFill>
+                <a:latin typeface="Calibri"/>
+              </a:rPr>
+              <a:t>–   </a:t>
+            </a:r>
+            <a:r>
+              <a:rPr sz="2000" b="1" i="0">
+                <a:solidFill>
+                  <a:srgbClr val="333333"/>
+                </a:solidFill>
+                <a:latin typeface="Calibri"/>
+              </a:rPr>
+              <a:t>Exito:</a:t>
+            </a:r>
+            <a:r>
+              <a:rPr sz="2000" b="0" i="0">
+                <a:solidFill>
+                  <a:srgbClr val="333333"/>
+                </a:solidFill>
+                <a:latin typeface="Calibri"/>
+              </a:rPr>
+              <a:t> Resumen.</a:t>
+            </a:r>
+          </a:p>
+          <a:p>
+            <a:pPr>
+              <a:spcAft>
+                <a:spcPts val="800"/>
+              </a:spcAft>
+            </a:pPr>
+            <a:r>
+              <a:rPr sz="2000" b="0" i="0">
+                <a:solidFill>
+                  <a:srgbClr val="333333"/>
+                </a:solidFill>
+                <a:latin typeface="Calibri"/>
+              </a:rPr>
+              <a:t>–   </a:t>
+            </a:r>
+            <a:r>
+              <a:rPr sz="2000" b="1" i="0">
+                <a:solidFill>
+                  <a:srgbClr val="333333"/>
+                </a:solidFill>
+                <a:latin typeface="Calibri"/>
+              </a:rPr>
+              <a:t>Exito:</a:t>
+            </a:r>
+            <a:r>
+              <a:rPr sz="2000" b="0" i="0">
+                <a:solidFill>
+                  <a:srgbClr val="333333"/>
+                </a:solidFill>
+                <a:latin typeface="Calibri"/>
+              </a:rPr>
+              <a:t> 3 mejoras.</a:t>
+            </a:r>
+          </a:p>
+          <a:p>
+            <a:pPr>
+              <a:spcAft>
+                <a:spcPts val="800"/>
+              </a:spcAft>
+            </a:pPr>
+            <a:r>
+              <a:rPr sz="2000" b="0" i="0">
+                <a:solidFill>
+                  <a:srgbClr val="333333"/>
+                </a:solidFill>
+                <a:latin typeface="Calibri"/>
+              </a:rPr>
+              <a:t>–   </a:t>
+            </a:r>
+            <a:r>
+              <a:rPr sz="2000" b="1" i="0">
+                <a:solidFill>
+                  <a:srgbClr val="333333"/>
+                </a:solidFill>
+                <a:latin typeface="Calibri"/>
+              </a:rPr>
+              <a:t>Exito:</a:t>
+            </a:r>
+            <a:r>
+              <a:rPr sz="2000" b="0" i="0">
+                <a:solidFill>
+                  <a:srgbClr val="333333"/>
+                </a:solidFill>
+                <a:latin typeface="Calibri"/>
+              </a:rPr>
+              <a:t> Informe.</a:t>
+            </a:r>
+          </a:p>
+          <a:p>
+            <a:pPr>
+              <a:spcAft>
+                <a:spcPts val="800"/>
+              </a:spcAft>
+            </a:pPr>
+            <a:r>
+              <a:rPr sz="2000" b="0" i="0">
+                <a:solidFill>
+                  <a:srgbClr val="333333"/>
+                </a:solidFill>
+                <a:latin typeface="Calibri"/>
+              </a:rPr>
+              <a:t>–   </a:t>
+            </a:r>
+            <a:r>
+              <a:rPr sz="2000" b="1" i="0">
+                <a:solidFill>
+                  <a:srgbClr val="333333"/>
+                </a:solidFill>
+                <a:latin typeface="Calibri"/>
+              </a:rPr>
+              <a:t>Exito:</a:t>
+            </a:r>
+            <a:r>
+              <a:rPr sz="2000" b="0" i="0">
+                <a:solidFill>
+                  <a:srgbClr val="333333"/>
+                </a:solidFill>
+                <a:latin typeface="Calibri"/>
+              </a:rPr>
+              <a:t> en la fecha que indique el docente.</a:t>
             </a:r>
           </a:p>
         </p:txBody>
@@ -8321,111 +8210,21 @@
                 </a:solidFill>
                 <a:latin typeface="Calibri"/>
               </a:rPr>
-              <a:t>Actividad autonoma — pasos guiados</a:t>
-            </a:r>
-          </a:p>
-        </p:txBody>
-      </p:sp>
-      <p:sp>
-        <p:nvSpPr>
-          <p:cNvPr id="5" name="Rounded Rectangle 4"/>
-          <p:cNvSpPr/>
-          <p:nvPr/>
-        </p:nvSpPr>
-        <p:spPr>
-          <a:xfrm>
-            <a:off x="457200" y="1554480"/>
-            <a:ext cx="11277295" cy="1051560"/>
-          </a:xfrm>
-          <a:prstGeom prst="roundRect">
-            <a:avLst>
-              <a:gd name="adj" fmla="val 12000"/>
-            </a:avLst>
-          </a:prstGeom>
-          <a:solidFill>
-            <a:srgbClr val="F2F2F2"/>
-          </a:solidFill>
-          <a:ln>
-            <a:noFill/>
-          </a:ln>
-        </p:spPr>
-        <p:style>
-          <a:lnRef idx="1">
-            <a:schemeClr val="accent1"/>
-          </a:lnRef>
-          <a:fillRef idx="3">
-            <a:schemeClr val="accent1"/>
-          </a:fillRef>
-          <a:effectRef idx="2">
-            <a:schemeClr val="accent1"/>
-          </a:effectRef>
-          <a:fontRef idx="minor">
-            <a:schemeClr val="lt1"/>
-          </a:fontRef>
-        </p:style>
-        <p:txBody>
-          <a:bodyPr rtlCol="0" anchor="ctr"/>
-          <a:lstStyle/>
-          <a:p>
-            <a:pPr algn="ctr"/>
-          </a:p>
-        </p:txBody>
-      </p:sp>
-      <p:sp>
-        <p:nvSpPr>
-          <p:cNvPr id="6" name="Rounded Rectangle 5"/>
-          <p:cNvSpPr/>
-          <p:nvPr/>
-        </p:nvSpPr>
-        <p:spPr>
-          <a:xfrm>
-            <a:off x="594360" y="1860804"/>
-            <a:ext cx="438912" cy="438912"/>
-          </a:xfrm>
-          <a:prstGeom prst="roundRect">
-            <a:avLst>
-              <a:gd name="adj" fmla="val 12000"/>
-            </a:avLst>
-          </a:prstGeom>
-          <a:solidFill>
-            <a:srgbClr val="095292"/>
-          </a:solidFill>
-          <a:ln>
-            <a:noFill/>
-          </a:ln>
-        </p:spPr>
-        <p:style>
-          <a:lnRef idx="1">
-            <a:schemeClr val="accent1"/>
-          </a:lnRef>
-          <a:fillRef idx="3">
-            <a:schemeClr val="accent1"/>
-          </a:fillRef>
-          <a:effectRef idx="2">
-            <a:schemeClr val="accent1"/>
-          </a:effectRef>
-          <a:fontRef idx="minor">
-            <a:schemeClr val="lt1"/>
-          </a:fontRef>
-        </p:style>
-        <p:txBody>
-          <a:bodyPr rtlCol="0" anchor="ctr"/>
-          <a:lstStyle/>
-          <a:p>
-            <a:pPr algn="ctr"/>
-          </a:p>
-        </p:txBody>
-      </p:sp>
-      <p:sp>
-        <p:nvSpPr>
-          <p:cNvPr id="7" name="TextBox 6"/>
+              <a:t>Actividad autonoma — escenario / datos de partida</a:t>
+            </a:r>
+          </a:p>
+        </p:txBody>
+      </p:sp>
+      <p:sp>
+        <p:nvSpPr>
+          <p:cNvPr id="5" name="TextBox 4"/>
           <p:cNvSpPr txBox="1"/>
           <p:nvPr/>
         </p:nvSpPr>
         <p:spPr>
           <a:xfrm>
-            <a:off x="594360" y="1860804"/>
-            <a:ext cx="438912" cy="438912"/>
+            <a:off x="457200" y="1170432"/>
+            <a:ext cx="11277295" cy="5230368"/>
           </a:xfrm>
           <a:prstGeom prst="rect">
             <a:avLst/>
@@ -8433,522 +8232,31 @@
           <a:noFill/>
         </p:spPr>
         <p:txBody>
-          <a:bodyPr wrap="square" anchor="ctr"/>
-          <a:lstStyle/>
-          <a:p>
-            <a:pPr algn="ctr"/>
-            <a:r>
-              <a:rPr sz="1600" b="1" i="0">
-                <a:solidFill>
-                  <a:srgbClr val="FFFFFF"/>
-                </a:solidFill>
-                <a:latin typeface="Calibri"/>
-              </a:rPr>
-              <a:t>1</a:t>
-            </a:r>
-          </a:p>
-        </p:txBody>
-      </p:sp>
-      <p:sp>
-        <p:nvSpPr>
-          <p:cNvPr id="8" name="TextBox 7"/>
-          <p:cNvSpPr txBox="1"/>
-          <p:nvPr/>
-        </p:nvSpPr>
-        <p:spPr>
-          <a:xfrm>
-            <a:off x="1188720" y="1645920"/>
-            <a:ext cx="10271455" cy="886968"/>
-          </a:xfrm>
-          <a:prstGeom prst="rect">
-            <a:avLst/>
-          </a:prstGeom>
-          <a:noFill/>
-        </p:spPr>
-        <p:txBody>
-          <a:bodyPr wrap="square" anchor="ctr"/>
-          <a:lstStyle/>
-          <a:p>
-            <a:r>
-              <a:rPr sz="1500" b="1" i="0">
-                <a:solidFill>
-                  <a:srgbClr val="095292"/>
-                </a:solidFill>
-                <a:latin typeface="Calibri"/>
-              </a:rPr>
-              <a:t>Elegir 1 caso (backup, rendimiento o seguridad).</a:t>
-            </a:r>
-          </a:p>
-        </p:txBody>
-      </p:sp>
-      <p:sp>
-        <p:nvSpPr>
-          <p:cNvPr id="9" name="Rounded Rectangle 8"/>
-          <p:cNvSpPr/>
-          <p:nvPr/>
-        </p:nvSpPr>
-        <p:spPr>
-          <a:xfrm>
-            <a:off x="457200" y="2697480"/>
-            <a:ext cx="11277295" cy="1051560"/>
-          </a:xfrm>
-          <a:prstGeom prst="roundRect">
-            <a:avLst>
-              <a:gd name="adj" fmla="val 12000"/>
-            </a:avLst>
-          </a:prstGeom>
-          <a:solidFill>
-            <a:srgbClr val="E8F4FA"/>
-          </a:solidFill>
-          <a:ln>
-            <a:noFill/>
-          </a:ln>
-        </p:spPr>
-        <p:style>
-          <a:lnRef idx="1">
-            <a:schemeClr val="accent1"/>
-          </a:lnRef>
-          <a:fillRef idx="3">
-            <a:schemeClr val="accent1"/>
-          </a:fillRef>
-          <a:effectRef idx="2">
-            <a:schemeClr val="accent1"/>
-          </a:effectRef>
-          <a:fontRef idx="minor">
-            <a:schemeClr val="lt1"/>
-          </a:fontRef>
-        </p:style>
-        <p:txBody>
-          <a:bodyPr rtlCol="0" anchor="ctr"/>
-          <a:lstStyle/>
-          <a:p>
-            <a:pPr algn="ctr"/>
-          </a:p>
-        </p:txBody>
-      </p:sp>
-      <p:sp>
-        <p:nvSpPr>
-          <p:cNvPr id="10" name="Rounded Rectangle 9"/>
-          <p:cNvSpPr/>
-          <p:nvPr/>
-        </p:nvSpPr>
-        <p:spPr>
-          <a:xfrm>
-            <a:off x="594360" y="3003804"/>
-            <a:ext cx="438912" cy="438912"/>
-          </a:xfrm>
-          <a:prstGeom prst="roundRect">
-            <a:avLst>
-              <a:gd name="adj" fmla="val 12000"/>
-            </a:avLst>
-          </a:prstGeom>
-          <a:solidFill>
-            <a:srgbClr val="095292"/>
-          </a:solidFill>
-          <a:ln>
-            <a:noFill/>
-          </a:ln>
-        </p:spPr>
-        <p:style>
-          <a:lnRef idx="1">
-            <a:schemeClr val="accent1"/>
-          </a:lnRef>
-          <a:fillRef idx="3">
-            <a:schemeClr val="accent1"/>
-          </a:fillRef>
-          <a:effectRef idx="2">
-            <a:schemeClr val="accent1"/>
-          </a:effectRef>
-          <a:fontRef idx="minor">
-            <a:schemeClr val="lt1"/>
-          </a:fontRef>
-        </p:style>
-        <p:txBody>
-          <a:bodyPr rtlCol="0" anchor="ctr"/>
-          <a:lstStyle/>
-          <a:p>
-            <a:pPr algn="ctr"/>
-          </a:p>
-        </p:txBody>
-      </p:sp>
-      <p:sp>
-        <p:nvSpPr>
-          <p:cNvPr id="11" name="TextBox 10"/>
-          <p:cNvSpPr txBox="1"/>
-          <p:nvPr/>
-        </p:nvSpPr>
-        <p:spPr>
-          <a:xfrm>
-            <a:off x="594360" y="3003804"/>
-            <a:ext cx="438912" cy="438912"/>
-          </a:xfrm>
-          <a:prstGeom prst="rect">
-            <a:avLst/>
-          </a:prstGeom>
-          <a:noFill/>
-        </p:spPr>
-        <p:txBody>
-          <a:bodyPr wrap="square" anchor="ctr"/>
-          <a:lstStyle/>
-          <a:p>
-            <a:pPr algn="ctr"/>
-            <a:r>
-              <a:rPr sz="1600" b="1" i="0">
-                <a:solidFill>
-                  <a:srgbClr val="FFFFFF"/>
-                </a:solidFill>
-                <a:latin typeface="Calibri"/>
-              </a:rPr>
-              <a:t>2</a:t>
-            </a:r>
-          </a:p>
-        </p:txBody>
-      </p:sp>
-      <p:sp>
-        <p:nvSpPr>
-          <p:cNvPr id="12" name="TextBox 11"/>
-          <p:cNvSpPr txBox="1"/>
-          <p:nvPr/>
-        </p:nvSpPr>
-        <p:spPr>
-          <a:xfrm>
-            <a:off x="1188720" y="2788920"/>
-            <a:ext cx="10271455" cy="886968"/>
-          </a:xfrm>
-          <a:prstGeom prst="rect">
-            <a:avLst/>
-          </a:prstGeom>
-          <a:noFill/>
-        </p:spPr>
-        <p:txBody>
-          <a:bodyPr wrap="square" anchor="ctr"/>
-          <a:lstStyle/>
-          <a:p>
-            <a:r>
-              <a:rPr sz="1500" b="1" i="0">
-                <a:solidFill>
-                  <a:srgbClr val="095292"/>
-                </a:solidFill>
-                <a:latin typeface="Calibri"/>
-              </a:rPr>
-              <a:t>Resumir en media pagina que paso.</a:t>
-            </a:r>
-          </a:p>
-        </p:txBody>
-      </p:sp>
-      <p:sp>
-        <p:nvSpPr>
-          <p:cNvPr id="13" name="Rounded Rectangle 12"/>
-          <p:cNvSpPr/>
-          <p:nvPr/>
-        </p:nvSpPr>
-        <p:spPr>
-          <a:xfrm>
-            <a:off x="457200" y="3840480"/>
-            <a:ext cx="11277295" cy="1051560"/>
-          </a:xfrm>
-          <a:prstGeom prst="roundRect">
-            <a:avLst>
-              <a:gd name="adj" fmla="val 12000"/>
-            </a:avLst>
-          </a:prstGeom>
-          <a:solidFill>
-            <a:srgbClr val="F2F2F2"/>
-          </a:solidFill>
-          <a:ln>
-            <a:noFill/>
-          </a:ln>
-        </p:spPr>
-        <p:style>
-          <a:lnRef idx="1">
-            <a:schemeClr val="accent1"/>
-          </a:lnRef>
-          <a:fillRef idx="3">
-            <a:schemeClr val="accent1"/>
-          </a:fillRef>
-          <a:effectRef idx="2">
-            <a:schemeClr val="accent1"/>
-          </a:effectRef>
-          <a:fontRef idx="minor">
-            <a:schemeClr val="lt1"/>
-          </a:fontRef>
-        </p:style>
-        <p:txBody>
-          <a:bodyPr rtlCol="0" anchor="ctr"/>
-          <a:lstStyle/>
-          <a:p>
-            <a:pPr algn="ctr"/>
-          </a:p>
-        </p:txBody>
-      </p:sp>
-      <p:sp>
-        <p:nvSpPr>
-          <p:cNvPr id="14" name="Rounded Rectangle 13"/>
-          <p:cNvSpPr/>
-          <p:nvPr/>
-        </p:nvSpPr>
-        <p:spPr>
-          <a:xfrm>
-            <a:off x="594360" y="4146804"/>
-            <a:ext cx="438912" cy="438912"/>
-          </a:xfrm>
-          <a:prstGeom prst="roundRect">
-            <a:avLst>
-              <a:gd name="adj" fmla="val 12000"/>
-            </a:avLst>
-          </a:prstGeom>
-          <a:solidFill>
-            <a:srgbClr val="095292"/>
-          </a:solidFill>
-          <a:ln>
-            <a:noFill/>
-          </a:ln>
-        </p:spPr>
-        <p:style>
-          <a:lnRef idx="1">
-            <a:schemeClr val="accent1"/>
-          </a:lnRef>
-          <a:fillRef idx="3">
-            <a:schemeClr val="accent1"/>
-          </a:fillRef>
-          <a:effectRef idx="2">
-            <a:schemeClr val="accent1"/>
-          </a:effectRef>
-          <a:fontRef idx="minor">
-            <a:schemeClr val="lt1"/>
-          </a:fontRef>
-        </p:style>
-        <p:txBody>
-          <a:bodyPr rtlCol="0" anchor="ctr"/>
-          <a:lstStyle/>
-          <a:p>
-            <a:pPr algn="ctr"/>
-          </a:p>
-        </p:txBody>
-      </p:sp>
-      <p:sp>
-        <p:nvSpPr>
-          <p:cNvPr id="15" name="TextBox 14"/>
-          <p:cNvSpPr txBox="1"/>
-          <p:nvPr/>
-        </p:nvSpPr>
-        <p:spPr>
-          <a:xfrm>
-            <a:off x="594360" y="4146804"/>
-            <a:ext cx="438912" cy="438912"/>
-          </a:xfrm>
-          <a:prstGeom prst="rect">
-            <a:avLst/>
-          </a:prstGeom>
-          <a:noFill/>
-        </p:spPr>
-        <p:txBody>
-          <a:bodyPr wrap="square" anchor="ctr"/>
-          <a:lstStyle/>
-          <a:p>
-            <a:pPr algn="ctr"/>
-            <a:r>
-              <a:rPr sz="1600" b="1" i="0">
-                <a:solidFill>
-                  <a:srgbClr val="FFFFFF"/>
-                </a:solidFill>
-                <a:latin typeface="Calibri"/>
-              </a:rPr>
-              <a:t>3</a:t>
-            </a:r>
-          </a:p>
-        </p:txBody>
-      </p:sp>
-      <p:sp>
-        <p:nvSpPr>
-          <p:cNvPr id="16" name="TextBox 15"/>
-          <p:cNvSpPr txBox="1"/>
-          <p:nvPr/>
-        </p:nvSpPr>
-        <p:spPr>
-          <a:xfrm>
-            <a:off x="1188720" y="3931920"/>
-            <a:ext cx="10271455" cy="886968"/>
-          </a:xfrm>
-          <a:prstGeom prst="rect">
-            <a:avLst/>
-          </a:prstGeom>
-          <a:noFill/>
-        </p:spPr>
-        <p:txBody>
-          <a:bodyPr wrap="square" anchor="ctr"/>
-          <a:lstStyle/>
-          <a:p>
-            <a:r>
-              <a:rPr sz="1500" b="1" i="0">
-                <a:solidFill>
-                  <a:srgbClr val="095292"/>
-                </a:solidFill>
-                <a:latin typeface="Calibri"/>
-              </a:rPr>
-              <a:t>Proponer 3 mejoras concretas a su VetCare.</a:t>
-            </a:r>
-          </a:p>
-        </p:txBody>
-      </p:sp>
-      <p:sp>
-        <p:nvSpPr>
-          <p:cNvPr id="17" name="Rounded Rectangle 16"/>
-          <p:cNvSpPr/>
-          <p:nvPr/>
-        </p:nvSpPr>
-        <p:spPr>
-          <a:xfrm>
-            <a:off x="457200" y="4983480"/>
-            <a:ext cx="11277295" cy="1051560"/>
-          </a:xfrm>
-          <a:prstGeom prst="roundRect">
-            <a:avLst>
-              <a:gd name="adj" fmla="val 12000"/>
-            </a:avLst>
-          </a:prstGeom>
-          <a:solidFill>
-            <a:srgbClr val="E8F4FA"/>
-          </a:solidFill>
-          <a:ln>
-            <a:noFill/>
-          </a:ln>
-        </p:spPr>
-        <p:style>
-          <a:lnRef idx="1">
-            <a:schemeClr val="accent1"/>
-          </a:lnRef>
-          <a:fillRef idx="3">
-            <a:schemeClr val="accent1"/>
-          </a:fillRef>
-          <a:effectRef idx="2">
-            <a:schemeClr val="accent1"/>
-          </a:effectRef>
-          <a:fontRef idx="minor">
-            <a:schemeClr val="lt1"/>
-          </a:fontRef>
-        </p:style>
-        <p:txBody>
-          <a:bodyPr rtlCol="0" anchor="ctr"/>
-          <a:lstStyle/>
-          <a:p>
-            <a:pPr algn="ctr"/>
-          </a:p>
-        </p:txBody>
-      </p:sp>
-      <p:sp>
-        <p:nvSpPr>
-          <p:cNvPr id="18" name="Rounded Rectangle 17"/>
-          <p:cNvSpPr/>
-          <p:nvPr/>
-        </p:nvSpPr>
-        <p:spPr>
-          <a:xfrm>
-            <a:off x="594360" y="5289804"/>
-            <a:ext cx="438912" cy="438912"/>
-          </a:xfrm>
-          <a:prstGeom prst="roundRect">
-            <a:avLst>
-              <a:gd name="adj" fmla="val 12000"/>
-            </a:avLst>
-          </a:prstGeom>
-          <a:solidFill>
-            <a:srgbClr val="095292"/>
-          </a:solidFill>
-          <a:ln>
-            <a:noFill/>
-          </a:ln>
-        </p:spPr>
-        <p:style>
-          <a:lnRef idx="1">
-            <a:schemeClr val="accent1"/>
-          </a:lnRef>
-          <a:fillRef idx="3">
-            <a:schemeClr val="accent1"/>
-          </a:fillRef>
-          <a:effectRef idx="2">
-            <a:schemeClr val="accent1"/>
-          </a:effectRef>
-          <a:fontRef idx="minor">
-            <a:schemeClr val="lt1"/>
-          </a:fontRef>
-        </p:style>
-        <p:txBody>
-          <a:bodyPr rtlCol="0" anchor="ctr"/>
-          <a:lstStyle/>
-          <a:p>
-            <a:pPr algn="ctr"/>
-          </a:p>
-        </p:txBody>
-      </p:sp>
-      <p:sp>
-        <p:nvSpPr>
-          <p:cNvPr id="19" name="TextBox 18"/>
-          <p:cNvSpPr txBox="1"/>
-          <p:nvPr/>
-        </p:nvSpPr>
-        <p:spPr>
-          <a:xfrm>
-            <a:off x="594360" y="5289804"/>
-            <a:ext cx="438912" cy="438912"/>
-          </a:xfrm>
-          <a:prstGeom prst="rect">
-            <a:avLst/>
-          </a:prstGeom>
-          <a:noFill/>
-        </p:spPr>
-        <p:txBody>
-          <a:bodyPr wrap="square" anchor="ctr"/>
-          <a:lstStyle/>
-          <a:p>
-            <a:pPr algn="ctr"/>
-            <a:r>
-              <a:rPr sz="1600" b="1" i="0">
-                <a:solidFill>
-                  <a:srgbClr val="FFFFFF"/>
-                </a:solidFill>
-                <a:latin typeface="Calibri"/>
-              </a:rPr>
-              <a:t>4</a:t>
-            </a:r>
-          </a:p>
-        </p:txBody>
-      </p:sp>
-      <p:sp>
-        <p:nvSpPr>
-          <p:cNvPr id="20" name="TextBox 19"/>
-          <p:cNvSpPr txBox="1"/>
-          <p:nvPr/>
-        </p:nvSpPr>
-        <p:spPr>
-          <a:xfrm>
-            <a:off x="1188720" y="5074920"/>
-            <a:ext cx="10271455" cy="886968"/>
-          </a:xfrm>
-          <a:prstGeom prst="rect">
-            <a:avLst/>
-          </a:prstGeom>
-          <a:noFill/>
-        </p:spPr>
-        <p:txBody>
-          <a:bodyPr wrap="square" anchor="ctr"/>
-          <a:lstStyle/>
-          <a:p>
-            <a:r>
-              <a:rPr sz="1500" b="1" i="0">
-                <a:solidFill>
-                  <a:srgbClr val="095292"/>
-                </a:solidFill>
-                <a:latin typeface="Calibri"/>
-              </a:rPr>
-              <a:t>Actualizar informe PI con lecciones de casos.</a:t>
-            </a:r>
-          </a:p>
-        </p:txBody>
-      </p:sp>
-      <p:sp>
-        <p:nvSpPr>
-          <p:cNvPr id="21" name="TextBox 20"/>
+          <a:bodyPr wrap="square">
+            <a:spAutoFit/>
+          </a:bodyPr>
+          <a:lstStyle/>
+          <a:p>
+            <a:pPr>
+              <a:spcAft>
+                <a:spcPts val="800"/>
+              </a:spcAft>
+            </a:pPr>
+            <a:r>
+              <a:rPr sz="2000" b="0" i="0">
+                <a:solidFill>
+                  <a:srgbClr val="333333"/>
+                </a:solidFill>
+                <a:latin typeface="Calibri"/>
+              </a:rPr>
+              <a:t>–   Plantilla: contexto-&gt;fallo-&gt;lección-&gt;cambio.</a:t>
+            </a:r>
+          </a:p>
+        </p:txBody>
+      </p:sp>
+      <p:sp>
+        <p:nvSpPr>
+          <p:cNvPr id="6" name="TextBox 5"/>
           <p:cNvSpPr txBox="1"/>
           <p:nvPr/>
         </p:nvSpPr>
@@ -9122,7 +8430,7 @@
                 </a:solidFill>
                 <a:latin typeface="Calibri"/>
               </a:rPr>
-              <a:t>Actividad autonoma — pistas (checklist vacio)</a:t>
+              <a:t>Actividad autonoma — pasos guiados</a:t>
             </a:r>
           </a:p>
         </p:txBody>
@@ -9135,8 +8443,8 @@
         </p:nvSpPr>
         <p:spPr>
           <a:xfrm>
-            <a:off x="457200" y="1261872"/>
-            <a:ext cx="11277295" cy="566928"/>
+            <a:off x="457200" y="1554480"/>
+            <a:ext cx="11277295" cy="1051560"/>
           </a:xfrm>
           <a:prstGeom prst="roundRect">
             <a:avLst>
@@ -9174,25 +8482,25 @@
       </p:sp>
       <p:sp>
         <p:nvSpPr>
-          <p:cNvPr id="6" name="Rectangle 5"/>
+          <p:cNvPr id="6" name="Rounded Rectangle 5"/>
           <p:cNvSpPr/>
           <p:nvPr/>
         </p:nvSpPr>
         <p:spPr>
           <a:xfrm>
-            <a:off x="640080" y="1408175"/>
-            <a:ext cx="274320" cy="274320"/>
-          </a:xfrm>
-          <a:prstGeom prst="rect">
-            <a:avLst/>
+            <a:off x="594360" y="1860804"/>
+            <a:ext cx="438912" cy="438912"/>
+          </a:xfrm>
+          <a:prstGeom prst="roundRect">
+            <a:avLst>
+              <a:gd name="adj" fmla="val 12000"/>
+            </a:avLst>
           </a:prstGeom>
           <a:solidFill>
-            <a:srgbClr val="FFFFFF"/>
+            <a:srgbClr val="095292"/>
           </a:solidFill>
           <a:ln>
-            <a:solidFill>
-              <a:srgbClr val="333333"/>
-            </a:solidFill>
+            <a:noFill/>
           </a:ln>
         </p:spPr>
         <p:style>
@@ -9219,20 +8527,87 @@
       </p:sp>
       <p:sp>
         <p:nvSpPr>
-          <p:cNvPr id="7" name="Rectangle 6"/>
+          <p:cNvPr id="7" name="TextBox 6"/>
+          <p:cNvSpPr txBox="1"/>
+          <p:nvPr/>
+        </p:nvSpPr>
+        <p:spPr>
+          <a:xfrm>
+            <a:off x="594360" y="1860804"/>
+            <a:ext cx="438912" cy="438912"/>
+          </a:xfrm>
+          <a:prstGeom prst="rect">
+            <a:avLst/>
+          </a:prstGeom>
+          <a:noFill/>
+        </p:spPr>
+        <p:txBody>
+          <a:bodyPr wrap="square" anchor="ctr"/>
+          <a:lstStyle/>
+          <a:p>
+            <a:pPr algn="ctr"/>
+            <a:r>
+              <a:rPr sz="1600" b="1" i="0">
+                <a:solidFill>
+                  <a:srgbClr val="FFFFFF"/>
+                </a:solidFill>
+                <a:latin typeface="Calibri"/>
+              </a:rPr>
+              <a:t>1</a:t>
+            </a:r>
+          </a:p>
+        </p:txBody>
+      </p:sp>
+      <p:sp>
+        <p:nvSpPr>
+          <p:cNvPr id="8" name="TextBox 7"/>
+          <p:cNvSpPr txBox="1"/>
+          <p:nvPr/>
+        </p:nvSpPr>
+        <p:spPr>
+          <a:xfrm>
+            <a:off x="1188720" y="1645920"/>
+            <a:ext cx="10271455" cy="886968"/>
+          </a:xfrm>
+          <a:prstGeom prst="rect">
+            <a:avLst/>
+          </a:prstGeom>
+          <a:noFill/>
+        </p:spPr>
+        <p:txBody>
+          <a:bodyPr wrap="square" anchor="ctr"/>
+          <a:lstStyle/>
+          <a:p>
+            <a:r>
+              <a:rPr sz="1500" b="1" i="0">
+                <a:solidFill>
+                  <a:srgbClr val="095292"/>
+                </a:solidFill>
+                <a:latin typeface="Calibri"/>
+              </a:rPr>
+              <a:t>Elegir 1 caso (backup, rendimiento o seguridad).</a:t>
+            </a:r>
+          </a:p>
+        </p:txBody>
+      </p:sp>
+      <p:sp>
+        <p:nvSpPr>
+          <p:cNvPr id="9" name="Rounded Rectangle 8"/>
           <p:cNvSpPr/>
           <p:nvPr/>
         </p:nvSpPr>
         <p:spPr>
           <a:xfrm>
-            <a:off x="640080" y="1408175"/>
-            <a:ext cx="73152" cy="274320"/>
-          </a:xfrm>
-          <a:prstGeom prst="rect">
-            <a:avLst/>
+            <a:off x="457200" y="2697480"/>
+            <a:ext cx="11277295" cy="1051560"/>
+          </a:xfrm>
+          <a:prstGeom prst="roundRect">
+            <a:avLst>
+              <a:gd name="adj" fmla="val 12000"/>
+            </a:avLst>
           </a:prstGeom>
           <a:solidFill>
-            <a:srgbClr val="269CCB"/>
+            <a:srgbClr val="E8F4FA"/>
           </a:solidFill>
           <a:ln>
             <a:noFill/>
@@ -9262,14 +8637,59 @@
       </p:sp>
       <p:sp>
         <p:nvSpPr>
-          <p:cNvPr id="8" name="TextBox 7"/>
+          <p:cNvPr id="10" name="Rounded Rectangle 9"/>
+          <p:cNvSpPr/>
+          <p:nvPr/>
+        </p:nvSpPr>
+        <p:spPr>
+          <a:xfrm>
+            <a:off x="594360" y="3003804"/>
+            <a:ext cx="438912" cy="438912"/>
+          </a:xfrm>
+          <a:prstGeom prst="roundRect">
+            <a:avLst>
+              <a:gd name="adj" fmla="val 12000"/>
+            </a:avLst>
+          </a:prstGeom>
+          <a:solidFill>
+            <a:srgbClr val="095292"/>
+          </a:solidFill>
+          <a:ln>
+            <a:noFill/>
+          </a:ln>
+        </p:spPr>
+        <p:style>
+          <a:lnRef idx="1">
+            <a:schemeClr val="accent1"/>
+          </a:lnRef>
+          <a:fillRef idx="3">
+            <a:schemeClr val="accent1"/>
+          </a:fillRef>
+          <a:effectRef idx="2">
+            <a:schemeClr val="accent1"/>
+          </a:effectRef>
+          <a:fontRef idx="minor">
+            <a:schemeClr val="lt1"/>
+          </a:fontRef>
+        </p:style>
+        <p:txBody>
+          <a:bodyPr rtlCol="0" anchor="ctr"/>
+          <a:lstStyle/>
+          <a:p>
+            <a:pPr algn="ctr"/>
+          </a:p>
+        </p:txBody>
+      </p:sp>
+      <p:sp>
+        <p:nvSpPr>
+          <p:cNvPr id="11" name="TextBox 10"/>
           <p:cNvSpPr txBox="1"/>
           <p:nvPr/>
         </p:nvSpPr>
         <p:spPr>
           <a:xfrm>
-            <a:off x="1097280" y="1353312"/>
-            <a:ext cx="10362895" cy="402336"/>
+            <a:off x="594360" y="3003804"/>
+            <a:ext cx="438912" cy="438912"/>
           </a:xfrm>
           <a:prstGeom prst="rect">
             <a:avLst/>
@@ -9280,28 +8700,61 @@
           <a:bodyPr wrap="square" anchor="ctr"/>
           <a:lstStyle/>
           <a:p>
-            <a:r>
-              <a:rPr sz="1500" b="0" i="0">
-                <a:solidFill>
-                  <a:srgbClr val="333333"/>
-                </a:solidFill>
-                <a:latin typeface="Calibri"/>
-              </a:rPr>
-              <a:t>□ Mejoras accionables?</a:t>
-            </a:r>
-          </a:p>
-        </p:txBody>
-      </p:sp>
-      <p:sp>
-        <p:nvSpPr>
-          <p:cNvPr id="9" name="Rounded Rectangle 8"/>
+            <a:pPr algn="ctr"/>
+            <a:r>
+              <a:rPr sz="1600" b="1" i="0">
+                <a:solidFill>
+                  <a:srgbClr val="FFFFFF"/>
+                </a:solidFill>
+                <a:latin typeface="Calibri"/>
+              </a:rPr>
+              <a:t>2</a:t>
+            </a:r>
+          </a:p>
+        </p:txBody>
+      </p:sp>
+      <p:sp>
+        <p:nvSpPr>
+          <p:cNvPr id="12" name="TextBox 11"/>
+          <p:cNvSpPr txBox="1"/>
+          <p:nvPr/>
+        </p:nvSpPr>
+        <p:spPr>
+          <a:xfrm>
+            <a:off x="1188720" y="2788920"/>
+            <a:ext cx="10271455" cy="886968"/>
+          </a:xfrm>
+          <a:prstGeom prst="rect">
+            <a:avLst/>
+          </a:prstGeom>
+          <a:noFill/>
+        </p:spPr>
+        <p:txBody>
+          <a:bodyPr wrap="square" anchor="ctr"/>
+          <a:lstStyle/>
+          <a:p>
+            <a:r>
+              <a:rPr sz="1500" b="1" i="0">
+                <a:solidFill>
+                  <a:srgbClr val="095292"/>
+                </a:solidFill>
+                <a:latin typeface="Calibri"/>
+              </a:rPr>
+              <a:t>Resumir en media pagina que paso.</a:t>
+            </a:r>
+          </a:p>
+        </p:txBody>
+      </p:sp>
+      <p:sp>
+        <p:nvSpPr>
+          <p:cNvPr id="13" name="Rounded Rectangle 12"/>
           <p:cNvSpPr/>
           <p:nvPr/>
         </p:nvSpPr>
         <p:spPr>
           <a:xfrm>
-            <a:off x="457200" y="1938528"/>
-            <a:ext cx="11277295" cy="566928"/>
+            <a:off x="457200" y="3840480"/>
+            <a:ext cx="11277295" cy="1051560"/>
           </a:xfrm>
           <a:prstGeom prst="roundRect">
             <a:avLst>
@@ -9339,25 +8792,25 @@
       </p:sp>
       <p:sp>
         <p:nvSpPr>
-          <p:cNvPr id="10" name="Rectangle 9"/>
+          <p:cNvPr id="14" name="Rounded Rectangle 13"/>
           <p:cNvSpPr/>
           <p:nvPr/>
         </p:nvSpPr>
         <p:spPr>
           <a:xfrm>
-            <a:off x="640080" y="2084832"/>
-            <a:ext cx="274320" cy="274320"/>
-          </a:xfrm>
-          <a:prstGeom prst="rect">
-            <a:avLst/>
+            <a:off x="594360" y="4146804"/>
+            <a:ext cx="438912" cy="438912"/>
+          </a:xfrm>
+          <a:prstGeom prst="roundRect">
+            <a:avLst>
+              <a:gd name="adj" fmla="val 12000"/>
+            </a:avLst>
           </a:prstGeom>
           <a:solidFill>
-            <a:srgbClr val="FFFFFF"/>
+            <a:srgbClr val="095292"/>
           </a:solidFill>
           <a:ln>
-            <a:solidFill>
-              <a:srgbClr val="333333"/>
-            </a:solidFill>
+            <a:noFill/>
           </a:ln>
         </p:spPr>
         <p:style>
@@ -9384,20 +8837,87 @@
       </p:sp>
       <p:sp>
         <p:nvSpPr>
-          <p:cNvPr id="11" name="Rectangle 10"/>
+          <p:cNvPr id="15" name="TextBox 14"/>
+          <p:cNvSpPr txBox="1"/>
+          <p:nvPr/>
+        </p:nvSpPr>
+        <p:spPr>
+          <a:xfrm>
+            <a:off x="594360" y="4146804"/>
+            <a:ext cx="438912" cy="438912"/>
+          </a:xfrm>
+          <a:prstGeom prst="rect">
+            <a:avLst/>
+          </a:prstGeom>
+          <a:noFill/>
+        </p:spPr>
+        <p:txBody>
+          <a:bodyPr wrap="square" anchor="ctr"/>
+          <a:lstStyle/>
+          <a:p>
+            <a:pPr algn="ctr"/>
+            <a:r>
+              <a:rPr sz="1600" b="1" i="0">
+                <a:solidFill>
+                  <a:srgbClr val="FFFFFF"/>
+                </a:solidFill>
+                <a:latin typeface="Calibri"/>
+              </a:rPr>
+              <a:t>3</a:t>
+            </a:r>
+          </a:p>
+        </p:txBody>
+      </p:sp>
+      <p:sp>
+        <p:nvSpPr>
+          <p:cNvPr id="16" name="TextBox 15"/>
+          <p:cNvSpPr txBox="1"/>
+          <p:nvPr/>
+        </p:nvSpPr>
+        <p:spPr>
+          <a:xfrm>
+            <a:off x="1188720" y="3931920"/>
+            <a:ext cx="10271455" cy="886968"/>
+          </a:xfrm>
+          <a:prstGeom prst="rect">
+            <a:avLst/>
+          </a:prstGeom>
+          <a:noFill/>
+        </p:spPr>
+        <p:txBody>
+          <a:bodyPr wrap="square" anchor="ctr"/>
+          <a:lstStyle/>
+          <a:p>
+            <a:r>
+              <a:rPr sz="1500" b="1" i="0">
+                <a:solidFill>
+                  <a:srgbClr val="095292"/>
+                </a:solidFill>
+                <a:latin typeface="Calibri"/>
+              </a:rPr>
+              <a:t>Proponer 3 mejoras concretas a su VetCare.</a:t>
+            </a:r>
+          </a:p>
+        </p:txBody>
+      </p:sp>
+      <p:sp>
+        <p:nvSpPr>
+          <p:cNvPr id="17" name="Rounded Rectangle 16"/>
           <p:cNvSpPr/>
           <p:nvPr/>
         </p:nvSpPr>
         <p:spPr>
           <a:xfrm>
-            <a:off x="640080" y="2084832"/>
-            <a:ext cx="73152" cy="274320"/>
-          </a:xfrm>
-          <a:prstGeom prst="rect">
-            <a:avLst/>
+            <a:off x="457200" y="4983480"/>
+            <a:ext cx="11277295" cy="1051560"/>
+          </a:xfrm>
+          <a:prstGeom prst="roundRect">
+            <a:avLst>
+              <a:gd name="adj" fmla="val 12000"/>
+            </a:avLst>
           </a:prstGeom>
           <a:solidFill>
-            <a:srgbClr val="269CCB"/>
+            <a:srgbClr val="E8F4FA"/>
           </a:solidFill>
           <a:ln>
             <a:noFill/>
@@ -9427,46 +8947,14 @@
       </p:sp>
       <p:sp>
         <p:nvSpPr>
-          <p:cNvPr id="12" name="TextBox 11"/>
-          <p:cNvSpPr txBox="1"/>
-          <p:nvPr/>
-        </p:nvSpPr>
-        <p:spPr>
-          <a:xfrm>
-            <a:off x="1097280" y="2029968"/>
-            <a:ext cx="10362895" cy="402336"/>
-          </a:xfrm>
-          <a:prstGeom prst="rect">
-            <a:avLst/>
-          </a:prstGeom>
-          <a:noFill/>
-        </p:spPr>
-        <p:txBody>
-          <a:bodyPr wrap="square" anchor="ctr"/>
-          <a:lstStyle/>
-          <a:p>
-            <a:r>
-              <a:rPr sz="1500" b="0" i="0">
-                <a:solidFill>
-                  <a:srgbClr val="333333"/>
-                </a:solidFill>
-                <a:latin typeface="Calibri"/>
-              </a:rPr>
-              <a:t>□ Conectan al PI?</a:t>
-            </a:r>
-          </a:p>
-        </p:txBody>
-      </p:sp>
-      <p:sp>
-        <p:nvSpPr>
-          <p:cNvPr id="13" name="Rounded Rectangle 12"/>
+          <p:cNvPr id="18" name="Rounded Rectangle 17"/>
           <p:cNvSpPr/>
           <p:nvPr/>
         </p:nvSpPr>
         <p:spPr>
           <a:xfrm>
-            <a:off x="457200" y="2615184"/>
-            <a:ext cx="11277295" cy="566928"/>
+            <a:off x="594360" y="5289804"/>
+            <a:ext cx="438912" cy="438912"/>
           </a:xfrm>
           <a:prstGeom prst="roundRect">
             <a:avLst>
@@ -9474,7 +8962,7 @@
             </a:avLst>
           </a:prstGeom>
           <a:solidFill>
-            <a:srgbClr val="F2F2F2"/>
+            <a:srgbClr val="095292"/>
           </a:solidFill>
           <a:ln>
             <a:noFill/>
@@ -9504,102 +8992,47 @@
       </p:sp>
       <p:sp>
         <p:nvSpPr>
-          <p:cNvPr id="14" name="Rectangle 13"/>
-          <p:cNvSpPr/>
-          <p:nvPr/>
-        </p:nvSpPr>
-        <p:spPr>
-          <a:xfrm>
-            <a:off x="640080" y="2761488"/>
-            <a:ext cx="274320" cy="274320"/>
-          </a:xfrm>
-          <a:prstGeom prst="rect">
-            <a:avLst/>
-          </a:prstGeom>
-          <a:solidFill>
-            <a:srgbClr val="FFFFFF"/>
-          </a:solidFill>
-          <a:ln>
-            <a:solidFill>
-              <a:srgbClr val="333333"/>
-            </a:solidFill>
-          </a:ln>
-        </p:spPr>
-        <p:style>
-          <a:lnRef idx="1">
-            <a:schemeClr val="accent1"/>
-          </a:lnRef>
-          <a:fillRef idx="3">
-            <a:schemeClr val="accent1"/>
-          </a:fillRef>
-          <a:effectRef idx="2">
-            <a:schemeClr val="accent1"/>
-          </a:effectRef>
-          <a:fontRef idx="minor">
-            <a:schemeClr val="lt1"/>
-          </a:fontRef>
-        </p:style>
-        <p:txBody>
-          <a:bodyPr rtlCol="0" anchor="ctr"/>
+          <p:cNvPr id="19" name="TextBox 18"/>
+          <p:cNvSpPr txBox="1"/>
+          <p:nvPr/>
+        </p:nvSpPr>
+        <p:spPr>
+          <a:xfrm>
+            <a:off x="594360" y="5289804"/>
+            <a:ext cx="438912" cy="438912"/>
+          </a:xfrm>
+          <a:prstGeom prst="rect">
+            <a:avLst/>
+          </a:prstGeom>
+          <a:noFill/>
+        </p:spPr>
+        <p:txBody>
+          <a:bodyPr wrap="square" anchor="ctr"/>
           <a:lstStyle/>
           <a:p>
             <a:pPr algn="ctr"/>
-          </a:p>
-        </p:txBody>
-      </p:sp>
-      <p:sp>
-        <p:nvSpPr>
-          <p:cNvPr id="15" name="Rectangle 14"/>
-          <p:cNvSpPr/>
-          <p:nvPr/>
-        </p:nvSpPr>
-        <p:spPr>
-          <a:xfrm>
-            <a:off x="640080" y="2761488"/>
-            <a:ext cx="73152" cy="274320"/>
-          </a:xfrm>
-          <a:prstGeom prst="rect">
-            <a:avLst/>
-          </a:prstGeom>
-          <a:solidFill>
-            <a:srgbClr val="269CCB"/>
-          </a:solidFill>
-          <a:ln>
-            <a:noFill/>
-          </a:ln>
-        </p:spPr>
-        <p:style>
-          <a:lnRef idx="1">
-            <a:schemeClr val="accent1"/>
-          </a:lnRef>
-          <a:fillRef idx="3">
-            <a:schemeClr val="accent1"/>
-          </a:fillRef>
-          <a:effectRef idx="2">
-            <a:schemeClr val="accent1"/>
-          </a:effectRef>
-          <a:fontRef idx="minor">
-            <a:schemeClr val="lt1"/>
-          </a:fontRef>
-        </p:style>
-        <p:txBody>
-          <a:bodyPr rtlCol="0" anchor="ctr"/>
-          <a:lstStyle/>
-          <a:p>
-            <a:pPr algn="ctr"/>
-          </a:p>
-        </p:txBody>
-      </p:sp>
-      <p:sp>
-        <p:nvSpPr>
-          <p:cNvPr id="16" name="TextBox 15"/>
+            <a:r>
+              <a:rPr sz="1600" b="1" i="0">
+                <a:solidFill>
+                  <a:srgbClr val="FFFFFF"/>
+                </a:solidFill>
+                <a:latin typeface="Calibri"/>
+              </a:rPr>
+              <a:t>4</a:t>
+            </a:r>
+          </a:p>
+        </p:txBody>
+      </p:sp>
+      <p:sp>
+        <p:nvSpPr>
+          <p:cNvPr id="20" name="TextBox 19"/>
           <p:cNvSpPr txBox="1"/>
           <p:nvPr/>
         </p:nvSpPr>
         <p:spPr>
           <a:xfrm>
-            <a:off x="1097280" y="2706624"/>
-            <a:ext cx="10362895" cy="402336"/>
+            <a:off x="1188720" y="5074920"/>
+            <a:ext cx="10271455" cy="886968"/>
           </a:xfrm>
           <a:prstGeom prst="rect">
             <a:avLst/>
@@ -9611,20 +9044,20 @@
           <a:lstStyle/>
           <a:p>
             <a:r>
-              <a:rPr sz="1500" b="0" i="0">
-                <a:solidFill>
-                  <a:srgbClr val="333333"/>
-                </a:solidFill>
-                <a:latin typeface="Calibri"/>
-              </a:rPr>
-              <a:t>□ Evidencia de lectura?</a:t>
-            </a:r>
-          </a:p>
-        </p:txBody>
-      </p:sp>
-      <p:sp>
-        <p:nvSpPr>
-          <p:cNvPr id="17" name="TextBox 16"/>
+              <a:rPr sz="1500" b="1" i="0">
+                <a:solidFill>
+                  <a:srgbClr val="095292"/>
+                </a:solidFill>
+                <a:latin typeface="Calibri"/>
+              </a:rPr>
+              <a:t>Actualizar informe PI con lecciones de casos.</a:t>
+            </a:r>
+          </a:p>
+        </p:txBody>
+      </p:sp>
+      <p:sp>
+        <p:nvSpPr>
+          <p:cNvPr id="21" name="TextBox 20"/>
           <p:cNvSpPr txBox="1"/>
           <p:nvPr/>
         </p:nvSpPr>
@@ -9798,21 +9231,154 @@
                 </a:solidFill>
                 <a:latin typeface="Calibri"/>
               </a:rPr>
-              <a:t>Criterios de exito / entregable</a:t>
-            </a:r>
-          </a:p>
-        </p:txBody>
-      </p:sp>
-      <p:sp>
-        <p:nvSpPr>
-          <p:cNvPr id="5" name="TextBox 4"/>
+              <a:t>Actividad autonoma — pistas (checklist vacio)</a:t>
+            </a:r>
+          </a:p>
+        </p:txBody>
+      </p:sp>
+      <p:sp>
+        <p:nvSpPr>
+          <p:cNvPr id="5" name="Rounded Rectangle 4"/>
+          <p:cNvSpPr/>
+          <p:nvPr/>
+        </p:nvSpPr>
+        <p:spPr>
+          <a:xfrm>
+            <a:off x="457200" y="1261872"/>
+            <a:ext cx="11277295" cy="566928"/>
+          </a:xfrm>
+          <a:prstGeom prst="roundRect">
+            <a:avLst>
+              <a:gd name="adj" fmla="val 12000"/>
+            </a:avLst>
+          </a:prstGeom>
+          <a:solidFill>
+            <a:srgbClr val="F2F2F2"/>
+          </a:solidFill>
+          <a:ln>
+            <a:noFill/>
+          </a:ln>
+        </p:spPr>
+        <p:style>
+          <a:lnRef idx="1">
+            <a:schemeClr val="accent1"/>
+          </a:lnRef>
+          <a:fillRef idx="3">
+            <a:schemeClr val="accent1"/>
+          </a:fillRef>
+          <a:effectRef idx="2">
+            <a:schemeClr val="accent1"/>
+          </a:effectRef>
+          <a:fontRef idx="minor">
+            <a:schemeClr val="lt1"/>
+          </a:fontRef>
+        </p:style>
+        <p:txBody>
+          <a:bodyPr rtlCol="0" anchor="ctr"/>
+          <a:lstStyle/>
+          <a:p>
+            <a:pPr algn="ctr"/>
+          </a:p>
+        </p:txBody>
+      </p:sp>
+      <p:sp>
+        <p:nvSpPr>
+          <p:cNvPr id="6" name="Rectangle 5"/>
+          <p:cNvSpPr/>
+          <p:nvPr/>
+        </p:nvSpPr>
+        <p:spPr>
+          <a:xfrm>
+            <a:off x="640080" y="1408175"/>
+            <a:ext cx="274320" cy="274320"/>
+          </a:xfrm>
+          <a:prstGeom prst="rect">
+            <a:avLst/>
+          </a:prstGeom>
+          <a:solidFill>
+            <a:srgbClr val="FFFFFF"/>
+          </a:solidFill>
+          <a:ln>
+            <a:solidFill>
+              <a:srgbClr val="333333"/>
+            </a:solidFill>
+          </a:ln>
+        </p:spPr>
+        <p:style>
+          <a:lnRef idx="1">
+            <a:schemeClr val="accent1"/>
+          </a:lnRef>
+          <a:fillRef idx="3">
+            <a:schemeClr val="accent1"/>
+          </a:fillRef>
+          <a:effectRef idx="2">
+            <a:schemeClr val="accent1"/>
+          </a:effectRef>
+          <a:fontRef idx="minor">
+            <a:schemeClr val="lt1"/>
+          </a:fontRef>
+        </p:style>
+        <p:txBody>
+          <a:bodyPr rtlCol="0" anchor="ctr"/>
+          <a:lstStyle/>
+          <a:p>
+            <a:pPr algn="ctr"/>
+          </a:p>
+        </p:txBody>
+      </p:sp>
+      <p:sp>
+        <p:nvSpPr>
+          <p:cNvPr id="7" name="Rectangle 6"/>
+          <p:cNvSpPr/>
+          <p:nvPr/>
+        </p:nvSpPr>
+        <p:spPr>
+          <a:xfrm>
+            <a:off x="640080" y="1408175"/>
+            <a:ext cx="73152" cy="274320"/>
+          </a:xfrm>
+          <a:prstGeom prst="rect">
+            <a:avLst/>
+          </a:prstGeom>
+          <a:solidFill>
+            <a:srgbClr val="269CCB"/>
+          </a:solidFill>
+          <a:ln>
+            <a:noFill/>
+          </a:ln>
+        </p:spPr>
+        <p:style>
+          <a:lnRef idx="1">
+            <a:schemeClr val="accent1"/>
+          </a:lnRef>
+          <a:fillRef idx="3">
+            <a:schemeClr val="accent1"/>
+          </a:fillRef>
+          <a:effectRef idx="2">
+            <a:schemeClr val="accent1"/>
+          </a:effectRef>
+          <a:fontRef idx="minor">
+            <a:schemeClr val="lt1"/>
+          </a:fontRef>
+        </p:style>
+        <p:txBody>
+          <a:bodyPr rtlCol="0" anchor="ctr"/>
+          <a:lstStyle/>
+          <a:p>
+            <a:pPr algn="ctr"/>
+          </a:p>
+        </p:txBody>
+      </p:sp>
+      <p:sp>
+        <p:nvSpPr>
+          <p:cNvPr id="8" name="TextBox 7"/>
           <p:cNvSpPr txBox="1"/>
           <p:nvPr/>
         </p:nvSpPr>
         <p:spPr>
           <a:xfrm>
-            <a:off x="457200" y="1170432"/>
-            <a:ext cx="11277295" cy="5230368"/>
+            <a:off x="1097280" y="1353312"/>
+            <a:ext cx="10362895" cy="402336"/>
           </a:xfrm>
           <a:prstGeom prst="rect">
             <a:avLst/>
@@ -9820,131 +9386,354 @@
           <a:noFill/>
         </p:spPr>
         <p:txBody>
-          <a:bodyPr wrap="square">
-            <a:spAutoFit/>
-          </a:bodyPr>
-          <a:lstStyle/>
-          <a:p>
-            <a:pPr>
-              <a:spcAft>
-                <a:spcPts val="800"/>
-              </a:spcAft>
-            </a:pPr>
-            <a:r>
-              <a:rPr sz="2000" b="0" i="0">
+          <a:bodyPr wrap="square" anchor="ctr"/>
+          <a:lstStyle/>
+          <a:p>
+            <a:r>
+              <a:rPr sz="1500" b="0" i="0">
                 <a:solidFill>
                   <a:srgbClr val="333333"/>
                 </a:solidFill>
                 <a:latin typeface="Calibri"/>
               </a:rPr>
-              <a:t>–   </a:t>
-            </a:r>
-            <a:r>
-              <a:rPr sz="2000" b="1" i="0">
+              <a:t>□ Mejoras accionables?</a:t>
+            </a:r>
+          </a:p>
+        </p:txBody>
+      </p:sp>
+      <p:sp>
+        <p:nvSpPr>
+          <p:cNvPr id="9" name="Rounded Rectangle 8"/>
+          <p:cNvSpPr/>
+          <p:nvPr/>
+        </p:nvSpPr>
+        <p:spPr>
+          <a:xfrm>
+            <a:off x="457200" y="1938528"/>
+            <a:ext cx="11277295" cy="566928"/>
+          </a:xfrm>
+          <a:prstGeom prst="roundRect">
+            <a:avLst>
+              <a:gd name="adj" fmla="val 12000"/>
+            </a:avLst>
+          </a:prstGeom>
+          <a:solidFill>
+            <a:srgbClr val="F2F2F2"/>
+          </a:solidFill>
+          <a:ln>
+            <a:noFill/>
+          </a:ln>
+        </p:spPr>
+        <p:style>
+          <a:lnRef idx="1">
+            <a:schemeClr val="accent1"/>
+          </a:lnRef>
+          <a:fillRef idx="3">
+            <a:schemeClr val="accent1"/>
+          </a:fillRef>
+          <a:effectRef idx="2">
+            <a:schemeClr val="accent1"/>
+          </a:effectRef>
+          <a:fontRef idx="minor">
+            <a:schemeClr val="lt1"/>
+          </a:fontRef>
+        </p:style>
+        <p:txBody>
+          <a:bodyPr rtlCol="0" anchor="ctr"/>
+          <a:lstStyle/>
+          <a:p>
+            <a:pPr algn="ctr"/>
+          </a:p>
+        </p:txBody>
+      </p:sp>
+      <p:sp>
+        <p:nvSpPr>
+          <p:cNvPr id="10" name="Rectangle 9"/>
+          <p:cNvSpPr/>
+          <p:nvPr/>
+        </p:nvSpPr>
+        <p:spPr>
+          <a:xfrm>
+            <a:off x="640080" y="2084832"/>
+            <a:ext cx="274320" cy="274320"/>
+          </a:xfrm>
+          <a:prstGeom prst="rect">
+            <a:avLst/>
+          </a:prstGeom>
+          <a:solidFill>
+            <a:srgbClr val="FFFFFF"/>
+          </a:solidFill>
+          <a:ln>
+            <a:solidFill>
+              <a:srgbClr val="333333"/>
+            </a:solidFill>
+          </a:ln>
+        </p:spPr>
+        <p:style>
+          <a:lnRef idx="1">
+            <a:schemeClr val="accent1"/>
+          </a:lnRef>
+          <a:fillRef idx="3">
+            <a:schemeClr val="accent1"/>
+          </a:fillRef>
+          <a:effectRef idx="2">
+            <a:schemeClr val="accent1"/>
+          </a:effectRef>
+          <a:fontRef idx="minor">
+            <a:schemeClr val="lt1"/>
+          </a:fontRef>
+        </p:style>
+        <p:txBody>
+          <a:bodyPr rtlCol="0" anchor="ctr"/>
+          <a:lstStyle/>
+          <a:p>
+            <a:pPr algn="ctr"/>
+          </a:p>
+        </p:txBody>
+      </p:sp>
+      <p:sp>
+        <p:nvSpPr>
+          <p:cNvPr id="11" name="Rectangle 10"/>
+          <p:cNvSpPr/>
+          <p:nvPr/>
+        </p:nvSpPr>
+        <p:spPr>
+          <a:xfrm>
+            <a:off x="640080" y="2084832"/>
+            <a:ext cx="73152" cy="274320"/>
+          </a:xfrm>
+          <a:prstGeom prst="rect">
+            <a:avLst/>
+          </a:prstGeom>
+          <a:solidFill>
+            <a:srgbClr val="269CCB"/>
+          </a:solidFill>
+          <a:ln>
+            <a:noFill/>
+          </a:ln>
+        </p:spPr>
+        <p:style>
+          <a:lnRef idx="1">
+            <a:schemeClr val="accent1"/>
+          </a:lnRef>
+          <a:fillRef idx="3">
+            <a:schemeClr val="accent1"/>
+          </a:fillRef>
+          <a:effectRef idx="2">
+            <a:schemeClr val="accent1"/>
+          </a:effectRef>
+          <a:fontRef idx="minor">
+            <a:schemeClr val="lt1"/>
+          </a:fontRef>
+        </p:style>
+        <p:txBody>
+          <a:bodyPr rtlCol="0" anchor="ctr"/>
+          <a:lstStyle/>
+          <a:p>
+            <a:pPr algn="ctr"/>
+          </a:p>
+        </p:txBody>
+      </p:sp>
+      <p:sp>
+        <p:nvSpPr>
+          <p:cNvPr id="12" name="TextBox 11"/>
+          <p:cNvSpPr txBox="1"/>
+          <p:nvPr/>
+        </p:nvSpPr>
+        <p:spPr>
+          <a:xfrm>
+            <a:off x="1097280" y="2029968"/>
+            <a:ext cx="10362895" cy="402336"/>
+          </a:xfrm>
+          <a:prstGeom prst="rect">
+            <a:avLst/>
+          </a:prstGeom>
+          <a:noFill/>
+        </p:spPr>
+        <p:txBody>
+          <a:bodyPr wrap="square" anchor="ctr"/>
+          <a:lstStyle/>
+          <a:p>
+            <a:r>
+              <a:rPr sz="1500" b="0" i="0">
                 <a:solidFill>
                   <a:srgbClr val="333333"/>
                 </a:solidFill>
                 <a:latin typeface="Calibri"/>
               </a:rPr>
-              <a:t>Entregable:</a:t>
-            </a:r>
-            <a:r>
-              <a:rPr sz="2000" b="0" i="0">
+              <a:t>□ Conectan al PI?</a:t>
+            </a:r>
+          </a:p>
+        </p:txBody>
+      </p:sp>
+      <p:sp>
+        <p:nvSpPr>
+          <p:cNvPr id="13" name="Rounded Rectangle 12"/>
+          <p:cNvSpPr/>
+          <p:nvPr/>
+        </p:nvSpPr>
+        <p:spPr>
+          <a:xfrm>
+            <a:off x="457200" y="2615184"/>
+            <a:ext cx="11277295" cy="566928"/>
+          </a:xfrm>
+          <a:prstGeom prst="roundRect">
+            <a:avLst>
+              <a:gd name="adj" fmla="val 12000"/>
+            </a:avLst>
+          </a:prstGeom>
+          <a:solidFill>
+            <a:srgbClr val="F2F2F2"/>
+          </a:solidFill>
+          <a:ln>
+            <a:noFill/>
+          </a:ln>
+        </p:spPr>
+        <p:style>
+          <a:lnRef idx="1">
+            <a:schemeClr val="accent1"/>
+          </a:lnRef>
+          <a:fillRef idx="3">
+            <a:schemeClr val="accent1"/>
+          </a:fillRef>
+          <a:effectRef idx="2">
+            <a:schemeClr val="accent1"/>
+          </a:effectRef>
+          <a:fontRef idx="minor">
+            <a:schemeClr val="lt1"/>
+          </a:fontRef>
+        </p:style>
+        <p:txBody>
+          <a:bodyPr rtlCol="0" anchor="ctr"/>
+          <a:lstStyle/>
+          <a:p>
+            <a:pPr algn="ctr"/>
+          </a:p>
+        </p:txBody>
+      </p:sp>
+      <p:sp>
+        <p:nvSpPr>
+          <p:cNvPr id="14" name="Rectangle 13"/>
+          <p:cNvSpPr/>
+          <p:nvPr/>
+        </p:nvSpPr>
+        <p:spPr>
+          <a:xfrm>
+            <a:off x="640080" y="2761488"/>
+            <a:ext cx="274320" cy="274320"/>
+          </a:xfrm>
+          <a:prstGeom prst="rect">
+            <a:avLst/>
+          </a:prstGeom>
+          <a:solidFill>
+            <a:srgbClr val="FFFFFF"/>
+          </a:solidFill>
+          <a:ln>
+            <a:solidFill>
+              <a:srgbClr val="333333"/>
+            </a:solidFill>
+          </a:ln>
+        </p:spPr>
+        <p:style>
+          <a:lnRef idx="1">
+            <a:schemeClr val="accent1"/>
+          </a:lnRef>
+          <a:fillRef idx="3">
+            <a:schemeClr val="accent1"/>
+          </a:fillRef>
+          <a:effectRef idx="2">
+            <a:schemeClr val="accent1"/>
+          </a:effectRef>
+          <a:fontRef idx="minor">
+            <a:schemeClr val="lt1"/>
+          </a:fontRef>
+        </p:style>
+        <p:txBody>
+          <a:bodyPr rtlCol="0" anchor="ctr"/>
+          <a:lstStyle/>
+          <a:p>
+            <a:pPr algn="ctr"/>
+          </a:p>
+        </p:txBody>
+      </p:sp>
+      <p:sp>
+        <p:nvSpPr>
+          <p:cNvPr id="15" name="Rectangle 14"/>
+          <p:cNvSpPr/>
+          <p:nvPr/>
+        </p:nvSpPr>
+        <p:spPr>
+          <a:xfrm>
+            <a:off x="640080" y="2761488"/>
+            <a:ext cx="73152" cy="274320"/>
+          </a:xfrm>
+          <a:prstGeom prst="rect">
+            <a:avLst/>
+          </a:prstGeom>
+          <a:solidFill>
+            <a:srgbClr val="269CCB"/>
+          </a:solidFill>
+          <a:ln>
+            <a:noFill/>
+          </a:ln>
+        </p:spPr>
+        <p:style>
+          <a:lnRef idx="1">
+            <a:schemeClr val="accent1"/>
+          </a:lnRef>
+          <a:fillRef idx="3">
+            <a:schemeClr val="accent1"/>
+          </a:fillRef>
+          <a:effectRef idx="2">
+            <a:schemeClr val="accent1"/>
+          </a:effectRef>
+          <a:fontRef idx="minor">
+            <a:schemeClr val="lt1"/>
+          </a:fontRef>
+        </p:style>
+        <p:txBody>
+          <a:bodyPr rtlCol="0" anchor="ctr"/>
+          <a:lstStyle/>
+          <a:p>
+            <a:pPr algn="ctr"/>
+          </a:p>
+        </p:txBody>
+      </p:sp>
+      <p:sp>
+        <p:nvSpPr>
+          <p:cNvPr id="16" name="TextBox 15"/>
+          <p:cNvSpPr txBox="1"/>
+          <p:nvPr/>
+        </p:nvSpPr>
+        <p:spPr>
+          <a:xfrm>
+            <a:off x="1097280" y="2706624"/>
+            <a:ext cx="10362895" cy="402336"/>
+          </a:xfrm>
+          <a:prstGeom prst="rect">
+            <a:avLst/>
+          </a:prstGeom>
+          <a:noFill/>
+        </p:spPr>
+        <p:txBody>
+          <a:bodyPr wrap="square" anchor="ctr"/>
+          <a:lstStyle/>
+          <a:p>
+            <a:r>
+              <a:rPr sz="1500" b="0" i="0">
                 <a:solidFill>
                   <a:srgbClr val="333333"/>
                 </a:solidFill>
                 <a:latin typeface="Calibri"/>
               </a:rPr>
-              <a:t> Informe 1-2 pag.: caso + 3 mejoras aplicables a VetCare</a:t>
-            </a:r>
-          </a:p>
-          <a:p>
-            <a:pPr>
-              <a:spcAft>
-                <a:spcPts val="800"/>
-              </a:spcAft>
-            </a:pPr>
-            <a:r>
-              <a:rPr sz="2000" b="0" i="0">
-                <a:solidFill>
-                  <a:srgbClr val="333333"/>
-                </a:solidFill>
-                <a:latin typeface="Calibri"/>
-              </a:rPr>
-              <a:t>–   Evidencia: el SQL y su salida quedan guardados en cada pregunta de la plataforma del curso.</a:t>
-            </a:r>
-          </a:p>
-          <a:p>
-            <a:pPr>
-              <a:spcAft>
-                <a:spcPts val="800"/>
-              </a:spcAft>
-            </a:pPr>
-            <a:r>
-              <a:rPr sz="2000" b="0" i="0">
-                <a:solidFill>
-                  <a:srgbClr val="333333"/>
-                </a:solidFill>
-                <a:latin typeface="Calibri"/>
-              </a:rPr>
-              <a:t>–   Conserva copia en tu carpeta del PI (los .sql que pide el entregable).</a:t>
-            </a:r>
-          </a:p>
-          <a:p>
-            <a:pPr>
-              <a:spcAft>
-                <a:spcPts val="800"/>
-              </a:spcAft>
-            </a:pPr>
-            <a:r>
-              <a:rPr sz="2000" b="0" i="0">
-                <a:solidFill>
-                  <a:srgbClr val="333333"/>
-                </a:solidFill>
-                <a:latin typeface="Calibri"/>
-              </a:rPr>
-              <a:t>–   Actualizar checklist PI (que criterio de rubrica avanzo).</a:t>
-            </a:r>
-          </a:p>
-          <a:p>
-            <a:pPr>
-              <a:spcAft>
-                <a:spcPts val="800"/>
-              </a:spcAft>
-            </a:pPr>
-            <a:r>
-              <a:rPr sz="2000" b="0" i="0">
-                <a:solidFill>
-                  <a:srgbClr val="333333"/>
-                </a:solidFill>
-                <a:latin typeface="Calibri"/>
-              </a:rPr>
-              <a:t>–   </a:t>
-            </a:r>
-            <a:r>
-              <a:rPr sz="2000" b="1" i="0">
-                <a:solidFill>
-                  <a:srgbClr val="333333"/>
-                </a:solidFill>
-                <a:latin typeface="Calibri"/>
-              </a:rPr>
-              <a:t>Entrega en la plataforma del curso</a:t>
-            </a:r>
-            <a:r>
-              <a:rPr sz="2000" b="0" i="0">
-                <a:solidFill>
-                  <a:srgbClr val="333333"/>
-                </a:solidFill>
-                <a:latin typeface="Calibri"/>
-              </a:rPr>
-              <a:t> — en la fecha que indique el docente.</a:t>
-            </a:r>
-          </a:p>
-        </p:txBody>
-      </p:sp>
-      <p:sp>
-        <p:nvSpPr>
-          <p:cNvPr id="6" name="TextBox 5"/>
+              <a:t>□ Evidencia de lectura?</a:t>
+            </a:r>
+          </a:p>
+        </p:txBody>
+      </p:sp>
+      <p:sp>
+        <p:nvSpPr>
+          <p:cNvPr id="17" name="TextBox 16"/>
           <p:cNvSpPr txBox="1"/>
           <p:nvPr/>
         </p:nvSpPr>
@@ -10118,109 +9907,21 @@
                 </a:solidFill>
                 <a:latin typeface="Calibri"/>
               </a:rPr>
-              <a:t>Para el PI esta semana</a:t>
-            </a:r>
-          </a:p>
-        </p:txBody>
-      </p:sp>
-      <p:sp>
-        <p:nvSpPr>
-          <p:cNvPr id="5" name="Rounded Rectangle 4"/>
-          <p:cNvSpPr/>
-          <p:nvPr/>
-        </p:nvSpPr>
-        <p:spPr>
-          <a:xfrm>
-            <a:off x="457200" y="1261872"/>
-            <a:ext cx="11277295" cy="1051560"/>
-          </a:xfrm>
-          <a:prstGeom prst="roundRect">
-            <a:avLst>
-              <a:gd name="adj" fmla="val 12000"/>
-            </a:avLst>
-          </a:prstGeom>
-          <a:solidFill>
-            <a:srgbClr val="E8F4FA"/>
-          </a:solidFill>
-          <a:ln>
-            <a:noFill/>
-          </a:ln>
-        </p:spPr>
-        <p:style>
-          <a:lnRef idx="1">
-            <a:schemeClr val="accent1"/>
-          </a:lnRef>
-          <a:fillRef idx="3">
-            <a:schemeClr val="accent1"/>
-          </a:fillRef>
-          <a:effectRef idx="2">
-            <a:schemeClr val="accent1"/>
-          </a:effectRef>
-          <a:fontRef idx="minor">
-            <a:schemeClr val="lt1"/>
-          </a:fontRef>
-        </p:style>
-        <p:txBody>
-          <a:bodyPr rtlCol="0" anchor="ctr"/>
-          <a:lstStyle/>
-          <a:p>
-            <a:pPr algn="ctr"/>
-          </a:p>
-        </p:txBody>
-      </p:sp>
-      <p:sp>
-        <p:nvSpPr>
-          <p:cNvPr id="6" name="Rectangle 5"/>
-          <p:cNvSpPr/>
-          <p:nvPr/>
-        </p:nvSpPr>
-        <p:spPr>
-          <a:xfrm>
-            <a:off x="457200" y="1261872"/>
-            <a:ext cx="128016" cy="1051560"/>
-          </a:xfrm>
-          <a:prstGeom prst="rect">
-            <a:avLst/>
-          </a:prstGeom>
-          <a:solidFill>
-            <a:srgbClr val="269CCB"/>
-          </a:solidFill>
-          <a:ln>
-            <a:noFill/>
-          </a:ln>
-        </p:spPr>
-        <p:style>
-          <a:lnRef idx="1">
-            <a:schemeClr val="accent1"/>
-          </a:lnRef>
-          <a:fillRef idx="3">
-            <a:schemeClr val="accent1"/>
-          </a:fillRef>
-          <a:effectRef idx="2">
-            <a:schemeClr val="accent1"/>
-          </a:effectRef>
-          <a:fontRef idx="minor">
-            <a:schemeClr val="lt1"/>
-          </a:fontRef>
-        </p:style>
-        <p:txBody>
-          <a:bodyPr rtlCol="0" anchor="ctr"/>
-          <a:lstStyle/>
-          <a:p>
-            <a:pPr algn="ctr"/>
-          </a:p>
-        </p:txBody>
-      </p:sp>
-      <p:sp>
-        <p:nvSpPr>
-          <p:cNvPr id="7" name="TextBox 6"/>
+              <a:t>Criterios de exito / entregable</a:t>
+            </a:r>
+          </a:p>
+        </p:txBody>
+      </p:sp>
+      <p:sp>
+        <p:nvSpPr>
+          <p:cNvPr id="5" name="TextBox 4"/>
           <p:cNvSpPr txBox="1"/>
           <p:nvPr/>
         </p:nvSpPr>
         <p:spPr>
           <a:xfrm>
-            <a:off x="777240" y="1399031"/>
-            <a:ext cx="10774375" cy="822959"/>
+            <a:off x="457200" y="1170432"/>
+            <a:ext cx="11277295" cy="5230368"/>
           </a:xfrm>
           <a:prstGeom prst="rect">
             <a:avLst/>
@@ -10233,313 +9934,126 @@
           </a:bodyPr>
           <a:lstStyle/>
           <a:p>
-            <a:r>
-              <a:rPr sz="1200" b="1" i="0">
-                <a:solidFill>
-                  <a:srgbClr val="269CCB"/>
-                </a:solidFill>
-                <a:latin typeface="Calibri"/>
-              </a:rPr>
-              <a:t>Info</a:t>
-            </a:r>
-          </a:p>
-          <a:p>
             <a:pPr>
-              <a:spcBef>
-                <a:spcPts val="400"/>
-              </a:spcBef>
+              <a:spcAft>
+                <a:spcPts val="800"/>
+              </a:spcAft>
             </a:pPr>
             <a:r>
-              <a:rPr sz="1400" b="0" i="0">
+              <a:rPr sz="2000" b="0" i="0">
                 <a:solidFill>
                   <a:srgbClr val="333333"/>
                 </a:solidFill>
                 <a:latin typeface="Calibri"/>
               </a:rPr>
-              <a:t>Hito: Informe de caso -&gt; mejoras concretas al PI</a:t>
-            </a:r>
-          </a:p>
-        </p:txBody>
-      </p:sp>
-      <p:sp>
-        <p:nvSpPr>
-          <p:cNvPr id="8" name="Rounded Rectangle 7"/>
-          <p:cNvSpPr/>
-          <p:nvPr/>
-        </p:nvSpPr>
-        <p:spPr>
-          <a:xfrm>
-            <a:off x="457200" y="2478024"/>
-            <a:ext cx="11277295" cy="1051560"/>
-          </a:xfrm>
-          <a:prstGeom prst="roundRect">
-            <a:avLst>
-              <a:gd name="adj" fmla="val 12000"/>
-            </a:avLst>
-          </a:prstGeom>
-          <a:solidFill>
-            <a:srgbClr val="FFF8E1"/>
-          </a:solidFill>
-          <a:ln>
-            <a:noFill/>
-          </a:ln>
-        </p:spPr>
-        <p:style>
-          <a:lnRef idx="1">
-            <a:schemeClr val="accent1"/>
-          </a:lnRef>
-          <a:fillRef idx="3">
-            <a:schemeClr val="accent1"/>
-          </a:fillRef>
-          <a:effectRef idx="2">
-            <a:schemeClr val="accent1"/>
-          </a:effectRef>
-          <a:fontRef idx="minor">
-            <a:schemeClr val="lt1"/>
-          </a:fontRef>
-        </p:style>
-        <p:txBody>
-          <a:bodyPr rtlCol="0" anchor="ctr"/>
-          <a:lstStyle/>
-          <a:p>
-            <a:pPr algn="ctr"/>
-          </a:p>
-        </p:txBody>
-      </p:sp>
-      <p:sp>
-        <p:nvSpPr>
-          <p:cNvPr id="9" name="Rectangle 8"/>
-          <p:cNvSpPr/>
-          <p:nvPr/>
-        </p:nvSpPr>
-        <p:spPr>
-          <a:xfrm>
-            <a:off x="457200" y="2478024"/>
-            <a:ext cx="128016" cy="1051560"/>
-          </a:xfrm>
-          <a:prstGeom prst="rect">
-            <a:avLst/>
-          </a:prstGeom>
-          <a:solidFill>
-            <a:srgbClr val="FFD000"/>
-          </a:solidFill>
-          <a:ln>
-            <a:noFill/>
-          </a:ln>
-        </p:spPr>
-        <p:style>
-          <a:lnRef idx="1">
-            <a:schemeClr val="accent1"/>
-          </a:lnRef>
-          <a:fillRef idx="3">
-            <a:schemeClr val="accent1"/>
-          </a:fillRef>
-          <a:effectRef idx="2">
-            <a:schemeClr val="accent1"/>
-          </a:effectRef>
-          <a:fontRef idx="minor">
-            <a:schemeClr val="lt1"/>
-          </a:fontRef>
-        </p:style>
-        <p:txBody>
-          <a:bodyPr rtlCol="0" anchor="ctr"/>
-          <a:lstStyle/>
-          <a:p>
-            <a:pPr algn="ctr"/>
-          </a:p>
-        </p:txBody>
-      </p:sp>
-      <p:sp>
-        <p:nvSpPr>
-          <p:cNvPr id="10" name="TextBox 9"/>
-          <p:cNvSpPr txBox="1"/>
-          <p:nvPr/>
-        </p:nvSpPr>
-        <p:spPr>
-          <a:xfrm>
-            <a:off x="777240" y="2615184"/>
-            <a:ext cx="10774375" cy="822959"/>
-          </a:xfrm>
-          <a:prstGeom prst="rect">
-            <a:avLst/>
-          </a:prstGeom>
-          <a:noFill/>
-        </p:spPr>
-        <p:txBody>
-          <a:bodyPr wrap="square">
-            <a:spAutoFit/>
-          </a:bodyPr>
-          <a:lstStyle/>
-          <a:p>
-            <a:r>
-              <a:rPr sz="1200" b="1" i="0">
-                <a:solidFill>
-                  <a:srgbClr val="FFD000"/>
-                </a:solidFill>
-                <a:latin typeface="Calibri"/>
-              </a:rPr>
-              <a:t>Aclaración</a:t>
+              <a:t>–   </a:t>
+            </a:r>
+            <a:r>
+              <a:rPr sz="2000" b="1" i="0">
+                <a:solidFill>
+                  <a:srgbClr val="333333"/>
+                </a:solidFill>
+                <a:latin typeface="Calibri"/>
+              </a:rPr>
+              <a:t>Entregable:</a:t>
+            </a:r>
+            <a:r>
+              <a:rPr sz="2000" b="0" i="0">
+                <a:solidFill>
+                  <a:srgbClr val="333333"/>
+                </a:solidFill>
+                <a:latin typeface="Calibri"/>
+              </a:rPr>
+              <a:t> Informe 1-2 pag.: caso + 3 mejoras aplicables a VetCare</a:t>
             </a:r>
           </a:p>
           <a:p>
             <a:pPr>
-              <a:spcBef>
-                <a:spcPts val="400"/>
-              </a:spcBef>
+              <a:spcAft>
+                <a:spcPts val="800"/>
+              </a:spcAft>
             </a:pPr>
             <a:r>
-              <a:rPr sz="1400" b="0" i="0">
+              <a:rPr sz="2000" b="0" i="0">
                 <a:solidFill>
                   <a:srgbClr val="333333"/>
                 </a:solidFill>
                 <a:latin typeface="Calibri"/>
               </a:rPr>
-              <a:t>Enunciado completo: Clases/Proyecto Integrador/ (VetCare DB).</a:t>
-            </a:r>
-          </a:p>
-        </p:txBody>
-      </p:sp>
-      <p:sp>
-        <p:nvSpPr>
-          <p:cNvPr id="11" name="Rounded Rectangle 10"/>
-          <p:cNvSpPr/>
-          <p:nvPr/>
-        </p:nvSpPr>
-        <p:spPr>
-          <a:xfrm>
-            <a:off x="457200" y="3694176"/>
-            <a:ext cx="11277295" cy="1051560"/>
-          </a:xfrm>
-          <a:prstGeom prst="roundRect">
-            <a:avLst>
-              <a:gd name="adj" fmla="val 12000"/>
-            </a:avLst>
-          </a:prstGeom>
-          <a:solidFill>
-            <a:srgbClr val="FBE4E4"/>
-          </a:solidFill>
-          <a:ln>
-            <a:noFill/>
-          </a:ln>
-        </p:spPr>
-        <p:style>
-          <a:lnRef idx="1">
-            <a:schemeClr val="accent1"/>
-          </a:lnRef>
-          <a:fillRef idx="3">
-            <a:schemeClr val="accent1"/>
-          </a:fillRef>
-          <a:effectRef idx="2">
-            <a:schemeClr val="accent1"/>
-          </a:effectRef>
-          <a:fontRef idx="minor">
-            <a:schemeClr val="lt1"/>
-          </a:fontRef>
-        </p:style>
-        <p:txBody>
-          <a:bodyPr rtlCol="0" anchor="ctr"/>
-          <a:lstStyle/>
-          <a:p>
-            <a:pPr algn="ctr"/>
-          </a:p>
-        </p:txBody>
-      </p:sp>
-      <p:sp>
-        <p:nvSpPr>
-          <p:cNvPr id="12" name="Rectangle 11"/>
-          <p:cNvSpPr/>
-          <p:nvPr/>
-        </p:nvSpPr>
-        <p:spPr>
-          <a:xfrm>
-            <a:off x="457200" y="3694176"/>
-            <a:ext cx="128016" cy="1051560"/>
-          </a:xfrm>
-          <a:prstGeom prst="rect">
-            <a:avLst/>
-          </a:prstGeom>
-          <a:solidFill>
-            <a:srgbClr val="A02030"/>
-          </a:solidFill>
-          <a:ln>
-            <a:noFill/>
-          </a:ln>
-        </p:spPr>
-        <p:style>
-          <a:lnRef idx="1">
-            <a:schemeClr val="accent1"/>
-          </a:lnRef>
-          <a:fillRef idx="3">
-            <a:schemeClr val="accent1"/>
-          </a:fillRef>
-          <a:effectRef idx="2">
-            <a:schemeClr val="accent1"/>
-          </a:effectRef>
-          <a:fontRef idx="minor">
-            <a:schemeClr val="lt1"/>
-          </a:fontRef>
-        </p:style>
-        <p:txBody>
-          <a:bodyPr rtlCol="0" anchor="ctr"/>
-          <a:lstStyle/>
-          <a:p>
-            <a:pPr algn="ctr"/>
-          </a:p>
-        </p:txBody>
-      </p:sp>
-      <p:sp>
-        <p:nvSpPr>
-          <p:cNvPr id="13" name="TextBox 12"/>
-          <p:cNvSpPr txBox="1"/>
-          <p:nvPr/>
-        </p:nvSpPr>
-        <p:spPr>
-          <a:xfrm>
-            <a:off x="777240" y="3831336"/>
-            <a:ext cx="10774375" cy="822959"/>
-          </a:xfrm>
-          <a:prstGeom prst="rect">
-            <a:avLst/>
-          </a:prstGeom>
-          <a:noFill/>
-        </p:spPr>
-        <p:txBody>
-          <a:bodyPr wrap="square">
-            <a:spAutoFit/>
-          </a:bodyPr>
-          <a:lstStyle/>
-          <a:p>
-            <a:r>
-              <a:rPr sz="1200" b="1" i="0">
-                <a:solidFill>
-                  <a:srgbClr val="A02030"/>
-                </a:solidFill>
-                <a:latin typeface="Calibri"/>
-              </a:rPr>
-              <a:t>Atención</a:t>
+              <a:t>–   Evidencia: el SQL y su salida quedan guardados en cada pregunta de la plataforma del curso.</a:t>
             </a:r>
           </a:p>
           <a:p>
             <a:pPr>
-              <a:spcBef>
-                <a:spcPts val="400"/>
-              </a:spcBef>
+              <a:spcAft>
+                <a:spcPts val="800"/>
+              </a:spcAft>
             </a:pPr>
             <a:r>
-              <a:rPr sz="1400" b="0" i="0">
+              <a:rPr sz="2000" b="0" i="0">
                 <a:solidFill>
                   <a:srgbClr val="333333"/>
                 </a:solidFill>
                 <a:latin typeface="Calibri"/>
               </a:rPr>
-              <a:t>Si el docente asigna taller esta semana, él indica el canal y la fecha.</a:t>
-            </a:r>
-          </a:p>
-        </p:txBody>
-      </p:sp>
-      <p:sp>
-        <p:nvSpPr>
-          <p:cNvPr id="14" name="TextBox 13"/>
+              <a:t>–   Conserva copia en tu carpeta del PI (los .sql que pide el entregable).</a:t>
+            </a:r>
+          </a:p>
+          <a:p>
+            <a:pPr>
+              <a:spcAft>
+                <a:spcPts val="800"/>
+              </a:spcAft>
+            </a:pPr>
+            <a:r>
+              <a:rPr sz="2000" b="0" i="0">
+                <a:solidFill>
+                  <a:srgbClr val="333333"/>
+                </a:solidFill>
+                <a:latin typeface="Calibri"/>
+              </a:rPr>
+              <a:t>–   Actualizar checklist PI (que criterio de rubrica avanzo).</a:t>
+            </a:r>
+          </a:p>
+          <a:p>
+            <a:pPr>
+              <a:spcAft>
+                <a:spcPts val="800"/>
+              </a:spcAft>
+            </a:pPr>
+            <a:r>
+              <a:rPr sz="2000" b="0" i="0">
+                <a:solidFill>
+                  <a:srgbClr val="333333"/>
+                </a:solidFill>
+                <a:latin typeface="Calibri"/>
+              </a:rPr>
+              <a:t>–   </a:t>
+            </a:r>
+            <a:r>
+              <a:rPr sz="2000" b="1" i="0">
+                <a:solidFill>
+                  <a:srgbClr val="333333"/>
+                </a:solidFill>
+                <a:latin typeface="Calibri"/>
+              </a:rPr>
+              <a:t>Entrega en la plataforma del curso</a:t>
+            </a:r>
+            <a:r>
+              <a:rPr sz="2000" b="0" i="0">
+                <a:solidFill>
+                  <a:srgbClr val="333333"/>
+                </a:solidFill>
+                <a:latin typeface="Calibri"/>
+              </a:rPr>
+              <a:t> — en la fecha que indique el docente.</a:t>
+            </a:r>
+          </a:p>
+        </p:txBody>
+      </p:sp>
+      <p:sp>
+        <p:nvSpPr>
+          <p:cNvPr id="6" name="TextBox 5"/>
           <p:cNvSpPr txBox="1"/>
           <p:nvPr/>
         </p:nvSpPr>
@@ -10607,6 +10121,601 @@
         <p:spPr>
           <a:xfrm>
             <a:off x="0" y="0"/>
+            <a:ext cx="12191695" cy="960120"/>
+          </a:xfrm>
+          <a:prstGeom prst="rect">
+            <a:avLst/>
+          </a:prstGeom>
+          <a:solidFill>
+            <a:srgbClr val="095292"/>
+          </a:solidFill>
+          <a:ln>
+            <a:noFill/>
+          </a:ln>
+        </p:spPr>
+        <p:style>
+          <a:lnRef idx="1">
+            <a:schemeClr val="accent1"/>
+          </a:lnRef>
+          <a:fillRef idx="3">
+            <a:schemeClr val="accent1"/>
+          </a:fillRef>
+          <a:effectRef idx="2">
+            <a:schemeClr val="accent1"/>
+          </a:effectRef>
+          <a:fontRef idx="minor">
+            <a:schemeClr val="lt1"/>
+          </a:fontRef>
+        </p:style>
+        <p:txBody>
+          <a:bodyPr rtlCol="0" anchor="ctr"/>
+          <a:lstStyle/>
+          <a:p>
+            <a:pPr algn="ctr"/>
+          </a:p>
+        </p:txBody>
+      </p:sp>
+      <p:sp>
+        <p:nvSpPr>
+          <p:cNvPr id="3" name="Rectangle 2"/>
+          <p:cNvSpPr/>
+          <p:nvPr/>
+        </p:nvSpPr>
+        <p:spPr>
+          <a:xfrm>
+            <a:off x="0" y="960120"/>
+            <a:ext cx="12191695" cy="41148"/>
+          </a:xfrm>
+          <a:prstGeom prst="rect">
+            <a:avLst/>
+          </a:prstGeom>
+          <a:solidFill>
+            <a:srgbClr val="FFD000"/>
+          </a:solidFill>
+          <a:ln>
+            <a:noFill/>
+          </a:ln>
+        </p:spPr>
+        <p:style>
+          <a:lnRef idx="1">
+            <a:schemeClr val="accent1"/>
+          </a:lnRef>
+          <a:fillRef idx="3">
+            <a:schemeClr val="accent1"/>
+          </a:fillRef>
+          <a:effectRef idx="2">
+            <a:schemeClr val="accent1"/>
+          </a:effectRef>
+          <a:fontRef idx="minor">
+            <a:schemeClr val="lt1"/>
+          </a:fontRef>
+        </p:style>
+        <p:txBody>
+          <a:bodyPr rtlCol="0" anchor="ctr"/>
+          <a:lstStyle/>
+          <a:p>
+            <a:pPr algn="ctr"/>
+          </a:p>
+        </p:txBody>
+      </p:sp>
+      <p:sp>
+        <p:nvSpPr>
+          <p:cNvPr id="4" name="TextBox 3"/>
+          <p:cNvSpPr txBox="1"/>
+          <p:nvPr/>
+        </p:nvSpPr>
+        <p:spPr>
+          <a:xfrm>
+            <a:off x="457200" y="164592"/>
+            <a:ext cx="11277295" cy="502920"/>
+          </a:xfrm>
+          <a:prstGeom prst="rect">
+            <a:avLst/>
+          </a:prstGeom>
+          <a:noFill/>
+        </p:spPr>
+        <p:txBody>
+          <a:bodyPr wrap="square">
+            <a:spAutoFit/>
+          </a:bodyPr>
+          <a:lstStyle/>
+          <a:p>
+            <a:r>
+              <a:rPr sz="2600" b="1" i="0">
+                <a:solidFill>
+                  <a:srgbClr val="FFFFFF"/>
+                </a:solidFill>
+                <a:latin typeface="Calibri"/>
+              </a:rPr>
+              <a:t>Para el PI esta semana</a:t>
+            </a:r>
+          </a:p>
+        </p:txBody>
+      </p:sp>
+      <p:sp>
+        <p:nvSpPr>
+          <p:cNvPr id="5" name="Rounded Rectangle 4"/>
+          <p:cNvSpPr/>
+          <p:nvPr/>
+        </p:nvSpPr>
+        <p:spPr>
+          <a:xfrm>
+            <a:off x="457200" y="1261872"/>
+            <a:ext cx="11277295" cy="1051560"/>
+          </a:xfrm>
+          <a:prstGeom prst="roundRect">
+            <a:avLst>
+              <a:gd name="adj" fmla="val 12000"/>
+            </a:avLst>
+          </a:prstGeom>
+          <a:solidFill>
+            <a:srgbClr val="E8F4FA"/>
+          </a:solidFill>
+          <a:ln>
+            <a:noFill/>
+          </a:ln>
+        </p:spPr>
+        <p:style>
+          <a:lnRef idx="1">
+            <a:schemeClr val="accent1"/>
+          </a:lnRef>
+          <a:fillRef idx="3">
+            <a:schemeClr val="accent1"/>
+          </a:fillRef>
+          <a:effectRef idx="2">
+            <a:schemeClr val="accent1"/>
+          </a:effectRef>
+          <a:fontRef idx="minor">
+            <a:schemeClr val="lt1"/>
+          </a:fontRef>
+        </p:style>
+        <p:txBody>
+          <a:bodyPr rtlCol="0" anchor="ctr"/>
+          <a:lstStyle/>
+          <a:p>
+            <a:pPr algn="ctr"/>
+          </a:p>
+        </p:txBody>
+      </p:sp>
+      <p:sp>
+        <p:nvSpPr>
+          <p:cNvPr id="6" name="Rectangle 5"/>
+          <p:cNvSpPr/>
+          <p:nvPr/>
+        </p:nvSpPr>
+        <p:spPr>
+          <a:xfrm>
+            <a:off x="457200" y="1261872"/>
+            <a:ext cx="128016" cy="1051560"/>
+          </a:xfrm>
+          <a:prstGeom prst="rect">
+            <a:avLst/>
+          </a:prstGeom>
+          <a:solidFill>
+            <a:srgbClr val="269CCB"/>
+          </a:solidFill>
+          <a:ln>
+            <a:noFill/>
+          </a:ln>
+        </p:spPr>
+        <p:style>
+          <a:lnRef idx="1">
+            <a:schemeClr val="accent1"/>
+          </a:lnRef>
+          <a:fillRef idx="3">
+            <a:schemeClr val="accent1"/>
+          </a:fillRef>
+          <a:effectRef idx="2">
+            <a:schemeClr val="accent1"/>
+          </a:effectRef>
+          <a:fontRef idx="minor">
+            <a:schemeClr val="lt1"/>
+          </a:fontRef>
+        </p:style>
+        <p:txBody>
+          <a:bodyPr rtlCol="0" anchor="ctr"/>
+          <a:lstStyle/>
+          <a:p>
+            <a:pPr algn="ctr"/>
+          </a:p>
+        </p:txBody>
+      </p:sp>
+      <p:sp>
+        <p:nvSpPr>
+          <p:cNvPr id="7" name="TextBox 6"/>
+          <p:cNvSpPr txBox="1"/>
+          <p:nvPr/>
+        </p:nvSpPr>
+        <p:spPr>
+          <a:xfrm>
+            <a:off x="777240" y="1399031"/>
+            <a:ext cx="10774375" cy="822959"/>
+          </a:xfrm>
+          <a:prstGeom prst="rect">
+            <a:avLst/>
+          </a:prstGeom>
+          <a:noFill/>
+        </p:spPr>
+        <p:txBody>
+          <a:bodyPr wrap="square">
+            <a:spAutoFit/>
+          </a:bodyPr>
+          <a:lstStyle/>
+          <a:p>
+            <a:r>
+              <a:rPr sz="1200" b="1" i="0">
+                <a:solidFill>
+                  <a:srgbClr val="269CCB"/>
+                </a:solidFill>
+                <a:latin typeface="Calibri"/>
+              </a:rPr>
+              <a:t>Info</a:t>
+            </a:r>
+          </a:p>
+          <a:p>
+            <a:pPr>
+              <a:spcBef>
+                <a:spcPts val="400"/>
+              </a:spcBef>
+            </a:pPr>
+            <a:r>
+              <a:rPr sz="1400" b="0" i="0">
+                <a:solidFill>
+                  <a:srgbClr val="333333"/>
+                </a:solidFill>
+                <a:latin typeface="Calibri"/>
+              </a:rPr>
+              <a:t>Hito: Informe de caso -&gt; mejoras concretas al PI</a:t>
+            </a:r>
+          </a:p>
+        </p:txBody>
+      </p:sp>
+      <p:sp>
+        <p:nvSpPr>
+          <p:cNvPr id="8" name="Rounded Rectangle 7"/>
+          <p:cNvSpPr/>
+          <p:nvPr/>
+        </p:nvSpPr>
+        <p:spPr>
+          <a:xfrm>
+            <a:off x="457200" y="2478024"/>
+            <a:ext cx="11277295" cy="1051560"/>
+          </a:xfrm>
+          <a:prstGeom prst="roundRect">
+            <a:avLst>
+              <a:gd name="adj" fmla="val 12000"/>
+            </a:avLst>
+          </a:prstGeom>
+          <a:solidFill>
+            <a:srgbClr val="FFF8E1"/>
+          </a:solidFill>
+          <a:ln>
+            <a:noFill/>
+          </a:ln>
+        </p:spPr>
+        <p:style>
+          <a:lnRef idx="1">
+            <a:schemeClr val="accent1"/>
+          </a:lnRef>
+          <a:fillRef idx="3">
+            <a:schemeClr val="accent1"/>
+          </a:fillRef>
+          <a:effectRef idx="2">
+            <a:schemeClr val="accent1"/>
+          </a:effectRef>
+          <a:fontRef idx="minor">
+            <a:schemeClr val="lt1"/>
+          </a:fontRef>
+        </p:style>
+        <p:txBody>
+          <a:bodyPr rtlCol="0" anchor="ctr"/>
+          <a:lstStyle/>
+          <a:p>
+            <a:pPr algn="ctr"/>
+          </a:p>
+        </p:txBody>
+      </p:sp>
+      <p:sp>
+        <p:nvSpPr>
+          <p:cNvPr id="9" name="Rectangle 8"/>
+          <p:cNvSpPr/>
+          <p:nvPr/>
+        </p:nvSpPr>
+        <p:spPr>
+          <a:xfrm>
+            <a:off x="457200" y="2478024"/>
+            <a:ext cx="128016" cy="1051560"/>
+          </a:xfrm>
+          <a:prstGeom prst="rect">
+            <a:avLst/>
+          </a:prstGeom>
+          <a:solidFill>
+            <a:srgbClr val="FFD000"/>
+          </a:solidFill>
+          <a:ln>
+            <a:noFill/>
+          </a:ln>
+        </p:spPr>
+        <p:style>
+          <a:lnRef idx="1">
+            <a:schemeClr val="accent1"/>
+          </a:lnRef>
+          <a:fillRef idx="3">
+            <a:schemeClr val="accent1"/>
+          </a:fillRef>
+          <a:effectRef idx="2">
+            <a:schemeClr val="accent1"/>
+          </a:effectRef>
+          <a:fontRef idx="minor">
+            <a:schemeClr val="lt1"/>
+          </a:fontRef>
+        </p:style>
+        <p:txBody>
+          <a:bodyPr rtlCol="0" anchor="ctr"/>
+          <a:lstStyle/>
+          <a:p>
+            <a:pPr algn="ctr"/>
+          </a:p>
+        </p:txBody>
+      </p:sp>
+      <p:sp>
+        <p:nvSpPr>
+          <p:cNvPr id="10" name="TextBox 9"/>
+          <p:cNvSpPr txBox="1"/>
+          <p:nvPr/>
+        </p:nvSpPr>
+        <p:spPr>
+          <a:xfrm>
+            <a:off x="777240" y="2615184"/>
+            <a:ext cx="10774375" cy="822959"/>
+          </a:xfrm>
+          <a:prstGeom prst="rect">
+            <a:avLst/>
+          </a:prstGeom>
+          <a:noFill/>
+        </p:spPr>
+        <p:txBody>
+          <a:bodyPr wrap="square">
+            <a:spAutoFit/>
+          </a:bodyPr>
+          <a:lstStyle/>
+          <a:p>
+            <a:r>
+              <a:rPr sz="1200" b="1" i="0">
+                <a:solidFill>
+                  <a:srgbClr val="FFD000"/>
+                </a:solidFill>
+                <a:latin typeface="Calibri"/>
+              </a:rPr>
+              <a:t>Aclaración</a:t>
+            </a:r>
+          </a:p>
+          <a:p>
+            <a:pPr>
+              <a:spcBef>
+                <a:spcPts val="400"/>
+              </a:spcBef>
+            </a:pPr>
+            <a:r>
+              <a:rPr sz="1400" b="0" i="0">
+                <a:solidFill>
+                  <a:srgbClr val="333333"/>
+                </a:solidFill>
+                <a:latin typeface="Calibri"/>
+              </a:rPr>
+              <a:t>Enunciado completo: Clases/Proyecto Integrador/ (VetCare DB).</a:t>
+            </a:r>
+          </a:p>
+        </p:txBody>
+      </p:sp>
+      <p:sp>
+        <p:nvSpPr>
+          <p:cNvPr id="11" name="Rounded Rectangle 10"/>
+          <p:cNvSpPr/>
+          <p:nvPr/>
+        </p:nvSpPr>
+        <p:spPr>
+          <a:xfrm>
+            <a:off x="457200" y="3694176"/>
+            <a:ext cx="11277295" cy="1051560"/>
+          </a:xfrm>
+          <a:prstGeom prst="roundRect">
+            <a:avLst>
+              <a:gd name="adj" fmla="val 12000"/>
+            </a:avLst>
+          </a:prstGeom>
+          <a:solidFill>
+            <a:srgbClr val="FBE4E4"/>
+          </a:solidFill>
+          <a:ln>
+            <a:noFill/>
+          </a:ln>
+        </p:spPr>
+        <p:style>
+          <a:lnRef idx="1">
+            <a:schemeClr val="accent1"/>
+          </a:lnRef>
+          <a:fillRef idx="3">
+            <a:schemeClr val="accent1"/>
+          </a:fillRef>
+          <a:effectRef idx="2">
+            <a:schemeClr val="accent1"/>
+          </a:effectRef>
+          <a:fontRef idx="minor">
+            <a:schemeClr val="lt1"/>
+          </a:fontRef>
+        </p:style>
+        <p:txBody>
+          <a:bodyPr rtlCol="0" anchor="ctr"/>
+          <a:lstStyle/>
+          <a:p>
+            <a:pPr algn="ctr"/>
+          </a:p>
+        </p:txBody>
+      </p:sp>
+      <p:sp>
+        <p:nvSpPr>
+          <p:cNvPr id="12" name="Rectangle 11"/>
+          <p:cNvSpPr/>
+          <p:nvPr/>
+        </p:nvSpPr>
+        <p:spPr>
+          <a:xfrm>
+            <a:off x="457200" y="3694176"/>
+            <a:ext cx="128016" cy="1051560"/>
+          </a:xfrm>
+          <a:prstGeom prst="rect">
+            <a:avLst/>
+          </a:prstGeom>
+          <a:solidFill>
+            <a:srgbClr val="A02030"/>
+          </a:solidFill>
+          <a:ln>
+            <a:noFill/>
+          </a:ln>
+        </p:spPr>
+        <p:style>
+          <a:lnRef idx="1">
+            <a:schemeClr val="accent1"/>
+          </a:lnRef>
+          <a:fillRef idx="3">
+            <a:schemeClr val="accent1"/>
+          </a:fillRef>
+          <a:effectRef idx="2">
+            <a:schemeClr val="accent1"/>
+          </a:effectRef>
+          <a:fontRef idx="minor">
+            <a:schemeClr val="lt1"/>
+          </a:fontRef>
+        </p:style>
+        <p:txBody>
+          <a:bodyPr rtlCol="0" anchor="ctr"/>
+          <a:lstStyle/>
+          <a:p>
+            <a:pPr algn="ctr"/>
+          </a:p>
+        </p:txBody>
+      </p:sp>
+      <p:sp>
+        <p:nvSpPr>
+          <p:cNvPr id="13" name="TextBox 12"/>
+          <p:cNvSpPr txBox="1"/>
+          <p:nvPr/>
+        </p:nvSpPr>
+        <p:spPr>
+          <a:xfrm>
+            <a:off x="777240" y="3831336"/>
+            <a:ext cx="10774375" cy="822959"/>
+          </a:xfrm>
+          <a:prstGeom prst="rect">
+            <a:avLst/>
+          </a:prstGeom>
+          <a:noFill/>
+        </p:spPr>
+        <p:txBody>
+          <a:bodyPr wrap="square">
+            <a:spAutoFit/>
+          </a:bodyPr>
+          <a:lstStyle/>
+          <a:p>
+            <a:r>
+              <a:rPr sz="1200" b="1" i="0">
+                <a:solidFill>
+                  <a:srgbClr val="A02030"/>
+                </a:solidFill>
+                <a:latin typeface="Calibri"/>
+              </a:rPr>
+              <a:t>Atención</a:t>
+            </a:r>
+          </a:p>
+          <a:p>
+            <a:pPr>
+              <a:spcBef>
+                <a:spcPts val="400"/>
+              </a:spcBef>
+            </a:pPr>
+            <a:r>
+              <a:rPr sz="1400" b="0" i="0">
+                <a:solidFill>
+                  <a:srgbClr val="333333"/>
+                </a:solidFill>
+                <a:latin typeface="Calibri"/>
+              </a:rPr>
+              <a:t>Si el docente asigna taller esta semana, él indica el canal y la fecha.</a:t>
+            </a:r>
+          </a:p>
+        </p:txBody>
+      </p:sp>
+      <p:sp>
+        <p:nvSpPr>
+          <p:cNvPr id="14" name="TextBox 13"/>
+          <p:cNvSpPr txBox="1"/>
+          <p:nvPr/>
+        </p:nvSpPr>
+        <p:spPr>
+          <a:xfrm>
+            <a:off x="11185855" y="6473952"/>
+            <a:ext cx="640080" cy="274320"/>
+          </a:xfrm>
+          <a:prstGeom prst="rect">
+            <a:avLst/>
+          </a:prstGeom>
+          <a:noFill/>
+        </p:spPr>
+        <p:txBody>
+          <a:bodyPr wrap="square">
+            <a:spAutoFit/>
+          </a:bodyPr>
+          <a:lstStyle/>
+          <a:p>
+            <a:pPr algn="r"/>
+            <a:r>
+              <a:rPr sz="1100" b="0" i="0">
+                <a:solidFill>
+                  <a:srgbClr val="666666"/>
+                </a:solidFill>
+                <a:latin typeface="Calibri"/>
+              </a:rPr>
+              <a:t>27</a:t>
+            </a:r>
+          </a:p>
+        </p:txBody>
+      </p:sp>
+    </p:spTree>
+  </p:cSld>
+  <p:clrMapOvr>
+    <a:masterClrMapping/>
+  </p:clrMapOvr>
+</p:sld>
+</file>
+
+<file path=ppt/slides/slide28.xml><?xml version="1.0" encoding="utf-8"?>
+<p:sld xmlns:a="http://schemas.openxmlformats.org/drawingml/2006/main" xmlns:p="http://schemas.openxmlformats.org/presentationml/2006/main" xmlns:r="http://schemas.openxmlformats.org/officeDocument/2006/relationships">
+  <p:cSld>
+    <p:bg>
+      <p:bgPr>
+        <a:solidFill>
+          <a:srgbClr val="FFFFFF"/>
+        </a:solidFill>
+        <a:effectLst/>
+      </p:bgPr>
+    </p:bg>
+    <p:spTree>
+      <p:nvGrpSpPr>
+        <p:cNvPr id="1" name=""/>
+        <p:cNvGrpSpPr/>
+        <p:nvPr/>
+      </p:nvGrpSpPr>
+      <p:grpSpPr/>
+      <p:sp>
+        <p:nvSpPr>
+          <p:cNvPr id="2" name="Rectangle 1"/>
+          <p:cNvSpPr/>
+          <p:nvPr/>
+        </p:nvSpPr>
+        <p:spPr>
+          <a:xfrm>
+            <a:off x="0" y="0"/>
             <a:ext cx="12191695" cy="164592"/>
           </a:xfrm>
           <a:prstGeom prst="rect">
@@ -12988,55 +13097,7 @@
                 </a:solidFill>
                 <a:latin typeface="Calibri"/>
               </a:rPr>
-              <a:t>–   Eso es la causa proxima.</a:t>
-            </a:r>
-          </a:p>
-          <a:p>
-            <a:pPr>
-              <a:spcAft>
-                <a:spcPts val="800"/>
-              </a:spcAft>
-            </a:pPr>
-            <a:r>
-              <a:rPr sz="2000" b="0" i="0">
-                <a:solidFill>
-                  <a:srgbClr val="333333"/>
-                </a:solidFill>
-                <a:latin typeface="Calibri"/>
-              </a:rPr>
-              <a:t>–   Lo que convirtio un error humano corriente en un incidente historico fue que, al intentar recuperar, la compania descubrio que sus cinco mecanismos de respaldo y replicacion fallaban de una u otra forma: entre otras cosas</a:t>
-            </a:r>
-          </a:p>
-          <a:p>
-            <a:pPr>
-              <a:spcAft>
-                <a:spcPts val="800"/>
-              </a:spcAft>
-            </a:pPr>
-            <a:r>
-              <a:rPr sz="2000" b="0" i="0">
-                <a:solidFill>
-                  <a:srgbClr val="333333"/>
-                </a:solidFill>
-                <a:latin typeface="Calibri"/>
-              </a:rPr>
-              <a:t>–   La herramienta de volcado logico fallaba en silencio por una diferencia de version entre cliente y servidor, y las copias que debian estar en almacenamiento remoto estaban vacias.</a:t>
-            </a:r>
-          </a:p>
-          <a:p>
-            <a:pPr>
-              <a:spcAft>
-                <a:spcPts val="800"/>
-              </a:spcAft>
-            </a:pPr>
-            <a:r>
-              <a:rPr sz="2000" b="0" i="0">
-                <a:solidFill>
-                  <a:srgbClr val="333333"/>
-                </a:solidFill>
-                <a:latin typeface="Calibri"/>
-              </a:rPr>
-              <a:t>–   Terminaron restaurando desde una copia de trabajo de unas seis horas antes y perdieron de forma definitiva la informacion creada en esa ventana, del orden de miles de proyectos y comentarios.</a:t>
+              <a:t>–   La leccion tecnica es exacta: un respaldo que nunca se restauro de prueba no es un respaldo, es una carpeta con un nombre tranquilizador.</a:t>
             </a:r>
           </a:p>
         </p:txBody>
@@ -13243,22 +13304,6 @@
             <a:spAutoFit/>
           </a:bodyPr>
           <a:lstStyle/>
-          <a:p>
-            <a:pPr>
-              <a:spcAft>
-                <a:spcPts val="800"/>
-              </a:spcAft>
-            </a:pPr>
-            <a:r>
-              <a:rPr sz="2000" b="0" i="0">
-                <a:solidFill>
-                  <a:srgbClr val="333333"/>
-                </a:solidFill>
-                <a:latin typeface="Calibri"/>
-              </a:rPr>
-              <a:t>–   La leccion tecnica es exacta: un respaldo que nunca se restauro de prueba no es un respaldo, es una carpeta con un nombre tranquilizador.</a:t>
-            </a:r>
-          </a:p>
           <a:p>
             <a:pPr>
               <a:spcAft>

--- a/Bases de Datos II/Clases/Clase 13 - Analisis de casos reales/Presentacion.pptx
+++ b/Bases de Datos II/Clases/Clase 13 - Analisis de casos reales/Presentacion.pptx
@@ -33,6 +33,7 @@
     <p:sldId id="281" r:id="rId32"/>
     <p:sldId id="282" r:id="rId33"/>
     <p:sldId id="283" r:id="rId34"/>
+    <p:sldId id="284" r:id="rId35"/>
   </p:sldIdLst>
   <p:sldSz cx="12191695" cy="6858000" type="screen4x3"/>
   <p:notesSz cx="6858000" cy="9144000"/>
@@ -6045,21 +6046,141 @@
                 </a:solidFill>
                 <a:latin typeface="Calibri"/>
               </a:rPr>
-              <a:t>Demo del dia</a:t>
-            </a:r>
-          </a:p>
-        </p:txBody>
-      </p:sp>
-      <p:sp>
-        <p:nvSpPr>
-          <p:cNvPr id="5" name="TextBox 4"/>
+              <a:t>Leer un plan de ejecucion ajeno</a:t>
+            </a:r>
+          </a:p>
+        </p:txBody>
+      </p:sp>
+      <p:sp>
+        <p:nvSpPr>
+          <p:cNvPr id="5" name="Rounded Rectangle 4"/>
+          <p:cNvSpPr/>
+          <p:nvPr/>
+        </p:nvSpPr>
+        <p:spPr>
+          <a:xfrm>
+            <a:off x="457200" y="1261872"/>
+            <a:ext cx="11277295" cy="5093208"/>
+          </a:xfrm>
+          <a:prstGeom prst="roundRect">
+            <a:avLst>
+              <a:gd name="adj" fmla="val 12000"/>
+            </a:avLst>
+          </a:prstGeom>
+          <a:solidFill>
+            <a:srgbClr val="1E2A38"/>
+          </a:solidFill>
+          <a:ln>
+            <a:noFill/>
+          </a:ln>
+        </p:spPr>
+        <p:style>
+          <a:lnRef idx="1">
+            <a:schemeClr val="accent1"/>
+          </a:lnRef>
+          <a:fillRef idx="3">
+            <a:schemeClr val="accent1"/>
+          </a:fillRef>
+          <a:effectRef idx="2">
+            <a:schemeClr val="accent1"/>
+          </a:effectRef>
+          <a:fontRef idx="minor">
+            <a:schemeClr val="lt1"/>
+          </a:fontRef>
+        </p:style>
+        <p:txBody>
+          <a:bodyPr rtlCol="0" anchor="ctr"/>
+          <a:lstStyle/>
+          <a:p>
+            <a:pPr algn="ctr"/>
+          </a:p>
+        </p:txBody>
+      </p:sp>
+      <p:sp>
+        <p:nvSpPr>
+          <p:cNvPr id="6" name="Rectangle 5"/>
+          <p:cNvSpPr/>
+          <p:nvPr/>
+        </p:nvSpPr>
+        <p:spPr>
+          <a:xfrm>
+            <a:off x="457200" y="1261872"/>
+            <a:ext cx="11277295" cy="320040"/>
+          </a:xfrm>
+          <a:prstGeom prst="rect">
+            <a:avLst/>
+          </a:prstGeom>
+          <a:solidFill>
+            <a:srgbClr val="095292"/>
+          </a:solidFill>
+          <a:ln>
+            <a:noFill/>
+          </a:ln>
+        </p:spPr>
+        <p:style>
+          <a:lnRef idx="1">
+            <a:schemeClr val="accent1"/>
+          </a:lnRef>
+          <a:fillRef idx="3">
+            <a:schemeClr val="accent1"/>
+          </a:fillRef>
+          <a:effectRef idx="2">
+            <a:schemeClr val="accent1"/>
+          </a:effectRef>
+          <a:fontRef idx="minor">
+            <a:schemeClr val="lt1"/>
+          </a:fontRef>
+        </p:style>
+        <p:txBody>
+          <a:bodyPr rtlCol="0" anchor="ctr"/>
+          <a:lstStyle/>
+          <a:p>
+            <a:pPr algn="ctr"/>
+          </a:p>
+        </p:txBody>
+      </p:sp>
+      <p:sp>
+        <p:nvSpPr>
+          <p:cNvPr id="7" name="TextBox 6"/>
           <p:cNvSpPr txBox="1"/>
           <p:nvPr/>
         </p:nvSpPr>
         <p:spPr>
           <a:xfrm>
-            <a:off x="457200" y="1170432"/>
-            <a:ext cx="11277295" cy="5230368"/>
+            <a:off x="685800" y="1307592"/>
+            <a:ext cx="10820095" cy="256032"/>
+          </a:xfrm>
+          <a:prstGeom prst="rect">
+            <a:avLst/>
+          </a:prstGeom>
+          <a:noFill/>
+        </p:spPr>
+        <p:txBody>
+          <a:bodyPr wrap="square" anchor="ctr"/>
+          <a:lstStyle/>
+          <a:p>
+            <a:r>
+              <a:rPr sz="1000" b="1" i="0">
+                <a:solidFill>
+                  <a:srgbClr val="269CCB"/>
+                </a:solidFill>
+                <a:latin typeface="Calibri"/>
+              </a:rPr>
+              <a:t>● ● ●</a:t>
+            </a:r>
+          </a:p>
+        </p:txBody>
+      </p:sp>
+      <p:sp>
+        <p:nvSpPr>
+          <p:cNvPr id="8" name="TextBox 7"/>
+          <p:cNvSpPr txBox="1"/>
+          <p:nvPr/>
+        </p:nvSpPr>
+        <p:spPr>
+          <a:xfrm>
+            <a:off x="777240" y="1719072"/>
+            <a:ext cx="10637215" cy="4453128"/>
           </a:xfrm>
           <a:prstGeom prst="rect">
             <a:avLst/>
@@ -6074,108 +6195,216 @@
           <a:p>
             <a:pPr>
               <a:spcAft>
-                <a:spcPts val="800"/>
+                <a:spcPts val="400"/>
               </a:spcAft>
             </a:pPr>
             <a:r>
-              <a:rPr sz="2000" b="0" i="0">
-                <a:solidFill>
-                  <a:srgbClr val="333333"/>
-                </a:solidFill>
-                <a:latin typeface="Calibri"/>
-              </a:rPr>
-              <a:t>–   </a:t>
-            </a:r>
-            <a:r>
-              <a:rPr sz="2000" b="1" i="0">
-                <a:solidFill>
-                  <a:srgbClr val="333333"/>
-                </a:solidFill>
-                <a:latin typeface="Calibri"/>
-              </a:rPr>
-              <a:t>Herramienta:</a:t>
-            </a:r>
-            <a:r>
-              <a:rPr sz="2000" b="0" i="0">
-                <a:solidFill>
-                  <a:srgbClr val="333333"/>
-                </a:solidFill>
-                <a:latin typeface="Calibri"/>
-              </a:rPr>
-              <a:t> Google Docs</a:t>
+              <a:rPr sz="1400" b="0" i="0">
+                <a:solidFill>
+                  <a:srgbClr val="FFFFFF"/>
+                </a:solidFill>
+                <a:latin typeface="Calibri"/>
+              </a:rPr>
+              <a:t>EXPLAIN (ANALYZE, BUFFERS)</a:t>
             </a:r>
           </a:p>
           <a:p>
             <a:pPr>
               <a:spcAft>
-                <a:spcPts val="800"/>
+                <a:spcPts val="400"/>
               </a:spcAft>
             </a:pPr>
             <a:r>
-              <a:rPr sz="2000" b="0" i="0">
-                <a:solidFill>
-                  <a:srgbClr val="333333"/>
-                </a:solidFill>
-                <a:latin typeface="Calibri"/>
-              </a:rPr>
-              <a:t>–   </a:t>
-            </a:r>
-            <a:r>
-              <a:rPr sz="2000" b="1" i="0">
-                <a:solidFill>
-                  <a:srgbClr val="333333"/>
-                </a:solidFill>
-                <a:latin typeface="Calibri"/>
-              </a:rPr>
-              <a:t>Demo:</a:t>
-            </a:r>
-            <a:r>
-              <a:rPr sz="2000" b="0" i="0">
-                <a:solidFill>
-                  <a:srgbClr val="333333"/>
-                </a:solidFill>
-                <a:latin typeface="Calibri"/>
-              </a:rPr>
-              <a:t> Plantilla: contexto -&gt; fallo -&gt; leccion -&gt; cambio en VetCare.</a:t>
+              <a:rPr sz="1400" b="0" i="0">
+                <a:solidFill>
+                  <a:srgbClr val="FFFFFF"/>
+                </a:solidFill>
+                <a:latin typeface="Calibri"/>
+              </a:rPr>
+              <a:t>SELECT d.nombre, COUNT(c.id_cita) AS citas</a:t>
             </a:r>
           </a:p>
           <a:p>
             <a:pPr>
               <a:spcAft>
-                <a:spcPts val="800"/>
+                <a:spcPts val="400"/>
               </a:spcAft>
             </a:pPr>
             <a:r>
-              <a:rPr sz="2000" b="0" i="0">
-                <a:solidFill>
-                  <a:srgbClr val="333333"/>
-                </a:solidFill>
-                <a:latin typeface="Calibri"/>
-              </a:rPr>
-              <a:t>–   Sigan el mismo dominio VetCare (no inventen otro caso).</a:t>
+              <a:rPr sz="1400" b="0" i="0">
+                <a:solidFill>
+                  <a:srgbClr val="FFFFFF"/>
+                </a:solidFill>
+                <a:latin typeface="Calibri"/>
+              </a:rPr>
+              <a:t>FROM dueno d</a:t>
             </a:r>
           </a:p>
           <a:p>
             <a:pPr>
               <a:spcAft>
-                <a:spcPts val="800"/>
+                <a:spcPts val="400"/>
               </a:spcAft>
             </a:pPr>
             <a:r>
-              <a:rPr sz="2000" b="0" i="0">
-                <a:solidFill>
-                  <a:srgbClr val="333333"/>
-                </a:solidFill>
-                <a:latin typeface="Calibri"/>
-              </a:rPr>
-              <a:t>–   Al final de la demo: dejar enlace/script compartible al grupo.</a:t>
-            </a:r>
-          </a:p>
-        </p:txBody>
-      </p:sp>
-      <p:sp>
-        <p:nvSpPr>
-          <p:cNvPr id="6" name="TextBox 5"/>
+              <a:rPr sz="1400" b="0" i="0">
+                <a:solidFill>
+                  <a:srgbClr val="FFFFFF"/>
+                </a:solidFill>
+                <a:latin typeface="Calibri"/>
+              </a:rPr>
+              <a:t>JOIN mascota m ON m.id_dueno   = d.id_dueno</a:t>
+            </a:r>
+          </a:p>
+          <a:p>
+            <a:pPr>
+              <a:spcAft>
+                <a:spcPts val="400"/>
+              </a:spcAft>
+            </a:pPr>
+            <a:r>
+              <a:rPr sz="1400" b="0" i="0">
+                <a:solidFill>
+                  <a:srgbClr val="FFFFFF"/>
+                </a:solidFill>
+                <a:latin typeface="Calibri"/>
+              </a:rPr>
+              <a:t>JOIN cita    c ON c.id_mascota = m.id_mascota</a:t>
+            </a:r>
+          </a:p>
+          <a:p>
+            <a:pPr>
+              <a:spcAft>
+                <a:spcPts val="400"/>
+              </a:spcAft>
+            </a:pPr>
+            <a:r>
+              <a:rPr sz="1400" b="0" i="0">
+                <a:solidFill>
+                  <a:srgbClr val="FFFFFF"/>
+                </a:solidFill>
+                <a:latin typeface="Calibri"/>
+              </a:rPr>
+              <a:t>WHERE c.fecha_hora &gt;= DATE '2026-01-01'</a:t>
+            </a:r>
+          </a:p>
+          <a:p>
+            <a:pPr>
+              <a:spcAft>
+                <a:spcPts val="400"/>
+              </a:spcAft>
+            </a:pPr>
+            <a:r>
+              <a:rPr sz="1400" b="0" i="0">
+                <a:solidFill>
+                  <a:srgbClr val="FFFFFF"/>
+                </a:solidFill>
+                <a:latin typeface="Calibri"/>
+              </a:rPr>
+              <a:t>GROUP BY d.id_dueno, d.nombre</a:t>
+            </a:r>
+          </a:p>
+          <a:p>
+            <a:pPr>
+              <a:spcAft>
+                <a:spcPts val="400"/>
+              </a:spcAft>
+            </a:pPr>
+            <a:r>
+              <a:rPr sz="1400" b="0" i="0">
+                <a:solidFill>
+                  <a:srgbClr val="FFFFFF"/>
+                </a:solidFill>
+                <a:latin typeface="Calibri"/>
+              </a:rPr>
+              <a:t>HAVING COUNT(c.id_cita) &gt; 5;</a:t>
+            </a:r>
+          </a:p>
+          <a:p>
+            <a:pPr>
+              <a:spcAft>
+                <a:spcPts val="400"/>
+              </a:spcAft>
+            </a:pPr>
+            <a:r>
+              <a:rPr sz="1400" b="0" i="0">
+                <a:solidFill>
+                  <a:srgbClr val="FFFFFF"/>
+                </a:solidFill>
+                <a:latin typeface="Calibri"/>
+              </a:rPr>
+              <a:t/>
+            </a:r>
+          </a:p>
+          <a:p>
+            <a:pPr>
+              <a:spcAft>
+                <a:spcPts val="400"/>
+              </a:spcAft>
+            </a:pPr>
+            <a:r>
+              <a:rPr sz="1400" b="0" i="0">
+                <a:solidFill>
+                  <a:srgbClr val="FFFFFF"/>
+                </a:solidFill>
+                <a:latin typeface="Calibri"/>
+              </a:rPr>
+              <a:t>-- 1. el nodo mas costoso (cost mas alto), no el primero</a:t>
+            </a:r>
+          </a:p>
+          <a:p>
+            <a:pPr>
+              <a:spcAft>
+                <a:spcPts val="400"/>
+              </a:spcAft>
+            </a:pPr>
+            <a:r>
+              <a:rPr sz="1400" b="0" i="0">
+                <a:solidFill>
+                  <a:srgbClr val="FFFFFF"/>
+                </a:solidFill>
+                <a:latin typeface="Calibri"/>
+              </a:rPr>
+              <a:t>-- 2. Seq Scan sobre tabla grande con filtro selectivo -&gt; falta indice</a:t>
+            </a:r>
+          </a:p>
+          <a:p>
+            <a:pPr>
+              <a:spcAft>
+                <a:spcPts val="400"/>
+              </a:spcAft>
+            </a:pPr>
+            <a:r>
+              <a:rPr sz="1400" b="0" i="0">
+                <a:solidFill>
+                  <a:srgbClr val="FFFFFF"/>
+                </a:solidFill>
+                <a:latin typeface="Calibri"/>
+              </a:rPr>
+              <a:t>-- 3. rows estimadas vs actual: si difieren 10x, ANALYZE la tabla</a:t>
+            </a:r>
+          </a:p>
+          <a:p>
+            <a:pPr>
+              <a:spcAft>
+                <a:spcPts val="400"/>
+              </a:spcAft>
+            </a:pPr>
+            <a:r>
+              <a:rPr sz="1400" b="0" i="0">
+                <a:solidFill>
+                  <a:srgbClr val="FFFFFF"/>
+                </a:solidFill>
+                <a:latin typeface="Calibri"/>
+              </a:rPr>
+              <a:t>-- 4. Nested Loop con muchas filas -&gt; suele querer Hash Join</a:t>
+            </a:r>
+          </a:p>
+        </p:txBody>
+      </p:sp>
+      <p:sp>
+        <p:nvSpPr>
+          <p:cNvPr id="9" name="TextBox 8"/>
           <p:cNvSpPr txBox="1"/>
           <p:nvPr/>
         </p:nvSpPr>
@@ -6615,7 +6844,7 @@
         <p:spPr>
           <a:xfrm>
             <a:off x="0" y="0"/>
-            <a:ext cx="12191695" cy="1170432"/>
+            <a:ext cx="12191695" cy="960120"/>
           </a:xfrm>
           <a:prstGeom prst="rect">
             <a:avLst/>
@@ -6657,7 +6886,7 @@
         </p:nvSpPr>
         <p:spPr>
           <a:xfrm>
-            <a:off x="0" y="1170432"/>
+            <a:off x="0" y="960120"/>
             <a:ext cx="12191695" cy="41148"/>
           </a:xfrm>
           <a:prstGeom prst="rect">
@@ -6701,7 +6930,7 @@
         <p:spPr>
           <a:xfrm>
             <a:off x="457200" y="164592"/>
-            <a:ext cx="11277295" cy="384048"/>
+            <a:ext cx="11277295" cy="502920"/>
           </a:xfrm>
           <a:prstGeom prst="rect">
             <a:avLst/>
@@ -6721,7 +6950,7 @@
                 </a:solidFill>
                 <a:latin typeface="Calibri"/>
               </a:rPr>
-              <a:t>Herramientas de hoy</a:t>
+              <a:t>Demo del dia</a:t>
             </a:r>
           </a:p>
         </p:txBody>
@@ -6734,8 +6963,8 @@
         </p:nvSpPr>
         <p:spPr>
           <a:xfrm>
-            <a:off x="457200" y="566928"/>
-            <a:ext cx="11277295" cy="411480"/>
+            <a:off x="457200" y="1170432"/>
+            <a:ext cx="11277295" cy="5230368"/>
           </a:xfrm>
           <a:prstGeom prst="rect">
             <a:avLst/>
@@ -6748,633 +6977,110 @@
           </a:bodyPr>
           <a:lstStyle/>
           <a:p>
-            <a:r>
-              <a:rPr sz="1400" b="0" i="0">
-                <a:solidFill>
-                  <a:srgbClr val="B8D8EE"/>
-                </a:solidFill>
-                <a:latin typeface="Calibri"/>
-              </a:rPr>
-              <a:t>Gratis · navegador o free tier</a:t>
-            </a:r>
-          </a:p>
-        </p:txBody>
-      </p:sp>
-      <p:sp>
-        <p:nvSpPr>
-          <p:cNvPr id="6" name="Rounded Rectangle 5"/>
-          <p:cNvSpPr/>
-          <p:nvPr/>
-        </p:nvSpPr>
-        <p:spPr>
-          <a:xfrm>
-            <a:off x="457200" y="1591056"/>
-            <a:ext cx="3624986" cy="2331720"/>
-          </a:xfrm>
-          <a:prstGeom prst="roundRect">
-            <a:avLst>
-              <a:gd name="adj" fmla="val 12000"/>
-            </a:avLst>
-          </a:prstGeom>
-          <a:solidFill>
-            <a:srgbClr val="F2F2F2"/>
-          </a:solidFill>
-          <a:ln>
-            <a:noFill/>
-          </a:ln>
-        </p:spPr>
-        <p:style>
-          <a:lnRef idx="1">
-            <a:schemeClr val="accent1"/>
-          </a:lnRef>
-          <a:fillRef idx="3">
-            <a:schemeClr val="accent1"/>
-          </a:fillRef>
-          <a:effectRef idx="2">
-            <a:schemeClr val="accent1"/>
-          </a:effectRef>
-          <a:fontRef idx="minor">
-            <a:schemeClr val="lt1"/>
-          </a:fontRef>
-        </p:style>
-        <p:txBody>
-          <a:bodyPr rtlCol="0" anchor="ctr"/>
-          <a:lstStyle/>
-          <a:p>
-            <a:pPr algn="ctr"/>
-          </a:p>
-        </p:txBody>
-      </p:sp>
-      <p:sp>
-        <p:nvSpPr>
-          <p:cNvPr id="7" name="Rectangle 6"/>
-          <p:cNvSpPr/>
-          <p:nvPr/>
-        </p:nvSpPr>
-        <p:spPr>
-          <a:xfrm>
-            <a:off x="457200" y="1591056"/>
-            <a:ext cx="3624986" cy="64008"/>
-          </a:xfrm>
-          <a:prstGeom prst="rect">
-            <a:avLst/>
-          </a:prstGeom>
-          <a:solidFill>
-            <a:srgbClr val="095292"/>
-          </a:solidFill>
-          <a:ln>
-            <a:noFill/>
-          </a:ln>
-        </p:spPr>
-        <p:style>
-          <a:lnRef idx="1">
-            <a:schemeClr val="accent1"/>
-          </a:lnRef>
-          <a:fillRef idx="3">
-            <a:schemeClr val="accent1"/>
-          </a:fillRef>
-          <a:effectRef idx="2">
-            <a:schemeClr val="accent1"/>
-          </a:effectRef>
-          <a:fontRef idx="minor">
-            <a:schemeClr val="lt1"/>
-          </a:fontRef>
-        </p:style>
-        <p:txBody>
-          <a:bodyPr rtlCol="0" anchor="ctr"/>
-          <a:lstStyle/>
-          <a:p>
-            <a:pPr algn="ctr"/>
-          </a:p>
-        </p:txBody>
-      </p:sp>
-      <p:sp>
-        <p:nvSpPr>
-          <p:cNvPr id="8" name="Rectangle 7"/>
-          <p:cNvSpPr/>
-          <p:nvPr/>
-        </p:nvSpPr>
-        <p:spPr>
-          <a:xfrm>
-            <a:off x="457200" y="1655064"/>
-            <a:ext cx="3624986" cy="27432"/>
-          </a:xfrm>
-          <a:prstGeom prst="rect">
-            <a:avLst/>
-          </a:prstGeom>
-          <a:solidFill>
-            <a:srgbClr val="FFD000"/>
-          </a:solidFill>
-          <a:ln>
-            <a:noFill/>
-          </a:ln>
-        </p:spPr>
-        <p:style>
-          <a:lnRef idx="1">
-            <a:schemeClr val="accent1"/>
-          </a:lnRef>
-          <a:fillRef idx="3">
-            <a:schemeClr val="accent1"/>
-          </a:fillRef>
-          <a:effectRef idx="2">
-            <a:schemeClr val="accent1"/>
-          </a:effectRef>
-          <a:fontRef idx="minor">
-            <a:schemeClr val="lt1"/>
-          </a:fontRef>
-        </p:style>
-        <p:txBody>
-          <a:bodyPr rtlCol="0" anchor="ctr"/>
-          <a:lstStyle/>
-          <a:p>
-            <a:pPr algn="ctr"/>
-          </a:p>
-        </p:txBody>
-      </p:sp>
-      <p:pic>
-        <p:nvPicPr>
-          <p:cNvPr id="9" name="Picture 8" descr="google_docs.png"/>
-          <p:cNvPicPr>
-            <a:picLocks noChangeAspect="1"/>
-          </p:cNvPicPr>
-          <p:nvPr/>
-        </p:nvPicPr>
-        <p:blipFill>
-          <a:blip r:embed="rId2"/>
-          <a:stretch>
-            <a:fillRect/>
-          </a:stretch>
-        </p:blipFill>
-        <p:spPr>
-          <a:xfrm>
-            <a:off x="1643329" y="1847087"/>
-            <a:ext cx="1252728" cy="1252728"/>
-          </a:xfrm>
-          <a:prstGeom prst="rect">
-            <a:avLst/>
-          </a:prstGeom>
-        </p:spPr>
-      </p:pic>
-      <p:sp>
-        <p:nvSpPr>
-          <p:cNvPr id="10" name="TextBox 9"/>
-          <p:cNvSpPr txBox="1"/>
-          <p:nvPr/>
-        </p:nvSpPr>
-        <p:spPr>
-          <a:xfrm>
-            <a:off x="530352" y="3191256"/>
-            <a:ext cx="3478682" cy="621792"/>
-          </a:xfrm>
-          <a:prstGeom prst="rect">
-            <a:avLst/>
-          </a:prstGeom>
-          <a:noFill/>
-        </p:spPr>
-        <p:txBody>
-          <a:bodyPr wrap="square" anchor="t"/>
-          <a:lstStyle/>
-          <a:p>
-            <a:pPr algn="ctr"/>
-            <a:r>
-              <a:rPr sz="1300" b="1" i="0">
-                <a:solidFill>
-                  <a:srgbClr val="095292"/>
-                </a:solidFill>
-                <a:latin typeface="Calibri"/>
-              </a:rPr>
-              <a:t>Google Docs</a:t>
-            </a:r>
-          </a:p>
-          <a:p>
-            <a:pPr algn="ctr">
-              <a:spcBef>
-                <a:spcPts val="200"/>
-              </a:spcBef>
+            <a:pPr>
+              <a:spcAft>
+                <a:spcPts val="800"/>
+              </a:spcAft>
             </a:pPr>
             <a:r>
-              <a:rPr sz="1000" b="0" i="0">
-                <a:solidFill>
-                  <a:srgbClr val="666666"/>
-                </a:solidFill>
-                <a:latin typeface="Calibri"/>
-              </a:rPr>
-              <a:t>Caso real</a:t>
-            </a:r>
-          </a:p>
-        </p:txBody>
-      </p:sp>
-      <p:sp>
-        <p:nvSpPr>
-          <p:cNvPr id="11" name="Rounded Rectangle 10"/>
-          <p:cNvSpPr/>
-          <p:nvPr/>
-        </p:nvSpPr>
-        <p:spPr>
-          <a:xfrm>
-            <a:off x="4283354" y="1591056"/>
-            <a:ext cx="3624986" cy="2331720"/>
-          </a:xfrm>
-          <a:prstGeom prst="roundRect">
-            <a:avLst>
-              <a:gd name="adj" fmla="val 12000"/>
-            </a:avLst>
-          </a:prstGeom>
-          <a:solidFill>
-            <a:srgbClr val="F2F2F2"/>
-          </a:solidFill>
-          <a:ln>
-            <a:noFill/>
-          </a:ln>
-        </p:spPr>
-        <p:style>
-          <a:lnRef idx="1">
-            <a:schemeClr val="accent1"/>
-          </a:lnRef>
-          <a:fillRef idx="3">
-            <a:schemeClr val="accent1"/>
-          </a:fillRef>
-          <a:effectRef idx="2">
-            <a:schemeClr val="accent1"/>
-          </a:effectRef>
-          <a:fontRef idx="minor">
-            <a:schemeClr val="lt1"/>
-          </a:fontRef>
-        </p:style>
-        <p:txBody>
-          <a:bodyPr rtlCol="0" anchor="ctr"/>
-          <a:lstStyle/>
-          <a:p>
-            <a:pPr algn="ctr"/>
-          </a:p>
-        </p:txBody>
-      </p:sp>
-      <p:sp>
-        <p:nvSpPr>
-          <p:cNvPr id="12" name="Rectangle 11"/>
-          <p:cNvSpPr/>
-          <p:nvPr/>
-        </p:nvSpPr>
-        <p:spPr>
-          <a:xfrm>
-            <a:off x="4283354" y="1591056"/>
-            <a:ext cx="3624986" cy="64008"/>
-          </a:xfrm>
-          <a:prstGeom prst="rect">
-            <a:avLst/>
-          </a:prstGeom>
-          <a:solidFill>
-            <a:srgbClr val="095292"/>
-          </a:solidFill>
-          <a:ln>
-            <a:noFill/>
-          </a:ln>
-        </p:spPr>
-        <p:style>
-          <a:lnRef idx="1">
-            <a:schemeClr val="accent1"/>
-          </a:lnRef>
-          <a:fillRef idx="3">
-            <a:schemeClr val="accent1"/>
-          </a:fillRef>
-          <a:effectRef idx="2">
-            <a:schemeClr val="accent1"/>
-          </a:effectRef>
-          <a:fontRef idx="minor">
-            <a:schemeClr val="lt1"/>
-          </a:fontRef>
-        </p:style>
-        <p:txBody>
-          <a:bodyPr rtlCol="0" anchor="ctr"/>
-          <a:lstStyle/>
-          <a:p>
-            <a:pPr algn="ctr"/>
-          </a:p>
-        </p:txBody>
-      </p:sp>
-      <p:sp>
-        <p:nvSpPr>
-          <p:cNvPr id="13" name="Rectangle 12"/>
-          <p:cNvSpPr/>
-          <p:nvPr/>
-        </p:nvSpPr>
-        <p:spPr>
-          <a:xfrm>
-            <a:off x="4283354" y="1655064"/>
-            <a:ext cx="3624986" cy="27432"/>
-          </a:xfrm>
-          <a:prstGeom prst="rect">
-            <a:avLst/>
-          </a:prstGeom>
-          <a:solidFill>
-            <a:srgbClr val="FFD000"/>
-          </a:solidFill>
-          <a:ln>
-            <a:noFill/>
-          </a:ln>
-        </p:spPr>
-        <p:style>
-          <a:lnRef idx="1">
-            <a:schemeClr val="accent1"/>
-          </a:lnRef>
-          <a:fillRef idx="3">
-            <a:schemeClr val="accent1"/>
-          </a:fillRef>
-          <a:effectRef idx="2">
-            <a:schemeClr val="accent1"/>
-          </a:effectRef>
-          <a:fontRef idx="minor">
-            <a:schemeClr val="lt1"/>
-          </a:fontRef>
-        </p:style>
-        <p:txBody>
-          <a:bodyPr rtlCol="0" anchor="ctr"/>
-          <a:lstStyle/>
-          <a:p>
-            <a:pPr algn="ctr"/>
-          </a:p>
-        </p:txBody>
-      </p:sp>
-      <p:pic>
-        <p:nvPicPr>
-          <p:cNvPr id="14" name="Picture 13" descr="drawio.png"/>
-          <p:cNvPicPr>
-            <a:picLocks noChangeAspect="1"/>
-          </p:cNvPicPr>
-          <p:nvPr/>
-        </p:nvPicPr>
-        <p:blipFill>
-          <a:blip r:embed="rId3"/>
-          <a:stretch>
-            <a:fillRect/>
-          </a:stretch>
-        </p:blipFill>
-        <p:spPr>
-          <a:xfrm>
-            <a:off x="5469483" y="1847087"/>
-            <a:ext cx="1252728" cy="1252728"/>
-          </a:xfrm>
-          <a:prstGeom prst="rect">
-            <a:avLst/>
-          </a:prstGeom>
-        </p:spPr>
-      </p:pic>
-      <p:sp>
-        <p:nvSpPr>
-          <p:cNvPr id="15" name="TextBox 14"/>
-          <p:cNvSpPr txBox="1"/>
-          <p:nvPr/>
-        </p:nvSpPr>
-        <p:spPr>
-          <a:xfrm>
-            <a:off x="4356506" y="3191256"/>
-            <a:ext cx="3478682" cy="621792"/>
-          </a:xfrm>
-          <a:prstGeom prst="rect">
-            <a:avLst/>
-          </a:prstGeom>
-          <a:noFill/>
-        </p:spPr>
-        <p:txBody>
-          <a:bodyPr wrap="square" anchor="t"/>
-          <a:lstStyle/>
-          <a:p>
-            <a:pPr algn="ctr"/>
-            <a:r>
-              <a:rPr sz="1300" b="1" i="0">
-                <a:solidFill>
-                  <a:srgbClr val="095292"/>
-                </a:solidFill>
-                <a:latin typeface="Calibri"/>
-              </a:rPr>
-              <a:t>draw.io</a:t>
-            </a:r>
-          </a:p>
-          <a:p>
-            <a:pPr algn="ctr">
-              <a:spcBef>
-                <a:spcPts val="200"/>
-              </a:spcBef>
+              <a:rPr sz="2000" b="0" i="0">
+                <a:solidFill>
+                  <a:srgbClr val="333333"/>
+                </a:solidFill>
+                <a:latin typeface="Calibri"/>
+              </a:rPr>
+              <a:t>–   </a:t>
+            </a:r>
+            <a:r>
+              <a:rPr sz="2000" b="1" i="0">
+                <a:solidFill>
+                  <a:srgbClr val="333333"/>
+                </a:solidFill>
+                <a:latin typeface="Calibri"/>
+              </a:rPr>
+              <a:t>Herramienta:</a:t>
+            </a:r>
+            <a:r>
+              <a:rPr sz="2000" b="0" i="0">
+                <a:solidFill>
+                  <a:srgbClr val="333333"/>
+                </a:solidFill>
+                <a:latin typeface="Calibri"/>
+              </a:rPr>
+              <a:t> Google Docs</a:t>
+            </a:r>
+          </a:p>
+          <a:p>
+            <a:pPr>
+              <a:spcAft>
+                <a:spcPts val="800"/>
+              </a:spcAft>
             </a:pPr>
             <a:r>
-              <a:rPr sz="1000" b="0" i="0">
-                <a:solidFill>
-                  <a:srgbClr val="666666"/>
-                </a:solidFill>
-                <a:latin typeface="Calibri"/>
-              </a:rPr>
-              <a:t>Leccion</a:t>
-            </a:r>
-          </a:p>
-        </p:txBody>
-      </p:sp>
-      <p:sp>
-        <p:nvSpPr>
-          <p:cNvPr id="16" name="Rounded Rectangle 15"/>
-          <p:cNvSpPr/>
-          <p:nvPr/>
-        </p:nvSpPr>
-        <p:spPr>
-          <a:xfrm>
-            <a:off x="8109508" y="1591056"/>
-            <a:ext cx="3624986" cy="2331720"/>
-          </a:xfrm>
-          <a:prstGeom prst="roundRect">
-            <a:avLst>
-              <a:gd name="adj" fmla="val 12000"/>
-            </a:avLst>
-          </a:prstGeom>
-          <a:solidFill>
-            <a:srgbClr val="F2F2F2"/>
-          </a:solidFill>
-          <a:ln>
-            <a:noFill/>
-          </a:ln>
-        </p:spPr>
-        <p:style>
-          <a:lnRef idx="1">
-            <a:schemeClr val="accent1"/>
-          </a:lnRef>
-          <a:fillRef idx="3">
-            <a:schemeClr val="accent1"/>
-          </a:fillRef>
-          <a:effectRef idx="2">
-            <a:schemeClr val="accent1"/>
-          </a:effectRef>
-          <a:fontRef idx="minor">
-            <a:schemeClr val="lt1"/>
-          </a:fontRef>
-        </p:style>
-        <p:txBody>
-          <a:bodyPr rtlCol="0" anchor="ctr"/>
-          <a:lstStyle/>
-          <a:p>
-            <a:pPr algn="ctr"/>
-          </a:p>
-        </p:txBody>
-      </p:sp>
-      <p:sp>
-        <p:nvSpPr>
-          <p:cNvPr id="17" name="Rectangle 16"/>
-          <p:cNvSpPr/>
-          <p:nvPr/>
-        </p:nvSpPr>
-        <p:spPr>
-          <a:xfrm>
-            <a:off x="8109508" y="1591056"/>
-            <a:ext cx="3624986" cy="64008"/>
-          </a:xfrm>
-          <a:prstGeom prst="rect">
-            <a:avLst/>
-          </a:prstGeom>
-          <a:solidFill>
-            <a:srgbClr val="095292"/>
-          </a:solidFill>
-          <a:ln>
-            <a:noFill/>
-          </a:ln>
-        </p:spPr>
-        <p:style>
-          <a:lnRef idx="1">
-            <a:schemeClr val="accent1"/>
-          </a:lnRef>
-          <a:fillRef idx="3">
-            <a:schemeClr val="accent1"/>
-          </a:fillRef>
-          <a:effectRef idx="2">
-            <a:schemeClr val="accent1"/>
-          </a:effectRef>
-          <a:fontRef idx="minor">
-            <a:schemeClr val="lt1"/>
-          </a:fontRef>
-        </p:style>
-        <p:txBody>
-          <a:bodyPr rtlCol="0" anchor="ctr"/>
-          <a:lstStyle/>
-          <a:p>
-            <a:pPr algn="ctr"/>
-          </a:p>
-        </p:txBody>
-      </p:sp>
-      <p:sp>
-        <p:nvSpPr>
-          <p:cNvPr id="18" name="Rectangle 17"/>
-          <p:cNvSpPr/>
-          <p:nvPr/>
-        </p:nvSpPr>
-        <p:spPr>
-          <a:xfrm>
-            <a:off x="8109508" y="1655064"/>
-            <a:ext cx="3624986" cy="27432"/>
-          </a:xfrm>
-          <a:prstGeom prst="rect">
-            <a:avLst/>
-          </a:prstGeom>
-          <a:solidFill>
-            <a:srgbClr val="FFD000"/>
-          </a:solidFill>
-          <a:ln>
-            <a:noFill/>
-          </a:ln>
-        </p:spPr>
-        <p:style>
-          <a:lnRef idx="1">
-            <a:schemeClr val="accent1"/>
-          </a:lnRef>
-          <a:fillRef idx="3">
-            <a:schemeClr val="accent1"/>
-          </a:fillRef>
-          <a:effectRef idx="2">
-            <a:schemeClr val="accent1"/>
-          </a:effectRef>
-          <a:fontRef idx="minor">
-            <a:schemeClr val="lt1"/>
-          </a:fontRef>
-        </p:style>
-        <p:txBody>
-          <a:bodyPr rtlCol="0" anchor="ctr"/>
-          <a:lstStyle/>
-          <a:p>
-            <a:pPr algn="ctr"/>
-          </a:p>
-        </p:txBody>
-      </p:sp>
-      <p:pic>
-        <p:nvPicPr>
-          <p:cNvPr id="19" name="Picture 18" descr="dbfiddle.png"/>
-          <p:cNvPicPr>
-            <a:picLocks noChangeAspect="1"/>
-          </p:cNvPicPr>
-          <p:nvPr/>
-        </p:nvPicPr>
-        <p:blipFill>
-          <a:blip r:embed="rId4"/>
-          <a:stretch>
-            <a:fillRect/>
-          </a:stretch>
-        </p:blipFill>
-        <p:spPr>
-          <a:xfrm>
-            <a:off x="9295638" y="1847087"/>
-            <a:ext cx="1252728" cy="1252728"/>
-          </a:xfrm>
-          <a:prstGeom prst="rect">
-            <a:avLst/>
-          </a:prstGeom>
-        </p:spPr>
-      </p:pic>
-      <p:sp>
-        <p:nvSpPr>
-          <p:cNvPr id="20" name="TextBox 19"/>
-          <p:cNvSpPr txBox="1"/>
-          <p:nvPr/>
-        </p:nvSpPr>
-        <p:spPr>
-          <a:xfrm>
-            <a:off x="8182660" y="3191256"/>
-            <a:ext cx="3478682" cy="621792"/>
-          </a:xfrm>
-          <a:prstGeom prst="rect">
-            <a:avLst/>
-          </a:prstGeom>
-          <a:noFill/>
-        </p:spPr>
-        <p:txBody>
-          <a:bodyPr wrap="square" anchor="t"/>
-          <a:lstStyle/>
-          <a:p>
-            <a:pPr algn="ctr"/>
-            <a:r>
-              <a:rPr sz="1300" b="1" i="0">
-                <a:solidFill>
-                  <a:srgbClr val="095292"/>
-                </a:solidFill>
-                <a:latin typeface="Calibri"/>
-              </a:rPr>
-              <a:t>DB Fiddle</a:t>
-            </a:r>
-          </a:p>
-          <a:p>
-            <a:pPr algn="ctr">
-              <a:spcBef>
-                <a:spcPts val="200"/>
-              </a:spcBef>
+              <a:rPr sz="2000" b="0" i="0">
+                <a:solidFill>
+                  <a:srgbClr val="333333"/>
+                </a:solidFill>
+                <a:latin typeface="Calibri"/>
+              </a:rPr>
+              <a:t>–   </a:t>
+            </a:r>
+            <a:r>
+              <a:rPr sz="2000" b="1" i="0">
+                <a:solidFill>
+                  <a:srgbClr val="333333"/>
+                </a:solidFill>
+                <a:latin typeface="Calibri"/>
+              </a:rPr>
+              <a:t>Demo:</a:t>
+            </a:r>
+            <a:r>
+              <a:rPr sz="2000" b="0" i="0">
+                <a:solidFill>
+                  <a:srgbClr val="333333"/>
+                </a:solidFill>
+                <a:latin typeface="Calibri"/>
+              </a:rPr>
+              <a:t> Plantilla: contexto -&gt; fallo -&gt; leccion -&gt; cambio en VetCare.</a:t>
+            </a:r>
+          </a:p>
+          <a:p>
+            <a:pPr>
+              <a:spcAft>
+                <a:spcPts val="800"/>
+              </a:spcAft>
             </a:pPr>
             <a:r>
-              <a:rPr sz="1000" b="0" i="0">
-                <a:solidFill>
-                  <a:srgbClr val="666666"/>
-                </a:solidFill>
-                <a:latin typeface="Calibri"/>
-              </a:rPr>
-              <a:t>Opcional SQL</a:t>
-            </a:r>
-          </a:p>
-        </p:txBody>
-      </p:sp>
-      <p:sp>
-        <p:nvSpPr>
-          <p:cNvPr id="21" name="TextBox 20"/>
+              <a:rPr sz="2000" b="0" i="0">
+                <a:solidFill>
+                  <a:srgbClr val="333333"/>
+                </a:solidFill>
+                <a:latin typeface="Calibri"/>
+              </a:rPr>
+              <a:t>–   Sigan el mismo dominio VetCare (no inventen otro caso).</a:t>
+            </a:r>
+          </a:p>
+          <a:p>
+            <a:pPr>
+              <a:spcAft>
+                <a:spcPts val="800"/>
+              </a:spcAft>
+            </a:pPr>
+            <a:r>
+              <a:rPr sz="2000" b="0" i="0">
+                <a:solidFill>
+                  <a:srgbClr val="333333"/>
+                </a:solidFill>
+                <a:latin typeface="Calibri"/>
+              </a:rPr>
+              <a:t>–   Al final de la demo: dejar enlace/script compartible al grupo.</a:t>
+            </a:r>
+          </a:p>
+        </p:txBody>
+      </p:sp>
+      <p:sp>
+        <p:nvSpPr>
+          <p:cNvPr id="6" name="TextBox 5"/>
           <p:cNvSpPr txBox="1"/>
           <p:nvPr/>
         </p:nvSpPr>
@@ -7442,7 +7148,7 @@
         <p:spPr>
           <a:xfrm>
             <a:off x="0" y="0"/>
-            <a:ext cx="12191695" cy="960120"/>
+            <a:ext cx="12191695" cy="1170432"/>
           </a:xfrm>
           <a:prstGeom prst="rect">
             <a:avLst/>
@@ -7484,7 +7190,7 @@
         </p:nvSpPr>
         <p:spPr>
           <a:xfrm>
-            <a:off x="0" y="960120"/>
+            <a:off x="0" y="1170432"/>
             <a:ext cx="12191695" cy="41148"/>
           </a:xfrm>
           <a:prstGeom prst="rect">
@@ -7528,7 +7234,7 @@
         <p:spPr>
           <a:xfrm>
             <a:off x="457200" y="164592"/>
-            <a:ext cx="11277295" cy="502920"/>
+            <a:ext cx="11277295" cy="384048"/>
           </a:xfrm>
           <a:prstGeom prst="rect">
             <a:avLst/>
@@ -7548,7 +7254,7 @@
                 </a:solidFill>
                 <a:latin typeface="Calibri"/>
               </a:rPr>
-              <a:t>Actividad autonoma — contexto / por que importa</a:t>
+              <a:t>Herramientas de hoy</a:t>
             </a:r>
           </a:p>
         </p:txBody>
@@ -7561,8 +7267,8 @@
         </p:nvSpPr>
         <p:spPr>
           <a:xfrm>
-            <a:off x="457200" y="1170432"/>
-            <a:ext cx="11277295" cy="5230368"/>
+            <a:off x="457200" y="566928"/>
+            <a:ext cx="11277295" cy="411480"/>
           </a:xfrm>
           <a:prstGeom prst="rect">
             <a:avLst/>
@@ -7575,60 +7281,633 @@
           </a:bodyPr>
           <a:lstStyle/>
           <a:p>
-            <a:pPr>
-              <a:spcAft>
-                <a:spcPts val="800"/>
-              </a:spcAft>
+            <a:r>
+              <a:rPr sz="1400" b="0" i="0">
+                <a:solidFill>
+                  <a:srgbClr val="B8D8EE"/>
+                </a:solidFill>
+                <a:latin typeface="Calibri"/>
+              </a:rPr>
+              <a:t>Gratis · navegador o free tier</a:t>
+            </a:r>
+          </a:p>
+        </p:txBody>
+      </p:sp>
+      <p:sp>
+        <p:nvSpPr>
+          <p:cNvPr id="6" name="Rounded Rectangle 5"/>
+          <p:cNvSpPr/>
+          <p:nvPr/>
+        </p:nvSpPr>
+        <p:spPr>
+          <a:xfrm>
+            <a:off x="457200" y="1591056"/>
+            <a:ext cx="3624986" cy="2331720"/>
+          </a:xfrm>
+          <a:prstGeom prst="roundRect">
+            <a:avLst>
+              <a:gd name="adj" fmla="val 12000"/>
+            </a:avLst>
+          </a:prstGeom>
+          <a:solidFill>
+            <a:srgbClr val="F2F2F2"/>
+          </a:solidFill>
+          <a:ln>
+            <a:noFill/>
+          </a:ln>
+        </p:spPr>
+        <p:style>
+          <a:lnRef idx="1">
+            <a:schemeClr val="accent1"/>
+          </a:lnRef>
+          <a:fillRef idx="3">
+            <a:schemeClr val="accent1"/>
+          </a:fillRef>
+          <a:effectRef idx="2">
+            <a:schemeClr val="accent1"/>
+          </a:effectRef>
+          <a:fontRef idx="minor">
+            <a:schemeClr val="lt1"/>
+          </a:fontRef>
+        </p:style>
+        <p:txBody>
+          <a:bodyPr rtlCol="0" anchor="ctr"/>
+          <a:lstStyle/>
+          <a:p>
+            <a:pPr algn="ctr"/>
+          </a:p>
+        </p:txBody>
+      </p:sp>
+      <p:sp>
+        <p:nvSpPr>
+          <p:cNvPr id="7" name="Rectangle 6"/>
+          <p:cNvSpPr/>
+          <p:nvPr/>
+        </p:nvSpPr>
+        <p:spPr>
+          <a:xfrm>
+            <a:off x="457200" y="1591056"/>
+            <a:ext cx="3624986" cy="64008"/>
+          </a:xfrm>
+          <a:prstGeom prst="rect">
+            <a:avLst/>
+          </a:prstGeom>
+          <a:solidFill>
+            <a:srgbClr val="095292"/>
+          </a:solidFill>
+          <a:ln>
+            <a:noFill/>
+          </a:ln>
+        </p:spPr>
+        <p:style>
+          <a:lnRef idx="1">
+            <a:schemeClr val="accent1"/>
+          </a:lnRef>
+          <a:fillRef idx="3">
+            <a:schemeClr val="accent1"/>
+          </a:fillRef>
+          <a:effectRef idx="2">
+            <a:schemeClr val="accent1"/>
+          </a:effectRef>
+          <a:fontRef idx="minor">
+            <a:schemeClr val="lt1"/>
+          </a:fontRef>
+        </p:style>
+        <p:txBody>
+          <a:bodyPr rtlCol="0" anchor="ctr"/>
+          <a:lstStyle/>
+          <a:p>
+            <a:pPr algn="ctr"/>
+          </a:p>
+        </p:txBody>
+      </p:sp>
+      <p:sp>
+        <p:nvSpPr>
+          <p:cNvPr id="8" name="Rectangle 7"/>
+          <p:cNvSpPr/>
+          <p:nvPr/>
+        </p:nvSpPr>
+        <p:spPr>
+          <a:xfrm>
+            <a:off x="457200" y="1655064"/>
+            <a:ext cx="3624986" cy="27432"/>
+          </a:xfrm>
+          <a:prstGeom prst="rect">
+            <a:avLst/>
+          </a:prstGeom>
+          <a:solidFill>
+            <a:srgbClr val="FFD000"/>
+          </a:solidFill>
+          <a:ln>
+            <a:noFill/>
+          </a:ln>
+        </p:spPr>
+        <p:style>
+          <a:lnRef idx="1">
+            <a:schemeClr val="accent1"/>
+          </a:lnRef>
+          <a:fillRef idx="3">
+            <a:schemeClr val="accent1"/>
+          </a:fillRef>
+          <a:effectRef idx="2">
+            <a:schemeClr val="accent1"/>
+          </a:effectRef>
+          <a:fontRef idx="minor">
+            <a:schemeClr val="lt1"/>
+          </a:fontRef>
+        </p:style>
+        <p:txBody>
+          <a:bodyPr rtlCol="0" anchor="ctr"/>
+          <a:lstStyle/>
+          <a:p>
+            <a:pPr algn="ctr"/>
+          </a:p>
+        </p:txBody>
+      </p:sp>
+      <p:pic>
+        <p:nvPicPr>
+          <p:cNvPr id="9" name="Picture 8" descr="google_docs.png"/>
+          <p:cNvPicPr>
+            <a:picLocks noChangeAspect="1"/>
+          </p:cNvPicPr>
+          <p:nvPr/>
+        </p:nvPicPr>
+        <p:blipFill>
+          <a:blip r:embed="rId2"/>
+          <a:stretch>
+            <a:fillRect/>
+          </a:stretch>
+        </p:blipFill>
+        <p:spPr>
+          <a:xfrm>
+            <a:off x="1643329" y="1847087"/>
+            <a:ext cx="1252728" cy="1252728"/>
+          </a:xfrm>
+          <a:prstGeom prst="rect">
+            <a:avLst/>
+          </a:prstGeom>
+        </p:spPr>
+      </p:pic>
+      <p:sp>
+        <p:nvSpPr>
+          <p:cNvPr id="10" name="TextBox 9"/>
+          <p:cNvSpPr txBox="1"/>
+          <p:nvPr/>
+        </p:nvSpPr>
+        <p:spPr>
+          <a:xfrm>
+            <a:off x="530352" y="3191256"/>
+            <a:ext cx="3478682" cy="621792"/>
+          </a:xfrm>
+          <a:prstGeom prst="rect">
+            <a:avLst/>
+          </a:prstGeom>
+          <a:noFill/>
+        </p:spPr>
+        <p:txBody>
+          <a:bodyPr wrap="square" anchor="t"/>
+          <a:lstStyle/>
+          <a:p>
+            <a:pPr algn="ctr"/>
+            <a:r>
+              <a:rPr sz="1300" b="1" i="0">
+                <a:solidFill>
+                  <a:srgbClr val="095292"/>
+                </a:solidFill>
+                <a:latin typeface="Calibri"/>
+              </a:rPr>
+              <a:t>Google Docs</a:t>
+            </a:r>
+          </a:p>
+          <a:p>
+            <a:pPr algn="ctr">
+              <a:spcBef>
+                <a:spcPts val="200"/>
+              </a:spcBef>
             </a:pPr>
             <a:r>
-              <a:rPr sz="2000" b="0" i="0">
-                <a:solidFill>
-                  <a:srgbClr val="333333"/>
-                </a:solidFill>
-                <a:latin typeface="Calibri"/>
-              </a:rPr>
-              <a:t>–   </a:t>
-            </a:r>
-            <a:r>
-              <a:rPr sz="2000" b="1" i="0">
-                <a:solidFill>
-                  <a:srgbClr val="333333"/>
-                </a:solidFill>
-                <a:latin typeface="Calibri"/>
-              </a:rPr>
-              <a:t>Por qué importa al PI:</a:t>
-            </a:r>
-            <a:r>
-              <a:rPr sz="2000" b="0" i="0">
-                <a:solidFill>
-                  <a:srgbClr val="333333"/>
-                </a:solidFill>
-                <a:latin typeface="Calibri"/>
-              </a:rPr>
-              <a:t> lecciónes accionables.</a:t>
-            </a:r>
-          </a:p>
-          <a:p>
-            <a:pPr>
-              <a:spcAft>
-                <a:spcPts val="800"/>
-              </a:spcAft>
+              <a:rPr sz="1000" b="0" i="0">
+                <a:solidFill>
+                  <a:srgbClr val="666666"/>
+                </a:solidFill>
+                <a:latin typeface="Calibri"/>
+              </a:rPr>
+              <a:t>Caso real</a:t>
+            </a:r>
+          </a:p>
+        </p:txBody>
+      </p:sp>
+      <p:sp>
+        <p:nvSpPr>
+          <p:cNvPr id="11" name="Rounded Rectangle 10"/>
+          <p:cNvSpPr/>
+          <p:nvPr/>
+        </p:nvSpPr>
+        <p:spPr>
+          <a:xfrm>
+            <a:off x="4283354" y="1591056"/>
+            <a:ext cx="3624986" cy="2331720"/>
+          </a:xfrm>
+          <a:prstGeom prst="roundRect">
+            <a:avLst>
+              <a:gd name="adj" fmla="val 12000"/>
+            </a:avLst>
+          </a:prstGeom>
+          <a:solidFill>
+            <a:srgbClr val="F2F2F2"/>
+          </a:solidFill>
+          <a:ln>
+            <a:noFill/>
+          </a:ln>
+        </p:spPr>
+        <p:style>
+          <a:lnRef idx="1">
+            <a:schemeClr val="accent1"/>
+          </a:lnRef>
+          <a:fillRef idx="3">
+            <a:schemeClr val="accent1"/>
+          </a:fillRef>
+          <a:effectRef idx="2">
+            <a:schemeClr val="accent1"/>
+          </a:effectRef>
+          <a:fontRef idx="minor">
+            <a:schemeClr val="lt1"/>
+          </a:fontRef>
+        </p:style>
+        <p:txBody>
+          <a:bodyPr rtlCol="0" anchor="ctr"/>
+          <a:lstStyle/>
+          <a:p>
+            <a:pPr algn="ctr"/>
+          </a:p>
+        </p:txBody>
+      </p:sp>
+      <p:sp>
+        <p:nvSpPr>
+          <p:cNvPr id="12" name="Rectangle 11"/>
+          <p:cNvSpPr/>
+          <p:nvPr/>
+        </p:nvSpPr>
+        <p:spPr>
+          <a:xfrm>
+            <a:off x="4283354" y="1591056"/>
+            <a:ext cx="3624986" cy="64008"/>
+          </a:xfrm>
+          <a:prstGeom prst="rect">
+            <a:avLst/>
+          </a:prstGeom>
+          <a:solidFill>
+            <a:srgbClr val="095292"/>
+          </a:solidFill>
+          <a:ln>
+            <a:noFill/>
+          </a:ln>
+        </p:spPr>
+        <p:style>
+          <a:lnRef idx="1">
+            <a:schemeClr val="accent1"/>
+          </a:lnRef>
+          <a:fillRef idx="3">
+            <a:schemeClr val="accent1"/>
+          </a:fillRef>
+          <a:effectRef idx="2">
+            <a:schemeClr val="accent1"/>
+          </a:effectRef>
+          <a:fontRef idx="minor">
+            <a:schemeClr val="lt1"/>
+          </a:fontRef>
+        </p:style>
+        <p:txBody>
+          <a:bodyPr rtlCol="0" anchor="ctr"/>
+          <a:lstStyle/>
+          <a:p>
+            <a:pPr algn="ctr"/>
+          </a:p>
+        </p:txBody>
+      </p:sp>
+      <p:sp>
+        <p:nvSpPr>
+          <p:cNvPr id="13" name="Rectangle 12"/>
+          <p:cNvSpPr/>
+          <p:nvPr/>
+        </p:nvSpPr>
+        <p:spPr>
+          <a:xfrm>
+            <a:off x="4283354" y="1655064"/>
+            <a:ext cx="3624986" cy="27432"/>
+          </a:xfrm>
+          <a:prstGeom prst="rect">
+            <a:avLst/>
+          </a:prstGeom>
+          <a:solidFill>
+            <a:srgbClr val="FFD000"/>
+          </a:solidFill>
+          <a:ln>
+            <a:noFill/>
+          </a:ln>
+        </p:spPr>
+        <p:style>
+          <a:lnRef idx="1">
+            <a:schemeClr val="accent1"/>
+          </a:lnRef>
+          <a:fillRef idx="3">
+            <a:schemeClr val="accent1"/>
+          </a:fillRef>
+          <a:effectRef idx="2">
+            <a:schemeClr val="accent1"/>
+          </a:effectRef>
+          <a:fontRef idx="minor">
+            <a:schemeClr val="lt1"/>
+          </a:fontRef>
+        </p:style>
+        <p:txBody>
+          <a:bodyPr rtlCol="0" anchor="ctr"/>
+          <a:lstStyle/>
+          <a:p>
+            <a:pPr algn="ctr"/>
+          </a:p>
+        </p:txBody>
+      </p:sp>
+      <p:pic>
+        <p:nvPicPr>
+          <p:cNvPr id="14" name="Picture 13" descr="drawio.png"/>
+          <p:cNvPicPr>
+            <a:picLocks noChangeAspect="1"/>
+          </p:cNvPicPr>
+          <p:nvPr/>
+        </p:nvPicPr>
+        <p:blipFill>
+          <a:blip r:embed="rId3"/>
+          <a:stretch>
+            <a:fillRect/>
+          </a:stretch>
+        </p:blipFill>
+        <p:spPr>
+          <a:xfrm>
+            <a:off x="5469483" y="1847087"/>
+            <a:ext cx="1252728" cy="1252728"/>
+          </a:xfrm>
+          <a:prstGeom prst="rect">
+            <a:avLst/>
+          </a:prstGeom>
+        </p:spPr>
+      </p:pic>
+      <p:sp>
+        <p:nvSpPr>
+          <p:cNvPr id="15" name="TextBox 14"/>
+          <p:cNvSpPr txBox="1"/>
+          <p:nvPr/>
+        </p:nvSpPr>
+        <p:spPr>
+          <a:xfrm>
+            <a:off x="4356506" y="3191256"/>
+            <a:ext cx="3478682" cy="621792"/>
+          </a:xfrm>
+          <a:prstGeom prst="rect">
+            <a:avLst/>
+          </a:prstGeom>
+          <a:noFill/>
+        </p:spPr>
+        <p:txBody>
+          <a:bodyPr wrap="square" anchor="t"/>
+          <a:lstStyle/>
+          <a:p>
+            <a:pPr algn="ctr"/>
+            <a:r>
+              <a:rPr sz="1300" b="1" i="0">
+                <a:solidFill>
+                  <a:srgbClr val="095292"/>
+                </a:solidFill>
+                <a:latin typeface="Calibri"/>
+              </a:rPr>
+              <a:t>draw.io</a:t>
+            </a:r>
+          </a:p>
+          <a:p>
+            <a:pPr algn="ctr">
+              <a:spcBef>
+                <a:spcPts val="200"/>
+              </a:spcBef>
             </a:pPr>
             <a:r>
-              <a:rPr sz="2000" b="0" i="0">
-                <a:solidFill>
-                  <a:srgbClr val="333333"/>
-                </a:solidFill>
-                <a:latin typeface="Calibri"/>
-              </a:rPr>
-              <a:t>–   Autónoma: 1 caso -&gt; 3 mejoras.</a:t>
-            </a:r>
-          </a:p>
-        </p:txBody>
-      </p:sp>
-      <p:sp>
-        <p:nvSpPr>
-          <p:cNvPr id="6" name="TextBox 5"/>
+              <a:rPr sz="1000" b="0" i="0">
+                <a:solidFill>
+                  <a:srgbClr val="666666"/>
+                </a:solidFill>
+                <a:latin typeface="Calibri"/>
+              </a:rPr>
+              <a:t>Leccion</a:t>
+            </a:r>
+          </a:p>
+        </p:txBody>
+      </p:sp>
+      <p:sp>
+        <p:nvSpPr>
+          <p:cNvPr id="16" name="Rounded Rectangle 15"/>
+          <p:cNvSpPr/>
+          <p:nvPr/>
+        </p:nvSpPr>
+        <p:spPr>
+          <a:xfrm>
+            <a:off x="8109508" y="1591056"/>
+            <a:ext cx="3624986" cy="2331720"/>
+          </a:xfrm>
+          <a:prstGeom prst="roundRect">
+            <a:avLst>
+              <a:gd name="adj" fmla="val 12000"/>
+            </a:avLst>
+          </a:prstGeom>
+          <a:solidFill>
+            <a:srgbClr val="F2F2F2"/>
+          </a:solidFill>
+          <a:ln>
+            <a:noFill/>
+          </a:ln>
+        </p:spPr>
+        <p:style>
+          <a:lnRef idx="1">
+            <a:schemeClr val="accent1"/>
+          </a:lnRef>
+          <a:fillRef idx="3">
+            <a:schemeClr val="accent1"/>
+          </a:fillRef>
+          <a:effectRef idx="2">
+            <a:schemeClr val="accent1"/>
+          </a:effectRef>
+          <a:fontRef idx="minor">
+            <a:schemeClr val="lt1"/>
+          </a:fontRef>
+        </p:style>
+        <p:txBody>
+          <a:bodyPr rtlCol="0" anchor="ctr"/>
+          <a:lstStyle/>
+          <a:p>
+            <a:pPr algn="ctr"/>
+          </a:p>
+        </p:txBody>
+      </p:sp>
+      <p:sp>
+        <p:nvSpPr>
+          <p:cNvPr id="17" name="Rectangle 16"/>
+          <p:cNvSpPr/>
+          <p:nvPr/>
+        </p:nvSpPr>
+        <p:spPr>
+          <a:xfrm>
+            <a:off x="8109508" y="1591056"/>
+            <a:ext cx="3624986" cy="64008"/>
+          </a:xfrm>
+          <a:prstGeom prst="rect">
+            <a:avLst/>
+          </a:prstGeom>
+          <a:solidFill>
+            <a:srgbClr val="095292"/>
+          </a:solidFill>
+          <a:ln>
+            <a:noFill/>
+          </a:ln>
+        </p:spPr>
+        <p:style>
+          <a:lnRef idx="1">
+            <a:schemeClr val="accent1"/>
+          </a:lnRef>
+          <a:fillRef idx="3">
+            <a:schemeClr val="accent1"/>
+          </a:fillRef>
+          <a:effectRef idx="2">
+            <a:schemeClr val="accent1"/>
+          </a:effectRef>
+          <a:fontRef idx="minor">
+            <a:schemeClr val="lt1"/>
+          </a:fontRef>
+        </p:style>
+        <p:txBody>
+          <a:bodyPr rtlCol="0" anchor="ctr"/>
+          <a:lstStyle/>
+          <a:p>
+            <a:pPr algn="ctr"/>
+          </a:p>
+        </p:txBody>
+      </p:sp>
+      <p:sp>
+        <p:nvSpPr>
+          <p:cNvPr id="18" name="Rectangle 17"/>
+          <p:cNvSpPr/>
+          <p:nvPr/>
+        </p:nvSpPr>
+        <p:spPr>
+          <a:xfrm>
+            <a:off x="8109508" y="1655064"/>
+            <a:ext cx="3624986" cy="27432"/>
+          </a:xfrm>
+          <a:prstGeom prst="rect">
+            <a:avLst/>
+          </a:prstGeom>
+          <a:solidFill>
+            <a:srgbClr val="FFD000"/>
+          </a:solidFill>
+          <a:ln>
+            <a:noFill/>
+          </a:ln>
+        </p:spPr>
+        <p:style>
+          <a:lnRef idx="1">
+            <a:schemeClr val="accent1"/>
+          </a:lnRef>
+          <a:fillRef idx="3">
+            <a:schemeClr val="accent1"/>
+          </a:fillRef>
+          <a:effectRef idx="2">
+            <a:schemeClr val="accent1"/>
+          </a:effectRef>
+          <a:fontRef idx="minor">
+            <a:schemeClr val="lt1"/>
+          </a:fontRef>
+        </p:style>
+        <p:txBody>
+          <a:bodyPr rtlCol="0" anchor="ctr"/>
+          <a:lstStyle/>
+          <a:p>
+            <a:pPr algn="ctr"/>
+          </a:p>
+        </p:txBody>
+      </p:sp>
+      <p:pic>
+        <p:nvPicPr>
+          <p:cNvPr id="19" name="Picture 18" descr="dbfiddle.png"/>
+          <p:cNvPicPr>
+            <a:picLocks noChangeAspect="1"/>
+          </p:cNvPicPr>
+          <p:nvPr/>
+        </p:nvPicPr>
+        <p:blipFill>
+          <a:blip r:embed="rId4"/>
+          <a:stretch>
+            <a:fillRect/>
+          </a:stretch>
+        </p:blipFill>
+        <p:spPr>
+          <a:xfrm>
+            <a:off x="9295638" y="1847087"/>
+            <a:ext cx="1252728" cy="1252728"/>
+          </a:xfrm>
+          <a:prstGeom prst="rect">
+            <a:avLst/>
+          </a:prstGeom>
+        </p:spPr>
+      </p:pic>
+      <p:sp>
+        <p:nvSpPr>
+          <p:cNvPr id="20" name="TextBox 19"/>
+          <p:cNvSpPr txBox="1"/>
+          <p:nvPr/>
+        </p:nvSpPr>
+        <p:spPr>
+          <a:xfrm>
+            <a:off x="8182660" y="3191256"/>
+            <a:ext cx="3478682" cy="621792"/>
+          </a:xfrm>
+          <a:prstGeom prst="rect">
+            <a:avLst/>
+          </a:prstGeom>
+          <a:noFill/>
+        </p:spPr>
+        <p:txBody>
+          <a:bodyPr wrap="square" anchor="t"/>
+          <a:lstStyle/>
+          <a:p>
+            <a:pPr algn="ctr"/>
+            <a:r>
+              <a:rPr sz="1300" b="1" i="0">
+                <a:solidFill>
+                  <a:srgbClr val="095292"/>
+                </a:solidFill>
+                <a:latin typeface="Calibri"/>
+              </a:rPr>
+              <a:t>DB Fiddle</a:t>
+            </a:r>
+          </a:p>
+          <a:p>
+            <a:pPr algn="ctr">
+              <a:spcBef>
+                <a:spcPts val="200"/>
+              </a:spcBef>
+            </a:pPr>
+            <a:r>
+              <a:rPr sz="1000" b="0" i="0">
+                <a:solidFill>
+                  <a:srgbClr val="666666"/>
+                </a:solidFill>
+                <a:latin typeface="Calibri"/>
+              </a:rPr>
+              <a:t>Opcional SQL</a:t>
+            </a:r>
+          </a:p>
+        </p:txBody>
+      </p:sp>
+      <p:sp>
+        <p:nvSpPr>
+          <p:cNvPr id="21" name="TextBox 20"/>
           <p:cNvSpPr txBox="1"/>
           <p:nvPr/>
         </p:nvSpPr>
@@ -7802,7 +8081,7 @@
                 </a:solidFill>
                 <a:latin typeface="Calibri"/>
               </a:rPr>
-              <a:t>Actividad autonoma — objetivo y criterios</a:t>
+              <a:t>Actividad autonoma — contexto / por que importa</a:t>
             </a:r>
           </a:p>
         </p:txBody>
@@ -7850,7 +8129,7 @@
                 </a:solidFill>
                 <a:latin typeface="Calibri"/>
               </a:rPr>
-              <a:t>Objetivo:</a:t>
+              <a:t>Por qué importa al PI:</a:t>
             </a:r>
             <a:r>
               <a:rPr sz="2000" b="0" i="0">
@@ -7859,7 +8138,7 @@
                 </a:solidFill>
                 <a:latin typeface="Calibri"/>
               </a:rPr>
-              <a:t> Caso real -&gt; 3 mejoras VetCare.</a:t>
+              <a:t> lecciónes accionables.</a:t>
             </a:r>
           </a:p>
           <a:p>
@@ -7875,161 +8154,7 @@
                 </a:solidFill>
                 <a:latin typeface="Calibri"/>
               </a:rPr>
-              <a:t>–   </a:t>
-            </a:r>
-            <a:r>
-              <a:rPr sz="2000" b="1" i="0">
-                <a:solidFill>
-                  <a:srgbClr val="333333"/>
-                </a:solidFill>
-                <a:latin typeface="Calibri"/>
-              </a:rPr>
-              <a:t>Exito:</a:t>
-            </a:r>
-            <a:r>
-              <a:rPr sz="2000" b="0" i="0">
-                <a:solidFill>
-                  <a:srgbClr val="333333"/>
-                </a:solidFill>
-                <a:latin typeface="Calibri"/>
-              </a:rPr>
-              <a:t> Caso elegido.</a:t>
-            </a:r>
-          </a:p>
-          <a:p>
-            <a:pPr>
-              <a:spcAft>
-                <a:spcPts val="800"/>
-              </a:spcAft>
-            </a:pPr>
-            <a:r>
-              <a:rPr sz="2000" b="0" i="0">
-                <a:solidFill>
-                  <a:srgbClr val="333333"/>
-                </a:solidFill>
-                <a:latin typeface="Calibri"/>
-              </a:rPr>
-              <a:t>–   </a:t>
-            </a:r>
-            <a:r>
-              <a:rPr sz="2000" b="1" i="0">
-                <a:solidFill>
-                  <a:srgbClr val="333333"/>
-                </a:solidFill>
-                <a:latin typeface="Calibri"/>
-              </a:rPr>
-              <a:t>Exito:</a:t>
-            </a:r>
-            <a:r>
-              <a:rPr sz="2000" b="0" i="0">
-                <a:solidFill>
-                  <a:srgbClr val="333333"/>
-                </a:solidFill>
-                <a:latin typeface="Calibri"/>
-              </a:rPr>
-              <a:t> Resumen.</a:t>
-            </a:r>
-          </a:p>
-          <a:p>
-            <a:pPr>
-              <a:spcAft>
-                <a:spcPts val="800"/>
-              </a:spcAft>
-            </a:pPr>
-            <a:r>
-              <a:rPr sz="2000" b="0" i="0">
-                <a:solidFill>
-                  <a:srgbClr val="333333"/>
-                </a:solidFill>
-                <a:latin typeface="Calibri"/>
-              </a:rPr>
-              <a:t>–   </a:t>
-            </a:r>
-            <a:r>
-              <a:rPr sz="2000" b="1" i="0">
-                <a:solidFill>
-                  <a:srgbClr val="333333"/>
-                </a:solidFill>
-                <a:latin typeface="Calibri"/>
-              </a:rPr>
-              <a:t>Exito:</a:t>
-            </a:r>
-            <a:r>
-              <a:rPr sz="2000" b="0" i="0">
-                <a:solidFill>
-                  <a:srgbClr val="333333"/>
-                </a:solidFill>
-                <a:latin typeface="Calibri"/>
-              </a:rPr>
-              <a:t> 3 mejoras.</a:t>
-            </a:r>
-          </a:p>
-          <a:p>
-            <a:pPr>
-              <a:spcAft>
-                <a:spcPts val="800"/>
-              </a:spcAft>
-            </a:pPr>
-            <a:r>
-              <a:rPr sz="2000" b="0" i="0">
-                <a:solidFill>
-                  <a:srgbClr val="333333"/>
-                </a:solidFill>
-                <a:latin typeface="Calibri"/>
-              </a:rPr>
-              <a:t>–   </a:t>
-            </a:r>
-            <a:r>
-              <a:rPr sz="2000" b="1" i="0">
-                <a:solidFill>
-                  <a:srgbClr val="333333"/>
-                </a:solidFill>
-                <a:latin typeface="Calibri"/>
-              </a:rPr>
-              <a:t>Exito:</a:t>
-            </a:r>
-            <a:r>
-              <a:rPr sz="2000" b="0" i="0">
-                <a:solidFill>
-                  <a:srgbClr val="333333"/>
-                </a:solidFill>
-                <a:latin typeface="Calibri"/>
-              </a:rPr>
-              <a:t> Informe.</a:t>
-            </a:r>
-          </a:p>
-          <a:p>
-            <a:pPr>
-              <a:spcAft>
-                <a:spcPts val="800"/>
-              </a:spcAft>
-            </a:pPr>
-            <a:r>
-              <a:rPr sz="2000" b="0" i="0">
-                <a:solidFill>
-                  <a:srgbClr val="333333"/>
-                </a:solidFill>
-                <a:latin typeface="Calibri"/>
-              </a:rPr>
-              <a:t>–   </a:t>
-            </a:r>
-            <a:r>
-              <a:rPr sz="2000" b="1" i="0">
-                <a:solidFill>
-                  <a:srgbClr val="333333"/>
-                </a:solidFill>
-                <a:latin typeface="Calibri"/>
-              </a:rPr>
-              <a:t>Exito:</a:t>
-            </a:r>
-            <a:r>
-              <a:rPr sz="2000" b="0" i="0">
-                <a:solidFill>
-                  <a:srgbClr val="333333"/>
-                </a:solidFill>
-                <a:latin typeface="Calibri"/>
-              </a:rPr>
-              <a:t> en la fecha que indique el docente.</a:t>
+              <a:t>–   Autónoma: 1 caso -&gt; 3 mejoras.</a:t>
             </a:r>
           </a:p>
         </p:txBody>
@@ -8210,7 +8335,7 @@
                 </a:solidFill>
                 <a:latin typeface="Calibri"/>
               </a:rPr>
-              <a:t>Actividad autonoma — escenario / datos de partida</a:t>
+              <a:t>Actividad autonoma — objetivo y criterios</a:t>
             </a:r>
           </a:p>
         </p:txBody>
@@ -8249,7 +8374,195 @@
                 </a:solidFill>
                 <a:latin typeface="Calibri"/>
               </a:rPr>
-              <a:t>–   Plantilla: contexto-&gt;fallo-&gt;lección-&gt;cambio.</a:t>
+              <a:t>–   </a:t>
+            </a:r>
+            <a:r>
+              <a:rPr sz="2000" b="1" i="0">
+                <a:solidFill>
+                  <a:srgbClr val="333333"/>
+                </a:solidFill>
+                <a:latin typeface="Calibri"/>
+              </a:rPr>
+              <a:t>Objetivo:</a:t>
+            </a:r>
+            <a:r>
+              <a:rPr sz="2000" b="0" i="0">
+                <a:solidFill>
+                  <a:srgbClr val="333333"/>
+                </a:solidFill>
+                <a:latin typeface="Calibri"/>
+              </a:rPr>
+              <a:t> Caso real -&gt; 3 mejoras VetCare.</a:t>
+            </a:r>
+          </a:p>
+          <a:p>
+            <a:pPr>
+              <a:spcAft>
+                <a:spcPts val="800"/>
+              </a:spcAft>
+            </a:pPr>
+            <a:r>
+              <a:rPr sz="2000" b="0" i="0">
+                <a:solidFill>
+                  <a:srgbClr val="333333"/>
+                </a:solidFill>
+                <a:latin typeface="Calibri"/>
+              </a:rPr>
+              <a:t>–   </a:t>
+            </a:r>
+            <a:r>
+              <a:rPr sz="2000" b="1" i="0">
+                <a:solidFill>
+                  <a:srgbClr val="333333"/>
+                </a:solidFill>
+                <a:latin typeface="Calibri"/>
+              </a:rPr>
+              <a:t>Exito:</a:t>
+            </a:r>
+            <a:r>
+              <a:rPr sz="2000" b="0" i="0">
+                <a:solidFill>
+                  <a:srgbClr val="333333"/>
+                </a:solidFill>
+                <a:latin typeface="Calibri"/>
+              </a:rPr>
+              <a:t> Caso elegido.</a:t>
+            </a:r>
+          </a:p>
+          <a:p>
+            <a:pPr>
+              <a:spcAft>
+                <a:spcPts val="800"/>
+              </a:spcAft>
+            </a:pPr>
+            <a:r>
+              <a:rPr sz="2000" b="0" i="0">
+                <a:solidFill>
+                  <a:srgbClr val="333333"/>
+                </a:solidFill>
+                <a:latin typeface="Calibri"/>
+              </a:rPr>
+              <a:t>–   </a:t>
+            </a:r>
+            <a:r>
+              <a:rPr sz="2000" b="1" i="0">
+                <a:solidFill>
+                  <a:srgbClr val="333333"/>
+                </a:solidFill>
+                <a:latin typeface="Calibri"/>
+              </a:rPr>
+              <a:t>Exito:</a:t>
+            </a:r>
+            <a:r>
+              <a:rPr sz="2000" b="0" i="0">
+                <a:solidFill>
+                  <a:srgbClr val="333333"/>
+                </a:solidFill>
+                <a:latin typeface="Calibri"/>
+              </a:rPr>
+              <a:t> Resumen.</a:t>
+            </a:r>
+          </a:p>
+          <a:p>
+            <a:pPr>
+              <a:spcAft>
+                <a:spcPts val="800"/>
+              </a:spcAft>
+            </a:pPr>
+            <a:r>
+              <a:rPr sz="2000" b="0" i="0">
+                <a:solidFill>
+                  <a:srgbClr val="333333"/>
+                </a:solidFill>
+                <a:latin typeface="Calibri"/>
+              </a:rPr>
+              <a:t>–   </a:t>
+            </a:r>
+            <a:r>
+              <a:rPr sz="2000" b="1" i="0">
+                <a:solidFill>
+                  <a:srgbClr val="333333"/>
+                </a:solidFill>
+                <a:latin typeface="Calibri"/>
+              </a:rPr>
+              <a:t>Exito:</a:t>
+            </a:r>
+            <a:r>
+              <a:rPr sz="2000" b="0" i="0">
+                <a:solidFill>
+                  <a:srgbClr val="333333"/>
+                </a:solidFill>
+                <a:latin typeface="Calibri"/>
+              </a:rPr>
+              <a:t> 3 mejoras.</a:t>
+            </a:r>
+          </a:p>
+          <a:p>
+            <a:pPr>
+              <a:spcAft>
+                <a:spcPts val="800"/>
+              </a:spcAft>
+            </a:pPr>
+            <a:r>
+              <a:rPr sz="2000" b="0" i="0">
+                <a:solidFill>
+                  <a:srgbClr val="333333"/>
+                </a:solidFill>
+                <a:latin typeface="Calibri"/>
+              </a:rPr>
+              <a:t>–   </a:t>
+            </a:r>
+            <a:r>
+              <a:rPr sz="2000" b="1" i="0">
+                <a:solidFill>
+                  <a:srgbClr val="333333"/>
+                </a:solidFill>
+                <a:latin typeface="Calibri"/>
+              </a:rPr>
+              <a:t>Exito:</a:t>
+            </a:r>
+            <a:r>
+              <a:rPr sz="2000" b="0" i="0">
+                <a:solidFill>
+                  <a:srgbClr val="333333"/>
+                </a:solidFill>
+                <a:latin typeface="Calibri"/>
+              </a:rPr>
+              <a:t> Informe.</a:t>
+            </a:r>
+          </a:p>
+          <a:p>
+            <a:pPr>
+              <a:spcAft>
+                <a:spcPts val="800"/>
+              </a:spcAft>
+            </a:pPr>
+            <a:r>
+              <a:rPr sz="2000" b="0" i="0">
+                <a:solidFill>
+                  <a:srgbClr val="333333"/>
+                </a:solidFill>
+                <a:latin typeface="Calibri"/>
+              </a:rPr>
+              <a:t>–   </a:t>
+            </a:r>
+            <a:r>
+              <a:rPr sz="2000" b="1" i="0">
+                <a:solidFill>
+                  <a:srgbClr val="333333"/>
+                </a:solidFill>
+                <a:latin typeface="Calibri"/>
+              </a:rPr>
+              <a:t>Exito:</a:t>
+            </a:r>
+            <a:r>
+              <a:rPr sz="2000" b="0" i="0">
+                <a:solidFill>
+                  <a:srgbClr val="333333"/>
+                </a:solidFill>
+                <a:latin typeface="Calibri"/>
+              </a:rPr>
+              <a:t> en la fecha que indique el docente.</a:t>
             </a:r>
           </a:p>
         </p:txBody>
@@ -8430,111 +8743,21 @@
                 </a:solidFill>
                 <a:latin typeface="Calibri"/>
               </a:rPr>
-              <a:t>Actividad autonoma — pasos guiados</a:t>
-            </a:r>
-          </a:p>
-        </p:txBody>
-      </p:sp>
-      <p:sp>
-        <p:nvSpPr>
-          <p:cNvPr id="5" name="Rounded Rectangle 4"/>
-          <p:cNvSpPr/>
-          <p:nvPr/>
-        </p:nvSpPr>
-        <p:spPr>
-          <a:xfrm>
-            <a:off x="457200" y="1554480"/>
-            <a:ext cx="11277295" cy="1051560"/>
-          </a:xfrm>
-          <a:prstGeom prst="roundRect">
-            <a:avLst>
-              <a:gd name="adj" fmla="val 12000"/>
-            </a:avLst>
-          </a:prstGeom>
-          <a:solidFill>
-            <a:srgbClr val="F2F2F2"/>
-          </a:solidFill>
-          <a:ln>
-            <a:noFill/>
-          </a:ln>
-        </p:spPr>
-        <p:style>
-          <a:lnRef idx="1">
-            <a:schemeClr val="accent1"/>
-          </a:lnRef>
-          <a:fillRef idx="3">
-            <a:schemeClr val="accent1"/>
-          </a:fillRef>
-          <a:effectRef idx="2">
-            <a:schemeClr val="accent1"/>
-          </a:effectRef>
-          <a:fontRef idx="minor">
-            <a:schemeClr val="lt1"/>
-          </a:fontRef>
-        </p:style>
-        <p:txBody>
-          <a:bodyPr rtlCol="0" anchor="ctr"/>
-          <a:lstStyle/>
-          <a:p>
-            <a:pPr algn="ctr"/>
-          </a:p>
-        </p:txBody>
-      </p:sp>
-      <p:sp>
-        <p:nvSpPr>
-          <p:cNvPr id="6" name="Rounded Rectangle 5"/>
-          <p:cNvSpPr/>
-          <p:nvPr/>
-        </p:nvSpPr>
-        <p:spPr>
-          <a:xfrm>
-            <a:off x="594360" y="1860804"/>
-            <a:ext cx="438912" cy="438912"/>
-          </a:xfrm>
-          <a:prstGeom prst="roundRect">
-            <a:avLst>
-              <a:gd name="adj" fmla="val 12000"/>
-            </a:avLst>
-          </a:prstGeom>
-          <a:solidFill>
-            <a:srgbClr val="095292"/>
-          </a:solidFill>
-          <a:ln>
-            <a:noFill/>
-          </a:ln>
-        </p:spPr>
-        <p:style>
-          <a:lnRef idx="1">
-            <a:schemeClr val="accent1"/>
-          </a:lnRef>
-          <a:fillRef idx="3">
-            <a:schemeClr val="accent1"/>
-          </a:fillRef>
-          <a:effectRef idx="2">
-            <a:schemeClr val="accent1"/>
-          </a:effectRef>
-          <a:fontRef idx="minor">
-            <a:schemeClr val="lt1"/>
-          </a:fontRef>
-        </p:style>
-        <p:txBody>
-          <a:bodyPr rtlCol="0" anchor="ctr"/>
-          <a:lstStyle/>
-          <a:p>
-            <a:pPr algn="ctr"/>
-          </a:p>
-        </p:txBody>
-      </p:sp>
-      <p:sp>
-        <p:nvSpPr>
-          <p:cNvPr id="7" name="TextBox 6"/>
+              <a:t>Actividad autonoma — escenario / datos de partida</a:t>
+            </a:r>
+          </a:p>
+        </p:txBody>
+      </p:sp>
+      <p:sp>
+        <p:nvSpPr>
+          <p:cNvPr id="5" name="TextBox 4"/>
           <p:cNvSpPr txBox="1"/>
           <p:nvPr/>
         </p:nvSpPr>
         <p:spPr>
           <a:xfrm>
-            <a:off x="594360" y="1860804"/>
-            <a:ext cx="438912" cy="438912"/>
+            <a:off x="457200" y="1170432"/>
+            <a:ext cx="11277295" cy="5230368"/>
           </a:xfrm>
           <a:prstGeom prst="rect">
             <a:avLst/>
@@ -8542,522 +8765,31 @@
           <a:noFill/>
         </p:spPr>
         <p:txBody>
-          <a:bodyPr wrap="square" anchor="ctr"/>
-          <a:lstStyle/>
-          <a:p>
-            <a:pPr algn="ctr"/>
-            <a:r>
-              <a:rPr sz="1600" b="1" i="0">
-                <a:solidFill>
-                  <a:srgbClr val="FFFFFF"/>
-                </a:solidFill>
-                <a:latin typeface="Calibri"/>
-              </a:rPr>
-              <a:t>1</a:t>
-            </a:r>
-          </a:p>
-        </p:txBody>
-      </p:sp>
-      <p:sp>
-        <p:nvSpPr>
-          <p:cNvPr id="8" name="TextBox 7"/>
-          <p:cNvSpPr txBox="1"/>
-          <p:nvPr/>
-        </p:nvSpPr>
-        <p:spPr>
-          <a:xfrm>
-            <a:off x="1188720" y="1645920"/>
-            <a:ext cx="10271455" cy="886968"/>
-          </a:xfrm>
-          <a:prstGeom prst="rect">
-            <a:avLst/>
-          </a:prstGeom>
-          <a:noFill/>
-        </p:spPr>
-        <p:txBody>
-          <a:bodyPr wrap="square" anchor="ctr"/>
-          <a:lstStyle/>
-          <a:p>
-            <a:r>
-              <a:rPr sz="1500" b="1" i="0">
-                <a:solidFill>
-                  <a:srgbClr val="095292"/>
-                </a:solidFill>
-                <a:latin typeface="Calibri"/>
-              </a:rPr>
-              <a:t>Elegir 1 caso (backup, rendimiento o seguridad).</a:t>
-            </a:r>
-          </a:p>
-        </p:txBody>
-      </p:sp>
-      <p:sp>
-        <p:nvSpPr>
-          <p:cNvPr id="9" name="Rounded Rectangle 8"/>
-          <p:cNvSpPr/>
-          <p:nvPr/>
-        </p:nvSpPr>
-        <p:spPr>
-          <a:xfrm>
-            <a:off x="457200" y="2697480"/>
-            <a:ext cx="11277295" cy="1051560"/>
-          </a:xfrm>
-          <a:prstGeom prst="roundRect">
-            <a:avLst>
-              <a:gd name="adj" fmla="val 12000"/>
-            </a:avLst>
-          </a:prstGeom>
-          <a:solidFill>
-            <a:srgbClr val="E8F4FA"/>
-          </a:solidFill>
-          <a:ln>
-            <a:noFill/>
-          </a:ln>
-        </p:spPr>
-        <p:style>
-          <a:lnRef idx="1">
-            <a:schemeClr val="accent1"/>
-          </a:lnRef>
-          <a:fillRef idx="3">
-            <a:schemeClr val="accent1"/>
-          </a:fillRef>
-          <a:effectRef idx="2">
-            <a:schemeClr val="accent1"/>
-          </a:effectRef>
-          <a:fontRef idx="minor">
-            <a:schemeClr val="lt1"/>
-          </a:fontRef>
-        </p:style>
-        <p:txBody>
-          <a:bodyPr rtlCol="0" anchor="ctr"/>
-          <a:lstStyle/>
-          <a:p>
-            <a:pPr algn="ctr"/>
-          </a:p>
-        </p:txBody>
-      </p:sp>
-      <p:sp>
-        <p:nvSpPr>
-          <p:cNvPr id="10" name="Rounded Rectangle 9"/>
-          <p:cNvSpPr/>
-          <p:nvPr/>
-        </p:nvSpPr>
-        <p:spPr>
-          <a:xfrm>
-            <a:off x="594360" y="3003804"/>
-            <a:ext cx="438912" cy="438912"/>
-          </a:xfrm>
-          <a:prstGeom prst="roundRect">
-            <a:avLst>
-              <a:gd name="adj" fmla="val 12000"/>
-            </a:avLst>
-          </a:prstGeom>
-          <a:solidFill>
-            <a:srgbClr val="095292"/>
-          </a:solidFill>
-          <a:ln>
-            <a:noFill/>
-          </a:ln>
-        </p:spPr>
-        <p:style>
-          <a:lnRef idx="1">
-            <a:schemeClr val="accent1"/>
-          </a:lnRef>
-          <a:fillRef idx="3">
-            <a:schemeClr val="accent1"/>
-          </a:fillRef>
-          <a:effectRef idx="2">
-            <a:schemeClr val="accent1"/>
-          </a:effectRef>
-          <a:fontRef idx="minor">
-            <a:schemeClr val="lt1"/>
-          </a:fontRef>
-        </p:style>
-        <p:txBody>
-          <a:bodyPr rtlCol="0" anchor="ctr"/>
-          <a:lstStyle/>
-          <a:p>
-            <a:pPr algn="ctr"/>
-          </a:p>
-        </p:txBody>
-      </p:sp>
-      <p:sp>
-        <p:nvSpPr>
-          <p:cNvPr id="11" name="TextBox 10"/>
-          <p:cNvSpPr txBox="1"/>
-          <p:nvPr/>
-        </p:nvSpPr>
-        <p:spPr>
-          <a:xfrm>
-            <a:off x="594360" y="3003804"/>
-            <a:ext cx="438912" cy="438912"/>
-          </a:xfrm>
-          <a:prstGeom prst="rect">
-            <a:avLst/>
-          </a:prstGeom>
-          <a:noFill/>
-        </p:spPr>
-        <p:txBody>
-          <a:bodyPr wrap="square" anchor="ctr"/>
-          <a:lstStyle/>
-          <a:p>
-            <a:pPr algn="ctr"/>
-            <a:r>
-              <a:rPr sz="1600" b="1" i="0">
-                <a:solidFill>
-                  <a:srgbClr val="FFFFFF"/>
-                </a:solidFill>
-                <a:latin typeface="Calibri"/>
-              </a:rPr>
-              <a:t>2</a:t>
-            </a:r>
-          </a:p>
-        </p:txBody>
-      </p:sp>
-      <p:sp>
-        <p:nvSpPr>
-          <p:cNvPr id="12" name="TextBox 11"/>
-          <p:cNvSpPr txBox="1"/>
-          <p:nvPr/>
-        </p:nvSpPr>
-        <p:spPr>
-          <a:xfrm>
-            <a:off x="1188720" y="2788920"/>
-            <a:ext cx="10271455" cy="886968"/>
-          </a:xfrm>
-          <a:prstGeom prst="rect">
-            <a:avLst/>
-          </a:prstGeom>
-          <a:noFill/>
-        </p:spPr>
-        <p:txBody>
-          <a:bodyPr wrap="square" anchor="ctr"/>
-          <a:lstStyle/>
-          <a:p>
-            <a:r>
-              <a:rPr sz="1500" b="1" i="0">
-                <a:solidFill>
-                  <a:srgbClr val="095292"/>
-                </a:solidFill>
-                <a:latin typeface="Calibri"/>
-              </a:rPr>
-              <a:t>Resumir en media pagina que paso.</a:t>
-            </a:r>
-          </a:p>
-        </p:txBody>
-      </p:sp>
-      <p:sp>
-        <p:nvSpPr>
-          <p:cNvPr id="13" name="Rounded Rectangle 12"/>
-          <p:cNvSpPr/>
-          <p:nvPr/>
-        </p:nvSpPr>
-        <p:spPr>
-          <a:xfrm>
-            <a:off x="457200" y="3840480"/>
-            <a:ext cx="11277295" cy="1051560"/>
-          </a:xfrm>
-          <a:prstGeom prst="roundRect">
-            <a:avLst>
-              <a:gd name="adj" fmla="val 12000"/>
-            </a:avLst>
-          </a:prstGeom>
-          <a:solidFill>
-            <a:srgbClr val="F2F2F2"/>
-          </a:solidFill>
-          <a:ln>
-            <a:noFill/>
-          </a:ln>
-        </p:spPr>
-        <p:style>
-          <a:lnRef idx="1">
-            <a:schemeClr val="accent1"/>
-          </a:lnRef>
-          <a:fillRef idx="3">
-            <a:schemeClr val="accent1"/>
-          </a:fillRef>
-          <a:effectRef idx="2">
-            <a:schemeClr val="accent1"/>
-          </a:effectRef>
-          <a:fontRef idx="minor">
-            <a:schemeClr val="lt1"/>
-          </a:fontRef>
-        </p:style>
-        <p:txBody>
-          <a:bodyPr rtlCol="0" anchor="ctr"/>
-          <a:lstStyle/>
-          <a:p>
-            <a:pPr algn="ctr"/>
-          </a:p>
-        </p:txBody>
-      </p:sp>
-      <p:sp>
-        <p:nvSpPr>
-          <p:cNvPr id="14" name="Rounded Rectangle 13"/>
-          <p:cNvSpPr/>
-          <p:nvPr/>
-        </p:nvSpPr>
-        <p:spPr>
-          <a:xfrm>
-            <a:off x="594360" y="4146804"/>
-            <a:ext cx="438912" cy="438912"/>
-          </a:xfrm>
-          <a:prstGeom prst="roundRect">
-            <a:avLst>
-              <a:gd name="adj" fmla="val 12000"/>
-            </a:avLst>
-          </a:prstGeom>
-          <a:solidFill>
-            <a:srgbClr val="095292"/>
-          </a:solidFill>
-          <a:ln>
-            <a:noFill/>
-          </a:ln>
-        </p:spPr>
-        <p:style>
-          <a:lnRef idx="1">
-            <a:schemeClr val="accent1"/>
-          </a:lnRef>
-          <a:fillRef idx="3">
-            <a:schemeClr val="accent1"/>
-          </a:fillRef>
-          <a:effectRef idx="2">
-            <a:schemeClr val="accent1"/>
-          </a:effectRef>
-          <a:fontRef idx="minor">
-            <a:schemeClr val="lt1"/>
-          </a:fontRef>
-        </p:style>
-        <p:txBody>
-          <a:bodyPr rtlCol="0" anchor="ctr"/>
-          <a:lstStyle/>
-          <a:p>
-            <a:pPr algn="ctr"/>
-          </a:p>
-        </p:txBody>
-      </p:sp>
-      <p:sp>
-        <p:nvSpPr>
-          <p:cNvPr id="15" name="TextBox 14"/>
-          <p:cNvSpPr txBox="1"/>
-          <p:nvPr/>
-        </p:nvSpPr>
-        <p:spPr>
-          <a:xfrm>
-            <a:off x="594360" y="4146804"/>
-            <a:ext cx="438912" cy="438912"/>
-          </a:xfrm>
-          <a:prstGeom prst="rect">
-            <a:avLst/>
-          </a:prstGeom>
-          <a:noFill/>
-        </p:spPr>
-        <p:txBody>
-          <a:bodyPr wrap="square" anchor="ctr"/>
-          <a:lstStyle/>
-          <a:p>
-            <a:pPr algn="ctr"/>
-            <a:r>
-              <a:rPr sz="1600" b="1" i="0">
-                <a:solidFill>
-                  <a:srgbClr val="FFFFFF"/>
-                </a:solidFill>
-                <a:latin typeface="Calibri"/>
-              </a:rPr>
-              <a:t>3</a:t>
-            </a:r>
-          </a:p>
-        </p:txBody>
-      </p:sp>
-      <p:sp>
-        <p:nvSpPr>
-          <p:cNvPr id="16" name="TextBox 15"/>
-          <p:cNvSpPr txBox="1"/>
-          <p:nvPr/>
-        </p:nvSpPr>
-        <p:spPr>
-          <a:xfrm>
-            <a:off x="1188720" y="3931920"/>
-            <a:ext cx="10271455" cy="886968"/>
-          </a:xfrm>
-          <a:prstGeom prst="rect">
-            <a:avLst/>
-          </a:prstGeom>
-          <a:noFill/>
-        </p:spPr>
-        <p:txBody>
-          <a:bodyPr wrap="square" anchor="ctr"/>
-          <a:lstStyle/>
-          <a:p>
-            <a:r>
-              <a:rPr sz="1500" b="1" i="0">
-                <a:solidFill>
-                  <a:srgbClr val="095292"/>
-                </a:solidFill>
-                <a:latin typeface="Calibri"/>
-              </a:rPr>
-              <a:t>Proponer 3 mejoras concretas a su VetCare.</a:t>
-            </a:r>
-          </a:p>
-        </p:txBody>
-      </p:sp>
-      <p:sp>
-        <p:nvSpPr>
-          <p:cNvPr id="17" name="Rounded Rectangle 16"/>
-          <p:cNvSpPr/>
-          <p:nvPr/>
-        </p:nvSpPr>
-        <p:spPr>
-          <a:xfrm>
-            <a:off x="457200" y="4983480"/>
-            <a:ext cx="11277295" cy="1051560"/>
-          </a:xfrm>
-          <a:prstGeom prst="roundRect">
-            <a:avLst>
-              <a:gd name="adj" fmla="val 12000"/>
-            </a:avLst>
-          </a:prstGeom>
-          <a:solidFill>
-            <a:srgbClr val="E8F4FA"/>
-          </a:solidFill>
-          <a:ln>
-            <a:noFill/>
-          </a:ln>
-        </p:spPr>
-        <p:style>
-          <a:lnRef idx="1">
-            <a:schemeClr val="accent1"/>
-          </a:lnRef>
-          <a:fillRef idx="3">
-            <a:schemeClr val="accent1"/>
-          </a:fillRef>
-          <a:effectRef idx="2">
-            <a:schemeClr val="accent1"/>
-          </a:effectRef>
-          <a:fontRef idx="minor">
-            <a:schemeClr val="lt1"/>
-          </a:fontRef>
-        </p:style>
-        <p:txBody>
-          <a:bodyPr rtlCol="0" anchor="ctr"/>
-          <a:lstStyle/>
-          <a:p>
-            <a:pPr algn="ctr"/>
-          </a:p>
-        </p:txBody>
-      </p:sp>
-      <p:sp>
-        <p:nvSpPr>
-          <p:cNvPr id="18" name="Rounded Rectangle 17"/>
-          <p:cNvSpPr/>
-          <p:nvPr/>
-        </p:nvSpPr>
-        <p:spPr>
-          <a:xfrm>
-            <a:off x="594360" y="5289804"/>
-            <a:ext cx="438912" cy="438912"/>
-          </a:xfrm>
-          <a:prstGeom prst="roundRect">
-            <a:avLst>
-              <a:gd name="adj" fmla="val 12000"/>
-            </a:avLst>
-          </a:prstGeom>
-          <a:solidFill>
-            <a:srgbClr val="095292"/>
-          </a:solidFill>
-          <a:ln>
-            <a:noFill/>
-          </a:ln>
-        </p:spPr>
-        <p:style>
-          <a:lnRef idx="1">
-            <a:schemeClr val="accent1"/>
-          </a:lnRef>
-          <a:fillRef idx="3">
-            <a:schemeClr val="accent1"/>
-          </a:fillRef>
-          <a:effectRef idx="2">
-            <a:schemeClr val="accent1"/>
-          </a:effectRef>
-          <a:fontRef idx="minor">
-            <a:schemeClr val="lt1"/>
-          </a:fontRef>
-        </p:style>
-        <p:txBody>
-          <a:bodyPr rtlCol="0" anchor="ctr"/>
-          <a:lstStyle/>
-          <a:p>
-            <a:pPr algn="ctr"/>
-          </a:p>
-        </p:txBody>
-      </p:sp>
-      <p:sp>
-        <p:nvSpPr>
-          <p:cNvPr id="19" name="TextBox 18"/>
-          <p:cNvSpPr txBox="1"/>
-          <p:nvPr/>
-        </p:nvSpPr>
-        <p:spPr>
-          <a:xfrm>
-            <a:off x="594360" y="5289804"/>
-            <a:ext cx="438912" cy="438912"/>
-          </a:xfrm>
-          <a:prstGeom prst="rect">
-            <a:avLst/>
-          </a:prstGeom>
-          <a:noFill/>
-        </p:spPr>
-        <p:txBody>
-          <a:bodyPr wrap="square" anchor="ctr"/>
-          <a:lstStyle/>
-          <a:p>
-            <a:pPr algn="ctr"/>
-            <a:r>
-              <a:rPr sz="1600" b="1" i="0">
-                <a:solidFill>
-                  <a:srgbClr val="FFFFFF"/>
-                </a:solidFill>
-                <a:latin typeface="Calibri"/>
-              </a:rPr>
-              <a:t>4</a:t>
-            </a:r>
-          </a:p>
-        </p:txBody>
-      </p:sp>
-      <p:sp>
-        <p:nvSpPr>
-          <p:cNvPr id="20" name="TextBox 19"/>
-          <p:cNvSpPr txBox="1"/>
-          <p:nvPr/>
-        </p:nvSpPr>
-        <p:spPr>
-          <a:xfrm>
-            <a:off x="1188720" y="5074920"/>
-            <a:ext cx="10271455" cy="886968"/>
-          </a:xfrm>
-          <a:prstGeom prst="rect">
-            <a:avLst/>
-          </a:prstGeom>
-          <a:noFill/>
-        </p:spPr>
-        <p:txBody>
-          <a:bodyPr wrap="square" anchor="ctr"/>
-          <a:lstStyle/>
-          <a:p>
-            <a:r>
-              <a:rPr sz="1500" b="1" i="0">
-                <a:solidFill>
-                  <a:srgbClr val="095292"/>
-                </a:solidFill>
-                <a:latin typeface="Calibri"/>
-              </a:rPr>
-              <a:t>Actualizar informe PI con lecciones de casos.</a:t>
-            </a:r>
-          </a:p>
-        </p:txBody>
-      </p:sp>
-      <p:sp>
-        <p:nvSpPr>
-          <p:cNvPr id="21" name="TextBox 20"/>
+          <a:bodyPr wrap="square">
+            <a:spAutoFit/>
+          </a:bodyPr>
+          <a:lstStyle/>
+          <a:p>
+            <a:pPr>
+              <a:spcAft>
+                <a:spcPts val="800"/>
+              </a:spcAft>
+            </a:pPr>
+            <a:r>
+              <a:rPr sz="2000" b="0" i="0">
+                <a:solidFill>
+                  <a:srgbClr val="333333"/>
+                </a:solidFill>
+                <a:latin typeface="Calibri"/>
+              </a:rPr>
+              <a:t>–   Plantilla: contexto-&gt;fallo-&gt;lección-&gt;cambio.</a:t>
+            </a:r>
+          </a:p>
+        </p:txBody>
+      </p:sp>
+      <p:sp>
+        <p:nvSpPr>
+          <p:cNvPr id="6" name="TextBox 5"/>
           <p:cNvSpPr txBox="1"/>
           <p:nvPr/>
         </p:nvSpPr>
@@ -9231,7 +8963,7 @@
                 </a:solidFill>
                 <a:latin typeface="Calibri"/>
               </a:rPr>
-              <a:t>Actividad autonoma — pistas (checklist vacio)</a:t>
+              <a:t>Actividad autonoma — pasos guiados</a:t>
             </a:r>
           </a:p>
         </p:txBody>
@@ -9244,8 +8976,8 @@
         </p:nvSpPr>
         <p:spPr>
           <a:xfrm>
-            <a:off x="457200" y="1261872"/>
-            <a:ext cx="11277295" cy="566928"/>
+            <a:off x="457200" y="1554480"/>
+            <a:ext cx="11277295" cy="1051560"/>
           </a:xfrm>
           <a:prstGeom prst="roundRect">
             <a:avLst>
@@ -9283,25 +9015,25 @@
       </p:sp>
       <p:sp>
         <p:nvSpPr>
-          <p:cNvPr id="6" name="Rectangle 5"/>
+          <p:cNvPr id="6" name="Rounded Rectangle 5"/>
           <p:cNvSpPr/>
           <p:nvPr/>
         </p:nvSpPr>
         <p:spPr>
           <a:xfrm>
-            <a:off x="640080" y="1408175"/>
-            <a:ext cx="274320" cy="274320"/>
-          </a:xfrm>
-          <a:prstGeom prst="rect">
-            <a:avLst/>
+            <a:off x="594360" y="1860804"/>
+            <a:ext cx="438912" cy="438912"/>
+          </a:xfrm>
+          <a:prstGeom prst="roundRect">
+            <a:avLst>
+              <a:gd name="adj" fmla="val 12000"/>
+            </a:avLst>
           </a:prstGeom>
           <a:solidFill>
-            <a:srgbClr val="FFFFFF"/>
+            <a:srgbClr val="095292"/>
           </a:solidFill>
           <a:ln>
-            <a:solidFill>
-              <a:srgbClr val="333333"/>
-            </a:solidFill>
+            <a:noFill/>
           </a:ln>
         </p:spPr>
         <p:style>
@@ -9328,20 +9060,87 @@
       </p:sp>
       <p:sp>
         <p:nvSpPr>
-          <p:cNvPr id="7" name="Rectangle 6"/>
+          <p:cNvPr id="7" name="TextBox 6"/>
+          <p:cNvSpPr txBox="1"/>
+          <p:nvPr/>
+        </p:nvSpPr>
+        <p:spPr>
+          <a:xfrm>
+            <a:off x="594360" y="1860804"/>
+            <a:ext cx="438912" cy="438912"/>
+          </a:xfrm>
+          <a:prstGeom prst="rect">
+            <a:avLst/>
+          </a:prstGeom>
+          <a:noFill/>
+        </p:spPr>
+        <p:txBody>
+          <a:bodyPr wrap="square" anchor="ctr"/>
+          <a:lstStyle/>
+          <a:p>
+            <a:pPr algn="ctr"/>
+            <a:r>
+              <a:rPr sz="1600" b="1" i="0">
+                <a:solidFill>
+                  <a:srgbClr val="FFFFFF"/>
+                </a:solidFill>
+                <a:latin typeface="Calibri"/>
+              </a:rPr>
+              <a:t>1</a:t>
+            </a:r>
+          </a:p>
+        </p:txBody>
+      </p:sp>
+      <p:sp>
+        <p:nvSpPr>
+          <p:cNvPr id="8" name="TextBox 7"/>
+          <p:cNvSpPr txBox="1"/>
+          <p:nvPr/>
+        </p:nvSpPr>
+        <p:spPr>
+          <a:xfrm>
+            <a:off x="1188720" y="1645920"/>
+            <a:ext cx="10271455" cy="886968"/>
+          </a:xfrm>
+          <a:prstGeom prst="rect">
+            <a:avLst/>
+          </a:prstGeom>
+          <a:noFill/>
+        </p:spPr>
+        <p:txBody>
+          <a:bodyPr wrap="square" anchor="ctr"/>
+          <a:lstStyle/>
+          <a:p>
+            <a:r>
+              <a:rPr sz="1500" b="1" i="0">
+                <a:solidFill>
+                  <a:srgbClr val="095292"/>
+                </a:solidFill>
+                <a:latin typeface="Calibri"/>
+              </a:rPr>
+              <a:t>Elegir 1 caso (backup, rendimiento o seguridad).</a:t>
+            </a:r>
+          </a:p>
+        </p:txBody>
+      </p:sp>
+      <p:sp>
+        <p:nvSpPr>
+          <p:cNvPr id="9" name="Rounded Rectangle 8"/>
           <p:cNvSpPr/>
           <p:nvPr/>
         </p:nvSpPr>
         <p:spPr>
           <a:xfrm>
-            <a:off x="640080" y="1408175"/>
-            <a:ext cx="73152" cy="274320"/>
-          </a:xfrm>
-          <a:prstGeom prst="rect">
-            <a:avLst/>
+            <a:off x="457200" y="2697480"/>
+            <a:ext cx="11277295" cy="1051560"/>
+          </a:xfrm>
+          <a:prstGeom prst="roundRect">
+            <a:avLst>
+              <a:gd name="adj" fmla="val 12000"/>
+            </a:avLst>
           </a:prstGeom>
           <a:solidFill>
-            <a:srgbClr val="269CCB"/>
+            <a:srgbClr val="E8F4FA"/>
           </a:solidFill>
           <a:ln>
             <a:noFill/>
@@ -9371,14 +9170,59 @@
       </p:sp>
       <p:sp>
         <p:nvSpPr>
-          <p:cNvPr id="8" name="TextBox 7"/>
+          <p:cNvPr id="10" name="Rounded Rectangle 9"/>
+          <p:cNvSpPr/>
+          <p:nvPr/>
+        </p:nvSpPr>
+        <p:spPr>
+          <a:xfrm>
+            <a:off x="594360" y="3003804"/>
+            <a:ext cx="438912" cy="438912"/>
+          </a:xfrm>
+          <a:prstGeom prst="roundRect">
+            <a:avLst>
+              <a:gd name="adj" fmla="val 12000"/>
+            </a:avLst>
+          </a:prstGeom>
+          <a:solidFill>
+            <a:srgbClr val="095292"/>
+          </a:solidFill>
+          <a:ln>
+            <a:noFill/>
+          </a:ln>
+        </p:spPr>
+        <p:style>
+          <a:lnRef idx="1">
+            <a:schemeClr val="accent1"/>
+          </a:lnRef>
+          <a:fillRef idx="3">
+            <a:schemeClr val="accent1"/>
+          </a:fillRef>
+          <a:effectRef idx="2">
+            <a:schemeClr val="accent1"/>
+          </a:effectRef>
+          <a:fontRef idx="minor">
+            <a:schemeClr val="lt1"/>
+          </a:fontRef>
+        </p:style>
+        <p:txBody>
+          <a:bodyPr rtlCol="0" anchor="ctr"/>
+          <a:lstStyle/>
+          <a:p>
+            <a:pPr algn="ctr"/>
+          </a:p>
+        </p:txBody>
+      </p:sp>
+      <p:sp>
+        <p:nvSpPr>
+          <p:cNvPr id="11" name="TextBox 10"/>
           <p:cNvSpPr txBox="1"/>
           <p:nvPr/>
         </p:nvSpPr>
         <p:spPr>
           <a:xfrm>
-            <a:off x="1097280" y="1353312"/>
-            <a:ext cx="10362895" cy="402336"/>
+            <a:off x="594360" y="3003804"/>
+            <a:ext cx="438912" cy="438912"/>
           </a:xfrm>
           <a:prstGeom prst="rect">
             <a:avLst/>
@@ -9389,28 +9233,61 @@
           <a:bodyPr wrap="square" anchor="ctr"/>
           <a:lstStyle/>
           <a:p>
-            <a:r>
-              <a:rPr sz="1500" b="0" i="0">
-                <a:solidFill>
-                  <a:srgbClr val="333333"/>
-                </a:solidFill>
-                <a:latin typeface="Calibri"/>
-              </a:rPr>
-              <a:t>□ Mejoras accionables?</a:t>
-            </a:r>
-          </a:p>
-        </p:txBody>
-      </p:sp>
-      <p:sp>
-        <p:nvSpPr>
-          <p:cNvPr id="9" name="Rounded Rectangle 8"/>
+            <a:pPr algn="ctr"/>
+            <a:r>
+              <a:rPr sz="1600" b="1" i="0">
+                <a:solidFill>
+                  <a:srgbClr val="FFFFFF"/>
+                </a:solidFill>
+                <a:latin typeface="Calibri"/>
+              </a:rPr>
+              <a:t>2</a:t>
+            </a:r>
+          </a:p>
+        </p:txBody>
+      </p:sp>
+      <p:sp>
+        <p:nvSpPr>
+          <p:cNvPr id="12" name="TextBox 11"/>
+          <p:cNvSpPr txBox="1"/>
+          <p:nvPr/>
+        </p:nvSpPr>
+        <p:spPr>
+          <a:xfrm>
+            <a:off x="1188720" y="2788920"/>
+            <a:ext cx="10271455" cy="886968"/>
+          </a:xfrm>
+          <a:prstGeom prst="rect">
+            <a:avLst/>
+          </a:prstGeom>
+          <a:noFill/>
+        </p:spPr>
+        <p:txBody>
+          <a:bodyPr wrap="square" anchor="ctr"/>
+          <a:lstStyle/>
+          <a:p>
+            <a:r>
+              <a:rPr sz="1500" b="1" i="0">
+                <a:solidFill>
+                  <a:srgbClr val="095292"/>
+                </a:solidFill>
+                <a:latin typeface="Calibri"/>
+              </a:rPr>
+              <a:t>Resumir en media pagina que paso.</a:t>
+            </a:r>
+          </a:p>
+        </p:txBody>
+      </p:sp>
+      <p:sp>
+        <p:nvSpPr>
+          <p:cNvPr id="13" name="Rounded Rectangle 12"/>
           <p:cNvSpPr/>
           <p:nvPr/>
         </p:nvSpPr>
         <p:spPr>
           <a:xfrm>
-            <a:off x="457200" y="1938528"/>
-            <a:ext cx="11277295" cy="566928"/>
+            <a:off x="457200" y="3840480"/>
+            <a:ext cx="11277295" cy="1051560"/>
           </a:xfrm>
           <a:prstGeom prst="roundRect">
             <a:avLst>
@@ -9448,25 +9325,25 @@
       </p:sp>
       <p:sp>
         <p:nvSpPr>
-          <p:cNvPr id="10" name="Rectangle 9"/>
+          <p:cNvPr id="14" name="Rounded Rectangle 13"/>
           <p:cNvSpPr/>
           <p:nvPr/>
         </p:nvSpPr>
         <p:spPr>
           <a:xfrm>
-            <a:off x="640080" y="2084832"/>
-            <a:ext cx="274320" cy="274320"/>
-          </a:xfrm>
-          <a:prstGeom prst="rect">
-            <a:avLst/>
+            <a:off x="594360" y="4146804"/>
+            <a:ext cx="438912" cy="438912"/>
+          </a:xfrm>
+          <a:prstGeom prst="roundRect">
+            <a:avLst>
+              <a:gd name="adj" fmla="val 12000"/>
+            </a:avLst>
           </a:prstGeom>
           <a:solidFill>
-            <a:srgbClr val="FFFFFF"/>
+            <a:srgbClr val="095292"/>
           </a:solidFill>
           <a:ln>
-            <a:solidFill>
-              <a:srgbClr val="333333"/>
-            </a:solidFill>
+            <a:noFill/>
           </a:ln>
         </p:spPr>
         <p:style>
@@ -9493,20 +9370,87 @@
       </p:sp>
       <p:sp>
         <p:nvSpPr>
-          <p:cNvPr id="11" name="Rectangle 10"/>
+          <p:cNvPr id="15" name="TextBox 14"/>
+          <p:cNvSpPr txBox="1"/>
+          <p:nvPr/>
+        </p:nvSpPr>
+        <p:spPr>
+          <a:xfrm>
+            <a:off x="594360" y="4146804"/>
+            <a:ext cx="438912" cy="438912"/>
+          </a:xfrm>
+          <a:prstGeom prst="rect">
+            <a:avLst/>
+          </a:prstGeom>
+          <a:noFill/>
+        </p:spPr>
+        <p:txBody>
+          <a:bodyPr wrap="square" anchor="ctr"/>
+          <a:lstStyle/>
+          <a:p>
+            <a:pPr algn="ctr"/>
+            <a:r>
+              <a:rPr sz="1600" b="1" i="0">
+                <a:solidFill>
+                  <a:srgbClr val="FFFFFF"/>
+                </a:solidFill>
+                <a:latin typeface="Calibri"/>
+              </a:rPr>
+              <a:t>3</a:t>
+            </a:r>
+          </a:p>
+        </p:txBody>
+      </p:sp>
+      <p:sp>
+        <p:nvSpPr>
+          <p:cNvPr id="16" name="TextBox 15"/>
+          <p:cNvSpPr txBox="1"/>
+          <p:nvPr/>
+        </p:nvSpPr>
+        <p:spPr>
+          <a:xfrm>
+            <a:off x="1188720" y="3931920"/>
+            <a:ext cx="10271455" cy="886968"/>
+          </a:xfrm>
+          <a:prstGeom prst="rect">
+            <a:avLst/>
+          </a:prstGeom>
+          <a:noFill/>
+        </p:spPr>
+        <p:txBody>
+          <a:bodyPr wrap="square" anchor="ctr"/>
+          <a:lstStyle/>
+          <a:p>
+            <a:r>
+              <a:rPr sz="1500" b="1" i="0">
+                <a:solidFill>
+                  <a:srgbClr val="095292"/>
+                </a:solidFill>
+                <a:latin typeface="Calibri"/>
+              </a:rPr>
+              <a:t>Proponer 3 mejoras concretas a su VetCare.</a:t>
+            </a:r>
+          </a:p>
+        </p:txBody>
+      </p:sp>
+      <p:sp>
+        <p:nvSpPr>
+          <p:cNvPr id="17" name="Rounded Rectangle 16"/>
           <p:cNvSpPr/>
           <p:nvPr/>
         </p:nvSpPr>
         <p:spPr>
           <a:xfrm>
-            <a:off x="640080" y="2084832"/>
-            <a:ext cx="73152" cy="274320"/>
-          </a:xfrm>
-          <a:prstGeom prst="rect">
-            <a:avLst/>
+            <a:off x="457200" y="4983480"/>
+            <a:ext cx="11277295" cy="1051560"/>
+          </a:xfrm>
+          <a:prstGeom prst="roundRect">
+            <a:avLst>
+              <a:gd name="adj" fmla="val 12000"/>
+            </a:avLst>
           </a:prstGeom>
           <a:solidFill>
-            <a:srgbClr val="269CCB"/>
+            <a:srgbClr val="E8F4FA"/>
           </a:solidFill>
           <a:ln>
             <a:noFill/>
@@ -9536,46 +9480,14 @@
       </p:sp>
       <p:sp>
         <p:nvSpPr>
-          <p:cNvPr id="12" name="TextBox 11"/>
-          <p:cNvSpPr txBox="1"/>
-          <p:nvPr/>
-        </p:nvSpPr>
-        <p:spPr>
-          <a:xfrm>
-            <a:off x="1097280" y="2029968"/>
-            <a:ext cx="10362895" cy="402336"/>
-          </a:xfrm>
-          <a:prstGeom prst="rect">
-            <a:avLst/>
-          </a:prstGeom>
-          <a:noFill/>
-        </p:spPr>
-        <p:txBody>
-          <a:bodyPr wrap="square" anchor="ctr"/>
-          <a:lstStyle/>
-          <a:p>
-            <a:r>
-              <a:rPr sz="1500" b="0" i="0">
-                <a:solidFill>
-                  <a:srgbClr val="333333"/>
-                </a:solidFill>
-                <a:latin typeface="Calibri"/>
-              </a:rPr>
-              <a:t>□ Conectan al PI?</a:t>
-            </a:r>
-          </a:p>
-        </p:txBody>
-      </p:sp>
-      <p:sp>
-        <p:nvSpPr>
-          <p:cNvPr id="13" name="Rounded Rectangle 12"/>
+          <p:cNvPr id="18" name="Rounded Rectangle 17"/>
           <p:cNvSpPr/>
           <p:nvPr/>
         </p:nvSpPr>
         <p:spPr>
           <a:xfrm>
-            <a:off x="457200" y="2615184"/>
-            <a:ext cx="11277295" cy="566928"/>
+            <a:off x="594360" y="5289804"/>
+            <a:ext cx="438912" cy="438912"/>
           </a:xfrm>
           <a:prstGeom prst="roundRect">
             <a:avLst>
@@ -9583,7 +9495,7 @@
             </a:avLst>
           </a:prstGeom>
           <a:solidFill>
-            <a:srgbClr val="F2F2F2"/>
+            <a:srgbClr val="095292"/>
           </a:solidFill>
           <a:ln>
             <a:noFill/>
@@ -9613,102 +9525,47 @@
       </p:sp>
       <p:sp>
         <p:nvSpPr>
-          <p:cNvPr id="14" name="Rectangle 13"/>
-          <p:cNvSpPr/>
-          <p:nvPr/>
-        </p:nvSpPr>
-        <p:spPr>
-          <a:xfrm>
-            <a:off x="640080" y="2761488"/>
-            <a:ext cx="274320" cy="274320"/>
-          </a:xfrm>
-          <a:prstGeom prst="rect">
-            <a:avLst/>
-          </a:prstGeom>
-          <a:solidFill>
-            <a:srgbClr val="FFFFFF"/>
-          </a:solidFill>
-          <a:ln>
-            <a:solidFill>
-              <a:srgbClr val="333333"/>
-            </a:solidFill>
-          </a:ln>
-        </p:spPr>
-        <p:style>
-          <a:lnRef idx="1">
-            <a:schemeClr val="accent1"/>
-          </a:lnRef>
-          <a:fillRef idx="3">
-            <a:schemeClr val="accent1"/>
-          </a:fillRef>
-          <a:effectRef idx="2">
-            <a:schemeClr val="accent1"/>
-          </a:effectRef>
-          <a:fontRef idx="minor">
-            <a:schemeClr val="lt1"/>
-          </a:fontRef>
-        </p:style>
-        <p:txBody>
-          <a:bodyPr rtlCol="0" anchor="ctr"/>
+          <p:cNvPr id="19" name="TextBox 18"/>
+          <p:cNvSpPr txBox="1"/>
+          <p:nvPr/>
+        </p:nvSpPr>
+        <p:spPr>
+          <a:xfrm>
+            <a:off x="594360" y="5289804"/>
+            <a:ext cx="438912" cy="438912"/>
+          </a:xfrm>
+          <a:prstGeom prst="rect">
+            <a:avLst/>
+          </a:prstGeom>
+          <a:noFill/>
+        </p:spPr>
+        <p:txBody>
+          <a:bodyPr wrap="square" anchor="ctr"/>
           <a:lstStyle/>
           <a:p>
             <a:pPr algn="ctr"/>
-          </a:p>
-        </p:txBody>
-      </p:sp>
-      <p:sp>
-        <p:nvSpPr>
-          <p:cNvPr id="15" name="Rectangle 14"/>
-          <p:cNvSpPr/>
-          <p:nvPr/>
-        </p:nvSpPr>
-        <p:spPr>
-          <a:xfrm>
-            <a:off x="640080" y="2761488"/>
-            <a:ext cx="73152" cy="274320"/>
-          </a:xfrm>
-          <a:prstGeom prst="rect">
-            <a:avLst/>
-          </a:prstGeom>
-          <a:solidFill>
-            <a:srgbClr val="269CCB"/>
-          </a:solidFill>
-          <a:ln>
-            <a:noFill/>
-          </a:ln>
-        </p:spPr>
-        <p:style>
-          <a:lnRef idx="1">
-            <a:schemeClr val="accent1"/>
-          </a:lnRef>
-          <a:fillRef idx="3">
-            <a:schemeClr val="accent1"/>
-          </a:fillRef>
-          <a:effectRef idx="2">
-            <a:schemeClr val="accent1"/>
-          </a:effectRef>
-          <a:fontRef idx="minor">
-            <a:schemeClr val="lt1"/>
-          </a:fontRef>
-        </p:style>
-        <p:txBody>
-          <a:bodyPr rtlCol="0" anchor="ctr"/>
-          <a:lstStyle/>
-          <a:p>
-            <a:pPr algn="ctr"/>
-          </a:p>
-        </p:txBody>
-      </p:sp>
-      <p:sp>
-        <p:nvSpPr>
-          <p:cNvPr id="16" name="TextBox 15"/>
+            <a:r>
+              <a:rPr sz="1600" b="1" i="0">
+                <a:solidFill>
+                  <a:srgbClr val="FFFFFF"/>
+                </a:solidFill>
+                <a:latin typeface="Calibri"/>
+              </a:rPr>
+              <a:t>4</a:t>
+            </a:r>
+          </a:p>
+        </p:txBody>
+      </p:sp>
+      <p:sp>
+        <p:nvSpPr>
+          <p:cNvPr id="20" name="TextBox 19"/>
           <p:cNvSpPr txBox="1"/>
           <p:nvPr/>
         </p:nvSpPr>
         <p:spPr>
           <a:xfrm>
-            <a:off x="1097280" y="2706624"/>
-            <a:ext cx="10362895" cy="402336"/>
+            <a:off x="1188720" y="5074920"/>
+            <a:ext cx="10271455" cy="886968"/>
           </a:xfrm>
           <a:prstGeom prst="rect">
             <a:avLst/>
@@ -9720,20 +9577,20 @@
           <a:lstStyle/>
           <a:p>
             <a:r>
-              <a:rPr sz="1500" b="0" i="0">
-                <a:solidFill>
-                  <a:srgbClr val="333333"/>
-                </a:solidFill>
-                <a:latin typeface="Calibri"/>
-              </a:rPr>
-              <a:t>□ Evidencia de lectura?</a:t>
-            </a:r>
-          </a:p>
-        </p:txBody>
-      </p:sp>
-      <p:sp>
-        <p:nvSpPr>
-          <p:cNvPr id="17" name="TextBox 16"/>
+              <a:rPr sz="1500" b="1" i="0">
+                <a:solidFill>
+                  <a:srgbClr val="095292"/>
+                </a:solidFill>
+                <a:latin typeface="Calibri"/>
+              </a:rPr>
+              <a:t>Actualizar informe PI con lecciones de casos.</a:t>
+            </a:r>
+          </a:p>
+        </p:txBody>
+      </p:sp>
+      <p:sp>
+        <p:nvSpPr>
+          <p:cNvPr id="21" name="TextBox 20"/>
           <p:cNvSpPr txBox="1"/>
           <p:nvPr/>
         </p:nvSpPr>
@@ -9907,21 +9764,154 @@
                 </a:solidFill>
                 <a:latin typeface="Calibri"/>
               </a:rPr>
-              <a:t>Criterios de exito / entregable</a:t>
-            </a:r>
-          </a:p>
-        </p:txBody>
-      </p:sp>
-      <p:sp>
-        <p:nvSpPr>
-          <p:cNvPr id="5" name="TextBox 4"/>
+              <a:t>Actividad autonoma — pistas (checklist vacio)</a:t>
+            </a:r>
+          </a:p>
+        </p:txBody>
+      </p:sp>
+      <p:sp>
+        <p:nvSpPr>
+          <p:cNvPr id="5" name="Rounded Rectangle 4"/>
+          <p:cNvSpPr/>
+          <p:nvPr/>
+        </p:nvSpPr>
+        <p:spPr>
+          <a:xfrm>
+            <a:off x="457200" y="1261872"/>
+            <a:ext cx="11277295" cy="566928"/>
+          </a:xfrm>
+          <a:prstGeom prst="roundRect">
+            <a:avLst>
+              <a:gd name="adj" fmla="val 12000"/>
+            </a:avLst>
+          </a:prstGeom>
+          <a:solidFill>
+            <a:srgbClr val="F2F2F2"/>
+          </a:solidFill>
+          <a:ln>
+            <a:noFill/>
+          </a:ln>
+        </p:spPr>
+        <p:style>
+          <a:lnRef idx="1">
+            <a:schemeClr val="accent1"/>
+          </a:lnRef>
+          <a:fillRef idx="3">
+            <a:schemeClr val="accent1"/>
+          </a:fillRef>
+          <a:effectRef idx="2">
+            <a:schemeClr val="accent1"/>
+          </a:effectRef>
+          <a:fontRef idx="minor">
+            <a:schemeClr val="lt1"/>
+          </a:fontRef>
+        </p:style>
+        <p:txBody>
+          <a:bodyPr rtlCol="0" anchor="ctr"/>
+          <a:lstStyle/>
+          <a:p>
+            <a:pPr algn="ctr"/>
+          </a:p>
+        </p:txBody>
+      </p:sp>
+      <p:sp>
+        <p:nvSpPr>
+          <p:cNvPr id="6" name="Rectangle 5"/>
+          <p:cNvSpPr/>
+          <p:nvPr/>
+        </p:nvSpPr>
+        <p:spPr>
+          <a:xfrm>
+            <a:off x="640080" y="1408175"/>
+            <a:ext cx="274320" cy="274320"/>
+          </a:xfrm>
+          <a:prstGeom prst="rect">
+            <a:avLst/>
+          </a:prstGeom>
+          <a:solidFill>
+            <a:srgbClr val="FFFFFF"/>
+          </a:solidFill>
+          <a:ln>
+            <a:solidFill>
+              <a:srgbClr val="333333"/>
+            </a:solidFill>
+          </a:ln>
+        </p:spPr>
+        <p:style>
+          <a:lnRef idx="1">
+            <a:schemeClr val="accent1"/>
+          </a:lnRef>
+          <a:fillRef idx="3">
+            <a:schemeClr val="accent1"/>
+          </a:fillRef>
+          <a:effectRef idx="2">
+            <a:schemeClr val="accent1"/>
+          </a:effectRef>
+          <a:fontRef idx="minor">
+            <a:schemeClr val="lt1"/>
+          </a:fontRef>
+        </p:style>
+        <p:txBody>
+          <a:bodyPr rtlCol="0" anchor="ctr"/>
+          <a:lstStyle/>
+          <a:p>
+            <a:pPr algn="ctr"/>
+          </a:p>
+        </p:txBody>
+      </p:sp>
+      <p:sp>
+        <p:nvSpPr>
+          <p:cNvPr id="7" name="Rectangle 6"/>
+          <p:cNvSpPr/>
+          <p:nvPr/>
+        </p:nvSpPr>
+        <p:spPr>
+          <a:xfrm>
+            <a:off x="640080" y="1408175"/>
+            <a:ext cx="73152" cy="274320"/>
+          </a:xfrm>
+          <a:prstGeom prst="rect">
+            <a:avLst/>
+          </a:prstGeom>
+          <a:solidFill>
+            <a:srgbClr val="269CCB"/>
+          </a:solidFill>
+          <a:ln>
+            <a:noFill/>
+          </a:ln>
+        </p:spPr>
+        <p:style>
+          <a:lnRef idx="1">
+            <a:schemeClr val="accent1"/>
+          </a:lnRef>
+          <a:fillRef idx="3">
+            <a:schemeClr val="accent1"/>
+          </a:fillRef>
+          <a:effectRef idx="2">
+            <a:schemeClr val="accent1"/>
+          </a:effectRef>
+          <a:fontRef idx="minor">
+            <a:schemeClr val="lt1"/>
+          </a:fontRef>
+        </p:style>
+        <p:txBody>
+          <a:bodyPr rtlCol="0" anchor="ctr"/>
+          <a:lstStyle/>
+          <a:p>
+            <a:pPr algn="ctr"/>
+          </a:p>
+        </p:txBody>
+      </p:sp>
+      <p:sp>
+        <p:nvSpPr>
+          <p:cNvPr id="8" name="TextBox 7"/>
           <p:cNvSpPr txBox="1"/>
           <p:nvPr/>
         </p:nvSpPr>
         <p:spPr>
           <a:xfrm>
-            <a:off x="457200" y="1170432"/>
-            <a:ext cx="11277295" cy="5230368"/>
+            <a:off x="1097280" y="1353312"/>
+            <a:ext cx="10362895" cy="402336"/>
           </a:xfrm>
           <a:prstGeom prst="rect">
             <a:avLst/>
@@ -9929,131 +9919,354 @@
           <a:noFill/>
         </p:spPr>
         <p:txBody>
-          <a:bodyPr wrap="square">
-            <a:spAutoFit/>
-          </a:bodyPr>
-          <a:lstStyle/>
-          <a:p>
-            <a:pPr>
-              <a:spcAft>
-                <a:spcPts val="800"/>
-              </a:spcAft>
-            </a:pPr>
-            <a:r>
-              <a:rPr sz="2000" b="0" i="0">
+          <a:bodyPr wrap="square" anchor="ctr"/>
+          <a:lstStyle/>
+          <a:p>
+            <a:r>
+              <a:rPr sz="1500" b="0" i="0">
                 <a:solidFill>
                   <a:srgbClr val="333333"/>
                 </a:solidFill>
                 <a:latin typeface="Calibri"/>
               </a:rPr>
-              <a:t>–   </a:t>
-            </a:r>
-            <a:r>
-              <a:rPr sz="2000" b="1" i="0">
+              <a:t>□ Mejoras accionables?</a:t>
+            </a:r>
+          </a:p>
+        </p:txBody>
+      </p:sp>
+      <p:sp>
+        <p:nvSpPr>
+          <p:cNvPr id="9" name="Rounded Rectangle 8"/>
+          <p:cNvSpPr/>
+          <p:nvPr/>
+        </p:nvSpPr>
+        <p:spPr>
+          <a:xfrm>
+            <a:off x="457200" y="1938528"/>
+            <a:ext cx="11277295" cy="566928"/>
+          </a:xfrm>
+          <a:prstGeom prst="roundRect">
+            <a:avLst>
+              <a:gd name="adj" fmla="val 12000"/>
+            </a:avLst>
+          </a:prstGeom>
+          <a:solidFill>
+            <a:srgbClr val="F2F2F2"/>
+          </a:solidFill>
+          <a:ln>
+            <a:noFill/>
+          </a:ln>
+        </p:spPr>
+        <p:style>
+          <a:lnRef idx="1">
+            <a:schemeClr val="accent1"/>
+          </a:lnRef>
+          <a:fillRef idx="3">
+            <a:schemeClr val="accent1"/>
+          </a:fillRef>
+          <a:effectRef idx="2">
+            <a:schemeClr val="accent1"/>
+          </a:effectRef>
+          <a:fontRef idx="minor">
+            <a:schemeClr val="lt1"/>
+          </a:fontRef>
+        </p:style>
+        <p:txBody>
+          <a:bodyPr rtlCol="0" anchor="ctr"/>
+          <a:lstStyle/>
+          <a:p>
+            <a:pPr algn="ctr"/>
+          </a:p>
+        </p:txBody>
+      </p:sp>
+      <p:sp>
+        <p:nvSpPr>
+          <p:cNvPr id="10" name="Rectangle 9"/>
+          <p:cNvSpPr/>
+          <p:nvPr/>
+        </p:nvSpPr>
+        <p:spPr>
+          <a:xfrm>
+            <a:off x="640080" y="2084832"/>
+            <a:ext cx="274320" cy="274320"/>
+          </a:xfrm>
+          <a:prstGeom prst="rect">
+            <a:avLst/>
+          </a:prstGeom>
+          <a:solidFill>
+            <a:srgbClr val="FFFFFF"/>
+          </a:solidFill>
+          <a:ln>
+            <a:solidFill>
+              <a:srgbClr val="333333"/>
+            </a:solidFill>
+          </a:ln>
+        </p:spPr>
+        <p:style>
+          <a:lnRef idx="1">
+            <a:schemeClr val="accent1"/>
+          </a:lnRef>
+          <a:fillRef idx="3">
+            <a:schemeClr val="accent1"/>
+          </a:fillRef>
+          <a:effectRef idx="2">
+            <a:schemeClr val="accent1"/>
+          </a:effectRef>
+          <a:fontRef idx="minor">
+            <a:schemeClr val="lt1"/>
+          </a:fontRef>
+        </p:style>
+        <p:txBody>
+          <a:bodyPr rtlCol="0" anchor="ctr"/>
+          <a:lstStyle/>
+          <a:p>
+            <a:pPr algn="ctr"/>
+          </a:p>
+        </p:txBody>
+      </p:sp>
+      <p:sp>
+        <p:nvSpPr>
+          <p:cNvPr id="11" name="Rectangle 10"/>
+          <p:cNvSpPr/>
+          <p:nvPr/>
+        </p:nvSpPr>
+        <p:spPr>
+          <a:xfrm>
+            <a:off x="640080" y="2084832"/>
+            <a:ext cx="73152" cy="274320"/>
+          </a:xfrm>
+          <a:prstGeom prst="rect">
+            <a:avLst/>
+          </a:prstGeom>
+          <a:solidFill>
+            <a:srgbClr val="269CCB"/>
+          </a:solidFill>
+          <a:ln>
+            <a:noFill/>
+          </a:ln>
+        </p:spPr>
+        <p:style>
+          <a:lnRef idx="1">
+            <a:schemeClr val="accent1"/>
+          </a:lnRef>
+          <a:fillRef idx="3">
+            <a:schemeClr val="accent1"/>
+          </a:fillRef>
+          <a:effectRef idx="2">
+            <a:schemeClr val="accent1"/>
+          </a:effectRef>
+          <a:fontRef idx="minor">
+            <a:schemeClr val="lt1"/>
+          </a:fontRef>
+        </p:style>
+        <p:txBody>
+          <a:bodyPr rtlCol="0" anchor="ctr"/>
+          <a:lstStyle/>
+          <a:p>
+            <a:pPr algn="ctr"/>
+          </a:p>
+        </p:txBody>
+      </p:sp>
+      <p:sp>
+        <p:nvSpPr>
+          <p:cNvPr id="12" name="TextBox 11"/>
+          <p:cNvSpPr txBox="1"/>
+          <p:nvPr/>
+        </p:nvSpPr>
+        <p:spPr>
+          <a:xfrm>
+            <a:off x="1097280" y="2029968"/>
+            <a:ext cx="10362895" cy="402336"/>
+          </a:xfrm>
+          <a:prstGeom prst="rect">
+            <a:avLst/>
+          </a:prstGeom>
+          <a:noFill/>
+        </p:spPr>
+        <p:txBody>
+          <a:bodyPr wrap="square" anchor="ctr"/>
+          <a:lstStyle/>
+          <a:p>
+            <a:r>
+              <a:rPr sz="1500" b="0" i="0">
                 <a:solidFill>
                   <a:srgbClr val="333333"/>
                 </a:solidFill>
                 <a:latin typeface="Calibri"/>
               </a:rPr>
-              <a:t>Entregable:</a:t>
-            </a:r>
-            <a:r>
-              <a:rPr sz="2000" b="0" i="0">
+              <a:t>□ Conectan al PI?</a:t>
+            </a:r>
+          </a:p>
+        </p:txBody>
+      </p:sp>
+      <p:sp>
+        <p:nvSpPr>
+          <p:cNvPr id="13" name="Rounded Rectangle 12"/>
+          <p:cNvSpPr/>
+          <p:nvPr/>
+        </p:nvSpPr>
+        <p:spPr>
+          <a:xfrm>
+            <a:off x="457200" y="2615184"/>
+            <a:ext cx="11277295" cy="566928"/>
+          </a:xfrm>
+          <a:prstGeom prst="roundRect">
+            <a:avLst>
+              <a:gd name="adj" fmla="val 12000"/>
+            </a:avLst>
+          </a:prstGeom>
+          <a:solidFill>
+            <a:srgbClr val="F2F2F2"/>
+          </a:solidFill>
+          <a:ln>
+            <a:noFill/>
+          </a:ln>
+        </p:spPr>
+        <p:style>
+          <a:lnRef idx="1">
+            <a:schemeClr val="accent1"/>
+          </a:lnRef>
+          <a:fillRef idx="3">
+            <a:schemeClr val="accent1"/>
+          </a:fillRef>
+          <a:effectRef idx="2">
+            <a:schemeClr val="accent1"/>
+          </a:effectRef>
+          <a:fontRef idx="minor">
+            <a:schemeClr val="lt1"/>
+          </a:fontRef>
+        </p:style>
+        <p:txBody>
+          <a:bodyPr rtlCol="0" anchor="ctr"/>
+          <a:lstStyle/>
+          <a:p>
+            <a:pPr algn="ctr"/>
+          </a:p>
+        </p:txBody>
+      </p:sp>
+      <p:sp>
+        <p:nvSpPr>
+          <p:cNvPr id="14" name="Rectangle 13"/>
+          <p:cNvSpPr/>
+          <p:nvPr/>
+        </p:nvSpPr>
+        <p:spPr>
+          <a:xfrm>
+            <a:off x="640080" y="2761488"/>
+            <a:ext cx="274320" cy="274320"/>
+          </a:xfrm>
+          <a:prstGeom prst="rect">
+            <a:avLst/>
+          </a:prstGeom>
+          <a:solidFill>
+            <a:srgbClr val="FFFFFF"/>
+          </a:solidFill>
+          <a:ln>
+            <a:solidFill>
+              <a:srgbClr val="333333"/>
+            </a:solidFill>
+          </a:ln>
+        </p:spPr>
+        <p:style>
+          <a:lnRef idx="1">
+            <a:schemeClr val="accent1"/>
+          </a:lnRef>
+          <a:fillRef idx="3">
+            <a:schemeClr val="accent1"/>
+          </a:fillRef>
+          <a:effectRef idx="2">
+            <a:schemeClr val="accent1"/>
+          </a:effectRef>
+          <a:fontRef idx="minor">
+            <a:schemeClr val="lt1"/>
+          </a:fontRef>
+        </p:style>
+        <p:txBody>
+          <a:bodyPr rtlCol="0" anchor="ctr"/>
+          <a:lstStyle/>
+          <a:p>
+            <a:pPr algn="ctr"/>
+          </a:p>
+        </p:txBody>
+      </p:sp>
+      <p:sp>
+        <p:nvSpPr>
+          <p:cNvPr id="15" name="Rectangle 14"/>
+          <p:cNvSpPr/>
+          <p:nvPr/>
+        </p:nvSpPr>
+        <p:spPr>
+          <a:xfrm>
+            <a:off x="640080" y="2761488"/>
+            <a:ext cx="73152" cy="274320"/>
+          </a:xfrm>
+          <a:prstGeom prst="rect">
+            <a:avLst/>
+          </a:prstGeom>
+          <a:solidFill>
+            <a:srgbClr val="269CCB"/>
+          </a:solidFill>
+          <a:ln>
+            <a:noFill/>
+          </a:ln>
+        </p:spPr>
+        <p:style>
+          <a:lnRef idx="1">
+            <a:schemeClr val="accent1"/>
+          </a:lnRef>
+          <a:fillRef idx="3">
+            <a:schemeClr val="accent1"/>
+          </a:fillRef>
+          <a:effectRef idx="2">
+            <a:schemeClr val="accent1"/>
+          </a:effectRef>
+          <a:fontRef idx="minor">
+            <a:schemeClr val="lt1"/>
+          </a:fontRef>
+        </p:style>
+        <p:txBody>
+          <a:bodyPr rtlCol="0" anchor="ctr"/>
+          <a:lstStyle/>
+          <a:p>
+            <a:pPr algn="ctr"/>
+          </a:p>
+        </p:txBody>
+      </p:sp>
+      <p:sp>
+        <p:nvSpPr>
+          <p:cNvPr id="16" name="TextBox 15"/>
+          <p:cNvSpPr txBox="1"/>
+          <p:nvPr/>
+        </p:nvSpPr>
+        <p:spPr>
+          <a:xfrm>
+            <a:off x="1097280" y="2706624"/>
+            <a:ext cx="10362895" cy="402336"/>
+          </a:xfrm>
+          <a:prstGeom prst="rect">
+            <a:avLst/>
+          </a:prstGeom>
+          <a:noFill/>
+        </p:spPr>
+        <p:txBody>
+          <a:bodyPr wrap="square" anchor="ctr"/>
+          <a:lstStyle/>
+          <a:p>
+            <a:r>
+              <a:rPr sz="1500" b="0" i="0">
                 <a:solidFill>
                   <a:srgbClr val="333333"/>
                 </a:solidFill>
                 <a:latin typeface="Calibri"/>
               </a:rPr>
-              <a:t> Informe 1-2 pag.: caso + 3 mejoras aplicables a VetCare</a:t>
-            </a:r>
-          </a:p>
-          <a:p>
-            <a:pPr>
-              <a:spcAft>
-                <a:spcPts val="800"/>
-              </a:spcAft>
-            </a:pPr>
-            <a:r>
-              <a:rPr sz="2000" b="0" i="0">
-                <a:solidFill>
-                  <a:srgbClr val="333333"/>
-                </a:solidFill>
-                <a:latin typeface="Calibri"/>
-              </a:rPr>
-              <a:t>–   Evidencia: el SQL y su salida quedan guardados en cada pregunta de la plataforma del curso.</a:t>
-            </a:r>
-          </a:p>
-          <a:p>
-            <a:pPr>
-              <a:spcAft>
-                <a:spcPts val="800"/>
-              </a:spcAft>
-            </a:pPr>
-            <a:r>
-              <a:rPr sz="2000" b="0" i="0">
-                <a:solidFill>
-                  <a:srgbClr val="333333"/>
-                </a:solidFill>
-                <a:latin typeface="Calibri"/>
-              </a:rPr>
-              <a:t>–   Conserva copia en tu carpeta del PI (los .sql que pide el entregable).</a:t>
-            </a:r>
-          </a:p>
-          <a:p>
-            <a:pPr>
-              <a:spcAft>
-                <a:spcPts val="800"/>
-              </a:spcAft>
-            </a:pPr>
-            <a:r>
-              <a:rPr sz="2000" b="0" i="0">
-                <a:solidFill>
-                  <a:srgbClr val="333333"/>
-                </a:solidFill>
-                <a:latin typeface="Calibri"/>
-              </a:rPr>
-              <a:t>–   Actualizar checklist PI (que criterio de rubrica avanzo).</a:t>
-            </a:r>
-          </a:p>
-          <a:p>
-            <a:pPr>
-              <a:spcAft>
-                <a:spcPts val="800"/>
-              </a:spcAft>
-            </a:pPr>
-            <a:r>
-              <a:rPr sz="2000" b="0" i="0">
-                <a:solidFill>
-                  <a:srgbClr val="333333"/>
-                </a:solidFill>
-                <a:latin typeface="Calibri"/>
-              </a:rPr>
-              <a:t>–   </a:t>
-            </a:r>
-            <a:r>
-              <a:rPr sz="2000" b="1" i="0">
-                <a:solidFill>
-                  <a:srgbClr val="333333"/>
-                </a:solidFill>
-                <a:latin typeface="Calibri"/>
-              </a:rPr>
-              <a:t>Entrega en la plataforma del curso</a:t>
-            </a:r>
-            <a:r>
-              <a:rPr sz="2000" b="0" i="0">
-                <a:solidFill>
-                  <a:srgbClr val="333333"/>
-                </a:solidFill>
-                <a:latin typeface="Calibri"/>
-              </a:rPr>
-              <a:t> — en la fecha que indique el docente.</a:t>
-            </a:r>
-          </a:p>
-        </p:txBody>
-      </p:sp>
-      <p:sp>
-        <p:nvSpPr>
-          <p:cNvPr id="6" name="TextBox 5"/>
+              <a:t>□ Evidencia de lectura?</a:t>
+            </a:r>
+          </a:p>
+        </p:txBody>
+      </p:sp>
+      <p:sp>
+        <p:nvSpPr>
+          <p:cNvPr id="17" name="TextBox 16"/>
           <p:cNvSpPr txBox="1"/>
           <p:nvPr/>
         </p:nvSpPr>
@@ -10227,109 +10440,21 @@
                 </a:solidFill>
                 <a:latin typeface="Calibri"/>
               </a:rPr>
-              <a:t>Para el PI esta semana</a:t>
-            </a:r>
-          </a:p>
-        </p:txBody>
-      </p:sp>
-      <p:sp>
-        <p:nvSpPr>
-          <p:cNvPr id="5" name="Rounded Rectangle 4"/>
-          <p:cNvSpPr/>
-          <p:nvPr/>
-        </p:nvSpPr>
-        <p:spPr>
-          <a:xfrm>
-            <a:off x="457200" y="1261872"/>
-            <a:ext cx="11277295" cy="1051560"/>
-          </a:xfrm>
-          <a:prstGeom prst="roundRect">
-            <a:avLst>
-              <a:gd name="adj" fmla="val 12000"/>
-            </a:avLst>
-          </a:prstGeom>
-          <a:solidFill>
-            <a:srgbClr val="E8F4FA"/>
-          </a:solidFill>
-          <a:ln>
-            <a:noFill/>
-          </a:ln>
-        </p:spPr>
-        <p:style>
-          <a:lnRef idx="1">
-            <a:schemeClr val="accent1"/>
-          </a:lnRef>
-          <a:fillRef idx="3">
-            <a:schemeClr val="accent1"/>
-          </a:fillRef>
-          <a:effectRef idx="2">
-            <a:schemeClr val="accent1"/>
-          </a:effectRef>
-          <a:fontRef idx="minor">
-            <a:schemeClr val="lt1"/>
-          </a:fontRef>
-        </p:style>
-        <p:txBody>
-          <a:bodyPr rtlCol="0" anchor="ctr"/>
-          <a:lstStyle/>
-          <a:p>
-            <a:pPr algn="ctr"/>
-          </a:p>
-        </p:txBody>
-      </p:sp>
-      <p:sp>
-        <p:nvSpPr>
-          <p:cNvPr id="6" name="Rectangle 5"/>
-          <p:cNvSpPr/>
-          <p:nvPr/>
-        </p:nvSpPr>
-        <p:spPr>
-          <a:xfrm>
-            <a:off x="457200" y="1261872"/>
-            <a:ext cx="128016" cy="1051560"/>
-          </a:xfrm>
-          <a:prstGeom prst="rect">
-            <a:avLst/>
-          </a:prstGeom>
-          <a:solidFill>
-            <a:srgbClr val="269CCB"/>
-          </a:solidFill>
-          <a:ln>
-            <a:noFill/>
-          </a:ln>
-        </p:spPr>
-        <p:style>
-          <a:lnRef idx="1">
-            <a:schemeClr val="accent1"/>
-          </a:lnRef>
-          <a:fillRef idx="3">
-            <a:schemeClr val="accent1"/>
-          </a:fillRef>
-          <a:effectRef idx="2">
-            <a:schemeClr val="accent1"/>
-          </a:effectRef>
-          <a:fontRef idx="minor">
-            <a:schemeClr val="lt1"/>
-          </a:fontRef>
-        </p:style>
-        <p:txBody>
-          <a:bodyPr rtlCol="0" anchor="ctr"/>
-          <a:lstStyle/>
-          <a:p>
-            <a:pPr algn="ctr"/>
-          </a:p>
-        </p:txBody>
-      </p:sp>
-      <p:sp>
-        <p:nvSpPr>
-          <p:cNvPr id="7" name="TextBox 6"/>
+              <a:t>Criterios de exito / entregable</a:t>
+            </a:r>
+          </a:p>
+        </p:txBody>
+      </p:sp>
+      <p:sp>
+        <p:nvSpPr>
+          <p:cNvPr id="5" name="TextBox 4"/>
           <p:cNvSpPr txBox="1"/>
           <p:nvPr/>
         </p:nvSpPr>
         <p:spPr>
           <a:xfrm>
-            <a:off x="777240" y="1399031"/>
-            <a:ext cx="10774375" cy="822959"/>
+            <a:off x="457200" y="1170432"/>
+            <a:ext cx="11277295" cy="5230368"/>
           </a:xfrm>
           <a:prstGeom prst="rect">
             <a:avLst/>
@@ -10342,313 +10467,126 @@
           </a:bodyPr>
           <a:lstStyle/>
           <a:p>
-            <a:r>
-              <a:rPr sz="1200" b="1" i="0">
-                <a:solidFill>
-                  <a:srgbClr val="269CCB"/>
-                </a:solidFill>
-                <a:latin typeface="Calibri"/>
-              </a:rPr>
-              <a:t>Info</a:t>
-            </a:r>
-          </a:p>
-          <a:p>
             <a:pPr>
-              <a:spcBef>
-                <a:spcPts val="400"/>
-              </a:spcBef>
+              <a:spcAft>
+                <a:spcPts val="800"/>
+              </a:spcAft>
             </a:pPr>
             <a:r>
-              <a:rPr sz="1400" b="0" i="0">
+              <a:rPr sz="2000" b="0" i="0">
                 <a:solidFill>
                   <a:srgbClr val="333333"/>
                 </a:solidFill>
                 <a:latin typeface="Calibri"/>
               </a:rPr>
-              <a:t>Hito: Informe de caso -&gt; mejoras concretas al PI</a:t>
-            </a:r>
-          </a:p>
-        </p:txBody>
-      </p:sp>
-      <p:sp>
-        <p:nvSpPr>
-          <p:cNvPr id="8" name="Rounded Rectangle 7"/>
-          <p:cNvSpPr/>
-          <p:nvPr/>
-        </p:nvSpPr>
-        <p:spPr>
-          <a:xfrm>
-            <a:off x="457200" y="2478024"/>
-            <a:ext cx="11277295" cy="1051560"/>
-          </a:xfrm>
-          <a:prstGeom prst="roundRect">
-            <a:avLst>
-              <a:gd name="adj" fmla="val 12000"/>
-            </a:avLst>
-          </a:prstGeom>
-          <a:solidFill>
-            <a:srgbClr val="FFF8E1"/>
-          </a:solidFill>
-          <a:ln>
-            <a:noFill/>
-          </a:ln>
-        </p:spPr>
-        <p:style>
-          <a:lnRef idx="1">
-            <a:schemeClr val="accent1"/>
-          </a:lnRef>
-          <a:fillRef idx="3">
-            <a:schemeClr val="accent1"/>
-          </a:fillRef>
-          <a:effectRef idx="2">
-            <a:schemeClr val="accent1"/>
-          </a:effectRef>
-          <a:fontRef idx="minor">
-            <a:schemeClr val="lt1"/>
-          </a:fontRef>
-        </p:style>
-        <p:txBody>
-          <a:bodyPr rtlCol="0" anchor="ctr"/>
-          <a:lstStyle/>
-          <a:p>
-            <a:pPr algn="ctr"/>
-          </a:p>
-        </p:txBody>
-      </p:sp>
-      <p:sp>
-        <p:nvSpPr>
-          <p:cNvPr id="9" name="Rectangle 8"/>
-          <p:cNvSpPr/>
-          <p:nvPr/>
-        </p:nvSpPr>
-        <p:spPr>
-          <a:xfrm>
-            <a:off x="457200" y="2478024"/>
-            <a:ext cx="128016" cy="1051560"/>
-          </a:xfrm>
-          <a:prstGeom prst="rect">
-            <a:avLst/>
-          </a:prstGeom>
-          <a:solidFill>
-            <a:srgbClr val="FFD000"/>
-          </a:solidFill>
-          <a:ln>
-            <a:noFill/>
-          </a:ln>
-        </p:spPr>
-        <p:style>
-          <a:lnRef idx="1">
-            <a:schemeClr val="accent1"/>
-          </a:lnRef>
-          <a:fillRef idx="3">
-            <a:schemeClr val="accent1"/>
-          </a:fillRef>
-          <a:effectRef idx="2">
-            <a:schemeClr val="accent1"/>
-          </a:effectRef>
-          <a:fontRef idx="minor">
-            <a:schemeClr val="lt1"/>
-          </a:fontRef>
-        </p:style>
-        <p:txBody>
-          <a:bodyPr rtlCol="0" anchor="ctr"/>
-          <a:lstStyle/>
-          <a:p>
-            <a:pPr algn="ctr"/>
-          </a:p>
-        </p:txBody>
-      </p:sp>
-      <p:sp>
-        <p:nvSpPr>
-          <p:cNvPr id="10" name="TextBox 9"/>
-          <p:cNvSpPr txBox="1"/>
-          <p:nvPr/>
-        </p:nvSpPr>
-        <p:spPr>
-          <a:xfrm>
-            <a:off x="777240" y="2615184"/>
-            <a:ext cx="10774375" cy="822959"/>
-          </a:xfrm>
-          <a:prstGeom prst="rect">
-            <a:avLst/>
-          </a:prstGeom>
-          <a:noFill/>
-        </p:spPr>
-        <p:txBody>
-          <a:bodyPr wrap="square">
-            <a:spAutoFit/>
-          </a:bodyPr>
-          <a:lstStyle/>
-          <a:p>
-            <a:r>
-              <a:rPr sz="1200" b="1" i="0">
-                <a:solidFill>
-                  <a:srgbClr val="FFD000"/>
-                </a:solidFill>
-                <a:latin typeface="Calibri"/>
-              </a:rPr>
-              <a:t>Aclaración</a:t>
+              <a:t>–   </a:t>
+            </a:r>
+            <a:r>
+              <a:rPr sz="2000" b="1" i="0">
+                <a:solidFill>
+                  <a:srgbClr val="333333"/>
+                </a:solidFill>
+                <a:latin typeface="Calibri"/>
+              </a:rPr>
+              <a:t>Entregable:</a:t>
+            </a:r>
+            <a:r>
+              <a:rPr sz="2000" b="0" i="0">
+                <a:solidFill>
+                  <a:srgbClr val="333333"/>
+                </a:solidFill>
+                <a:latin typeface="Calibri"/>
+              </a:rPr>
+              <a:t> Informe 1-2 pag.: caso + 3 mejoras aplicables a VetCare</a:t>
             </a:r>
           </a:p>
           <a:p>
             <a:pPr>
-              <a:spcBef>
-                <a:spcPts val="400"/>
-              </a:spcBef>
+              <a:spcAft>
+                <a:spcPts val="800"/>
+              </a:spcAft>
             </a:pPr>
             <a:r>
-              <a:rPr sz="1400" b="0" i="0">
+              <a:rPr sz="2000" b="0" i="0">
                 <a:solidFill>
                   <a:srgbClr val="333333"/>
                 </a:solidFill>
                 <a:latin typeface="Calibri"/>
               </a:rPr>
-              <a:t>Enunciado completo: Clases/Proyecto Integrador/ (VetCare DB).</a:t>
-            </a:r>
-          </a:p>
-        </p:txBody>
-      </p:sp>
-      <p:sp>
-        <p:nvSpPr>
-          <p:cNvPr id="11" name="Rounded Rectangle 10"/>
-          <p:cNvSpPr/>
-          <p:nvPr/>
-        </p:nvSpPr>
-        <p:spPr>
-          <a:xfrm>
-            <a:off x="457200" y="3694176"/>
-            <a:ext cx="11277295" cy="1051560"/>
-          </a:xfrm>
-          <a:prstGeom prst="roundRect">
-            <a:avLst>
-              <a:gd name="adj" fmla="val 12000"/>
-            </a:avLst>
-          </a:prstGeom>
-          <a:solidFill>
-            <a:srgbClr val="FBE4E4"/>
-          </a:solidFill>
-          <a:ln>
-            <a:noFill/>
-          </a:ln>
-        </p:spPr>
-        <p:style>
-          <a:lnRef idx="1">
-            <a:schemeClr val="accent1"/>
-          </a:lnRef>
-          <a:fillRef idx="3">
-            <a:schemeClr val="accent1"/>
-          </a:fillRef>
-          <a:effectRef idx="2">
-            <a:schemeClr val="accent1"/>
-          </a:effectRef>
-          <a:fontRef idx="minor">
-            <a:schemeClr val="lt1"/>
-          </a:fontRef>
-        </p:style>
-        <p:txBody>
-          <a:bodyPr rtlCol="0" anchor="ctr"/>
-          <a:lstStyle/>
-          <a:p>
-            <a:pPr algn="ctr"/>
-          </a:p>
-        </p:txBody>
-      </p:sp>
-      <p:sp>
-        <p:nvSpPr>
-          <p:cNvPr id="12" name="Rectangle 11"/>
-          <p:cNvSpPr/>
-          <p:nvPr/>
-        </p:nvSpPr>
-        <p:spPr>
-          <a:xfrm>
-            <a:off x="457200" y="3694176"/>
-            <a:ext cx="128016" cy="1051560"/>
-          </a:xfrm>
-          <a:prstGeom prst="rect">
-            <a:avLst/>
-          </a:prstGeom>
-          <a:solidFill>
-            <a:srgbClr val="A02030"/>
-          </a:solidFill>
-          <a:ln>
-            <a:noFill/>
-          </a:ln>
-        </p:spPr>
-        <p:style>
-          <a:lnRef idx="1">
-            <a:schemeClr val="accent1"/>
-          </a:lnRef>
-          <a:fillRef idx="3">
-            <a:schemeClr val="accent1"/>
-          </a:fillRef>
-          <a:effectRef idx="2">
-            <a:schemeClr val="accent1"/>
-          </a:effectRef>
-          <a:fontRef idx="minor">
-            <a:schemeClr val="lt1"/>
-          </a:fontRef>
-        </p:style>
-        <p:txBody>
-          <a:bodyPr rtlCol="0" anchor="ctr"/>
-          <a:lstStyle/>
-          <a:p>
-            <a:pPr algn="ctr"/>
-          </a:p>
-        </p:txBody>
-      </p:sp>
-      <p:sp>
-        <p:nvSpPr>
-          <p:cNvPr id="13" name="TextBox 12"/>
-          <p:cNvSpPr txBox="1"/>
-          <p:nvPr/>
-        </p:nvSpPr>
-        <p:spPr>
-          <a:xfrm>
-            <a:off x="777240" y="3831336"/>
-            <a:ext cx="10774375" cy="822959"/>
-          </a:xfrm>
-          <a:prstGeom prst="rect">
-            <a:avLst/>
-          </a:prstGeom>
-          <a:noFill/>
-        </p:spPr>
-        <p:txBody>
-          <a:bodyPr wrap="square">
-            <a:spAutoFit/>
-          </a:bodyPr>
-          <a:lstStyle/>
-          <a:p>
-            <a:r>
-              <a:rPr sz="1200" b="1" i="0">
-                <a:solidFill>
-                  <a:srgbClr val="A02030"/>
-                </a:solidFill>
-                <a:latin typeface="Calibri"/>
-              </a:rPr>
-              <a:t>Atención</a:t>
+              <a:t>–   Evidencia: el SQL y su salida quedan guardados en cada pregunta de la plataforma del curso.</a:t>
             </a:r>
           </a:p>
           <a:p>
             <a:pPr>
-              <a:spcBef>
-                <a:spcPts val="400"/>
-              </a:spcBef>
+              <a:spcAft>
+                <a:spcPts val="800"/>
+              </a:spcAft>
             </a:pPr>
             <a:r>
-              <a:rPr sz="1400" b="0" i="0">
+              <a:rPr sz="2000" b="0" i="0">
                 <a:solidFill>
                   <a:srgbClr val="333333"/>
                 </a:solidFill>
                 <a:latin typeface="Calibri"/>
               </a:rPr>
-              <a:t>Si el docente asigna taller esta semana, él indica el canal y la fecha.</a:t>
-            </a:r>
-          </a:p>
-        </p:txBody>
-      </p:sp>
-      <p:sp>
-        <p:nvSpPr>
-          <p:cNvPr id="14" name="TextBox 13"/>
+              <a:t>–   Conserva copia en tu carpeta del PI (los .sql que pide el entregable).</a:t>
+            </a:r>
+          </a:p>
+          <a:p>
+            <a:pPr>
+              <a:spcAft>
+                <a:spcPts val="800"/>
+              </a:spcAft>
+            </a:pPr>
+            <a:r>
+              <a:rPr sz="2000" b="0" i="0">
+                <a:solidFill>
+                  <a:srgbClr val="333333"/>
+                </a:solidFill>
+                <a:latin typeface="Calibri"/>
+              </a:rPr>
+              <a:t>–   Actualizar checklist PI (que criterio de rubrica avanzo).</a:t>
+            </a:r>
+          </a:p>
+          <a:p>
+            <a:pPr>
+              <a:spcAft>
+                <a:spcPts val="800"/>
+              </a:spcAft>
+            </a:pPr>
+            <a:r>
+              <a:rPr sz="2000" b="0" i="0">
+                <a:solidFill>
+                  <a:srgbClr val="333333"/>
+                </a:solidFill>
+                <a:latin typeface="Calibri"/>
+              </a:rPr>
+              <a:t>–   </a:t>
+            </a:r>
+            <a:r>
+              <a:rPr sz="2000" b="1" i="0">
+                <a:solidFill>
+                  <a:srgbClr val="333333"/>
+                </a:solidFill>
+                <a:latin typeface="Calibri"/>
+              </a:rPr>
+              <a:t>Entrega en la plataforma del curso</a:t>
+            </a:r>
+            <a:r>
+              <a:rPr sz="2000" b="0" i="0">
+                <a:solidFill>
+                  <a:srgbClr val="333333"/>
+                </a:solidFill>
+                <a:latin typeface="Calibri"/>
+              </a:rPr>
+              <a:t> — en la fecha que indique el docente.</a:t>
+            </a:r>
+          </a:p>
+        </p:txBody>
+      </p:sp>
+      <p:sp>
+        <p:nvSpPr>
+          <p:cNvPr id="6" name="TextBox 5"/>
           <p:cNvSpPr txBox="1"/>
           <p:nvPr/>
         </p:nvSpPr>
@@ -10690,6 +10628,601 @@
 </file>
 
 <file path=ppt/slides/slide28.xml><?xml version="1.0" encoding="utf-8"?>
+<p:sld xmlns:a="http://schemas.openxmlformats.org/drawingml/2006/main" xmlns:p="http://schemas.openxmlformats.org/presentationml/2006/main" xmlns:r="http://schemas.openxmlformats.org/officeDocument/2006/relationships">
+  <p:cSld>
+    <p:bg>
+      <p:bgPr>
+        <a:solidFill>
+          <a:srgbClr val="FFFFFF"/>
+        </a:solidFill>
+        <a:effectLst/>
+      </p:bgPr>
+    </p:bg>
+    <p:spTree>
+      <p:nvGrpSpPr>
+        <p:cNvPr id="1" name=""/>
+        <p:cNvGrpSpPr/>
+        <p:nvPr/>
+      </p:nvGrpSpPr>
+      <p:grpSpPr/>
+      <p:sp>
+        <p:nvSpPr>
+          <p:cNvPr id="2" name="Rectangle 1"/>
+          <p:cNvSpPr/>
+          <p:nvPr/>
+        </p:nvSpPr>
+        <p:spPr>
+          <a:xfrm>
+            <a:off x="0" y="0"/>
+            <a:ext cx="12191695" cy="960120"/>
+          </a:xfrm>
+          <a:prstGeom prst="rect">
+            <a:avLst/>
+          </a:prstGeom>
+          <a:solidFill>
+            <a:srgbClr val="095292"/>
+          </a:solidFill>
+          <a:ln>
+            <a:noFill/>
+          </a:ln>
+        </p:spPr>
+        <p:style>
+          <a:lnRef idx="1">
+            <a:schemeClr val="accent1"/>
+          </a:lnRef>
+          <a:fillRef idx="3">
+            <a:schemeClr val="accent1"/>
+          </a:fillRef>
+          <a:effectRef idx="2">
+            <a:schemeClr val="accent1"/>
+          </a:effectRef>
+          <a:fontRef idx="minor">
+            <a:schemeClr val="lt1"/>
+          </a:fontRef>
+        </p:style>
+        <p:txBody>
+          <a:bodyPr rtlCol="0" anchor="ctr"/>
+          <a:lstStyle/>
+          <a:p>
+            <a:pPr algn="ctr"/>
+          </a:p>
+        </p:txBody>
+      </p:sp>
+      <p:sp>
+        <p:nvSpPr>
+          <p:cNvPr id="3" name="Rectangle 2"/>
+          <p:cNvSpPr/>
+          <p:nvPr/>
+        </p:nvSpPr>
+        <p:spPr>
+          <a:xfrm>
+            <a:off x="0" y="960120"/>
+            <a:ext cx="12191695" cy="41148"/>
+          </a:xfrm>
+          <a:prstGeom prst="rect">
+            <a:avLst/>
+          </a:prstGeom>
+          <a:solidFill>
+            <a:srgbClr val="FFD000"/>
+          </a:solidFill>
+          <a:ln>
+            <a:noFill/>
+          </a:ln>
+        </p:spPr>
+        <p:style>
+          <a:lnRef idx="1">
+            <a:schemeClr val="accent1"/>
+          </a:lnRef>
+          <a:fillRef idx="3">
+            <a:schemeClr val="accent1"/>
+          </a:fillRef>
+          <a:effectRef idx="2">
+            <a:schemeClr val="accent1"/>
+          </a:effectRef>
+          <a:fontRef idx="minor">
+            <a:schemeClr val="lt1"/>
+          </a:fontRef>
+        </p:style>
+        <p:txBody>
+          <a:bodyPr rtlCol="0" anchor="ctr"/>
+          <a:lstStyle/>
+          <a:p>
+            <a:pPr algn="ctr"/>
+          </a:p>
+        </p:txBody>
+      </p:sp>
+      <p:sp>
+        <p:nvSpPr>
+          <p:cNvPr id="4" name="TextBox 3"/>
+          <p:cNvSpPr txBox="1"/>
+          <p:nvPr/>
+        </p:nvSpPr>
+        <p:spPr>
+          <a:xfrm>
+            <a:off x="457200" y="164592"/>
+            <a:ext cx="11277295" cy="502920"/>
+          </a:xfrm>
+          <a:prstGeom prst="rect">
+            <a:avLst/>
+          </a:prstGeom>
+          <a:noFill/>
+        </p:spPr>
+        <p:txBody>
+          <a:bodyPr wrap="square">
+            <a:spAutoFit/>
+          </a:bodyPr>
+          <a:lstStyle/>
+          <a:p>
+            <a:r>
+              <a:rPr sz="2600" b="1" i="0">
+                <a:solidFill>
+                  <a:srgbClr val="FFFFFF"/>
+                </a:solidFill>
+                <a:latin typeface="Calibri"/>
+              </a:rPr>
+              <a:t>Para el PI esta semana</a:t>
+            </a:r>
+          </a:p>
+        </p:txBody>
+      </p:sp>
+      <p:sp>
+        <p:nvSpPr>
+          <p:cNvPr id="5" name="Rounded Rectangle 4"/>
+          <p:cNvSpPr/>
+          <p:nvPr/>
+        </p:nvSpPr>
+        <p:spPr>
+          <a:xfrm>
+            <a:off x="457200" y="1261872"/>
+            <a:ext cx="11277295" cy="1051560"/>
+          </a:xfrm>
+          <a:prstGeom prst="roundRect">
+            <a:avLst>
+              <a:gd name="adj" fmla="val 12000"/>
+            </a:avLst>
+          </a:prstGeom>
+          <a:solidFill>
+            <a:srgbClr val="E8F4FA"/>
+          </a:solidFill>
+          <a:ln>
+            <a:noFill/>
+          </a:ln>
+        </p:spPr>
+        <p:style>
+          <a:lnRef idx="1">
+            <a:schemeClr val="accent1"/>
+          </a:lnRef>
+          <a:fillRef idx="3">
+            <a:schemeClr val="accent1"/>
+          </a:fillRef>
+          <a:effectRef idx="2">
+            <a:schemeClr val="accent1"/>
+          </a:effectRef>
+          <a:fontRef idx="minor">
+            <a:schemeClr val="lt1"/>
+          </a:fontRef>
+        </p:style>
+        <p:txBody>
+          <a:bodyPr rtlCol="0" anchor="ctr"/>
+          <a:lstStyle/>
+          <a:p>
+            <a:pPr algn="ctr"/>
+          </a:p>
+        </p:txBody>
+      </p:sp>
+      <p:sp>
+        <p:nvSpPr>
+          <p:cNvPr id="6" name="Rectangle 5"/>
+          <p:cNvSpPr/>
+          <p:nvPr/>
+        </p:nvSpPr>
+        <p:spPr>
+          <a:xfrm>
+            <a:off x="457200" y="1261872"/>
+            <a:ext cx="128016" cy="1051560"/>
+          </a:xfrm>
+          <a:prstGeom prst="rect">
+            <a:avLst/>
+          </a:prstGeom>
+          <a:solidFill>
+            <a:srgbClr val="269CCB"/>
+          </a:solidFill>
+          <a:ln>
+            <a:noFill/>
+          </a:ln>
+        </p:spPr>
+        <p:style>
+          <a:lnRef idx="1">
+            <a:schemeClr val="accent1"/>
+          </a:lnRef>
+          <a:fillRef idx="3">
+            <a:schemeClr val="accent1"/>
+          </a:fillRef>
+          <a:effectRef idx="2">
+            <a:schemeClr val="accent1"/>
+          </a:effectRef>
+          <a:fontRef idx="minor">
+            <a:schemeClr val="lt1"/>
+          </a:fontRef>
+        </p:style>
+        <p:txBody>
+          <a:bodyPr rtlCol="0" anchor="ctr"/>
+          <a:lstStyle/>
+          <a:p>
+            <a:pPr algn="ctr"/>
+          </a:p>
+        </p:txBody>
+      </p:sp>
+      <p:sp>
+        <p:nvSpPr>
+          <p:cNvPr id="7" name="TextBox 6"/>
+          <p:cNvSpPr txBox="1"/>
+          <p:nvPr/>
+        </p:nvSpPr>
+        <p:spPr>
+          <a:xfrm>
+            <a:off x="777240" y="1399031"/>
+            <a:ext cx="10774375" cy="822959"/>
+          </a:xfrm>
+          <a:prstGeom prst="rect">
+            <a:avLst/>
+          </a:prstGeom>
+          <a:noFill/>
+        </p:spPr>
+        <p:txBody>
+          <a:bodyPr wrap="square">
+            <a:spAutoFit/>
+          </a:bodyPr>
+          <a:lstStyle/>
+          <a:p>
+            <a:r>
+              <a:rPr sz="1200" b="1" i="0">
+                <a:solidFill>
+                  <a:srgbClr val="269CCB"/>
+                </a:solidFill>
+                <a:latin typeface="Calibri"/>
+              </a:rPr>
+              <a:t>Info</a:t>
+            </a:r>
+          </a:p>
+          <a:p>
+            <a:pPr>
+              <a:spcBef>
+                <a:spcPts val="400"/>
+              </a:spcBef>
+            </a:pPr>
+            <a:r>
+              <a:rPr sz="1400" b="0" i="0">
+                <a:solidFill>
+                  <a:srgbClr val="333333"/>
+                </a:solidFill>
+                <a:latin typeface="Calibri"/>
+              </a:rPr>
+              <a:t>Hito: Informe de caso -&gt; mejoras concretas al PI</a:t>
+            </a:r>
+          </a:p>
+        </p:txBody>
+      </p:sp>
+      <p:sp>
+        <p:nvSpPr>
+          <p:cNvPr id="8" name="Rounded Rectangle 7"/>
+          <p:cNvSpPr/>
+          <p:nvPr/>
+        </p:nvSpPr>
+        <p:spPr>
+          <a:xfrm>
+            <a:off x="457200" y="2478024"/>
+            <a:ext cx="11277295" cy="1051560"/>
+          </a:xfrm>
+          <a:prstGeom prst="roundRect">
+            <a:avLst>
+              <a:gd name="adj" fmla="val 12000"/>
+            </a:avLst>
+          </a:prstGeom>
+          <a:solidFill>
+            <a:srgbClr val="FFF8E1"/>
+          </a:solidFill>
+          <a:ln>
+            <a:noFill/>
+          </a:ln>
+        </p:spPr>
+        <p:style>
+          <a:lnRef idx="1">
+            <a:schemeClr val="accent1"/>
+          </a:lnRef>
+          <a:fillRef idx="3">
+            <a:schemeClr val="accent1"/>
+          </a:fillRef>
+          <a:effectRef idx="2">
+            <a:schemeClr val="accent1"/>
+          </a:effectRef>
+          <a:fontRef idx="minor">
+            <a:schemeClr val="lt1"/>
+          </a:fontRef>
+        </p:style>
+        <p:txBody>
+          <a:bodyPr rtlCol="0" anchor="ctr"/>
+          <a:lstStyle/>
+          <a:p>
+            <a:pPr algn="ctr"/>
+          </a:p>
+        </p:txBody>
+      </p:sp>
+      <p:sp>
+        <p:nvSpPr>
+          <p:cNvPr id="9" name="Rectangle 8"/>
+          <p:cNvSpPr/>
+          <p:nvPr/>
+        </p:nvSpPr>
+        <p:spPr>
+          <a:xfrm>
+            <a:off x="457200" y="2478024"/>
+            <a:ext cx="128016" cy="1051560"/>
+          </a:xfrm>
+          <a:prstGeom prst="rect">
+            <a:avLst/>
+          </a:prstGeom>
+          <a:solidFill>
+            <a:srgbClr val="FFD000"/>
+          </a:solidFill>
+          <a:ln>
+            <a:noFill/>
+          </a:ln>
+        </p:spPr>
+        <p:style>
+          <a:lnRef idx="1">
+            <a:schemeClr val="accent1"/>
+          </a:lnRef>
+          <a:fillRef idx="3">
+            <a:schemeClr val="accent1"/>
+          </a:fillRef>
+          <a:effectRef idx="2">
+            <a:schemeClr val="accent1"/>
+          </a:effectRef>
+          <a:fontRef idx="minor">
+            <a:schemeClr val="lt1"/>
+          </a:fontRef>
+        </p:style>
+        <p:txBody>
+          <a:bodyPr rtlCol="0" anchor="ctr"/>
+          <a:lstStyle/>
+          <a:p>
+            <a:pPr algn="ctr"/>
+          </a:p>
+        </p:txBody>
+      </p:sp>
+      <p:sp>
+        <p:nvSpPr>
+          <p:cNvPr id="10" name="TextBox 9"/>
+          <p:cNvSpPr txBox="1"/>
+          <p:nvPr/>
+        </p:nvSpPr>
+        <p:spPr>
+          <a:xfrm>
+            <a:off x="777240" y="2615184"/>
+            <a:ext cx="10774375" cy="822959"/>
+          </a:xfrm>
+          <a:prstGeom prst="rect">
+            <a:avLst/>
+          </a:prstGeom>
+          <a:noFill/>
+        </p:spPr>
+        <p:txBody>
+          <a:bodyPr wrap="square">
+            <a:spAutoFit/>
+          </a:bodyPr>
+          <a:lstStyle/>
+          <a:p>
+            <a:r>
+              <a:rPr sz="1200" b="1" i="0">
+                <a:solidFill>
+                  <a:srgbClr val="FFD000"/>
+                </a:solidFill>
+                <a:latin typeface="Calibri"/>
+              </a:rPr>
+              <a:t>Aclaración</a:t>
+            </a:r>
+          </a:p>
+          <a:p>
+            <a:pPr>
+              <a:spcBef>
+                <a:spcPts val="400"/>
+              </a:spcBef>
+            </a:pPr>
+            <a:r>
+              <a:rPr sz="1400" b="0" i="0">
+                <a:solidFill>
+                  <a:srgbClr val="333333"/>
+                </a:solidFill>
+                <a:latin typeface="Calibri"/>
+              </a:rPr>
+              <a:t>Enunciado completo: Clases/Proyecto Integrador/ (VetCare DB).</a:t>
+            </a:r>
+          </a:p>
+        </p:txBody>
+      </p:sp>
+      <p:sp>
+        <p:nvSpPr>
+          <p:cNvPr id="11" name="Rounded Rectangle 10"/>
+          <p:cNvSpPr/>
+          <p:nvPr/>
+        </p:nvSpPr>
+        <p:spPr>
+          <a:xfrm>
+            <a:off x="457200" y="3694176"/>
+            <a:ext cx="11277295" cy="1051560"/>
+          </a:xfrm>
+          <a:prstGeom prst="roundRect">
+            <a:avLst>
+              <a:gd name="adj" fmla="val 12000"/>
+            </a:avLst>
+          </a:prstGeom>
+          <a:solidFill>
+            <a:srgbClr val="FBE4E4"/>
+          </a:solidFill>
+          <a:ln>
+            <a:noFill/>
+          </a:ln>
+        </p:spPr>
+        <p:style>
+          <a:lnRef idx="1">
+            <a:schemeClr val="accent1"/>
+          </a:lnRef>
+          <a:fillRef idx="3">
+            <a:schemeClr val="accent1"/>
+          </a:fillRef>
+          <a:effectRef idx="2">
+            <a:schemeClr val="accent1"/>
+          </a:effectRef>
+          <a:fontRef idx="minor">
+            <a:schemeClr val="lt1"/>
+          </a:fontRef>
+        </p:style>
+        <p:txBody>
+          <a:bodyPr rtlCol="0" anchor="ctr"/>
+          <a:lstStyle/>
+          <a:p>
+            <a:pPr algn="ctr"/>
+          </a:p>
+        </p:txBody>
+      </p:sp>
+      <p:sp>
+        <p:nvSpPr>
+          <p:cNvPr id="12" name="Rectangle 11"/>
+          <p:cNvSpPr/>
+          <p:nvPr/>
+        </p:nvSpPr>
+        <p:spPr>
+          <a:xfrm>
+            <a:off x="457200" y="3694176"/>
+            <a:ext cx="128016" cy="1051560"/>
+          </a:xfrm>
+          <a:prstGeom prst="rect">
+            <a:avLst/>
+          </a:prstGeom>
+          <a:solidFill>
+            <a:srgbClr val="A02030"/>
+          </a:solidFill>
+          <a:ln>
+            <a:noFill/>
+          </a:ln>
+        </p:spPr>
+        <p:style>
+          <a:lnRef idx="1">
+            <a:schemeClr val="accent1"/>
+          </a:lnRef>
+          <a:fillRef idx="3">
+            <a:schemeClr val="accent1"/>
+          </a:fillRef>
+          <a:effectRef idx="2">
+            <a:schemeClr val="accent1"/>
+          </a:effectRef>
+          <a:fontRef idx="minor">
+            <a:schemeClr val="lt1"/>
+          </a:fontRef>
+        </p:style>
+        <p:txBody>
+          <a:bodyPr rtlCol="0" anchor="ctr"/>
+          <a:lstStyle/>
+          <a:p>
+            <a:pPr algn="ctr"/>
+          </a:p>
+        </p:txBody>
+      </p:sp>
+      <p:sp>
+        <p:nvSpPr>
+          <p:cNvPr id="13" name="TextBox 12"/>
+          <p:cNvSpPr txBox="1"/>
+          <p:nvPr/>
+        </p:nvSpPr>
+        <p:spPr>
+          <a:xfrm>
+            <a:off x="777240" y="3831336"/>
+            <a:ext cx="10774375" cy="822959"/>
+          </a:xfrm>
+          <a:prstGeom prst="rect">
+            <a:avLst/>
+          </a:prstGeom>
+          <a:noFill/>
+        </p:spPr>
+        <p:txBody>
+          <a:bodyPr wrap="square">
+            <a:spAutoFit/>
+          </a:bodyPr>
+          <a:lstStyle/>
+          <a:p>
+            <a:r>
+              <a:rPr sz="1200" b="1" i="0">
+                <a:solidFill>
+                  <a:srgbClr val="A02030"/>
+                </a:solidFill>
+                <a:latin typeface="Calibri"/>
+              </a:rPr>
+              <a:t>Atención</a:t>
+            </a:r>
+          </a:p>
+          <a:p>
+            <a:pPr>
+              <a:spcBef>
+                <a:spcPts val="400"/>
+              </a:spcBef>
+            </a:pPr>
+            <a:r>
+              <a:rPr sz="1400" b="0" i="0">
+                <a:solidFill>
+                  <a:srgbClr val="333333"/>
+                </a:solidFill>
+                <a:latin typeface="Calibri"/>
+              </a:rPr>
+              <a:t>Si el docente asigna taller esta semana, él indica el canal y la fecha.</a:t>
+            </a:r>
+          </a:p>
+        </p:txBody>
+      </p:sp>
+      <p:sp>
+        <p:nvSpPr>
+          <p:cNvPr id="14" name="TextBox 13"/>
+          <p:cNvSpPr txBox="1"/>
+          <p:nvPr/>
+        </p:nvSpPr>
+        <p:spPr>
+          <a:xfrm>
+            <a:off x="11185855" y="6473952"/>
+            <a:ext cx="640080" cy="274320"/>
+          </a:xfrm>
+          <a:prstGeom prst="rect">
+            <a:avLst/>
+          </a:prstGeom>
+          <a:noFill/>
+        </p:spPr>
+        <p:txBody>
+          <a:bodyPr wrap="square">
+            <a:spAutoFit/>
+          </a:bodyPr>
+          <a:lstStyle/>
+          <a:p>
+            <a:pPr algn="r"/>
+            <a:r>
+              <a:rPr sz="1100" b="0" i="0">
+                <a:solidFill>
+                  <a:srgbClr val="666666"/>
+                </a:solidFill>
+                <a:latin typeface="Calibri"/>
+              </a:rPr>
+              <a:t>28</a:t>
+            </a:r>
+          </a:p>
+        </p:txBody>
+      </p:sp>
+    </p:spTree>
+  </p:cSld>
+  <p:clrMapOvr>
+    <a:masterClrMapping/>
+  </p:clrMapOvr>
+</p:sld>
+</file>
+
+<file path=ppt/slides/slide29.xml><?xml version="1.0" encoding="utf-8"?>
 <p:sld xmlns:a="http://schemas.openxmlformats.org/drawingml/2006/main" xmlns:p="http://schemas.openxmlformats.org/presentationml/2006/main" xmlns:r="http://schemas.openxmlformats.org/officeDocument/2006/relationships">
   <p:cSld>
     <p:bg>

--- a/Bases de Datos II/Clases/Clase 13 - Analisis de casos reales/Presentacion.pptx
+++ b/Bases de Datos II/Clases/Clase 13 - Analisis de casos reales/Presentacion.pptx
@@ -11,29 +11,21 @@
     <p:sldId id="259" r:id="rId10"/>
     <p:sldId id="260" r:id="rId11"/>
     <p:sldId id="261" r:id="rId12"/>
-    <p:sldId id="262" r:id="rId13"/>
-    <p:sldId id="263" r:id="rId14"/>
-    <p:sldId id="264" r:id="rId15"/>
-    <p:sldId id="265" r:id="rId16"/>
-    <p:sldId id="266" r:id="rId17"/>
-    <p:sldId id="267" r:id="rId18"/>
-    <p:sldId id="268" r:id="rId19"/>
-    <p:sldId id="269" r:id="rId20"/>
-    <p:sldId id="270" r:id="rId21"/>
-    <p:sldId id="271" r:id="rId22"/>
-    <p:sldId id="272" r:id="rId23"/>
-    <p:sldId id="273" r:id="rId24"/>
-    <p:sldId id="274" r:id="rId25"/>
-    <p:sldId id="275" r:id="rId26"/>
-    <p:sldId id="276" r:id="rId27"/>
-    <p:sldId id="277" r:id="rId28"/>
-    <p:sldId id="278" r:id="rId29"/>
-    <p:sldId id="279" r:id="rId30"/>
-    <p:sldId id="280" r:id="rId31"/>
-    <p:sldId id="281" r:id="rId32"/>
-    <p:sldId id="282" r:id="rId33"/>
-    <p:sldId id="283" r:id="rId34"/>
-    <p:sldId id="284" r:id="rId35"/>
+    <p:sldId id="262" r:id="rId14"/>
+    <p:sldId id="263" r:id="rId15"/>
+    <p:sldId id="264" r:id="rId16"/>
+    <p:sldId id="265" r:id="rId17"/>
+    <p:sldId id="266" r:id="rId18"/>
+    <p:sldId id="267" r:id="rId19"/>
+    <p:sldId id="268" r:id="rId20"/>
+    <p:sldId id="269" r:id="rId21"/>
+    <p:sldId id="270" r:id="rId22"/>
+    <p:sldId id="271" r:id="rId23"/>
+    <p:sldId id="272" r:id="rId24"/>
+    <p:sldId id="273" r:id="rId25"/>
+    <p:sldId id="274" r:id="rId26"/>
+    <p:sldId id="275" r:id="rId27"/>
+    <p:sldId id="276" r:id="rId28"/>
   </p:sldIdLst>
   <p:sldSz cx="12191695" cy="6858000" type="screen4x3"/>
   <p:notesSz cx="6858000" cy="9144000"/>
@@ -133,6 +125,796 @@
     </a:lvl9pPr>
   </p:defaultTextStyle>
 </p:presentation>
+</file>
+
+<file path=ppt/notesMasters/notesMaster1.xml><?xml version="1.0" encoding="utf-8"?>
+<p:notesMaster xmlns:a="http://schemas.openxmlformats.org/drawingml/2006/main" xmlns:p="http://schemas.openxmlformats.org/presentationml/2006/main" xmlns:r="http://schemas.openxmlformats.org/officeDocument/2006/relationships">
+  <p:cSld>
+    <p:bg>
+      <p:bgRef idx="1001">
+        <a:schemeClr val="bg1"/>
+      </p:bgRef>
+    </p:bg>
+    <p:spTree>
+      <p:nvGrpSpPr>
+        <p:cNvPr id="1" name=""/>
+        <p:cNvGrpSpPr/>
+        <p:nvPr/>
+      </p:nvGrpSpPr>
+      <p:grpSpPr>
+        <a:xfrm>
+          <a:off x="0" y="0"/>
+          <a:ext cx="0" cy="0"/>
+          <a:chOff x="0" y="0"/>
+          <a:chExt cx="0" cy="0"/>
+        </a:xfrm>
+      </p:grpSpPr>
+      <p:sp>
+        <p:nvSpPr>
+          <p:cNvPr id="2" name="Header Placeholder 1"/>
+          <p:cNvSpPr>
+            <a:spLocks noGrp="1"/>
+          </p:cNvSpPr>
+          <p:nvPr>
+            <p:ph type="hdr" sz="quarter"/>
+          </p:nvPr>
+        </p:nvSpPr>
+        <p:spPr>
+          <a:xfrm>
+            <a:off x="0" y="0"/>
+            <a:ext cx="2971800" cy="457200"/>
+          </a:xfrm>
+          <a:prstGeom prst="rect">
+            <a:avLst/>
+          </a:prstGeom>
+        </p:spPr>
+        <p:txBody>
+          <a:bodyPr vert="horz" lIns="91440" tIns="45720" rIns="91440" bIns="45720" rtlCol="0"/>
+          <a:lstStyle>
+            <a:lvl1pPr algn="l">
+              <a:defRPr sz="1200"/>
+            </a:lvl1pPr>
+          </a:lstStyle>
+          <a:p>
+            <a:endParaRPr lang="en-US"/>
+          </a:p>
+        </p:txBody>
+      </p:sp>
+      <p:sp>
+        <p:nvSpPr>
+          <p:cNvPr id="3" name="Date Placeholder 2"/>
+          <p:cNvSpPr>
+            <a:spLocks noGrp="1"/>
+          </p:cNvSpPr>
+          <p:nvPr>
+            <p:ph type="dt" idx="1"/>
+          </p:nvPr>
+        </p:nvSpPr>
+        <p:spPr>
+          <a:xfrm>
+            <a:off x="3884613" y="0"/>
+            <a:ext cx="2971800" cy="457200"/>
+          </a:xfrm>
+          <a:prstGeom prst="rect">
+            <a:avLst/>
+          </a:prstGeom>
+        </p:spPr>
+        <p:txBody>
+          <a:bodyPr vert="horz" lIns="91440" tIns="45720" rIns="91440" bIns="45720" rtlCol="0"/>
+          <a:lstStyle>
+            <a:lvl1pPr algn="r">
+              <a:defRPr sz="1200"/>
+            </a:lvl1pPr>
+          </a:lstStyle>
+          <a:p>
+            <a:fld id="{0F89C1C7-3DCD-1040-A9CF-14679D8B5DDD}" type="datetimeFigureOut">
+              <a:rPr lang="en-US" smtClean="0"/>
+              <a:t>10/17/16</a:t>
+            </a:fld>
+            <a:endParaRPr lang="en-US"/>
+          </a:p>
+        </p:txBody>
+      </p:sp>
+      <p:sp>
+        <p:nvSpPr>
+          <p:cNvPr id="4" name="Slide Image Placeholder 3"/>
+          <p:cNvSpPr>
+            <a:spLocks noGrp="1" noRot="1" noChangeAspect="1"/>
+          </p:cNvSpPr>
+          <p:nvPr>
+            <p:ph type="sldImg" idx="2"/>
+          </p:nvPr>
+        </p:nvSpPr>
+        <p:spPr>
+          <a:xfrm>
+            <a:off x="1143000" y="685800"/>
+            <a:ext cx="4572000" cy="3429000"/>
+          </a:xfrm>
+          <a:prstGeom prst="rect">
+            <a:avLst/>
+          </a:prstGeom>
+          <a:noFill/>
+          <a:ln w="12700">
+            <a:solidFill>
+              <a:prstClr val="black"/>
+            </a:solidFill>
+          </a:ln>
+        </p:spPr>
+        <p:txBody>
+          <a:bodyPr vert="horz" lIns="91440" tIns="45720" rIns="91440" bIns="45720" rtlCol="0" anchor="ctr"/>
+          <a:lstStyle/>
+          <a:p>
+            <a:endParaRPr lang="en-US"/>
+          </a:p>
+        </p:txBody>
+      </p:sp>
+      <p:sp>
+        <p:nvSpPr>
+          <p:cNvPr id="5" name="Notes Placeholder 4"/>
+          <p:cNvSpPr>
+            <a:spLocks noGrp="1"/>
+          </p:cNvSpPr>
+          <p:nvPr>
+            <p:ph type="body" sz="quarter" idx="3"/>
+          </p:nvPr>
+        </p:nvSpPr>
+        <p:spPr>
+          <a:xfrm>
+            <a:off x="685800" y="4343400"/>
+            <a:ext cx="5486400" cy="4114800"/>
+          </a:xfrm>
+          <a:prstGeom prst="rect">
+            <a:avLst/>
+          </a:prstGeom>
+        </p:spPr>
+        <p:txBody>
+          <a:bodyPr vert="horz" lIns="91440" tIns="45720" rIns="91440" bIns="45720" rtlCol="0"/>
+          <a:lstStyle/>
+          <a:p>
+            <a:pPr lvl="0"/>
+            <a:r>
+              <a:rPr lang="en-US" smtClean="0"/>
+              <a:t>Click to edit Master text styles</a:t>
+            </a:r>
+          </a:p>
+          <a:p>
+            <a:pPr lvl="1"/>
+            <a:r>
+              <a:rPr lang="en-US" smtClean="0"/>
+              <a:t>Second level</a:t>
+            </a:r>
+          </a:p>
+          <a:p>
+            <a:pPr lvl="2"/>
+            <a:r>
+              <a:rPr lang="en-US" smtClean="0"/>
+              <a:t>Third level</a:t>
+            </a:r>
+          </a:p>
+          <a:p>
+            <a:pPr lvl="3"/>
+            <a:r>
+              <a:rPr lang="en-US" smtClean="0"/>
+              <a:t>Fourth level</a:t>
+            </a:r>
+          </a:p>
+          <a:p>
+            <a:pPr lvl="4"/>
+            <a:r>
+              <a:rPr lang="en-US" smtClean="0"/>
+              <a:t>Fifth level</a:t>
+            </a:r>
+            <a:endParaRPr lang="en-US"/>
+          </a:p>
+        </p:txBody>
+      </p:sp>
+      <p:sp>
+        <p:nvSpPr>
+          <p:cNvPr id="6" name="Footer Placeholder 5"/>
+          <p:cNvSpPr>
+            <a:spLocks noGrp="1"/>
+          </p:cNvSpPr>
+          <p:nvPr>
+            <p:ph type="ftr" sz="quarter" idx="4"/>
+          </p:nvPr>
+        </p:nvSpPr>
+        <p:spPr>
+          <a:xfrm>
+            <a:off x="0" y="8685213"/>
+            <a:ext cx="2971800" cy="457200"/>
+          </a:xfrm>
+          <a:prstGeom prst="rect">
+            <a:avLst/>
+          </a:prstGeom>
+        </p:spPr>
+        <p:txBody>
+          <a:bodyPr vert="horz" lIns="91440" tIns="45720" rIns="91440" bIns="45720" rtlCol="0" anchor="b"/>
+          <a:lstStyle>
+            <a:lvl1pPr algn="l">
+              <a:defRPr sz="1200"/>
+            </a:lvl1pPr>
+          </a:lstStyle>
+          <a:p>
+            <a:endParaRPr lang="en-US"/>
+          </a:p>
+        </p:txBody>
+      </p:sp>
+      <p:sp>
+        <p:nvSpPr>
+          <p:cNvPr id="7" name="Slide Number Placeholder 6"/>
+          <p:cNvSpPr>
+            <a:spLocks noGrp="1"/>
+          </p:cNvSpPr>
+          <p:nvPr>
+            <p:ph type="sldNum" sz="quarter" idx="5"/>
+          </p:nvPr>
+        </p:nvSpPr>
+        <p:spPr>
+          <a:xfrm>
+            <a:off x="3884613" y="8685213"/>
+            <a:ext cx="2971800" cy="457200"/>
+          </a:xfrm>
+          <a:prstGeom prst="rect">
+            <a:avLst/>
+          </a:prstGeom>
+        </p:spPr>
+        <p:txBody>
+          <a:bodyPr vert="horz" lIns="91440" tIns="45720" rIns="91440" bIns="45720" rtlCol="0" anchor="b"/>
+          <a:lstStyle>
+            <a:lvl1pPr algn="r">
+              <a:defRPr sz="1200"/>
+            </a:lvl1pPr>
+          </a:lstStyle>
+          <a:p>
+            <a:fld id="{BB5E49A5-4136-284D-997B-48E1D791AD67}" type="slidenum">
+              <a:rPr lang="en-US" smtClean="0"/>
+              <a:t>‹#›</a:t>
+            </a:fld>
+            <a:endParaRPr lang="en-US"/>
+          </a:p>
+        </p:txBody>
+      </p:sp>
+    </p:spTree>
+    <p:extLst>
+      <p:ext uri="{BB962C8B-B14F-4D97-AF65-F5344CB8AC3E}">
+        <p14:creationId xmlns:p14="http://schemas.microsoft.com/office/powerpoint/2010/main" val="2623252185"/>
+      </p:ext>
+    </p:extLst>
+  </p:cSld>
+  <p:clrMap bg1="lt1" tx1="dk1" bg2="lt2" tx2="dk2" accent1="accent1" accent2="accent2" accent3="accent3" accent4="accent4" accent5="accent5" accent6="accent6" hlink="hlink" folHlink="folHlink"/>
+  <p:notesStyle>
+    <a:lvl1pPr marL="0" algn="l" defTabSz="457200" rtl="0" eaLnBrk="1" latinLnBrk="0" hangingPunct="1">
+      <a:defRPr sz="1200" kern="1200">
+        <a:solidFill>
+          <a:schemeClr val="tx1"/>
+        </a:solidFill>
+        <a:latin typeface="+mn-lt"/>
+        <a:ea typeface="+mn-ea"/>
+        <a:cs typeface="+mn-cs"/>
+      </a:defRPr>
+    </a:lvl1pPr>
+    <a:lvl2pPr marL="457200" algn="l" defTabSz="457200" rtl="0" eaLnBrk="1" latinLnBrk="0" hangingPunct="1">
+      <a:defRPr sz="1200" kern="1200">
+        <a:solidFill>
+          <a:schemeClr val="tx1"/>
+        </a:solidFill>
+        <a:latin typeface="+mn-lt"/>
+        <a:ea typeface="+mn-ea"/>
+        <a:cs typeface="+mn-cs"/>
+      </a:defRPr>
+    </a:lvl2pPr>
+    <a:lvl3pPr marL="914400" algn="l" defTabSz="457200" rtl="0" eaLnBrk="1" latinLnBrk="0" hangingPunct="1">
+      <a:defRPr sz="1200" kern="1200">
+        <a:solidFill>
+          <a:schemeClr val="tx1"/>
+        </a:solidFill>
+        <a:latin typeface="+mn-lt"/>
+        <a:ea typeface="+mn-ea"/>
+        <a:cs typeface="+mn-cs"/>
+      </a:defRPr>
+    </a:lvl3pPr>
+    <a:lvl4pPr marL="1371600" algn="l" defTabSz="457200" rtl="0" eaLnBrk="1" latinLnBrk="0" hangingPunct="1">
+      <a:defRPr sz="1200" kern="1200">
+        <a:solidFill>
+          <a:schemeClr val="tx1"/>
+        </a:solidFill>
+        <a:latin typeface="+mn-lt"/>
+        <a:ea typeface="+mn-ea"/>
+        <a:cs typeface="+mn-cs"/>
+      </a:defRPr>
+    </a:lvl4pPr>
+    <a:lvl5pPr marL="1828800" algn="l" defTabSz="457200" rtl="0" eaLnBrk="1" latinLnBrk="0" hangingPunct="1">
+      <a:defRPr sz="1200" kern="1200">
+        <a:solidFill>
+          <a:schemeClr val="tx1"/>
+        </a:solidFill>
+        <a:latin typeface="+mn-lt"/>
+        <a:ea typeface="+mn-ea"/>
+        <a:cs typeface="+mn-cs"/>
+      </a:defRPr>
+    </a:lvl5pPr>
+    <a:lvl6pPr marL="2286000" algn="l" defTabSz="457200" rtl="0" eaLnBrk="1" latinLnBrk="0" hangingPunct="1">
+      <a:defRPr sz="1200" kern="1200">
+        <a:solidFill>
+          <a:schemeClr val="tx1"/>
+        </a:solidFill>
+        <a:latin typeface="+mn-lt"/>
+        <a:ea typeface="+mn-ea"/>
+        <a:cs typeface="+mn-cs"/>
+      </a:defRPr>
+    </a:lvl6pPr>
+    <a:lvl7pPr marL="2743200" algn="l" defTabSz="457200" rtl="0" eaLnBrk="1" latinLnBrk="0" hangingPunct="1">
+      <a:defRPr sz="1200" kern="1200">
+        <a:solidFill>
+          <a:schemeClr val="tx1"/>
+        </a:solidFill>
+        <a:latin typeface="+mn-lt"/>
+        <a:ea typeface="+mn-ea"/>
+        <a:cs typeface="+mn-cs"/>
+      </a:defRPr>
+    </a:lvl7pPr>
+    <a:lvl8pPr marL="3200400" algn="l" defTabSz="457200" rtl="0" eaLnBrk="1" latinLnBrk="0" hangingPunct="1">
+      <a:defRPr sz="1200" kern="1200">
+        <a:solidFill>
+          <a:schemeClr val="tx1"/>
+        </a:solidFill>
+        <a:latin typeface="+mn-lt"/>
+        <a:ea typeface="+mn-ea"/>
+        <a:cs typeface="+mn-cs"/>
+      </a:defRPr>
+    </a:lvl8pPr>
+    <a:lvl9pPr marL="3657600" algn="l" defTabSz="457200" rtl="0" eaLnBrk="1" latinLnBrk="0" hangingPunct="1">
+      <a:defRPr sz="1200" kern="1200">
+        <a:solidFill>
+          <a:schemeClr val="tx1"/>
+        </a:solidFill>
+        <a:latin typeface="+mn-lt"/>
+        <a:ea typeface="+mn-ea"/>
+        <a:cs typeface="+mn-cs"/>
+      </a:defRPr>
+    </a:lvl9pPr>
+  </p:notesStyle>
+</p:notesMaster>
+</file>
+
+<file path=ppt/notesSlides/notesSlide1.xml><?xml version="1.0" encoding="utf-8"?>
+<p:notes xmlns:a="http://schemas.openxmlformats.org/drawingml/2006/main" xmlns:p="http://schemas.openxmlformats.org/presentationml/2006/main" xmlns:r="http://schemas.openxmlformats.org/officeDocument/2006/relationships">
+  <p:cSld>
+    <p:spTree>
+      <p:nvGrpSpPr>
+        <p:cNvPr id="1" name=""/>
+        <p:cNvGrpSpPr/>
+        <p:nvPr/>
+      </p:nvGrpSpPr>
+      <p:grpSpPr>
+        <a:xfrm>
+          <a:off x="0" y="0"/>
+          <a:ext cx="0" cy="0"/>
+          <a:chOff x="0" y="0"/>
+          <a:chExt cx="0" cy="0"/>
+        </a:xfrm>
+      </p:grpSpPr>
+      <p:sp>
+        <p:nvSpPr>
+          <p:cNvPr id="2" name="Slide Image Placeholder 1"/>
+          <p:cNvSpPr>
+            <a:spLocks noGrp="1"/>
+          </p:cNvSpPr>
+          <p:nvPr>
+            <p:ph type="sldImg" idx="2"/>
+          </p:nvPr>
+        </p:nvSpPr>
+        <p:spPr/>
+      </p:sp>
+      <p:sp>
+        <p:nvSpPr>
+          <p:cNvPr id="3" name="Notes Placeholder 2"/>
+          <p:cNvSpPr>
+            <a:spLocks noGrp="1"/>
+          </p:cNvSpPr>
+          <p:nvPr>
+            <p:ph type="body" idx="3" sz="quarter"/>
+          </p:nvPr>
+        </p:nvSpPr>
+        <p:spPr/>
+        <p:txBody>
+          <a:bodyPr/>
+          <a:lstStyle/>
+          <a:p>
+            <a:r>
+              <a:t>Conviene ademas admitir la existencia de factores contribuyentes, que son condiciones que empeoraron el resultado sin haberlo causado, como que el incidente ocurriera de noche, que la documentacion estuviera desactualizada o que el unico que sabia restaurar estuviera de vacaciones.</a:t>
+            </a:r>
+          </a:p>
+        </p:txBody>
+      </p:sp>
+      <p:sp>
+        <p:nvSpPr>
+          <p:cNvPr id="4" name="Slide Number Placeholder 3"/>
+          <p:cNvSpPr>
+            <a:spLocks noGrp="1"/>
+          </p:cNvSpPr>
+          <p:nvPr>
+            <p:ph type="sldNum" idx="5" sz="quarter"/>
+          </p:nvPr>
+        </p:nvSpPr>
+        <p:spPr/>
+      </p:sp>
+    </p:spTree>
+  </p:cSld>
+  <p:clrMapOvr>
+    <a:masterClrMapping/>
+  </p:clrMapOvr>
+</p:notes>
+</file>
+
+<file path=ppt/notesSlides/notesSlide2.xml><?xml version="1.0" encoding="utf-8"?>
+<p:notes xmlns:a="http://schemas.openxmlformats.org/drawingml/2006/main" xmlns:p="http://schemas.openxmlformats.org/presentationml/2006/main" xmlns:r="http://schemas.openxmlformats.org/officeDocument/2006/relationships">
+  <p:cSld>
+    <p:spTree>
+      <p:nvGrpSpPr>
+        <p:cNvPr id="1" name=""/>
+        <p:cNvGrpSpPr/>
+        <p:nvPr/>
+      </p:nvGrpSpPr>
+      <p:grpSpPr>
+        <a:xfrm>
+          <a:off x="0" y="0"/>
+          <a:ext cx="0" cy="0"/>
+          <a:chOff x="0" y="0"/>
+          <a:chExt cx="0" cy="0"/>
+        </a:xfrm>
+      </p:grpSpPr>
+      <p:sp>
+        <p:nvSpPr>
+          <p:cNvPr id="2" name="Slide Image Placeholder 1"/>
+          <p:cNvSpPr>
+            <a:spLocks noGrp="1"/>
+          </p:cNvSpPr>
+          <p:nvPr>
+            <p:ph type="sldImg" idx="2"/>
+          </p:nvPr>
+        </p:nvSpPr>
+        <p:spPr/>
+      </p:sp>
+      <p:sp>
+        <p:nvSpPr>
+          <p:cNvPr id="3" name="Notes Placeholder 2"/>
+          <p:cNvSpPr>
+            <a:spLocks noGrp="1"/>
+          </p:cNvSpPr>
+          <p:nvPr>
+            <p:ph type="body" idx="3" sz="quarter"/>
+          </p:nvPr>
+        </p:nvSpPr>
+        <p:spPr/>
+        <p:txBody>
+          <a:bodyPr/>
+          <a:lstStyle/>
+          <a:p>
+            <a:r>
+              <a:t>Eso es la causa proxima.</a:t>
+            </a:r>
+          </a:p>
+          <a:p>
+            <a:r>
+              <a:t>Lo que convirtio un error humano corriente en un incidente historico fue que, al intentar recuperar, la compania descubrio que sus cinco mecanismos de respaldo y replicacion fallaban de una u otra forma: entre otras cosas, la herramienta de volcado logico fallaba en silencio por una diferencia de version entre cliente y servidor, y las copias que debian estar en almacenamiento remoto estaban vacias.</a:t>
+            </a:r>
+          </a:p>
+          <a:p>
+            <a:r>
+              <a:t>Terminaron restaurando desde una copia de trabajo de unas seis horas antes y perdieron de forma definitiva la informacion creada en esa ventana, del orden de miles de proyectos y comentarios.</a:t>
+            </a:r>
+          </a:p>
+        </p:txBody>
+      </p:sp>
+      <p:sp>
+        <p:nvSpPr>
+          <p:cNvPr id="4" name="Slide Number Placeholder 3"/>
+          <p:cNvSpPr>
+            <a:spLocks noGrp="1"/>
+          </p:cNvSpPr>
+          <p:nvPr>
+            <p:ph type="sldNum" idx="5" sz="quarter"/>
+          </p:nvPr>
+        </p:nvSpPr>
+        <p:spPr/>
+      </p:sp>
+    </p:spTree>
+  </p:cSld>
+  <p:clrMapOvr>
+    <a:masterClrMapping/>
+  </p:clrMapOvr>
+</p:notes>
+</file>
+
+<file path=ppt/notesSlides/notesSlide3.xml><?xml version="1.0" encoding="utf-8"?>
+<p:notes xmlns:a="http://schemas.openxmlformats.org/drawingml/2006/main" xmlns:p="http://schemas.openxmlformats.org/presentationml/2006/main" xmlns:r="http://schemas.openxmlformats.org/officeDocument/2006/relationships">
+  <p:cSld>
+    <p:spTree>
+      <p:nvGrpSpPr>
+        <p:cNvPr id="1" name=""/>
+        <p:cNvGrpSpPr/>
+        <p:nvPr/>
+      </p:nvGrpSpPr>
+      <p:grpSpPr>
+        <a:xfrm>
+          <a:off x="0" y="0"/>
+          <a:ext cx="0" cy="0"/>
+          <a:chOff x="0" y="0"/>
+          <a:chExt cx="0" cy="0"/>
+        </a:xfrm>
+      </p:grpSpPr>
+      <p:sp>
+        <p:nvSpPr>
+          <p:cNvPr id="2" name="Slide Image Placeholder 1"/>
+          <p:cNvSpPr>
+            <a:spLocks noGrp="1"/>
+          </p:cNvSpPr>
+          <p:nvPr>
+            <p:ph type="sldImg" idx="2"/>
+          </p:nvPr>
+        </p:nvSpPr>
+        <p:spPr/>
+      </p:sp>
+      <p:sp>
+        <p:nvSpPr>
+          <p:cNvPr id="3" name="Notes Placeholder 2"/>
+          <p:cNvSpPr>
+            <a:spLocks noGrp="1"/>
+          </p:cNvSpPr>
+          <p:nvPr>
+            <p:ph type="body" idx="3" sz="quarter"/>
+          </p:nvPr>
+        </p:nvSpPr>
+        <p:spPr/>
+        <p:txBody>
+          <a:bodyPr/>
+          <a:lstStyle/>
+          <a:p>
+            <a:r>
+              <a:t>Caso dos, permisos excesivos.</a:t>
+            </a:r>
+          </a:p>
+          <a:p>
+            <a:r>
+              <a:t>Y hay que decir la parte incomoda, porque es la que se repite en los proyectos de curso: casi todos los estudiantes hacen que la aplicacion se conecte con un usuario que tiene todo, porque asi nunca aparece un error de permisos y se avanza mas rapido.</a:t>
+            </a:r>
+          </a:p>
+        </p:txBody>
+      </p:sp>
+      <p:sp>
+        <p:nvSpPr>
+          <p:cNvPr id="4" name="Slide Number Placeholder 3"/>
+          <p:cNvSpPr>
+            <a:spLocks noGrp="1"/>
+          </p:cNvSpPr>
+          <p:nvPr>
+            <p:ph type="sldNum" idx="5" sz="quarter"/>
+          </p:nvPr>
+        </p:nvSpPr>
+        <p:spPr/>
+      </p:sp>
+    </p:spTree>
+  </p:cSld>
+  <p:clrMapOvr>
+    <a:masterClrMapping/>
+  </p:clrMapOvr>
+</p:notes>
+</file>
+
+<file path=ppt/notesSlides/notesSlide4.xml><?xml version="1.0" encoding="utf-8"?>
+<p:notes xmlns:a="http://schemas.openxmlformats.org/drawingml/2006/main" xmlns:p="http://schemas.openxmlformats.org/presentationml/2006/main" xmlns:r="http://schemas.openxmlformats.org/officeDocument/2006/relationships">
+  <p:cSld>
+    <p:spTree>
+      <p:nvGrpSpPr>
+        <p:cNvPr id="1" name=""/>
+        <p:cNvGrpSpPr/>
+        <p:nvPr/>
+      </p:nvGrpSpPr>
+      <p:grpSpPr>
+        <a:xfrm>
+          <a:off x="0" y="0"/>
+          <a:ext cx="0" cy="0"/>
+          <a:chOff x="0" y="0"/>
+          <a:chExt cx="0" cy="0"/>
+        </a:xfrm>
+      </p:grpSpPr>
+      <p:sp>
+        <p:nvSpPr>
+          <p:cNvPr id="2" name="Slide Image Placeholder 1"/>
+          <p:cNvSpPr>
+            <a:spLocks noGrp="1"/>
+          </p:cNvSpPr>
+          <p:nvPr>
+            <p:ph type="sldImg" idx="2"/>
+          </p:nvPr>
+        </p:nvSpPr>
+        <p:spPr/>
+      </p:sp>
+      <p:sp>
+        <p:nvSpPr>
+          <p:cNvPr id="3" name="Notes Placeholder 2"/>
+          <p:cNvSpPr>
+            <a:spLocks noGrp="1"/>
+          </p:cNvSpPr>
+          <p:nvPr>
+            <p:ph type="body" idx="3" sz="quarter"/>
+          </p:nvPr>
+        </p:nvSpPr>
+        <p:spPr/>
+        <p:txBody>
+          <a:bodyPr/>
+          <a:lstStyle/>
+          <a:p>
+            <a:r>
+              <a:t>Caso tres, perdida de datos durante una migracion.</a:t>
+            </a:r>
+          </a:p>
+        </p:txBody>
+      </p:sp>
+      <p:sp>
+        <p:nvSpPr>
+          <p:cNvPr id="4" name="Slide Number Placeholder 3"/>
+          <p:cNvSpPr>
+            <a:spLocks noGrp="1"/>
+          </p:cNvSpPr>
+          <p:nvPr>
+            <p:ph type="sldNum" idx="5" sz="quarter"/>
+          </p:nvPr>
+        </p:nvSpPr>
+        <p:spPr/>
+      </p:sp>
+    </p:spTree>
+  </p:cSld>
+  <p:clrMapOvr>
+    <a:masterClrMapping/>
+  </p:clrMapOvr>
+</p:notes>
+</file>
+
+<file path=ppt/notesSlides/notesSlide5.xml><?xml version="1.0" encoding="utf-8"?>
+<p:notes xmlns:a="http://schemas.openxmlformats.org/drawingml/2006/main" xmlns:p="http://schemas.openxmlformats.org/presentationml/2006/main" xmlns:r="http://schemas.openxmlformats.org/officeDocument/2006/relationships">
+  <p:cSld>
+    <p:spTree>
+      <p:nvGrpSpPr>
+        <p:cNvPr id="1" name=""/>
+        <p:cNvGrpSpPr/>
+        <p:nvPr/>
+      </p:nvGrpSpPr>
+      <p:grpSpPr>
+        <a:xfrm>
+          <a:off x="0" y="0"/>
+          <a:ext cx="0" cy="0"/>
+          <a:chOff x="0" y="0"/>
+          <a:chExt cx="0" cy="0"/>
+        </a:xfrm>
+      </p:grpSpPr>
+      <p:sp>
+        <p:nvSpPr>
+          <p:cNvPr id="2" name="Slide Image Placeholder 1"/>
+          <p:cNvSpPr>
+            <a:spLocks noGrp="1"/>
+          </p:cNvSpPr>
+          <p:nvPr>
+            <p:ph type="sldImg" idx="2"/>
+          </p:nvPr>
+        </p:nvSpPr>
+        <p:spPr/>
+      </p:sp>
+      <p:sp>
+        <p:nvSpPr>
+          <p:cNvPr id="3" name="Notes Placeholder 2"/>
+          <p:cNvSpPr>
+            <a:spLocks noGrp="1"/>
+          </p:cNvSpPr>
+          <p:nvPr>
+            <p:ph type="body" idx="3" sz="quarter"/>
+          </p:nvPr>
+        </p:nvSpPr>
+        <p:spPr/>
+        <p:txBody>
+          <a:bodyPr/>
+          <a:lstStyle/>
+          <a:p>
+            <a:r>
+              <a:t>Caso cuatro, concurrencia.</a:t>
+            </a:r>
+          </a:p>
+        </p:txBody>
+      </p:sp>
+      <p:sp>
+        <p:nvSpPr>
+          <p:cNvPr id="4" name="Slide Number Placeholder 3"/>
+          <p:cNvSpPr>
+            <a:spLocks noGrp="1"/>
+          </p:cNvSpPr>
+          <p:nvPr>
+            <p:ph type="sldNum" idx="5" sz="quarter"/>
+          </p:nvPr>
+        </p:nvSpPr>
+        <p:spPr/>
+      </p:sp>
+    </p:spTree>
+  </p:cSld>
+  <p:clrMapOvr>
+    <a:masterClrMapping/>
+  </p:clrMapOvr>
+</p:notes>
+</file>
+
+<file path=ppt/notesSlides/notesSlide6.xml><?xml version="1.0" encoding="utf-8"?>
+<p:notes xmlns:a="http://schemas.openxmlformats.org/drawingml/2006/main" xmlns:p="http://schemas.openxmlformats.org/presentationml/2006/main" xmlns:r="http://schemas.openxmlformats.org/officeDocument/2006/relationships">
+  <p:cSld>
+    <p:spTree>
+      <p:nvGrpSpPr>
+        <p:cNvPr id="1" name=""/>
+        <p:cNvGrpSpPr/>
+        <p:nvPr/>
+      </p:nvGrpSpPr>
+      <p:grpSpPr>
+        <a:xfrm>
+          <a:off x="0" y="0"/>
+          <a:ext cx="0" cy="0"/>
+          <a:chOff x="0" y="0"/>
+          <a:chExt cx="0" cy="0"/>
+        </a:xfrm>
+      </p:grpSpPr>
+      <p:sp>
+        <p:nvSpPr>
+          <p:cNvPr id="2" name="Slide Image Placeholder 1"/>
+          <p:cNvSpPr>
+            <a:spLocks noGrp="1"/>
+          </p:cNvSpPr>
+          <p:nvPr>
+            <p:ph type="sldImg" idx="2"/>
+          </p:nvPr>
+        </p:nvSpPr>
+        <p:spPr/>
+      </p:sp>
+      <p:sp>
+        <p:nvSpPr>
+          <p:cNvPr id="3" name="Notes Placeholder 2"/>
+          <p:cNvSpPr>
+            <a:spLocks noGrp="1"/>
+          </p:cNvSpPr>
+          <p:nvPr>
+            <p:ph type="body" idx="3" sz="quarter"/>
+          </p:nvPr>
+        </p:nvSpPr>
+        <p:spPr/>
+        <p:txBody>
+          <a:bodyPr/>
+          <a:lstStyle/>
+          <a:p>
+            <a:r>
+              <a:t>Lo que decide la calificacion de hoy no es reunir casos sino escribir lecciones accionables, y esa es la habilidad que el estudiante debe practicar sin ayuda.</a:t>
+            </a:r>
+          </a:p>
+          <a:p>
+            <a:r>
+              <a:t>Compare las dos versiones.</a:t>
+            </a:r>
+          </a:p>
+        </p:txBody>
+      </p:sp>
+      <p:sp>
+        <p:nvSpPr>
+          <p:cNvPr id="4" name="Slide Number Placeholder 3"/>
+          <p:cNvSpPr>
+            <a:spLocks noGrp="1"/>
+          </p:cNvSpPr>
+          <p:nvPr>
+            <p:ph type="sldNum" idx="5" sz="quarter"/>
+          </p:nvPr>
+        </p:nvSpPr>
+        <p:spPr/>
+      </p:sp>
+    </p:spTree>
+  </p:cSld>
+  <p:clrMapOvr>
+    <a:masterClrMapping/>
+  </p:clrMapOvr>
+</p:notes>
 </file>
 
 <file path=ppt/slideLayouts/slideLayout1.xml><?xml version="1.0" encoding="utf-8"?>
@@ -5226,7 +6008,7 @@
                 </a:solidFill>
                 <a:latin typeface="Calibri"/>
               </a:rPr>
-              <a:t>Lo que decide la calificacion: lecciones accionables (1/3)</a:t>
+              <a:t>Lecciones accionables: los cuatro elementos verificables (1/3)</a:t>
             </a:r>
           </a:p>
         </p:txBody>
@@ -5510,7 +6292,7 @@
                 </a:solidFill>
                 <a:latin typeface="Calibri"/>
               </a:rPr>
-              <a:t>Lo que decide la calificacion: lecciones accionables (2/3)</a:t>
+              <a:t>Lecciones accionables: los cuatro elementos verificables (2/3)</a:t>
             </a:r>
           </a:p>
         </p:txBody>
@@ -5794,7 +6576,7 @@
                 </a:solidFill>
                 <a:latin typeface="Calibri"/>
               </a:rPr>
-              <a:t>Lo que decide la calificacion: lecciones accionables (3/3)</a:t>
+              <a:t>Lecciones accionables: los cuatro elementos verificables (3/3)</a:t>
             </a:r>
           </a:p>
         </p:txBody>
@@ -6578,7 +7360,7 @@
                 </a:solidFill>
                 <a:latin typeface="Calibri"/>
               </a:rPr>
-              <a:t>Encuadre de hoy · Objetivo PI</a:t>
+              <a:t>Encuadre de hoy · Tema y objetivo</a:t>
             </a:r>
           </a:p>
         </p:txBody>
@@ -6626,7 +7408,7 @@
                 </a:solidFill>
                 <a:latin typeface="Calibri"/>
               </a:rPr>
-              <a:t>Hoy avanzamos el PI en:</a:t>
+              <a:t>Tema de hoy:</a:t>
             </a:r>
             <a:r>
               <a:rPr sz="2000" b="0" i="0">
@@ -6635,7 +7417,7 @@
                 </a:solidFill>
                 <a:latin typeface="Calibri"/>
               </a:rPr>
-              <a:t> Informe de caso -&gt; mejoras concretas al PI</a:t>
+              <a:t> Analisis de casos reales · VetCare</a:t>
             </a:r>
           </a:p>
           <a:p>
@@ -6680,15 +7462,6 @@
               </a:rPr>
               <a:t>120 min</a:t>
             </a:r>
-            <a:r>
-              <a:rPr sz="2000" b="0" i="0">
-                <a:solidFill>
-                  <a:srgbClr val="333333"/>
-                </a:solidFill>
-                <a:latin typeface="Calibri"/>
-              </a:rPr>
-              <a:t> · Teoría breve · Taller PI</a:t>
-            </a:r>
           </a:p>
           <a:p>
             <a:pPr>
@@ -6703,25 +7476,7 @@
                 </a:solidFill>
                 <a:latin typeface="Calibri"/>
               </a:rPr>
-              <a:t>–   </a:t>
-            </a:r>
-            <a:r>
-              <a:rPr sz="2000" b="1" i="0">
-                <a:solidFill>
-                  <a:srgbClr val="333333"/>
-                </a:solidFill>
-                <a:latin typeface="Calibri"/>
-              </a:rPr>
-              <a:t>Entregable de hoy:</a:t>
-            </a:r>
-            <a:r>
-              <a:rPr sz="2000" b="0" i="0">
-                <a:solidFill>
-                  <a:srgbClr val="333333"/>
-                </a:solidFill>
-                <a:latin typeface="Calibri"/>
-              </a:rPr>
-              <a:t> Informe 1-2 pag.: caso + 3 mejoras aplicables a VetCare</a:t>
+              <a:t>–   Gratis + navegador · free tier · sin software de pago obligatorio.</a:t>
             </a:r>
           </a:p>
           <a:p>
@@ -6737,7 +7492,7 @@
                 </a:solidFill>
                 <a:latin typeface="Calibri"/>
               </a:rPr>
-              <a:t>–   Gratis + navegador · free tier · sin software de pago obligatorio.</a:t>
+              <a:t>–   Recorrido: teoría del tema, una lámina por concepto, y demo del docente sobre VetCare DB.</a:t>
             </a:r>
           </a:p>
           <a:p>
@@ -6753,23 +7508,7 @@
                 </a:solidFill>
                 <a:latin typeface="Calibri"/>
               </a:rPr>
-              <a:t>–   La teoría no es un tema aislado: alimenta evidencias de la rúbrica del PI.</a:t>
-            </a:r>
-          </a:p>
-          <a:p>
-            <a:pPr>
-              <a:spcAft>
-                <a:spcPts val="800"/>
-              </a:spcAft>
-            </a:pPr>
-            <a:r>
-              <a:rPr sz="2000" b="0" i="0">
-                <a:solidFill>
-                  <a:srgbClr val="333333"/>
-                </a:solidFill>
-                <a:latin typeface="Calibri"/>
-              </a:rPr>
-              <a:t>–   Al salir: avance concreto en su paquete VetCare.</a:t>
+              <a:t>–   Cada lámina se sostiene sola: sirve para repasar aunque hayas faltado.</a:t>
             </a:r>
           </a:p>
         </p:txBody>
@@ -7148,13 +7887,13 @@
         <p:spPr>
           <a:xfrm>
             <a:off x="0" y="0"/>
-            <a:ext cx="12191695" cy="1170432"/>
+            <a:ext cx="12191695" cy="164592"/>
           </a:xfrm>
           <a:prstGeom prst="rect">
             <a:avLst/>
           </a:prstGeom>
           <a:solidFill>
-            <a:srgbClr val="095292"/>
+            <a:srgbClr val="269CCB"/>
           </a:solidFill>
           <a:ln>
             <a:noFill/>
@@ -7182,251 +7921,9 @@
           </a:p>
         </p:txBody>
       </p:sp>
-      <p:sp>
-        <p:nvSpPr>
-          <p:cNvPr id="3" name="Rectangle 2"/>
-          <p:cNvSpPr/>
-          <p:nvPr/>
-        </p:nvSpPr>
-        <p:spPr>
-          <a:xfrm>
-            <a:off x="0" y="1170432"/>
-            <a:ext cx="12191695" cy="41148"/>
-          </a:xfrm>
-          <a:prstGeom prst="rect">
-            <a:avLst/>
-          </a:prstGeom>
-          <a:solidFill>
-            <a:srgbClr val="FFD000"/>
-          </a:solidFill>
-          <a:ln>
-            <a:noFill/>
-          </a:ln>
-        </p:spPr>
-        <p:style>
-          <a:lnRef idx="1">
-            <a:schemeClr val="accent1"/>
-          </a:lnRef>
-          <a:fillRef idx="3">
-            <a:schemeClr val="accent1"/>
-          </a:fillRef>
-          <a:effectRef idx="2">
-            <a:schemeClr val="accent1"/>
-          </a:effectRef>
-          <a:fontRef idx="minor">
-            <a:schemeClr val="lt1"/>
-          </a:fontRef>
-        </p:style>
-        <p:txBody>
-          <a:bodyPr rtlCol="0" anchor="ctr"/>
-          <a:lstStyle/>
-          <a:p>
-            <a:pPr algn="ctr"/>
-          </a:p>
-        </p:txBody>
-      </p:sp>
-      <p:sp>
-        <p:nvSpPr>
-          <p:cNvPr id="4" name="TextBox 3"/>
-          <p:cNvSpPr txBox="1"/>
-          <p:nvPr/>
-        </p:nvSpPr>
-        <p:spPr>
-          <a:xfrm>
-            <a:off x="457200" y="164592"/>
-            <a:ext cx="11277295" cy="384048"/>
-          </a:xfrm>
-          <a:prstGeom prst="rect">
-            <a:avLst/>
-          </a:prstGeom>
-          <a:noFill/>
-        </p:spPr>
-        <p:txBody>
-          <a:bodyPr wrap="square">
-            <a:spAutoFit/>
-          </a:bodyPr>
-          <a:lstStyle/>
-          <a:p>
-            <a:r>
-              <a:rPr sz="2600" b="1" i="0">
-                <a:solidFill>
-                  <a:srgbClr val="FFFFFF"/>
-                </a:solidFill>
-                <a:latin typeface="Calibri"/>
-              </a:rPr>
-              <a:t>Herramientas de hoy</a:t>
-            </a:r>
-          </a:p>
-        </p:txBody>
-      </p:sp>
-      <p:sp>
-        <p:nvSpPr>
-          <p:cNvPr id="5" name="TextBox 4"/>
-          <p:cNvSpPr txBox="1"/>
-          <p:nvPr/>
-        </p:nvSpPr>
-        <p:spPr>
-          <a:xfrm>
-            <a:off x="457200" y="566928"/>
-            <a:ext cx="11277295" cy="411480"/>
-          </a:xfrm>
-          <a:prstGeom prst="rect">
-            <a:avLst/>
-          </a:prstGeom>
-          <a:noFill/>
-        </p:spPr>
-        <p:txBody>
-          <a:bodyPr wrap="square">
-            <a:spAutoFit/>
-          </a:bodyPr>
-          <a:lstStyle/>
-          <a:p>
-            <a:r>
-              <a:rPr sz="1400" b="0" i="0">
-                <a:solidFill>
-                  <a:srgbClr val="B8D8EE"/>
-                </a:solidFill>
-                <a:latin typeface="Calibri"/>
-              </a:rPr>
-              <a:t>Gratis · navegador o free tier</a:t>
-            </a:r>
-          </a:p>
-        </p:txBody>
-      </p:sp>
-      <p:sp>
-        <p:nvSpPr>
-          <p:cNvPr id="6" name="Rounded Rectangle 5"/>
-          <p:cNvSpPr/>
-          <p:nvPr/>
-        </p:nvSpPr>
-        <p:spPr>
-          <a:xfrm>
-            <a:off x="457200" y="1591056"/>
-            <a:ext cx="3624986" cy="2331720"/>
-          </a:xfrm>
-          <a:prstGeom prst="roundRect">
-            <a:avLst>
-              <a:gd name="adj" fmla="val 12000"/>
-            </a:avLst>
-          </a:prstGeom>
-          <a:solidFill>
-            <a:srgbClr val="F2F2F2"/>
-          </a:solidFill>
-          <a:ln>
-            <a:noFill/>
-          </a:ln>
-        </p:spPr>
-        <p:style>
-          <a:lnRef idx="1">
-            <a:schemeClr val="accent1"/>
-          </a:lnRef>
-          <a:fillRef idx="3">
-            <a:schemeClr val="accent1"/>
-          </a:fillRef>
-          <a:effectRef idx="2">
-            <a:schemeClr val="accent1"/>
-          </a:effectRef>
-          <a:fontRef idx="minor">
-            <a:schemeClr val="lt1"/>
-          </a:fontRef>
-        </p:style>
-        <p:txBody>
-          <a:bodyPr rtlCol="0" anchor="ctr"/>
-          <a:lstStyle/>
-          <a:p>
-            <a:pPr algn="ctr"/>
-          </a:p>
-        </p:txBody>
-      </p:sp>
-      <p:sp>
-        <p:nvSpPr>
-          <p:cNvPr id="7" name="Rectangle 6"/>
-          <p:cNvSpPr/>
-          <p:nvPr/>
-        </p:nvSpPr>
-        <p:spPr>
-          <a:xfrm>
-            <a:off x="457200" y="1591056"/>
-            <a:ext cx="3624986" cy="64008"/>
-          </a:xfrm>
-          <a:prstGeom prst="rect">
-            <a:avLst/>
-          </a:prstGeom>
-          <a:solidFill>
-            <a:srgbClr val="095292"/>
-          </a:solidFill>
-          <a:ln>
-            <a:noFill/>
-          </a:ln>
-        </p:spPr>
-        <p:style>
-          <a:lnRef idx="1">
-            <a:schemeClr val="accent1"/>
-          </a:lnRef>
-          <a:fillRef idx="3">
-            <a:schemeClr val="accent1"/>
-          </a:fillRef>
-          <a:effectRef idx="2">
-            <a:schemeClr val="accent1"/>
-          </a:effectRef>
-          <a:fontRef idx="minor">
-            <a:schemeClr val="lt1"/>
-          </a:fontRef>
-        </p:style>
-        <p:txBody>
-          <a:bodyPr rtlCol="0" anchor="ctr"/>
-          <a:lstStyle/>
-          <a:p>
-            <a:pPr algn="ctr"/>
-          </a:p>
-        </p:txBody>
-      </p:sp>
-      <p:sp>
-        <p:nvSpPr>
-          <p:cNvPr id="8" name="Rectangle 7"/>
-          <p:cNvSpPr/>
-          <p:nvPr/>
-        </p:nvSpPr>
-        <p:spPr>
-          <a:xfrm>
-            <a:off x="457200" y="1655064"/>
-            <a:ext cx="3624986" cy="27432"/>
-          </a:xfrm>
-          <a:prstGeom prst="rect">
-            <a:avLst/>
-          </a:prstGeom>
-          <a:solidFill>
-            <a:srgbClr val="FFD000"/>
-          </a:solidFill>
-          <a:ln>
-            <a:noFill/>
-          </a:ln>
-        </p:spPr>
-        <p:style>
-          <a:lnRef idx="1">
-            <a:schemeClr val="accent1"/>
-          </a:lnRef>
-          <a:fillRef idx="3">
-            <a:schemeClr val="accent1"/>
-          </a:fillRef>
-          <a:effectRef idx="2">
-            <a:schemeClr val="accent1"/>
-          </a:effectRef>
-          <a:fontRef idx="minor">
-            <a:schemeClr val="lt1"/>
-          </a:fontRef>
-        </p:style>
-        <p:txBody>
-          <a:bodyPr rtlCol="0" anchor="ctr"/>
-          <a:lstStyle/>
-          <a:p>
-            <a:pPr algn="ctr"/>
-          </a:p>
-        </p:txBody>
-      </p:sp>
       <p:pic>
         <p:nvPicPr>
-          <p:cNvPr id="9" name="Picture 8" descr="google_docs.png"/>
+          <p:cNvPr id="3" name="Picture 2" descr="logo_uniajc_color.png"/>
           <p:cNvPicPr>
             <a:picLocks noChangeAspect="1"/>
           </p:cNvPicPr>
@@ -7440,618 +7937,14 @@
         </p:blipFill>
         <p:spPr>
           <a:xfrm>
-            <a:off x="1643329" y="1847087"/>
-            <a:ext cx="1252728" cy="1252728"/>
+            <a:off x="10271455" y="5998464"/>
+            <a:ext cx="1463040" cy="643233"/>
           </a:xfrm>
           <a:prstGeom prst="rect">
             <a:avLst/>
           </a:prstGeom>
         </p:spPr>
       </p:pic>
-      <p:sp>
-        <p:nvSpPr>
-          <p:cNvPr id="10" name="TextBox 9"/>
-          <p:cNvSpPr txBox="1"/>
-          <p:nvPr/>
-        </p:nvSpPr>
-        <p:spPr>
-          <a:xfrm>
-            <a:off x="530352" y="3191256"/>
-            <a:ext cx="3478682" cy="621792"/>
-          </a:xfrm>
-          <a:prstGeom prst="rect">
-            <a:avLst/>
-          </a:prstGeom>
-          <a:noFill/>
-        </p:spPr>
-        <p:txBody>
-          <a:bodyPr wrap="square" anchor="t"/>
-          <a:lstStyle/>
-          <a:p>
-            <a:pPr algn="ctr"/>
-            <a:r>
-              <a:rPr sz="1300" b="1" i="0">
-                <a:solidFill>
-                  <a:srgbClr val="095292"/>
-                </a:solidFill>
-                <a:latin typeface="Calibri"/>
-              </a:rPr>
-              <a:t>Google Docs</a:t>
-            </a:r>
-          </a:p>
-          <a:p>
-            <a:pPr algn="ctr">
-              <a:spcBef>
-                <a:spcPts val="200"/>
-              </a:spcBef>
-            </a:pPr>
-            <a:r>
-              <a:rPr sz="1000" b="0" i="0">
-                <a:solidFill>
-                  <a:srgbClr val="666666"/>
-                </a:solidFill>
-                <a:latin typeface="Calibri"/>
-              </a:rPr>
-              <a:t>Caso real</a:t>
-            </a:r>
-          </a:p>
-        </p:txBody>
-      </p:sp>
-      <p:sp>
-        <p:nvSpPr>
-          <p:cNvPr id="11" name="Rounded Rectangle 10"/>
-          <p:cNvSpPr/>
-          <p:nvPr/>
-        </p:nvSpPr>
-        <p:spPr>
-          <a:xfrm>
-            <a:off x="4283354" y="1591056"/>
-            <a:ext cx="3624986" cy="2331720"/>
-          </a:xfrm>
-          <a:prstGeom prst="roundRect">
-            <a:avLst>
-              <a:gd name="adj" fmla="val 12000"/>
-            </a:avLst>
-          </a:prstGeom>
-          <a:solidFill>
-            <a:srgbClr val="F2F2F2"/>
-          </a:solidFill>
-          <a:ln>
-            <a:noFill/>
-          </a:ln>
-        </p:spPr>
-        <p:style>
-          <a:lnRef idx="1">
-            <a:schemeClr val="accent1"/>
-          </a:lnRef>
-          <a:fillRef idx="3">
-            <a:schemeClr val="accent1"/>
-          </a:fillRef>
-          <a:effectRef idx="2">
-            <a:schemeClr val="accent1"/>
-          </a:effectRef>
-          <a:fontRef idx="minor">
-            <a:schemeClr val="lt1"/>
-          </a:fontRef>
-        </p:style>
-        <p:txBody>
-          <a:bodyPr rtlCol="0" anchor="ctr"/>
-          <a:lstStyle/>
-          <a:p>
-            <a:pPr algn="ctr"/>
-          </a:p>
-        </p:txBody>
-      </p:sp>
-      <p:sp>
-        <p:nvSpPr>
-          <p:cNvPr id="12" name="Rectangle 11"/>
-          <p:cNvSpPr/>
-          <p:nvPr/>
-        </p:nvSpPr>
-        <p:spPr>
-          <a:xfrm>
-            <a:off x="4283354" y="1591056"/>
-            <a:ext cx="3624986" cy="64008"/>
-          </a:xfrm>
-          <a:prstGeom prst="rect">
-            <a:avLst/>
-          </a:prstGeom>
-          <a:solidFill>
-            <a:srgbClr val="095292"/>
-          </a:solidFill>
-          <a:ln>
-            <a:noFill/>
-          </a:ln>
-        </p:spPr>
-        <p:style>
-          <a:lnRef idx="1">
-            <a:schemeClr val="accent1"/>
-          </a:lnRef>
-          <a:fillRef idx="3">
-            <a:schemeClr val="accent1"/>
-          </a:fillRef>
-          <a:effectRef idx="2">
-            <a:schemeClr val="accent1"/>
-          </a:effectRef>
-          <a:fontRef idx="minor">
-            <a:schemeClr val="lt1"/>
-          </a:fontRef>
-        </p:style>
-        <p:txBody>
-          <a:bodyPr rtlCol="0" anchor="ctr"/>
-          <a:lstStyle/>
-          <a:p>
-            <a:pPr algn="ctr"/>
-          </a:p>
-        </p:txBody>
-      </p:sp>
-      <p:sp>
-        <p:nvSpPr>
-          <p:cNvPr id="13" name="Rectangle 12"/>
-          <p:cNvSpPr/>
-          <p:nvPr/>
-        </p:nvSpPr>
-        <p:spPr>
-          <a:xfrm>
-            <a:off x="4283354" y="1655064"/>
-            <a:ext cx="3624986" cy="27432"/>
-          </a:xfrm>
-          <a:prstGeom prst="rect">
-            <a:avLst/>
-          </a:prstGeom>
-          <a:solidFill>
-            <a:srgbClr val="FFD000"/>
-          </a:solidFill>
-          <a:ln>
-            <a:noFill/>
-          </a:ln>
-        </p:spPr>
-        <p:style>
-          <a:lnRef idx="1">
-            <a:schemeClr val="accent1"/>
-          </a:lnRef>
-          <a:fillRef idx="3">
-            <a:schemeClr val="accent1"/>
-          </a:fillRef>
-          <a:effectRef idx="2">
-            <a:schemeClr val="accent1"/>
-          </a:effectRef>
-          <a:fontRef idx="minor">
-            <a:schemeClr val="lt1"/>
-          </a:fontRef>
-        </p:style>
-        <p:txBody>
-          <a:bodyPr rtlCol="0" anchor="ctr"/>
-          <a:lstStyle/>
-          <a:p>
-            <a:pPr algn="ctr"/>
-          </a:p>
-        </p:txBody>
-      </p:sp>
-      <p:pic>
-        <p:nvPicPr>
-          <p:cNvPr id="14" name="Picture 13" descr="drawio.png"/>
-          <p:cNvPicPr>
-            <a:picLocks noChangeAspect="1"/>
-          </p:cNvPicPr>
-          <p:nvPr/>
-        </p:nvPicPr>
-        <p:blipFill>
-          <a:blip r:embed="rId3"/>
-          <a:stretch>
-            <a:fillRect/>
-          </a:stretch>
-        </p:blipFill>
-        <p:spPr>
-          <a:xfrm>
-            <a:off x="5469483" y="1847087"/>
-            <a:ext cx="1252728" cy="1252728"/>
-          </a:xfrm>
-          <a:prstGeom prst="rect">
-            <a:avLst/>
-          </a:prstGeom>
-        </p:spPr>
-      </p:pic>
-      <p:sp>
-        <p:nvSpPr>
-          <p:cNvPr id="15" name="TextBox 14"/>
-          <p:cNvSpPr txBox="1"/>
-          <p:nvPr/>
-        </p:nvSpPr>
-        <p:spPr>
-          <a:xfrm>
-            <a:off x="4356506" y="3191256"/>
-            <a:ext cx="3478682" cy="621792"/>
-          </a:xfrm>
-          <a:prstGeom prst="rect">
-            <a:avLst/>
-          </a:prstGeom>
-          <a:noFill/>
-        </p:spPr>
-        <p:txBody>
-          <a:bodyPr wrap="square" anchor="t"/>
-          <a:lstStyle/>
-          <a:p>
-            <a:pPr algn="ctr"/>
-            <a:r>
-              <a:rPr sz="1300" b="1" i="0">
-                <a:solidFill>
-                  <a:srgbClr val="095292"/>
-                </a:solidFill>
-                <a:latin typeface="Calibri"/>
-              </a:rPr>
-              <a:t>draw.io</a:t>
-            </a:r>
-          </a:p>
-          <a:p>
-            <a:pPr algn="ctr">
-              <a:spcBef>
-                <a:spcPts val="200"/>
-              </a:spcBef>
-            </a:pPr>
-            <a:r>
-              <a:rPr sz="1000" b="0" i="0">
-                <a:solidFill>
-                  <a:srgbClr val="666666"/>
-                </a:solidFill>
-                <a:latin typeface="Calibri"/>
-              </a:rPr>
-              <a:t>Leccion</a:t>
-            </a:r>
-          </a:p>
-        </p:txBody>
-      </p:sp>
-      <p:sp>
-        <p:nvSpPr>
-          <p:cNvPr id="16" name="Rounded Rectangle 15"/>
-          <p:cNvSpPr/>
-          <p:nvPr/>
-        </p:nvSpPr>
-        <p:spPr>
-          <a:xfrm>
-            <a:off x="8109508" y="1591056"/>
-            <a:ext cx="3624986" cy="2331720"/>
-          </a:xfrm>
-          <a:prstGeom prst="roundRect">
-            <a:avLst>
-              <a:gd name="adj" fmla="val 12000"/>
-            </a:avLst>
-          </a:prstGeom>
-          <a:solidFill>
-            <a:srgbClr val="F2F2F2"/>
-          </a:solidFill>
-          <a:ln>
-            <a:noFill/>
-          </a:ln>
-        </p:spPr>
-        <p:style>
-          <a:lnRef idx="1">
-            <a:schemeClr val="accent1"/>
-          </a:lnRef>
-          <a:fillRef idx="3">
-            <a:schemeClr val="accent1"/>
-          </a:fillRef>
-          <a:effectRef idx="2">
-            <a:schemeClr val="accent1"/>
-          </a:effectRef>
-          <a:fontRef idx="minor">
-            <a:schemeClr val="lt1"/>
-          </a:fontRef>
-        </p:style>
-        <p:txBody>
-          <a:bodyPr rtlCol="0" anchor="ctr"/>
-          <a:lstStyle/>
-          <a:p>
-            <a:pPr algn="ctr"/>
-          </a:p>
-        </p:txBody>
-      </p:sp>
-      <p:sp>
-        <p:nvSpPr>
-          <p:cNvPr id="17" name="Rectangle 16"/>
-          <p:cNvSpPr/>
-          <p:nvPr/>
-        </p:nvSpPr>
-        <p:spPr>
-          <a:xfrm>
-            <a:off x="8109508" y="1591056"/>
-            <a:ext cx="3624986" cy="64008"/>
-          </a:xfrm>
-          <a:prstGeom prst="rect">
-            <a:avLst/>
-          </a:prstGeom>
-          <a:solidFill>
-            <a:srgbClr val="095292"/>
-          </a:solidFill>
-          <a:ln>
-            <a:noFill/>
-          </a:ln>
-        </p:spPr>
-        <p:style>
-          <a:lnRef idx="1">
-            <a:schemeClr val="accent1"/>
-          </a:lnRef>
-          <a:fillRef idx="3">
-            <a:schemeClr val="accent1"/>
-          </a:fillRef>
-          <a:effectRef idx="2">
-            <a:schemeClr val="accent1"/>
-          </a:effectRef>
-          <a:fontRef idx="minor">
-            <a:schemeClr val="lt1"/>
-          </a:fontRef>
-        </p:style>
-        <p:txBody>
-          <a:bodyPr rtlCol="0" anchor="ctr"/>
-          <a:lstStyle/>
-          <a:p>
-            <a:pPr algn="ctr"/>
-          </a:p>
-        </p:txBody>
-      </p:sp>
-      <p:sp>
-        <p:nvSpPr>
-          <p:cNvPr id="18" name="Rectangle 17"/>
-          <p:cNvSpPr/>
-          <p:nvPr/>
-        </p:nvSpPr>
-        <p:spPr>
-          <a:xfrm>
-            <a:off x="8109508" y="1655064"/>
-            <a:ext cx="3624986" cy="27432"/>
-          </a:xfrm>
-          <a:prstGeom prst="rect">
-            <a:avLst/>
-          </a:prstGeom>
-          <a:solidFill>
-            <a:srgbClr val="FFD000"/>
-          </a:solidFill>
-          <a:ln>
-            <a:noFill/>
-          </a:ln>
-        </p:spPr>
-        <p:style>
-          <a:lnRef idx="1">
-            <a:schemeClr val="accent1"/>
-          </a:lnRef>
-          <a:fillRef idx="3">
-            <a:schemeClr val="accent1"/>
-          </a:fillRef>
-          <a:effectRef idx="2">
-            <a:schemeClr val="accent1"/>
-          </a:effectRef>
-          <a:fontRef idx="minor">
-            <a:schemeClr val="lt1"/>
-          </a:fontRef>
-        </p:style>
-        <p:txBody>
-          <a:bodyPr rtlCol="0" anchor="ctr"/>
-          <a:lstStyle/>
-          <a:p>
-            <a:pPr algn="ctr"/>
-          </a:p>
-        </p:txBody>
-      </p:sp>
-      <p:pic>
-        <p:nvPicPr>
-          <p:cNvPr id="19" name="Picture 18" descr="dbfiddle.png"/>
-          <p:cNvPicPr>
-            <a:picLocks noChangeAspect="1"/>
-          </p:cNvPicPr>
-          <p:nvPr/>
-        </p:nvPicPr>
-        <p:blipFill>
-          <a:blip r:embed="rId4"/>
-          <a:stretch>
-            <a:fillRect/>
-          </a:stretch>
-        </p:blipFill>
-        <p:spPr>
-          <a:xfrm>
-            <a:off x="9295638" y="1847087"/>
-            <a:ext cx="1252728" cy="1252728"/>
-          </a:xfrm>
-          <a:prstGeom prst="rect">
-            <a:avLst/>
-          </a:prstGeom>
-        </p:spPr>
-      </p:pic>
-      <p:sp>
-        <p:nvSpPr>
-          <p:cNvPr id="20" name="TextBox 19"/>
-          <p:cNvSpPr txBox="1"/>
-          <p:nvPr/>
-        </p:nvSpPr>
-        <p:spPr>
-          <a:xfrm>
-            <a:off x="8182660" y="3191256"/>
-            <a:ext cx="3478682" cy="621792"/>
-          </a:xfrm>
-          <a:prstGeom prst="rect">
-            <a:avLst/>
-          </a:prstGeom>
-          <a:noFill/>
-        </p:spPr>
-        <p:txBody>
-          <a:bodyPr wrap="square" anchor="t"/>
-          <a:lstStyle/>
-          <a:p>
-            <a:pPr algn="ctr"/>
-            <a:r>
-              <a:rPr sz="1300" b="1" i="0">
-                <a:solidFill>
-                  <a:srgbClr val="095292"/>
-                </a:solidFill>
-                <a:latin typeface="Calibri"/>
-              </a:rPr>
-              <a:t>DB Fiddle</a:t>
-            </a:r>
-          </a:p>
-          <a:p>
-            <a:pPr algn="ctr">
-              <a:spcBef>
-                <a:spcPts val="200"/>
-              </a:spcBef>
-            </a:pPr>
-            <a:r>
-              <a:rPr sz="1000" b="0" i="0">
-                <a:solidFill>
-                  <a:srgbClr val="666666"/>
-                </a:solidFill>
-                <a:latin typeface="Calibri"/>
-              </a:rPr>
-              <a:t>Opcional SQL</a:t>
-            </a:r>
-          </a:p>
-        </p:txBody>
-      </p:sp>
-      <p:sp>
-        <p:nvSpPr>
-          <p:cNvPr id="21" name="TextBox 20"/>
-          <p:cNvSpPr txBox="1"/>
-          <p:nvPr/>
-        </p:nvSpPr>
-        <p:spPr>
-          <a:xfrm>
-            <a:off x="11185855" y="6473952"/>
-            <a:ext cx="640080" cy="274320"/>
-          </a:xfrm>
-          <a:prstGeom prst="rect">
-            <a:avLst/>
-          </a:prstGeom>
-          <a:noFill/>
-        </p:spPr>
-        <p:txBody>
-          <a:bodyPr wrap="square">
-            <a:spAutoFit/>
-          </a:bodyPr>
-          <a:lstStyle/>
-          <a:p>
-            <a:pPr algn="r"/>
-            <a:r>
-              <a:rPr sz="1100" b="0" i="0">
-                <a:solidFill>
-                  <a:srgbClr val="666666"/>
-                </a:solidFill>
-                <a:latin typeface="Calibri"/>
-              </a:rPr>
-              <a:t>21</a:t>
-            </a:r>
-          </a:p>
-        </p:txBody>
-      </p:sp>
-    </p:spTree>
-  </p:cSld>
-  <p:clrMapOvr>
-    <a:masterClrMapping/>
-  </p:clrMapOvr>
-</p:sld>
-</file>
-
-<file path=ppt/slides/slide22.xml><?xml version="1.0" encoding="utf-8"?>
-<p:sld xmlns:a="http://schemas.openxmlformats.org/drawingml/2006/main" xmlns:p="http://schemas.openxmlformats.org/presentationml/2006/main" xmlns:r="http://schemas.openxmlformats.org/officeDocument/2006/relationships">
-  <p:cSld>
-    <p:bg>
-      <p:bgPr>
-        <a:solidFill>
-          <a:srgbClr val="FFFFFF"/>
-        </a:solidFill>
-        <a:effectLst/>
-      </p:bgPr>
-    </p:bg>
-    <p:spTree>
-      <p:nvGrpSpPr>
-        <p:cNvPr id="1" name=""/>
-        <p:cNvGrpSpPr/>
-        <p:nvPr/>
-      </p:nvGrpSpPr>
-      <p:grpSpPr/>
-      <p:sp>
-        <p:nvSpPr>
-          <p:cNvPr id="2" name="Rectangle 1"/>
-          <p:cNvSpPr/>
-          <p:nvPr/>
-        </p:nvSpPr>
-        <p:spPr>
-          <a:xfrm>
-            <a:off x="0" y="0"/>
-            <a:ext cx="12191695" cy="960120"/>
-          </a:xfrm>
-          <a:prstGeom prst="rect">
-            <a:avLst/>
-          </a:prstGeom>
-          <a:solidFill>
-            <a:srgbClr val="095292"/>
-          </a:solidFill>
-          <a:ln>
-            <a:noFill/>
-          </a:ln>
-        </p:spPr>
-        <p:style>
-          <a:lnRef idx="1">
-            <a:schemeClr val="accent1"/>
-          </a:lnRef>
-          <a:fillRef idx="3">
-            <a:schemeClr val="accent1"/>
-          </a:fillRef>
-          <a:effectRef idx="2">
-            <a:schemeClr val="accent1"/>
-          </a:effectRef>
-          <a:fontRef idx="minor">
-            <a:schemeClr val="lt1"/>
-          </a:fontRef>
-        </p:style>
-        <p:txBody>
-          <a:bodyPr rtlCol="0" anchor="ctr"/>
-          <a:lstStyle/>
-          <a:p>
-            <a:pPr algn="ctr"/>
-          </a:p>
-        </p:txBody>
-      </p:sp>
-      <p:sp>
-        <p:nvSpPr>
-          <p:cNvPr id="3" name="Rectangle 2"/>
-          <p:cNvSpPr/>
-          <p:nvPr/>
-        </p:nvSpPr>
-        <p:spPr>
-          <a:xfrm>
-            <a:off x="0" y="960120"/>
-            <a:ext cx="12191695" cy="41148"/>
-          </a:xfrm>
-          <a:prstGeom prst="rect">
-            <a:avLst/>
-          </a:prstGeom>
-          <a:solidFill>
-            <a:srgbClr val="FFD000"/>
-          </a:solidFill>
-          <a:ln>
-            <a:noFill/>
-          </a:ln>
-        </p:spPr>
-        <p:style>
-          <a:lnRef idx="1">
-            <a:schemeClr val="accent1"/>
-          </a:lnRef>
-          <a:fillRef idx="3">
-            <a:schemeClr val="accent1"/>
-          </a:fillRef>
-          <a:effectRef idx="2">
-            <a:schemeClr val="accent1"/>
-          </a:effectRef>
-          <a:fontRef idx="minor">
-            <a:schemeClr val="lt1"/>
-          </a:fontRef>
-        </p:style>
-        <p:txBody>
-          <a:bodyPr rtlCol="0" anchor="ctr"/>
-          <a:lstStyle/>
-          <a:p>
-            <a:pPr algn="ctr"/>
-          </a:p>
-        </p:txBody>
-      </p:sp>
       <p:sp>
         <p:nvSpPr>
           <p:cNvPr id="4" name="TextBox 3"/>
@@ -8060,3261 +7953,6 @@
         </p:nvSpPr>
         <p:spPr>
           <a:xfrm>
-            <a:off x="457200" y="164592"/>
-            <a:ext cx="11277295" cy="502920"/>
-          </a:xfrm>
-          <a:prstGeom prst="rect">
-            <a:avLst/>
-          </a:prstGeom>
-          <a:noFill/>
-        </p:spPr>
-        <p:txBody>
-          <a:bodyPr wrap="square">
-            <a:spAutoFit/>
-          </a:bodyPr>
-          <a:lstStyle/>
-          <a:p>
-            <a:r>
-              <a:rPr sz="2600" b="1" i="0">
-                <a:solidFill>
-                  <a:srgbClr val="FFFFFF"/>
-                </a:solidFill>
-                <a:latin typeface="Calibri"/>
-              </a:rPr>
-              <a:t>Actividad autonoma — contexto / por que importa</a:t>
-            </a:r>
-          </a:p>
-        </p:txBody>
-      </p:sp>
-      <p:sp>
-        <p:nvSpPr>
-          <p:cNvPr id="5" name="TextBox 4"/>
-          <p:cNvSpPr txBox="1"/>
-          <p:nvPr/>
-        </p:nvSpPr>
-        <p:spPr>
-          <a:xfrm>
-            <a:off x="457200" y="1170432"/>
-            <a:ext cx="11277295" cy="5230368"/>
-          </a:xfrm>
-          <a:prstGeom prst="rect">
-            <a:avLst/>
-          </a:prstGeom>
-          <a:noFill/>
-        </p:spPr>
-        <p:txBody>
-          <a:bodyPr wrap="square">
-            <a:spAutoFit/>
-          </a:bodyPr>
-          <a:lstStyle/>
-          <a:p>
-            <a:pPr>
-              <a:spcAft>
-                <a:spcPts val="800"/>
-              </a:spcAft>
-            </a:pPr>
-            <a:r>
-              <a:rPr sz="2000" b="0" i="0">
-                <a:solidFill>
-                  <a:srgbClr val="333333"/>
-                </a:solidFill>
-                <a:latin typeface="Calibri"/>
-              </a:rPr>
-              <a:t>–   </a:t>
-            </a:r>
-            <a:r>
-              <a:rPr sz="2000" b="1" i="0">
-                <a:solidFill>
-                  <a:srgbClr val="333333"/>
-                </a:solidFill>
-                <a:latin typeface="Calibri"/>
-              </a:rPr>
-              <a:t>Por qué importa al PI:</a:t>
-            </a:r>
-            <a:r>
-              <a:rPr sz="2000" b="0" i="0">
-                <a:solidFill>
-                  <a:srgbClr val="333333"/>
-                </a:solidFill>
-                <a:latin typeface="Calibri"/>
-              </a:rPr>
-              <a:t> lecciónes accionables.</a:t>
-            </a:r>
-          </a:p>
-          <a:p>
-            <a:pPr>
-              <a:spcAft>
-                <a:spcPts val="800"/>
-              </a:spcAft>
-            </a:pPr>
-            <a:r>
-              <a:rPr sz="2000" b="0" i="0">
-                <a:solidFill>
-                  <a:srgbClr val="333333"/>
-                </a:solidFill>
-                <a:latin typeface="Calibri"/>
-              </a:rPr>
-              <a:t>–   Autónoma: 1 caso -&gt; 3 mejoras.</a:t>
-            </a:r>
-          </a:p>
-        </p:txBody>
-      </p:sp>
-      <p:sp>
-        <p:nvSpPr>
-          <p:cNvPr id="6" name="TextBox 5"/>
-          <p:cNvSpPr txBox="1"/>
-          <p:nvPr/>
-        </p:nvSpPr>
-        <p:spPr>
-          <a:xfrm>
-            <a:off x="11185855" y="6473952"/>
-            <a:ext cx="640080" cy="274320"/>
-          </a:xfrm>
-          <a:prstGeom prst="rect">
-            <a:avLst/>
-          </a:prstGeom>
-          <a:noFill/>
-        </p:spPr>
-        <p:txBody>
-          <a:bodyPr wrap="square">
-            <a:spAutoFit/>
-          </a:bodyPr>
-          <a:lstStyle/>
-          <a:p>
-            <a:pPr algn="r"/>
-            <a:r>
-              <a:rPr sz="1100" b="0" i="0">
-                <a:solidFill>
-                  <a:srgbClr val="666666"/>
-                </a:solidFill>
-                <a:latin typeface="Calibri"/>
-              </a:rPr>
-              <a:t>22</a:t>
-            </a:r>
-          </a:p>
-        </p:txBody>
-      </p:sp>
-    </p:spTree>
-  </p:cSld>
-  <p:clrMapOvr>
-    <a:masterClrMapping/>
-  </p:clrMapOvr>
-</p:sld>
-</file>
-
-<file path=ppt/slides/slide23.xml><?xml version="1.0" encoding="utf-8"?>
-<p:sld xmlns:a="http://schemas.openxmlformats.org/drawingml/2006/main" xmlns:p="http://schemas.openxmlformats.org/presentationml/2006/main" xmlns:r="http://schemas.openxmlformats.org/officeDocument/2006/relationships">
-  <p:cSld>
-    <p:bg>
-      <p:bgPr>
-        <a:solidFill>
-          <a:srgbClr val="FFFFFF"/>
-        </a:solidFill>
-        <a:effectLst/>
-      </p:bgPr>
-    </p:bg>
-    <p:spTree>
-      <p:nvGrpSpPr>
-        <p:cNvPr id="1" name=""/>
-        <p:cNvGrpSpPr/>
-        <p:nvPr/>
-      </p:nvGrpSpPr>
-      <p:grpSpPr/>
-      <p:sp>
-        <p:nvSpPr>
-          <p:cNvPr id="2" name="Rectangle 1"/>
-          <p:cNvSpPr/>
-          <p:nvPr/>
-        </p:nvSpPr>
-        <p:spPr>
-          <a:xfrm>
-            <a:off x="0" y="0"/>
-            <a:ext cx="12191695" cy="960120"/>
-          </a:xfrm>
-          <a:prstGeom prst="rect">
-            <a:avLst/>
-          </a:prstGeom>
-          <a:solidFill>
-            <a:srgbClr val="095292"/>
-          </a:solidFill>
-          <a:ln>
-            <a:noFill/>
-          </a:ln>
-        </p:spPr>
-        <p:style>
-          <a:lnRef idx="1">
-            <a:schemeClr val="accent1"/>
-          </a:lnRef>
-          <a:fillRef idx="3">
-            <a:schemeClr val="accent1"/>
-          </a:fillRef>
-          <a:effectRef idx="2">
-            <a:schemeClr val="accent1"/>
-          </a:effectRef>
-          <a:fontRef idx="minor">
-            <a:schemeClr val="lt1"/>
-          </a:fontRef>
-        </p:style>
-        <p:txBody>
-          <a:bodyPr rtlCol="0" anchor="ctr"/>
-          <a:lstStyle/>
-          <a:p>
-            <a:pPr algn="ctr"/>
-          </a:p>
-        </p:txBody>
-      </p:sp>
-      <p:sp>
-        <p:nvSpPr>
-          <p:cNvPr id="3" name="Rectangle 2"/>
-          <p:cNvSpPr/>
-          <p:nvPr/>
-        </p:nvSpPr>
-        <p:spPr>
-          <a:xfrm>
-            <a:off x="0" y="960120"/>
-            <a:ext cx="12191695" cy="41148"/>
-          </a:xfrm>
-          <a:prstGeom prst="rect">
-            <a:avLst/>
-          </a:prstGeom>
-          <a:solidFill>
-            <a:srgbClr val="FFD000"/>
-          </a:solidFill>
-          <a:ln>
-            <a:noFill/>
-          </a:ln>
-        </p:spPr>
-        <p:style>
-          <a:lnRef idx="1">
-            <a:schemeClr val="accent1"/>
-          </a:lnRef>
-          <a:fillRef idx="3">
-            <a:schemeClr val="accent1"/>
-          </a:fillRef>
-          <a:effectRef idx="2">
-            <a:schemeClr val="accent1"/>
-          </a:effectRef>
-          <a:fontRef idx="minor">
-            <a:schemeClr val="lt1"/>
-          </a:fontRef>
-        </p:style>
-        <p:txBody>
-          <a:bodyPr rtlCol="0" anchor="ctr"/>
-          <a:lstStyle/>
-          <a:p>
-            <a:pPr algn="ctr"/>
-          </a:p>
-        </p:txBody>
-      </p:sp>
-      <p:sp>
-        <p:nvSpPr>
-          <p:cNvPr id="4" name="TextBox 3"/>
-          <p:cNvSpPr txBox="1"/>
-          <p:nvPr/>
-        </p:nvSpPr>
-        <p:spPr>
-          <a:xfrm>
-            <a:off x="457200" y="164592"/>
-            <a:ext cx="11277295" cy="502920"/>
-          </a:xfrm>
-          <a:prstGeom prst="rect">
-            <a:avLst/>
-          </a:prstGeom>
-          <a:noFill/>
-        </p:spPr>
-        <p:txBody>
-          <a:bodyPr wrap="square">
-            <a:spAutoFit/>
-          </a:bodyPr>
-          <a:lstStyle/>
-          <a:p>
-            <a:r>
-              <a:rPr sz="2600" b="1" i="0">
-                <a:solidFill>
-                  <a:srgbClr val="FFFFFF"/>
-                </a:solidFill>
-                <a:latin typeface="Calibri"/>
-              </a:rPr>
-              <a:t>Actividad autonoma — objetivo y criterios</a:t>
-            </a:r>
-          </a:p>
-        </p:txBody>
-      </p:sp>
-      <p:sp>
-        <p:nvSpPr>
-          <p:cNvPr id="5" name="TextBox 4"/>
-          <p:cNvSpPr txBox="1"/>
-          <p:nvPr/>
-        </p:nvSpPr>
-        <p:spPr>
-          <a:xfrm>
-            <a:off x="457200" y="1170432"/>
-            <a:ext cx="11277295" cy="5230368"/>
-          </a:xfrm>
-          <a:prstGeom prst="rect">
-            <a:avLst/>
-          </a:prstGeom>
-          <a:noFill/>
-        </p:spPr>
-        <p:txBody>
-          <a:bodyPr wrap="square">
-            <a:spAutoFit/>
-          </a:bodyPr>
-          <a:lstStyle/>
-          <a:p>
-            <a:pPr>
-              <a:spcAft>
-                <a:spcPts val="800"/>
-              </a:spcAft>
-            </a:pPr>
-            <a:r>
-              <a:rPr sz="2000" b="0" i="0">
-                <a:solidFill>
-                  <a:srgbClr val="333333"/>
-                </a:solidFill>
-                <a:latin typeface="Calibri"/>
-              </a:rPr>
-              <a:t>–   </a:t>
-            </a:r>
-            <a:r>
-              <a:rPr sz="2000" b="1" i="0">
-                <a:solidFill>
-                  <a:srgbClr val="333333"/>
-                </a:solidFill>
-                <a:latin typeface="Calibri"/>
-              </a:rPr>
-              <a:t>Objetivo:</a:t>
-            </a:r>
-            <a:r>
-              <a:rPr sz="2000" b="0" i="0">
-                <a:solidFill>
-                  <a:srgbClr val="333333"/>
-                </a:solidFill>
-                <a:latin typeface="Calibri"/>
-              </a:rPr>
-              <a:t> Caso real -&gt; 3 mejoras VetCare.</a:t>
-            </a:r>
-          </a:p>
-          <a:p>
-            <a:pPr>
-              <a:spcAft>
-                <a:spcPts val="800"/>
-              </a:spcAft>
-            </a:pPr>
-            <a:r>
-              <a:rPr sz="2000" b="0" i="0">
-                <a:solidFill>
-                  <a:srgbClr val="333333"/>
-                </a:solidFill>
-                <a:latin typeface="Calibri"/>
-              </a:rPr>
-              <a:t>–   </a:t>
-            </a:r>
-            <a:r>
-              <a:rPr sz="2000" b="1" i="0">
-                <a:solidFill>
-                  <a:srgbClr val="333333"/>
-                </a:solidFill>
-                <a:latin typeface="Calibri"/>
-              </a:rPr>
-              <a:t>Exito:</a:t>
-            </a:r>
-            <a:r>
-              <a:rPr sz="2000" b="0" i="0">
-                <a:solidFill>
-                  <a:srgbClr val="333333"/>
-                </a:solidFill>
-                <a:latin typeface="Calibri"/>
-              </a:rPr>
-              <a:t> Caso elegido.</a:t>
-            </a:r>
-          </a:p>
-          <a:p>
-            <a:pPr>
-              <a:spcAft>
-                <a:spcPts val="800"/>
-              </a:spcAft>
-            </a:pPr>
-            <a:r>
-              <a:rPr sz="2000" b="0" i="0">
-                <a:solidFill>
-                  <a:srgbClr val="333333"/>
-                </a:solidFill>
-                <a:latin typeface="Calibri"/>
-              </a:rPr>
-              <a:t>–   </a:t>
-            </a:r>
-            <a:r>
-              <a:rPr sz="2000" b="1" i="0">
-                <a:solidFill>
-                  <a:srgbClr val="333333"/>
-                </a:solidFill>
-                <a:latin typeface="Calibri"/>
-              </a:rPr>
-              <a:t>Exito:</a:t>
-            </a:r>
-            <a:r>
-              <a:rPr sz="2000" b="0" i="0">
-                <a:solidFill>
-                  <a:srgbClr val="333333"/>
-                </a:solidFill>
-                <a:latin typeface="Calibri"/>
-              </a:rPr>
-              <a:t> Resumen.</a:t>
-            </a:r>
-          </a:p>
-          <a:p>
-            <a:pPr>
-              <a:spcAft>
-                <a:spcPts val="800"/>
-              </a:spcAft>
-            </a:pPr>
-            <a:r>
-              <a:rPr sz="2000" b="0" i="0">
-                <a:solidFill>
-                  <a:srgbClr val="333333"/>
-                </a:solidFill>
-                <a:latin typeface="Calibri"/>
-              </a:rPr>
-              <a:t>–   </a:t>
-            </a:r>
-            <a:r>
-              <a:rPr sz="2000" b="1" i="0">
-                <a:solidFill>
-                  <a:srgbClr val="333333"/>
-                </a:solidFill>
-                <a:latin typeface="Calibri"/>
-              </a:rPr>
-              <a:t>Exito:</a:t>
-            </a:r>
-            <a:r>
-              <a:rPr sz="2000" b="0" i="0">
-                <a:solidFill>
-                  <a:srgbClr val="333333"/>
-                </a:solidFill>
-                <a:latin typeface="Calibri"/>
-              </a:rPr>
-              <a:t> 3 mejoras.</a:t>
-            </a:r>
-          </a:p>
-          <a:p>
-            <a:pPr>
-              <a:spcAft>
-                <a:spcPts val="800"/>
-              </a:spcAft>
-            </a:pPr>
-            <a:r>
-              <a:rPr sz="2000" b="0" i="0">
-                <a:solidFill>
-                  <a:srgbClr val="333333"/>
-                </a:solidFill>
-                <a:latin typeface="Calibri"/>
-              </a:rPr>
-              <a:t>–   </a:t>
-            </a:r>
-            <a:r>
-              <a:rPr sz="2000" b="1" i="0">
-                <a:solidFill>
-                  <a:srgbClr val="333333"/>
-                </a:solidFill>
-                <a:latin typeface="Calibri"/>
-              </a:rPr>
-              <a:t>Exito:</a:t>
-            </a:r>
-            <a:r>
-              <a:rPr sz="2000" b="0" i="0">
-                <a:solidFill>
-                  <a:srgbClr val="333333"/>
-                </a:solidFill>
-                <a:latin typeface="Calibri"/>
-              </a:rPr>
-              <a:t> Informe.</a:t>
-            </a:r>
-          </a:p>
-          <a:p>
-            <a:pPr>
-              <a:spcAft>
-                <a:spcPts val="800"/>
-              </a:spcAft>
-            </a:pPr>
-            <a:r>
-              <a:rPr sz="2000" b="0" i="0">
-                <a:solidFill>
-                  <a:srgbClr val="333333"/>
-                </a:solidFill>
-                <a:latin typeface="Calibri"/>
-              </a:rPr>
-              <a:t>–   </a:t>
-            </a:r>
-            <a:r>
-              <a:rPr sz="2000" b="1" i="0">
-                <a:solidFill>
-                  <a:srgbClr val="333333"/>
-                </a:solidFill>
-                <a:latin typeface="Calibri"/>
-              </a:rPr>
-              <a:t>Exito:</a:t>
-            </a:r>
-            <a:r>
-              <a:rPr sz="2000" b="0" i="0">
-                <a:solidFill>
-                  <a:srgbClr val="333333"/>
-                </a:solidFill>
-                <a:latin typeface="Calibri"/>
-              </a:rPr>
-              <a:t> en la fecha que indique el docente.</a:t>
-            </a:r>
-          </a:p>
-        </p:txBody>
-      </p:sp>
-      <p:sp>
-        <p:nvSpPr>
-          <p:cNvPr id="6" name="TextBox 5"/>
-          <p:cNvSpPr txBox="1"/>
-          <p:nvPr/>
-        </p:nvSpPr>
-        <p:spPr>
-          <a:xfrm>
-            <a:off x="11185855" y="6473952"/>
-            <a:ext cx="640080" cy="274320"/>
-          </a:xfrm>
-          <a:prstGeom prst="rect">
-            <a:avLst/>
-          </a:prstGeom>
-          <a:noFill/>
-        </p:spPr>
-        <p:txBody>
-          <a:bodyPr wrap="square">
-            <a:spAutoFit/>
-          </a:bodyPr>
-          <a:lstStyle/>
-          <a:p>
-            <a:pPr algn="r"/>
-            <a:r>
-              <a:rPr sz="1100" b="0" i="0">
-                <a:solidFill>
-                  <a:srgbClr val="666666"/>
-                </a:solidFill>
-                <a:latin typeface="Calibri"/>
-              </a:rPr>
-              <a:t>23</a:t>
-            </a:r>
-          </a:p>
-        </p:txBody>
-      </p:sp>
-    </p:spTree>
-  </p:cSld>
-  <p:clrMapOvr>
-    <a:masterClrMapping/>
-  </p:clrMapOvr>
-</p:sld>
-</file>
-
-<file path=ppt/slides/slide24.xml><?xml version="1.0" encoding="utf-8"?>
-<p:sld xmlns:a="http://schemas.openxmlformats.org/drawingml/2006/main" xmlns:p="http://schemas.openxmlformats.org/presentationml/2006/main" xmlns:r="http://schemas.openxmlformats.org/officeDocument/2006/relationships">
-  <p:cSld>
-    <p:bg>
-      <p:bgPr>
-        <a:solidFill>
-          <a:srgbClr val="FFFFFF"/>
-        </a:solidFill>
-        <a:effectLst/>
-      </p:bgPr>
-    </p:bg>
-    <p:spTree>
-      <p:nvGrpSpPr>
-        <p:cNvPr id="1" name=""/>
-        <p:cNvGrpSpPr/>
-        <p:nvPr/>
-      </p:nvGrpSpPr>
-      <p:grpSpPr/>
-      <p:sp>
-        <p:nvSpPr>
-          <p:cNvPr id="2" name="Rectangle 1"/>
-          <p:cNvSpPr/>
-          <p:nvPr/>
-        </p:nvSpPr>
-        <p:spPr>
-          <a:xfrm>
-            <a:off x="0" y="0"/>
-            <a:ext cx="12191695" cy="960120"/>
-          </a:xfrm>
-          <a:prstGeom prst="rect">
-            <a:avLst/>
-          </a:prstGeom>
-          <a:solidFill>
-            <a:srgbClr val="095292"/>
-          </a:solidFill>
-          <a:ln>
-            <a:noFill/>
-          </a:ln>
-        </p:spPr>
-        <p:style>
-          <a:lnRef idx="1">
-            <a:schemeClr val="accent1"/>
-          </a:lnRef>
-          <a:fillRef idx="3">
-            <a:schemeClr val="accent1"/>
-          </a:fillRef>
-          <a:effectRef idx="2">
-            <a:schemeClr val="accent1"/>
-          </a:effectRef>
-          <a:fontRef idx="minor">
-            <a:schemeClr val="lt1"/>
-          </a:fontRef>
-        </p:style>
-        <p:txBody>
-          <a:bodyPr rtlCol="0" anchor="ctr"/>
-          <a:lstStyle/>
-          <a:p>
-            <a:pPr algn="ctr"/>
-          </a:p>
-        </p:txBody>
-      </p:sp>
-      <p:sp>
-        <p:nvSpPr>
-          <p:cNvPr id="3" name="Rectangle 2"/>
-          <p:cNvSpPr/>
-          <p:nvPr/>
-        </p:nvSpPr>
-        <p:spPr>
-          <a:xfrm>
-            <a:off x="0" y="960120"/>
-            <a:ext cx="12191695" cy="41148"/>
-          </a:xfrm>
-          <a:prstGeom prst="rect">
-            <a:avLst/>
-          </a:prstGeom>
-          <a:solidFill>
-            <a:srgbClr val="FFD000"/>
-          </a:solidFill>
-          <a:ln>
-            <a:noFill/>
-          </a:ln>
-        </p:spPr>
-        <p:style>
-          <a:lnRef idx="1">
-            <a:schemeClr val="accent1"/>
-          </a:lnRef>
-          <a:fillRef idx="3">
-            <a:schemeClr val="accent1"/>
-          </a:fillRef>
-          <a:effectRef idx="2">
-            <a:schemeClr val="accent1"/>
-          </a:effectRef>
-          <a:fontRef idx="minor">
-            <a:schemeClr val="lt1"/>
-          </a:fontRef>
-        </p:style>
-        <p:txBody>
-          <a:bodyPr rtlCol="0" anchor="ctr"/>
-          <a:lstStyle/>
-          <a:p>
-            <a:pPr algn="ctr"/>
-          </a:p>
-        </p:txBody>
-      </p:sp>
-      <p:sp>
-        <p:nvSpPr>
-          <p:cNvPr id="4" name="TextBox 3"/>
-          <p:cNvSpPr txBox="1"/>
-          <p:nvPr/>
-        </p:nvSpPr>
-        <p:spPr>
-          <a:xfrm>
-            <a:off x="457200" y="164592"/>
-            <a:ext cx="11277295" cy="502920"/>
-          </a:xfrm>
-          <a:prstGeom prst="rect">
-            <a:avLst/>
-          </a:prstGeom>
-          <a:noFill/>
-        </p:spPr>
-        <p:txBody>
-          <a:bodyPr wrap="square">
-            <a:spAutoFit/>
-          </a:bodyPr>
-          <a:lstStyle/>
-          <a:p>
-            <a:r>
-              <a:rPr sz="2600" b="1" i="0">
-                <a:solidFill>
-                  <a:srgbClr val="FFFFFF"/>
-                </a:solidFill>
-                <a:latin typeface="Calibri"/>
-              </a:rPr>
-              <a:t>Actividad autonoma — escenario / datos de partida</a:t>
-            </a:r>
-          </a:p>
-        </p:txBody>
-      </p:sp>
-      <p:sp>
-        <p:nvSpPr>
-          <p:cNvPr id="5" name="TextBox 4"/>
-          <p:cNvSpPr txBox="1"/>
-          <p:nvPr/>
-        </p:nvSpPr>
-        <p:spPr>
-          <a:xfrm>
-            <a:off x="457200" y="1170432"/>
-            <a:ext cx="11277295" cy="5230368"/>
-          </a:xfrm>
-          <a:prstGeom prst="rect">
-            <a:avLst/>
-          </a:prstGeom>
-          <a:noFill/>
-        </p:spPr>
-        <p:txBody>
-          <a:bodyPr wrap="square">
-            <a:spAutoFit/>
-          </a:bodyPr>
-          <a:lstStyle/>
-          <a:p>
-            <a:pPr>
-              <a:spcAft>
-                <a:spcPts val="800"/>
-              </a:spcAft>
-            </a:pPr>
-            <a:r>
-              <a:rPr sz="2000" b="0" i="0">
-                <a:solidFill>
-                  <a:srgbClr val="333333"/>
-                </a:solidFill>
-                <a:latin typeface="Calibri"/>
-              </a:rPr>
-              <a:t>–   Plantilla: contexto-&gt;fallo-&gt;lección-&gt;cambio.</a:t>
-            </a:r>
-          </a:p>
-        </p:txBody>
-      </p:sp>
-      <p:sp>
-        <p:nvSpPr>
-          <p:cNvPr id="6" name="TextBox 5"/>
-          <p:cNvSpPr txBox="1"/>
-          <p:nvPr/>
-        </p:nvSpPr>
-        <p:spPr>
-          <a:xfrm>
-            <a:off x="11185855" y="6473952"/>
-            <a:ext cx="640080" cy="274320"/>
-          </a:xfrm>
-          <a:prstGeom prst="rect">
-            <a:avLst/>
-          </a:prstGeom>
-          <a:noFill/>
-        </p:spPr>
-        <p:txBody>
-          <a:bodyPr wrap="square">
-            <a:spAutoFit/>
-          </a:bodyPr>
-          <a:lstStyle/>
-          <a:p>
-            <a:pPr algn="r"/>
-            <a:r>
-              <a:rPr sz="1100" b="0" i="0">
-                <a:solidFill>
-                  <a:srgbClr val="666666"/>
-                </a:solidFill>
-                <a:latin typeface="Calibri"/>
-              </a:rPr>
-              <a:t>24</a:t>
-            </a:r>
-          </a:p>
-        </p:txBody>
-      </p:sp>
-    </p:spTree>
-  </p:cSld>
-  <p:clrMapOvr>
-    <a:masterClrMapping/>
-  </p:clrMapOvr>
-</p:sld>
-</file>
-
-<file path=ppt/slides/slide25.xml><?xml version="1.0" encoding="utf-8"?>
-<p:sld xmlns:a="http://schemas.openxmlformats.org/drawingml/2006/main" xmlns:p="http://schemas.openxmlformats.org/presentationml/2006/main" xmlns:r="http://schemas.openxmlformats.org/officeDocument/2006/relationships">
-  <p:cSld>
-    <p:bg>
-      <p:bgPr>
-        <a:solidFill>
-          <a:srgbClr val="FFFFFF"/>
-        </a:solidFill>
-        <a:effectLst/>
-      </p:bgPr>
-    </p:bg>
-    <p:spTree>
-      <p:nvGrpSpPr>
-        <p:cNvPr id="1" name=""/>
-        <p:cNvGrpSpPr/>
-        <p:nvPr/>
-      </p:nvGrpSpPr>
-      <p:grpSpPr/>
-      <p:sp>
-        <p:nvSpPr>
-          <p:cNvPr id="2" name="Rectangle 1"/>
-          <p:cNvSpPr/>
-          <p:nvPr/>
-        </p:nvSpPr>
-        <p:spPr>
-          <a:xfrm>
-            <a:off x="0" y="0"/>
-            <a:ext cx="12191695" cy="960120"/>
-          </a:xfrm>
-          <a:prstGeom prst="rect">
-            <a:avLst/>
-          </a:prstGeom>
-          <a:solidFill>
-            <a:srgbClr val="095292"/>
-          </a:solidFill>
-          <a:ln>
-            <a:noFill/>
-          </a:ln>
-        </p:spPr>
-        <p:style>
-          <a:lnRef idx="1">
-            <a:schemeClr val="accent1"/>
-          </a:lnRef>
-          <a:fillRef idx="3">
-            <a:schemeClr val="accent1"/>
-          </a:fillRef>
-          <a:effectRef idx="2">
-            <a:schemeClr val="accent1"/>
-          </a:effectRef>
-          <a:fontRef idx="minor">
-            <a:schemeClr val="lt1"/>
-          </a:fontRef>
-        </p:style>
-        <p:txBody>
-          <a:bodyPr rtlCol="0" anchor="ctr"/>
-          <a:lstStyle/>
-          <a:p>
-            <a:pPr algn="ctr"/>
-          </a:p>
-        </p:txBody>
-      </p:sp>
-      <p:sp>
-        <p:nvSpPr>
-          <p:cNvPr id="3" name="Rectangle 2"/>
-          <p:cNvSpPr/>
-          <p:nvPr/>
-        </p:nvSpPr>
-        <p:spPr>
-          <a:xfrm>
-            <a:off x="0" y="960120"/>
-            <a:ext cx="12191695" cy="41148"/>
-          </a:xfrm>
-          <a:prstGeom prst="rect">
-            <a:avLst/>
-          </a:prstGeom>
-          <a:solidFill>
-            <a:srgbClr val="FFD000"/>
-          </a:solidFill>
-          <a:ln>
-            <a:noFill/>
-          </a:ln>
-        </p:spPr>
-        <p:style>
-          <a:lnRef idx="1">
-            <a:schemeClr val="accent1"/>
-          </a:lnRef>
-          <a:fillRef idx="3">
-            <a:schemeClr val="accent1"/>
-          </a:fillRef>
-          <a:effectRef idx="2">
-            <a:schemeClr val="accent1"/>
-          </a:effectRef>
-          <a:fontRef idx="minor">
-            <a:schemeClr val="lt1"/>
-          </a:fontRef>
-        </p:style>
-        <p:txBody>
-          <a:bodyPr rtlCol="0" anchor="ctr"/>
-          <a:lstStyle/>
-          <a:p>
-            <a:pPr algn="ctr"/>
-          </a:p>
-        </p:txBody>
-      </p:sp>
-      <p:sp>
-        <p:nvSpPr>
-          <p:cNvPr id="4" name="TextBox 3"/>
-          <p:cNvSpPr txBox="1"/>
-          <p:nvPr/>
-        </p:nvSpPr>
-        <p:spPr>
-          <a:xfrm>
-            <a:off x="457200" y="164592"/>
-            <a:ext cx="11277295" cy="502920"/>
-          </a:xfrm>
-          <a:prstGeom prst="rect">
-            <a:avLst/>
-          </a:prstGeom>
-          <a:noFill/>
-        </p:spPr>
-        <p:txBody>
-          <a:bodyPr wrap="square">
-            <a:spAutoFit/>
-          </a:bodyPr>
-          <a:lstStyle/>
-          <a:p>
-            <a:r>
-              <a:rPr sz="2600" b="1" i="0">
-                <a:solidFill>
-                  <a:srgbClr val="FFFFFF"/>
-                </a:solidFill>
-                <a:latin typeface="Calibri"/>
-              </a:rPr>
-              <a:t>Actividad autonoma — pasos guiados</a:t>
-            </a:r>
-          </a:p>
-        </p:txBody>
-      </p:sp>
-      <p:sp>
-        <p:nvSpPr>
-          <p:cNvPr id="5" name="Rounded Rectangle 4"/>
-          <p:cNvSpPr/>
-          <p:nvPr/>
-        </p:nvSpPr>
-        <p:spPr>
-          <a:xfrm>
-            <a:off x="457200" y="1554480"/>
-            <a:ext cx="11277295" cy="1051560"/>
-          </a:xfrm>
-          <a:prstGeom prst="roundRect">
-            <a:avLst>
-              <a:gd name="adj" fmla="val 12000"/>
-            </a:avLst>
-          </a:prstGeom>
-          <a:solidFill>
-            <a:srgbClr val="F2F2F2"/>
-          </a:solidFill>
-          <a:ln>
-            <a:noFill/>
-          </a:ln>
-        </p:spPr>
-        <p:style>
-          <a:lnRef idx="1">
-            <a:schemeClr val="accent1"/>
-          </a:lnRef>
-          <a:fillRef idx="3">
-            <a:schemeClr val="accent1"/>
-          </a:fillRef>
-          <a:effectRef idx="2">
-            <a:schemeClr val="accent1"/>
-          </a:effectRef>
-          <a:fontRef idx="minor">
-            <a:schemeClr val="lt1"/>
-          </a:fontRef>
-        </p:style>
-        <p:txBody>
-          <a:bodyPr rtlCol="0" anchor="ctr"/>
-          <a:lstStyle/>
-          <a:p>
-            <a:pPr algn="ctr"/>
-          </a:p>
-        </p:txBody>
-      </p:sp>
-      <p:sp>
-        <p:nvSpPr>
-          <p:cNvPr id="6" name="Rounded Rectangle 5"/>
-          <p:cNvSpPr/>
-          <p:nvPr/>
-        </p:nvSpPr>
-        <p:spPr>
-          <a:xfrm>
-            <a:off x="594360" y="1860804"/>
-            <a:ext cx="438912" cy="438912"/>
-          </a:xfrm>
-          <a:prstGeom prst="roundRect">
-            <a:avLst>
-              <a:gd name="adj" fmla="val 12000"/>
-            </a:avLst>
-          </a:prstGeom>
-          <a:solidFill>
-            <a:srgbClr val="095292"/>
-          </a:solidFill>
-          <a:ln>
-            <a:noFill/>
-          </a:ln>
-        </p:spPr>
-        <p:style>
-          <a:lnRef idx="1">
-            <a:schemeClr val="accent1"/>
-          </a:lnRef>
-          <a:fillRef idx="3">
-            <a:schemeClr val="accent1"/>
-          </a:fillRef>
-          <a:effectRef idx="2">
-            <a:schemeClr val="accent1"/>
-          </a:effectRef>
-          <a:fontRef idx="minor">
-            <a:schemeClr val="lt1"/>
-          </a:fontRef>
-        </p:style>
-        <p:txBody>
-          <a:bodyPr rtlCol="0" anchor="ctr"/>
-          <a:lstStyle/>
-          <a:p>
-            <a:pPr algn="ctr"/>
-          </a:p>
-        </p:txBody>
-      </p:sp>
-      <p:sp>
-        <p:nvSpPr>
-          <p:cNvPr id="7" name="TextBox 6"/>
-          <p:cNvSpPr txBox="1"/>
-          <p:nvPr/>
-        </p:nvSpPr>
-        <p:spPr>
-          <a:xfrm>
-            <a:off x="594360" y="1860804"/>
-            <a:ext cx="438912" cy="438912"/>
-          </a:xfrm>
-          <a:prstGeom prst="rect">
-            <a:avLst/>
-          </a:prstGeom>
-          <a:noFill/>
-        </p:spPr>
-        <p:txBody>
-          <a:bodyPr wrap="square" anchor="ctr"/>
-          <a:lstStyle/>
-          <a:p>
-            <a:pPr algn="ctr"/>
-            <a:r>
-              <a:rPr sz="1600" b="1" i="0">
-                <a:solidFill>
-                  <a:srgbClr val="FFFFFF"/>
-                </a:solidFill>
-                <a:latin typeface="Calibri"/>
-              </a:rPr>
-              <a:t>1</a:t>
-            </a:r>
-          </a:p>
-        </p:txBody>
-      </p:sp>
-      <p:sp>
-        <p:nvSpPr>
-          <p:cNvPr id="8" name="TextBox 7"/>
-          <p:cNvSpPr txBox="1"/>
-          <p:nvPr/>
-        </p:nvSpPr>
-        <p:spPr>
-          <a:xfrm>
-            <a:off x="1188720" y="1645920"/>
-            <a:ext cx="10271455" cy="886968"/>
-          </a:xfrm>
-          <a:prstGeom prst="rect">
-            <a:avLst/>
-          </a:prstGeom>
-          <a:noFill/>
-        </p:spPr>
-        <p:txBody>
-          <a:bodyPr wrap="square" anchor="ctr"/>
-          <a:lstStyle/>
-          <a:p>
-            <a:r>
-              <a:rPr sz="1500" b="1" i="0">
-                <a:solidFill>
-                  <a:srgbClr val="095292"/>
-                </a:solidFill>
-                <a:latin typeface="Calibri"/>
-              </a:rPr>
-              <a:t>Elegir 1 caso (backup, rendimiento o seguridad).</a:t>
-            </a:r>
-          </a:p>
-        </p:txBody>
-      </p:sp>
-      <p:sp>
-        <p:nvSpPr>
-          <p:cNvPr id="9" name="Rounded Rectangle 8"/>
-          <p:cNvSpPr/>
-          <p:nvPr/>
-        </p:nvSpPr>
-        <p:spPr>
-          <a:xfrm>
-            <a:off x="457200" y="2697480"/>
-            <a:ext cx="11277295" cy="1051560"/>
-          </a:xfrm>
-          <a:prstGeom prst="roundRect">
-            <a:avLst>
-              <a:gd name="adj" fmla="val 12000"/>
-            </a:avLst>
-          </a:prstGeom>
-          <a:solidFill>
-            <a:srgbClr val="E8F4FA"/>
-          </a:solidFill>
-          <a:ln>
-            <a:noFill/>
-          </a:ln>
-        </p:spPr>
-        <p:style>
-          <a:lnRef idx="1">
-            <a:schemeClr val="accent1"/>
-          </a:lnRef>
-          <a:fillRef idx="3">
-            <a:schemeClr val="accent1"/>
-          </a:fillRef>
-          <a:effectRef idx="2">
-            <a:schemeClr val="accent1"/>
-          </a:effectRef>
-          <a:fontRef idx="minor">
-            <a:schemeClr val="lt1"/>
-          </a:fontRef>
-        </p:style>
-        <p:txBody>
-          <a:bodyPr rtlCol="0" anchor="ctr"/>
-          <a:lstStyle/>
-          <a:p>
-            <a:pPr algn="ctr"/>
-          </a:p>
-        </p:txBody>
-      </p:sp>
-      <p:sp>
-        <p:nvSpPr>
-          <p:cNvPr id="10" name="Rounded Rectangle 9"/>
-          <p:cNvSpPr/>
-          <p:nvPr/>
-        </p:nvSpPr>
-        <p:spPr>
-          <a:xfrm>
-            <a:off x="594360" y="3003804"/>
-            <a:ext cx="438912" cy="438912"/>
-          </a:xfrm>
-          <a:prstGeom prst="roundRect">
-            <a:avLst>
-              <a:gd name="adj" fmla="val 12000"/>
-            </a:avLst>
-          </a:prstGeom>
-          <a:solidFill>
-            <a:srgbClr val="095292"/>
-          </a:solidFill>
-          <a:ln>
-            <a:noFill/>
-          </a:ln>
-        </p:spPr>
-        <p:style>
-          <a:lnRef idx="1">
-            <a:schemeClr val="accent1"/>
-          </a:lnRef>
-          <a:fillRef idx="3">
-            <a:schemeClr val="accent1"/>
-          </a:fillRef>
-          <a:effectRef idx="2">
-            <a:schemeClr val="accent1"/>
-          </a:effectRef>
-          <a:fontRef idx="minor">
-            <a:schemeClr val="lt1"/>
-          </a:fontRef>
-        </p:style>
-        <p:txBody>
-          <a:bodyPr rtlCol="0" anchor="ctr"/>
-          <a:lstStyle/>
-          <a:p>
-            <a:pPr algn="ctr"/>
-          </a:p>
-        </p:txBody>
-      </p:sp>
-      <p:sp>
-        <p:nvSpPr>
-          <p:cNvPr id="11" name="TextBox 10"/>
-          <p:cNvSpPr txBox="1"/>
-          <p:nvPr/>
-        </p:nvSpPr>
-        <p:spPr>
-          <a:xfrm>
-            <a:off x="594360" y="3003804"/>
-            <a:ext cx="438912" cy="438912"/>
-          </a:xfrm>
-          <a:prstGeom prst="rect">
-            <a:avLst/>
-          </a:prstGeom>
-          <a:noFill/>
-        </p:spPr>
-        <p:txBody>
-          <a:bodyPr wrap="square" anchor="ctr"/>
-          <a:lstStyle/>
-          <a:p>
-            <a:pPr algn="ctr"/>
-            <a:r>
-              <a:rPr sz="1600" b="1" i="0">
-                <a:solidFill>
-                  <a:srgbClr val="FFFFFF"/>
-                </a:solidFill>
-                <a:latin typeface="Calibri"/>
-              </a:rPr>
-              <a:t>2</a:t>
-            </a:r>
-          </a:p>
-        </p:txBody>
-      </p:sp>
-      <p:sp>
-        <p:nvSpPr>
-          <p:cNvPr id="12" name="TextBox 11"/>
-          <p:cNvSpPr txBox="1"/>
-          <p:nvPr/>
-        </p:nvSpPr>
-        <p:spPr>
-          <a:xfrm>
-            <a:off x="1188720" y="2788920"/>
-            <a:ext cx="10271455" cy="886968"/>
-          </a:xfrm>
-          <a:prstGeom prst="rect">
-            <a:avLst/>
-          </a:prstGeom>
-          <a:noFill/>
-        </p:spPr>
-        <p:txBody>
-          <a:bodyPr wrap="square" anchor="ctr"/>
-          <a:lstStyle/>
-          <a:p>
-            <a:r>
-              <a:rPr sz="1500" b="1" i="0">
-                <a:solidFill>
-                  <a:srgbClr val="095292"/>
-                </a:solidFill>
-                <a:latin typeface="Calibri"/>
-              </a:rPr>
-              <a:t>Resumir en media pagina que paso.</a:t>
-            </a:r>
-          </a:p>
-        </p:txBody>
-      </p:sp>
-      <p:sp>
-        <p:nvSpPr>
-          <p:cNvPr id="13" name="Rounded Rectangle 12"/>
-          <p:cNvSpPr/>
-          <p:nvPr/>
-        </p:nvSpPr>
-        <p:spPr>
-          <a:xfrm>
-            <a:off x="457200" y="3840480"/>
-            <a:ext cx="11277295" cy="1051560"/>
-          </a:xfrm>
-          <a:prstGeom prst="roundRect">
-            <a:avLst>
-              <a:gd name="adj" fmla="val 12000"/>
-            </a:avLst>
-          </a:prstGeom>
-          <a:solidFill>
-            <a:srgbClr val="F2F2F2"/>
-          </a:solidFill>
-          <a:ln>
-            <a:noFill/>
-          </a:ln>
-        </p:spPr>
-        <p:style>
-          <a:lnRef idx="1">
-            <a:schemeClr val="accent1"/>
-          </a:lnRef>
-          <a:fillRef idx="3">
-            <a:schemeClr val="accent1"/>
-          </a:fillRef>
-          <a:effectRef idx="2">
-            <a:schemeClr val="accent1"/>
-          </a:effectRef>
-          <a:fontRef idx="minor">
-            <a:schemeClr val="lt1"/>
-          </a:fontRef>
-        </p:style>
-        <p:txBody>
-          <a:bodyPr rtlCol="0" anchor="ctr"/>
-          <a:lstStyle/>
-          <a:p>
-            <a:pPr algn="ctr"/>
-          </a:p>
-        </p:txBody>
-      </p:sp>
-      <p:sp>
-        <p:nvSpPr>
-          <p:cNvPr id="14" name="Rounded Rectangle 13"/>
-          <p:cNvSpPr/>
-          <p:nvPr/>
-        </p:nvSpPr>
-        <p:spPr>
-          <a:xfrm>
-            <a:off x="594360" y="4146804"/>
-            <a:ext cx="438912" cy="438912"/>
-          </a:xfrm>
-          <a:prstGeom prst="roundRect">
-            <a:avLst>
-              <a:gd name="adj" fmla="val 12000"/>
-            </a:avLst>
-          </a:prstGeom>
-          <a:solidFill>
-            <a:srgbClr val="095292"/>
-          </a:solidFill>
-          <a:ln>
-            <a:noFill/>
-          </a:ln>
-        </p:spPr>
-        <p:style>
-          <a:lnRef idx="1">
-            <a:schemeClr val="accent1"/>
-          </a:lnRef>
-          <a:fillRef idx="3">
-            <a:schemeClr val="accent1"/>
-          </a:fillRef>
-          <a:effectRef idx="2">
-            <a:schemeClr val="accent1"/>
-          </a:effectRef>
-          <a:fontRef idx="minor">
-            <a:schemeClr val="lt1"/>
-          </a:fontRef>
-        </p:style>
-        <p:txBody>
-          <a:bodyPr rtlCol="0" anchor="ctr"/>
-          <a:lstStyle/>
-          <a:p>
-            <a:pPr algn="ctr"/>
-          </a:p>
-        </p:txBody>
-      </p:sp>
-      <p:sp>
-        <p:nvSpPr>
-          <p:cNvPr id="15" name="TextBox 14"/>
-          <p:cNvSpPr txBox="1"/>
-          <p:nvPr/>
-        </p:nvSpPr>
-        <p:spPr>
-          <a:xfrm>
-            <a:off x="594360" y="4146804"/>
-            <a:ext cx="438912" cy="438912"/>
-          </a:xfrm>
-          <a:prstGeom prst="rect">
-            <a:avLst/>
-          </a:prstGeom>
-          <a:noFill/>
-        </p:spPr>
-        <p:txBody>
-          <a:bodyPr wrap="square" anchor="ctr"/>
-          <a:lstStyle/>
-          <a:p>
-            <a:pPr algn="ctr"/>
-            <a:r>
-              <a:rPr sz="1600" b="1" i="0">
-                <a:solidFill>
-                  <a:srgbClr val="FFFFFF"/>
-                </a:solidFill>
-                <a:latin typeface="Calibri"/>
-              </a:rPr>
-              <a:t>3</a:t>
-            </a:r>
-          </a:p>
-        </p:txBody>
-      </p:sp>
-      <p:sp>
-        <p:nvSpPr>
-          <p:cNvPr id="16" name="TextBox 15"/>
-          <p:cNvSpPr txBox="1"/>
-          <p:nvPr/>
-        </p:nvSpPr>
-        <p:spPr>
-          <a:xfrm>
-            <a:off x="1188720" y="3931920"/>
-            <a:ext cx="10271455" cy="886968"/>
-          </a:xfrm>
-          <a:prstGeom prst="rect">
-            <a:avLst/>
-          </a:prstGeom>
-          <a:noFill/>
-        </p:spPr>
-        <p:txBody>
-          <a:bodyPr wrap="square" anchor="ctr"/>
-          <a:lstStyle/>
-          <a:p>
-            <a:r>
-              <a:rPr sz="1500" b="1" i="0">
-                <a:solidFill>
-                  <a:srgbClr val="095292"/>
-                </a:solidFill>
-                <a:latin typeface="Calibri"/>
-              </a:rPr>
-              <a:t>Proponer 3 mejoras concretas a su VetCare.</a:t>
-            </a:r>
-          </a:p>
-        </p:txBody>
-      </p:sp>
-      <p:sp>
-        <p:nvSpPr>
-          <p:cNvPr id="17" name="Rounded Rectangle 16"/>
-          <p:cNvSpPr/>
-          <p:nvPr/>
-        </p:nvSpPr>
-        <p:spPr>
-          <a:xfrm>
-            <a:off x="457200" y="4983480"/>
-            <a:ext cx="11277295" cy="1051560"/>
-          </a:xfrm>
-          <a:prstGeom prst="roundRect">
-            <a:avLst>
-              <a:gd name="adj" fmla="val 12000"/>
-            </a:avLst>
-          </a:prstGeom>
-          <a:solidFill>
-            <a:srgbClr val="E8F4FA"/>
-          </a:solidFill>
-          <a:ln>
-            <a:noFill/>
-          </a:ln>
-        </p:spPr>
-        <p:style>
-          <a:lnRef idx="1">
-            <a:schemeClr val="accent1"/>
-          </a:lnRef>
-          <a:fillRef idx="3">
-            <a:schemeClr val="accent1"/>
-          </a:fillRef>
-          <a:effectRef idx="2">
-            <a:schemeClr val="accent1"/>
-          </a:effectRef>
-          <a:fontRef idx="minor">
-            <a:schemeClr val="lt1"/>
-          </a:fontRef>
-        </p:style>
-        <p:txBody>
-          <a:bodyPr rtlCol="0" anchor="ctr"/>
-          <a:lstStyle/>
-          <a:p>
-            <a:pPr algn="ctr"/>
-          </a:p>
-        </p:txBody>
-      </p:sp>
-      <p:sp>
-        <p:nvSpPr>
-          <p:cNvPr id="18" name="Rounded Rectangle 17"/>
-          <p:cNvSpPr/>
-          <p:nvPr/>
-        </p:nvSpPr>
-        <p:spPr>
-          <a:xfrm>
-            <a:off x="594360" y="5289804"/>
-            <a:ext cx="438912" cy="438912"/>
-          </a:xfrm>
-          <a:prstGeom prst="roundRect">
-            <a:avLst>
-              <a:gd name="adj" fmla="val 12000"/>
-            </a:avLst>
-          </a:prstGeom>
-          <a:solidFill>
-            <a:srgbClr val="095292"/>
-          </a:solidFill>
-          <a:ln>
-            <a:noFill/>
-          </a:ln>
-        </p:spPr>
-        <p:style>
-          <a:lnRef idx="1">
-            <a:schemeClr val="accent1"/>
-          </a:lnRef>
-          <a:fillRef idx="3">
-            <a:schemeClr val="accent1"/>
-          </a:fillRef>
-          <a:effectRef idx="2">
-            <a:schemeClr val="accent1"/>
-          </a:effectRef>
-          <a:fontRef idx="minor">
-            <a:schemeClr val="lt1"/>
-          </a:fontRef>
-        </p:style>
-        <p:txBody>
-          <a:bodyPr rtlCol="0" anchor="ctr"/>
-          <a:lstStyle/>
-          <a:p>
-            <a:pPr algn="ctr"/>
-          </a:p>
-        </p:txBody>
-      </p:sp>
-      <p:sp>
-        <p:nvSpPr>
-          <p:cNvPr id="19" name="TextBox 18"/>
-          <p:cNvSpPr txBox="1"/>
-          <p:nvPr/>
-        </p:nvSpPr>
-        <p:spPr>
-          <a:xfrm>
-            <a:off x="594360" y="5289804"/>
-            <a:ext cx="438912" cy="438912"/>
-          </a:xfrm>
-          <a:prstGeom prst="rect">
-            <a:avLst/>
-          </a:prstGeom>
-          <a:noFill/>
-        </p:spPr>
-        <p:txBody>
-          <a:bodyPr wrap="square" anchor="ctr"/>
-          <a:lstStyle/>
-          <a:p>
-            <a:pPr algn="ctr"/>
-            <a:r>
-              <a:rPr sz="1600" b="1" i="0">
-                <a:solidFill>
-                  <a:srgbClr val="FFFFFF"/>
-                </a:solidFill>
-                <a:latin typeface="Calibri"/>
-              </a:rPr>
-              <a:t>4</a:t>
-            </a:r>
-          </a:p>
-        </p:txBody>
-      </p:sp>
-      <p:sp>
-        <p:nvSpPr>
-          <p:cNvPr id="20" name="TextBox 19"/>
-          <p:cNvSpPr txBox="1"/>
-          <p:nvPr/>
-        </p:nvSpPr>
-        <p:spPr>
-          <a:xfrm>
-            <a:off x="1188720" y="5074920"/>
-            <a:ext cx="10271455" cy="886968"/>
-          </a:xfrm>
-          <a:prstGeom prst="rect">
-            <a:avLst/>
-          </a:prstGeom>
-          <a:noFill/>
-        </p:spPr>
-        <p:txBody>
-          <a:bodyPr wrap="square" anchor="ctr"/>
-          <a:lstStyle/>
-          <a:p>
-            <a:r>
-              <a:rPr sz="1500" b="1" i="0">
-                <a:solidFill>
-                  <a:srgbClr val="095292"/>
-                </a:solidFill>
-                <a:latin typeface="Calibri"/>
-              </a:rPr>
-              <a:t>Actualizar informe PI con lecciones de casos.</a:t>
-            </a:r>
-          </a:p>
-        </p:txBody>
-      </p:sp>
-      <p:sp>
-        <p:nvSpPr>
-          <p:cNvPr id="21" name="TextBox 20"/>
-          <p:cNvSpPr txBox="1"/>
-          <p:nvPr/>
-        </p:nvSpPr>
-        <p:spPr>
-          <a:xfrm>
-            <a:off x="11185855" y="6473952"/>
-            <a:ext cx="640080" cy="274320"/>
-          </a:xfrm>
-          <a:prstGeom prst="rect">
-            <a:avLst/>
-          </a:prstGeom>
-          <a:noFill/>
-        </p:spPr>
-        <p:txBody>
-          <a:bodyPr wrap="square">
-            <a:spAutoFit/>
-          </a:bodyPr>
-          <a:lstStyle/>
-          <a:p>
-            <a:pPr algn="r"/>
-            <a:r>
-              <a:rPr sz="1100" b="0" i="0">
-                <a:solidFill>
-                  <a:srgbClr val="666666"/>
-                </a:solidFill>
-                <a:latin typeface="Calibri"/>
-              </a:rPr>
-              <a:t>25</a:t>
-            </a:r>
-          </a:p>
-        </p:txBody>
-      </p:sp>
-    </p:spTree>
-  </p:cSld>
-  <p:clrMapOvr>
-    <a:masterClrMapping/>
-  </p:clrMapOvr>
-</p:sld>
-</file>
-
-<file path=ppt/slides/slide26.xml><?xml version="1.0" encoding="utf-8"?>
-<p:sld xmlns:a="http://schemas.openxmlformats.org/drawingml/2006/main" xmlns:p="http://schemas.openxmlformats.org/presentationml/2006/main" xmlns:r="http://schemas.openxmlformats.org/officeDocument/2006/relationships">
-  <p:cSld>
-    <p:bg>
-      <p:bgPr>
-        <a:solidFill>
-          <a:srgbClr val="FFFFFF"/>
-        </a:solidFill>
-        <a:effectLst/>
-      </p:bgPr>
-    </p:bg>
-    <p:spTree>
-      <p:nvGrpSpPr>
-        <p:cNvPr id="1" name=""/>
-        <p:cNvGrpSpPr/>
-        <p:nvPr/>
-      </p:nvGrpSpPr>
-      <p:grpSpPr/>
-      <p:sp>
-        <p:nvSpPr>
-          <p:cNvPr id="2" name="Rectangle 1"/>
-          <p:cNvSpPr/>
-          <p:nvPr/>
-        </p:nvSpPr>
-        <p:spPr>
-          <a:xfrm>
-            <a:off x="0" y="0"/>
-            <a:ext cx="12191695" cy="960120"/>
-          </a:xfrm>
-          <a:prstGeom prst="rect">
-            <a:avLst/>
-          </a:prstGeom>
-          <a:solidFill>
-            <a:srgbClr val="095292"/>
-          </a:solidFill>
-          <a:ln>
-            <a:noFill/>
-          </a:ln>
-        </p:spPr>
-        <p:style>
-          <a:lnRef idx="1">
-            <a:schemeClr val="accent1"/>
-          </a:lnRef>
-          <a:fillRef idx="3">
-            <a:schemeClr val="accent1"/>
-          </a:fillRef>
-          <a:effectRef idx="2">
-            <a:schemeClr val="accent1"/>
-          </a:effectRef>
-          <a:fontRef idx="minor">
-            <a:schemeClr val="lt1"/>
-          </a:fontRef>
-        </p:style>
-        <p:txBody>
-          <a:bodyPr rtlCol="0" anchor="ctr"/>
-          <a:lstStyle/>
-          <a:p>
-            <a:pPr algn="ctr"/>
-          </a:p>
-        </p:txBody>
-      </p:sp>
-      <p:sp>
-        <p:nvSpPr>
-          <p:cNvPr id="3" name="Rectangle 2"/>
-          <p:cNvSpPr/>
-          <p:nvPr/>
-        </p:nvSpPr>
-        <p:spPr>
-          <a:xfrm>
-            <a:off x="0" y="960120"/>
-            <a:ext cx="12191695" cy="41148"/>
-          </a:xfrm>
-          <a:prstGeom prst="rect">
-            <a:avLst/>
-          </a:prstGeom>
-          <a:solidFill>
-            <a:srgbClr val="FFD000"/>
-          </a:solidFill>
-          <a:ln>
-            <a:noFill/>
-          </a:ln>
-        </p:spPr>
-        <p:style>
-          <a:lnRef idx="1">
-            <a:schemeClr val="accent1"/>
-          </a:lnRef>
-          <a:fillRef idx="3">
-            <a:schemeClr val="accent1"/>
-          </a:fillRef>
-          <a:effectRef idx="2">
-            <a:schemeClr val="accent1"/>
-          </a:effectRef>
-          <a:fontRef idx="minor">
-            <a:schemeClr val="lt1"/>
-          </a:fontRef>
-        </p:style>
-        <p:txBody>
-          <a:bodyPr rtlCol="0" anchor="ctr"/>
-          <a:lstStyle/>
-          <a:p>
-            <a:pPr algn="ctr"/>
-          </a:p>
-        </p:txBody>
-      </p:sp>
-      <p:sp>
-        <p:nvSpPr>
-          <p:cNvPr id="4" name="TextBox 3"/>
-          <p:cNvSpPr txBox="1"/>
-          <p:nvPr/>
-        </p:nvSpPr>
-        <p:spPr>
-          <a:xfrm>
-            <a:off x="457200" y="164592"/>
-            <a:ext cx="11277295" cy="502920"/>
-          </a:xfrm>
-          <a:prstGeom prst="rect">
-            <a:avLst/>
-          </a:prstGeom>
-          <a:noFill/>
-        </p:spPr>
-        <p:txBody>
-          <a:bodyPr wrap="square">
-            <a:spAutoFit/>
-          </a:bodyPr>
-          <a:lstStyle/>
-          <a:p>
-            <a:r>
-              <a:rPr sz="2600" b="1" i="0">
-                <a:solidFill>
-                  <a:srgbClr val="FFFFFF"/>
-                </a:solidFill>
-                <a:latin typeface="Calibri"/>
-              </a:rPr>
-              <a:t>Actividad autonoma — pistas (checklist vacio)</a:t>
-            </a:r>
-          </a:p>
-        </p:txBody>
-      </p:sp>
-      <p:sp>
-        <p:nvSpPr>
-          <p:cNvPr id="5" name="Rounded Rectangle 4"/>
-          <p:cNvSpPr/>
-          <p:nvPr/>
-        </p:nvSpPr>
-        <p:spPr>
-          <a:xfrm>
-            <a:off x="457200" y="1261872"/>
-            <a:ext cx="11277295" cy="566928"/>
-          </a:xfrm>
-          <a:prstGeom prst="roundRect">
-            <a:avLst>
-              <a:gd name="adj" fmla="val 12000"/>
-            </a:avLst>
-          </a:prstGeom>
-          <a:solidFill>
-            <a:srgbClr val="F2F2F2"/>
-          </a:solidFill>
-          <a:ln>
-            <a:noFill/>
-          </a:ln>
-        </p:spPr>
-        <p:style>
-          <a:lnRef idx="1">
-            <a:schemeClr val="accent1"/>
-          </a:lnRef>
-          <a:fillRef idx="3">
-            <a:schemeClr val="accent1"/>
-          </a:fillRef>
-          <a:effectRef idx="2">
-            <a:schemeClr val="accent1"/>
-          </a:effectRef>
-          <a:fontRef idx="minor">
-            <a:schemeClr val="lt1"/>
-          </a:fontRef>
-        </p:style>
-        <p:txBody>
-          <a:bodyPr rtlCol="0" anchor="ctr"/>
-          <a:lstStyle/>
-          <a:p>
-            <a:pPr algn="ctr"/>
-          </a:p>
-        </p:txBody>
-      </p:sp>
-      <p:sp>
-        <p:nvSpPr>
-          <p:cNvPr id="6" name="Rectangle 5"/>
-          <p:cNvSpPr/>
-          <p:nvPr/>
-        </p:nvSpPr>
-        <p:spPr>
-          <a:xfrm>
-            <a:off x="640080" y="1408175"/>
-            <a:ext cx="274320" cy="274320"/>
-          </a:xfrm>
-          <a:prstGeom prst="rect">
-            <a:avLst/>
-          </a:prstGeom>
-          <a:solidFill>
-            <a:srgbClr val="FFFFFF"/>
-          </a:solidFill>
-          <a:ln>
-            <a:solidFill>
-              <a:srgbClr val="333333"/>
-            </a:solidFill>
-          </a:ln>
-        </p:spPr>
-        <p:style>
-          <a:lnRef idx="1">
-            <a:schemeClr val="accent1"/>
-          </a:lnRef>
-          <a:fillRef idx="3">
-            <a:schemeClr val="accent1"/>
-          </a:fillRef>
-          <a:effectRef idx="2">
-            <a:schemeClr val="accent1"/>
-          </a:effectRef>
-          <a:fontRef idx="minor">
-            <a:schemeClr val="lt1"/>
-          </a:fontRef>
-        </p:style>
-        <p:txBody>
-          <a:bodyPr rtlCol="0" anchor="ctr"/>
-          <a:lstStyle/>
-          <a:p>
-            <a:pPr algn="ctr"/>
-          </a:p>
-        </p:txBody>
-      </p:sp>
-      <p:sp>
-        <p:nvSpPr>
-          <p:cNvPr id="7" name="Rectangle 6"/>
-          <p:cNvSpPr/>
-          <p:nvPr/>
-        </p:nvSpPr>
-        <p:spPr>
-          <a:xfrm>
-            <a:off x="640080" y="1408175"/>
-            <a:ext cx="73152" cy="274320"/>
-          </a:xfrm>
-          <a:prstGeom prst="rect">
-            <a:avLst/>
-          </a:prstGeom>
-          <a:solidFill>
-            <a:srgbClr val="269CCB"/>
-          </a:solidFill>
-          <a:ln>
-            <a:noFill/>
-          </a:ln>
-        </p:spPr>
-        <p:style>
-          <a:lnRef idx="1">
-            <a:schemeClr val="accent1"/>
-          </a:lnRef>
-          <a:fillRef idx="3">
-            <a:schemeClr val="accent1"/>
-          </a:fillRef>
-          <a:effectRef idx="2">
-            <a:schemeClr val="accent1"/>
-          </a:effectRef>
-          <a:fontRef idx="minor">
-            <a:schemeClr val="lt1"/>
-          </a:fontRef>
-        </p:style>
-        <p:txBody>
-          <a:bodyPr rtlCol="0" anchor="ctr"/>
-          <a:lstStyle/>
-          <a:p>
-            <a:pPr algn="ctr"/>
-          </a:p>
-        </p:txBody>
-      </p:sp>
-      <p:sp>
-        <p:nvSpPr>
-          <p:cNvPr id="8" name="TextBox 7"/>
-          <p:cNvSpPr txBox="1"/>
-          <p:nvPr/>
-        </p:nvSpPr>
-        <p:spPr>
-          <a:xfrm>
-            <a:off x="1097280" y="1353312"/>
-            <a:ext cx="10362895" cy="402336"/>
-          </a:xfrm>
-          <a:prstGeom prst="rect">
-            <a:avLst/>
-          </a:prstGeom>
-          <a:noFill/>
-        </p:spPr>
-        <p:txBody>
-          <a:bodyPr wrap="square" anchor="ctr"/>
-          <a:lstStyle/>
-          <a:p>
-            <a:r>
-              <a:rPr sz="1500" b="0" i="0">
-                <a:solidFill>
-                  <a:srgbClr val="333333"/>
-                </a:solidFill>
-                <a:latin typeface="Calibri"/>
-              </a:rPr>
-              <a:t>□ Mejoras accionables?</a:t>
-            </a:r>
-          </a:p>
-        </p:txBody>
-      </p:sp>
-      <p:sp>
-        <p:nvSpPr>
-          <p:cNvPr id="9" name="Rounded Rectangle 8"/>
-          <p:cNvSpPr/>
-          <p:nvPr/>
-        </p:nvSpPr>
-        <p:spPr>
-          <a:xfrm>
-            <a:off x="457200" y="1938528"/>
-            <a:ext cx="11277295" cy="566928"/>
-          </a:xfrm>
-          <a:prstGeom prst="roundRect">
-            <a:avLst>
-              <a:gd name="adj" fmla="val 12000"/>
-            </a:avLst>
-          </a:prstGeom>
-          <a:solidFill>
-            <a:srgbClr val="F2F2F2"/>
-          </a:solidFill>
-          <a:ln>
-            <a:noFill/>
-          </a:ln>
-        </p:spPr>
-        <p:style>
-          <a:lnRef idx="1">
-            <a:schemeClr val="accent1"/>
-          </a:lnRef>
-          <a:fillRef idx="3">
-            <a:schemeClr val="accent1"/>
-          </a:fillRef>
-          <a:effectRef idx="2">
-            <a:schemeClr val="accent1"/>
-          </a:effectRef>
-          <a:fontRef idx="minor">
-            <a:schemeClr val="lt1"/>
-          </a:fontRef>
-        </p:style>
-        <p:txBody>
-          <a:bodyPr rtlCol="0" anchor="ctr"/>
-          <a:lstStyle/>
-          <a:p>
-            <a:pPr algn="ctr"/>
-          </a:p>
-        </p:txBody>
-      </p:sp>
-      <p:sp>
-        <p:nvSpPr>
-          <p:cNvPr id="10" name="Rectangle 9"/>
-          <p:cNvSpPr/>
-          <p:nvPr/>
-        </p:nvSpPr>
-        <p:spPr>
-          <a:xfrm>
-            <a:off x="640080" y="2084832"/>
-            <a:ext cx="274320" cy="274320"/>
-          </a:xfrm>
-          <a:prstGeom prst="rect">
-            <a:avLst/>
-          </a:prstGeom>
-          <a:solidFill>
-            <a:srgbClr val="FFFFFF"/>
-          </a:solidFill>
-          <a:ln>
-            <a:solidFill>
-              <a:srgbClr val="333333"/>
-            </a:solidFill>
-          </a:ln>
-        </p:spPr>
-        <p:style>
-          <a:lnRef idx="1">
-            <a:schemeClr val="accent1"/>
-          </a:lnRef>
-          <a:fillRef idx="3">
-            <a:schemeClr val="accent1"/>
-          </a:fillRef>
-          <a:effectRef idx="2">
-            <a:schemeClr val="accent1"/>
-          </a:effectRef>
-          <a:fontRef idx="minor">
-            <a:schemeClr val="lt1"/>
-          </a:fontRef>
-        </p:style>
-        <p:txBody>
-          <a:bodyPr rtlCol="0" anchor="ctr"/>
-          <a:lstStyle/>
-          <a:p>
-            <a:pPr algn="ctr"/>
-          </a:p>
-        </p:txBody>
-      </p:sp>
-      <p:sp>
-        <p:nvSpPr>
-          <p:cNvPr id="11" name="Rectangle 10"/>
-          <p:cNvSpPr/>
-          <p:nvPr/>
-        </p:nvSpPr>
-        <p:spPr>
-          <a:xfrm>
-            <a:off x="640080" y="2084832"/>
-            <a:ext cx="73152" cy="274320"/>
-          </a:xfrm>
-          <a:prstGeom prst="rect">
-            <a:avLst/>
-          </a:prstGeom>
-          <a:solidFill>
-            <a:srgbClr val="269CCB"/>
-          </a:solidFill>
-          <a:ln>
-            <a:noFill/>
-          </a:ln>
-        </p:spPr>
-        <p:style>
-          <a:lnRef idx="1">
-            <a:schemeClr val="accent1"/>
-          </a:lnRef>
-          <a:fillRef idx="3">
-            <a:schemeClr val="accent1"/>
-          </a:fillRef>
-          <a:effectRef idx="2">
-            <a:schemeClr val="accent1"/>
-          </a:effectRef>
-          <a:fontRef idx="minor">
-            <a:schemeClr val="lt1"/>
-          </a:fontRef>
-        </p:style>
-        <p:txBody>
-          <a:bodyPr rtlCol="0" anchor="ctr"/>
-          <a:lstStyle/>
-          <a:p>
-            <a:pPr algn="ctr"/>
-          </a:p>
-        </p:txBody>
-      </p:sp>
-      <p:sp>
-        <p:nvSpPr>
-          <p:cNvPr id="12" name="TextBox 11"/>
-          <p:cNvSpPr txBox="1"/>
-          <p:nvPr/>
-        </p:nvSpPr>
-        <p:spPr>
-          <a:xfrm>
-            <a:off x="1097280" y="2029968"/>
-            <a:ext cx="10362895" cy="402336"/>
-          </a:xfrm>
-          <a:prstGeom prst="rect">
-            <a:avLst/>
-          </a:prstGeom>
-          <a:noFill/>
-        </p:spPr>
-        <p:txBody>
-          <a:bodyPr wrap="square" anchor="ctr"/>
-          <a:lstStyle/>
-          <a:p>
-            <a:r>
-              <a:rPr sz="1500" b="0" i="0">
-                <a:solidFill>
-                  <a:srgbClr val="333333"/>
-                </a:solidFill>
-                <a:latin typeface="Calibri"/>
-              </a:rPr>
-              <a:t>□ Conectan al PI?</a:t>
-            </a:r>
-          </a:p>
-        </p:txBody>
-      </p:sp>
-      <p:sp>
-        <p:nvSpPr>
-          <p:cNvPr id="13" name="Rounded Rectangle 12"/>
-          <p:cNvSpPr/>
-          <p:nvPr/>
-        </p:nvSpPr>
-        <p:spPr>
-          <a:xfrm>
-            <a:off x="457200" y="2615184"/>
-            <a:ext cx="11277295" cy="566928"/>
-          </a:xfrm>
-          <a:prstGeom prst="roundRect">
-            <a:avLst>
-              <a:gd name="adj" fmla="val 12000"/>
-            </a:avLst>
-          </a:prstGeom>
-          <a:solidFill>
-            <a:srgbClr val="F2F2F2"/>
-          </a:solidFill>
-          <a:ln>
-            <a:noFill/>
-          </a:ln>
-        </p:spPr>
-        <p:style>
-          <a:lnRef idx="1">
-            <a:schemeClr val="accent1"/>
-          </a:lnRef>
-          <a:fillRef idx="3">
-            <a:schemeClr val="accent1"/>
-          </a:fillRef>
-          <a:effectRef idx="2">
-            <a:schemeClr val="accent1"/>
-          </a:effectRef>
-          <a:fontRef idx="minor">
-            <a:schemeClr val="lt1"/>
-          </a:fontRef>
-        </p:style>
-        <p:txBody>
-          <a:bodyPr rtlCol="0" anchor="ctr"/>
-          <a:lstStyle/>
-          <a:p>
-            <a:pPr algn="ctr"/>
-          </a:p>
-        </p:txBody>
-      </p:sp>
-      <p:sp>
-        <p:nvSpPr>
-          <p:cNvPr id="14" name="Rectangle 13"/>
-          <p:cNvSpPr/>
-          <p:nvPr/>
-        </p:nvSpPr>
-        <p:spPr>
-          <a:xfrm>
-            <a:off x="640080" y="2761488"/>
-            <a:ext cx="274320" cy="274320"/>
-          </a:xfrm>
-          <a:prstGeom prst="rect">
-            <a:avLst/>
-          </a:prstGeom>
-          <a:solidFill>
-            <a:srgbClr val="FFFFFF"/>
-          </a:solidFill>
-          <a:ln>
-            <a:solidFill>
-              <a:srgbClr val="333333"/>
-            </a:solidFill>
-          </a:ln>
-        </p:spPr>
-        <p:style>
-          <a:lnRef idx="1">
-            <a:schemeClr val="accent1"/>
-          </a:lnRef>
-          <a:fillRef idx="3">
-            <a:schemeClr val="accent1"/>
-          </a:fillRef>
-          <a:effectRef idx="2">
-            <a:schemeClr val="accent1"/>
-          </a:effectRef>
-          <a:fontRef idx="minor">
-            <a:schemeClr val="lt1"/>
-          </a:fontRef>
-        </p:style>
-        <p:txBody>
-          <a:bodyPr rtlCol="0" anchor="ctr"/>
-          <a:lstStyle/>
-          <a:p>
-            <a:pPr algn="ctr"/>
-          </a:p>
-        </p:txBody>
-      </p:sp>
-      <p:sp>
-        <p:nvSpPr>
-          <p:cNvPr id="15" name="Rectangle 14"/>
-          <p:cNvSpPr/>
-          <p:nvPr/>
-        </p:nvSpPr>
-        <p:spPr>
-          <a:xfrm>
-            <a:off x="640080" y="2761488"/>
-            <a:ext cx="73152" cy="274320"/>
-          </a:xfrm>
-          <a:prstGeom prst="rect">
-            <a:avLst/>
-          </a:prstGeom>
-          <a:solidFill>
-            <a:srgbClr val="269CCB"/>
-          </a:solidFill>
-          <a:ln>
-            <a:noFill/>
-          </a:ln>
-        </p:spPr>
-        <p:style>
-          <a:lnRef idx="1">
-            <a:schemeClr val="accent1"/>
-          </a:lnRef>
-          <a:fillRef idx="3">
-            <a:schemeClr val="accent1"/>
-          </a:fillRef>
-          <a:effectRef idx="2">
-            <a:schemeClr val="accent1"/>
-          </a:effectRef>
-          <a:fontRef idx="minor">
-            <a:schemeClr val="lt1"/>
-          </a:fontRef>
-        </p:style>
-        <p:txBody>
-          <a:bodyPr rtlCol="0" anchor="ctr"/>
-          <a:lstStyle/>
-          <a:p>
-            <a:pPr algn="ctr"/>
-          </a:p>
-        </p:txBody>
-      </p:sp>
-      <p:sp>
-        <p:nvSpPr>
-          <p:cNvPr id="16" name="TextBox 15"/>
-          <p:cNvSpPr txBox="1"/>
-          <p:nvPr/>
-        </p:nvSpPr>
-        <p:spPr>
-          <a:xfrm>
-            <a:off x="1097280" y="2706624"/>
-            <a:ext cx="10362895" cy="402336"/>
-          </a:xfrm>
-          <a:prstGeom prst="rect">
-            <a:avLst/>
-          </a:prstGeom>
-          <a:noFill/>
-        </p:spPr>
-        <p:txBody>
-          <a:bodyPr wrap="square" anchor="ctr"/>
-          <a:lstStyle/>
-          <a:p>
-            <a:r>
-              <a:rPr sz="1500" b="0" i="0">
-                <a:solidFill>
-                  <a:srgbClr val="333333"/>
-                </a:solidFill>
-                <a:latin typeface="Calibri"/>
-              </a:rPr>
-              <a:t>□ Evidencia de lectura?</a:t>
-            </a:r>
-          </a:p>
-        </p:txBody>
-      </p:sp>
-      <p:sp>
-        <p:nvSpPr>
-          <p:cNvPr id="17" name="TextBox 16"/>
-          <p:cNvSpPr txBox="1"/>
-          <p:nvPr/>
-        </p:nvSpPr>
-        <p:spPr>
-          <a:xfrm>
-            <a:off x="11185855" y="6473952"/>
-            <a:ext cx="640080" cy="274320"/>
-          </a:xfrm>
-          <a:prstGeom prst="rect">
-            <a:avLst/>
-          </a:prstGeom>
-          <a:noFill/>
-        </p:spPr>
-        <p:txBody>
-          <a:bodyPr wrap="square">
-            <a:spAutoFit/>
-          </a:bodyPr>
-          <a:lstStyle/>
-          <a:p>
-            <a:pPr algn="r"/>
-            <a:r>
-              <a:rPr sz="1100" b="0" i="0">
-                <a:solidFill>
-                  <a:srgbClr val="666666"/>
-                </a:solidFill>
-                <a:latin typeface="Calibri"/>
-              </a:rPr>
-              <a:t>26</a:t>
-            </a:r>
-          </a:p>
-        </p:txBody>
-      </p:sp>
-    </p:spTree>
-  </p:cSld>
-  <p:clrMapOvr>
-    <a:masterClrMapping/>
-  </p:clrMapOvr>
-</p:sld>
-</file>
-
-<file path=ppt/slides/slide27.xml><?xml version="1.0" encoding="utf-8"?>
-<p:sld xmlns:a="http://schemas.openxmlformats.org/drawingml/2006/main" xmlns:p="http://schemas.openxmlformats.org/presentationml/2006/main" xmlns:r="http://schemas.openxmlformats.org/officeDocument/2006/relationships">
-  <p:cSld>
-    <p:bg>
-      <p:bgPr>
-        <a:solidFill>
-          <a:srgbClr val="FFFFFF"/>
-        </a:solidFill>
-        <a:effectLst/>
-      </p:bgPr>
-    </p:bg>
-    <p:spTree>
-      <p:nvGrpSpPr>
-        <p:cNvPr id="1" name=""/>
-        <p:cNvGrpSpPr/>
-        <p:nvPr/>
-      </p:nvGrpSpPr>
-      <p:grpSpPr/>
-      <p:sp>
-        <p:nvSpPr>
-          <p:cNvPr id="2" name="Rectangle 1"/>
-          <p:cNvSpPr/>
-          <p:nvPr/>
-        </p:nvSpPr>
-        <p:spPr>
-          <a:xfrm>
-            <a:off x="0" y="0"/>
-            <a:ext cx="12191695" cy="960120"/>
-          </a:xfrm>
-          <a:prstGeom prst="rect">
-            <a:avLst/>
-          </a:prstGeom>
-          <a:solidFill>
-            <a:srgbClr val="095292"/>
-          </a:solidFill>
-          <a:ln>
-            <a:noFill/>
-          </a:ln>
-        </p:spPr>
-        <p:style>
-          <a:lnRef idx="1">
-            <a:schemeClr val="accent1"/>
-          </a:lnRef>
-          <a:fillRef idx="3">
-            <a:schemeClr val="accent1"/>
-          </a:fillRef>
-          <a:effectRef idx="2">
-            <a:schemeClr val="accent1"/>
-          </a:effectRef>
-          <a:fontRef idx="minor">
-            <a:schemeClr val="lt1"/>
-          </a:fontRef>
-        </p:style>
-        <p:txBody>
-          <a:bodyPr rtlCol="0" anchor="ctr"/>
-          <a:lstStyle/>
-          <a:p>
-            <a:pPr algn="ctr"/>
-          </a:p>
-        </p:txBody>
-      </p:sp>
-      <p:sp>
-        <p:nvSpPr>
-          <p:cNvPr id="3" name="Rectangle 2"/>
-          <p:cNvSpPr/>
-          <p:nvPr/>
-        </p:nvSpPr>
-        <p:spPr>
-          <a:xfrm>
-            <a:off x="0" y="960120"/>
-            <a:ext cx="12191695" cy="41148"/>
-          </a:xfrm>
-          <a:prstGeom prst="rect">
-            <a:avLst/>
-          </a:prstGeom>
-          <a:solidFill>
-            <a:srgbClr val="FFD000"/>
-          </a:solidFill>
-          <a:ln>
-            <a:noFill/>
-          </a:ln>
-        </p:spPr>
-        <p:style>
-          <a:lnRef idx="1">
-            <a:schemeClr val="accent1"/>
-          </a:lnRef>
-          <a:fillRef idx="3">
-            <a:schemeClr val="accent1"/>
-          </a:fillRef>
-          <a:effectRef idx="2">
-            <a:schemeClr val="accent1"/>
-          </a:effectRef>
-          <a:fontRef idx="minor">
-            <a:schemeClr val="lt1"/>
-          </a:fontRef>
-        </p:style>
-        <p:txBody>
-          <a:bodyPr rtlCol="0" anchor="ctr"/>
-          <a:lstStyle/>
-          <a:p>
-            <a:pPr algn="ctr"/>
-          </a:p>
-        </p:txBody>
-      </p:sp>
-      <p:sp>
-        <p:nvSpPr>
-          <p:cNvPr id="4" name="TextBox 3"/>
-          <p:cNvSpPr txBox="1"/>
-          <p:nvPr/>
-        </p:nvSpPr>
-        <p:spPr>
-          <a:xfrm>
-            <a:off x="457200" y="164592"/>
-            <a:ext cx="11277295" cy="502920"/>
-          </a:xfrm>
-          <a:prstGeom prst="rect">
-            <a:avLst/>
-          </a:prstGeom>
-          <a:noFill/>
-        </p:spPr>
-        <p:txBody>
-          <a:bodyPr wrap="square">
-            <a:spAutoFit/>
-          </a:bodyPr>
-          <a:lstStyle/>
-          <a:p>
-            <a:r>
-              <a:rPr sz="2600" b="1" i="0">
-                <a:solidFill>
-                  <a:srgbClr val="FFFFFF"/>
-                </a:solidFill>
-                <a:latin typeface="Calibri"/>
-              </a:rPr>
-              <a:t>Criterios de exito / entregable</a:t>
-            </a:r>
-          </a:p>
-        </p:txBody>
-      </p:sp>
-      <p:sp>
-        <p:nvSpPr>
-          <p:cNvPr id="5" name="TextBox 4"/>
-          <p:cNvSpPr txBox="1"/>
-          <p:nvPr/>
-        </p:nvSpPr>
-        <p:spPr>
-          <a:xfrm>
-            <a:off x="457200" y="1170432"/>
-            <a:ext cx="11277295" cy="5230368"/>
-          </a:xfrm>
-          <a:prstGeom prst="rect">
-            <a:avLst/>
-          </a:prstGeom>
-          <a:noFill/>
-        </p:spPr>
-        <p:txBody>
-          <a:bodyPr wrap="square">
-            <a:spAutoFit/>
-          </a:bodyPr>
-          <a:lstStyle/>
-          <a:p>
-            <a:pPr>
-              <a:spcAft>
-                <a:spcPts val="800"/>
-              </a:spcAft>
-            </a:pPr>
-            <a:r>
-              <a:rPr sz="2000" b="0" i="0">
-                <a:solidFill>
-                  <a:srgbClr val="333333"/>
-                </a:solidFill>
-                <a:latin typeface="Calibri"/>
-              </a:rPr>
-              <a:t>–   </a:t>
-            </a:r>
-            <a:r>
-              <a:rPr sz="2000" b="1" i="0">
-                <a:solidFill>
-                  <a:srgbClr val="333333"/>
-                </a:solidFill>
-                <a:latin typeface="Calibri"/>
-              </a:rPr>
-              <a:t>Entregable:</a:t>
-            </a:r>
-            <a:r>
-              <a:rPr sz="2000" b="0" i="0">
-                <a:solidFill>
-                  <a:srgbClr val="333333"/>
-                </a:solidFill>
-                <a:latin typeface="Calibri"/>
-              </a:rPr>
-              <a:t> Informe 1-2 pag.: caso + 3 mejoras aplicables a VetCare</a:t>
-            </a:r>
-          </a:p>
-          <a:p>
-            <a:pPr>
-              <a:spcAft>
-                <a:spcPts val="800"/>
-              </a:spcAft>
-            </a:pPr>
-            <a:r>
-              <a:rPr sz="2000" b="0" i="0">
-                <a:solidFill>
-                  <a:srgbClr val="333333"/>
-                </a:solidFill>
-                <a:latin typeface="Calibri"/>
-              </a:rPr>
-              <a:t>–   Evidencia: el SQL y su salida quedan guardados en cada pregunta de la plataforma del curso.</a:t>
-            </a:r>
-          </a:p>
-          <a:p>
-            <a:pPr>
-              <a:spcAft>
-                <a:spcPts val="800"/>
-              </a:spcAft>
-            </a:pPr>
-            <a:r>
-              <a:rPr sz="2000" b="0" i="0">
-                <a:solidFill>
-                  <a:srgbClr val="333333"/>
-                </a:solidFill>
-                <a:latin typeface="Calibri"/>
-              </a:rPr>
-              <a:t>–   Conserva copia en tu carpeta del PI (los .sql que pide el entregable).</a:t>
-            </a:r>
-          </a:p>
-          <a:p>
-            <a:pPr>
-              <a:spcAft>
-                <a:spcPts val="800"/>
-              </a:spcAft>
-            </a:pPr>
-            <a:r>
-              <a:rPr sz="2000" b="0" i="0">
-                <a:solidFill>
-                  <a:srgbClr val="333333"/>
-                </a:solidFill>
-                <a:latin typeface="Calibri"/>
-              </a:rPr>
-              <a:t>–   Actualizar checklist PI (que criterio de rubrica avanzo).</a:t>
-            </a:r>
-          </a:p>
-          <a:p>
-            <a:pPr>
-              <a:spcAft>
-                <a:spcPts val="800"/>
-              </a:spcAft>
-            </a:pPr>
-            <a:r>
-              <a:rPr sz="2000" b="0" i="0">
-                <a:solidFill>
-                  <a:srgbClr val="333333"/>
-                </a:solidFill>
-                <a:latin typeface="Calibri"/>
-              </a:rPr>
-              <a:t>–   </a:t>
-            </a:r>
-            <a:r>
-              <a:rPr sz="2000" b="1" i="0">
-                <a:solidFill>
-                  <a:srgbClr val="333333"/>
-                </a:solidFill>
-                <a:latin typeface="Calibri"/>
-              </a:rPr>
-              <a:t>Entrega en la plataforma del curso</a:t>
-            </a:r>
-            <a:r>
-              <a:rPr sz="2000" b="0" i="0">
-                <a:solidFill>
-                  <a:srgbClr val="333333"/>
-                </a:solidFill>
-                <a:latin typeface="Calibri"/>
-              </a:rPr>
-              <a:t> — en la fecha que indique el docente.</a:t>
-            </a:r>
-          </a:p>
-        </p:txBody>
-      </p:sp>
-      <p:sp>
-        <p:nvSpPr>
-          <p:cNvPr id="6" name="TextBox 5"/>
-          <p:cNvSpPr txBox="1"/>
-          <p:nvPr/>
-        </p:nvSpPr>
-        <p:spPr>
-          <a:xfrm>
-            <a:off x="11185855" y="6473952"/>
-            <a:ext cx="640080" cy="274320"/>
-          </a:xfrm>
-          <a:prstGeom prst="rect">
-            <a:avLst/>
-          </a:prstGeom>
-          <a:noFill/>
-        </p:spPr>
-        <p:txBody>
-          <a:bodyPr wrap="square">
-            <a:spAutoFit/>
-          </a:bodyPr>
-          <a:lstStyle/>
-          <a:p>
-            <a:pPr algn="r"/>
-            <a:r>
-              <a:rPr sz="1100" b="0" i="0">
-                <a:solidFill>
-                  <a:srgbClr val="666666"/>
-                </a:solidFill>
-                <a:latin typeface="Calibri"/>
-              </a:rPr>
-              <a:t>27</a:t>
-            </a:r>
-          </a:p>
-        </p:txBody>
-      </p:sp>
-    </p:spTree>
-  </p:cSld>
-  <p:clrMapOvr>
-    <a:masterClrMapping/>
-  </p:clrMapOvr>
-</p:sld>
-</file>
-
-<file path=ppt/slides/slide28.xml><?xml version="1.0" encoding="utf-8"?>
-<p:sld xmlns:a="http://schemas.openxmlformats.org/drawingml/2006/main" xmlns:p="http://schemas.openxmlformats.org/presentationml/2006/main" xmlns:r="http://schemas.openxmlformats.org/officeDocument/2006/relationships">
-  <p:cSld>
-    <p:bg>
-      <p:bgPr>
-        <a:solidFill>
-          <a:srgbClr val="FFFFFF"/>
-        </a:solidFill>
-        <a:effectLst/>
-      </p:bgPr>
-    </p:bg>
-    <p:spTree>
-      <p:nvGrpSpPr>
-        <p:cNvPr id="1" name=""/>
-        <p:cNvGrpSpPr/>
-        <p:nvPr/>
-      </p:nvGrpSpPr>
-      <p:grpSpPr/>
-      <p:sp>
-        <p:nvSpPr>
-          <p:cNvPr id="2" name="Rectangle 1"/>
-          <p:cNvSpPr/>
-          <p:nvPr/>
-        </p:nvSpPr>
-        <p:spPr>
-          <a:xfrm>
-            <a:off x="0" y="0"/>
-            <a:ext cx="12191695" cy="960120"/>
-          </a:xfrm>
-          <a:prstGeom prst="rect">
-            <a:avLst/>
-          </a:prstGeom>
-          <a:solidFill>
-            <a:srgbClr val="095292"/>
-          </a:solidFill>
-          <a:ln>
-            <a:noFill/>
-          </a:ln>
-        </p:spPr>
-        <p:style>
-          <a:lnRef idx="1">
-            <a:schemeClr val="accent1"/>
-          </a:lnRef>
-          <a:fillRef idx="3">
-            <a:schemeClr val="accent1"/>
-          </a:fillRef>
-          <a:effectRef idx="2">
-            <a:schemeClr val="accent1"/>
-          </a:effectRef>
-          <a:fontRef idx="minor">
-            <a:schemeClr val="lt1"/>
-          </a:fontRef>
-        </p:style>
-        <p:txBody>
-          <a:bodyPr rtlCol="0" anchor="ctr"/>
-          <a:lstStyle/>
-          <a:p>
-            <a:pPr algn="ctr"/>
-          </a:p>
-        </p:txBody>
-      </p:sp>
-      <p:sp>
-        <p:nvSpPr>
-          <p:cNvPr id="3" name="Rectangle 2"/>
-          <p:cNvSpPr/>
-          <p:nvPr/>
-        </p:nvSpPr>
-        <p:spPr>
-          <a:xfrm>
-            <a:off x="0" y="960120"/>
-            <a:ext cx="12191695" cy="41148"/>
-          </a:xfrm>
-          <a:prstGeom prst="rect">
-            <a:avLst/>
-          </a:prstGeom>
-          <a:solidFill>
-            <a:srgbClr val="FFD000"/>
-          </a:solidFill>
-          <a:ln>
-            <a:noFill/>
-          </a:ln>
-        </p:spPr>
-        <p:style>
-          <a:lnRef idx="1">
-            <a:schemeClr val="accent1"/>
-          </a:lnRef>
-          <a:fillRef idx="3">
-            <a:schemeClr val="accent1"/>
-          </a:fillRef>
-          <a:effectRef idx="2">
-            <a:schemeClr val="accent1"/>
-          </a:effectRef>
-          <a:fontRef idx="minor">
-            <a:schemeClr val="lt1"/>
-          </a:fontRef>
-        </p:style>
-        <p:txBody>
-          <a:bodyPr rtlCol="0" anchor="ctr"/>
-          <a:lstStyle/>
-          <a:p>
-            <a:pPr algn="ctr"/>
-          </a:p>
-        </p:txBody>
-      </p:sp>
-      <p:sp>
-        <p:nvSpPr>
-          <p:cNvPr id="4" name="TextBox 3"/>
-          <p:cNvSpPr txBox="1"/>
-          <p:nvPr/>
-        </p:nvSpPr>
-        <p:spPr>
-          <a:xfrm>
-            <a:off x="457200" y="164592"/>
-            <a:ext cx="11277295" cy="502920"/>
-          </a:xfrm>
-          <a:prstGeom prst="rect">
-            <a:avLst/>
-          </a:prstGeom>
-          <a:noFill/>
-        </p:spPr>
-        <p:txBody>
-          <a:bodyPr wrap="square">
-            <a:spAutoFit/>
-          </a:bodyPr>
-          <a:lstStyle/>
-          <a:p>
-            <a:r>
-              <a:rPr sz="2600" b="1" i="0">
-                <a:solidFill>
-                  <a:srgbClr val="FFFFFF"/>
-                </a:solidFill>
-                <a:latin typeface="Calibri"/>
-              </a:rPr>
-              <a:t>Para el PI esta semana</a:t>
-            </a:r>
-          </a:p>
-        </p:txBody>
-      </p:sp>
-      <p:sp>
-        <p:nvSpPr>
-          <p:cNvPr id="5" name="Rounded Rectangle 4"/>
-          <p:cNvSpPr/>
-          <p:nvPr/>
-        </p:nvSpPr>
-        <p:spPr>
-          <a:xfrm>
-            <a:off x="457200" y="1261872"/>
-            <a:ext cx="11277295" cy="1051560"/>
-          </a:xfrm>
-          <a:prstGeom prst="roundRect">
-            <a:avLst>
-              <a:gd name="adj" fmla="val 12000"/>
-            </a:avLst>
-          </a:prstGeom>
-          <a:solidFill>
-            <a:srgbClr val="E8F4FA"/>
-          </a:solidFill>
-          <a:ln>
-            <a:noFill/>
-          </a:ln>
-        </p:spPr>
-        <p:style>
-          <a:lnRef idx="1">
-            <a:schemeClr val="accent1"/>
-          </a:lnRef>
-          <a:fillRef idx="3">
-            <a:schemeClr val="accent1"/>
-          </a:fillRef>
-          <a:effectRef idx="2">
-            <a:schemeClr val="accent1"/>
-          </a:effectRef>
-          <a:fontRef idx="minor">
-            <a:schemeClr val="lt1"/>
-          </a:fontRef>
-        </p:style>
-        <p:txBody>
-          <a:bodyPr rtlCol="0" anchor="ctr"/>
-          <a:lstStyle/>
-          <a:p>
-            <a:pPr algn="ctr"/>
-          </a:p>
-        </p:txBody>
-      </p:sp>
-      <p:sp>
-        <p:nvSpPr>
-          <p:cNvPr id="6" name="Rectangle 5"/>
-          <p:cNvSpPr/>
-          <p:nvPr/>
-        </p:nvSpPr>
-        <p:spPr>
-          <a:xfrm>
-            <a:off x="457200" y="1261872"/>
-            <a:ext cx="128016" cy="1051560"/>
-          </a:xfrm>
-          <a:prstGeom prst="rect">
-            <a:avLst/>
-          </a:prstGeom>
-          <a:solidFill>
-            <a:srgbClr val="269CCB"/>
-          </a:solidFill>
-          <a:ln>
-            <a:noFill/>
-          </a:ln>
-        </p:spPr>
-        <p:style>
-          <a:lnRef idx="1">
-            <a:schemeClr val="accent1"/>
-          </a:lnRef>
-          <a:fillRef idx="3">
-            <a:schemeClr val="accent1"/>
-          </a:fillRef>
-          <a:effectRef idx="2">
-            <a:schemeClr val="accent1"/>
-          </a:effectRef>
-          <a:fontRef idx="minor">
-            <a:schemeClr val="lt1"/>
-          </a:fontRef>
-        </p:style>
-        <p:txBody>
-          <a:bodyPr rtlCol="0" anchor="ctr"/>
-          <a:lstStyle/>
-          <a:p>
-            <a:pPr algn="ctr"/>
-          </a:p>
-        </p:txBody>
-      </p:sp>
-      <p:sp>
-        <p:nvSpPr>
-          <p:cNvPr id="7" name="TextBox 6"/>
-          <p:cNvSpPr txBox="1"/>
-          <p:nvPr/>
-        </p:nvSpPr>
-        <p:spPr>
-          <a:xfrm>
-            <a:off x="777240" y="1399031"/>
-            <a:ext cx="10774375" cy="822959"/>
-          </a:xfrm>
-          <a:prstGeom prst="rect">
-            <a:avLst/>
-          </a:prstGeom>
-          <a:noFill/>
-        </p:spPr>
-        <p:txBody>
-          <a:bodyPr wrap="square">
-            <a:spAutoFit/>
-          </a:bodyPr>
-          <a:lstStyle/>
-          <a:p>
-            <a:r>
-              <a:rPr sz="1200" b="1" i="0">
-                <a:solidFill>
-                  <a:srgbClr val="269CCB"/>
-                </a:solidFill>
-                <a:latin typeface="Calibri"/>
-              </a:rPr>
-              <a:t>Info</a:t>
-            </a:r>
-          </a:p>
-          <a:p>
-            <a:pPr>
-              <a:spcBef>
-                <a:spcPts val="400"/>
-              </a:spcBef>
-            </a:pPr>
-            <a:r>
-              <a:rPr sz="1400" b="0" i="0">
-                <a:solidFill>
-                  <a:srgbClr val="333333"/>
-                </a:solidFill>
-                <a:latin typeface="Calibri"/>
-              </a:rPr>
-              <a:t>Hito: Informe de caso -&gt; mejoras concretas al PI</a:t>
-            </a:r>
-          </a:p>
-        </p:txBody>
-      </p:sp>
-      <p:sp>
-        <p:nvSpPr>
-          <p:cNvPr id="8" name="Rounded Rectangle 7"/>
-          <p:cNvSpPr/>
-          <p:nvPr/>
-        </p:nvSpPr>
-        <p:spPr>
-          <a:xfrm>
-            <a:off x="457200" y="2478024"/>
-            <a:ext cx="11277295" cy="1051560"/>
-          </a:xfrm>
-          <a:prstGeom prst="roundRect">
-            <a:avLst>
-              <a:gd name="adj" fmla="val 12000"/>
-            </a:avLst>
-          </a:prstGeom>
-          <a:solidFill>
-            <a:srgbClr val="FFF8E1"/>
-          </a:solidFill>
-          <a:ln>
-            <a:noFill/>
-          </a:ln>
-        </p:spPr>
-        <p:style>
-          <a:lnRef idx="1">
-            <a:schemeClr val="accent1"/>
-          </a:lnRef>
-          <a:fillRef idx="3">
-            <a:schemeClr val="accent1"/>
-          </a:fillRef>
-          <a:effectRef idx="2">
-            <a:schemeClr val="accent1"/>
-          </a:effectRef>
-          <a:fontRef idx="minor">
-            <a:schemeClr val="lt1"/>
-          </a:fontRef>
-        </p:style>
-        <p:txBody>
-          <a:bodyPr rtlCol="0" anchor="ctr"/>
-          <a:lstStyle/>
-          <a:p>
-            <a:pPr algn="ctr"/>
-          </a:p>
-        </p:txBody>
-      </p:sp>
-      <p:sp>
-        <p:nvSpPr>
-          <p:cNvPr id="9" name="Rectangle 8"/>
-          <p:cNvSpPr/>
-          <p:nvPr/>
-        </p:nvSpPr>
-        <p:spPr>
-          <a:xfrm>
-            <a:off x="457200" y="2478024"/>
-            <a:ext cx="128016" cy="1051560"/>
-          </a:xfrm>
-          <a:prstGeom prst="rect">
-            <a:avLst/>
-          </a:prstGeom>
-          <a:solidFill>
-            <a:srgbClr val="FFD000"/>
-          </a:solidFill>
-          <a:ln>
-            <a:noFill/>
-          </a:ln>
-        </p:spPr>
-        <p:style>
-          <a:lnRef idx="1">
-            <a:schemeClr val="accent1"/>
-          </a:lnRef>
-          <a:fillRef idx="3">
-            <a:schemeClr val="accent1"/>
-          </a:fillRef>
-          <a:effectRef idx="2">
-            <a:schemeClr val="accent1"/>
-          </a:effectRef>
-          <a:fontRef idx="minor">
-            <a:schemeClr val="lt1"/>
-          </a:fontRef>
-        </p:style>
-        <p:txBody>
-          <a:bodyPr rtlCol="0" anchor="ctr"/>
-          <a:lstStyle/>
-          <a:p>
-            <a:pPr algn="ctr"/>
-          </a:p>
-        </p:txBody>
-      </p:sp>
-      <p:sp>
-        <p:nvSpPr>
-          <p:cNvPr id="10" name="TextBox 9"/>
-          <p:cNvSpPr txBox="1"/>
-          <p:nvPr/>
-        </p:nvSpPr>
-        <p:spPr>
-          <a:xfrm>
-            <a:off x="777240" y="2615184"/>
-            <a:ext cx="10774375" cy="822959"/>
-          </a:xfrm>
-          <a:prstGeom prst="rect">
-            <a:avLst/>
-          </a:prstGeom>
-          <a:noFill/>
-        </p:spPr>
-        <p:txBody>
-          <a:bodyPr wrap="square">
-            <a:spAutoFit/>
-          </a:bodyPr>
-          <a:lstStyle/>
-          <a:p>
-            <a:r>
-              <a:rPr sz="1200" b="1" i="0">
-                <a:solidFill>
-                  <a:srgbClr val="FFD000"/>
-                </a:solidFill>
-                <a:latin typeface="Calibri"/>
-              </a:rPr>
-              <a:t>Aclaración</a:t>
-            </a:r>
-          </a:p>
-          <a:p>
-            <a:pPr>
-              <a:spcBef>
-                <a:spcPts val="400"/>
-              </a:spcBef>
-            </a:pPr>
-            <a:r>
-              <a:rPr sz="1400" b="0" i="0">
-                <a:solidFill>
-                  <a:srgbClr val="333333"/>
-                </a:solidFill>
-                <a:latin typeface="Calibri"/>
-              </a:rPr>
-              <a:t>Enunciado completo: Clases/Proyecto Integrador/ (VetCare DB).</a:t>
-            </a:r>
-          </a:p>
-        </p:txBody>
-      </p:sp>
-      <p:sp>
-        <p:nvSpPr>
-          <p:cNvPr id="11" name="Rounded Rectangle 10"/>
-          <p:cNvSpPr/>
-          <p:nvPr/>
-        </p:nvSpPr>
-        <p:spPr>
-          <a:xfrm>
-            <a:off x="457200" y="3694176"/>
-            <a:ext cx="11277295" cy="1051560"/>
-          </a:xfrm>
-          <a:prstGeom prst="roundRect">
-            <a:avLst>
-              <a:gd name="adj" fmla="val 12000"/>
-            </a:avLst>
-          </a:prstGeom>
-          <a:solidFill>
-            <a:srgbClr val="FBE4E4"/>
-          </a:solidFill>
-          <a:ln>
-            <a:noFill/>
-          </a:ln>
-        </p:spPr>
-        <p:style>
-          <a:lnRef idx="1">
-            <a:schemeClr val="accent1"/>
-          </a:lnRef>
-          <a:fillRef idx="3">
-            <a:schemeClr val="accent1"/>
-          </a:fillRef>
-          <a:effectRef idx="2">
-            <a:schemeClr val="accent1"/>
-          </a:effectRef>
-          <a:fontRef idx="minor">
-            <a:schemeClr val="lt1"/>
-          </a:fontRef>
-        </p:style>
-        <p:txBody>
-          <a:bodyPr rtlCol="0" anchor="ctr"/>
-          <a:lstStyle/>
-          <a:p>
-            <a:pPr algn="ctr"/>
-          </a:p>
-        </p:txBody>
-      </p:sp>
-      <p:sp>
-        <p:nvSpPr>
-          <p:cNvPr id="12" name="Rectangle 11"/>
-          <p:cNvSpPr/>
-          <p:nvPr/>
-        </p:nvSpPr>
-        <p:spPr>
-          <a:xfrm>
-            <a:off x="457200" y="3694176"/>
-            <a:ext cx="128016" cy="1051560"/>
-          </a:xfrm>
-          <a:prstGeom prst="rect">
-            <a:avLst/>
-          </a:prstGeom>
-          <a:solidFill>
-            <a:srgbClr val="A02030"/>
-          </a:solidFill>
-          <a:ln>
-            <a:noFill/>
-          </a:ln>
-        </p:spPr>
-        <p:style>
-          <a:lnRef idx="1">
-            <a:schemeClr val="accent1"/>
-          </a:lnRef>
-          <a:fillRef idx="3">
-            <a:schemeClr val="accent1"/>
-          </a:fillRef>
-          <a:effectRef idx="2">
-            <a:schemeClr val="accent1"/>
-          </a:effectRef>
-          <a:fontRef idx="minor">
-            <a:schemeClr val="lt1"/>
-          </a:fontRef>
-        </p:style>
-        <p:txBody>
-          <a:bodyPr rtlCol="0" anchor="ctr"/>
-          <a:lstStyle/>
-          <a:p>
-            <a:pPr algn="ctr"/>
-          </a:p>
-        </p:txBody>
-      </p:sp>
-      <p:sp>
-        <p:nvSpPr>
-          <p:cNvPr id="13" name="TextBox 12"/>
-          <p:cNvSpPr txBox="1"/>
-          <p:nvPr/>
-        </p:nvSpPr>
-        <p:spPr>
-          <a:xfrm>
-            <a:off x="777240" y="3831336"/>
-            <a:ext cx="10774375" cy="822959"/>
-          </a:xfrm>
-          <a:prstGeom prst="rect">
-            <a:avLst/>
-          </a:prstGeom>
-          <a:noFill/>
-        </p:spPr>
-        <p:txBody>
-          <a:bodyPr wrap="square">
-            <a:spAutoFit/>
-          </a:bodyPr>
-          <a:lstStyle/>
-          <a:p>
-            <a:r>
-              <a:rPr sz="1200" b="1" i="0">
-                <a:solidFill>
-                  <a:srgbClr val="A02030"/>
-                </a:solidFill>
-                <a:latin typeface="Calibri"/>
-              </a:rPr>
-              <a:t>Atención</a:t>
-            </a:r>
-          </a:p>
-          <a:p>
-            <a:pPr>
-              <a:spcBef>
-                <a:spcPts val="400"/>
-              </a:spcBef>
-            </a:pPr>
-            <a:r>
-              <a:rPr sz="1400" b="0" i="0">
-                <a:solidFill>
-                  <a:srgbClr val="333333"/>
-                </a:solidFill>
-                <a:latin typeface="Calibri"/>
-              </a:rPr>
-              <a:t>Si el docente asigna taller esta semana, él indica el canal y la fecha.</a:t>
-            </a:r>
-          </a:p>
-        </p:txBody>
-      </p:sp>
-      <p:sp>
-        <p:nvSpPr>
-          <p:cNvPr id="14" name="TextBox 13"/>
-          <p:cNvSpPr txBox="1"/>
-          <p:nvPr/>
-        </p:nvSpPr>
-        <p:spPr>
-          <a:xfrm>
-            <a:off x="11185855" y="6473952"/>
-            <a:ext cx="640080" cy="274320"/>
-          </a:xfrm>
-          <a:prstGeom prst="rect">
-            <a:avLst/>
-          </a:prstGeom>
-          <a:noFill/>
-        </p:spPr>
-        <p:txBody>
-          <a:bodyPr wrap="square">
-            <a:spAutoFit/>
-          </a:bodyPr>
-          <a:lstStyle/>
-          <a:p>
-            <a:pPr algn="r"/>
-            <a:r>
-              <a:rPr sz="1100" b="0" i="0">
-                <a:solidFill>
-                  <a:srgbClr val="666666"/>
-                </a:solidFill>
-                <a:latin typeface="Calibri"/>
-              </a:rPr>
-              <a:t>28</a:t>
-            </a:r>
-          </a:p>
-        </p:txBody>
-      </p:sp>
-    </p:spTree>
-  </p:cSld>
-  <p:clrMapOvr>
-    <a:masterClrMapping/>
-  </p:clrMapOvr>
-</p:sld>
-</file>
-
-<file path=ppt/slides/slide29.xml><?xml version="1.0" encoding="utf-8"?>
-<p:sld xmlns:a="http://schemas.openxmlformats.org/drawingml/2006/main" xmlns:p="http://schemas.openxmlformats.org/presentationml/2006/main" xmlns:r="http://schemas.openxmlformats.org/officeDocument/2006/relationships">
-  <p:cSld>
-    <p:bg>
-      <p:bgPr>
-        <a:solidFill>
-          <a:srgbClr val="FFFFFF"/>
-        </a:solidFill>
-        <a:effectLst/>
-      </p:bgPr>
-    </p:bg>
-    <p:spTree>
-      <p:nvGrpSpPr>
-        <p:cNvPr id="1" name=""/>
-        <p:cNvGrpSpPr/>
-        <p:nvPr/>
-      </p:nvGrpSpPr>
-      <p:grpSpPr/>
-      <p:sp>
-        <p:nvSpPr>
-          <p:cNvPr id="2" name="Rectangle 1"/>
-          <p:cNvSpPr/>
-          <p:nvPr/>
-        </p:nvSpPr>
-        <p:spPr>
-          <a:xfrm>
-            <a:off x="0" y="0"/>
-            <a:ext cx="12191695" cy="164592"/>
-          </a:xfrm>
-          <a:prstGeom prst="rect">
-            <a:avLst/>
-          </a:prstGeom>
-          <a:solidFill>
-            <a:srgbClr val="269CCB"/>
-          </a:solidFill>
-          <a:ln>
-            <a:noFill/>
-          </a:ln>
-        </p:spPr>
-        <p:style>
-          <a:lnRef idx="1">
-            <a:schemeClr val="accent1"/>
-          </a:lnRef>
-          <a:fillRef idx="3">
-            <a:schemeClr val="accent1"/>
-          </a:fillRef>
-          <a:effectRef idx="2">
-            <a:schemeClr val="accent1"/>
-          </a:effectRef>
-          <a:fontRef idx="minor">
-            <a:schemeClr val="lt1"/>
-          </a:fontRef>
-        </p:style>
-        <p:txBody>
-          <a:bodyPr rtlCol="0" anchor="ctr"/>
-          <a:lstStyle/>
-          <a:p>
-            <a:pPr algn="ctr"/>
-          </a:p>
-        </p:txBody>
-      </p:sp>
-      <p:pic>
-        <p:nvPicPr>
-          <p:cNvPr id="3" name="Picture 2" descr="logo_uniajc_color.png"/>
-          <p:cNvPicPr>
-            <a:picLocks noChangeAspect="1"/>
-          </p:cNvPicPr>
-          <p:nvPr/>
-        </p:nvPicPr>
-        <p:blipFill>
-          <a:blip r:embed="rId2"/>
-          <a:stretch>
-            <a:fillRect/>
-          </a:stretch>
-        </p:blipFill>
-        <p:spPr>
-          <a:xfrm>
-            <a:off x="10271455" y="5998464"/>
-            <a:ext cx="1463040" cy="643233"/>
-          </a:xfrm>
-          <a:prstGeom prst="rect">
-            <a:avLst/>
-          </a:prstGeom>
-        </p:spPr>
-      </p:pic>
-      <p:sp>
-        <p:nvSpPr>
-          <p:cNvPr id="4" name="TextBox 3"/>
-          <p:cNvSpPr txBox="1"/>
-          <p:nvPr/>
-        </p:nvSpPr>
-        <p:spPr>
-          <a:xfrm>
             <a:off x="457200" y="1737360"/>
             <a:ext cx="11277295" cy="1097280"/>
           </a:xfrm>
@@ -11335,7 +7973,7 @@
                 </a:solidFill>
                 <a:latin typeface="Calibri"/>
               </a:rPr>
-              <a:t>Clase 13 · VetCare avanza</a:t>
+              <a:t>Clase 13 · Analisis de casos reales · VetCare</a:t>
             </a:r>
           </a:p>
         </p:txBody>
@@ -11374,7 +8012,7 @@
                 </a:solidFill>
                 <a:latin typeface="Calibri"/>
               </a:rPr>
-              <a:t>Informe de caso -&gt; mejoras concretas al PI</a:t>
+              <a:t>Clase autonoma</a:t>
             </a:r>
           </a:p>
           <a:p>
@@ -11390,7 +8028,7 @@
                 </a:solidFill>
                 <a:latin typeface="Calibri"/>
               </a:rPr>
-              <a:t>Entregable: Informe 1-2 pag.: caso + 3 mejoras aplicables a VetCare</a:t>
+              <a:t>Causa proxima y causa raiz</a:t>
             </a:r>
           </a:p>
           <a:p>
@@ -11406,7 +8044,7 @@
                 </a:solidFill>
                 <a:latin typeface="Calibri"/>
               </a:rPr>
-              <a:t>Siguiente clase: continuar el hilo del PI segun plan</a:t>
+              <a:t>Caso uno</a:t>
             </a:r>
           </a:p>
         </p:txBody>
@@ -11441,7 +8079,7 @@
                 </a:solidFill>
                 <a:latin typeface="Calibri"/>
               </a:rPr>
-              <a:t>Teoria breve · practica = PI</a:t>
+              <a:t>Todo lo visto queda proyectado para repasar</a:t>
             </a:r>
           </a:p>
         </p:txBody>
@@ -12090,7 +8728,7 @@
                 </a:solidFill>
                 <a:latin typeface="Calibri"/>
               </a:rPr>
-              <a:t>Taller guiado = tarea del PI</a:t>
+              <a:t>Práctica (opcional, guía en la carpeta)</a:t>
             </a:r>
           </a:p>
         </p:txBody>
@@ -12205,7 +8843,7 @@
                 </a:solidFill>
                 <a:latin typeface="Calibri"/>
               </a:rPr>
-              <a:t>Criterios de exito · cierre · dudas del PI</a:t>
+              <a:t>Cierre conceptual · dudas</a:t>
             </a:r>
           </a:p>
         </p:txBody>
@@ -14248,4 +10886,324 @@
   </a:objectDefaults>
   <a:extraClrSchemeLst/>
 </a:theme>
+</file>
+
+<file path=ppt/theme/theme2.xml><?xml version="1.0" encoding="utf-8"?>
+<a:theme xmlns:a="http://schemas.openxmlformats.org/drawingml/2006/main" name="Office Theme">
+  <a:themeElements>
+    <a:clrScheme name="Office">
+      <a:dk1>
+        <a:sysClr val="windowText" lastClr="000000"/>
+      </a:dk1>
+      <a:lt1>
+        <a:sysClr val="window" lastClr="FFFFFF"/>
+      </a:lt1>
+      <a:dk2>
+        <a:srgbClr val="1F497D"/>
+      </a:dk2>
+      <a:lt2>
+        <a:srgbClr val="EEECE1"/>
+      </a:lt2>
+      <a:accent1>
+        <a:srgbClr val="4F81BD"/>
+      </a:accent1>
+      <a:accent2>
+        <a:srgbClr val="C0504D"/>
+      </a:accent2>
+      <a:accent3>
+        <a:srgbClr val="9BBB59"/>
+      </a:accent3>
+      <a:accent4>
+        <a:srgbClr val="8064A2"/>
+      </a:accent4>
+      <a:accent5>
+        <a:srgbClr val="4BACC6"/>
+      </a:accent5>
+      <a:accent6>
+        <a:srgbClr val="F79646"/>
+      </a:accent6>
+      <a:hlink>
+        <a:srgbClr val="0000FF"/>
+      </a:hlink>
+      <a:folHlink>
+        <a:srgbClr val="800080"/>
+      </a:folHlink>
+    </a:clrScheme>
+    <a:fontScheme name="Office">
+      <a:majorFont>
+        <a:latin typeface="Calibri"/>
+        <a:ea typeface=""/>
+        <a:cs typeface=""/>
+        <a:font script="Jpan" typeface="ＭＳ Ｐゴシック"/>
+        <a:font script="Hang" typeface="맑은 고딕"/>
+        <a:font script="Hans" typeface="宋体"/>
+        <a:font script="Hant" typeface="新細明體"/>
+        <a:font script="Arab" typeface="Times New Roman"/>
+        <a:font script="Hebr" typeface="Times New Roman"/>
+        <a:font script="Thai" typeface="Angsana New"/>
+        <a:font script="Ethi" typeface="Nyala"/>
+        <a:font script="Beng" typeface="Vrinda"/>
+        <a:font script="Gujr" typeface="Shruti"/>
+        <a:font script="Khmr" typeface="MoolBoran"/>
+        <a:font script="Knda" typeface="Tunga"/>
+        <a:font script="Guru" typeface="Raavi"/>
+        <a:font script="Cans" typeface="Euphemia"/>
+        <a:font script="Cher" typeface="Plantagenet Cherokee"/>
+        <a:font script="Yiii" typeface="Microsoft Yi Baiti"/>
+        <a:font script="Tibt" typeface="Microsoft Himalaya"/>
+        <a:font script="Thaa" typeface="MV Boli"/>
+        <a:font script="Deva" typeface="Mangal"/>
+        <a:font script="Telu" typeface="Gautami"/>
+        <a:font script="Taml" typeface="Latha"/>
+        <a:font script="Syrc" typeface="Estrangelo Edessa"/>
+        <a:font script="Orya" typeface="Kalinga"/>
+        <a:font script="Mlym" typeface="Kartika"/>
+        <a:font script="Laoo" typeface="DokChampa"/>
+        <a:font script="Sinh" typeface="Iskoola Pota"/>
+        <a:font script="Mong" typeface="Mongolian Baiti"/>
+        <a:font script="Viet" typeface="Times New Roman"/>
+        <a:font script="Uigh" typeface="Microsoft Uighur"/>
+        <a:font script="Geor" typeface="Sylfaen"/>
+      </a:majorFont>
+      <a:minorFont>
+        <a:latin typeface="Calibri"/>
+        <a:ea typeface=""/>
+        <a:cs typeface=""/>
+        <a:font script="Jpan" typeface="ＭＳ Ｐゴシック"/>
+        <a:font script="Hang" typeface="맑은 고딕"/>
+        <a:font script="Hans" typeface="宋体"/>
+        <a:font script="Hant" typeface="新細明體"/>
+        <a:font script="Arab" typeface="Arial"/>
+        <a:font script="Hebr" typeface="Arial"/>
+        <a:font script="Thai" typeface="Cordia New"/>
+        <a:font script="Ethi" typeface="Nyala"/>
+        <a:font script="Beng" typeface="Vrinda"/>
+        <a:font script="Gujr" typeface="Shruti"/>
+        <a:font script="Khmr" typeface="DaunPenh"/>
+        <a:font script="Knda" typeface="Tunga"/>
+        <a:font script="Guru" typeface="Raavi"/>
+        <a:font script="Cans" typeface="Euphemia"/>
+        <a:font script="Cher" typeface="Plantagenet Cherokee"/>
+        <a:font script="Yiii" typeface="Microsoft Yi Baiti"/>
+        <a:font script="Tibt" typeface="Microsoft Himalaya"/>
+        <a:font script="Thaa" typeface="MV Boli"/>
+        <a:font script="Deva" typeface="Mangal"/>
+        <a:font script="Telu" typeface="Gautami"/>
+        <a:font script="Taml" typeface="Latha"/>
+        <a:font script="Syrc" typeface="Estrangelo Edessa"/>
+        <a:font script="Orya" typeface="Kalinga"/>
+        <a:font script="Mlym" typeface="Kartika"/>
+        <a:font script="Laoo" typeface="DokChampa"/>
+        <a:font script="Sinh" typeface="Iskoola Pota"/>
+        <a:font script="Mong" typeface="Mongolian Baiti"/>
+        <a:font script="Viet" typeface="Arial"/>
+        <a:font script="Uigh" typeface="Microsoft Uighur"/>
+        <a:font script="Geor" typeface="Sylfaen"/>
+      </a:minorFont>
+    </a:fontScheme>
+    <a:fmtScheme name="Office">
+      <a:fillStyleLst>
+        <a:solidFill>
+          <a:schemeClr val="phClr"/>
+        </a:solidFill>
+        <a:gradFill rotWithShape="1">
+          <a:gsLst>
+            <a:gs pos="0">
+              <a:schemeClr val="phClr">
+                <a:tint val="50000"/>
+                <a:satMod val="300000"/>
+              </a:schemeClr>
+            </a:gs>
+            <a:gs pos="35000">
+              <a:schemeClr val="phClr">
+                <a:tint val="37000"/>
+                <a:satMod val="300000"/>
+              </a:schemeClr>
+            </a:gs>
+            <a:gs pos="100000">
+              <a:schemeClr val="phClr">
+                <a:tint val="15000"/>
+                <a:satMod val="350000"/>
+              </a:schemeClr>
+            </a:gs>
+          </a:gsLst>
+          <a:lin ang="16200000" scaled="1"/>
+        </a:gradFill>
+        <a:gradFill rotWithShape="1">
+          <a:gsLst>
+            <a:gs pos="0">
+              <a:schemeClr val="phClr">
+                <a:tint val="100000"/>
+                <a:shade val="100000"/>
+                <a:satMod val="130000"/>
+              </a:schemeClr>
+            </a:gs>
+            <a:gs pos="100000">
+              <a:schemeClr val="phClr">
+                <a:tint val="50000"/>
+                <a:shade val="100000"/>
+                <a:satMod val="350000"/>
+              </a:schemeClr>
+            </a:gs>
+          </a:gsLst>
+          <a:lin ang="16200000" scaled="0"/>
+        </a:gradFill>
+      </a:fillStyleLst>
+      <a:lnStyleLst>
+        <a:ln w="9525" cap="flat" cmpd="sng" algn="ctr">
+          <a:solidFill>
+            <a:schemeClr val="phClr">
+              <a:shade val="95000"/>
+              <a:satMod val="105000"/>
+            </a:schemeClr>
+          </a:solidFill>
+          <a:prstDash val="solid"/>
+        </a:ln>
+        <a:ln w="25400" cap="flat" cmpd="sng" algn="ctr">
+          <a:solidFill>
+            <a:schemeClr val="phClr"/>
+          </a:solidFill>
+          <a:prstDash val="solid"/>
+        </a:ln>
+        <a:ln w="38100" cap="flat" cmpd="sng" algn="ctr">
+          <a:solidFill>
+            <a:schemeClr val="phClr"/>
+          </a:solidFill>
+          <a:prstDash val="solid"/>
+        </a:ln>
+      </a:lnStyleLst>
+      <a:effectStyleLst>
+        <a:effectStyle>
+          <a:effectLst>
+            <a:outerShdw blurRad="40000" dist="20000" dir="5400000" rotWithShape="0">
+              <a:srgbClr val="000000">
+                <a:alpha val="38000"/>
+              </a:srgbClr>
+            </a:outerShdw>
+          </a:effectLst>
+        </a:effectStyle>
+        <a:effectStyle>
+          <a:effectLst>
+            <a:outerShdw blurRad="40000" dist="23000" dir="5400000" rotWithShape="0">
+              <a:srgbClr val="000000">
+                <a:alpha val="35000"/>
+              </a:srgbClr>
+            </a:outerShdw>
+          </a:effectLst>
+        </a:effectStyle>
+        <a:effectStyle>
+          <a:effectLst>
+            <a:outerShdw blurRad="40000" dist="23000" dir="5400000" rotWithShape="0">
+              <a:srgbClr val="000000">
+                <a:alpha val="35000"/>
+              </a:srgbClr>
+            </a:outerShdw>
+          </a:effectLst>
+          <a:scene3d>
+            <a:camera prst="orthographicFront">
+              <a:rot lat="0" lon="0" rev="0"/>
+            </a:camera>
+            <a:lightRig rig="threePt" dir="t">
+              <a:rot lat="0" lon="0" rev="1200000"/>
+            </a:lightRig>
+          </a:scene3d>
+          <a:sp3d>
+            <a:bevelT w="63500" h="25400"/>
+          </a:sp3d>
+        </a:effectStyle>
+      </a:effectStyleLst>
+      <a:bgFillStyleLst>
+        <a:solidFill>
+          <a:schemeClr val="phClr"/>
+        </a:solidFill>
+        <a:gradFill rotWithShape="1">
+          <a:gsLst>
+            <a:gs pos="0">
+              <a:schemeClr val="phClr">
+                <a:tint val="40000"/>
+                <a:satMod val="350000"/>
+              </a:schemeClr>
+            </a:gs>
+            <a:gs pos="40000">
+              <a:schemeClr val="phClr">
+                <a:tint val="45000"/>
+                <a:shade val="99000"/>
+                <a:satMod val="350000"/>
+              </a:schemeClr>
+            </a:gs>
+            <a:gs pos="100000">
+              <a:schemeClr val="phClr">
+                <a:shade val="20000"/>
+                <a:satMod val="255000"/>
+              </a:schemeClr>
+            </a:gs>
+          </a:gsLst>
+          <a:path path="circle">
+            <a:fillToRect l="50000" t="-80000" r="50000" b="180000"/>
+          </a:path>
+        </a:gradFill>
+        <a:gradFill rotWithShape="1">
+          <a:gsLst>
+            <a:gs pos="0">
+              <a:schemeClr val="phClr">
+                <a:tint val="80000"/>
+                <a:satMod val="300000"/>
+              </a:schemeClr>
+            </a:gs>
+            <a:gs pos="100000">
+              <a:schemeClr val="phClr">
+                <a:shade val="30000"/>
+                <a:satMod val="200000"/>
+              </a:schemeClr>
+            </a:gs>
+          </a:gsLst>
+          <a:path path="circle">
+            <a:fillToRect l="50000" t="50000" r="50000" b="50000"/>
+          </a:path>
+        </a:gradFill>
+      </a:bgFillStyleLst>
+    </a:fmtScheme>
+  </a:themeElements>
+  <a:objectDefaults>
+    <a:spDef>
+      <a:spPr/>
+      <a:bodyPr/>
+      <a:lstStyle/>
+      <a:style>
+        <a:lnRef idx="1">
+          <a:schemeClr val="accent1"/>
+        </a:lnRef>
+        <a:fillRef idx="3">
+          <a:schemeClr val="accent1"/>
+        </a:fillRef>
+        <a:effectRef idx="2">
+          <a:schemeClr val="accent1"/>
+        </a:effectRef>
+        <a:fontRef idx="minor">
+          <a:schemeClr val="lt1"/>
+        </a:fontRef>
+      </a:style>
+    </a:spDef>
+    <a:lnDef>
+      <a:spPr/>
+      <a:bodyPr/>
+      <a:lstStyle/>
+      <a:style>
+        <a:lnRef idx="2">
+          <a:schemeClr val="accent1"/>
+        </a:lnRef>
+        <a:fillRef idx="0">
+          <a:schemeClr val="accent1"/>
+        </a:fillRef>
+        <a:effectRef idx="1">
+          <a:schemeClr val="accent1"/>
+        </a:effectRef>
+        <a:fontRef idx="minor">
+          <a:schemeClr val="tx1"/>
+        </a:fontRef>
+      </a:style>
+    </a:lnDef>
+  </a:objectDefaults>
+  <a:extraClrSchemeLst/>
+</a:theme>
 </file>
--- a/Bases de Datos II/Clases/Clase 13 - Analisis de casos reales/Presentacion.pptx
+++ b/Bases de Datos II/Clases/Clase 13 - Analisis de casos reales/Presentacion.pptx
@@ -10,7 +10,7 @@
     <p:sldId id="258" r:id="rId9"/>
     <p:sldId id="259" r:id="rId10"/>
     <p:sldId id="260" r:id="rId11"/>
-    <p:sldId id="261" r:id="rId12"/>
+    <p:sldId id="261" r:id="rId13"/>
     <p:sldId id="262" r:id="rId14"/>
     <p:sldId id="263" r:id="rId15"/>
     <p:sldId id="264" r:id="rId16"/>
@@ -522,7 +522,12 @@
           <a:lstStyle/>
           <a:p>
             <a:r>
-              <a:t>Conviene ademas admitir la existencia de factores contribuyentes, que son condiciones que empeoraron el resultado sin haberlo causado, como que el incidente ocurriera de noche, que la documentacion estuviera desactualizada o que el unico que sabia restaurar estuviera de vacaciones.</a:t>
+              <a:t>Fuera de la lamina (habla de la practica, no del tema):</a:t>
+            </a:r>
+          </a:p>
+          <a:p>
+            <a:r>
+              <a:t>- El entregable de hoy es una tabla de cuatro columnas, Contexto, Fallo, Leccion y Cambio en VetCare, con tres casos, y se sube a PostgreSQL en el navegador.</a:t>
             </a:r>
           </a:p>
         </p:txBody>
@@ -592,17 +597,7 @@
           <a:lstStyle/>
           <a:p>
             <a:r>
-              <a:t>Eso es la causa proxima.</a:t>
-            </a:r>
-          </a:p>
-          <a:p>
-            <a:r>
-              <a:t>Lo que convirtio un error humano corriente en un incidente historico fue que, al intentar recuperar, la compania descubrio que sus cinco mecanismos de respaldo y replicacion fallaban de una u otra forma: entre otras cosas, la herramienta de volcado logico fallaba en silencio por una diferencia de version entre cliente y servidor, y las copias que debian estar en almacenamiento remoto estaban vacias.</a:t>
-            </a:r>
-          </a:p>
-          <a:p>
-            <a:r>
-              <a:t>Terminaron restaurando desde una copia de trabajo de unas seis horas antes y perdieron de forma definitiva la informacion creada en esa ventana, del orden de miles de proyectos y comentarios.</a:t>
+              <a:t>Conviene ademas admitir la existencia de factores contribuyentes, que son condiciones que empeoraron el resultado sin haberlo causado, como que el incidente ocurriera de noche, que la documentacion estuviera desactualizada o que el unico que sabia restaurar estuviera de vacaciones.</a:t>
             </a:r>
           </a:p>
         </p:txBody>
@@ -672,12 +667,17 @@
           <a:lstStyle/>
           <a:p>
             <a:r>
-              <a:t>Caso dos, permisos excesivos.</a:t>
-            </a:r>
-          </a:p>
-          <a:p>
-            <a:r>
-              <a:t>Y hay que decir la parte incomoda, porque es la que se repite en los proyectos de curso: casi todos los estudiantes hacen que la aplicacion se conecte con un usuario que tiene todo, porque asi nunca aparece un error de permisos y se avanza mas rapido.</a:t>
+              <a:t>Eso es la causa proxima.</a:t>
+            </a:r>
+          </a:p>
+          <a:p>
+            <a:r>
+              <a:t>Lo que convirtio un error humano corriente en un incidente historico fue que, al intentar recuperar, la compania descubrio que sus cinco mecanismos de respaldo y replicacion fallaban de una u otra forma: entre otras cosas, la herramienta de volcado logico fallaba en silencio por una diferencia de version entre cliente y servidor, y las copias que debian estar en almacenamiento remoto estaban vacias.</a:t>
+            </a:r>
+          </a:p>
+          <a:p>
+            <a:r>
+              <a:t>Terminaron restaurando desde una copia de trabajo de unas seis horas antes y perdieron de forma definitiva la informacion creada en esa ventana, del orden de miles de proyectos y comentarios.</a:t>
             </a:r>
           </a:p>
         </p:txBody>
@@ -747,7 +747,12 @@
           <a:lstStyle/>
           <a:p>
             <a:r>
-              <a:t>Caso tres, perdida de datos durante una migracion.</a:t>
+              <a:t>Caso dos, permisos excesivos.</a:t>
+            </a:r>
+          </a:p>
+          <a:p>
+            <a:r>
+              <a:t>Y hay que decir la parte incomoda, porque es la que se repite en los proyectos de curso: casi todos los estudiantes hacen que la aplicacion se conecte con un usuario que tiene todo, porque asi nunca aparece un error de permisos y se avanza mas rapido.</a:t>
             </a:r>
           </a:p>
         </p:txBody>
@@ -817,7 +822,7 @@
           <a:lstStyle/>
           <a:p>
             <a:r>
-              <a:t>Caso cuatro, concurrencia.</a:t>
+              <a:t>Caso tres, perdida de datos durante una migracion.</a:t>
             </a:r>
           </a:p>
         </p:txBody>
@@ -887,12 +892,157 @@
           <a:lstStyle/>
           <a:p>
             <a:r>
+              <a:t>Caso cuatro, concurrencia.</a:t>
+            </a:r>
+          </a:p>
+        </p:txBody>
+      </p:sp>
+      <p:sp>
+        <p:nvSpPr>
+          <p:cNvPr id="4" name="Slide Number Placeholder 3"/>
+          <p:cNvSpPr>
+            <a:spLocks noGrp="1"/>
+          </p:cNvSpPr>
+          <p:nvPr>
+            <p:ph type="sldNum" idx="5" sz="quarter"/>
+          </p:nvPr>
+        </p:nvSpPr>
+        <p:spPr/>
+      </p:sp>
+    </p:spTree>
+  </p:cSld>
+  <p:clrMapOvr>
+    <a:masterClrMapping/>
+  </p:clrMapOvr>
+</p:notes>
+</file>
+
+<file path=ppt/notesSlides/notesSlide7.xml><?xml version="1.0" encoding="utf-8"?>
+<p:notes xmlns:a="http://schemas.openxmlformats.org/drawingml/2006/main" xmlns:p="http://schemas.openxmlformats.org/presentationml/2006/main" xmlns:r="http://schemas.openxmlformats.org/officeDocument/2006/relationships">
+  <p:cSld>
+    <p:spTree>
+      <p:nvGrpSpPr>
+        <p:cNvPr id="1" name=""/>
+        <p:cNvGrpSpPr/>
+        <p:nvPr/>
+      </p:nvGrpSpPr>
+      <p:grpSpPr>
+        <a:xfrm>
+          <a:off x="0" y="0"/>
+          <a:ext cx="0" cy="0"/>
+          <a:chOff x="0" y="0"/>
+          <a:chExt cx="0" cy="0"/>
+        </a:xfrm>
+      </p:grpSpPr>
+      <p:sp>
+        <p:nvSpPr>
+          <p:cNvPr id="2" name="Slide Image Placeholder 1"/>
+          <p:cNvSpPr>
+            <a:spLocks noGrp="1"/>
+          </p:cNvSpPr>
+          <p:nvPr>
+            <p:ph type="sldImg" idx="2"/>
+          </p:nvPr>
+        </p:nvSpPr>
+        <p:spPr/>
+      </p:sp>
+      <p:sp>
+        <p:nvSpPr>
+          <p:cNvPr id="3" name="Notes Placeholder 2"/>
+          <p:cNvSpPr>
+            <a:spLocks noGrp="1"/>
+          </p:cNvSpPr>
+          <p:nvPr>
+            <p:ph type="body" idx="3" sz="quarter"/>
+          </p:nvPr>
+        </p:nvSpPr>
+        <p:spPr/>
+        <p:txBody>
+          <a:bodyPr/>
+          <a:lstStyle/>
+          <a:p>
+            <a:r>
               <a:t>Lo que decide la calificacion de hoy no es reunir casos sino escribir lecciones accionables, y esa es la habilidad que el estudiante debe practicar sin ayuda.</a:t>
             </a:r>
           </a:p>
           <a:p>
             <a:r>
               <a:t>Compare las dos versiones.</a:t>
+            </a:r>
+          </a:p>
+        </p:txBody>
+      </p:sp>
+      <p:sp>
+        <p:nvSpPr>
+          <p:cNvPr id="4" name="Slide Number Placeholder 3"/>
+          <p:cNvSpPr>
+            <a:spLocks noGrp="1"/>
+          </p:cNvSpPr>
+          <p:nvPr>
+            <p:ph type="sldNum" idx="5" sz="quarter"/>
+          </p:nvPr>
+        </p:nvSpPr>
+        <p:spPr/>
+      </p:sp>
+    </p:spTree>
+  </p:cSld>
+  <p:clrMapOvr>
+    <a:masterClrMapping/>
+  </p:clrMapOvr>
+</p:notes>
+</file>
+
+<file path=ppt/notesSlides/notesSlide8.xml><?xml version="1.0" encoding="utf-8"?>
+<p:notes xmlns:a="http://schemas.openxmlformats.org/drawingml/2006/main" xmlns:p="http://schemas.openxmlformats.org/presentationml/2006/main" xmlns:r="http://schemas.openxmlformats.org/officeDocument/2006/relationships">
+  <p:cSld>
+    <p:spTree>
+      <p:nvGrpSpPr>
+        <p:cNvPr id="1" name=""/>
+        <p:cNvGrpSpPr/>
+        <p:nvPr/>
+      </p:nvGrpSpPr>
+      <p:grpSpPr>
+        <a:xfrm>
+          <a:off x="0" y="0"/>
+          <a:ext cx="0" cy="0"/>
+          <a:chOff x="0" y="0"/>
+          <a:chExt cx="0" cy="0"/>
+        </a:xfrm>
+      </p:grpSpPr>
+      <p:sp>
+        <p:nvSpPr>
+          <p:cNvPr id="2" name="Slide Image Placeholder 1"/>
+          <p:cNvSpPr>
+            <a:spLocks noGrp="1"/>
+          </p:cNvSpPr>
+          <p:nvPr>
+            <p:ph type="sldImg" idx="2"/>
+          </p:nvPr>
+        </p:nvSpPr>
+        <p:spPr/>
+      </p:sp>
+      <p:sp>
+        <p:nvSpPr>
+          <p:cNvPr id="3" name="Notes Placeholder 2"/>
+          <p:cNvSpPr>
+            <a:spLocks noGrp="1"/>
+          </p:cNvSpPr>
+          <p:nvPr>
+            <p:ph type="body" idx="3" sz="quarter"/>
+          </p:nvPr>
+        </p:nvSpPr>
+        <p:spPr/>
+        <p:txBody>
+          <a:bodyPr/>
+          <a:lstStyle/>
+          <a:p>
+            <a:r>
+              <a:t>Fuera de la lamina (habla de la practica, no del tema):</a:t>
+            </a:r>
+          </a:p>
+          <a:p>
+            <a:r>
+              <a:t>- Porque separar hecho de suposicion es parte de la nota; y si preguntan cuanto debe medir cada celda, la convencion de este entregable es de tres a cinco lineas.</a:t>
             </a:r>
           </a:p>
         </p:txBody>
@@ -6647,7 +6797,7 @@
                 </a:solidFill>
                 <a:latin typeface="Calibri"/>
               </a:rPr>
-              <a:t>–   Porque separar hecho de suposicion es parte de la nota; y si preguntan cuanto debe medir cada celda, la convencion de este entregable es de tres a cinco lineas.</a:t>
+              <a:t>–   Porque separar hecho de suposicion es parte de la nota; y si preguntan cuanto debe medir cada celda.</a:t>
             </a:r>
           </a:p>
         </p:txBody>
@@ -9417,22 +9567,6 @@
                 <a:latin typeface="Calibri"/>
               </a:rPr>
               <a:t>–   Un incidente, para nuestros fines, es cualquier evento que degrada el servicio o pone en riesgo los datos, y merece post-mortem tanto el que llego al usuario como el que se detuvo a tiempo.</a:t>
-            </a:r>
-          </a:p>
-          <a:p>
-            <a:pPr>
-              <a:spcAft>
-                <a:spcPts val="800"/>
-              </a:spcAft>
-            </a:pPr>
-            <a:r>
-              <a:rPr sz="2000" b="0" i="0">
-                <a:solidFill>
-                  <a:srgbClr val="333333"/>
-                </a:solidFill>
-                <a:latin typeface="Calibri"/>
-              </a:rPr>
-              <a:t>–   El entregable de hoy es una tabla de cuatro columnas, Contexto, Fallo, Leccion y Cambio en VetCare, con tres casos, y se sube a la plataforma del curso.</a:t>
             </a:r>
           </a:p>
         </p:txBody>

--- a/Bases de Datos II/Clases/Clase 13 - Analisis de casos reales/Presentacion.pptx
+++ b/Bases de Datos II/Clases/Clase 13 - Analisis de casos reales/Presentacion.pptx
@@ -9,7 +9,7 @@
     <p:sldId id="257" r:id="rId8"/>
     <p:sldId id="258" r:id="rId9"/>
     <p:sldId id="259" r:id="rId10"/>
-    <p:sldId id="260" r:id="rId11"/>
+    <p:sldId id="260" r:id="rId12"/>
     <p:sldId id="261" r:id="rId13"/>
     <p:sldId id="262" r:id="rId14"/>
     <p:sldId id="263" r:id="rId15"/>
@@ -522,12 +522,7 @@
           <a:lstStyle/>
           <a:p>
             <a:r>
-              <a:t>Fuera de la lamina (habla de la practica, no del tema):</a:t>
-            </a:r>
-          </a:p>
-          <a:p>
-            <a:r>
-              <a:t>- El entregable de hoy es una tabla de cuatro columnas, Contexto, Fallo, Leccion y Cambio en VetCare, con tres casos, y se sube a PostgreSQL en el navegador.</a:t>
+              <a:t>Fuera de la lamina (habla de la practica): El entregable de hoy es una tabla de cuatro columnas, Contexto, Fallo, Leccion y Cambio en VetCare, con tres casos, y se sube a PostgreSQL en el navegador.</a:t>
             </a:r>
           </a:p>
         </p:txBody>
@@ -970,79 +965,9 @@
               <a:t>Compare las dos versiones.</a:t>
             </a:r>
           </a:p>
-        </p:txBody>
-      </p:sp>
-      <p:sp>
-        <p:nvSpPr>
-          <p:cNvPr id="4" name="Slide Number Placeholder 3"/>
-          <p:cNvSpPr>
-            <a:spLocks noGrp="1"/>
-          </p:cNvSpPr>
-          <p:nvPr>
-            <p:ph type="sldNum" idx="5" sz="quarter"/>
-          </p:nvPr>
-        </p:nvSpPr>
-        <p:spPr/>
-      </p:sp>
-    </p:spTree>
-  </p:cSld>
-  <p:clrMapOvr>
-    <a:masterClrMapping/>
-  </p:clrMapOvr>
-</p:notes>
-</file>
-
-<file path=ppt/notesSlides/notesSlide8.xml><?xml version="1.0" encoding="utf-8"?>
-<p:notes xmlns:a="http://schemas.openxmlformats.org/drawingml/2006/main" xmlns:p="http://schemas.openxmlformats.org/presentationml/2006/main" xmlns:r="http://schemas.openxmlformats.org/officeDocument/2006/relationships">
-  <p:cSld>
-    <p:spTree>
-      <p:nvGrpSpPr>
-        <p:cNvPr id="1" name=""/>
-        <p:cNvGrpSpPr/>
-        <p:nvPr/>
-      </p:nvGrpSpPr>
-      <p:grpSpPr>
-        <a:xfrm>
-          <a:off x="0" y="0"/>
-          <a:ext cx="0" cy="0"/>
-          <a:chOff x="0" y="0"/>
-          <a:chExt cx="0" cy="0"/>
-        </a:xfrm>
-      </p:grpSpPr>
-      <p:sp>
-        <p:nvSpPr>
-          <p:cNvPr id="2" name="Slide Image Placeholder 1"/>
-          <p:cNvSpPr>
-            <a:spLocks noGrp="1"/>
-          </p:cNvSpPr>
-          <p:nvPr>
-            <p:ph type="sldImg" idx="2"/>
-          </p:nvPr>
-        </p:nvSpPr>
-        <p:spPr/>
-      </p:sp>
-      <p:sp>
-        <p:nvSpPr>
-          <p:cNvPr id="3" name="Notes Placeholder 2"/>
-          <p:cNvSpPr>
-            <a:spLocks noGrp="1"/>
-          </p:cNvSpPr>
-          <p:nvPr>
-            <p:ph type="body" idx="3" sz="quarter"/>
-          </p:nvPr>
-        </p:nvSpPr>
-        <p:spPr/>
-        <p:txBody>
-          <a:bodyPr/>
-          <a:lstStyle/>
-          <a:p>
-            <a:r>
-              <a:t>Fuera de la lamina (habla de la practica, no del tema):</a:t>
-            </a:r>
-          </a:p>
-          <a:p>
-            <a:r>
-              <a:t>- Porque separar hecho de suposicion es parte de la nota; y si preguntan cuanto debe medir cada celda, la convencion de este entregable es de tres a cinco lineas.</a:t>
+          <a:p>
+            <a:r>
+              <a:t>Fuera de la lamina (habla de la practica): Sobre las preguntas que llegaran por el canal del curso: si piden inventar un caso, la respuesta es no, cada caso debe ser verificable con una fuente publica o declararse explicitamente como hipotetico; si el caso no tiene detalle tecnico publicado, se escribe solo lo documentado y se marca aparte lo que es inferencia propia, porque separar hecho de suposicion es parte de la nota; y si preguntan cuanto debe medir cada celda, la convencion de este entregable es de tres a cinco lineas.</a:t>
             </a:r>
           </a:p>
         </p:txBody>
@@ -6248,22 +6173,6 @@
               <a:t>–   Version accionable: el primer lunes de cada mes se restaura el respaldo mas reciente en un esquema temporal de Oracle Live SQL o del entorno de pruebas, se comparan los conteos de filas de Dueno, Mascota, Cita y Factura contra produccion</a:t>
             </a:r>
           </a:p>
-          <a:p>
-            <a:pPr>
-              <a:spcAft>
-                <a:spcPts val="800"/>
-              </a:spcAft>
-            </a:pPr>
-            <a:r>
-              <a:rPr sz="2000" b="0" i="0">
-                <a:solidFill>
-                  <a:srgbClr val="333333"/>
-                </a:solidFill>
-                <a:latin typeface="Calibri"/>
-              </a:rPr>
-              <a:t>–   Y se registra fecha y resultado en la bitacora del proyecto; si no hay registro del mes, se declara que no hay respaldo.</a:t>
-            </a:r>
-          </a:p>
         </p:txBody>
       </p:sp>
       <p:sp>
@@ -6481,7 +6390,7 @@
                 </a:solidFill>
                 <a:latin typeface="Calibri"/>
               </a:rPr>
-              <a:t>–   La segunda se puede auditar, la primera es una intencion.</a:t>
+              <a:t>–   Y se registra fecha y resultado en la bitacora del proyecto; si no hay registro del mes, se declara que no hay respaldo.</a:t>
             </a:r>
           </a:p>
           <a:p>
@@ -6497,7 +6406,7 @@
                 </a:solidFill>
                 <a:latin typeface="Calibri"/>
               </a:rPr>
-              <a:t>–   Aplique el mismo molde a los otros casos y ya tiene la cuarta columna de la tabla: del caso de permisos sale crear el rol rol_vetcare_app con GRANT EXECUTE sobre los procedimientos y revocar todo SELECT</a:t>
+              <a:t>–   La segunda se puede auditar, la primera es una intencion.</a:t>
             </a:r>
           </a:p>
           <a:p>
@@ -6513,7 +6422,7 @@
                 </a:solidFill>
                 <a:latin typeface="Calibri"/>
               </a:rPr>
-              <a:t>–   INSERT, UPDATE y DELETE directo sobre las tablas, verificado consultando las vistas de privilegios</a:t>
+              <a:t>–   Aplique el mismo molde a los otros casos y ya tiene la cuarta columna de la tabla: del caso de permisos sale crear el rol rol_vetcare_app con GRANT EXECUTE sobre los procedimientos y revocar todo SELECT</a:t>
             </a:r>
           </a:p>
           <a:p>
@@ -6529,7 +6438,7 @@
                 </a:solidFill>
                 <a:latin typeface="Calibri"/>
               </a:rPr>
-              <a:t>–   Del caso de concurrencia sale ALTER TABLE Cita ADD CONSTRAINT uq_cita_vet_franja UNIQUE (id_veterinario, fecha_hora) mas SELECT FOR UPDATE al descontar stock, verificado con dos sesiones simultaneas</a:t>
+              <a:t>–   INSERT, UPDATE y DELETE directo sobre las tablas, verificado consultando las vistas de privilegios</a:t>
             </a:r>
           </a:p>
           <a:p>
@@ -6545,7 +6454,7 @@
                 </a:solidFill>
                 <a:latin typeface="Calibri"/>
               </a:rPr>
-              <a:t>–   Del caso de migracion sale que todo cambio de esquema tenga script de ida, script de retorno y conteo de verificacion.</a:t>
+              <a:t>–   Del caso de concurrencia sale ALTER TABLE Cita ADD CONSTRAINT uq_cita_vet_franja UNIQUE (id_veterinario, fecha_hora) mas SELECT FOR UPDATE al descontar stock, verificado con dos sesiones simultaneas</a:t>
             </a:r>
           </a:p>
         </p:txBody>
@@ -6765,7 +6674,7 @@
                 </a:solidFill>
                 <a:latin typeface="Calibri"/>
               </a:rPr>
-              <a:t>–   Sobre las preguntas que llegaran por el canal del curso: si piden inventar un caso, la respuesta es no, cada caso debe ser verificable con una fuente publica o declararse explicitamente como hipotetico</a:t>
+              <a:t>–   Del caso de migracion sale que todo cambio de esquema tenga script de ida, script de retorno y conteo de verificacion.</a:t>
             </a:r>
           </a:p>
           <a:p>
@@ -6781,7 +6690,7 @@
                 </a:solidFill>
                 <a:latin typeface="Calibri"/>
               </a:rPr>
-              <a:t>–   Si el caso no tiene detalle tecnico publicado, se escribe solo lo documentado y se marca aparte lo que es inferencia propia</a:t>
+              <a:t>–   Sobre las preguntas que llegaran por el canal del curso: si piden inventar un caso, la respuesta es no, cada caso debe ser verificable con una fuente publica o declararse explicitamente como hipotetico</a:t>
             </a:r>
           </a:p>
           <a:p>
@@ -6797,7 +6706,7 @@
                 </a:solidFill>
                 <a:latin typeface="Calibri"/>
               </a:rPr>
-              <a:t>–   Porque separar hecho de suposicion es parte de la nota; y si preguntan cuanto debe medir cada celda.</a:t>
+              <a:t>–   Si el caso no tiene detalle tecnico publicado, se escribe solo lo documentado y se marca aparte lo que es inferencia propia, porque separar hecho de suposicion es parte de la nota; y si preguntan cuanto debe medir cada celda.</a:t>
             </a:r>
           </a:p>
         </p:txBody>
@@ -7661,6 +7570,40 @@
               <a:t>–   Cada lámina se sostiene sola: sirve para repasar aunque hayas faltado.</a:t>
             </a:r>
           </a:p>
+          <a:p>
+            <a:pPr>
+              <a:spcAft>
+                <a:spcPts val="800"/>
+              </a:spcAft>
+            </a:pPr>
+            <a:r>
+              <a:rPr sz="2000" b="0" i="0">
+                <a:solidFill>
+                  <a:srgbClr val="333333"/>
+                </a:solidFill>
+                <a:latin typeface="Calibri"/>
+              </a:rPr>
+              <a:t>–   </a:t>
+            </a:r>
+            <a:r>
+              <a:rPr sz="2000" b="1" i="0">
+                <a:solidFill>
+                  <a:srgbClr val="333333"/>
+                </a:solidFill>
+                <a:latin typeface="Calibri"/>
+              </a:rPr>
+              <a:t>Conceptos de hoy:</a:t>
+            </a:r>
+            <a:r>
+              <a:rPr sz="2000" b="0" i="0">
+                <a:solidFill>
+                  <a:srgbClr val="333333"/>
+                </a:solidFill>
+                <a:latin typeface="Calibri"/>
+              </a:rPr>
+              <a:t> Clase autonoma · Causa proxima y causa raiz · Caso uno · Caso dos.</a:t>
+            </a:r>
+          </a:p>
         </p:txBody>
       </p:sp>
       <p:sp>
@@ -7962,7 +7905,59 @@
                 </a:solidFill>
                 <a:latin typeface="Calibri"/>
               </a:rPr>
-              <a:t>–   Al final de la demo: dejar enlace/script compartible al grupo.</a:t>
+              <a:t>–   </a:t>
+            </a:r>
+            <a:r>
+              <a:rPr sz="2000" b="1" i="0">
+                <a:solidFill>
+                  <a:srgbClr val="333333"/>
+                </a:solidFill>
+                <a:latin typeface="Calibri"/>
+              </a:rPr>
+              <a:t>Qué observar:</a:t>
+            </a:r>
+            <a:r>
+              <a:rPr sz="2000" b="0" i="0">
+                <a:solidFill>
+                  <a:srgbClr val="333333"/>
+                </a:solidFill>
+                <a:latin typeface="Calibri"/>
+              </a:rPr>
+              <a:t> cada caso se separa en contexto, fallo, causa raiz y la leccion convertida en una accion verificable sobre VetCare DB.</a:t>
+            </a:r>
+          </a:p>
+          <a:p>
+            <a:pPr>
+              <a:spcAft>
+                <a:spcPts val="800"/>
+              </a:spcAft>
+            </a:pPr>
+            <a:r>
+              <a:rPr sz="2000" b="0" i="0">
+                <a:solidFill>
+                  <a:srgbClr val="333333"/>
+                </a:solidFill>
+                <a:latin typeface="Calibri"/>
+              </a:rPr>
+              <a:t>–   </a:t>
+            </a:r>
+            <a:r>
+              <a:rPr sz="2000" b="1" i="0">
+                <a:solidFill>
+                  <a:srgbClr val="333333"/>
+                </a:solidFill>
+                <a:latin typeface="Calibri"/>
+              </a:rPr>
+              <a:t>Qué observar:</a:t>
+            </a:r>
+            <a:r>
+              <a:rPr sz="2000" b="0" i="0">
+                <a:solidFill>
+                  <a:srgbClr val="333333"/>
+                </a:solidFill>
+                <a:latin typeface="Calibri"/>
+              </a:rPr>
+              <a:t> una leccion accionable tiene verbo, artefacto, frecuencia o umbral, y una forma de comprobar que se hizo.</a:t>
             </a:r>
           </a:p>
         </p:txBody>
@@ -9317,22 +9312,6 @@
               <a:t>–   Que es un documento breve producido despues del incidente y que responde cuatro preguntas: que paso, cuando y con que impacto medible, por que fue posible, y que se va a cambiar para que no vuelva a ocurrir de la misma manera.</a:t>
             </a:r>
           </a:p>
-          <a:p>
-            <a:pPr>
-              <a:spcAft>
-                <a:spcPts val="800"/>
-              </a:spcAft>
-            </a:pPr>
-            <a:r>
-              <a:rPr sz="2000" b="0" i="0">
-                <a:solidFill>
-                  <a:srgbClr val="333333"/>
-                </a:solidFill>
-                <a:latin typeface="Calibri"/>
-              </a:rPr>
-              <a:t>–   La palabra clave del oficio es blameless, sin culpables: la regla es que se analiza el sistema y no la persona.</a:t>
-            </a:r>
-          </a:p>
         </p:txBody>
       </p:sp>
       <p:sp>
@@ -9537,6 +9516,22 @@
             <a:spAutoFit/>
           </a:bodyPr>
           <a:lstStyle/>
+          <a:p>
+            <a:pPr>
+              <a:spcAft>
+                <a:spcPts val="800"/>
+              </a:spcAft>
+            </a:pPr>
+            <a:r>
+              <a:rPr sz="2000" b="0" i="0">
+                <a:solidFill>
+                  <a:srgbClr val="333333"/>
+                </a:solidFill>
+                <a:latin typeface="Calibri"/>
+              </a:rPr>
+              <a:t>–   La palabra clave del oficio es blameless, sin culpables: la regla es que se analiza el sistema y no la persona.</a:t>
+            </a:r>
+          </a:p>
           <a:p>
             <a:pPr>
               <a:spcAft>

--- a/Bases de Datos II/Clases/Clase 13 - Analisis de casos reales/Presentacion.pptx
+++ b/Bases de Datos II/Clases/Clase 13 - Analisis de casos reales/Presentacion.pptx
@@ -522,7 +522,7 @@
           <a:lstStyle/>
           <a:p>
             <a:r>
-              <a:t>Fuera de la lamina (habla de la practica): El entregable de hoy es una tabla de cuatro columnas, Contexto, Fallo, Leccion y Cambio en VetCare, con tres casos, y se sube a PostgreSQL en el navegador.</a:t>
+              <a:t>Fuera de la lamina (habla de la practica): El entregable de hoy es una tabla de cuatro columnas, Contexto, Fallo, Leccion y Cambio en la clínica, con tres casos, y se sube a PostgreSQL en el navegador.</a:t>
             </a:r>
           </a:p>
         </p:txBody>
@@ -4226,13 +4226,13 @@
           <a:p>
             <a:pPr algn="ctr"/>
             <a:r>
-              <a:rPr sz="4000" b="1" i="0">
+              <a:rPr sz="3400" b="1" i="0">
                 <a:solidFill>
                   <a:srgbClr val="FFFFFF"/>
                 </a:solidFill>
                 <a:latin typeface="Calibri"/>
               </a:rPr>
-              <a:t>Analisis de casos reales · VetCare</a:t>
+              <a:t>Analisis de casos reales · la clínica</a:t>
             </a:r>
           </a:p>
         </p:txBody>
@@ -4310,7 +4310,7 @@
                 </a:solidFill>
                 <a:latin typeface="Calibri"/>
               </a:rPr>
-              <a:t>Clase autonoma · lecciones para el PI</a:t>
+              <a:t>Clase autonoma · lecciones para el proyecto</a:t>
             </a:r>
           </a:p>
         </p:txBody>
@@ -5902,7 +5902,7 @@
                 </a:solidFill>
                 <a:latin typeface="Calibri"/>
               </a:rPr>
-              <a:t>–   Y hay una leccion organizacional gratis: estos defectos jamas aparecen probando con un usuario, asi que si el estudiante solo probo VetCare desde una sola maquina, no lo probo.</a:t>
+              <a:t>–   Y hay una leccion organizacional gratis: estos defectos jamas aparecen probando con un usuario, asi que si el estudiante solo probo la clínica desde una sola maquina, no lo probo.</a:t>
             </a:r>
           </a:p>
         </p:txBody>
@@ -6422,7 +6422,7 @@
                 </a:solidFill>
                 <a:latin typeface="Calibri"/>
               </a:rPr>
-              <a:t>–   Aplique el mismo molde a los otros casos y ya tiene la cuarta columna de la tabla: del caso de permisos sale crear el rol rol_vetcare_app con GRANT EXECUTE sobre los procedimientos y revocar todo SELECT</a:t>
+              <a:t>–   Aplique el mismo molde a los otros casos y ya tiene la cuarta columna de la tabla: del caso de permisos sale crear el rol rol_clinica_app con GRANT EXECUTE sobre los procedimientos y revocar todo SELECT</a:t>
             </a:r>
           </a:p>
           <a:p>
@@ -7476,7 +7476,7 @@
                 </a:solidFill>
                 <a:latin typeface="Calibri"/>
               </a:rPr>
-              <a:t> Analisis de casos reales · VetCare</a:t>
+              <a:t> Analisis de casos reales · la clínica</a:t>
             </a:r>
           </a:p>
           <a:p>
@@ -7551,7 +7551,7 @@
                 </a:solidFill>
                 <a:latin typeface="Calibri"/>
               </a:rPr>
-              <a:t>–   Recorrido: teoría del tema, una lámina por concepto, y demo del docente sobre VetCare DB.</a:t>
+              <a:t>–   Recorrido: teoría del tema, una lámina por concepto, y demo del docente sobre la base de la clínica.</a:t>
             </a:r>
           </a:p>
           <a:p>
@@ -7873,7 +7873,7 @@
                 </a:solidFill>
                 <a:latin typeface="Calibri"/>
               </a:rPr>
-              <a:t> Plantilla: contexto -&gt; fallo -&gt; leccion -&gt; cambio en VetCare.</a:t>
+              <a:t> Plantilla: contexto -&gt; fallo -&gt; leccion -&gt; cambio en la clínica.</a:t>
             </a:r>
           </a:p>
           <a:p>
@@ -7889,7 +7889,7 @@
                 </a:solidFill>
                 <a:latin typeface="Calibri"/>
               </a:rPr>
-              <a:t>–   Sigan el mismo dominio VetCare (no inventen otro caso).</a:t>
+              <a:t>–   Sigan el mismo dominio de la clínica (no inventen otro caso).</a:t>
             </a:r>
           </a:p>
           <a:p>
@@ -7923,7 +7923,7 @@
                 </a:solidFill>
                 <a:latin typeface="Calibri"/>
               </a:rPr>
-              <a:t> cada caso se separa en contexto, fallo, causa raiz y la leccion convertida en una accion verificable sobre VetCare DB.</a:t>
+              <a:t> cada caso se separa en contexto, fallo, causa raiz y la leccion convertida en una accion verificable sobre la base de la clínica.</a:t>
             </a:r>
           </a:p>
           <a:p>
@@ -8118,7 +8118,7 @@
                 </a:solidFill>
                 <a:latin typeface="Calibri"/>
               </a:rPr>
-              <a:t>Clase 13 · Analisis de casos reales · VetCare</a:t>
+              <a:t>Clase 13 · Analisis de casos reales · la clínica</a:t>
             </a:r>
           </a:p>
         </p:txBody>
@@ -8528,7 +8528,7 @@
                 </a:solidFill>
                 <a:latin typeface="Calibri"/>
               </a:rPr>
-              <a:t>Encuadre · clase autonoma (festivo) · VetCare</a:t>
+              <a:t>Encuadre · clase autonoma (festivo) · la clínica</a:t>
             </a:r>
           </a:p>
         </p:txBody>
@@ -8643,7 +8643,7 @@
                 </a:solidFill>
                 <a:latin typeface="Calibri"/>
               </a:rPr>
-              <a:t>Teoría Core breve (al servicio del PI)</a:t>
+              <a:t>Teoría Core breve (al servicio del proyecto)</a:t>
             </a:r>
           </a:p>
         </p:txBody>
@@ -9829,7 +9829,7 @@
                 </a:solidFill>
                 <a:latin typeface="Calibri"/>
               </a:rPr>
-              <a:t>–   Un ejemplo con VetCare: el disco del servidor falla un viernes y se pierden tres semanas de historias clinicas.</a:t>
+              <a:t>–   Un ejemplo con la clínica: el disco del servidor falla un viernes y se pierden tres semanas de historias clinicas.</a:t>
             </a:r>
           </a:p>
           <a:p>

--- a/Bases de Datos II/Clases/Clase 13 - Analisis de casos reales/Presentacion.pptx
+++ b/Bases de Datos II/Clases/Clase 13 - Analisis de casos reales/Presentacion.pptx
@@ -7,8 +7,8 @@
   <p:sldIdLst>
     <p:sldId id="256" r:id="rId7"/>
     <p:sldId id="257" r:id="rId8"/>
-    <p:sldId id="258" r:id="rId9"/>
-    <p:sldId id="259" r:id="rId10"/>
+    <p:sldId id="258" r:id="rId10"/>
+    <p:sldId id="259" r:id="rId11"/>
     <p:sldId id="260" r:id="rId12"/>
     <p:sldId id="261" r:id="rId13"/>
     <p:sldId id="262" r:id="rId14"/>
@@ -18,14 +18,6 @@
     <p:sldId id="266" r:id="rId18"/>
     <p:sldId id="267" r:id="rId19"/>
     <p:sldId id="268" r:id="rId20"/>
-    <p:sldId id="269" r:id="rId21"/>
-    <p:sldId id="270" r:id="rId22"/>
-    <p:sldId id="271" r:id="rId23"/>
-    <p:sldId id="272" r:id="rId24"/>
-    <p:sldId id="273" r:id="rId25"/>
-    <p:sldId id="274" r:id="rId26"/>
-    <p:sldId id="275" r:id="rId27"/>
-    <p:sldId id="276" r:id="rId28"/>
   </p:sldIdLst>
   <p:sldSz cx="12191695" cy="6858000" type="screen4x3"/>
   <p:notesSz cx="6858000" cy="9144000"/>
@@ -522,7 +514,43 @@
           <a:lstStyle/>
           <a:p>
             <a:r>
-              <a:t>Fuera de la lamina (habla de la practica): El entregable de hoy es una tabla de cuatro columnas, Contexto, Fallo, Leccion y Cambio en la clínica, con tres casos, y se sube a PostgreSQL en el navegador.</a:t>
+              <a:t>TEXTO COMPLETO DE LA LÁMINA (se proyecta resumido):</a:t>
+            </a:r>
+          </a:p>
+          <a:p/>
+          <a:p>
+            <a:r>
+              <a:t>Tema de hoy: Analisis de casos reales · la clínica</a:t>
+            </a:r>
+          </a:p>
+          <a:p/>
+          <a:p>
+            <a:r>
+              <a:t>Herramienta: Google Docs · Bloque 120 min</a:t>
+            </a:r>
+          </a:p>
+          <a:p/>
+          <a:p>
+            <a:r>
+              <a:t>Gratis + navegador · free tier · sin software de pago obligatorio.</a:t>
+            </a:r>
+          </a:p>
+          <a:p/>
+          <a:p>
+            <a:r>
+              <a:t>Recorrido: teoría del tema, una lámina por concepto, y demo del docente sobre la base de la clínica.</a:t>
+            </a:r>
+          </a:p>
+          <a:p/>
+          <a:p>
+            <a:r>
+              <a:t>Cada lámina se sostiene sola: sirve para repasar aunque hayas faltado.</a:t>
+            </a:r>
+          </a:p>
+          <a:p/>
+          <a:p>
+            <a:r>
+              <a:t>Conceptos de hoy: Clase autonoma · Causa proxima y causa raiz · Caso uno · Caso dos.</a:t>
             </a:r>
           </a:p>
         </p:txBody>
@@ -592,7 +620,47 @@
           <a:lstStyle/>
           <a:p>
             <a:r>
-              <a:t>Conviene ademas admitir la existencia de factores contribuyentes, que son condiciones que empeoraron el resultado sin haberlo causado, como que el incidente ocurriera de noche, que la documentacion estuviera desactualizada o que el unico que sabia restaurar estuviera de vacaciones.</a:t>
+              <a:t>DESARROLLO (para explicarlo, no se proyecta):</a:t>
+            </a:r>
+          </a:p>
+          <a:p>
+            <a:r>
+              <a:t>Esta clase es autonoma y cae en festivo, asi que no hay encuentro sincronico: este texto es a la vez el fundamento del docente y la lectura que el estudiante recibe, y por eso debe alcanzar para trabajar solo.</a:t>
+            </a:r>
+          </a:p>
+          <a:p>
+            <a:r>
+              <a:t>El tema es el analisis de casos reales, y el primer punto es que esto no es relleno de fin de semestre sino una practica profesional con nombre propio.</a:t>
+            </a:r>
+          </a:p>
+          <a:p>
+            <a:r>
+              <a:t>Cuando un sistema falla en produccion, los equipos serios escriben un post-mortem</a:t>
+            </a:r>
+          </a:p>
+          <a:p>
+            <a:r>
+              <a:t>Que es un documento breve producido despues del incidente y que responde cuatro preguntas: que paso, cuando y con que impacto medible, por que fue posible, y que se va a cambiar para que no vuelva a ocurrir de la misma manera.</a:t>
+            </a:r>
+          </a:p>
+          <a:p>
+            <a:r>
+              <a:t>La palabra clave del oficio es blameless, sin culpables: la regla es que se analiza el sistema y no la persona.</a:t>
+            </a:r>
+          </a:p>
+          <a:p>
+            <a:r>
+              <a:t>No es cortesia ni buena onda corporativa, es un calculo practico, porque en cuanto el documento sirve para castigar a alguien la gente deja de reportar los errores pequenos y la organizacion pierde la unica fuente de informacion que tiene para evitar los grandes.</a:t>
+            </a:r>
+          </a:p>
+          <a:p>
+            <a:r>
+              <a:t>Un incidente, para nuestros fines, es cualquier evento que degrada el servicio o pone en riesgo los datos, y merece post-mortem tanto el que llego al usuario como el que se detuvo a tiempo.</a:t>
+            </a:r>
+          </a:p>
+          <a:p>
+            <a:r>
+              <a:t>Fuera de la lamina (habla de la practica): El entregable de hoy es una tabla de cuatro columnas, Contexto, Fallo, Leccion y Cambio en la clínica, con tres casos, y se sube a PostgreSQL en el navegador.</a:t>
             </a:r>
           </a:p>
         </p:txBody>
@@ -662,17 +730,67 @@
           <a:lstStyle/>
           <a:p>
             <a:r>
-              <a:t>Eso es la causa proxima.</a:t>
-            </a:r>
-          </a:p>
-          <a:p>
-            <a:r>
-              <a:t>Lo que convirtio un error humano corriente en un incidente historico fue que, al intentar recuperar, la compania descubrio que sus cinco mecanismos de respaldo y replicacion fallaban de una u otra forma: entre otras cosas, la herramienta de volcado logico fallaba en silencio por una diferencia de version entre cliente y servidor, y las copias que debian estar en almacenamiento remoto estaban vacias.</a:t>
-            </a:r>
-          </a:p>
-          <a:p>
-            <a:r>
-              <a:t>Terminaron restaurando desde una copia de trabajo de unas seis horas antes y perdieron de forma definitiva la informacion creada en esa ventana, del orden de miles de proyectos y comentarios.</a:t>
+              <a:t>DESARROLLO (para explicarlo, no se proyecta):</a:t>
+            </a:r>
+          </a:p>
+          <a:p>
+            <a:r>
+              <a:t>Antes de mirar los casos hay que instalar la distincion que separa un buen analisis de una anecdota: causa proxima y causa raiz.</a:t>
+            </a:r>
+          </a:p>
+          <a:p>
+            <a:r>
+              <a:t>La causa proxima es el ultimo evento de la cadena, el que se ve.</a:t>
+            </a:r>
+          </a:p>
+          <a:p>
+            <a:r>
+              <a:t>La causa raiz es la condicion que permitio que ese evento tuviera consecuencias.</a:t>
+            </a:r>
+          </a:p>
+          <a:p>
+            <a:r>
+              <a:t>Un ejemplo con la clínica: el disco del servidor falla un viernes y se pierden tres semanas de historias clinicas.</a:t>
+            </a:r>
+          </a:p>
+          <a:p>
+            <a:r>
+              <a:t>La causa proxima es el disco.</a:t>
+            </a:r>
+          </a:p>
+          <a:p>
+            <a:r>
+              <a:t>La causa raiz es que existia un archivo de respaldo que nadie habia restaurado nunca para comprobar que sirviera, y que nadie vigilaba si el respaldo del dia se habia ejecutado.</a:t>
+            </a:r>
+          </a:p>
+          <a:p>
+            <a:r>
+              <a:t>Los discos fallan siempre, eso no es noticia; lo que se puede cambiar es lo segundo.</a:t>
+            </a:r>
+          </a:p>
+          <a:p>
+            <a:r>
+              <a:t>La tecnica mas simple para llegar ahi es preguntar por que cinco veces seguidas, y hay dos criterios de parada utiles: si la respuesta nombra una persona, todavia no llego a la causa raiz</a:t>
+            </a:r>
+          </a:p>
+          <a:p>
+            <a:r>
+              <a:t>Porque senalar a quien ejecuto el comando equivocado no explica por que el sistema permitia ejecutarlo sin confirmacion ni por que no habia como volver atras</a:t>
+            </a:r>
+          </a:p>
+          <a:p>
+            <a:r>
+              <a:t>Y si la respuesta describe algo que se puede cambiar en un procedimiento, un permiso, una restriccion o una alarma, entonces si llego.</a:t>
+            </a:r>
+          </a:p>
+          <a:p>
+            <a:r>
+              <a:t>NOTAS:</a:t>
+            </a:r>
+          </a:p>
+          <a:p>
+            <a:r>
+              <a:t>Conviene ademas admitir la existencia de factores contribuyentes, que son condiciones que empeoraron el resultado sin haberlo causado, como que el incidente ocurriera de noche, que la documentacion estuviera desactualizada o que el unico que sabia restaurar estuviera de vacaciones.</a:t>
             </a:r>
           </a:p>
         </p:txBody>
@@ -742,12 +860,62 @@
           <a:lstStyle/>
           <a:p>
             <a:r>
-              <a:t>Caso dos, permisos excesivos.</a:t>
-            </a:r>
-          </a:p>
-          <a:p>
-            <a:r>
-              <a:t>Y hay que decir la parte incomoda, porque es la que se repite en los proyectos de curso: casi todos los estudiantes hacen que la aplicacion se conecte con un usuario que tiene todo, porque asi nunca aparece un error de permisos y se avanza mas rapido.</a:t>
+              <a:t>DESARROLLO (para explicarlo, no se proyecta):</a:t>
+            </a:r>
+          </a:p>
+          <a:p>
+            <a:r>
+              <a:t>Caso uno, el respaldo que nunca se restauro, con el ejemplo publico mejor documentado que existe.</a:t>
+            </a:r>
+          </a:p>
+          <a:p>
+            <a:r>
+              <a:t>El 31 de enero de 2017 GitLab sufrio la perdida de datos de su servicio en la nube: durante la atencion de un problema de replicacion</a:t>
+            </a:r>
+          </a:p>
+          <a:p>
+            <a:r>
+              <a:t>Un ingeniero ejecuto un borrado recursivo sobre el directorio de datos del servidor equivocado y elimino cerca de trescientos gigabytes.</a:t>
+            </a:r>
+          </a:p>
+          <a:p>
+            <a:r>
+              <a:t>La leccion tecnica es exacta: un respaldo que nunca se restauro de prueba no es un respaldo, es una carpeta con un nombre tranquilizador.</a:t>
+            </a:r>
+          </a:p>
+          <a:p>
+            <a:r>
+              <a:t>Y hay una segunda leccion igual de importante: un proceso de respaldo que puede fallar sin avisar es peor que no tenerlo, porque produce confianza injustificada.</a:t>
+            </a:r>
+          </a:p>
+          <a:p>
+            <a:r>
+              <a:t>Esto conecta con la Clase 4, donde se definieron RPO, la cantidad maxima de datos que la organizacion acepta perder medida en tiempo, y RTO, el tiempo maximo que acepta estar caida.</a:t>
+            </a:r>
+          </a:p>
+          <a:p>
+            <a:r>
+              <a:t>GitLab descubrio su RPO real el dia del incidente, y ese es justo el error que no se debe repetir: el RPO no se declara, se demuestra restaurando.</a:t>
+            </a:r>
+          </a:p>
+          <a:p>
+            <a:r>
+              <a:t>NOTAS:</a:t>
+            </a:r>
+          </a:p>
+          <a:p>
+            <a:r>
+              <a:t>Eso es la causa proxima.</a:t>
+            </a:r>
+          </a:p>
+          <a:p>
+            <a:r>
+              <a:t>Lo que convirtio un error humano corriente en un incidente historico fue que, al intentar recuperar, la compania descubrio que sus cinco mecanismos de respaldo y replicacion fallaban de una u otra forma: entre otras cosas, la herramienta de volcado logico fallaba en silencio por una diferencia de version entre cliente y servidor, y las copias que debian estar en almacenamiento remoto estaban vacias.</a:t>
+            </a:r>
+          </a:p>
+          <a:p>
+            <a:r>
+              <a:t>Terminaron restaurando desde una copia de trabajo de unas seis horas antes y perdieron de forma definitiva la informacion creada en esa ventana, del orden de miles de proyectos y comentarios.</a:t>
             </a:r>
           </a:p>
         </p:txBody>
@@ -817,7 +985,57 @@
           <a:lstStyle/>
           <a:p>
             <a:r>
-              <a:t>Caso tres, perdida de datos durante una migracion.</a:t>
+              <a:t>DESARROLLO (para explicarlo, no se proyecta):</a:t>
+            </a:r>
+          </a:p>
+          <a:p>
+            <a:r>
+              <a:t>En julio de 2019 Capital One informo un acceso no autorizado que afecto informacion de aproximadamente cien millones de personas en Estados Unidos y varios millones en Canada, incluyendo solicitudes de credito.</a:t>
+            </a:r>
+          </a:p>
+          <a:p>
+            <a:r>
+              <a:t>La cadena tecnica publicada es instructiva porque no hubo ninguna hazana: una configuracion incorrecta en un cortafuegos de aplicaciones permitio que se le hiciera hacer peticiones internas en nombre del servidor, con eso se obtuvieron credenciales temporales de un rol de servicio</a:t>
+            </a:r>
+          </a:p>
+          <a:p>
+            <a:r>
+              <a:t>Y ese rol tenia permiso para listar y leer todos los buckets de almacenamiento, muchos mas de los que necesitaba para su trabajo.</a:t>
+            </a:r>
+          </a:p>
+          <a:p>
+            <a:r>
+              <a:t>El regulador bancario estadounidense impuso una multa de ochenta millones de dolares en 2020.</a:t>
+            </a:r>
+          </a:p>
+          <a:p>
+            <a:r>
+              <a:t>La causa proxima es la mala configuracion del cortafuegos; la causa raiz es que un componente tenia privilegios mucho mayores que su funcion.</a:t>
+            </a:r>
+          </a:p>
+          <a:p>
+            <a:r>
+              <a:t>La leccion, en el vocabulario de la Clase 2, es el principio de privilegio minimo: cada actor recibe exactamente los permisos que necesita para su tarea y nada mas.</a:t>
+            </a:r>
+          </a:p>
+          <a:p>
+            <a:r>
+              <a:t>Ese atajo es exactamente el que convierte una vulnerabilidad menor en una fuga total.</a:t>
+            </a:r>
+          </a:p>
+          <a:p>
+            <a:r>
+              <a:t>NOTAS:</a:t>
+            </a:r>
+          </a:p>
+          <a:p>
+            <a:r>
+              <a:t>Caso dos, permisos excesivos.</a:t>
+            </a:r>
+          </a:p>
+          <a:p>
+            <a:r>
+              <a:t>Y hay que decir la parte incomoda, porque es la que se repite en los proyectos de curso: casi todos los estudiantes hacen que la aplicacion se conecte con un usuario que tiene todo, porque asi nunca aparece un error de permisos y se avanza mas rapido.</a:t>
             </a:r>
           </a:p>
         </p:txBody>
@@ -887,7 +1105,52 @@
           <a:lstStyle/>
           <a:p>
             <a:r>
-              <a:t>Caso cuatro, concurrencia.</a:t>
+              <a:t>DESARROLLO (para explicarlo, no se proyecta):</a:t>
+            </a:r>
+          </a:p>
+          <a:p>
+            <a:r>
+              <a:t>En marzo de 2019 MySpace reconocio que habia perdido la musica subida a la plataforma entre 2003 y 2015, del orden de cincuenta millones de archivos de unos catorce millones de artistas, durante una migracion de servidores</a:t>
+            </a:r>
+          </a:p>
+          <a:p>
+            <a:r>
+              <a:t>No hubo ataque ni desastre natural, solo una migracion sin copia verificada de la que ya no se podia volver atras.</a:t>
+            </a:r>
+          </a:p>
+          <a:p>
+            <a:r>
+              <a:t>En la banca hay un caso paralelo y bien documentado con el sistema de TSB en Reino Unido en 2018, donde el paso a una plataforma nueva dejo a millones de clientes sin acceso confiable durante semanas</a:t>
+            </a:r>
+          </a:p>
+          <a:p>
+            <a:r>
+              <a:t>Con costos reportados del orden de cientos de millones de libras y sanciones posteriores del regulador</a:t>
+            </a:r>
+          </a:p>
+          <a:p>
+            <a:r>
+              <a:t>La causa raiz senalada en los informes no fue un error puntual de programacion sino una migracion probada de forma insuficiente y sin un camino de retorno real.</a:t>
+            </a:r>
+          </a:p>
+          <a:p>
+            <a:r>
+              <a:t>La leccion tecnica es la misma en los dos casos y conecta con la Clase 12: una migracion sin plan de retorno probado es una apuesta, y el plan de retorno se prueba antes, no el dia del cambio.</a:t>
+            </a:r>
+          </a:p>
+          <a:p>
+            <a:r>
+              <a:t>La forma disciplinada de hacerlo es la secuencia de expandir, migrar y contraer, con las dos versiones conviviendo, mas una verificacion de conteos entre origen y destino antes de eliminar nada.</a:t>
+            </a:r>
+          </a:p>
+          <a:p>
+            <a:r>
+              <a:t>NOTAS:</a:t>
+            </a:r>
+          </a:p>
+          <a:p>
+            <a:r>
+              <a:t>Caso tres, perdida de datos durante una migracion.</a:t>
             </a:r>
           </a:p>
         </p:txBody>
@@ -957,6 +1220,201 @@
           <a:lstStyle/>
           <a:p>
             <a:r>
+              <a:t>DESARROLLO (para explicarlo, no se proyecta):</a:t>
+            </a:r>
+          </a:p>
+          <a:p>
+            <a:r>
+              <a:t>Este merece un tratamiento distinto porque su rasgo caracteristico es que no llega a los titulares con nombre propio tan facilmente: son fallos que no producen mensajes de error y por eso se descubren semanas despues</a:t>
+            </a:r>
+          </a:p>
+          <a:p>
+            <a:r>
+              <a:t>Cuando el inventario fisico no coincide con el del sistema o cuando dos clientes reclaman el mismo cupo.</a:t>
+            </a:r>
+          </a:p>
+          <a:p>
+            <a:r>
+              <a:t>El patron es siempre uno de los tres que se estudiaron en la Clase 10.</a:t>
+            </a:r>
+          </a:p>
+          <a:p>
+            <a:r>
+              <a:t>Actualizacion perdida: dos procesos leen el mismo stock de Insumo, digamos cinco unidades, ambos restan tres y ambos escriben dos, con lo cual se despacharon seis unidades y el sistema declara dos existencias que no estan.</a:t>
+            </a:r>
+          </a:p>
+          <a:p>
+            <a:r>
+              <a:t>Doble reserva: dos recepcionistas consultan la franja del martes a las diez del veterinario Ruiz, ambas reciben cero filas, ambas insertan.</a:t>
+            </a:r>
+          </a:p>
+          <a:p>
+            <a:r>
+              <a:t>Bloqueo mutuo o deadlock: dos transacciones se esperan en orden cruzado y el motor mata una.</a:t>
+            </a:r>
+          </a:p>
+          <a:p>
+            <a:r>
+              <a:t>La leccion es que ninguna cantidad de validacion previa en la aplicacion resuelve esto</a:t>
+            </a:r>
+          </a:p>
+          <a:p>
+            <a:r>
+              <a:t>Porque entre la consulta y la escritura hay una ventana de tiempo en la que el mundo cambio; se resuelve en la base con restricciones, con bloqueo explicito al leer lo que se va a modificar o con el nivel de aislamiento adecuado.</a:t>
+            </a:r>
+          </a:p>
+          <a:p>
+            <a:r>
+              <a:t>Y hay una leccion organizacional gratis: estos defectos jamas aparecen probando con un usuario, asi que si el estudiante solo probo la clínica desde una sola maquina, no lo probo.</a:t>
+            </a:r>
+          </a:p>
+          <a:p>
+            <a:r>
+              <a:t>NOTAS:</a:t>
+            </a:r>
+          </a:p>
+          <a:p>
+            <a:r>
+              <a:t>Caso cuatro, concurrencia.</a:t>
+            </a:r>
+          </a:p>
+        </p:txBody>
+      </p:sp>
+      <p:sp>
+        <p:nvSpPr>
+          <p:cNvPr id="4" name="Slide Number Placeholder 3"/>
+          <p:cNvSpPr>
+            <a:spLocks noGrp="1"/>
+          </p:cNvSpPr>
+          <p:nvPr>
+            <p:ph type="sldNum" idx="5" sz="quarter"/>
+          </p:nvPr>
+        </p:nvSpPr>
+        <p:spPr/>
+      </p:sp>
+    </p:spTree>
+  </p:cSld>
+  <p:clrMapOvr>
+    <a:masterClrMapping/>
+  </p:clrMapOvr>
+</p:notes>
+</file>
+
+<file path=ppt/notesSlides/notesSlide8.xml><?xml version="1.0" encoding="utf-8"?>
+<p:notes xmlns:a="http://schemas.openxmlformats.org/drawingml/2006/main" xmlns:p="http://schemas.openxmlformats.org/presentationml/2006/main" xmlns:r="http://schemas.openxmlformats.org/officeDocument/2006/relationships">
+  <p:cSld>
+    <p:spTree>
+      <p:nvGrpSpPr>
+        <p:cNvPr id="1" name=""/>
+        <p:cNvGrpSpPr/>
+        <p:nvPr/>
+      </p:nvGrpSpPr>
+      <p:grpSpPr>
+        <a:xfrm>
+          <a:off x="0" y="0"/>
+          <a:ext cx="0" cy="0"/>
+          <a:chOff x="0" y="0"/>
+          <a:chExt cx="0" cy="0"/>
+        </a:xfrm>
+      </p:grpSpPr>
+      <p:sp>
+        <p:nvSpPr>
+          <p:cNvPr id="2" name="Slide Image Placeholder 1"/>
+          <p:cNvSpPr>
+            <a:spLocks noGrp="1"/>
+          </p:cNvSpPr>
+          <p:nvPr>
+            <p:ph type="sldImg" idx="2"/>
+          </p:nvPr>
+        </p:nvSpPr>
+        <p:spPr/>
+      </p:sp>
+      <p:sp>
+        <p:nvSpPr>
+          <p:cNvPr id="3" name="Notes Placeholder 2"/>
+          <p:cNvSpPr>
+            <a:spLocks noGrp="1"/>
+          </p:cNvSpPr>
+          <p:nvPr>
+            <p:ph type="body" idx="3" sz="quarter"/>
+          </p:nvPr>
+        </p:nvSpPr>
+        <p:spPr/>
+        <p:txBody>
+          <a:bodyPr/>
+          <a:lstStyle/>
+          <a:p>
+            <a:r>
+              <a:t>DESARROLLO (para explicarlo, no se proyecta):</a:t>
+            </a:r>
+          </a:p>
+          <a:p>
+            <a:r>
+              <a:t>Una leccion es un lugar comun cuando podria haberse escrito antes de conocer el caso: hay que hacer respaldos, hay que cuidar los permisos, hay que probar bien.</a:t>
+            </a:r>
+          </a:p>
+          <a:p>
+            <a:r>
+              <a:t>Una leccion es accionable cuando tiene cuatro elementos verificables: un verbo concreto, el artefacto sobre el cual se actua, una frecuencia o un umbral, y la manera de comprobar que se hizo.</a:t>
+            </a:r>
+          </a:p>
+          <a:p>
+            <a:r>
+              <a:t>Version inutil: hay que probar los respaldos.</a:t>
+            </a:r>
+          </a:p>
+          <a:p>
+            <a:r>
+              <a:t>Version accionable: el primer lunes de cada mes se restaura el respaldo mas reciente en un esquema temporal de Oracle Live SQL o del entorno de pruebas, se comparan los conteos de filas de Dueno, Mascota, Cita y Factura contra produccion</a:t>
+            </a:r>
+          </a:p>
+          <a:p>
+            <a:r>
+              <a:t>Y se registra fecha y resultado en la bitacora del proyecto; si no hay registro del mes, se declara que no hay respaldo.</a:t>
+            </a:r>
+          </a:p>
+          <a:p>
+            <a:r>
+              <a:t>La segunda se puede auditar, la primera es una intencion.</a:t>
+            </a:r>
+          </a:p>
+          <a:p>
+            <a:r>
+              <a:t>Aplique el mismo molde a los otros casos y ya tiene la cuarta columna de la tabla: del caso de permisos sale crear el rol rol_clinica_app con GRANT EXECUTE sobre los procedimientos y revocar todo SELECT</a:t>
+            </a:r>
+          </a:p>
+          <a:p>
+            <a:r>
+              <a:t>INSERT, UPDATE y DELETE directo sobre las tablas, verificado consultando las vistas de privilegios</a:t>
+            </a:r>
+          </a:p>
+          <a:p>
+            <a:r>
+              <a:t>Del caso de concurrencia sale ALTER TABLE Cita ADD CONSTRAINT uq_cita_vet_franja UNIQUE (id_veterinario, fecha_hora) mas SELECT FOR UPDATE al descontar stock, verificado con dos sesiones simultaneas</a:t>
+            </a:r>
+          </a:p>
+          <a:p>
+            <a:r>
+              <a:t>Del caso de migracion sale que todo cambio de esquema tenga script de ida, script de retorno y conteo de verificacion.</a:t>
+            </a:r>
+          </a:p>
+          <a:p>
+            <a:r>
+              <a:t>Sobre las preguntas que llegaran por el canal del curso: si piden inventar un caso, la respuesta es no, cada caso debe ser verificable con una fuente publica o declararse explicitamente como hipotetico</a:t>
+            </a:r>
+          </a:p>
+          <a:p>
+            <a:r>
+              <a:t>Si el caso no tiene detalle tecnico publicado, se escribe solo lo documentado y se marca aparte lo que es inferencia propia, porque separar hecho de suposicion es parte de la nota; y si preguntan cuanto debe medir cada celda.</a:t>
+            </a:r>
+          </a:p>
+          <a:p>
+            <a:r>
+              <a:t>NOTAS:</a:t>
+            </a:r>
+          </a:p>
+          <a:p>
+            <a:r>
               <a:t>Lo que decide la calificacion de hoy no es reunir casos sino escribir lecciones accionables, y esa es la habilidad que el estudiante debe practicar sin ayuda.</a:t>
             </a:r>
           </a:p>
@@ -968,6 +1426,106 @@
           <a:p>
             <a:r>
               <a:t>Fuera de la lamina (habla de la practica): Sobre las preguntas que llegaran por el canal del curso: si piden inventar un caso, la respuesta es no, cada caso debe ser verificable con una fuente publica o declararse explicitamente como hipotetico; si el caso no tiene detalle tecnico publicado, se escribe solo lo documentado y se marca aparte lo que es inferencia propia, porque separar hecho de suposicion es parte de la nota; y si preguntan cuanto debe medir cada celda, la convencion de este entregable es de tres a cinco lineas.</a:t>
+            </a:r>
+          </a:p>
+        </p:txBody>
+      </p:sp>
+      <p:sp>
+        <p:nvSpPr>
+          <p:cNvPr id="4" name="Slide Number Placeholder 3"/>
+          <p:cNvSpPr>
+            <a:spLocks noGrp="1"/>
+          </p:cNvSpPr>
+          <p:nvPr>
+            <p:ph type="sldNum" idx="5" sz="quarter"/>
+          </p:nvPr>
+        </p:nvSpPr>
+        <p:spPr/>
+      </p:sp>
+    </p:spTree>
+  </p:cSld>
+  <p:clrMapOvr>
+    <a:masterClrMapping/>
+  </p:clrMapOvr>
+</p:notes>
+</file>
+
+<file path=ppt/notesSlides/notesSlide9.xml><?xml version="1.0" encoding="utf-8"?>
+<p:notes xmlns:a="http://schemas.openxmlformats.org/drawingml/2006/main" xmlns:p="http://schemas.openxmlformats.org/presentationml/2006/main" xmlns:r="http://schemas.openxmlformats.org/officeDocument/2006/relationships">
+  <p:cSld>
+    <p:spTree>
+      <p:nvGrpSpPr>
+        <p:cNvPr id="1" name=""/>
+        <p:cNvGrpSpPr/>
+        <p:nvPr/>
+      </p:nvGrpSpPr>
+      <p:grpSpPr>
+        <a:xfrm>
+          <a:off x="0" y="0"/>
+          <a:ext cx="0" cy="0"/>
+          <a:chOff x="0" y="0"/>
+          <a:chExt cx="0" cy="0"/>
+        </a:xfrm>
+      </p:grpSpPr>
+      <p:sp>
+        <p:nvSpPr>
+          <p:cNvPr id="2" name="Slide Image Placeholder 1"/>
+          <p:cNvSpPr>
+            <a:spLocks noGrp="1"/>
+          </p:cNvSpPr>
+          <p:nvPr>
+            <p:ph type="sldImg" idx="2"/>
+          </p:nvPr>
+        </p:nvSpPr>
+        <p:spPr/>
+      </p:sp>
+      <p:sp>
+        <p:nvSpPr>
+          <p:cNvPr id="3" name="Notes Placeholder 2"/>
+          <p:cNvSpPr>
+            <a:spLocks noGrp="1"/>
+          </p:cNvSpPr>
+          <p:nvPr>
+            <p:ph type="body" idx="3" sz="quarter"/>
+          </p:nvPr>
+        </p:nvSpPr>
+        <p:spPr/>
+        <p:txBody>
+          <a:bodyPr/>
+          <a:lstStyle/>
+          <a:p>
+            <a:r>
+              <a:t>TEXTO COMPLETO DE LA LÁMINA (se proyecta resumido):</a:t>
+            </a:r>
+          </a:p>
+          <a:p/>
+          <a:p>
+            <a:r>
+              <a:t>Herramienta: Google Docs</a:t>
+            </a:r>
+          </a:p>
+          <a:p/>
+          <a:p>
+            <a:r>
+              <a:t>Demo: Plantilla: contexto -&gt; fallo -&gt; leccion -&gt; cambio en la clínica.</a:t>
+            </a:r>
+          </a:p>
+          <a:p/>
+          <a:p>
+            <a:r>
+              <a:t>Sigan el mismo dominio de la clínica (no inventen otro caso).</a:t>
+            </a:r>
+          </a:p>
+          <a:p/>
+          <a:p>
+            <a:r>
+              <a:t>Qué observar: cada caso se separa en contexto, fallo, causa raiz y la leccion convertida en una accion verificable sobre la base de la clínica.</a:t>
+            </a:r>
+          </a:p>
+          <a:p/>
+          <a:p>
+            <a:r>
+              <a:t>Qué observar: una leccion accionable tiene verbo, artefacto, frecuencia o umbral, y una forma de comprobar que se hizo.</a:t>
             </a:r>
           </a:p>
         </p:txBody>
@@ -4491,21 +5049,173 @@
                 </a:solidFill>
                 <a:latin typeface="Calibri"/>
               </a:rPr>
-              <a:t>Caso dos: permisos excesivos (Capital One, 2019) (1/2)</a:t>
-            </a:r>
-          </a:p>
-        </p:txBody>
-      </p:sp>
-      <p:sp>
-        <p:nvSpPr>
-          <p:cNvPr id="5" name="TextBox 4"/>
+              <a:t>Lecciones accionables: los cuatro elementos verificables</a:t>
+            </a:r>
+          </a:p>
+        </p:txBody>
+      </p:sp>
+      <p:sp>
+        <p:nvSpPr>
+          <p:cNvPr id="5" name="Rounded Rectangle 4"/>
+          <p:cNvSpPr/>
+          <p:nvPr/>
+        </p:nvSpPr>
+        <p:spPr>
+          <a:xfrm>
+            <a:off x="5803166" y="1188719"/>
+            <a:ext cx="5998464" cy="4828032"/>
+          </a:xfrm>
+          <a:prstGeom prst="roundRect">
+            <a:avLst>
+              <a:gd name="adj" fmla="val 4000"/>
+            </a:avLst>
+          </a:prstGeom>
+          <a:solidFill>
+            <a:srgbClr val="E8EEF4"/>
+          </a:solidFill>
+          <a:ln>
+            <a:noFill/>
+          </a:ln>
+        </p:spPr>
+        <p:style>
+          <a:lnRef idx="1">
+            <a:schemeClr val="accent1"/>
+          </a:lnRef>
+          <a:fillRef idx="3">
+            <a:schemeClr val="accent1"/>
+          </a:fillRef>
+          <a:effectRef idx="2">
+            <a:schemeClr val="accent1"/>
+          </a:effectRef>
+          <a:fontRef idx="minor">
+            <a:schemeClr val="lt1"/>
+          </a:fontRef>
+        </p:style>
+        <p:txBody>
+          <a:bodyPr rtlCol="0" anchor="ctr"/>
+          <a:lstStyle/>
+          <a:p>
+            <a:pPr algn="ctr"/>
+          </a:p>
+        </p:txBody>
+      </p:sp>
+      <p:pic>
+        <p:nvPicPr>
+          <p:cNvPr id="6" name="Picture 5" descr="leccion-accionable-paso1.png"/>
+          <p:cNvPicPr>
+            <a:picLocks noChangeAspect="1"/>
+          </p:cNvPicPr>
+          <p:nvPr/>
+        </p:nvPicPr>
+        <p:blipFill>
+          <a:blip r:embed="rId2"/>
+          <a:stretch>
+            <a:fillRect/>
+          </a:stretch>
+        </p:blipFill>
+        <p:spPr>
+          <a:xfrm>
+            <a:off x="5876318" y="1261872"/>
+            <a:ext cx="5852160" cy="4681728"/>
+          </a:xfrm>
+          <a:prstGeom prst="rect">
+            <a:avLst/>
+          </a:prstGeom>
+        </p:spPr>
+      </p:pic>
+      <p:pic>
+        <p:nvPicPr>
+          <p:cNvPr id="7" name="Picture 6" descr="leccion-accionable-paso2.png"/>
+          <p:cNvPicPr>
+            <a:picLocks noChangeAspect="1"/>
+          </p:cNvPicPr>
+          <p:nvPr/>
+        </p:nvPicPr>
+        <p:blipFill>
+          <a:blip r:embed="rId3"/>
+          <a:stretch>
+            <a:fillRect/>
+          </a:stretch>
+        </p:blipFill>
+        <p:spPr>
+          <a:xfrm>
+            <a:off x="5876318" y="1261872"/>
+            <a:ext cx="5852160" cy="4681728"/>
+          </a:xfrm>
+          <a:prstGeom prst="rect">
+            <a:avLst/>
+          </a:prstGeom>
+        </p:spPr>
+      </p:pic>
+      <p:pic>
+        <p:nvPicPr>
+          <p:cNvPr id="8" name="Picture 7" descr="leccion-accionable-paso3.png"/>
+          <p:cNvPicPr>
+            <a:picLocks noChangeAspect="1"/>
+          </p:cNvPicPr>
+          <p:nvPr/>
+        </p:nvPicPr>
+        <p:blipFill>
+          <a:blip r:embed="rId4"/>
+          <a:stretch>
+            <a:fillRect/>
+          </a:stretch>
+        </p:blipFill>
+        <p:spPr>
+          <a:xfrm>
+            <a:off x="5876318" y="1261872"/>
+            <a:ext cx="5852160" cy="4681728"/>
+          </a:xfrm>
+          <a:prstGeom prst="rect">
+            <a:avLst/>
+          </a:prstGeom>
+        </p:spPr>
+      </p:pic>
+      <p:sp>
+        <p:nvSpPr>
+          <p:cNvPr id="13" name="TextBox 12"/>
           <p:cNvSpPr txBox="1"/>
           <p:nvPr/>
         </p:nvSpPr>
         <p:spPr>
           <a:xfrm>
-            <a:off x="457200" y="1170432"/>
-            <a:ext cx="11277295" cy="5230368"/>
+            <a:off x="5870301" y="5961888"/>
+            <a:ext cx="5864193" cy="320040"/>
+          </a:xfrm>
+          <a:prstGeom prst="rect">
+            <a:avLst/>
+          </a:prstGeom>
+          <a:noFill/>
+        </p:spPr>
+        <p:txBody>
+          <a:bodyPr wrap="square">
+            <a:spAutoFit/>
+          </a:bodyPr>
+          <a:lstStyle/>
+          <a:p>
+            <a:pPr algn="ctr"/>
+            <a:r>
+              <a:rPr sz="1100" b="0" i="1">
+                <a:solidFill>
+                  <a:srgbClr val="666666"/>
+                </a:solidFill>
+                <a:latin typeface="Calibri"/>
+              </a:rPr>
+              <a:t>Clic para avanzar la animación</a:t>
+            </a:r>
+          </a:p>
+        </p:txBody>
+      </p:sp>
+      <p:sp>
+        <p:nvSpPr>
+          <p:cNvPr id="14" name="TextBox 13"/>
+          <p:cNvSpPr txBox="1"/>
+          <p:nvPr/>
+        </p:nvSpPr>
+        <p:spPr>
+          <a:xfrm>
+            <a:off x="457200" y="1353312"/>
+            <a:ext cx="5093061" cy="5047488"/>
           </a:xfrm>
           <a:prstGeom prst="rect">
             <a:avLst/>
@@ -4530,7 +5240,7 @@
                 </a:solidFill>
                 <a:latin typeface="Calibri"/>
               </a:rPr>
-              <a:t>–   En julio de 2019 Capital One informo un acceso no autorizado que afecto informacion de aproximadamente cien millones de personas en Estados Unidos y varios millones en Canada, incluyendo solicitudes de credito.</a:t>
+              <a:t>–   Una leccion es un lugar comun cuando podria haberse escrito antes de conocer el caso: hay que hacer respaldos, hay que cuidar los permisos, hay que…</a:t>
             </a:r>
           </a:p>
           <a:p>
@@ -4546,7 +5256,7 @@
                 </a:solidFill>
                 <a:latin typeface="Calibri"/>
               </a:rPr>
-              <a:t>–   La cadena tecnica publicada es instructiva porque no hubo ninguna hazana: una configuracion incorrecta en un cortafuegos de aplicaciones permitio que se le hiciera hacer peticiones internas en nombre del servidor, con eso se obtuvieron credenciales temporales de un rol de servicio</a:t>
+              <a:t>–   Una leccion es accionable cuando tiene cuatro elementos verificables.</a:t>
             </a:r>
           </a:p>
           <a:p>
@@ -4562,14 +5272,30 @@
                 </a:solidFill>
                 <a:latin typeface="Calibri"/>
               </a:rPr>
-              <a:t>–   Y ese rol tenia permiso para listar y leer todos los buckets de almacenamiento, muchos mas de los que necesitaba para su trabajo.</a:t>
-            </a:r>
-          </a:p>
-        </p:txBody>
-      </p:sp>
-      <p:sp>
-        <p:nvSpPr>
-          <p:cNvPr id="6" name="TextBox 5"/>
+              <a:t>–   Version inutil: hay que probar los respaldos.</a:t>
+            </a:r>
+          </a:p>
+          <a:p>
+            <a:pPr>
+              <a:spcAft>
+                <a:spcPts val="800"/>
+              </a:spcAft>
+            </a:pPr>
+            <a:r>
+              <a:rPr sz="2000" b="0" i="0">
+                <a:solidFill>
+                  <a:srgbClr val="333333"/>
+                </a:solidFill>
+                <a:latin typeface="Calibri"/>
+              </a:rPr>
+              <a:t>–   Version accionable: el primer lunes de cada mes se restaura el respaldo mas reciente en un esquema temporal de Oracle Live SQL o del entorno de…</a:t>
+            </a:r>
+          </a:p>
+        </p:txBody>
+      </p:sp>
+      <p:sp>
+        <p:nvSpPr>
+          <p:cNvPr id="15" name="TextBox 14"/>
           <p:cNvSpPr txBox="1"/>
           <p:nvPr/>
         </p:nvSpPr>
@@ -4607,6 +5333,142 @@
   <p:clrMapOvr>
     <a:masterClrMapping/>
   </p:clrMapOvr>
+  <p:timing>
+    <p:tnLst>
+      <p:par>
+        <p:cTn id="1" dur="indefinite" restart="never" nodeType="tmRoot">
+          <p:childTnLst>
+            <p:seq concurrent="1" nextAc="seek">
+              <p:cTn id="2" dur="indefinite" nodeType="mainSeq">
+                <p:childTnLst>
+                  <p:par>
+                    <p:cTn id="3" fill="hold">
+                      <p:stCondLst>
+                        <p:cond delay="indefinite"/>
+                      </p:stCondLst>
+                      <p:childTnLst>
+                        <p:par>
+                          <p:cTn id="4" fill="hold">
+                            <p:stCondLst>
+                              <p:cond delay="0"/>
+                            </p:stCondLst>
+                            <p:childTnLst>
+                              <p:par>
+                                <p:cTn id="5" presetID="10" presetClass="entr" presetSubtype="0" fill="hold" nodeType="clickEffect">
+                                  <p:stCondLst>
+                                    <p:cond delay="0"/>
+                                  </p:stCondLst>
+                                  <p:childTnLst>
+                                    <p:set>
+                                      <p:cBhvr>
+                                        <p:cTn id="6" dur="1" fill="hold">
+                                          <p:stCondLst>
+                                            <p:cond delay="0"/>
+                                          </p:stCondLst>
+                                        </p:cTn>
+                                        <p:tgtEl>
+                                          <p:spTgt spid="7"/>
+                                        </p:tgtEl>
+                                        <p:attrNameLst>
+                                          <p:attrName>style.visibility</p:attrName>
+                                        </p:attrNameLst>
+                                      </p:cBhvr>
+                                      <p:to>
+                                        <p:strVal val="visible"/>
+                                      </p:to>
+                                    </p:set>
+                                    <p:animEffect transition="in" filter="fade">
+                                      <p:cBhvr>
+                                        <p:cTn id="7" dur="450"/>
+                                        <p:tgtEl>
+                                          <p:spTgt spid="7"/>
+                                        </p:tgtEl>
+                                      </p:cBhvr>
+                                    </p:animEffect>
+                                  </p:childTnLst>
+                                </p:cTn>
+                              </p:par>
+                            </p:childTnLst>
+                          </p:cTn>
+                        </p:par>
+                      </p:childTnLst>
+                    </p:cTn>
+                  </p:par>
+                  <p:par>
+                    <p:cTn id="8" fill="hold">
+                      <p:stCondLst>
+                        <p:cond delay="indefinite"/>
+                      </p:stCondLst>
+                      <p:childTnLst>
+                        <p:par>
+                          <p:cTn id="9" fill="hold">
+                            <p:stCondLst>
+                              <p:cond delay="0"/>
+                            </p:stCondLst>
+                            <p:childTnLst>
+                              <p:par>
+                                <p:cTn id="10" presetID="10" presetClass="entr" presetSubtype="0" fill="hold" nodeType="clickEffect">
+                                  <p:stCondLst>
+                                    <p:cond delay="0"/>
+                                  </p:stCondLst>
+                                  <p:childTnLst>
+                                    <p:set>
+                                      <p:cBhvr>
+                                        <p:cTn id="11" dur="1" fill="hold">
+                                          <p:stCondLst>
+                                            <p:cond delay="0"/>
+                                          </p:stCondLst>
+                                        </p:cTn>
+                                        <p:tgtEl>
+                                          <p:spTgt spid="8"/>
+                                        </p:tgtEl>
+                                        <p:attrNameLst>
+                                          <p:attrName>style.visibility</p:attrName>
+                                        </p:attrNameLst>
+                                      </p:cBhvr>
+                                      <p:to>
+                                        <p:strVal val="visible"/>
+                                      </p:to>
+                                    </p:set>
+                                    <p:animEffect transition="in" filter="fade">
+                                      <p:cBhvr>
+                                        <p:cTn id="12" dur="450"/>
+                                        <p:tgtEl>
+                                          <p:spTgt spid="8"/>
+                                        </p:tgtEl>
+                                      </p:cBhvr>
+                                    </p:animEffect>
+                                  </p:childTnLst>
+                                </p:cTn>
+                              </p:par>
+                            </p:childTnLst>
+                          </p:cTn>
+                        </p:par>
+                      </p:childTnLst>
+                    </p:cTn>
+                  </p:par>
+                </p:childTnLst>
+              </p:cTn>
+              <p:prevCondLst>
+                <p:cond evt="onPrev" delay="0">
+                  <p:tgtEl>
+                    <p:sldTgt/>
+                  </p:tgtEl>
+                </p:cond>
+              </p:prevCondLst>
+              <p:nextCondLst>
+                <p:cond evt="onNext" delay="0">
+                  <p:tgtEl>
+                    <p:sldTgt/>
+                  </p:tgtEl>
+                </p:cond>
+              </p:nextCondLst>
+            </p:seq>
+          </p:childTnLst>
+        </p:cTn>
+      </p:par>
+    </p:tnLst>
+  </p:timing>
 </p:sld>
 </file>
 
@@ -4743,21 +5605,271 @@
                 </a:solidFill>
                 <a:latin typeface="Calibri"/>
               </a:rPr>
-              <a:t>Caso dos: permisos excesivos (Capital One, 2019) (2/2)</a:t>
-            </a:r>
-          </a:p>
-        </p:txBody>
-      </p:sp>
-      <p:sp>
-        <p:nvSpPr>
-          <p:cNvPr id="5" name="TextBox 4"/>
+              <a:t>Leer un plan de ejecucion ajeno</a:t>
+            </a:r>
+          </a:p>
+        </p:txBody>
+      </p:sp>
+      <p:sp>
+        <p:nvSpPr>
+          <p:cNvPr id="5" name="Rounded Rectangle 4"/>
+          <p:cNvSpPr/>
+          <p:nvPr/>
+        </p:nvSpPr>
+        <p:spPr>
+          <a:xfrm>
+            <a:off x="457200" y="1261872"/>
+            <a:ext cx="11277295" cy="5063663"/>
+          </a:xfrm>
+          <a:prstGeom prst="roundRect">
+            <a:avLst>
+              <a:gd name="adj" fmla="val 4000"/>
+            </a:avLst>
+          </a:prstGeom>
+          <a:solidFill>
+            <a:srgbClr val="1E1E1E"/>
+          </a:solidFill>
+          <a:ln>
+            <a:noFill/>
+          </a:ln>
+        </p:spPr>
+        <p:style>
+          <a:lnRef idx="1">
+            <a:schemeClr val="accent1"/>
+          </a:lnRef>
+          <a:fillRef idx="3">
+            <a:schemeClr val="accent1"/>
+          </a:fillRef>
+          <a:effectRef idx="2">
+            <a:schemeClr val="accent1"/>
+          </a:effectRef>
+          <a:fontRef idx="minor">
+            <a:schemeClr val="lt1"/>
+          </a:fontRef>
+        </p:style>
+        <p:txBody>
+          <a:bodyPr rtlCol="0" anchor="ctr"/>
+          <a:lstStyle/>
+          <a:p>
+            <a:pPr algn="ctr"/>
+          </a:p>
+        </p:txBody>
+      </p:sp>
+      <p:sp>
+        <p:nvSpPr>
+          <p:cNvPr id="6" name="Rectangle 5"/>
+          <p:cNvSpPr/>
+          <p:nvPr/>
+        </p:nvSpPr>
+        <p:spPr>
+          <a:xfrm>
+            <a:off x="457200" y="1261872"/>
+            <a:ext cx="11277295" cy="365760"/>
+          </a:xfrm>
+          <a:prstGeom prst="rect">
+            <a:avLst/>
+          </a:prstGeom>
+          <a:solidFill>
+            <a:srgbClr val="2D2D30"/>
+          </a:solidFill>
+          <a:ln>
+            <a:noFill/>
+          </a:ln>
+        </p:spPr>
+        <p:style>
+          <a:lnRef idx="1">
+            <a:schemeClr val="accent1"/>
+          </a:lnRef>
+          <a:fillRef idx="3">
+            <a:schemeClr val="accent1"/>
+          </a:fillRef>
+          <a:effectRef idx="2">
+            <a:schemeClr val="accent1"/>
+          </a:effectRef>
+          <a:fontRef idx="minor">
+            <a:schemeClr val="lt1"/>
+          </a:fontRef>
+        </p:style>
+        <p:txBody>
+          <a:bodyPr rtlCol="0" anchor="ctr"/>
+          <a:lstStyle/>
+          <a:p>
+            <a:pPr algn="ctr"/>
+          </a:p>
+        </p:txBody>
+      </p:sp>
+      <p:sp>
+        <p:nvSpPr>
+          <p:cNvPr id="7" name="Oval 6"/>
+          <p:cNvSpPr/>
+          <p:nvPr/>
+        </p:nvSpPr>
+        <p:spPr>
+          <a:xfrm>
+            <a:off x="658368" y="1380743"/>
+            <a:ext cx="128016" cy="128016"/>
+          </a:xfrm>
+          <a:prstGeom prst="ellipse">
+            <a:avLst/>
+          </a:prstGeom>
+          <a:solidFill>
+            <a:srgbClr val="FF5F56"/>
+          </a:solidFill>
+          <a:ln>
+            <a:noFill/>
+          </a:ln>
+        </p:spPr>
+        <p:style>
+          <a:lnRef idx="1">
+            <a:schemeClr val="accent1"/>
+          </a:lnRef>
+          <a:fillRef idx="3">
+            <a:schemeClr val="accent1"/>
+          </a:fillRef>
+          <a:effectRef idx="2">
+            <a:schemeClr val="accent1"/>
+          </a:effectRef>
+          <a:fontRef idx="minor">
+            <a:schemeClr val="lt1"/>
+          </a:fontRef>
+        </p:style>
+        <p:txBody>
+          <a:bodyPr rtlCol="0" anchor="ctr"/>
+          <a:lstStyle/>
+          <a:p>
+            <a:pPr algn="ctr"/>
+          </a:p>
+        </p:txBody>
+      </p:sp>
+      <p:sp>
+        <p:nvSpPr>
+          <p:cNvPr id="8" name="Oval 7"/>
+          <p:cNvSpPr/>
+          <p:nvPr/>
+        </p:nvSpPr>
+        <p:spPr>
+          <a:xfrm>
+            <a:off x="877824" y="1380743"/>
+            <a:ext cx="128016" cy="128016"/>
+          </a:xfrm>
+          <a:prstGeom prst="ellipse">
+            <a:avLst/>
+          </a:prstGeom>
+          <a:solidFill>
+            <a:srgbClr val="FFBD2E"/>
+          </a:solidFill>
+          <a:ln>
+            <a:noFill/>
+          </a:ln>
+        </p:spPr>
+        <p:style>
+          <a:lnRef idx="1">
+            <a:schemeClr val="accent1"/>
+          </a:lnRef>
+          <a:fillRef idx="3">
+            <a:schemeClr val="accent1"/>
+          </a:fillRef>
+          <a:effectRef idx="2">
+            <a:schemeClr val="accent1"/>
+          </a:effectRef>
+          <a:fontRef idx="minor">
+            <a:schemeClr val="lt1"/>
+          </a:fontRef>
+        </p:style>
+        <p:txBody>
+          <a:bodyPr rtlCol="0" anchor="ctr"/>
+          <a:lstStyle/>
+          <a:p>
+            <a:pPr algn="ctr"/>
+          </a:p>
+        </p:txBody>
+      </p:sp>
+      <p:sp>
+        <p:nvSpPr>
+          <p:cNvPr id="9" name="Oval 8"/>
+          <p:cNvSpPr/>
+          <p:nvPr/>
+        </p:nvSpPr>
+        <p:spPr>
+          <a:xfrm>
+            <a:off x="1097280" y="1380743"/>
+            <a:ext cx="128016" cy="128016"/>
+          </a:xfrm>
+          <a:prstGeom prst="ellipse">
+            <a:avLst/>
+          </a:prstGeom>
+          <a:solidFill>
+            <a:srgbClr val="27C93F"/>
+          </a:solidFill>
+          <a:ln>
+            <a:noFill/>
+          </a:ln>
+        </p:spPr>
+        <p:style>
+          <a:lnRef idx="1">
+            <a:schemeClr val="accent1"/>
+          </a:lnRef>
+          <a:fillRef idx="3">
+            <a:schemeClr val="accent1"/>
+          </a:fillRef>
+          <a:effectRef idx="2">
+            <a:schemeClr val="accent1"/>
+          </a:effectRef>
+          <a:fontRef idx="minor">
+            <a:schemeClr val="lt1"/>
+          </a:fontRef>
+        </p:style>
+        <p:txBody>
+          <a:bodyPr rtlCol="0" anchor="ctr"/>
+          <a:lstStyle/>
+          <a:p>
+            <a:pPr algn="ctr"/>
+          </a:p>
+        </p:txBody>
+      </p:sp>
+      <p:sp>
+        <p:nvSpPr>
+          <p:cNvPr id="10" name="TextBox 9"/>
           <p:cNvSpPr txBox="1"/>
           <p:nvPr/>
         </p:nvSpPr>
         <p:spPr>
           <a:xfrm>
-            <a:off x="457200" y="1170432"/>
-            <a:ext cx="11277295" cy="5230368"/>
+            <a:off x="1371600" y="1298448"/>
+            <a:ext cx="10180015" cy="292608"/>
+          </a:xfrm>
+          <a:prstGeom prst="rect">
+            <a:avLst/>
+          </a:prstGeom>
+          <a:noFill/>
+        </p:spPr>
+        <p:txBody>
+          <a:bodyPr wrap="square" anchor="ctr"/>
+          <a:lstStyle/>
+          <a:p>
+            <a:pPr algn="r"/>
+            <a:r>
+              <a:rPr sz="1100" b="1" i="0">
+                <a:solidFill>
+                  <a:srgbClr val="BBBBBB"/>
+                </a:solidFill>
+                <a:latin typeface="Calibri"/>
+              </a:rPr>
+              <a:t>SQL · PostgreSQL</a:t>
+            </a:r>
+          </a:p>
+        </p:txBody>
+      </p:sp>
+      <p:sp>
+        <p:nvSpPr>
+          <p:cNvPr id="11" name="TextBox 10"/>
+          <p:cNvSpPr txBox="1"/>
+          <p:nvPr/>
+        </p:nvSpPr>
+        <p:spPr>
+          <a:xfrm>
+            <a:off x="685800" y="1719072"/>
+            <a:ext cx="502920" cy="4469303"/>
           </a:xfrm>
           <a:prstGeom prst="rect">
             <a:avLst/>
@@ -4770,74 +5882,1511 @@
           </a:bodyPr>
           <a:lstStyle/>
           <a:p>
+            <a:pPr algn="r">
+              <a:spcAft>
+                <a:spcPts val="407"/>
+              </a:spcAft>
+            </a:pPr>
+            <a:r>
+              <a:rPr sz="1900" i="0" b="0">
+                <a:solidFill>
+                  <a:srgbClr val="858585"/>
+                </a:solidFill>
+                <a:latin typeface="Consolas"/>
+              </a:rPr>
+              <a:t>1</a:t>
+            </a:r>
+          </a:p>
+          <a:p>
+            <a:pPr algn="r">
+              <a:spcAft>
+                <a:spcPts val="407"/>
+              </a:spcAft>
+            </a:pPr>
+            <a:r>
+              <a:rPr sz="1900" i="0" b="0">
+                <a:solidFill>
+                  <a:srgbClr val="858585"/>
+                </a:solidFill>
+                <a:latin typeface="Consolas"/>
+              </a:rPr>
+              <a:t>2</a:t>
+            </a:r>
+          </a:p>
+          <a:p>
+            <a:pPr algn="r">
+              <a:spcAft>
+                <a:spcPts val="407"/>
+              </a:spcAft>
+            </a:pPr>
+            <a:r>
+              <a:rPr sz="1900" i="0" b="0">
+                <a:solidFill>
+                  <a:srgbClr val="858585"/>
+                </a:solidFill>
+                <a:latin typeface="Consolas"/>
+              </a:rPr>
+              <a:t>3</a:t>
+            </a:r>
+          </a:p>
+          <a:p>
+            <a:pPr algn="r">
+              <a:spcAft>
+                <a:spcPts val="407"/>
+              </a:spcAft>
+            </a:pPr>
+            <a:r>
+              <a:rPr sz="1900" i="0" b="0">
+                <a:solidFill>
+                  <a:srgbClr val="858585"/>
+                </a:solidFill>
+                <a:latin typeface="Consolas"/>
+              </a:rPr>
+              <a:t>4</a:t>
+            </a:r>
+          </a:p>
+          <a:p>
+            <a:pPr algn="r">
+              <a:spcAft>
+                <a:spcPts val="407"/>
+              </a:spcAft>
+            </a:pPr>
+            <a:r>
+              <a:rPr sz="1900" i="0" b="0">
+                <a:solidFill>
+                  <a:srgbClr val="858585"/>
+                </a:solidFill>
+                <a:latin typeface="Consolas"/>
+              </a:rPr>
+              <a:t>5</a:t>
+            </a:r>
+          </a:p>
+          <a:p>
+            <a:pPr algn="r">
+              <a:spcAft>
+                <a:spcPts val="407"/>
+              </a:spcAft>
+            </a:pPr>
+            <a:r>
+              <a:rPr sz="1900" i="0" b="0">
+                <a:solidFill>
+                  <a:srgbClr val="858585"/>
+                </a:solidFill>
+                <a:latin typeface="Consolas"/>
+              </a:rPr>
+              <a:t>6</a:t>
+            </a:r>
+          </a:p>
+          <a:p>
+            <a:pPr algn="r">
+              <a:spcAft>
+                <a:spcPts val="407"/>
+              </a:spcAft>
+            </a:pPr>
+            <a:r>
+              <a:rPr sz="1900" i="0" b="0">
+                <a:solidFill>
+                  <a:srgbClr val="858585"/>
+                </a:solidFill>
+                <a:latin typeface="Consolas"/>
+              </a:rPr>
+              <a:t>7</a:t>
+            </a:r>
+          </a:p>
+          <a:p>
+            <a:pPr algn="r">
+              <a:spcAft>
+                <a:spcPts val="407"/>
+              </a:spcAft>
+            </a:pPr>
+            <a:r>
+              <a:rPr sz="1900" i="0" b="0">
+                <a:solidFill>
+                  <a:srgbClr val="858585"/>
+                </a:solidFill>
+                <a:latin typeface="Consolas"/>
+              </a:rPr>
+              <a:t>8</a:t>
+            </a:r>
+          </a:p>
+          <a:p>
+            <a:pPr algn="r">
+              <a:spcAft>
+                <a:spcPts val="407"/>
+              </a:spcAft>
+            </a:pPr>
+            <a:r>
+              <a:rPr sz="1900" i="0" b="0">
+                <a:solidFill>
+                  <a:srgbClr val="858585"/>
+                </a:solidFill>
+                <a:latin typeface="Consolas"/>
+              </a:rPr>
+              <a:t>9</a:t>
+            </a:r>
+          </a:p>
+          <a:p>
+            <a:pPr algn="r">
+              <a:spcAft>
+                <a:spcPts val="407"/>
+              </a:spcAft>
+            </a:pPr>
+            <a:r>
+              <a:rPr sz="1900" i="0" b="0">
+                <a:solidFill>
+                  <a:srgbClr val="858585"/>
+                </a:solidFill>
+                <a:latin typeface="Consolas"/>
+              </a:rPr>
+              <a:t>10</a:t>
+            </a:r>
+          </a:p>
+          <a:p>
+            <a:pPr algn="r">
+              <a:spcAft>
+                <a:spcPts val="407"/>
+              </a:spcAft>
+            </a:pPr>
+            <a:r>
+              <a:rPr sz="1900" i="0" b="0">
+                <a:solidFill>
+                  <a:srgbClr val="858585"/>
+                </a:solidFill>
+                <a:latin typeface="Consolas"/>
+              </a:rPr>
+              <a:t>11</a:t>
+            </a:r>
+          </a:p>
+          <a:p>
+            <a:pPr algn="r">
+              <a:spcAft>
+                <a:spcPts val="407"/>
+              </a:spcAft>
+            </a:pPr>
+            <a:r>
+              <a:rPr sz="1900" i="0" b="0">
+                <a:solidFill>
+                  <a:srgbClr val="858585"/>
+                </a:solidFill>
+                <a:latin typeface="Consolas"/>
+              </a:rPr>
+              <a:t>12</a:t>
+            </a:r>
+          </a:p>
+          <a:p>
+            <a:pPr algn="r">
+              <a:spcAft>
+                <a:spcPts val="407"/>
+              </a:spcAft>
+            </a:pPr>
+            <a:r>
+              <a:rPr sz="1900" i="0" b="0">
+                <a:solidFill>
+                  <a:srgbClr val="858585"/>
+                </a:solidFill>
+                <a:latin typeface="Consolas"/>
+              </a:rPr>
+              <a:t>13</a:t>
+            </a:r>
+          </a:p>
+        </p:txBody>
+      </p:sp>
+      <p:sp>
+        <p:nvSpPr>
+          <p:cNvPr id="12" name="TextBox 11"/>
+          <p:cNvSpPr txBox="1"/>
+          <p:nvPr/>
+        </p:nvSpPr>
+        <p:spPr>
+          <a:xfrm>
+            <a:off x="1188720" y="1719072"/>
+            <a:ext cx="10271455" cy="4469303"/>
+          </a:xfrm>
+          <a:prstGeom prst="rect">
+            <a:avLst/>
+          </a:prstGeom>
+          <a:noFill/>
+        </p:spPr>
+        <p:txBody>
+          <a:bodyPr wrap="square">
+            <a:spAutoFit/>
+          </a:bodyPr>
+          <a:lstStyle/>
+          <a:p>
             <a:pPr>
               <a:spcAft>
-                <a:spcPts val="800"/>
+                <a:spcPts val="407"/>
               </a:spcAft>
             </a:pPr>
             <a:r>
-              <a:rPr sz="2000" b="0" i="0">
-                <a:solidFill>
-                  <a:srgbClr val="333333"/>
-                </a:solidFill>
-                <a:latin typeface="Calibri"/>
-              </a:rPr>
-              <a:t>–   El regulador bancario estadounidense impuso una multa de ochenta millones de dolares en 2020.</a:t>
+              <a:rPr sz="1900" i="0" b="0">
+                <a:solidFill>
+                  <a:srgbClr val="569CD6"/>
+                </a:solidFill>
+                <a:latin typeface="Consolas"/>
+              </a:rPr>
+              <a:t>EXPLAIN</a:t>
+            </a:r>
+            <a:r>
+              <a:rPr sz="1900" i="0" b="0">
+                <a:solidFill>
+                  <a:srgbClr val="D4D4D4"/>
+                </a:solidFill>
+                <a:latin typeface="Consolas"/>
+              </a:rPr>
+              <a:t> (</a:t>
+            </a:r>
+            <a:r>
+              <a:rPr sz="1900" i="0" b="0">
+                <a:solidFill>
+                  <a:srgbClr val="569CD6"/>
+                </a:solidFill>
+                <a:latin typeface="Consolas"/>
+              </a:rPr>
+              <a:t>ANALYZE</a:t>
+            </a:r>
+            <a:r>
+              <a:rPr sz="1900" i="0" b="0">
+                <a:solidFill>
+                  <a:srgbClr val="D4D4D4"/>
+                </a:solidFill>
+                <a:latin typeface="Consolas"/>
+              </a:rPr>
+              <a:t>, </a:t>
+            </a:r>
+            <a:r>
+              <a:rPr sz="1900" i="0" b="0">
+                <a:solidFill>
+                  <a:srgbClr val="D4D4D4"/>
+                </a:solidFill>
+                <a:latin typeface="Consolas"/>
+              </a:rPr>
+              <a:t>BUFFERS</a:t>
+            </a:r>
+            <a:r>
+              <a:rPr sz="1900" i="0" b="0">
+                <a:solidFill>
+                  <a:srgbClr val="D4D4D4"/>
+                </a:solidFill>
+                <a:latin typeface="Consolas"/>
+              </a:rPr>
+              <a:t>)</a:t>
             </a:r>
           </a:p>
           <a:p>
             <a:pPr>
               <a:spcAft>
-                <a:spcPts val="800"/>
+                <a:spcPts val="407"/>
               </a:spcAft>
             </a:pPr>
             <a:r>
-              <a:rPr sz="2000" b="0" i="0">
-                <a:solidFill>
-                  <a:srgbClr val="333333"/>
-                </a:solidFill>
-                <a:latin typeface="Calibri"/>
-              </a:rPr>
-              <a:t>–   La causa proxima es la mala configuracion del cortafuegos; la causa raiz es que un componente tenia privilegios mucho mayores que su funcion.</a:t>
+              <a:rPr sz="1900" i="0" b="0">
+                <a:solidFill>
+                  <a:srgbClr val="569CD6"/>
+                </a:solidFill>
+                <a:latin typeface="Consolas"/>
+              </a:rPr>
+              <a:t>SELECT</a:t>
+            </a:r>
+            <a:r>
+              <a:rPr sz="1900" i="0" b="0">
+                <a:solidFill>
+                  <a:srgbClr val="D4D4D4"/>
+                </a:solidFill>
+                <a:latin typeface="Consolas"/>
+              </a:rPr>
+              <a:t> </a:t>
+            </a:r>
+            <a:r>
+              <a:rPr sz="1900" i="0" b="0">
+                <a:solidFill>
+                  <a:srgbClr val="D4D4D4"/>
+                </a:solidFill>
+                <a:latin typeface="Consolas"/>
+              </a:rPr>
+              <a:t>d</a:t>
+            </a:r>
+            <a:r>
+              <a:rPr sz="1900" i="0" b="0">
+                <a:solidFill>
+                  <a:srgbClr val="D4D4D4"/>
+                </a:solidFill>
+                <a:latin typeface="Consolas"/>
+              </a:rPr>
+              <a:t>.</a:t>
+            </a:r>
+            <a:r>
+              <a:rPr sz="1900" i="0" b="0">
+                <a:solidFill>
+                  <a:srgbClr val="D4D4D4"/>
+                </a:solidFill>
+                <a:latin typeface="Consolas"/>
+              </a:rPr>
+              <a:t>nombre</a:t>
+            </a:r>
+            <a:r>
+              <a:rPr sz="1900" i="0" b="0">
+                <a:solidFill>
+                  <a:srgbClr val="D4D4D4"/>
+                </a:solidFill>
+                <a:latin typeface="Consolas"/>
+              </a:rPr>
+              <a:t>, </a:t>
+            </a:r>
+            <a:r>
+              <a:rPr sz="1900" i="0" b="0">
+                <a:solidFill>
+                  <a:srgbClr val="DCDCAA"/>
+                </a:solidFill>
+                <a:latin typeface="Consolas"/>
+              </a:rPr>
+              <a:t>COUNT</a:t>
+            </a:r>
+            <a:r>
+              <a:rPr sz="1900" i="0" b="0">
+                <a:solidFill>
+                  <a:srgbClr val="D4D4D4"/>
+                </a:solidFill>
+                <a:latin typeface="Consolas"/>
+              </a:rPr>
+              <a:t>(</a:t>
+            </a:r>
+            <a:r>
+              <a:rPr sz="1900" i="0" b="0">
+                <a:solidFill>
+                  <a:srgbClr val="D4D4D4"/>
+                </a:solidFill>
+                <a:latin typeface="Consolas"/>
+              </a:rPr>
+              <a:t>c</a:t>
+            </a:r>
+            <a:r>
+              <a:rPr sz="1900" i="0" b="0">
+                <a:solidFill>
+                  <a:srgbClr val="D4D4D4"/>
+                </a:solidFill>
+                <a:latin typeface="Consolas"/>
+              </a:rPr>
+              <a:t>.</a:t>
+            </a:r>
+            <a:r>
+              <a:rPr sz="1900" i="0" b="0">
+                <a:solidFill>
+                  <a:srgbClr val="D4D4D4"/>
+                </a:solidFill>
+                <a:latin typeface="Consolas"/>
+              </a:rPr>
+              <a:t>id_cita</a:t>
+            </a:r>
+            <a:r>
+              <a:rPr sz="1900" i="0" b="0">
+                <a:solidFill>
+                  <a:srgbClr val="D4D4D4"/>
+                </a:solidFill>
+                <a:latin typeface="Consolas"/>
+              </a:rPr>
+              <a:t>) </a:t>
+            </a:r>
+            <a:r>
+              <a:rPr sz="1900" i="0" b="0">
+                <a:solidFill>
+                  <a:srgbClr val="569CD6"/>
+                </a:solidFill>
+                <a:latin typeface="Consolas"/>
+              </a:rPr>
+              <a:t>AS</a:t>
+            </a:r>
+            <a:r>
+              <a:rPr sz="1900" i="0" b="0">
+                <a:solidFill>
+                  <a:srgbClr val="D4D4D4"/>
+                </a:solidFill>
+                <a:latin typeface="Consolas"/>
+              </a:rPr>
+              <a:t> </a:t>
+            </a:r>
+            <a:r>
+              <a:rPr sz="1900" i="0" b="0">
+                <a:solidFill>
+                  <a:srgbClr val="D4D4D4"/>
+                </a:solidFill>
+                <a:latin typeface="Consolas"/>
+              </a:rPr>
+              <a:t>citas</a:t>
             </a:r>
           </a:p>
           <a:p>
             <a:pPr>
               <a:spcAft>
-                <a:spcPts val="800"/>
+                <a:spcPts val="407"/>
               </a:spcAft>
             </a:pPr>
             <a:r>
-              <a:rPr sz="2000" b="0" i="0">
-                <a:solidFill>
-                  <a:srgbClr val="333333"/>
-                </a:solidFill>
-                <a:latin typeface="Calibri"/>
-              </a:rPr>
-              <a:t>–   La leccion, en el vocabulario de la Clase 2, es el principio de privilegio minimo: cada actor recibe exactamente los permisos que necesita para su tarea y nada mas.</a:t>
+              <a:rPr sz="1900" i="0" b="0">
+                <a:solidFill>
+                  <a:srgbClr val="569CD6"/>
+                </a:solidFill>
+                <a:latin typeface="Consolas"/>
+              </a:rPr>
+              <a:t>FROM</a:t>
+            </a:r>
+            <a:r>
+              <a:rPr sz="1900" i="0" b="0">
+                <a:solidFill>
+                  <a:srgbClr val="D4D4D4"/>
+                </a:solidFill>
+                <a:latin typeface="Consolas"/>
+              </a:rPr>
+              <a:t> </a:t>
+            </a:r>
+            <a:r>
+              <a:rPr sz="1900" i="0" b="0">
+                <a:solidFill>
+                  <a:srgbClr val="D4D4D4"/>
+                </a:solidFill>
+                <a:latin typeface="Consolas"/>
+              </a:rPr>
+              <a:t>dueno</a:t>
+            </a:r>
+            <a:r>
+              <a:rPr sz="1900" i="0" b="0">
+                <a:solidFill>
+                  <a:srgbClr val="D4D4D4"/>
+                </a:solidFill>
+                <a:latin typeface="Consolas"/>
+              </a:rPr>
+              <a:t> </a:t>
+            </a:r>
+            <a:r>
+              <a:rPr sz="1900" i="0" b="0">
+                <a:solidFill>
+                  <a:srgbClr val="D4D4D4"/>
+                </a:solidFill>
+                <a:latin typeface="Consolas"/>
+              </a:rPr>
+              <a:t>d</a:t>
             </a:r>
           </a:p>
           <a:p>
             <a:pPr>
               <a:spcAft>
-                <a:spcPts val="800"/>
+                <a:spcPts val="407"/>
               </a:spcAft>
             </a:pPr>
             <a:r>
-              <a:rPr sz="2000" b="0" i="0">
-                <a:solidFill>
-                  <a:srgbClr val="333333"/>
-                </a:solidFill>
-                <a:latin typeface="Calibri"/>
-              </a:rPr>
-              <a:t>–   Ese atajo es exactamente el que convierte una vulnerabilidad menor en una fuga total.</a:t>
-            </a:r>
-          </a:p>
-        </p:txBody>
-      </p:sp>
-      <p:sp>
-        <p:nvSpPr>
-          <p:cNvPr id="6" name="TextBox 5"/>
+              <a:rPr sz="1900" i="0" b="0">
+                <a:solidFill>
+                  <a:srgbClr val="569CD6"/>
+                </a:solidFill>
+                <a:latin typeface="Consolas"/>
+              </a:rPr>
+              <a:t>JOIN</a:t>
+            </a:r>
+            <a:r>
+              <a:rPr sz="1900" i="0" b="0">
+                <a:solidFill>
+                  <a:srgbClr val="D4D4D4"/>
+                </a:solidFill>
+                <a:latin typeface="Consolas"/>
+              </a:rPr>
+              <a:t> </a:t>
+            </a:r>
+            <a:r>
+              <a:rPr sz="1900" i="0" b="0">
+                <a:solidFill>
+                  <a:srgbClr val="D4D4D4"/>
+                </a:solidFill>
+                <a:latin typeface="Consolas"/>
+              </a:rPr>
+              <a:t>mascota</a:t>
+            </a:r>
+            <a:r>
+              <a:rPr sz="1900" i="0" b="0">
+                <a:solidFill>
+                  <a:srgbClr val="D4D4D4"/>
+                </a:solidFill>
+                <a:latin typeface="Consolas"/>
+              </a:rPr>
+              <a:t> </a:t>
+            </a:r>
+            <a:r>
+              <a:rPr sz="1900" i="0" b="0">
+                <a:solidFill>
+                  <a:srgbClr val="D4D4D4"/>
+                </a:solidFill>
+                <a:latin typeface="Consolas"/>
+              </a:rPr>
+              <a:t>m</a:t>
+            </a:r>
+            <a:r>
+              <a:rPr sz="1900" i="0" b="0">
+                <a:solidFill>
+                  <a:srgbClr val="D4D4D4"/>
+                </a:solidFill>
+                <a:latin typeface="Consolas"/>
+              </a:rPr>
+              <a:t> </a:t>
+            </a:r>
+            <a:r>
+              <a:rPr sz="1900" i="0" b="0">
+                <a:solidFill>
+                  <a:srgbClr val="569CD6"/>
+                </a:solidFill>
+                <a:latin typeface="Consolas"/>
+              </a:rPr>
+              <a:t>ON</a:t>
+            </a:r>
+            <a:r>
+              <a:rPr sz="1900" i="0" b="0">
+                <a:solidFill>
+                  <a:srgbClr val="D4D4D4"/>
+                </a:solidFill>
+                <a:latin typeface="Consolas"/>
+              </a:rPr>
+              <a:t> </a:t>
+            </a:r>
+            <a:r>
+              <a:rPr sz="1900" i="0" b="0">
+                <a:solidFill>
+                  <a:srgbClr val="D4D4D4"/>
+                </a:solidFill>
+                <a:latin typeface="Consolas"/>
+              </a:rPr>
+              <a:t>m</a:t>
+            </a:r>
+            <a:r>
+              <a:rPr sz="1900" i="0" b="0">
+                <a:solidFill>
+                  <a:srgbClr val="D4D4D4"/>
+                </a:solidFill>
+                <a:latin typeface="Consolas"/>
+              </a:rPr>
+              <a:t>.</a:t>
+            </a:r>
+            <a:r>
+              <a:rPr sz="1900" i="0" b="0">
+                <a:solidFill>
+                  <a:srgbClr val="D4D4D4"/>
+                </a:solidFill>
+                <a:latin typeface="Consolas"/>
+              </a:rPr>
+              <a:t>id_dueno</a:t>
+            </a:r>
+            <a:r>
+              <a:rPr sz="1900" i="0" b="0">
+                <a:solidFill>
+                  <a:srgbClr val="D4D4D4"/>
+                </a:solidFill>
+                <a:latin typeface="Consolas"/>
+              </a:rPr>
+              <a:t>   = </a:t>
+            </a:r>
+            <a:r>
+              <a:rPr sz="1900" i="0" b="0">
+                <a:solidFill>
+                  <a:srgbClr val="D4D4D4"/>
+                </a:solidFill>
+                <a:latin typeface="Consolas"/>
+              </a:rPr>
+              <a:t>d</a:t>
+            </a:r>
+            <a:r>
+              <a:rPr sz="1900" i="0" b="0">
+                <a:solidFill>
+                  <a:srgbClr val="D4D4D4"/>
+                </a:solidFill>
+                <a:latin typeface="Consolas"/>
+              </a:rPr>
+              <a:t>.</a:t>
+            </a:r>
+            <a:r>
+              <a:rPr sz="1900" i="0" b="0">
+                <a:solidFill>
+                  <a:srgbClr val="D4D4D4"/>
+                </a:solidFill>
+                <a:latin typeface="Consolas"/>
+              </a:rPr>
+              <a:t>id_dueno</a:t>
+            </a:r>
+          </a:p>
+          <a:p>
+            <a:pPr>
+              <a:spcAft>
+                <a:spcPts val="407"/>
+              </a:spcAft>
+            </a:pPr>
+            <a:r>
+              <a:rPr sz="1900" i="0" b="0">
+                <a:solidFill>
+                  <a:srgbClr val="569CD6"/>
+                </a:solidFill>
+                <a:latin typeface="Consolas"/>
+              </a:rPr>
+              <a:t>JOIN</a:t>
+            </a:r>
+            <a:r>
+              <a:rPr sz="1900" i="0" b="0">
+                <a:solidFill>
+                  <a:srgbClr val="D4D4D4"/>
+                </a:solidFill>
+                <a:latin typeface="Consolas"/>
+              </a:rPr>
+              <a:t> </a:t>
+            </a:r>
+            <a:r>
+              <a:rPr sz="1900" i="0" b="0">
+                <a:solidFill>
+                  <a:srgbClr val="D4D4D4"/>
+                </a:solidFill>
+                <a:latin typeface="Consolas"/>
+              </a:rPr>
+              <a:t>cita</a:t>
+            </a:r>
+            <a:r>
+              <a:rPr sz="1900" i="0" b="0">
+                <a:solidFill>
+                  <a:srgbClr val="D4D4D4"/>
+                </a:solidFill>
+                <a:latin typeface="Consolas"/>
+              </a:rPr>
+              <a:t>    </a:t>
+            </a:r>
+            <a:r>
+              <a:rPr sz="1900" i="0" b="0">
+                <a:solidFill>
+                  <a:srgbClr val="D4D4D4"/>
+                </a:solidFill>
+                <a:latin typeface="Consolas"/>
+              </a:rPr>
+              <a:t>c</a:t>
+            </a:r>
+            <a:r>
+              <a:rPr sz="1900" i="0" b="0">
+                <a:solidFill>
+                  <a:srgbClr val="D4D4D4"/>
+                </a:solidFill>
+                <a:latin typeface="Consolas"/>
+              </a:rPr>
+              <a:t> </a:t>
+            </a:r>
+            <a:r>
+              <a:rPr sz="1900" i="0" b="0">
+                <a:solidFill>
+                  <a:srgbClr val="569CD6"/>
+                </a:solidFill>
+                <a:latin typeface="Consolas"/>
+              </a:rPr>
+              <a:t>ON</a:t>
+            </a:r>
+            <a:r>
+              <a:rPr sz="1900" i="0" b="0">
+                <a:solidFill>
+                  <a:srgbClr val="D4D4D4"/>
+                </a:solidFill>
+                <a:latin typeface="Consolas"/>
+              </a:rPr>
+              <a:t> </a:t>
+            </a:r>
+            <a:r>
+              <a:rPr sz="1900" i="0" b="0">
+                <a:solidFill>
+                  <a:srgbClr val="D4D4D4"/>
+                </a:solidFill>
+                <a:latin typeface="Consolas"/>
+              </a:rPr>
+              <a:t>c</a:t>
+            </a:r>
+            <a:r>
+              <a:rPr sz="1900" i="0" b="0">
+                <a:solidFill>
+                  <a:srgbClr val="D4D4D4"/>
+                </a:solidFill>
+                <a:latin typeface="Consolas"/>
+              </a:rPr>
+              <a:t>.</a:t>
+            </a:r>
+            <a:r>
+              <a:rPr sz="1900" i="0" b="0">
+                <a:solidFill>
+                  <a:srgbClr val="D4D4D4"/>
+                </a:solidFill>
+                <a:latin typeface="Consolas"/>
+              </a:rPr>
+              <a:t>id_mascota</a:t>
+            </a:r>
+            <a:r>
+              <a:rPr sz="1900" i="0" b="0">
+                <a:solidFill>
+                  <a:srgbClr val="D4D4D4"/>
+                </a:solidFill>
+                <a:latin typeface="Consolas"/>
+              </a:rPr>
+              <a:t> = </a:t>
+            </a:r>
+            <a:r>
+              <a:rPr sz="1900" i="0" b="0">
+                <a:solidFill>
+                  <a:srgbClr val="D4D4D4"/>
+                </a:solidFill>
+                <a:latin typeface="Consolas"/>
+              </a:rPr>
+              <a:t>m</a:t>
+            </a:r>
+            <a:r>
+              <a:rPr sz="1900" i="0" b="0">
+                <a:solidFill>
+                  <a:srgbClr val="D4D4D4"/>
+                </a:solidFill>
+                <a:latin typeface="Consolas"/>
+              </a:rPr>
+              <a:t>.</a:t>
+            </a:r>
+            <a:r>
+              <a:rPr sz="1900" i="0" b="0">
+                <a:solidFill>
+                  <a:srgbClr val="D4D4D4"/>
+                </a:solidFill>
+                <a:latin typeface="Consolas"/>
+              </a:rPr>
+              <a:t>id_mascota</a:t>
+            </a:r>
+          </a:p>
+          <a:p>
+            <a:pPr>
+              <a:spcAft>
+                <a:spcPts val="407"/>
+              </a:spcAft>
+            </a:pPr>
+            <a:r>
+              <a:rPr sz="1900" i="0" b="0">
+                <a:solidFill>
+                  <a:srgbClr val="569CD6"/>
+                </a:solidFill>
+                <a:latin typeface="Consolas"/>
+              </a:rPr>
+              <a:t>WHERE</a:t>
+            </a:r>
+            <a:r>
+              <a:rPr sz="1900" i="0" b="0">
+                <a:solidFill>
+                  <a:srgbClr val="D4D4D4"/>
+                </a:solidFill>
+                <a:latin typeface="Consolas"/>
+              </a:rPr>
+              <a:t> </a:t>
+            </a:r>
+            <a:r>
+              <a:rPr sz="1900" i="0" b="0">
+                <a:solidFill>
+                  <a:srgbClr val="D4D4D4"/>
+                </a:solidFill>
+                <a:latin typeface="Consolas"/>
+              </a:rPr>
+              <a:t>c</a:t>
+            </a:r>
+            <a:r>
+              <a:rPr sz="1900" i="0" b="0">
+                <a:solidFill>
+                  <a:srgbClr val="D4D4D4"/>
+                </a:solidFill>
+                <a:latin typeface="Consolas"/>
+              </a:rPr>
+              <a:t>.</a:t>
+            </a:r>
+            <a:r>
+              <a:rPr sz="1900" i="0" b="0">
+                <a:solidFill>
+                  <a:srgbClr val="D4D4D4"/>
+                </a:solidFill>
+                <a:latin typeface="Consolas"/>
+              </a:rPr>
+              <a:t>fecha_hora</a:t>
+            </a:r>
+            <a:r>
+              <a:rPr sz="1900" i="0" b="0">
+                <a:solidFill>
+                  <a:srgbClr val="D4D4D4"/>
+                </a:solidFill>
+                <a:latin typeface="Consolas"/>
+              </a:rPr>
+              <a:t> &gt;= </a:t>
+            </a:r>
+            <a:r>
+              <a:rPr sz="1900" i="0" b="0">
+                <a:solidFill>
+                  <a:srgbClr val="4EC9B0"/>
+                </a:solidFill>
+                <a:latin typeface="Consolas"/>
+              </a:rPr>
+              <a:t>DATE</a:t>
+            </a:r>
+            <a:r>
+              <a:rPr sz="1900" i="0" b="0">
+                <a:solidFill>
+                  <a:srgbClr val="D4D4D4"/>
+                </a:solidFill>
+                <a:latin typeface="Consolas"/>
+              </a:rPr>
+              <a:t> </a:t>
+            </a:r>
+            <a:r>
+              <a:rPr sz="1900" i="0" b="0">
+                <a:solidFill>
+                  <a:srgbClr val="CE9178"/>
+                </a:solidFill>
+                <a:latin typeface="Consolas"/>
+              </a:rPr>
+              <a:t>'2026-01-01'</a:t>
+            </a:r>
+          </a:p>
+          <a:p>
+            <a:pPr>
+              <a:spcAft>
+                <a:spcPts val="407"/>
+              </a:spcAft>
+            </a:pPr>
+            <a:r>
+              <a:rPr sz="1900" i="0" b="0">
+                <a:solidFill>
+                  <a:srgbClr val="569CD6"/>
+                </a:solidFill>
+                <a:latin typeface="Consolas"/>
+              </a:rPr>
+              <a:t>GROUP</a:t>
+            </a:r>
+            <a:r>
+              <a:rPr sz="1900" i="0" b="0">
+                <a:solidFill>
+                  <a:srgbClr val="D4D4D4"/>
+                </a:solidFill>
+                <a:latin typeface="Consolas"/>
+              </a:rPr>
+              <a:t> </a:t>
+            </a:r>
+            <a:r>
+              <a:rPr sz="1900" i="0" b="0">
+                <a:solidFill>
+                  <a:srgbClr val="569CD6"/>
+                </a:solidFill>
+                <a:latin typeface="Consolas"/>
+              </a:rPr>
+              <a:t>BY</a:t>
+            </a:r>
+            <a:r>
+              <a:rPr sz="1900" i="0" b="0">
+                <a:solidFill>
+                  <a:srgbClr val="D4D4D4"/>
+                </a:solidFill>
+                <a:latin typeface="Consolas"/>
+              </a:rPr>
+              <a:t> </a:t>
+            </a:r>
+            <a:r>
+              <a:rPr sz="1900" i="0" b="0">
+                <a:solidFill>
+                  <a:srgbClr val="D4D4D4"/>
+                </a:solidFill>
+                <a:latin typeface="Consolas"/>
+              </a:rPr>
+              <a:t>d</a:t>
+            </a:r>
+            <a:r>
+              <a:rPr sz="1900" i="0" b="0">
+                <a:solidFill>
+                  <a:srgbClr val="D4D4D4"/>
+                </a:solidFill>
+                <a:latin typeface="Consolas"/>
+              </a:rPr>
+              <a:t>.</a:t>
+            </a:r>
+            <a:r>
+              <a:rPr sz="1900" i="0" b="0">
+                <a:solidFill>
+                  <a:srgbClr val="D4D4D4"/>
+                </a:solidFill>
+                <a:latin typeface="Consolas"/>
+              </a:rPr>
+              <a:t>id_dueno</a:t>
+            </a:r>
+            <a:r>
+              <a:rPr sz="1900" i="0" b="0">
+                <a:solidFill>
+                  <a:srgbClr val="D4D4D4"/>
+                </a:solidFill>
+                <a:latin typeface="Consolas"/>
+              </a:rPr>
+              <a:t>, </a:t>
+            </a:r>
+            <a:r>
+              <a:rPr sz="1900" i="0" b="0">
+                <a:solidFill>
+                  <a:srgbClr val="D4D4D4"/>
+                </a:solidFill>
+                <a:latin typeface="Consolas"/>
+              </a:rPr>
+              <a:t>d</a:t>
+            </a:r>
+            <a:r>
+              <a:rPr sz="1900" i="0" b="0">
+                <a:solidFill>
+                  <a:srgbClr val="D4D4D4"/>
+                </a:solidFill>
+                <a:latin typeface="Consolas"/>
+              </a:rPr>
+              <a:t>.</a:t>
+            </a:r>
+            <a:r>
+              <a:rPr sz="1900" i="0" b="0">
+                <a:solidFill>
+                  <a:srgbClr val="D4D4D4"/>
+                </a:solidFill>
+                <a:latin typeface="Consolas"/>
+              </a:rPr>
+              <a:t>nombre</a:t>
+            </a:r>
+          </a:p>
+          <a:p>
+            <a:pPr>
+              <a:spcAft>
+                <a:spcPts val="407"/>
+              </a:spcAft>
+            </a:pPr>
+            <a:r>
+              <a:rPr sz="1900" i="0" b="0">
+                <a:solidFill>
+                  <a:srgbClr val="569CD6"/>
+                </a:solidFill>
+                <a:latin typeface="Consolas"/>
+              </a:rPr>
+              <a:t>HAVING</a:t>
+            </a:r>
+            <a:r>
+              <a:rPr sz="1900" i="0" b="0">
+                <a:solidFill>
+                  <a:srgbClr val="D4D4D4"/>
+                </a:solidFill>
+                <a:latin typeface="Consolas"/>
+              </a:rPr>
+              <a:t> </a:t>
+            </a:r>
+            <a:r>
+              <a:rPr sz="1900" i="0" b="0">
+                <a:solidFill>
+                  <a:srgbClr val="DCDCAA"/>
+                </a:solidFill>
+                <a:latin typeface="Consolas"/>
+              </a:rPr>
+              <a:t>COUNT</a:t>
+            </a:r>
+            <a:r>
+              <a:rPr sz="1900" i="0" b="0">
+                <a:solidFill>
+                  <a:srgbClr val="D4D4D4"/>
+                </a:solidFill>
+                <a:latin typeface="Consolas"/>
+              </a:rPr>
+              <a:t>(</a:t>
+            </a:r>
+            <a:r>
+              <a:rPr sz="1900" i="0" b="0">
+                <a:solidFill>
+                  <a:srgbClr val="D4D4D4"/>
+                </a:solidFill>
+                <a:latin typeface="Consolas"/>
+              </a:rPr>
+              <a:t>c</a:t>
+            </a:r>
+            <a:r>
+              <a:rPr sz="1900" i="0" b="0">
+                <a:solidFill>
+                  <a:srgbClr val="D4D4D4"/>
+                </a:solidFill>
+                <a:latin typeface="Consolas"/>
+              </a:rPr>
+              <a:t>.</a:t>
+            </a:r>
+            <a:r>
+              <a:rPr sz="1900" i="0" b="0">
+                <a:solidFill>
+                  <a:srgbClr val="D4D4D4"/>
+                </a:solidFill>
+                <a:latin typeface="Consolas"/>
+              </a:rPr>
+              <a:t>id_cita</a:t>
+            </a:r>
+            <a:r>
+              <a:rPr sz="1900" i="0" b="0">
+                <a:solidFill>
+                  <a:srgbClr val="D4D4D4"/>
+                </a:solidFill>
+                <a:latin typeface="Consolas"/>
+              </a:rPr>
+              <a:t>) &gt; </a:t>
+            </a:r>
+            <a:r>
+              <a:rPr sz="1900" i="0" b="0">
+                <a:solidFill>
+                  <a:srgbClr val="B5CEA8"/>
+                </a:solidFill>
+                <a:latin typeface="Consolas"/>
+              </a:rPr>
+              <a:t>5</a:t>
+            </a:r>
+            <a:r>
+              <a:rPr sz="1900" i="0" b="0">
+                <a:solidFill>
+                  <a:srgbClr val="D4D4D4"/>
+                </a:solidFill>
+                <a:latin typeface="Consolas"/>
+              </a:rPr>
+              <a:t>;</a:t>
+            </a:r>
+          </a:p>
+          <a:p>
+            <a:pPr>
+              <a:spcAft>
+                <a:spcPts val="407"/>
+              </a:spcAft>
+            </a:pPr>
+            <a:r>
+              <a:rPr sz="1900" i="0" b="0">
+                <a:solidFill>
+                  <a:srgbClr val="D4D4D4"/>
+                </a:solidFill>
+                <a:latin typeface="Consolas"/>
+              </a:rPr>
+              <a:t/>
+            </a:r>
+          </a:p>
+          <a:p>
+            <a:pPr>
+              <a:spcAft>
+                <a:spcPts val="407"/>
+              </a:spcAft>
+            </a:pPr>
+            <a:r>
+              <a:rPr sz="1900" i="1" b="0">
+                <a:solidFill>
+                  <a:srgbClr val="6A9955"/>
+                </a:solidFill>
+                <a:latin typeface="Consolas"/>
+              </a:rPr>
+              <a:t>-- 1. el nodo mas costoso (cost mas alto), no el primero</a:t>
+            </a:r>
+          </a:p>
+          <a:p>
+            <a:pPr>
+              <a:spcAft>
+                <a:spcPts val="407"/>
+              </a:spcAft>
+            </a:pPr>
+            <a:r>
+              <a:rPr sz="1900" i="0" b="0">
+                <a:solidFill>
+                  <a:srgbClr val="D4D4D4"/>
+                </a:solidFill>
+                <a:latin typeface="Consolas"/>
+              </a:rPr>
+              <a:t>-- </a:t>
+            </a:r>
+            <a:r>
+              <a:rPr sz="1900" i="0" b="0">
+                <a:solidFill>
+                  <a:srgbClr val="B5CEA8"/>
+                </a:solidFill>
+                <a:latin typeface="Consolas"/>
+              </a:rPr>
+              <a:t>2</a:t>
+            </a:r>
+            <a:r>
+              <a:rPr sz="1900" i="0" b="0">
+                <a:solidFill>
+                  <a:srgbClr val="D4D4D4"/>
+                </a:solidFill>
+                <a:latin typeface="Consolas"/>
+              </a:rPr>
+              <a:t>. </a:t>
+            </a:r>
+            <a:r>
+              <a:rPr sz="1900" i="0" b="0">
+                <a:solidFill>
+                  <a:srgbClr val="D4D4D4"/>
+                </a:solidFill>
+                <a:latin typeface="Consolas"/>
+              </a:rPr>
+              <a:t>Seq</a:t>
+            </a:r>
+            <a:r>
+              <a:rPr sz="1900" i="0" b="0">
+                <a:solidFill>
+                  <a:srgbClr val="D4D4D4"/>
+                </a:solidFill>
+                <a:latin typeface="Consolas"/>
+              </a:rPr>
+              <a:t> </a:t>
+            </a:r>
+            <a:r>
+              <a:rPr sz="1900" i="0" b="0">
+                <a:solidFill>
+                  <a:srgbClr val="D4D4D4"/>
+                </a:solidFill>
+                <a:latin typeface="Consolas"/>
+              </a:rPr>
+              <a:t>Scan</a:t>
+            </a:r>
+            <a:r>
+              <a:rPr sz="1900" i="0" b="0">
+                <a:solidFill>
+                  <a:srgbClr val="D4D4D4"/>
+                </a:solidFill>
+                <a:latin typeface="Consolas"/>
+              </a:rPr>
+              <a:t> </a:t>
+            </a:r>
+            <a:r>
+              <a:rPr sz="1900" i="0" b="0">
+                <a:solidFill>
+                  <a:srgbClr val="D4D4D4"/>
+                </a:solidFill>
+                <a:latin typeface="Consolas"/>
+              </a:rPr>
+              <a:t>sobre</a:t>
+            </a:r>
+            <a:r>
+              <a:rPr sz="1900" i="0" b="0">
+                <a:solidFill>
+                  <a:srgbClr val="D4D4D4"/>
+                </a:solidFill>
+                <a:latin typeface="Consolas"/>
+              </a:rPr>
+              <a:t> </a:t>
+            </a:r>
+            <a:r>
+              <a:rPr sz="1900" i="0" b="0">
+                <a:solidFill>
+                  <a:srgbClr val="D4D4D4"/>
+                </a:solidFill>
+                <a:latin typeface="Consolas"/>
+              </a:rPr>
+              <a:t>tabla</a:t>
+            </a:r>
+            <a:r>
+              <a:rPr sz="1900" i="0" b="0">
+                <a:solidFill>
+                  <a:srgbClr val="D4D4D4"/>
+                </a:solidFill>
+                <a:latin typeface="Consolas"/>
+              </a:rPr>
+              <a:t> </a:t>
+            </a:r>
+            <a:r>
+              <a:rPr sz="1900" i="0" b="0">
+                <a:solidFill>
+                  <a:srgbClr val="D4D4D4"/>
+                </a:solidFill>
+                <a:latin typeface="Consolas"/>
+              </a:rPr>
+              <a:t>grande</a:t>
+            </a:r>
+            <a:r>
+              <a:rPr sz="1900" i="0" b="0">
+                <a:solidFill>
+                  <a:srgbClr val="D4D4D4"/>
+                </a:solidFill>
+                <a:latin typeface="Consolas"/>
+              </a:rPr>
+              <a:t> </a:t>
+            </a:r>
+            <a:r>
+              <a:rPr sz="1900" i="0" b="0">
+                <a:solidFill>
+                  <a:srgbClr val="D4D4D4"/>
+                </a:solidFill>
+                <a:latin typeface="Consolas"/>
+              </a:rPr>
+              <a:t>con</a:t>
+            </a:r>
+            <a:r>
+              <a:rPr sz="1900" i="0" b="0">
+                <a:solidFill>
+                  <a:srgbClr val="D4D4D4"/>
+                </a:solidFill>
+                <a:latin typeface="Consolas"/>
+              </a:rPr>
+              <a:t> </a:t>
+            </a:r>
+            <a:r>
+              <a:rPr sz="1900" i="0" b="0">
+                <a:solidFill>
+                  <a:srgbClr val="D4D4D4"/>
+                </a:solidFill>
+                <a:latin typeface="Consolas"/>
+              </a:rPr>
+              <a:t>filtro</a:t>
+            </a:r>
+            <a:r>
+              <a:rPr sz="1900" i="0" b="0">
+                <a:solidFill>
+                  <a:srgbClr val="D4D4D4"/>
+                </a:solidFill>
+                <a:latin typeface="Consolas"/>
+              </a:rPr>
+              <a:t> </a:t>
+            </a:r>
+            <a:r>
+              <a:rPr sz="1900" i="0" b="0">
+                <a:solidFill>
+                  <a:srgbClr val="D4D4D4"/>
+                </a:solidFill>
+                <a:latin typeface="Consolas"/>
+              </a:rPr>
+              <a:t>selectivo</a:t>
+            </a:r>
+            <a:r>
+              <a:rPr sz="1900" i="0" b="0">
+                <a:solidFill>
+                  <a:srgbClr val="D4D4D4"/>
+                </a:solidFill>
+                <a:latin typeface="Consolas"/>
+              </a:rPr>
+              <a:t> -&gt; </a:t>
+            </a:r>
+            <a:r>
+              <a:rPr sz="1900" i="0" b="0">
+                <a:solidFill>
+                  <a:srgbClr val="D4D4D4"/>
+                </a:solidFill>
+                <a:latin typeface="Consolas"/>
+              </a:rPr>
+              <a:t>falta</a:t>
+            </a:r>
+            <a:r>
+              <a:rPr sz="1900" i="0" b="0">
+                <a:solidFill>
+                  <a:srgbClr val="D4D4D4"/>
+                </a:solidFill>
+                <a:latin typeface="Consolas"/>
+              </a:rPr>
+              <a:t> </a:t>
+            </a:r>
+            <a:r>
+              <a:rPr sz="1900" i="0" b="0">
+                <a:solidFill>
+                  <a:srgbClr val="D4D4D4"/>
+                </a:solidFill>
+                <a:latin typeface="Consolas"/>
+              </a:rPr>
+              <a:t>indice</a:t>
+            </a:r>
+          </a:p>
+          <a:p>
+            <a:pPr>
+              <a:spcAft>
+                <a:spcPts val="407"/>
+              </a:spcAft>
+            </a:pPr>
+            <a:r>
+              <a:rPr sz="1900" i="1" b="0">
+                <a:solidFill>
+                  <a:srgbClr val="6A9955"/>
+                </a:solidFill>
+                <a:latin typeface="Consolas"/>
+              </a:rPr>
+              <a:t>-- 3. rows estimadas vs actual: si difieren 10x, ANALYZE la tabla</a:t>
+            </a:r>
+          </a:p>
+          <a:p>
+            <a:pPr>
+              <a:spcAft>
+                <a:spcPts val="407"/>
+              </a:spcAft>
+            </a:pPr>
+            <a:r>
+              <a:rPr sz="1900" i="0" b="0">
+                <a:solidFill>
+                  <a:srgbClr val="D4D4D4"/>
+                </a:solidFill>
+                <a:latin typeface="Consolas"/>
+              </a:rPr>
+              <a:t>-- </a:t>
+            </a:r>
+            <a:r>
+              <a:rPr sz="1900" i="0" b="0">
+                <a:solidFill>
+                  <a:srgbClr val="B5CEA8"/>
+                </a:solidFill>
+                <a:latin typeface="Consolas"/>
+              </a:rPr>
+              <a:t>4</a:t>
+            </a:r>
+            <a:r>
+              <a:rPr sz="1900" i="0" b="0">
+                <a:solidFill>
+                  <a:srgbClr val="D4D4D4"/>
+                </a:solidFill>
+                <a:latin typeface="Consolas"/>
+              </a:rPr>
+              <a:t>. </a:t>
+            </a:r>
+            <a:r>
+              <a:rPr sz="1900" i="0" b="0">
+                <a:solidFill>
+                  <a:srgbClr val="D4D4D4"/>
+                </a:solidFill>
+                <a:latin typeface="Consolas"/>
+              </a:rPr>
+              <a:t>Nested</a:t>
+            </a:r>
+            <a:r>
+              <a:rPr sz="1900" i="0" b="0">
+                <a:solidFill>
+                  <a:srgbClr val="D4D4D4"/>
+                </a:solidFill>
+                <a:latin typeface="Consolas"/>
+              </a:rPr>
+              <a:t> </a:t>
+            </a:r>
+            <a:r>
+              <a:rPr sz="1900" i="0" b="0">
+                <a:solidFill>
+                  <a:srgbClr val="569CD6"/>
+                </a:solidFill>
+                <a:latin typeface="Consolas"/>
+              </a:rPr>
+              <a:t>Loop</a:t>
+            </a:r>
+            <a:r>
+              <a:rPr sz="1900" i="0" b="0">
+                <a:solidFill>
+                  <a:srgbClr val="D4D4D4"/>
+                </a:solidFill>
+                <a:latin typeface="Consolas"/>
+              </a:rPr>
+              <a:t> </a:t>
+            </a:r>
+            <a:r>
+              <a:rPr sz="1900" i="0" b="0">
+                <a:solidFill>
+                  <a:srgbClr val="D4D4D4"/>
+                </a:solidFill>
+                <a:latin typeface="Consolas"/>
+              </a:rPr>
+              <a:t>con</a:t>
+            </a:r>
+            <a:r>
+              <a:rPr sz="1900" i="0" b="0">
+                <a:solidFill>
+                  <a:srgbClr val="D4D4D4"/>
+                </a:solidFill>
+                <a:latin typeface="Consolas"/>
+              </a:rPr>
+              <a:t> </a:t>
+            </a:r>
+            <a:r>
+              <a:rPr sz="1900" i="0" b="0">
+                <a:solidFill>
+                  <a:srgbClr val="D4D4D4"/>
+                </a:solidFill>
+                <a:latin typeface="Consolas"/>
+              </a:rPr>
+              <a:t>muchas</a:t>
+            </a:r>
+            <a:r>
+              <a:rPr sz="1900" i="0" b="0">
+                <a:solidFill>
+                  <a:srgbClr val="D4D4D4"/>
+                </a:solidFill>
+                <a:latin typeface="Consolas"/>
+              </a:rPr>
+              <a:t> </a:t>
+            </a:r>
+            <a:r>
+              <a:rPr sz="1900" i="0" b="0">
+                <a:solidFill>
+                  <a:srgbClr val="D4D4D4"/>
+                </a:solidFill>
+                <a:latin typeface="Consolas"/>
+              </a:rPr>
+              <a:t>filas</a:t>
+            </a:r>
+            <a:r>
+              <a:rPr sz="1900" i="0" b="0">
+                <a:solidFill>
+                  <a:srgbClr val="D4D4D4"/>
+                </a:solidFill>
+                <a:latin typeface="Consolas"/>
+              </a:rPr>
+              <a:t> -&gt; </a:t>
+            </a:r>
+            <a:r>
+              <a:rPr sz="1900" i="0" b="0">
+                <a:solidFill>
+                  <a:srgbClr val="D4D4D4"/>
+                </a:solidFill>
+                <a:latin typeface="Consolas"/>
+              </a:rPr>
+              <a:t>suele</a:t>
+            </a:r>
+            <a:r>
+              <a:rPr sz="1900" i="0" b="0">
+                <a:solidFill>
+                  <a:srgbClr val="D4D4D4"/>
+                </a:solidFill>
+                <a:latin typeface="Consolas"/>
+              </a:rPr>
+              <a:t> </a:t>
+            </a:r>
+            <a:r>
+              <a:rPr sz="1900" i="0" b="0">
+                <a:solidFill>
+                  <a:srgbClr val="D4D4D4"/>
+                </a:solidFill>
+                <a:latin typeface="Consolas"/>
+              </a:rPr>
+              <a:t>querer</a:t>
+            </a:r>
+            <a:r>
+              <a:rPr sz="1900" i="0" b="0">
+                <a:solidFill>
+                  <a:srgbClr val="D4D4D4"/>
+                </a:solidFill>
+                <a:latin typeface="Consolas"/>
+              </a:rPr>
+              <a:t> </a:t>
+            </a:r>
+            <a:r>
+              <a:rPr sz="1900" i="0" b="0">
+                <a:solidFill>
+                  <a:srgbClr val="569CD6"/>
+                </a:solidFill>
+                <a:latin typeface="Consolas"/>
+              </a:rPr>
+              <a:t>Hash</a:t>
+            </a:r>
+            <a:r>
+              <a:rPr sz="1900" i="0" b="0">
+                <a:solidFill>
+                  <a:srgbClr val="D4D4D4"/>
+                </a:solidFill>
+                <a:latin typeface="Consolas"/>
+              </a:rPr>
+              <a:t> </a:t>
+            </a:r>
+            <a:r>
+              <a:rPr sz="1900" i="0" b="0">
+                <a:solidFill>
+                  <a:srgbClr val="569CD6"/>
+                </a:solidFill>
+                <a:latin typeface="Consolas"/>
+              </a:rPr>
+              <a:t>Join</a:t>
+            </a:r>
+          </a:p>
+        </p:txBody>
+      </p:sp>
+      <p:sp>
+        <p:nvSpPr>
+          <p:cNvPr id="13" name="TextBox 12"/>
           <p:cNvSpPr txBox="1"/>
           <p:nvPr/>
         </p:nvSpPr>
@@ -5011,21 +7560,125 @@
                 </a:solidFill>
                 <a:latin typeface="Calibri"/>
               </a:rPr>
-              <a:t>Caso tres: perdida de datos en una migracion (MySpace, 2019) (1/2)</a:t>
-            </a:r>
-          </a:p>
-        </p:txBody>
-      </p:sp>
-      <p:sp>
-        <p:nvSpPr>
-          <p:cNvPr id="5" name="TextBox 4"/>
+              <a:t>Demo del dia</a:t>
+            </a:r>
+          </a:p>
+        </p:txBody>
+      </p:sp>
+      <p:sp>
+        <p:nvSpPr>
+          <p:cNvPr id="5" name="Rounded Rectangle 4"/>
+          <p:cNvSpPr/>
+          <p:nvPr/>
+        </p:nvSpPr>
+        <p:spPr>
+          <a:xfrm>
+            <a:off x="5797149" y="1573813"/>
+            <a:ext cx="6010497" cy="4057845"/>
+          </a:xfrm>
+          <a:prstGeom prst="roundRect">
+            <a:avLst>
+              <a:gd name="adj" fmla="val 4000"/>
+            </a:avLst>
+          </a:prstGeom>
+          <a:solidFill>
+            <a:srgbClr val="E8EEF4"/>
+          </a:solidFill>
+          <a:ln>
+            <a:noFill/>
+          </a:ln>
+        </p:spPr>
+        <p:style>
+          <a:lnRef idx="1">
+            <a:schemeClr val="accent1"/>
+          </a:lnRef>
+          <a:fillRef idx="3">
+            <a:schemeClr val="accent1"/>
+          </a:fillRef>
+          <a:effectRef idx="2">
+            <a:schemeClr val="accent1"/>
+          </a:effectRef>
+          <a:fontRef idx="minor">
+            <a:schemeClr val="lt1"/>
+          </a:fontRef>
+        </p:style>
+        <p:txBody>
+          <a:bodyPr rtlCol="0" anchor="ctr"/>
+          <a:lstStyle/>
+          <a:p>
+            <a:pPr algn="ctr"/>
+          </a:p>
+        </p:txBody>
+      </p:sp>
+      <p:pic>
+        <p:nvPicPr>
+          <p:cNvPr id="6" name="Picture 5" descr="laptop-code-live-demo.jpg"/>
+          <p:cNvPicPr>
+            <a:picLocks noChangeAspect="1"/>
+          </p:cNvPicPr>
+          <p:nvPr/>
+        </p:nvPicPr>
+        <p:blipFill>
+          <a:blip r:embed="rId2"/>
+          <a:stretch>
+            <a:fillRect/>
+          </a:stretch>
+        </p:blipFill>
+        <p:spPr>
+          <a:xfrm>
+            <a:off x="5870301" y="1646965"/>
+            <a:ext cx="5864193" cy="3911541"/>
+          </a:xfrm>
+          <a:prstGeom prst="rect">
+            <a:avLst/>
+          </a:prstGeom>
+        </p:spPr>
+      </p:pic>
+      <p:sp>
+        <p:nvSpPr>
+          <p:cNvPr id="7" name="TextBox 6"/>
           <p:cNvSpPr txBox="1"/>
           <p:nvPr/>
         </p:nvSpPr>
         <p:spPr>
           <a:xfrm>
-            <a:off x="457200" y="1170432"/>
-            <a:ext cx="11277295" cy="5230368"/>
+            <a:off x="5870301" y="5961888"/>
+            <a:ext cx="5864193" cy="320040"/>
+          </a:xfrm>
+          <a:prstGeom prst="rect">
+            <a:avLst/>
+          </a:prstGeom>
+          <a:noFill/>
+        </p:spPr>
+        <p:txBody>
+          <a:bodyPr wrap="square">
+            <a:spAutoFit/>
+          </a:bodyPr>
+          <a:lstStyle/>
+          <a:p>
+            <a:pPr algn="ctr"/>
+            <a:r>
+              <a:rPr sz="1100" b="0" i="1">
+                <a:solidFill>
+                  <a:srgbClr val="666666"/>
+                </a:solidFill>
+                <a:latin typeface="Calibri"/>
+              </a:rPr>
+              <a:t>Foto: olia danilevich · Pexels</a:t>
+            </a:r>
+          </a:p>
+        </p:txBody>
+      </p:sp>
+      <p:sp>
+        <p:nvSpPr>
+          <p:cNvPr id="8" name="TextBox 7"/>
+          <p:cNvSpPr txBox="1"/>
+          <p:nvPr/>
+        </p:nvSpPr>
+        <p:spPr>
+          <a:xfrm>
+            <a:off x="457200" y="1353312"/>
+            <a:ext cx="5093061" cy="5047488"/>
           </a:xfrm>
           <a:prstGeom prst="rect">
             <a:avLst/>
@@ -5050,7 +7703,25 @@
                 </a:solidFill>
                 <a:latin typeface="Calibri"/>
               </a:rPr>
-              <a:t>–   En marzo de 2019 MySpace reconocio que habia perdido la musica subida a la plataforma entre 2003 y 2015, del orden de cincuenta millones de archivos de unos catorce millones de artistas, durante una migracion de servidores</a:t>
+              <a:t>–   </a:t>
+            </a:r>
+            <a:r>
+              <a:rPr sz="2000" b="1" i="0">
+                <a:solidFill>
+                  <a:srgbClr val="333333"/>
+                </a:solidFill>
+                <a:latin typeface="Calibri"/>
+              </a:rPr>
+              <a:t>Herramienta:</a:t>
+            </a:r>
+            <a:r>
+              <a:rPr sz="2000" b="0" i="0">
+                <a:solidFill>
+                  <a:srgbClr val="333333"/>
+                </a:solidFill>
+                <a:latin typeface="Calibri"/>
+              </a:rPr>
+              <a:t> Google Docs</a:t>
             </a:r>
           </a:p>
           <a:p>
@@ -5066,7 +7737,25 @@
                 </a:solidFill>
                 <a:latin typeface="Calibri"/>
               </a:rPr>
-              <a:t>–   No hubo ataque ni desastre natural, solo una migracion sin copia verificada de la que ya no se podia volver atras.</a:t>
+              <a:t>–   </a:t>
+            </a:r>
+            <a:r>
+              <a:rPr sz="2000" b="1" i="0">
+                <a:solidFill>
+                  <a:srgbClr val="333333"/>
+                </a:solidFill>
+                <a:latin typeface="Calibri"/>
+              </a:rPr>
+              <a:t>Demo:</a:t>
+            </a:r>
+            <a:r>
+              <a:rPr sz="2000" b="0" i="0">
+                <a:solidFill>
+                  <a:srgbClr val="333333"/>
+                </a:solidFill>
+                <a:latin typeface="Calibri"/>
+              </a:rPr>
+              <a:t> Plantilla:</a:t>
             </a:r>
           </a:p>
           <a:p>
@@ -5082,7 +7771,7 @@
                 </a:solidFill>
                 <a:latin typeface="Calibri"/>
               </a:rPr>
-              <a:t>–   En la banca hay un caso paralelo y bien documentado con el sistema de TSB en Reino Unido en 2018, donde el paso a una plataforma nueva dejo a millones de clientes sin acceso confiable durante semanas</a:t>
+              <a:t>–   Sigan el mismo dominio de la clínica (no inventen otro caso).</a:t>
             </a:r>
           </a:p>
           <a:p>
@@ -5098,14 +7787,32 @@
                 </a:solidFill>
                 <a:latin typeface="Calibri"/>
               </a:rPr>
-              <a:t>–   Con costos reportados del orden de cientos de millones de libras y sanciones posteriores del regulador</a:t>
-            </a:r>
-          </a:p>
-        </p:txBody>
-      </p:sp>
-      <p:sp>
-        <p:nvSpPr>
-          <p:cNvPr id="6" name="TextBox 5"/>
+              <a:t>–   </a:t>
+            </a:r>
+            <a:r>
+              <a:rPr sz="2000" b="1" i="0">
+                <a:solidFill>
+                  <a:srgbClr val="333333"/>
+                </a:solidFill>
+                <a:latin typeface="Calibri"/>
+              </a:rPr>
+              <a:t>Qué observar:</a:t>
+            </a:r>
+            <a:r>
+              <a:rPr sz="2000" b="0" i="0">
+                <a:solidFill>
+                  <a:srgbClr val="333333"/>
+                </a:solidFill>
+                <a:latin typeface="Calibri"/>
+              </a:rPr>
+              <a:t> cada caso se separa en contexto, fallo, causa raiz y la leccion convertida en una accion verificable sobre la base de la clínica.</a:t>
+            </a:r>
+          </a:p>
+        </p:txBody>
+      </p:sp>
+      <p:sp>
+        <p:nvSpPr>
+          <p:cNvPr id="9" name="TextBox 8"/>
           <p:cNvSpPr txBox="1"/>
           <p:nvPr/>
         </p:nvSpPr>
@@ -5173,13 +7880,13 @@
         <p:spPr>
           <a:xfrm>
             <a:off x="0" y="0"/>
-            <a:ext cx="12191695" cy="960120"/>
+            <a:ext cx="12191695" cy="164592"/>
           </a:xfrm>
           <a:prstGeom prst="rect">
             <a:avLst/>
           </a:prstGeom>
           <a:solidFill>
-            <a:srgbClr val="095292"/>
+            <a:srgbClr val="269CCB"/>
           </a:solidFill>
           <a:ln>
             <a:noFill/>
@@ -5207,49 +7914,30 @@
           </a:p>
         </p:txBody>
       </p:sp>
-      <p:sp>
-        <p:nvSpPr>
-          <p:cNvPr id="3" name="Rectangle 2"/>
-          <p:cNvSpPr/>
-          <p:nvPr/>
-        </p:nvSpPr>
-        <p:spPr>
-          <a:xfrm>
-            <a:off x="0" y="960120"/>
-            <a:ext cx="12191695" cy="41148"/>
+      <p:pic>
+        <p:nvPicPr>
+          <p:cNvPr id="3" name="Picture 2" descr="logo_uniajc_color.png"/>
+          <p:cNvPicPr>
+            <a:picLocks noChangeAspect="1"/>
+          </p:cNvPicPr>
+          <p:nvPr/>
+        </p:nvPicPr>
+        <p:blipFill>
+          <a:blip r:embed="rId2"/>
+          <a:stretch>
+            <a:fillRect/>
+          </a:stretch>
+        </p:blipFill>
+        <p:spPr>
+          <a:xfrm>
+            <a:off x="10271455" y="5998464"/>
+            <a:ext cx="1463040" cy="643233"/>
           </a:xfrm>
           <a:prstGeom prst="rect">
             <a:avLst/>
           </a:prstGeom>
-          <a:solidFill>
-            <a:srgbClr val="FFD000"/>
-          </a:solidFill>
-          <a:ln>
-            <a:noFill/>
-          </a:ln>
-        </p:spPr>
-        <p:style>
-          <a:lnRef idx="1">
-            <a:schemeClr val="accent1"/>
-          </a:lnRef>
-          <a:fillRef idx="3">
-            <a:schemeClr val="accent1"/>
-          </a:fillRef>
-          <a:effectRef idx="2">
-            <a:schemeClr val="accent1"/>
-          </a:effectRef>
-          <a:fontRef idx="minor">
-            <a:schemeClr val="lt1"/>
-          </a:fontRef>
-        </p:style>
-        <p:txBody>
-          <a:bodyPr rtlCol="0" anchor="ctr"/>
-          <a:lstStyle/>
-          <a:p>
-            <a:pPr algn="ctr"/>
-          </a:p>
-        </p:txBody>
-      </p:sp>
+        </p:spPr>
+      </p:pic>
       <p:sp>
         <p:nvSpPr>
           <p:cNvPr id="4" name="TextBox 3"/>
@@ -5258,8 +7946,41 @@
         </p:nvSpPr>
         <p:spPr>
           <a:xfrm>
-            <a:off x="457200" y="164592"/>
-            <a:ext cx="11277295" cy="502920"/>
+            <a:off x="457200" y="1737360"/>
+            <a:ext cx="11277295" cy="1097280"/>
+          </a:xfrm>
+          <a:prstGeom prst="rect">
+            <a:avLst/>
+          </a:prstGeom>
+          <a:noFill/>
+        </p:spPr>
+        <p:txBody>
+          <a:bodyPr wrap="square" anchor="ctr"/>
+          <a:lstStyle/>
+          <a:p>
+            <a:pPr algn="ctr"/>
+            <a:r>
+              <a:rPr sz="3400" b="1" i="0">
+                <a:solidFill>
+                  <a:srgbClr val="095292"/>
+                </a:solidFill>
+                <a:latin typeface="Calibri"/>
+              </a:rPr>
+              <a:t>Clase 13 · Analisis de casos reales · la clínica</a:t>
+            </a:r>
+          </a:p>
+        </p:txBody>
+      </p:sp>
+      <p:sp>
+        <p:nvSpPr>
+          <p:cNvPr id="5" name="TextBox 4"/>
+          <p:cNvSpPr txBox="1"/>
+          <p:nvPr/>
+        </p:nvSpPr>
+        <p:spPr>
+          <a:xfrm>
+            <a:off x="457200" y="3017520"/>
+            <a:ext cx="11277295" cy="1645920"/>
           </a:xfrm>
           <a:prstGeom prst="rect">
             <a:avLst/>
@@ -5272,28 +7993,65 @@
           </a:bodyPr>
           <a:lstStyle/>
           <a:p>
-            <a:r>
-              <a:rPr sz="2600" b="1" i="0">
-                <a:solidFill>
-                  <a:srgbClr val="FFFFFF"/>
+            <a:pPr algn="ctr">
+              <a:spcAft>
+                <a:spcPts val="600"/>
+              </a:spcAft>
+            </a:pPr>
+            <a:r>
+              <a:rPr sz="1600" b="0" i="0">
+                <a:solidFill>
+                  <a:srgbClr val="333333"/>
                 </a:solidFill>
                 <a:latin typeface="Calibri"/>
               </a:rPr>
-              <a:t>Caso tres: perdida de datos en una migracion (MySpace, 2019) (2/2)</a:t>
-            </a:r>
-          </a:p>
-        </p:txBody>
-      </p:sp>
-      <p:sp>
-        <p:nvSpPr>
-          <p:cNvPr id="5" name="TextBox 4"/>
+              <a:t>Clase autonoma</a:t>
+            </a:r>
+          </a:p>
+          <a:p>
+            <a:pPr algn="ctr">
+              <a:spcAft>
+                <a:spcPts val="600"/>
+              </a:spcAft>
+            </a:pPr>
+            <a:r>
+              <a:rPr sz="1600" b="0" i="0">
+                <a:solidFill>
+                  <a:srgbClr val="333333"/>
+                </a:solidFill>
+                <a:latin typeface="Calibri"/>
+              </a:rPr>
+              <a:t>Causa proxima y causa raiz</a:t>
+            </a:r>
+          </a:p>
+          <a:p>
+            <a:pPr algn="ctr">
+              <a:spcAft>
+                <a:spcPts val="600"/>
+              </a:spcAft>
+            </a:pPr>
+            <a:r>
+              <a:rPr sz="1600" b="0" i="0">
+                <a:solidFill>
+                  <a:srgbClr val="333333"/>
+                </a:solidFill>
+                <a:latin typeface="Calibri"/>
+              </a:rPr>
+              <a:t>Caso uno</a:t>
+            </a:r>
+          </a:p>
+        </p:txBody>
+      </p:sp>
+      <p:sp>
+        <p:nvSpPr>
+          <p:cNvPr id="6" name="TextBox 5"/>
           <p:cNvSpPr txBox="1"/>
           <p:nvPr/>
         </p:nvSpPr>
         <p:spPr>
           <a:xfrm>
-            <a:off x="457200" y="1170432"/>
-            <a:ext cx="11277295" cy="5230368"/>
+            <a:off x="457200" y="4754880"/>
+            <a:ext cx="11277295" cy="640080"/>
           </a:xfrm>
           <a:prstGeom prst="rect">
             <a:avLst/>
@@ -5306,1974 +8064,15 @@
           </a:bodyPr>
           <a:lstStyle/>
           <a:p>
-            <a:pPr>
-              <a:spcAft>
-                <a:spcPts val="800"/>
-              </a:spcAft>
-            </a:pPr>
-            <a:r>
-              <a:rPr sz="2000" b="0" i="0">
-                <a:solidFill>
-                  <a:srgbClr val="333333"/>
+            <a:pPr algn="ctr"/>
+            <a:r>
+              <a:rPr sz="2000" b="1" i="0">
+                <a:solidFill>
+                  <a:srgbClr val="269CCB"/>
                 </a:solidFill>
                 <a:latin typeface="Calibri"/>
               </a:rPr>
-              <a:t>–   La causa raiz senalada en los informes no fue un error puntual de programacion sino una migracion probada de forma insuficiente y sin un camino de retorno real.</a:t>
-            </a:r>
-          </a:p>
-          <a:p>
-            <a:pPr>
-              <a:spcAft>
-                <a:spcPts val="800"/>
-              </a:spcAft>
-            </a:pPr>
-            <a:r>
-              <a:rPr sz="2000" b="0" i="0">
-                <a:solidFill>
-                  <a:srgbClr val="333333"/>
-                </a:solidFill>
-                <a:latin typeface="Calibri"/>
-              </a:rPr>
-              <a:t>–   La leccion tecnica es la misma en los dos casos y conecta con la Clase 12: una migracion sin plan de retorno probado es una apuesta, y el plan de retorno se prueba antes, no el dia del cambio.</a:t>
-            </a:r>
-          </a:p>
-          <a:p>
-            <a:pPr>
-              <a:spcAft>
-                <a:spcPts val="800"/>
-              </a:spcAft>
-            </a:pPr>
-            <a:r>
-              <a:rPr sz="2000" b="0" i="0">
-                <a:solidFill>
-                  <a:srgbClr val="333333"/>
-                </a:solidFill>
-                <a:latin typeface="Calibri"/>
-              </a:rPr>
-              <a:t>–   La forma disciplinada de hacerlo es la secuencia de expandir, migrar y contraer, con las dos versiones conviviendo, mas una verificacion de conteos entre origen y destino antes de eliminar nada.</a:t>
-            </a:r>
-          </a:p>
-        </p:txBody>
-      </p:sp>
-      <p:sp>
-        <p:nvSpPr>
-          <p:cNvPr id="6" name="TextBox 5"/>
-          <p:cNvSpPr txBox="1"/>
-          <p:nvPr/>
-        </p:nvSpPr>
-        <p:spPr>
-          <a:xfrm>
-            <a:off x="11185855" y="6473952"/>
-            <a:ext cx="640080" cy="274320"/>
-          </a:xfrm>
-          <a:prstGeom prst="rect">
-            <a:avLst/>
-          </a:prstGeom>
-          <a:noFill/>
-        </p:spPr>
-        <p:txBody>
-          <a:bodyPr wrap="square">
-            <a:spAutoFit/>
-          </a:bodyPr>
-          <a:lstStyle/>
-          <a:p>
-            <a:pPr algn="r"/>
-            <a:r>
-              <a:rPr sz="1100" b="0" i="0">
-                <a:solidFill>
-                  <a:srgbClr val="666666"/>
-                </a:solidFill>
-                <a:latin typeface="Calibri"/>
-              </a:rPr>
-              <a:t>13</a:t>
-            </a:r>
-          </a:p>
-        </p:txBody>
-      </p:sp>
-    </p:spTree>
-  </p:cSld>
-  <p:clrMapOvr>
-    <a:masterClrMapping/>
-  </p:clrMapOvr>
-</p:sld>
-</file>
-
-<file path=ppt/slides/slide14.xml><?xml version="1.0" encoding="utf-8"?>
-<p:sld xmlns:a="http://schemas.openxmlformats.org/drawingml/2006/main" xmlns:p="http://schemas.openxmlformats.org/presentationml/2006/main" xmlns:r="http://schemas.openxmlformats.org/officeDocument/2006/relationships">
-  <p:cSld>
-    <p:bg>
-      <p:bgPr>
-        <a:solidFill>
-          <a:srgbClr val="FFFFFF"/>
-        </a:solidFill>
-        <a:effectLst/>
-      </p:bgPr>
-    </p:bg>
-    <p:spTree>
-      <p:nvGrpSpPr>
-        <p:cNvPr id="1" name=""/>
-        <p:cNvGrpSpPr/>
-        <p:nvPr/>
-      </p:nvGrpSpPr>
-      <p:grpSpPr/>
-      <p:sp>
-        <p:nvSpPr>
-          <p:cNvPr id="2" name="Rectangle 1"/>
-          <p:cNvSpPr/>
-          <p:nvPr/>
-        </p:nvSpPr>
-        <p:spPr>
-          <a:xfrm>
-            <a:off x="0" y="0"/>
-            <a:ext cx="12191695" cy="960120"/>
-          </a:xfrm>
-          <a:prstGeom prst="rect">
-            <a:avLst/>
-          </a:prstGeom>
-          <a:solidFill>
-            <a:srgbClr val="095292"/>
-          </a:solidFill>
-          <a:ln>
-            <a:noFill/>
-          </a:ln>
-        </p:spPr>
-        <p:style>
-          <a:lnRef idx="1">
-            <a:schemeClr val="accent1"/>
-          </a:lnRef>
-          <a:fillRef idx="3">
-            <a:schemeClr val="accent1"/>
-          </a:fillRef>
-          <a:effectRef idx="2">
-            <a:schemeClr val="accent1"/>
-          </a:effectRef>
-          <a:fontRef idx="minor">
-            <a:schemeClr val="lt1"/>
-          </a:fontRef>
-        </p:style>
-        <p:txBody>
-          <a:bodyPr rtlCol="0" anchor="ctr"/>
-          <a:lstStyle/>
-          <a:p>
-            <a:pPr algn="ctr"/>
-          </a:p>
-        </p:txBody>
-      </p:sp>
-      <p:sp>
-        <p:nvSpPr>
-          <p:cNvPr id="3" name="Rectangle 2"/>
-          <p:cNvSpPr/>
-          <p:nvPr/>
-        </p:nvSpPr>
-        <p:spPr>
-          <a:xfrm>
-            <a:off x="0" y="960120"/>
-            <a:ext cx="12191695" cy="41148"/>
-          </a:xfrm>
-          <a:prstGeom prst="rect">
-            <a:avLst/>
-          </a:prstGeom>
-          <a:solidFill>
-            <a:srgbClr val="FFD000"/>
-          </a:solidFill>
-          <a:ln>
-            <a:noFill/>
-          </a:ln>
-        </p:spPr>
-        <p:style>
-          <a:lnRef idx="1">
-            <a:schemeClr val="accent1"/>
-          </a:lnRef>
-          <a:fillRef idx="3">
-            <a:schemeClr val="accent1"/>
-          </a:fillRef>
-          <a:effectRef idx="2">
-            <a:schemeClr val="accent1"/>
-          </a:effectRef>
-          <a:fontRef idx="minor">
-            <a:schemeClr val="lt1"/>
-          </a:fontRef>
-        </p:style>
-        <p:txBody>
-          <a:bodyPr rtlCol="0" anchor="ctr"/>
-          <a:lstStyle/>
-          <a:p>
-            <a:pPr algn="ctr"/>
-          </a:p>
-        </p:txBody>
-      </p:sp>
-      <p:sp>
-        <p:nvSpPr>
-          <p:cNvPr id="4" name="TextBox 3"/>
-          <p:cNvSpPr txBox="1"/>
-          <p:nvPr/>
-        </p:nvSpPr>
-        <p:spPr>
-          <a:xfrm>
-            <a:off x="457200" y="164592"/>
-            <a:ext cx="11277295" cy="502920"/>
-          </a:xfrm>
-          <a:prstGeom prst="rect">
-            <a:avLst/>
-          </a:prstGeom>
-          <a:noFill/>
-        </p:spPr>
-        <p:txBody>
-          <a:bodyPr wrap="square">
-            <a:spAutoFit/>
-          </a:bodyPr>
-          <a:lstStyle/>
-          <a:p>
-            <a:r>
-              <a:rPr sz="2600" b="1" i="0">
-                <a:solidFill>
-                  <a:srgbClr val="FFFFFF"/>
-                </a:solidFill>
-                <a:latin typeface="Calibri"/>
-              </a:rPr>
-              <a:t>Caso cuatro: concurrencia, el que no llega a los titulares (1/2)</a:t>
-            </a:r>
-          </a:p>
-        </p:txBody>
-      </p:sp>
-      <p:sp>
-        <p:nvSpPr>
-          <p:cNvPr id="5" name="TextBox 4"/>
-          <p:cNvSpPr txBox="1"/>
-          <p:nvPr/>
-        </p:nvSpPr>
-        <p:spPr>
-          <a:xfrm>
-            <a:off x="457200" y="1170432"/>
-            <a:ext cx="11277295" cy="5230368"/>
-          </a:xfrm>
-          <a:prstGeom prst="rect">
-            <a:avLst/>
-          </a:prstGeom>
-          <a:noFill/>
-        </p:spPr>
-        <p:txBody>
-          <a:bodyPr wrap="square">
-            <a:spAutoFit/>
-          </a:bodyPr>
-          <a:lstStyle/>
-          <a:p>
-            <a:pPr>
-              <a:spcAft>
-                <a:spcPts val="800"/>
-              </a:spcAft>
-            </a:pPr>
-            <a:r>
-              <a:rPr sz="2000" b="0" i="0">
-                <a:solidFill>
-                  <a:srgbClr val="333333"/>
-                </a:solidFill>
-                <a:latin typeface="Calibri"/>
-              </a:rPr>
-              <a:t>–   Este merece un tratamiento distinto porque su rasgo caracteristico es que no llega a los titulares con nombre propio tan facilmente: son fallos que no producen mensajes de error y por eso se descubren semanas despues</a:t>
-            </a:r>
-          </a:p>
-          <a:p>
-            <a:pPr>
-              <a:spcAft>
-                <a:spcPts val="800"/>
-              </a:spcAft>
-            </a:pPr>
-            <a:r>
-              <a:rPr sz="2000" b="0" i="0">
-                <a:solidFill>
-                  <a:srgbClr val="333333"/>
-                </a:solidFill>
-                <a:latin typeface="Calibri"/>
-              </a:rPr>
-              <a:t>–   Cuando el inventario fisico no coincide con el del sistema o cuando dos clientes reclaman el mismo cupo.</a:t>
-            </a:r>
-          </a:p>
-          <a:p>
-            <a:pPr>
-              <a:spcAft>
-                <a:spcPts val="800"/>
-              </a:spcAft>
-            </a:pPr>
-            <a:r>
-              <a:rPr sz="2000" b="0" i="0">
-                <a:solidFill>
-                  <a:srgbClr val="333333"/>
-                </a:solidFill>
-                <a:latin typeface="Calibri"/>
-              </a:rPr>
-              <a:t>–   El patron es siempre uno de los tres que se estudiaron en la Clase 10.</a:t>
-            </a:r>
-          </a:p>
-          <a:p>
-            <a:pPr>
-              <a:spcAft>
-                <a:spcPts val="800"/>
-              </a:spcAft>
-            </a:pPr>
-            <a:r>
-              <a:rPr sz="2000" b="0" i="0">
-                <a:solidFill>
-                  <a:srgbClr val="333333"/>
-                </a:solidFill>
-                <a:latin typeface="Calibri"/>
-              </a:rPr>
-              <a:t>–   Actualizacion perdida: dos procesos leen el mismo stock de Insumo, digamos cinco unidades, ambos restan tres y ambos escriben dos, con lo cual se despacharon seis unidades y el sistema declara dos existencias que no estan.</a:t>
-            </a:r>
-          </a:p>
-          <a:p>
-            <a:pPr>
-              <a:spcAft>
-                <a:spcPts val="800"/>
-              </a:spcAft>
-            </a:pPr>
-            <a:r>
-              <a:rPr sz="2000" b="0" i="0">
-                <a:solidFill>
-                  <a:srgbClr val="333333"/>
-                </a:solidFill>
-                <a:latin typeface="Calibri"/>
-              </a:rPr>
-              <a:t>–   Doble reserva: dos recepcionistas consultan la franja del martes a las diez del veterinario Ruiz, ambas reciben cero filas, ambas insertan.</a:t>
-            </a:r>
-          </a:p>
-        </p:txBody>
-      </p:sp>
-      <p:sp>
-        <p:nvSpPr>
-          <p:cNvPr id="6" name="TextBox 5"/>
-          <p:cNvSpPr txBox="1"/>
-          <p:nvPr/>
-        </p:nvSpPr>
-        <p:spPr>
-          <a:xfrm>
-            <a:off x="11185855" y="6473952"/>
-            <a:ext cx="640080" cy="274320"/>
-          </a:xfrm>
-          <a:prstGeom prst="rect">
-            <a:avLst/>
-          </a:prstGeom>
-          <a:noFill/>
-        </p:spPr>
-        <p:txBody>
-          <a:bodyPr wrap="square">
-            <a:spAutoFit/>
-          </a:bodyPr>
-          <a:lstStyle/>
-          <a:p>
-            <a:pPr algn="r"/>
-            <a:r>
-              <a:rPr sz="1100" b="0" i="0">
-                <a:solidFill>
-                  <a:srgbClr val="666666"/>
-                </a:solidFill>
-                <a:latin typeface="Calibri"/>
-              </a:rPr>
-              <a:t>14</a:t>
-            </a:r>
-          </a:p>
-        </p:txBody>
-      </p:sp>
-    </p:spTree>
-  </p:cSld>
-  <p:clrMapOvr>
-    <a:masterClrMapping/>
-  </p:clrMapOvr>
-</p:sld>
-</file>
-
-<file path=ppt/slides/slide15.xml><?xml version="1.0" encoding="utf-8"?>
-<p:sld xmlns:a="http://schemas.openxmlformats.org/drawingml/2006/main" xmlns:p="http://schemas.openxmlformats.org/presentationml/2006/main" xmlns:r="http://schemas.openxmlformats.org/officeDocument/2006/relationships">
-  <p:cSld>
-    <p:bg>
-      <p:bgPr>
-        <a:solidFill>
-          <a:srgbClr val="FFFFFF"/>
-        </a:solidFill>
-        <a:effectLst/>
-      </p:bgPr>
-    </p:bg>
-    <p:spTree>
-      <p:nvGrpSpPr>
-        <p:cNvPr id="1" name=""/>
-        <p:cNvGrpSpPr/>
-        <p:nvPr/>
-      </p:nvGrpSpPr>
-      <p:grpSpPr/>
-      <p:sp>
-        <p:nvSpPr>
-          <p:cNvPr id="2" name="Rectangle 1"/>
-          <p:cNvSpPr/>
-          <p:nvPr/>
-        </p:nvSpPr>
-        <p:spPr>
-          <a:xfrm>
-            <a:off x="0" y="0"/>
-            <a:ext cx="12191695" cy="960120"/>
-          </a:xfrm>
-          <a:prstGeom prst="rect">
-            <a:avLst/>
-          </a:prstGeom>
-          <a:solidFill>
-            <a:srgbClr val="095292"/>
-          </a:solidFill>
-          <a:ln>
-            <a:noFill/>
-          </a:ln>
-        </p:spPr>
-        <p:style>
-          <a:lnRef idx="1">
-            <a:schemeClr val="accent1"/>
-          </a:lnRef>
-          <a:fillRef idx="3">
-            <a:schemeClr val="accent1"/>
-          </a:fillRef>
-          <a:effectRef idx="2">
-            <a:schemeClr val="accent1"/>
-          </a:effectRef>
-          <a:fontRef idx="minor">
-            <a:schemeClr val="lt1"/>
-          </a:fontRef>
-        </p:style>
-        <p:txBody>
-          <a:bodyPr rtlCol="0" anchor="ctr"/>
-          <a:lstStyle/>
-          <a:p>
-            <a:pPr algn="ctr"/>
-          </a:p>
-        </p:txBody>
-      </p:sp>
-      <p:sp>
-        <p:nvSpPr>
-          <p:cNvPr id="3" name="Rectangle 2"/>
-          <p:cNvSpPr/>
-          <p:nvPr/>
-        </p:nvSpPr>
-        <p:spPr>
-          <a:xfrm>
-            <a:off x="0" y="960120"/>
-            <a:ext cx="12191695" cy="41148"/>
-          </a:xfrm>
-          <a:prstGeom prst="rect">
-            <a:avLst/>
-          </a:prstGeom>
-          <a:solidFill>
-            <a:srgbClr val="FFD000"/>
-          </a:solidFill>
-          <a:ln>
-            <a:noFill/>
-          </a:ln>
-        </p:spPr>
-        <p:style>
-          <a:lnRef idx="1">
-            <a:schemeClr val="accent1"/>
-          </a:lnRef>
-          <a:fillRef idx="3">
-            <a:schemeClr val="accent1"/>
-          </a:fillRef>
-          <a:effectRef idx="2">
-            <a:schemeClr val="accent1"/>
-          </a:effectRef>
-          <a:fontRef idx="minor">
-            <a:schemeClr val="lt1"/>
-          </a:fontRef>
-        </p:style>
-        <p:txBody>
-          <a:bodyPr rtlCol="0" anchor="ctr"/>
-          <a:lstStyle/>
-          <a:p>
-            <a:pPr algn="ctr"/>
-          </a:p>
-        </p:txBody>
-      </p:sp>
-      <p:sp>
-        <p:nvSpPr>
-          <p:cNvPr id="4" name="TextBox 3"/>
-          <p:cNvSpPr txBox="1"/>
-          <p:nvPr/>
-        </p:nvSpPr>
-        <p:spPr>
-          <a:xfrm>
-            <a:off x="457200" y="164592"/>
-            <a:ext cx="11277295" cy="502920"/>
-          </a:xfrm>
-          <a:prstGeom prst="rect">
-            <a:avLst/>
-          </a:prstGeom>
-          <a:noFill/>
-        </p:spPr>
-        <p:txBody>
-          <a:bodyPr wrap="square">
-            <a:spAutoFit/>
-          </a:bodyPr>
-          <a:lstStyle/>
-          <a:p>
-            <a:r>
-              <a:rPr sz="2600" b="1" i="0">
-                <a:solidFill>
-                  <a:srgbClr val="FFFFFF"/>
-                </a:solidFill>
-                <a:latin typeface="Calibri"/>
-              </a:rPr>
-              <a:t>Caso cuatro: concurrencia, el que no llega a los titulares (2/2)</a:t>
-            </a:r>
-          </a:p>
-        </p:txBody>
-      </p:sp>
-      <p:sp>
-        <p:nvSpPr>
-          <p:cNvPr id="5" name="TextBox 4"/>
-          <p:cNvSpPr txBox="1"/>
-          <p:nvPr/>
-        </p:nvSpPr>
-        <p:spPr>
-          <a:xfrm>
-            <a:off x="457200" y="1170432"/>
-            <a:ext cx="11277295" cy="5230368"/>
-          </a:xfrm>
-          <a:prstGeom prst="rect">
-            <a:avLst/>
-          </a:prstGeom>
-          <a:noFill/>
-        </p:spPr>
-        <p:txBody>
-          <a:bodyPr wrap="square">
-            <a:spAutoFit/>
-          </a:bodyPr>
-          <a:lstStyle/>
-          <a:p>
-            <a:pPr>
-              <a:spcAft>
-                <a:spcPts val="800"/>
-              </a:spcAft>
-            </a:pPr>
-            <a:r>
-              <a:rPr sz="2000" b="0" i="0">
-                <a:solidFill>
-                  <a:srgbClr val="333333"/>
-                </a:solidFill>
-                <a:latin typeface="Calibri"/>
-              </a:rPr>
-              <a:t>–   Bloqueo mutuo o deadlock: dos transacciones se esperan en orden cruzado y el motor mata una.</a:t>
-            </a:r>
-          </a:p>
-          <a:p>
-            <a:pPr>
-              <a:spcAft>
-                <a:spcPts val="800"/>
-              </a:spcAft>
-            </a:pPr>
-            <a:r>
-              <a:rPr sz="2000" b="0" i="0">
-                <a:solidFill>
-                  <a:srgbClr val="333333"/>
-                </a:solidFill>
-                <a:latin typeface="Calibri"/>
-              </a:rPr>
-              <a:t>–   La leccion es que ninguna cantidad de validacion previa en la aplicacion resuelve esto</a:t>
-            </a:r>
-          </a:p>
-          <a:p>
-            <a:pPr>
-              <a:spcAft>
-                <a:spcPts val="800"/>
-              </a:spcAft>
-            </a:pPr>
-            <a:r>
-              <a:rPr sz="2000" b="0" i="0">
-                <a:solidFill>
-                  <a:srgbClr val="333333"/>
-                </a:solidFill>
-                <a:latin typeface="Calibri"/>
-              </a:rPr>
-              <a:t>–   Porque entre la consulta y la escritura hay una ventana de tiempo en la que el mundo cambio; se resuelve en la base con restricciones, con bloqueo explicito al leer lo que se va a modificar o con el nivel de aislamiento adecuado.</a:t>
-            </a:r>
-          </a:p>
-          <a:p>
-            <a:pPr>
-              <a:spcAft>
-                <a:spcPts val="800"/>
-              </a:spcAft>
-            </a:pPr>
-            <a:r>
-              <a:rPr sz="2000" b="0" i="0">
-                <a:solidFill>
-                  <a:srgbClr val="333333"/>
-                </a:solidFill>
-                <a:latin typeface="Calibri"/>
-              </a:rPr>
-              <a:t>–   Y hay una leccion organizacional gratis: estos defectos jamas aparecen probando con un usuario, asi que si el estudiante solo probo la clínica desde una sola maquina, no lo probo.</a:t>
-            </a:r>
-          </a:p>
-        </p:txBody>
-      </p:sp>
-      <p:sp>
-        <p:nvSpPr>
-          <p:cNvPr id="6" name="TextBox 5"/>
-          <p:cNvSpPr txBox="1"/>
-          <p:nvPr/>
-        </p:nvSpPr>
-        <p:spPr>
-          <a:xfrm>
-            <a:off x="11185855" y="6473952"/>
-            <a:ext cx="640080" cy="274320"/>
-          </a:xfrm>
-          <a:prstGeom prst="rect">
-            <a:avLst/>
-          </a:prstGeom>
-          <a:noFill/>
-        </p:spPr>
-        <p:txBody>
-          <a:bodyPr wrap="square">
-            <a:spAutoFit/>
-          </a:bodyPr>
-          <a:lstStyle/>
-          <a:p>
-            <a:pPr algn="r"/>
-            <a:r>
-              <a:rPr sz="1100" b="0" i="0">
-                <a:solidFill>
-                  <a:srgbClr val="666666"/>
-                </a:solidFill>
-                <a:latin typeface="Calibri"/>
-              </a:rPr>
-              <a:t>15</a:t>
-            </a:r>
-          </a:p>
-        </p:txBody>
-      </p:sp>
-    </p:spTree>
-  </p:cSld>
-  <p:clrMapOvr>
-    <a:masterClrMapping/>
-  </p:clrMapOvr>
-</p:sld>
-</file>
-
-<file path=ppt/slides/slide16.xml><?xml version="1.0" encoding="utf-8"?>
-<p:sld xmlns:a="http://schemas.openxmlformats.org/drawingml/2006/main" xmlns:p="http://schemas.openxmlformats.org/presentationml/2006/main" xmlns:r="http://schemas.openxmlformats.org/officeDocument/2006/relationships">
-  <p:cSld>
-    <p:bg>
-      <p:bgPr>
-        <a:solidFill>
-          <a:srgbClr val="FFFFFF"/>
-        </a:solidFill>
-        <a:effectLst/>
-      </p:bgPr>
-    </p:bg>
-    <p:spTree>
-      <p:nvGrpSpPr>
-        <p:cNvPr id="1" name=""/>
-        <p:cNvGrpSpPr/>
-        <p:nvPr/>
-      </p:nvGrpSpPr>
-      <p:grpSpPr/>
-      <p:sp>
-        <p:nvSpPr>
-          <p:cNvPr id="2" name="Rectangle 1"/>
-          <p:cNvSpPr/>
-          <p:nvPr/>
-        </p:nvSpPr>
-        <p:spPr>
-          <a:xfrm>
-            <a:off x="0" y="0"/>
-            <a:ext cx="12191695" cy="960120"/>
-          </a:xfrm>
-          <a:prstGeom prst="rect">
-            <a:avLst/>
-          </a:prstGeom>
-          <a:solidFill>
-            <a:srgbClr val="095292"/>
-          </a:solidFill>
-          <a:ln>
-            <a:noFill/>
-          </a:ln>
-        </p:spPr>
-        <p:style>
-          <a:lnRef idx="1">
-            <a:schemeClr val="accent1"/>
-          </a:lnRef>
-          <a:fillRef idx="3">
-            <a:schemeClr val="accent1"/>
-          </a:fillRef>
-          <a:effectRef idx="2">
-            <a:schemeClr val="accent1"/>
-          </a:effectRef>
-          <a:fontRef idx="minor">
-            <a:schemeClr val="lt1"/>
-          </a:fontRef>
-        </p:style>
-        <p:txBody>
-          <a:bodyPr rtlCol="0" anchor="ctr"/>
-          <a:lstStyle/>
-          <a:p>
-            <a:pPr algn="ctr"/>
-          </a:p>
-        </p:txBody>
-      </p:sp>
-      <p:sp>
-        <p:nvSpPr>
-          <p:cNvPr id="3" name="Rectangle 2"/>
-          <p:cNvSpPr/>
-          <p:nvPr/>
-        </p:nvSpPr>
-        <p:spPr>
-          <a:xfrm>
-            <a:off x="0" y="960120"/>
-            <a:ext cx="12191695" cy="41148"/>
-          </a:xfrm>
-          <a:prstGeom prst="rect">
-            <a:avLst/>
-          </a:prstGeom>
-          <a:solidFill>
-            <a:srgbClr val="FFD000"/>
-          </a:solidFill>
-          <a:ln>
-            <a:noFill/>
-          </a:ln>
-        </p:spPr>
-        <p:style>
-          <a:lnRef idx="1">
-            <a:schemeClr val="accent1"/>
-          </a:lnRef>
-          <a:fillRef idx="3">
-            <a:schemeClr val="accent1"/>
-          </a:fillRef>
-          <a:effectRef idx="2">
-            <a:schemeClr val="accent1"/>
-          </a:effectRef>
-          <a:fontRef idx="minor">
-            <a:schemeClr val="lt1"/>
-          </a:fontRef>
-        </p:style>
-        <p:txBody>
-          <a:bodyPr rtlCol="0" anchor="ctr"/>
-          <a:lstStyle/>
-          <a:p>
-            <a:pPr algn="ctr"/>
-          </a:p>
-        </p:txBody>
-      </p:sp>
-      <p:sp>
-        <p:nvSpPr>
-          <p:cNvPr id="4" name="TextBox 3"/>
-          <p:cNvSpPr txBox="1"/>
-          <p:nvPr/>
-        </p:nvSpPr>
-        <p:spPr>
-          <a:xfrm>
-            <a:off x="457200" y="164592"/>
-            <a:ext cx="11277295" cy="502920"/>
-          </a:xfrm>
-          <a:prstGeom prst="rect">
-            <a:avLst/>
-          </a:prstGeom>
-          <a:noFill/>
-        </p:spPr>
-        <p:txBody>
-          <a:bodyPr wrap="square">
-            <a:spAutoFit/>
-          </a:bodyPr>
-          <a:lstStyle/>
-          <a:p>
-            <a:r>
-              <a:rPr sz="2600" b="1" i="0">
-                <a:solidFill>
-                  <a:srgbClr val="FFFFFF"/>
-                </a:solidFill>
-                <a:latin typeface="Calibri"/>
-              </a:rPr>
-              <a:t>Lecciones accionables: los cuatro elementos verificables (1/3)</a:t>
-            </a:r>
-          </a:p>
-        </p:txBody>
-      </p:sp>
-      <p:sp>
-        <p:nvSpPr>
-          <p:cNvPr id="5" name="TextBox 4"/>
-          <p:cNvSpPr txBox="1"/>
-          <p:nvPr/>
-        </p:nvSpPr>
-        <p:spPr>
-          <a:xfrm>
-            <a:off x="457200" y="1170432"/>
-            <a:ext cx="11277295" cy="5230368"/>
-          </a:xfrm>
-          <a:prstGeom prst="rect">
-            <a:avLst/>
-          </a:prstGeom>
-          <a:noFill/>
-        </p:spPr>
-        <p:txBody>
-          <a:bodyPr wrap="square">
-            <a:spAutoFit/>
-          </a:bodyPr>
-          <a:lstStyle/>
-          <a:p>
-            <a:pPr>
-              <a:spcAft>
-                <a:spcPts val="800"/>
-              </a:spcAft>
-            </a:pPr>
-            <a:r>
-              <a:rPr sz="2000" b="0" i="0">
-                <a:solidFill>
-                  <a:srgbClr val="333333"/>
-                </a:solidFill>
-                <a:latin typeface="Calibri"/>
-              </a:rPr>
-              <a:t>–   Una leccion es un lugar comun cuando podria haberse escrito antes de conocer el caso: hay que hacer respaldos, hay que cuidar los permisos, hay que probar bien.</a:t>
-            </a:r>
-          </a:p>
-          <a:p>
-            <a:pPr>
-              <a:spcAft>
-                <a:spcPts val="800"/>
-              </a:spcAft>
-            </a:pPr>
-            <a:r>
-              <a:rPr sz="2000" b="0" i="0">
-                <a:solidFill>
-                  <a:srgbClr val="333333"/>
-                </a:solidFill>
-                <a:latin typeface="Calibri"/>
-              </a:rPr>
-              <a:t>–   Una leccion es accionable cuando tiene cuatro elementos verificables: un verbo concreto, el artefacto sobre el cual se actua, una frecuencia o un umbral, y la manera de comprobar que se hizo.</a:t>
-            </a:r>
-          </a:p>
-          <a:p>
-            <a:pPr>
-              <a:spcAft>
-                <a:spcPts val="800"/>
-              </a:spcAft>
-            </a:pPr>
-            <a:r>
-              <a:rPr sz="2000" b="0" i="0">
-                <a:solidFill>
-                  <a:srgbClr val="333333"/>
-                </a:solidFill>
-                <a:latin typeface="Calibri"/>
-              </a:rPr>
-              <a:t>–   Version inutil: hay que probar los respaldos.</a:t>
-            </a:r>
-          </a:p>
-          <a:p>
-            <a:pPr>
-              <a:spcAft>
-                <a:spcPts val="800"/>
-              </a:spcAft>
-            </a:pPr>
-            <a:r>
-              <a:rPr sz="2000" b="0" i="0">
-                <a:solidFill>
-                  <a:srgbClr val="333333"/>
-                </a:solidFill>
-                <a:latin typeface="Calibri"/>
-              </a:rPr>
-              <a:t>–   Version accionable: el primer lunes de cada mes se restaura el respaldo mas reciente en un esquema temporal de Oracle Live SQL o del entorno de pruebas, se comparan los conteos de filas de Dueno, Mascota, Cita y Factura contra produccion</a:t>
-            </a:r>
-          </a:p>
-        </p:txBody>
-      </p:sp>
-      <p:sp>
-        <p:nvSpPr>
-          <p:cNvPr id="6" name="TextBox 5"/>
-          <p:cNvSpPr txBox="1"/>
-          <p:nvPr/>
-        </p:nvSpPr>
-        <p:spPr>
-          <a:xfrm>
-            <a:off x="11185855" y="6473952"/>
-            <a:ext cx="640080" cy="274320"/>
-          </a:xfrm>
-          <a:prstGeom prst="rect">
-            <a:avLst/>
-          </a:prstGeom>
-          <a:noFill/>
-        </p:spPr>
-        <p:txBody>
-          <a:bodyPr wrap="square">
-            <a:spAutoFit/>
-          </a:bodyPr>
-          <a:lstStyle/>
-          <a:p>
-            <a:pPr algn="r"/>
-            <a:r>
-              <a:rPr sz="1100" b="0" i="0">
-                <a:solidFill>
-                  <a:srgbClr val="666666"/>
-                </a:solidFill>
-                <a:latin typeface="Calibri"/>
-              </a:rPr>
-              <a:t>16</a:t>
-            </a:r>
-          </a:p>
-        </p:txBody>
-      </p:sp>
-    </p:spTree>
-  </p:cSld>
-  <p:clrMapOvr>
-    <a:masterClrMapping/>
-  </p:clrMapOvr>
-</p:sld>
-</file>
-
-<file path=ppt/slides/slide17.xml><?xml version="1.0" encoding="utf-8"?>
-<p:sld xmlns:a="http://schemas.openxmlformats.org/drawingml/2006/main" xmlns:p="http://schemas.openxmlformats.org/presentationml/2006/main" xmlns:r="http://schemas.openxmlformats.org/officeDocument/2006/relationships">
-  <p:cSld>
-    <p:bg>
-      <p:bgPr>
-        <a:solidFill>
-          <a:srgbClr val="FFFFFF"/>
-        </a:solidFill>
-        <a:effectLst/>
-      </p:bgPr>
-    </p:bg>
-    <p:spTree>
-      <p:nvGrpSpPr>
-        <p:cNvPr id="1" name=""/>
-        <p:cNvGrpSpPr/>
-        <p:nvPr/>
-      </p:nvGrpSpPr>
-      <p:grpSpPr/>
-      <p:sp>
-        <p:nvSpPr>
-          <p:cNvPr id="2" name="Rectangle 1"/>
-          <p:cNvSpPr/>
-          <p:nvPr/>
-        </p:nvSpPr>
-        <p:spPr>
-          <a:xfrm>
-            <a:off x="0" y="0"/>
-            <a:ext cx="12191695" cy="960120"/>
-          </a:xfrm>
-          <a:prstGeom prst="rect">
-            <a:avLst/>
-          </a:prstGeom>
-          <a:solidFill>
-            <a:srgbClr val="095292"/>
-          </a:solidFill>
-          <a:ln>
-            <a:noFill/>
-          </a:ln>
-        </p:spPr>
-        <p:style>
-          <a:lnRef idx="1">
-            <a:schemeClr val="accent1"/>
-          </a:lnRef>
-          <a:fillRef idx="3">
-            <a:schemeClr val="accent1"/>
-          </a:fillRef>
-          <a:effectRef idx="2">
-            <a:schemeClr val="accent1"/>
-          </a:effectRef>
-          <a:fontRef idx="minor">
-            <a:schemeClr val="lt1"/>
-          </a:fontRef>
-        </p:style>
-        <p:txBody>
-          <a:bodyPr rtlCol="0" anchor="ctr"/>
-          <a:lstStyle/>
-          <a:p>
-            <a:pPr algn="ctr"/>
-          </a:p>
-        </p:txBody>
-      </p:sp>
-      <p:sp>
-        <p:nvSpPr>
-          <p:cNvPr id="3" name="Rectangle 2"/>
-          <p:cNvSpPr/>
-          <p:nvPr/>
-        </p:nvSpPr>
-        <p:spPr>
-          <a:xfrm>
-            <a:off x="0" y="960120"/>
-            <a:ext cx="12191695" cy="41148"/>
-          </a:xfrm>
-          <a:prstGeom prst="rect">
-            <a:avLst/>
-          </a:prstGeom>
-          <a:solidFill>
-            <a:srgbClr val="FFD000"/>
-          </a:solidFill>
-          <a:ln>
-            <a:noFill/>
-          </a:ln>
-        </p:spPr>
-        <p:style>
-          <a:lnRef idx="1">
-            <a:schemeClr val="accent1"/>
-          </a:lnRef>
-          <a:fillRef idx="3">
-            <a:schemeClr val="accent1"/>
-          </a:fillRef>
-          <a:effectRef idx="2">
-            <a:schemeClr val="accent1"/>
-          </a:effectRef>
-          <a:fontRef idx="minor">
-            <a:schemeClr val="lt1"/>
-          </a:fontRef>
-        </p:style>
-        <p:txBody>
-          <a:bodyPr rtlCol="0" anchor="ctr"/>
-          <a:lstStyle/>
-          <a:p>
-            <a:pPr algn="ctr"/>
-          </a:p>
-        </p:txBody>
-      </p:sp>
-      <p:sp>
-        <p:nvSpPr>
-          <p:cNvPr id="4" name="TextBox 3"/>
-          <p:cNvSpPr txBox="1"/>
-          <p:nvPr/>
-        </p:nvSpPr>
-        <p:spPr>
-          <a:xfrm>
-            <a:off x="457200" y="164592"/>
-            <a:ext cx="11277295" cy="502920"/>
-          </a:xfrm>
-          <a:prstGeom prst="rect">
-            <a:avLst/>
-          </a:prstGeom>
-          <a:noFill/>
-        </p:spPr>
-        <p:txBody>
-          <a:bodyPr wrap="square">
-            <a:spAutoFit/>
-          </a:bodyPr>
-          <a:lstStyle/>
-          <a:p>
-            <a:r>
-              <a:rPr sz="2600" b="1" i="0">
-                <a:solidFill>
-                  <a:srgbClr val="FFFFFF"/>
-                </a:solidFill>
-                <a:latin typeface="Calibri"/>
-              </a:rPr>
-              <a:t>Lecciones accionables: los cuatro elementos verificables (2/3)</a:t>
-            </a:r>
-          </a:p>
-        </p:txBody>
-      </p:sp>
-      <p:sp>
-        <p:nvSpPr>
-          <p:cNvPr id="5" name="TextBox 4"/>
-          <p:cNvSpPr txBox="1"/>
-          <p:nvPr/>
-        </p:nvSpPr>
-        <p:spPr>
-          <a:xfrm>
-            <a:off x="457200" y="1170432"/>
-            <a:ext cx="11277295" cy="5230368"/>
-          </a:xfrm>
-          <a:prstGeom prst="rect">
-            <a:avLst/>
-          </a:prstGeom>
-          <a:noFill/>
-        </p:spPr>
-        <p:txBody>
-          <a:bodyPr wrap="square">
-            <a:spAutoFit/>
-          </a:bodyPr>
-          <a:lstStyle/>
-          <a:p>
-            <a:pPr>
-              <a:spcAft>
-                <a:spcPts val="800"/>
-              </a:spcAft>
-            </a:pPr>
-            <a:r>
-              <a:rPr sz="2000" b="0" i="0">
-                <a:solidFill>
-                  <a:srgbClr val="333333"/>
-                </a:solidFill>
-                <a:latin typeface="Calibri"/>
-              </a:rPr>
-              <a:t>–   Y se registra fecha y resultado en la bitacora del proyecto; si no hay registro del mes, se declara que no hay respaldo.</a:t>
-            </a:r>
-          </a:p>
-          <a:p>
-            <a:pPr>
-              <a:spcAft>
-                <a:spcPts val="800"/>
-              </a:spcAft>
-            </a:pPr>
-            <a:r>
-              <a:rPr sz="2000" b="0" i="0">
-                <a:solidFill>
-                  <a:srgbClr val="333333"/>
-                </a:solidFill>
-                <a:latin typeface="Calibri"/>
-              </a:rPr>
-              <a:t>–   La segunda se puede auditar, la primera es una intencion.</a:t>
-            </a:r>
-          </a:p>
-          <a:p>
-            <a:pPr>
-              <a:spcAft>
-                <a:spcPts val="800"/>
-              </a:spcAft>
-            </a:pPr>
-            <a:r>
-              <a:rPr sz="2000" b="0" i="0">
-                <a:solidFill>
-                  <a:srgbClr val="333333"/>
-                </a:solidFill>
-                <a:latin typeface="Calibri"/>
-              </a:rPr>
-              <a:t>–   Aplique el mismo molde a los otros casos y ya tiene la cuarta columna de la tabla: del caso de permisos sale crear el rol rol_clinica_app con GRANT EXECUTE sobre los procedimientos y revocar todo SELECT</a:t>
-            </a:r>
-          </a:p>
-          <a:p>
-            <a:pPr>
-              <a:spcAft>
-                <a:spcPts val="800"/>
-              </a:spcAft>
-            </a:pPr>
-            <a:r>
-              <a:rPr sz="2000" b="0" i="0">
-                <a:solidFill>
-                  <a:srgbClr val="333333"/>
-                </a:solidFill>
-                <a:latin typeface="Calibri"/>
-              </a:rPr>
-              <a:t>–   INSERT, UPDATE y DELETE directo sobre las tablas, verificado consultando las vistas de privilegios</a:t>
-            </a:r>
-          </a:p>
-          <a:p>
-            <a:pPr>
-              <a:spcAft>
-                <a:spcPts val="800"/>
-              </a:spcAft>
-            </a:pPr>
-            <a:r>
-              <a:rPr sz="2000" b="0" i="0">
-                <a:solidFill>
-                  <a:srgbClr val="333333"/>
-                </a:solidFill>
-                <a:latin typeface="Calibri"/>
-              </a:rPr>
-              <a:t>–   Del caso de concurrencia sale ALTER TABLE Cita ADD CONSTRAINT uq_cita_vet_franja UNIQUE (id_veterinario, fecha_hora) mas SELECT FOR UPDATE al descontar stock, verificado con dos sesiones simultaneas</a:t>
-            </a:r>
-          </a:p>
-        </p:txBody>
-      </p:sp>
-      <p:sp>
-        <p:nvSpPr>
-          <p:cNvPr id="6" name="TextBox 5"/>
-          <p:cNvSpPr txBox="1"/>
-          <p:nvPr/>
-        </p:nvSpPr>
-        <p:spPr>
-          <a:xfrm>
-            <a:off x="11185855" y="6473952"/>
-            <a:ext cx="640080" cy="274320"/>
-          </a:xfrm>
-          <a:prstGeom prst="rect">
-            <a:avLst/>
-          </a:prstGeom>
-          <a:noFill/>
-        </p:spPr>
-        <p:txBody>
-          <a:bodyPr wrap="square">
-            <a:spAutoFit/>
-          </a:bodyPr>
-          <a:lstStyle/>
-          <a:p>
-            <a:pPr algn="r"/>
-            <a:r>
-              <a:rPr sz="1100" b="0" i="0">
-                <a:solidFill>
-                  <a:srgbClr val="666666"/>
-                </a:solidFill>
-                <a:latin typeface="Calibri"/>
-              </a:rPr>
-              <a:t>17</a:t>
-            </a:r>
-          </a:p>
-        </p:txBody>
-      </p:sp>
-    </p:spTree>
-  </p:cSld>
-  <p:clrMapOvr>
-    <a:masterClrMapping/>
-  </p:clrMapOvr>
-</p:sld>
-</file>
-
-<file path=ppt/slides/slide18.xml><?xml version="1.0" encoding="utf-8"?>
-<p:sld xmlns:a="http://schemas.openxmlformats.org/drawingml/2006/main" xmlns:p="http://schemas.openxmlformats.org/presentationml/2006/main" xmlns:r="http://schemas.openxmlformats.org/officeDocument/2006/relationships">
-  <p:cSld>
-    <p:bg>
-      <p:bgPr>
-        <a:solidFill>
-          <a:srgbClr val="FFFFFF"/>
-        </a:solidFill>
-        <a:effectLst/>
-      </p:bgPr>
-    </p:bg>
-    <p:spTree>
-      <p:nvGrpSpPr>
-        <p:cNvPr id="1" name=""/>
-        <p:cNvGrpSpPr/>
-        <p:nvPr/>
-      </p:nvGrpSpPr>
-      <p:grpSpPr/>
-      <p:sp>
-        <p:nvSpPr>
-          <p:cNvPr id="2" name="Rectangle 1"/>
-          <p:cNvSpPr/>
-          <p:nvPr/>
-        </p:nvSpPr>
-        <p:spPr>
-          <a:xfrm>
-            <a:off x="0" y="0"/>
-            <a:ext cx="12191695" cy="960120"/>
-          </a:xfrm>
-          <a:prstGeom prst="rect">
-            <a:avLst/>
-          </a:prstGeom>
-          <a:solidFill>
-            <a:srgbClr val="095292"/>
-          </a:solidFill>
-          <a:ln>
-            <a:noFill/>
-          </a:ln>
-        </p:spPr>
-        <p:style>
-          <a:lnRef idx="1">
-            <a:schemeClr val="accent1"/>
-          </a:lnRef>
-          <a:fillRef idx="3">
-            <a:schemeClr val="accent1"/>
-          </a:fillRef>
-          <a:effectRef idx="2">
-            <a:schemeClr val="accent1"/>
-          </a:effectRef>
-          <a:fontRef idx="minor">
-            <a:schemeClr val="lt1"/>
-          </a:fontRef>
-        </p:style>
-        <p:txBody>
-          <a:bodyPr rtlCol="0" anchor="ctr"/>
-          <a:lstStyle/>
-          <a:p>
-            <a:pPr algn="ctr"/>
-          </a:p>
-        </p:txBody>
-      </p:sp>
-      <p:sp>
-        <p:nvSpPr>
-          <p:cNvPr id="3" name="Rectangle 2"/>
-          <p:cNvSpPr/>
-          <p:nvPr/>
-        </p:nvSpPr>
-        <p:spPr>
-          <a:xfrm>
-            <a:off x="0" y="960120"/>
-            <a:ext cx="12191695" cy="41148"/>
-          </a:xfrm>
-          <a:prstGeom prst="rect">
-            <a:avLst/>
-          </a:prstGeom>
-          <a:solidFill>
-            <a:srgbClr val="FFD000"/>
-          </a:solidFill>
-          <a:ln>
-            <a:noFill/>
-          </a:ln>
-        </p:spPr>
-        <p:style>
-          <a:lnRef idx="1">
-            <a:schemeClr val="accent1"/>
-          </a:lnRef>
-          <a:fillRef idx="3">
-            <a:schemeClr val="accent1"/>
-          </a:fillRef>
-          <a:effectRef idx="2">
-            <a:schemeClr val="accent1"/>
-          </a:effectRef>
-          <a:fontRef idx="minor">
-            <a:schemeClr val="lt1"/>
-          </a:fontRef>
-        </p:style>
-        <p:txBody>
-          <a:bodyPr rtlCol="0" anchor="ctr"/>
-          <a:lstStyle/>
-          <a:p>
-            <a:pPr algn="ctr"/>
-          </a:p>
-        </p:txBody>
-      </p:sp>
-      <p:sp>
-        <p:nvSpPr>
-          <p:cNvPr id="4" name="TextBox 3"/>
-          <p:cNvSpPr txBox="1"/>
-          <p:nvPr/>
-        </p:nvSpPr>
-        <p:spPr>
-          <a:xfrm>
-            <a:off x="457200" y="164592"/>
-            <a:ext cx="11277295" cy="502920"/>
-          </a:xfrm>
-          <a:prstGeom prst="rect">
-            <a:avLst/>
-          </a:prstGeom>
-          <a:noFill/>
-        </p:spPr>
-        <p:txBody>
-          <a:bodyPr wrap="square">
-            <a:spAutoFit/>
-          </a:bodyPr>
-          <a:lstStyle/>
-          <a:p>
-            <a:r>
-              <a:rPr sz="2600" b="1" i="0">
-                <a:solidFill>
-                  <a:srgbClr val="FFFFFF"/>
-                </a:solidFill>
-                <a:latin typeface="Calibri"/>
-              </a:rPr>
-              <a:t>Lecciones accionables: los cuatro elementos verificables (3/3)</a:t>
-            </a:r>
-          </a:p>
-        </p:txBody>
-      </p:sp>
-      <p:sp>
-        <p:nvSpPr>
-          <p:cNvPr id="5" name="TextBox 4"/>
-          <p:cNvSpPr txBox="1"/>
-          <p:nvPr/>
-        </p:nvSpPr>
-        <p:spPr>
-          <a:xfrm>
-            <a:off x="457200" y="1170432"/>
-            <a:ext cx="11277295" cy="5230368"/>
-          </a:xfrm>
-          <a:prstGeom prst="rect">
-            <a:avLst/>
-          </a:prstGeom>
-          <a:noFill/>
-        </p:spPr>
-        <p:txBody>
-          <a:bodyPr wrap="square">
-            <a:spAutoFit/>
-          </a:bodyPr>
-          <a:lstStyle/>
-          <a:p>
-            <a:pPr>
-              <a:spcAft>
-                <a:spcPts val="800"/>
-              </a:spcAft>
-            </a:pPr>
-            <a:r>
-              <a:rPr sz="2000" b="0" i="0">
-                <a:solidFill>
-                  <a:srgbClr val="333333"/>
-                </a:solidFill>
-                <a:latin typeface="Calibri"/>
-              </a:rPr>
-              <a:t>–   Del caso de migracion sale que todo cambio de esquema tenga script de ida, script de retorno y conteo de verificacion.</a:t>
-            </a:r>
-          </a:p>
-          <a:p>
-            <a:pPr>
-              <a:spcAft>
-                <a:spcPts val="800"/>
-              </a:spcAft>
-            </a:pPr>
-            <a:r>
-              <a:rPr sz="2000" b="0" i="0">
-                <a:solidFill>
-                  <a:srgbClr val="333333"/>
-                </a:solidFill>
-                <a:latin typeface="Calibri"/>
-              </a:rPr>
-              <a:t>–   Sobre las preguntas que llegaran por el canal del curso: si piden inventar un caso, la respuesta es no, cada caso debe ser verificable con una fuente publica o declararse explicitamente como hipotetico</a:t>
-            </a:r>
-          </a:p>
-          <a:p>
-            <a:pPr>
-              <a:spcAft>
-                <a:spcPts val="800"/>
-              </a:spcAft>
-            </a:pPr>
-            <a:r>
-              <a:rPr sz="2000" b="0" i="0">
-                <a:solidFill>
-                  <a:srgbClr val="333333"/>
-                </a:solidFill>
-                <a:latin typeface="Calibri"/>
-              </a:rPr>
-              <a:t>–   Si el caso no tiene detalle tecnico publicado, se escribe solo lo documentado y se marca aparte lo que es inferencia propia, porque separar hecho de suposicion es parte de la nota; y si preguntan cuanto debe medir cada celda.</a:t>
-            </a:r>
-          </a:p>
-        </p:txBody>
-      </p:sp>
-      <p:sp>
-        <p:nvSpPr>
-          <p:cNvPr id="6" name="TextBox 5"/>
-          <p:cNvSpPr txBox="1"/>
-          <p:nvPr/>
-        </p:nvSpPr>
-        <p:spPr>
-          <a:xfrm>
-            <a:off x="11185855" y="6473952"/>
-            <a:ext cx="640080" cy="274320"/>
-          </a:xfrm>
-          <a:prstGeom prst="rect">
-            <a:avLst/>
-          </a:prstGeom>
-          <a:noFill/>
-        </p:spPr>
-        <p:txBody>
-          <a:bodyPr wrap="square">
-            <a:spAutoFit/>
-          </a:bodyPr>
-          <a:lstStyle/>
-          <a:p>
-            <a:pPr algn="r"/>
-            <a:r>
-              <a:rPr sz="1100" b="0" i="0">
-                <a:solidFill>
-                  <a:srgbClr val="666666"/>
-                </a:solidFill>
-                <a:latin typeface="Calibri"/>
-              </a:rPr>
-              <a:t>18</a:t>
-            </a:r>
-          </a:p>
-        </p:txBody>
-      </p:sp>
-    </p:spTree>
-  </p:cSld>
-  <p:clrMapOvr>
-    <a:masterClrMapping/>
-  </p:clrMapOvr>
-</p:sld>
-</file>
-
-<file path=ppt/slides/slide19.xml><?xml version="1.0" encoding="utf-8"?>
-<p:sld xmlns:a="http://schemas.openxmlformats.org/drawingml/2006/main" xmlns:p="http://schemas.openxmlformats.org/presentationml/2006/main" xmlns:r="http://schemas.openxmlformats.org/officeDocument/2006/relationships">
-  <p:cSld>
-    <p:bg>
-      <p:bgPr>
-        <a:solidFill>
-          <a:srgbClr val="FFFFFF"/>
-        </a:solidFill>
-        <a:effectLst/>
-      </p:bgPr>
-    </p:bg>
-    <p:spTree>
-      <p:nvGrpSpPr>
-        <p:cNvPr id="1" name=""/>
-        <p:cNvGrpSpPr/>
-        <p:nvPr/>
-      </p:nvGrpSpPr>
-      <p:grpSpPr/>
-      <p:sp>
-        <p:nvSpPr>
-          <p:cNvPr id="2" name="Rectangle 1"/>
-          <p:cNvSpPr/>
-          <p:nvPr/>
-        </p:nvSpPr>
-        <p:spPr>
-          <a:xfrm>
-            <a:off x="0" y="0"/>
-            <a:ext cx="12191695" cy="960120"/>
-          </a:xfrm>
-          <a:prstGeom prst="rect">
-            <a:avLst/>
-          </a:prstGeom>
-          <a:solidFill>
-            <a:srgbClr val="095292"/>
-          </a:solidFill>
-          <a:ln>
-            <a:noFill/>
-          </a:ln>
-        </p:spPr>
-        <p:style>
-          <a:lnRef idx="1">
-            <a:schemeClr val="accent1"/>
-          </a:lnRef>
-          <a:fillRef idx="3">
-            <a:schemeClr val="accent1"/>
-          </a:fillRef>
-          <a:effectRef idx="2">
-            <a:schemeClr val="accent1"/>
-          </a:effectRef>
-          <a:fontRef idx="minor">
-            <a:schemeClr val="lt1"/>
-          </a:fontRef>
-        </p:style>
-        <p:txBody>
-          <a:bodyPr rtlCol="0" anchor="ctr"/>
-          <a:lstStyle/>
-          <a:p>
-            <a:pPr algn="ctr"/>
-          </a:p>
-        </p:txBody>
-      </p:sp>
-      <p:sp>
-        <p:nvSpPr>
-          <p:cNvPr id="3" name="Rectangle 2"/>
-          <p:cNvSpPr/>
-          <p:nvPr/>
-        </p:nvSpPr>
-        <p:spPr>
-          <a:xfrm>
-            <a:off x="0" y="960120"/>
-            <a:ext cx="12191695" cy="41148"/>
-          </a:xfrm>
-          <a:prstGeom prst="rect">
-            <a:avLst/>
-          </a:prstGeom>
-          <a:solidFill>
-            <a:srgbClr val="FFD000"/>
-          </a:solidFill>
-          <a:ln>
-            <a:noFill/>
-          </a:ln>
-        </p:spPr>
-        <p:style>
-          <a:lnRef idx="1">
-            <a:schemeClr val="accent1"/>
-          </a:lnRef>
-          <a:fillRef idx="3">
-            <a:schemeClr val="accent1"/>
-          </a:fillRef>
-          <a:effectRef idx="2">
-            <a:schemeClr val="accent1"/>
-          </a:effectRef>
-          <a:fontRef idx="minor">
-            <a:schemeClr val="lt1"/>
-          </a:fontRef>
-        </p:style>
-        <p:txBody>
-          <a:bodyPr rtlCol="0" anchor="ctr"/>
-          <a:lstStyle/>
-          <a:p>
-            <a:pPr algn="ctr"/>
-          </a:p>
-        </p:txBody>
-      </p:sp>
-      <p:sp>
-        <p:nvSpPr>
-          <p:cNvPr id="4" name="TextBox 3"/>
-          <p:cNvSpPr txBox="1"/>
-          <p:nvPr/>
-        </p:nvSpPr>
-        <p:spPr>
-          <a:xfrm>
-            <a:off x="457200" y="164592"/>
-            <a:ext cx="11277295" cy="502920"/>
-          </a:xfrm>
-          <a:prstGeom prst="rect">
-            <a:avLst/>
-          </a:prstGeom>
-          <a:noFill/>
-        </p:spPr>
-        <p:txBody>
-          <a:bodyPr wrap="square">
-            <a:spAutoFit/>
-          </a:bodyPr>
-          <a:lstStyle/>
-          <a:p>
-            <a:r>
-              <a:rPr sz="2600" b="1" i="0">
-                <a:solidFill>
-                  <a:srgbClr val="FFFFFF"/>
-                </a:solidFill>
-                <a:latin typeface="Calibri"/>
-              </a:rPr>
-              <a:t>Leer un plan de ejecucion ajeno</a:t>
-            </a:r>
-          </a:p>
-        </p:txBody>
-      </p:sp>
-      <p:sp>
-        <p:nvSpPr>
-          <p:cNvPr id="5" name="Rounded Rectangle 4"/>
-          <p:cNvSpPr/>
-          <p:nvPr/>
-        </p:nvSpPr>
-        <p:spPr>
-          <a:xfrm>
-            <a:off x="457200" y="1261872"/>
-            <a:ext cx="11277295" cy="5093208"/>
-          </a:xfrm>
-          <a:prstGeom prst="roundRect">
-            <a:avLst>
-              <a:gd name="adj" fmla="val 12000"/>
-            </a:avLst>
-          </a:prstGeom>
-          <a:solidFill>
-            <a:srgbClr val="1E2A38"/>
-          </a:solidFill>
-          <a:ln>
-            <a:noFill/>
-          </a:ln>
-        </p:spPr>
-        <p:style>
-          <a:lnRef idx="1">
-            <a:schemeClr val="accent1"/>
-          </a:lnRef>
-          <a:fillRef idx="3">
-            <a:schemeClr val="accent1"/>
-          </a:fillRef>
-          <a:effectRef idx="2">
-            <a:schemeClr val="accent1"/>
-          </a:effectRef>
-          <a:fontRef idx="minor">
-            <a:schemeClr val="lt1"/>
-          </a:fontRef>
-        </p:style>
-        <p:txBody>
-          <a:bodyPr rtlCol="0" anchor="ctr"/>
-          <a:lstStyle/>
-          <a:p>
-            <a:pPr algn="ctr"/>
-          </a:p>
-        </p:txBody>
-      </p:sp>
-      <p:sp>
-        <p:nvSpPr>
-          <p:cNvPr id="6" name="Rectangle 5"/>
-          <p:cNvSpPr/>
-          <p:nvPr/>
-        </p:nvSpPr>
-        <p:spPr>
-          <a:xfrm>
-            <a:off x="457200" y="1261872"/>
-            <a:ext cx="11277295" cy="320040"/>
-          </a:xfrm>
-          <a:prstGeom prst="rect">
-            <a:avLst/>
-          </a:prstGeom>
-          <a:solidFill>
-            <a:srgbClr val="095292"/>
-          </a:solidFill>
-          <a:ln>
-            <a:noFill/>
-          </a:ln>
-        </p:spPr>
-        <p:style>
-          <a:lnRef idx="1">
-            <a:schemeClr val="accent1"/>
-          </a:lnRef>
-          <a:fillRef idx="3">
-            <a:schemeClr val="accent1"/>
-          </a:fillRef>
-          <a:effectRef idx="2">
-            <a:schemeClr val="accent1"/>
-          </a:effectRef>
-          <a:fontRef idx="minor">
-            <a:schemeClr val="lt1"/>
-          </a:fontRef>
-        </p:style>
-        <p:txBody>
-          <a:bodyPr rtlCol="0" anchor="ctr"/>
-          <a:lstStyle/>
-          <a:p>
-            <a:pPr algn="ctr"/>
-          </a:p>
-        </p:txBody>
-      </p:sp>
-      <p:sp>
-        <p:nvSpPr>
-          <p:cNvPr id="7" name="TextBox 6"/>
-          <p:cNvSpPr txBox="1"/>
-          <p:nvPr/>
-        </p:nvSpPr>
-        <p:spPr>
-          <a:xfrm>
-            <a:off x="685800" y="1307592"/>
-            <a:ext cx="10820095" cy="256032"/>
-          </a:xfrm>
-          <a:prstGeom prst="rect">
-            <a:avLst/>
-          </a:prstGeom>
-          <a:noFill/>
-        </p:spPr>
-        <p:txBody>
-          <a:bodyPr wrap="square" anchor="ctr"/>
-          <a:lstStyle/>
-          <a:p>
-            <a:r>
-              <a:rPr sz="1000" b="1" i="0">
-                <a:solidFill>
-                  <a:srgbClr val="269CCB"/>
-                </a:solidFill>
-                <a:latin typeface="Calibri"/>
-              </a:rPr>
-              <a:t>● ● ●</a:t>
-            </a:r>
-          </a:p>
-        </p:txBody>
-      </p:sp>
-      <p:sp>
-        <p:nvSpPr>
-          <p:cNvPr id="8" name="TextBox 7"/>
-          <p:cNvSpPr txBox="1"/>
-          <p:nvPr/>
-        </p:nvSpPr>
-        <p:spPr>
-          <a:xfrm>
-            <a:off x="777240" y="1719072"/>
-            <a:ext cx="10637215" cy="4453128"/>
-          </a:xfrm>
-          <a:prstGeom prst="rect">
-            <a:avLst/>
-          </a:prstGeom>
-          <a:noFill/>
-        </p:spPr>
-        <p:txBody>
-          <a:bodyPr wrap="square">
-            <a:spAutoFit/>
-          </a:bodyPr>
-          <a:lstStyle/>
-          <a:p>
-            <a:pPr>
-              <a:spcAft>
-                <a:spcPts val="400"/>
-              </a:spcAft>
-            </a:pPr>
-            <a:r>
-              <a:rPr sz="1400" b="0" i="0">
-                <a:solidFill>
-                  <a:srgbClr val="FFFFFF"/>
-                </a:solidFill>
-                <a:latin typeface="Calibri"/>
-              </a:rPr>
-              <a:t>EXPLAIN (ANALYZE, BUFFERS)</a:t>
-            </a:r>
-          </a:p>
-          <a:p>
-            <a:pPr>
-              <a:spcAft>
-                <a:spcPts val="400"/>
-              </a:spcAft>
-            </a:pPr>
-            <a:r>
-              <a:rPr sz="1400" b="0" i="0">
-                <a:solidFill>
-                  <a:srgbClr val="FFFFFF"/>
-                </a:solidFill>
-                <a:latin typeface="Calibri"/>
-              </a:rPr>
-              <a:t>SELECT d.nombre, COUNT(c.id_cita) AS citas</a:t>
-            </a:r>
-          </a:p>
-          <a:p>
-            <a:pPr>
-              <a:spcAft>
-                <a:spcPts val="400"/>
-              </a:spcAft>
-            </a:pPr>
-            <a:r>
-              <a:rPr sz="1400" b="0" i="0">
-                <a:solidFill>
-                  <a:srgbClr val="FFFFFF"/>
-                </a:solidFill>
-                <a:latin typeface="Calibri"/>
-              </a:rPr>
-              <a:t>FROM dueno d</a:t>
-            </a:r>
-          </a:p>
-          <a:p>
-            <a:pPr>
-              <a:spcAft>
-                <a:spcPts val="400"/>
-              </a:spcAft>
-            </a:pPr>
-            <a:r>
-              <a:rPr sz="1400" b="0" i="0">
-                <a:solidFill>
-                  <a:srgbClr val="FFFFFF"/>
-                </a:solidFill>
-                <a:latin typeface="Calibri"/>
-              </a:rPr>
-              <a:t>JOIN mascota m ON m.id_dueno   = d.id_dueno</a:t>
-            </a:r>
-          </a:p>
-          <a:p>
-            <a:pPr>
-              <a:spcAft>
-                <a:spcPts val="400"/>
-              </a:spcAft>
-            </a:pPr>
-            <a:r>
-              <a:rPr sz="1400" b="0" i="0">
-                <a:solidFill>
-                  <a:srgbClr val="FFFFFF"/>
-                </a:solidFill>
-                <a:latin typeface="Calibri"/>
-              </a:rPr>
-              <a:t>JOIN cita    c ON c.id_mascota = m.id_mascota</a:t>
-            </a:r>
-          </a:p>
-          <a:p>
-            <a:pPr>
-              <a:spcAft>
-                <a:spcPts val="400"/>
-              </a:spcAft>
-            </a:pPr>
-            <a:r>
-              <a:rPr sz="1400" b="0" i="0">
-                <a:solidFill>
-                  <a:srgbClr val="FFFFFF"/>
-                </a:solidFill>
-                <a:latin typeface="Calibri"/>
-              </a:rPr>
-              <a:t>WHERE c.fecha_hora &gt;= DATE '2026-01-01'</a:t>
-            </a:r>
-          </a:p>
-          <a:p>
-            <a:pPr>
-              <a:spcAft>
-                <a:spcPts val="400"/>
-              </a:spcAft>
-            </a:pPr>
-            <a:r>
-              <a:rPr sz="1400" b="0" i="0">
-                <a:solidFill>
-                  <a:srgbClr val="FFFFFF"/>
-                </a:solidFill>
-                <a:latin typeface="Calibri"/>
-              </a:rPr>
-              <a:t>GROUP BY d.id_dueno, d.nombre</a:t>
-            </a:r>
-          </a:p>
-          <a:p>
-            <a:pPr>
-              <a:spcAft>
-                <a:spcPts val="400"/>
-              </a:spcAft>
-            </a:pPr>
-            <a:r>
-              <a:rPr sz="1400" b="0" i="0">
-                <a:solidFill>
-                  <a:srgbClr val="FFFFFF"/>
-                </a:solidFill>
-                <a:latin typeface="Calibri"/>
-              </a:rPr>
-              <a:t>HAVING COUNT(c.id_cita) &gt; 5;</a:t>
-            </a:r>
-          </a:p>
-          <a:p>
-            <a:pPr>
-              <a:spcAft>
-                <a:spcPts val="400"/>
-              </a:spcAft>
-            </a:pPr>
-            <a:r>
-              <a:rPr sz="1400" b="0" i="0">
-                <a:solidFill>
-                  <a:srgbClr val="FFFFFF"/>
-                </a:solidFill>
-                <a:latin typeface="Calibri"/>
-              </a:rPr>
-              <a:t/>
-            </a:r>
-          </a:p>
-          <a:p>
-            <a:pPr>
-              <a:spcAft>
-                <a:spcPts val="400"/>
-              </a:spcAft>
-            </a:pPr>
-            <a:r>
-              <a:rPr sz="1400" b="0" i="0">
-                <a:solidFill>
-                  <a:srgbClr val="FFFFFF"/>
-                </a:solidFill>
-                <a:latin typeface="Calibri"/>
-              </a:rPr>
-              <a:t>-- 1. el nodo mas costoso (cost mas alto), no el primero</a:t>
-            </a:r>
-          </a:p>
-          <a:p>
-            <a:pPr>
-              <a:spcAft>
-                <a:spcPts val="400"/>
-              </a:spcAft>
-            </a:pPr>
-            <a:r>
-              <a:rPr sz="1400" b="0" i="0">
-                <a:solidFill>
-                  <a:srgbClr val="FFFFFF"/>
-                </a:solidFill>
-                <a:latin typeface="Calibri"/>
-              </a:rPr>
-              <a:t>-- 2. Seq Scan sobre tabla grande con filtro selectivo -&gt; falta indice</a:t>
-            </a:r>
-          </a:p>
-          <a:p>
-            <a:pPr>
-              <a:spcAft>
-                <a:spcPts val="400"/>
-              </a:spcAft>
-            </a:pPr>
-            <a:r>
-              <a:rPr sz="1400" b="0" i="0">
-                <a:solidFill>
-                  <a:srgbClr val="FFFFFF"/>
-                </a:solidFill>
-                <a:latin typeface="Calibri"/>
-              </a:rPr>
-              <a:t>-- 3. rows estimadas vs actual: si difieren 10x, ANALYZE la tabla</a:t>
-            </a:r>
-          </a:p>
-          <a:p>
-            <a:pPr>
-              <a:spcAft>
-                <a:spcPts val="400"/>
-              </a:spcAft>
-            </a:pPr>
-            <a:r>
-              <a:rPr sz="1400" b="0" i="0">
-                <a:solidFill>
-                  <a:srgbClr val="FFFFFF"/>
-                </a:solidFill>
-                <a:latin typeface="Calibri"/>
-              </a:rPr>
-              <a:t>-- 4. Nested Loop con muchas filas -&gt; suele querer Hash Join</a:t>
-            </a:r>
-          </a:p>
-        </p:txBody>
-      </p:sp>
-      <p:sp>
-        <p:nvSpPr>
-          <p:cNvPr id="9" name="TextBox 8"/>
-          <p:cNvSpPr txBox="1"/>
-          <p:nvPr/>
-        </p:nvSpPr>
-        <p:spPr>
-          <a:xfrm>
-            <a:off x="11185855" y="6473952"/>
-            <a:ext cx="640080" cy="274320"/>
-          </a:xfrm>
-          <a:prstGeom prst="rect">
-            <a:avLst/>
-          </a:prstGeom>
-          <a:noFill/>
-        </p:spPr>
-        <p:txBody>
-          <a:bodyPr wrap="square">
-            <a:spAutoFit/>
-          </a:bodyPr>
-          <a:lstStyle/>
-          <a:p>
-            <a:pPr algn="r"/>
-            <a:r>
-              <a:rPr sz="1100" b="0" i="0">
-                <a:solidFill>
-                  <a:srgbClr val="666666"/>
-                </a:solidFill>
-                <a:latin typeface="Calibri"/>
-              </a:rPr>
-              <a:t>19</a:t>
+              <a:t>Todo lo visto queda proyectado para repasar</a:t>
             </a:r>
           </a:p>
         </p:txBody>
@@ -7426,263 +8225,22 @@
       </p:sp>
       <p:sp>
         <p:nvSpPr>
-          <p:cNvPr id="5" name="TextBox 4"/>
-          <p:cNvSpPr txBox="1"/>
-          <p:nvPr/>
-        </p:nvSpPr>
-        <p:spPr>
-          <a:xfrm>
-            <a:off x="457200" y="1170432"/>
-            <a:ext cx="11277295" cy="5230368"/>
-          </a:xfrm>
-          <a:prstGeom prst="rect">
-            <a:avLst/>
-          </a:prstGeom>
-          <a:noFill/>
-        </p:spPr>
-        <p:txBody>
-          <a:bodyPr wrap="square">
-            <a:spAutoFit/>
-          </a:bodyPr>
-          <a:lstStyle/>
-          <a:p>
-            <a:pPr>
-              <a:spcAft>
-                <a:spcPts val="800"/>
-              </a:spcAft>
-            </a:pPr>
-            <a:r>
-              <a:rPr sz="2000" b="0" i="0">
-                <a:solidFill>
-                  <a:srgbClr val="333333"/>
-                </a:solidFill>
-                <a:latin typeface="Calibri"/>
-              </a:rPr>
-              <a:t>–   </a:t>
-            </a:r>
-            <a:r>
-              <a:rPr sz="2000" b="1" i="0">
-                <a:solidFill>
-                  <a:srgbClr val="333333"/>
-                </a:solidFill>
-                <a:latin typeface="Calibri"/>
-              </a:rPr>
-              <a:t>Tema de hoy:</a:t>
-            </a:r>
-            <a:r>
-              <a:rPr sz="2000" b="0" i="0">
-                <a:solidFill>
-                  <a:srgbClr val="333333"/>
-                </a:solidFill>
-                <a:latin typeface="Calibri"/>
-              </a:rPr>
-              <a:t> Analisis de casos reales · la clínica</a:t>
-            </a:r>
-          </a:p>
-          <a:p>
-            <a:pPr>
-              <a:spcAft>
-                <a:spcPts val="800"/>
-              </a:spcAft>
-            </a:pPr>
-            <a:r>
-              <a:rPr sz="2000" b="0" i="0">
-                <a:solidFill>
-                  <a:srgbClr val="333333"/>
-                </a:solidFill>
-                <a:latin typeface="Calibri"/>
-              </a:rPr>
-              <a:t>–   Herramienta: </a:t>
-            </a:r>
-            <a:r>
-              <a:rPr sz="2000" b="1" i="0">
-                <a:solidFill>
-                  <a:srgbClr val="333333"/>
-                </a:solidFill>
-                <a:latin typeface="Calibri"/>
-              </a:rPr>
-              <a:t>Google Docs</a:t>
-            </a:r>
-            <a:r>
-              <a:rPr sz="2000" b="0" i="0">
-                <a:solidFill>
-                  <a:srgbClr val="333333"/>
-                </a:solidFill>
-                <a:latin typeface="Calibri"/>
-              </a:rPr>
-              <a:t> · Bloque </a:t>
-            </a:r>
-            <a:r>
-              <a:rPr sz="2000" b="1" i="0">
-                <a:solidFill>
-                  <a:srgbClr val="333333"/>
-                </a:solidFill>
-                <a:latin typeface="Calibri"/>
-              </a:rPr>
-              <a:t>120 min</a:t>
-            </a:r>
-          </a:p>
-          <a:p>
-            <a:pPr>
-              <a:spcAft>
-                <a:spcPts val="800"/>
-              </a:spcAft>
-            </a:pPr>
-            <a:r>
-              <a:rPr sz="2000" b="0" i="0">
-                <a:solidFill>
-                  <a:srgbClr val="333333"/>
-                </a:solidFill>
-                <a:latin typeface="Calibri"/>
-              </a:rPr>
-              <a:t>–   Gratis + navegador · free tier · sin software de pago obligatorio.</a:t>
-            </a:r>
-          </a:p>
-          <a:p>
-            <a:pPr>
-              <a:spcAft>
-                <a:spcPts val="800"/>
-              </a:spcAft>
-            </a:pPr>
-            <a:r>
-              <a:rPr sz="2000" b="0" i="0">
-                <a:solidFill>
-                  <a:srgbClr val="333333"/>
-                </a:solidFill>
-                <a:latin typeface="Calibri"/>
-              </a:rPr>
-              <a:t>–   Recorrido: teoría del tema, una lámina por concepto, y demo del docente sobre la base de la clínica.</a:t>
-            </a:r>
-          </a:p>
-          <a:p>
-            <a:pPr>
-              <a:spcAft>
-                <a:spcPts val="800"/>
-              </a:spcAft>
-            </a:pPr>
-            <a:r>
-              <a:rPr sz="2000" b="0" i="0">
-                <a:solidFill>
-                  <a:srgbClr val="333333"/>
-                </a:solidFill>
-                <a:latin typeface="Calibri"/>
-              </a:rPr>
-              <a:t>–   Cada lámina se sostiene sola: sirve para repasar aunque hayas faltado.</a:t>
-            </a:r>
-          </a:p>
-          <a:p>
-            <a:pPr>
-              <a:spcAft>
-                <a:spcPts val="800"/>
-              </a:spcAft>
-            </a:pPr>
-            <a:r>
-              <a:rPr sz="2000" b="0" i="0">
-                <a:solidFill>
-                  <a:srgbClr val="333333"/>
-                </a:solidFill>
-                <a:latin typeface="Calibri"/>
-              </a:rPr>
-              <a:t>–   </a:t>
-            </a:r>
-            <a:r>
-              <a:rPr sz="2000" b="1" i="0">
-                <a:solidFill>
-                  <a:srgbClr val="333333"/>
-                </a:solidFill>
-                <a:latin typeface="Calibri"/>
-              </a:rPr>
-              <a:t>Conceptos de hoy:</a:t>
-            </a:r>
-            <a:r>
-              <a:rPr sz="2000" b="0" i="0">
-                <a:solidFill>
-                  <a:srgbClr val="333333"/>
-                </a:solidFill>
-                <a:latin typeface="Calibri"/>
-              </a:rPr>
-              <a:t> Clase autonoma · Causa proxima y causa raiz · Caso uno · Caso dos.</a:t>
-            </a:r>
-          </a:p>
-        </p:txBody>
-      </p:sp>
-      <p:sp>
-        <p:nvSpPr>
-          <p:cNvPr id="6" name="TextBox 5"/>
-          <p:cNvSpPr txBox="1"/>
-          <p:nvPr/>
-        </p:nvSpPr>
-        <p:spPr>
-          <a:xfrm>
-            <a:off x="11185855" y="6473952"/>
-            <a:ext cx="640080" cy="274320"/>
-          </a:xfrm>
-          <a:prstGeom prst="rect">
-            <a:avLst/>
-          </a:prstGeom>
-          <a:noFill/>
-        </p:spPr>
-        <p:txBody>
-          <a:bodyPr wrap="square">
-            <a:spAutoFit/>
-          </a:bodyPr>
-          <a:lstStyle/>
-          <a:p>
-            <a:pPr algn="r"/>
-            <a:r>
-              <a:rPr sz="1100" b="0" i="0">
-                <a:solidFill>
-                  <a:srgbClr val="666666"/>
-                </a:solidFill>
-                <a:latin typeface="Calibri"/>
-              </a:rPr>
-              <a:t>2</a:t>
-            </a:r>
-          </a:p>
-        </p:txBody>
-      </p:sp>
-    </p:spTree>
-  </p:cSld>
-  <p:clrMapOvr>
-    <a:masterClrMapping/>
-  </p:clrMapOvr>
-</p:sld>
-</file>
-
-<file path=ppt/slides/slide20.xml><?xml version="1.0" encoding="utf-8"?>
-<p:sld xmlns:a="http://schemas.openxmlformats.org/drawingml/2006/main" xmlns:p="http://schemas.openxmlformats.org/presentationml/2006/main" xmlns:r="http://schemas.openxmlformats.org/officeDocument/2006/relationships">
-  <p:cSld>
-    <p:bg>
-      <p:bgPr>
-        <a:solidFill>
-          <a:srgbClr val="FFFFFF"/>
-        </a:solidFill>
-        <a:effectLst/>
-      </p:bgPr>
-    </p:bg>
-    <p:spTree>
-      <p:nvGrpSpPr>
-        <p:cNvPr id="1" name=""/>
-        <p:cNvGrpSpPr/>
-        <p:nvPr/>
-      </p:nvGrpSpPr>
-      <p:grpSpPr/>
-      <p:sp>
-        <p:nvSpPr>
-          <p:cNvPr id="2" name="Rectangle 1"/>
+          <p:cNvPr id="5" name="Rounded Rectangle 4"/>
           <p:cNvSpPr/>
           <p:nvPr/>
         </p:nvSpPr>
         <p:spPr>
           <a:xfrm>
-            <a:off x="0" y="0"/>
-            <a:ext cx="12191695" cy="960120"/>
-          </a:xfrm>
-          <a:prstGeom prst="rect">
-            <a:avLst/>
+            <a:off x="5797149" y="1573813"/>
+            <a:ext cx="6010497" cy="4057845"/>
+          </a:xfrm>
+          <a:prstGeom prst="roundRect">
+            <a:avLst>
+              <a:gd name="adj" fmla="val 4000"/>
+            </a:avLst>
           </a:prstGeom>
           <a:solidFill>
-            <a:srgbClr val="095292"/>
+            <a:srgbClr val="E8EEF4"/>
           </a:solidFill>
           <a:ln>
             <a:noFill/>
@@ -7710,365 +8268,9 @@
           </a:p>
         </p:txBody>
       </p:sp>
-      <p:sp>
-        <p:nvSpPr>
-          <p:cNvPr id="3" name="Rectangle 2"/>
-          <p:cNvSpPr/>
-          <p:nvPr/>
-        </p:nvSpPr>
-        <p:spPr>
-          <a:xfrm>
-            <a:off x="0" y="960120"/>
-            <a:ext cx="12191695" cy="41148"/>
-          </a:xfrm>
-          <a:prstGeom prst="rect">
-            <a:avLst/>
-          </a:prstGeom>
-          <a:solidFill>
-            <a:srgbClr val="FFD000"/>
-          </a:solidFill>
-          <a:ln>
-            <a:noFill/>
-          </a:ln>
-        </p:spPr>
-        <p:style>
-          <a:lnRef idx="1">
-            <a:schemeClr val="accent1"/>
-          </a:lnRef>
-          <a:fillRef idx="3">
-            <a:schemeClr val="accent1"/>
-          </a:fillRef>
-          <a:effectRef idx="2">
-            <a:schemeClr val="accent1"/>
-          </a:effectRef>
-          <a:fontRef idx="minor">
-            <a:schemeClr val="lt1"/>
-          </a:fontRef>
-        </p:style>
-        <p:txBody>
-          <a:bodyPr rtlCol="0" anchor="ctr"/>
-          <a:lstStyle/>
-          <a:p>
-            <a:pPr algn="ctr"/>
-          </a:p>
-        </p:txBody>
-      </p:sp>
-      <p:sp>
-        <p:nvSpPr>
-          <p:cNvPr id="4" name="TextBox 3"/>
-          <p:cNvSpPr txBox="1"/>
-          <p:nvPr/>
-        </p:nvSpPr>
-        <p:spPr>
-          <a:xfrm>
-            <a:off x="457200" y="164592"/>
-            <a:ext cx="11277295" cy="502920"/>
-          </a:xfrm>
-          <a:prstGeom prst="rect">
-            <a:avLst/>
-          </a:prstGeom>
-          <a:noFill/>
-        </p:spPr>
-        <p:txBody>
-          <a:bodyPr wrap="square">
-            <a:spAutoFit/>
-          </a:bodyPr>
-          <a:lstStyle/>
-          <a:p>
-            <a:r>
-              <a:rPr sz="2600" b="1" i="0">
-                <a:solidFill>
-                  <a:srgbClr val="FFFFFF"/>
-                </a:solidFill>
-                <a:latin typeface="Calibri"/>
-              </a:rPr>
-              <a:t>Demo del dia</a:t>
-            </a:r>
-          </a:p>
-        </p:txBody>
-      </p:sp>
-      <p:sp>
-        <p:nvSpPr>
-          <p:cNvPr id="5" name="TextBox 4"/>
-          <p:cNvSpPr txBox="1"/>
-          <p:nvPr/>
-        </p:nvSpPr>
-        <p:spPr>
-          <a:xfrm>
-            <a:off x="457200" y="1170432"/>
-            <a:ext cx="11277295" cy="5230368"/>
-          </a:xfrm>
-          <a:prstGeom prst="rect">
-            <a:avLst/>
-          </a:prstGeom>
-          <a:noFill/>
-        </p:spPr>
-        <p:txBody>
-          <a:bodyPr wrap="square">
-            <a:spAutoFit/>
-          </a:bodyPr>
-          <a:lstStyle/>
-          <a:p>
-            <a:pPr>
-              <a:spcAft>
-                <a:spcPts val="800"/>
-              </a:spcAft>
-            </a:pPr>
-            <a:r>
-              <a:rPr sz="2000" b="0" i="0">
-                <a:solidFill>
-                  <a:srgbClr val="333333"/>
-                </a:solidFill>
-                <a:latin typeface="Calibri"/>
-              </a:rPr>
-              <a:t>–   </a:t>
-            </a:r>
-            <a:r>
-              <a:rPr sz="2000" b="1" i="0">
-                <a:solidFill>
-                  <a:srgbClr val="333333"/>
-                </a:solidFill>
-                <a:latin typeface="Calibri"/>
-              </a:rPr>
-              <a:t>Herramienta:</a:t>
-            </a:r>
-            <a:r>
-              <a:rPr sz="2000" b="0" i="0">
-                <a:solidFill>
-                  <a:srgbClr val="333333"/>
-                </a:solidFill>
-                <a:latin typeface="Calibri"/>
-              </a:rPr>
-              <a:t> Google Docs</a:t>
-            </a:r>
-          </a:p>
-          <a:p>
-            <a:pPr>
-              <a:spcAft>
-                <a:spcPts val="800"/>
-              </a:spcAft>
-            </a:pPr>
-            <a:r>
-              <a:rPr sz="2000" b="0" i="0">
-                <a:solidFill>
-                  <a:srgbClr val="333333"/>
-                </a:solidFill>
-                <a:latin typeface="Calibri"/>
-              </a:rPr>
-              <a:t>–   </a:t>
-            </a:r>
-            <a:r>
-              <a:rPr sz="2000" b="1" i="0">
-                <a:solidFill>
-                  <a:srgbClr val="333333"/>
-                </a:solidFill>
-                <a:latin typeface="Calibri"/>
-              </a:rPr>
-              <a:t>Demo:</a:t>
-            </a:r>
-            <a:r>
-              <a:rPr sz="2000" b="0" i="0">
-                <a:solidFill>
-                  <a:srgbClr val="333333"/>
-                </a:solidFill>
-                <a:latin typeface="Calibri"/>
-              </a:rPr>
-              <a:t> Plantilla: contexto -&gt; fallo -&gt; leccion -&gt; cambio en la clínica.</a:t>
-            </a:r>
-          </a:p>
-          <a:p>
-            <a:pPr>
-              <a:spcAft>
-                <a:spcPts val="800"/>
-              </a:spcAft>
-            </a:pPr>
-            <a:r>
-              <a:rPr sz="2000" b="0" i="0">
-                <a:solidFill>
-                  <a:srgbClr val="333333"/>
-                </a:solidFill>
-                <a:latin typeface="Calibri"/>
-              </a:rPr>
-              <a:t>–   Sigan el mismo dominio de la clínica (no inventen otro caso).</a:t>
-            </a:r>
-          </a:p>
-          <a:p>
-            <a:pPr>
-              <a:spcAft>
-                <a:spcPts val="800"/>
-              </a:spcAft>
-            </a:pPr>
-            <a:r>
-              <a:rPr sz="2000" b="0" i="0">
-                <a:solidFill>
-                  <a:srgbClr val="333333"/>
-                </a:solidFill>
-                <a:latin typeface="Calibri"/>
-              </a:rPr>
-              <a:t>–   </a:t>
-            </a:r>
-            <a:r>
-              <a:rPr sz="2000" b="1" i="0">
-                <a:solidFill>
-                  <a:srgbClr val="333333"/>
-                </a:solidFill>
-                <a:latin typeface="Calibri"/>
-              </a:rPr>
-              <a:t>Qué observar:</a:t>
-            </a:r>
-            <a:r>
-              <a:rPr sz="2000" b="0" i="0">
-                <a:solidFill>
-                  <a:srgbClr val="333333"/>
-                </a:solidFill>
-                <a:latin typeface="Calibri"/>
-              </a:rPr>
-              <a:t> cada caso se separa en contexto, fallo, causa raiz y la leccion convertida en una accion verificable sobre la base de la clínica.</a:t>
-            </a:r>
-          </a:p>
-          <a:p>
-            <a:pPr>
-              <a:spcAft>
-                <a:spcPts val="800"/>
-              </a:spcAft>
-            </a:pPr>
-            <a:r>
-              <a:rPr sz="2000" b="0" i="0">
-                <a:solidFill>
-                  <a:srgbClr val="333333"/>
-                </a:solidFill>
-                <a:latin typeface="Calibri"/>
-              </a:rPr>
-              <a:t>–   </a:t>
-            </a:r>
-            <a:r>
-              <a:rPr sz="2000" b="1" i="0">
-                <a:solidFill>
-                  <a:srgbClr val="333333"/>
-                </a:solidFill>
-                <a:latin typeface="Calibri"/>
-              </a:rPr>
-              <a:t>Qué observar:</a:t>
-            </a:r>
-            <a:r>
-              <a:rPr sz="2000" b="0" i="0">
-                <a:solidFill>
-                  <a:srgbClr val="333333"/>
-                </a:solidFill>
-                <a:latin typeface="Calibri"/>
-              </a:rPr>
-              <a:t> una leccion accionable tiene verbo, artefacto, frecuencia o umbral, y una forma de comprobar que se hizo.</a:t>
-            </a:r>
-          </a:p>
-        </p:txBody>
-      </p:sp>
-      <p:sp>
-        <p:nvSpPr>
-          <p:cNvPr id="6" name="TextBox 5"/>
-          <p:cNvSpPr txBox="1"/>
-          <p:nvPr/>
-        </p:nvSpPr>
-        <p:spPr>
-          <a:xfrm>
-            <a:off x="11185855" y="6473952"/>
-            <a:ext cx="640080" cy="274320"/>
-          </a:xfrm>
-          <a:prstGeom prst="rect">
-            <a:avLst/>
-          </a:prstGeom>
-          <a:noFill/>
-        </p:spPr>
-        <p:txBody>
-          <a:bodyPr wrap="square">
-            <a:spAutoFit/>
-          </a:bodyPr>
-          <a:lstStyle/>
-          <a:p>
-            <a:pPr algn="r"/>
-            <a:r>
-              <a:rPr sz="1100" b="0" i="0">
-                <a:solidFill>
-                  <a:srgbClr val="666666"/>
-                </a:solidFill>
-                <a:latin typeface="Calibri"/>
-              </a:rPr>
-              <a:t>20</a:t>
-            </a:r>
-          </a:p>
-        </p:txBody>
-      </p:sp>
-    </p:spTree>
-  </p:cSld>
-  <p:clrMapOvr>
-    <a:masterClrMapping/>
-  </p:clrMapOvr>
-</p:sld>
-</file>
-
-<file path=ppt/slides/slide21.xml><?xml version="1.0" encoding="utf-8"?>
-<p:sld xmlns:a="http://schemas.openxmlformats.org/drawingml/2006/main" xmlns:p="http://schemas.openxmlformats.org/presentationml/2006/main" xmlns:r="http://schemas.openxmlformats.org/officeDocument/2006/relationships">
-  <p:cSld>
-    <p:bg>
-      <p:bgPr>
-        <a:solidFill>
-          <a:srgbClr val="FFFFFF"/>
-        </a:solidFill>
-        <a:effectLst/>
-      </p:bgPr>
-    </p:bg>
-    <p:spTree>
-      <p:nvGrpSpPr>
-        <p:cNvPr id="1" name=""/>
-        <p:cNvGrpSpPr/>
-        <p:nvPr/>
-      </p:nvGrpSpPr>
-      <p:grpSpPr/>
-      <p:sp>
-        <p:nvSpPr>
-          <p:cNvPr id="2" name="Rectangle 1"/>
-          <p:cNvSpPr/>
-          <p:nvPr/>
-        </p:nvSpPr>
-        <p:spPr>
-          <a:xfrm>
-            <a:off x="0" y="0"/>
-            <a:ext cx="12191695" cy="164592"/>
-          </a:xfrm>
-          <a:prstGeom prst="rect">
-            <a:avLst/>
-          </a:prstGeom>
-          <a:solidFill>
-            <a:srgbClr val="269CCB"/>
-          </a:solidFill>
-          <a:ln>
-            <a:noFill/>
-          </a:ln>
-        </p:spPr>
-        <p:style>
-          <a:lnRef idx="1">
-            <a:schemeClr val="accent1"/>
-          </a:lnRef>
-          <a:fillRef idx="3">
-            <a:schemeClr val="accent1"/>
-          </a:fillRef>
-          <a:effectRef idx="2">
-            <a:schemeClr val="accent1"/>
-          </a:effectRef>
-          <a:fontRef idx="minor">
-            <a:schemeClr val="lt1"/>
-          </a:fontRef>
-        </p:style>
-        <p:txBody>
-          <a:bodyPr rtlCol="0" anchor="ctr"/>
-          <a:lstStyle/>
-          <a:p>
-            <a:pPr algn="ctr"/>
-          </a:p>
-        </p:txBody>
-      </p:sp>
       <p:pic>
         <p:nvPicPr>
-          <p:cNvPr id="3" name="Picture 2" descr="logo_uniajc_color.png"/>
+          <p:cNvPr id="6" name="Picture 5" descr="notebook-planning-desk-coffee.jpg"/>
           <p:cNvPicPr>
             <a:picLocks noChangeAspect="1"/>
           </p:cNvPicPr>
@@ -8082,8 +8284,8 @@
         </p:blipFill>
         <p:spPr>
           <a:xfrm>
-            <a:off x="10271455" y="5998464"/>
-            <a:ext cx="1463040" cy="643233"/>
+            <a:off x="5870301" y="1646965"/>
+            <a:ext cx="5864193" cy="3911541"/>
           </a:xfrm>
           <a:prstGeom prst="rect">
             <a:avLst/>
@@ -8092,47 +8294,14 @@
       </p:pic>
       <p:sp>
         <p:nvSpPr>
-          <p:cNvPr id="4" name="TextBox 3"/>
+          <p:cNvPr id="7" name="TextBox 6"/>
           <p:cNvSpPr txBox="1"/>
           <p:nvPr/>
         </p:nvSpPr>
         <p:spPr>
           <a:xfrm>
-            <a:off x="457200" y="1737360"/>
-            <a:ext cx="11277295" cy="1097280"/>
-          </a:xfrm>
-          <a:prstGeom prst="rect">
-            <a:avLst/>
-          </a:prstGeom>
-          <a:noFill/>
-        </p:spPr>
-        <p:txBody>
-          <a:bodyPr wrap="square" anchor="ctr"/>
-          <a:lstStyle/>
-          <a:p>
-            <a:pPr algn="ctr"/>
-            <a:r>
-              <a:rPr sz="3400" b="1" i="0">
-                <a:solidFill>
-                  <a:srgbClr val="095292"/>
-                </a:solidFill>
-                <a:latin typeface="Calibri"/>
-              </a:rPr>
-              <a:t>Clase 13 · Analisis de casos reales · la clínica</a:t>
-            </a:r>
-          </a:p>
-        </p:txBody>
-      </p:sp>
-      <p:sp>
-        <p:nvSpPr>
-          <p:cNvPr id="5" name="TextBox 4"/>
-          <p:cNvSpPr txBox="1"/>
-          <p:nvPr/>
-        </p:nvSpPr>
-        <p:spPr>
-          <a:xfrm>
-            <a:off x="457200" y="3017520"/>
-            <a:ext cx="11277295" cy="1645920"/>
+            <a:off x="5870301" y="5961888"/>
+            <a:ext cx="5864193" cy="320040"/>
           </a:xfrm>
           <a:prstGeom prst="rect">
             <a:avLst/>
@@ -8145,65 +8314,29 @@
           </a:bodyPr>
           <a:lstStyle/>
           <a:p>
-            <a:pPr algn="ctr">
-              <a:spcAft>
-                <a:spcPts val="600"/>
-              </a:spcAft>
-            </a:pPr>
-            <a:r>
-              <a:rPr sz="1600" b="0" i="0">
-                <a:solidFill>
-                  <a:srgbClr val="333333"/>
+            <a:pPr algn="ctr"/>
+            <a:r>
+              <a:rPr sz="1100" b="0" i="1">
+                <a:solidFill>
+                  <a:srgbClr val="666666"/>
                 </a:solidFill>
                 <a:latin typeface="Calibri"/>
               </a:rPr>
-              <a:t>Clase autonoma</a:t>
-            </a:r>
-          </a:p>
-          <a:p>
-            <a:pPr algn="ctr">
-              <a:spcAft>
-                <a:spcPts val="600"/>
-              </a:spcAft>
-            </a:pPr>
-            <a:r>
-              <a:rPr sz="1600" b="0" i="0">
-                <a:solidFill>
-                  <a:srgbClr val="333333"/>
-                </a:solidFill>
-                <a:latin typeface="Calibri"/>
-              </a:rPr>
-              <a:t>Causa proxima y causa raiz</a:t>
-            </a:r>
-          </a:p>
-          <a:p>
-            <a:pPr algn="ctr">
-              <a:spcAft>
-                <a:spcPts val="600"/>
-              </a:spcAft>
-            </a:pPr>
-            <a:r>
-              <a:rPr sz="1600" b="0" i="0">
-                <a:solidFill>
-                  <a:srgbClr val="333333"/>
-                </a:solidFill>
-                <a:latin typeface="Calibri"/>
-              </a:rPr>
-              <a:t>Caso uno</a:t>
-            </a:r>
-          </a:p>
-        </p:txBody>
-      </p:sp>
-      <p:sp>
-        <p:nvSpPr>
-          <p:cNvPr id="6" name="TextBox 5"/>
+              <a:t>Foto: Cup of  Couple · Pexels</a:t>
+            </a:r>
+          </a:p>
+        </p:txBody>
+      </p:sp>
+      <p:sp>
+        <p:nvSpPr>
+          <p:cNvPr id="8" name="TextBox 7"/>
           <p:cNvSpPr txBox="1"/>
           <p:nvPr/>
         </p:nvSpPr>
         <p:spPr>
           <a:xfrm>
-            <a:off x="457200" y="4754880"/>
-            <a:ext cx="11277295" cy="640080"/>
+            <a:off x="457200" y="1353312"/>
+            <a:ext cx="5093061" cy="5047488"/>
           </a:xfrm>
           <a:prstGeom prst="rect">
             <a:avLst/>
@@ -8216,15 +8349,147 @@
           </a:bodyPr>
           <a:lstStyle/>
           <a:p>
-            <a:pPr algn="ctr"/>
+            <a:pPr>
+              <a:spcAft>
+                <a:spcPts val="800"/>
+              </a:spcAft>
+            </a:pPr>
+            <a:r>
+              <a:rPr sz="2000" b="0" i="0">
+                <a:solidFill>
+                  <a:srgbClr val="333333"/>
+                </a:solidFill>
+                <a:latin typeface="Calibri"/>
+              </a:rPr>
+              <a:t>–   </a:t>
+            </a:r>
             <a:r>
               <a:rPr sz="2000" b="1" i="0">
                 <a:solidFill>
-                  <a:srgbClr val="269CCB"/>
+                  <a:srgbClr val="333333"/>
                 </a:solidFill>
                 <a:latin typeface="Calibri"/>
               </a:rPr>
-              <a:t>Todo lo visto queda proyectado para repasar</a:t>
+              <a:t>Tema de hoy:</a:t>
+            </a:r>
+            <a:r>
+              <a:rPr sz="2000" b="0" i="0">
+                <a:solidFill>
+                  <a:srgbClr val="333333"/>
+                </a:solidFill>
+                <a:latin typeface="Calibri"/>
+              </a:rPr>
+              <a:t> Analisis de casos reales · la clínica</a:t>
+            </a:r>
+          </a:p>
+          <a:p>
+            <a:pPr>
+              <a:spcAft>
+                <a:spcPts val="800"/>
+              </a:spcAft>
+            </a:pPr>
+            <a:r>
+              <a:rPr sz="2000" b="0" i="0">
+                <a:solidFill>
+                  <a:srgbClr val="333333"/>
+                </a:solidFill>
+                <a:latin typeface="Calibri"/>
+              </a:rPr>
+              <a:t>–   Herramienta: </a:t>
+            </a:r>
+            <a:r>
+              <a:rPr sz="2000" b="1" i="0">
+                <a:solidFill>
+                  <a:srgbClr val="333333"/>
+                </a:solidFill>
+                <a:latin typeface="Calibri"/>
+              </a:rPr>
+              <a:t>Google Docs</a:t>
+            </a:r>
+            <a:r>
+              <a:rPr sz="2000" b="0" i="0">
+                <a:solidFill>
+                  <a:srgbClr val="333333"/>
+                </a:solidFill>
+                <a:latin typeface="Calibri"/>
+              </a:rPr>
+              <a:t> · Bloque </a:t>
+            </a:r>
+            <a:r>
+              <a:rPr sz="2000" b="1" i="0">
+                <a:solidFill>
+                  <a:srgbClr val="333333"/>
+                </a:solidFill>
+                <a:latin typeface="Calibri"/>
+              </a:rPr>
+              <a:t>120 min</a:t>
+            </a:r>
+          </a:p>
+          <a:p>
+            <a:pPr>
+              <a:spcAft>
+                <a:spcPts val="800"/>
+              </a:spcAft>
+            </a:pPr>
+            <a:r>
+              <a:rPr sz="2000" b="0" i="0">
+                <a:solidFill>
+                  <a:srgbClr val="333333"/>
+                </a:solidFill>
+                <a:latin typeface="Calibri"/>
+              </a:rPr>
+              <a:t>–   Gratis + navegador · free tier · sin software de pago obligatorio.</a:t>
+            </a:r>
+          </a:p>
+          <a:p>
+            <a:pPr>
+              <a:spcAft>
+                <a:spcPts val="800"/>
+              </a:spcAft>
+            </a:pPr>
+            <a:r>
+              <a:rPr sz="2000" b="0" i="0">
+                <a:solidFill>
+                  <a:srgbClr val="333333"/>
+                </a:solidFill>
+                <a:latin typeface="Calibri"/>
+              </a:rPr>
+              <a:t>–   Recorrido: teoría del tema, una lámina por concepto, y demo del docente sobre la base de la clínica.</a:t>
+            </a:r>
+          </a:p>
+        </p:txBody>
+      </p:sp>
+      <p:sp>
+        <p:nvSpPr>
+          <p:cNvPr id="9" name="TextBox 8"/>
+          <p:cNvSpPr txBox="1"/>
+          <p:nvPr/>
+        </p:nvSpPr>
+        <p:spPr>
+          <a:xfrm>
+            <a:off x="11185855" y="6473952"/>
+            <a:ext cx="640080" cy="274320"/>
+          </a:xfrm>
+          <a:prstGeom prst="rect">
+            <a:avLst/>
+          </a:prstGeom>
+          <a:noFill/>
+        </p:spPr>
+        <p:txBody>
+          <a:bodyPr wrap="square">
+            <a:spAutoFit/>
+          </a:bodyPr>
+          <a:lstStyle/>
+          <a:p>
+            <a:pPr algn="r"/>
+            <a:r>
+              <a:rPr sz="1100" b="0" i="0">
+                <a:solidFill>
+                  <a:srgbClr val="666666"/>
+                </a:solidFill>
+                <a:latin typeface="Calibri"/>
+              </a:rPr>
+              <a:t>2</a:t>
             </a:r>
           </a:p>
         </p:txBody>
@@ -9222,21 +9487,173 @@
                 </a:solidFill>
                 <a:latin typeface="Calibri"/>
               </a:rPr>
-              <a:t>Clase autonoma: este texto es fundamento y guia a la vez (1/2)</a:t>
-            </a:r>
-          </a:p>
-        </p:txBody>
-      </p:sp>
-      <p:sp>
-        <p:nvSpPr>
-          <p:cNvPr id="5" name="TextBox 4"/>
+              <a:t>Clase autonoma: este texto es fundamento y guia a la vez</a:t>
+            </a:r>
+          </a:p>
+        </p:txBody>
+      </p:sp>
+      <p:sp>
+        <p:nvSpPr>
+          <p:cNvPr id="5" name="Rounded Rectangle 4"/>
+          <p:cNvSpPr/>
+          <p:nvPr/>
+        </p:nvSpPr>
+        <p:spPr>
+          <a:xfrm>
+            <a:off x="5803166" y="1188719"/>
+            <a:ext cx="5998464" cy="4828032"/>
+          </a:xfrm>
+          <a:prstGeom prst="roundRect">
+            <a:avLst>
+              <a:gd name="adj" fmla="val 4000"/>
+            </a:avLst>
+          </a:prstGeom>
+          <a:solidFill>
+            <a:srgbClr val="E8EEF4"/>
+          </a:solidFill>
+          <a:ln>
+            <a:noFill/>
+          </a:ln>
+        </p:spPr>
+        <p:style>
+          <a:lnRef idx="1">
+            <a:schemeClr val="accent1"/>
+          </a:lnRef>
+          <a:fillRef idx="3">
+            <a:schemeClr val="accent1"/>
+          </a:fillRef>
+          <a:effectRef idx="2">
+            <a:schemeClr val="accent1"/>
+          </a:effectRef>
+          <a:fontRef idx="minor">
+            <a:schemeClr val="lt1"/>
+          </a:fontRef>
+        </p:style>
+        <p:txBody>
+          <a:bodyPr rtlCol="0" anchor="ctr"/>
+          <a:lstStyle/>
+          <a:p>
+            <a:pPr algn="ctr"/>
+          </a:p>
+        </p:txBody>
+      </p:sp>
+      <p:pic>
+        <p:nvPicPr>
+          <p:cNvPr id="6" name="Picture 5" descr="post-mortem-paso1.png"/>
+          <p:cNvPicPr>
+            <a:picLocks noChangeAspect="1"/>
+          </p:cNvPicPr>
+          <p:nvPr/>
+        </p:nvPicPr>
+        <p:blipFill>
+          <a:blip r:embed="rId2"/>
+          <a:stretch>
+            <a:fillRect/>
+          </a:stretch>
+        </p:blipFill>
+        <p:spPr>
+          <a:xfrm>
+            <a:off x="5876318" y="1261872"/>
+            <a:ext cx="5852160" cy="4681728"/>
+          </a:xfrm>
+          <a:prstGeom prst="rect">
+            <a:avLst/>
+          </a:prstGeom>
+        </p:spPr>
+      </p:pic>
+      <p:pic>
+        <p:nvPicPr>
+          <p:cNvPr id="7" name="Picture 6" descr="post-mortem-paso2.png"/>
+          <p:cNvPicPr>
+            <a:picLocks noChangeAspect="1"/>
+          </p:cNvPicPr>
+          <p:nvPr/>
+        </p:nvPicPr>
+        <p:blipFill>
+          <a:blip r:embed="rId3"/>
+          <a:stretch>
+            <a:fillRect/>
+          </a:stretch>
+        </p:blipFill>
+        <p:spPr>
+          <a:xfrm>
+            <a:off x="5876318" y="1261872"/>
+            <a:ext cx="5852160" cy="4681728"/>
+          </a:xfrm>
+          <a:prstGeom prst="rect">
+            <a:avLst/>
+          </a:prstGeom>
+        </p:spPr>
+      </p:pic>
+      <p:pic>
+        <p:nvPicPr>
+          <p:cNvPr id="8" name="Picture 7" descr="post-mortem-paso3.png"/>
+          <p:cNvPicPr>
+            <a:picLocks noChangeAspect="1"/>
+          </p:cNvPicPr>
+          <p:nvPr/>
+        </p:nvPicPr>
+        <p:blipFill>
+          <a:blip r:embed="rId4"/>
+          <a:stretch>
+            <a:fillRect/>
+          </a:stretch>
+        </p:blipFill>
+        <p:spPr>
+          <a:xfrm>
+            <a:off x="5876318" y="1261872"/>
+            <a:ext cx="5852160" cy="4681728"/>
+          </a:xfrm>
+          <a:prstGeom prst="rect">
+            <a:avLst/>
+          </a:prstGeom>
+        </p:spPr>
+      </p:pic>
+      <p:sp>
+        <p:nvSpPr>
+          <p:cNvPr id="13" name="TextBox 12"/>
           <p:cNvSpPr txBox="1"/>
           <p:nvPr/>
         </p:nvSpPr>
         <p:spPr>
           <a:xfrm>
-            <a:off x="457200" y="1170432"/>
-            <a:ext cx="11277295" cy="5230368"/>
+            <a:off x="5870301" y="5961888"/>
+            <a:ext cx="5864193" cy="320040"/>
+          </a:xfrm>
+          <a:prstGeom prst="rect">
+            <a:avLst/>
+          </a:prstGeom>
+          <a:noFill/>
+        </p:spPr>
+        <p:txBody>
+          <a:bodyPr wrap="square">
+            <a:spAutoFit/>
+          </a:bodyPr>
+          <a:lstStyle/>
+          <a:p>
+            <a:pPr algn="ctr"/>
+            <a:r>
+              <a:rPr sz="1100" b="0" i="1">
+                <a:solidFill>
+                  <a:srgbClr val="666666"/>
+                </a:solidFill>
+                <a:latin typeface="Calibri"/>
+              </a:rPr>
+              <a:t>Clic para avanzar la animación</a:t>
+            </a:r>
+          </a:p>
+        </p:txBody>
+      </p:sp>
+      <p:sp>
+        <p:nvSpPr>
+          <p:cNvPr id="14" name="TextBox 13"/>
+          <p:cNvSpPr txBox="1"/>
+          <p:nvPr/>
+        </p:nvSpPr>
+        <p:spPr>
+          <a:xfrm>
+            <a:off x="457200" y="1353312"/>
+            <a:ext cx="5093061" cy="5047488"/>
           </a:xfrm>
           <a:prstGeom prst="rect">
             <a:avLst/>
@@ -9261,7 +9678,7 @@
                 </a:solidFill>
                 <a:latin typeface="Calibri"/>
               </a:rPr>
-              <a:t>–   Esta clase es autonoma y cae en festivo, asi que no hay encuentro sincronico: este texto es a la vez el fundamento del docente y la lectura que el estudiante recibe, y por eso debe alcanzar para trabajar solo.</a:t>
+              <a:t>–   Esta clase es autonoma y cae en festivo, asi que no hay encuentro sincronico.</a:t>
             </a:r>
           </a:p>
           <a:p>
@@ -9277,7 +9694,7 @@
                 </a:solidFill>
                 <a:latin typeface="Calibri"/>
               </a:rPr>
-              <a:t>–   El tema es el analisis de casos reales, y el primer punto es que esto no es relleno de fin de semestre sino una practica profesional con nombre propio.</a:t>
+              <a:t>–   El tema es el analisis de casos reales, y el primer punto es que esto no es relleno de fin de semestre sino una practica profesional con nombre…</a:t>
             </a:r>
           </a:p>
           <a:p>
@@ -9309,14 +9726,14 @@
                 </a:solidFill>
                 <a:latin typeface="Calibri"/>
               </a:rPr>
-              <a:t>–   Que es un documento breve producido despues del incidente y que responde cuatro preguntas: que paso, cuando y con que impacto medible, por que fue posible, y que se va a cambiar para que no vuelva a ocurrir de la misma manera.</a:t>
-            </a:r>
-          </a:p>
-        </p:txBody>
-      </p:sp>
-      <p:sp>
-        <p:nvSpPr>
-          <p:cNvPr id="6" name="TextBox 5"/>
+              <a:t>–   Que es un documento breve producido despues del incidente y que responde cuatro preguntas.</a:t>
+            </a:r>
+          </a:p>
+        </p:txBody>
+      </p:sp>
+      <p:sp>
+        <p:nvSpPr>
+          <p:cNvPr id="15" name="TextBox 14"/>
           <p:cNvSpPr txBox="1"/>
           <p:nvPr/>
         </p:nvSpPr>
@@ -9354,6 +9771,142 @@
   <p:clrMapOvr>
     <a:masterClrMapping/>
   </p:clrMapOvr>
+  <p:timing>
+    <p:tnLst>
+      <p:par>
+        <p:cTn id="1" dur="indefinite" restart="never" nodeType="tmRoot">
+          <p:childTnLst>
+            <p:seq concurrent="1" nextAc="seek">
+              <p:cTn id="2" dur="indefinite" nodeType="mainSeq">
+                <p:childTnLst>
+                  <p:par>
+                    <p:cTn id="3" fill="hold">
+                      <p:stCondLst>
+                        <p:cond delay="indefinite"/>
+                      </p:stCondLst>
+                      <p:childTnLst>
+                        <p:par>
+                          <p:cTn id="4" fill="hold">
+                            <p:stCondLst>
+                              <p:cond delay="0"/>
+                            </p:stCondLst>
+                            <p:childTnLst>
+                              <p:par>
+                                <p:cTn id="5" presetID="10" presetClass="entr" presetSubtype="0" fill="hold" nodeType="clickEffect">
+                                  <p:stCondLst>
+                                    <p:cond delay="0"/>
+                                  </p:stCondLst>
+                                  <p:childTnLst>
+                                    <p:set>
+                                      <p:cBhvr>
+                                        <p:cTn id="6" dur="1" fill="hold">
+                                          <p:stCondLst>
+                                            <p:cond delay="0"/>
+                                          </p:stCondLst>
+                                        </p:cTn>
+                                        <p:tgtEl>
+                                          <p:spTgt spid="7"/>
+                                        </p:tgtEl>
+                                        <p:attrNameLst>
+                                          <p:attrName>style.visibility</p:attrName>
+                                        </p:attrNameLst>
+                                      </p:cBhvr>
+                                      <p:to>
+                                        <p:strVal val="visible"/>
+                                      </p:to>
+                                    </p:set>
+                                    <p:animEffect transition="in" filter="fade">
+                                      <p:cBhvr>
+                                        <p:cTn id="7" dur="450"/>
+                                        <p:tgtEl>
+                                          <p:spTgt spid="7"/>
+                                        </p:tgtEl>
+                                      </p:cBhvr>
+                                    </p:animEffect>
+                                  </p:childTnLst>
+                                </p:cTn>
+                              </p:par>
+                            </p:childTnLst>
+                          </p:cTn>
+                        </p:par>
+                      </p:childTnLst>
+                    </p:cTn>
+                  </p:par>
+                  <p:par>
+                    <p:cTn id="8" fill="hold">
+                      <p:stCondLst>
+                        <p:cond delay="indefinite"/>
+                      </p:stCondLst>
+                      <p:childTnLst>
+                        <p:par>
+                          <p:cTn id="9" fill="hold">
+                            <p:stCondLst>
+                              <p:cond delay="0"/>
+                            </p:stCondLst>
+                            <p:childTnLst>
+                              <p:par>
+                                <p:cTn id="10" presetID="10" presetClass="entr" presetSubtype="0" fill="hold" nodeType="clickEffect">
+                                  <p:stCondLst>
+                                    <p:cond delay="0"/>
+                                  </p:stCondLst>
+                                  <p:childTnLst>
+                                    <p:set>
+                                      <p:cBhvr>
+                                        <p:cTn id="11" dur="1" fill="hold">
+                                          <p:stCondLst>
+                                            <p:cond delay="0"/>
+                                          </p:stCondLst>
+                                        </p:cTn>
+                                        <p:tgtEl>
+                                          <p:spTgt spid="8"/>
+                                        </p:tgtEl>
+                                        <p:attrNameLst>
+                                          <p:attrName>style.visibility</p:attrName>
+                                        </p:attrNameLst>
+                                      </p:cBhvr>
+                                      <p:to>
+                                        <p:strVal val="visible"/>
+                                      </p:to>
+                                    </p:set>
+                                    <p:animEffect transition="in" filter="fade">
+                                      <p:cBhvr>
+                                        <p:cTn id="12" dur="450"/>
+                                        <p:tgtEl>
+                                          <p:spTgt spid="8"/>
+                                        </p:tgtEl>
+                                      </p:cBhvr>
+                                    </p:animEffect>
+                                  </p:childTnLst>
+                                </p:cTn>
+                              </p:par>
+                            </p:childTnLst>
+                          </p:cTn>
+                        </p:par>
+                      </p:childTnLst>
+                    </p:cTn>
+                  </p:par>
+                </p:childTnLst>
+              </p:cTn>
+              <p:prevCondLst>
+                <p:cond evt="onPrev" delay="0">
+                  <p:tgtEl>
+                    <p:sldTgt/>
+                  </p:tgtEl>
+                </p:cond>
+              </p:prevCondLst>
+              <p:nextCondLst>
+                <p:cond evt="onNext" delay="0">
+                  <p:tgtEl>
+                    <p:sldTgt/>
+                  </p:tgtEl>
+                </p:cond>
+              </p:nextCondLst>
+            </p:seq>
+          </p:childTnLst>
+        </p:cTn>
+      </p:par>
+    </p:tnLst>
+  </p:timing>
 </p:sld>
 </file>
 
@@ -9490,21 +10043,173 @@
                 </a:solidFill>
                 <a:latin typeface="Calibri"/>
               </a:rPr>
-              <a:t>Clase autonoma: este texto es fundamento y guia a la vez (2/2)</a:t>
-            </a:r>
-          </a:p>
-        </p:txBody>
-      </p:sp>
-      <p:sp>
-        <p:nvSpPr>
-          <p:cNvPr id="5" name="TextBox 4"/>
+              <a:t>Causa proxima y causa raiz: la distincion que separa el analisis de la anecdota</a:t>
+            </a:r>
+          </a:p>
+        </p:txBody>
+      </p:sp>
+      <p:sp>
+        <p:nvSpPr>
+          <p:cNvPr id="5" name="Rounded Rectangle 4"/>
+          <p:cNvSpPr/>
+          <p:nvPr/>
+        </p:nvSpPr>
+        <p:spPr>
+          <a:xfrm>
+            <a:off x="5803166" y="1188719"/>
+            <a:ext cx="5998464" cy="4828032"/>
+          </a:xfrm>
+          <a:prstGeom prst="roundRect">
+            <a:avLst>
+              <a:gd name="adj" fmla="val 4000"/>
+            </a:avLst>
+          </a:prstGeom>
+          <a:solidFill>
+            <a:srgbClr val="E8EEF4"/>
+          </a:solidFill>
+          <a:ln>
+            <a:noFill/>
+          </a:ln>
+        </p:spPr>
+        <p:style>
+          <a:lnRef idx="1">
+            <a:schemeClr val="accent1"/>
+          </a:lnRef>
+          <a:fillRef idx="3">
+            <a:schemeClr val="accent1"/>
+          </a:fillRef>
+          <a:effectRef idx="2">
+            <a:schemeClr val="accent1"/>
+          </a:effectRef>
+          <a:fontRef idx="minor">
+            <a:schemeClr val="lt1"/>
+          </a:fontRef>
+        </p:style>
+        <p:txBody>
+          <a:bodyPr rtlCol="0" anchor="ctr"/>
+          <a:lstStyle/>
+          <a:p>
+            <a:pPr algn="ctr"/>
+          </a:p>
+        </p:txBody>
+      </p:sp>
+      <p:pic>
+        <p:nvPicPr>
+          <p:cNvPr id="6" name="Picture 5" descr="causa-raiz-paso1.png"/>
+          <p:cNvPicPr>
+            <a:picLocks noChangeAspect="1"/>
+          </p:cNvPicPr>
+          <p:nvPr/>
+        </p:nvPicPr>
+        <p:blipFill>
+          <a:blip r:embed="rId2"/>
+          <a:stretch>
+            <a:fillRect/>
+          </a:stretch>
+        </p:blipFill>
+        <p:spPr>
+          <a:xfrm>
+            <a:off x="5876318" y="1261872"/>
+            <a:ext cx="5852160" cy="4681728"/>
+          </a:xfrm>
+          <a:prstGeom prst="rect">
+            <a:avLst/>
+          </a:prstGeom>
+        </p:spPr>
+      </p:pic>
+      <p:pic>
+        <p:nvPicPr>
+          <p:cNvPr id="7" name="Picture 6" descr="causa-raiz-paso2.png"/>
+          <p:cNvPicPr>
+            <a:picLocks noChangeAspect="1"/>
+          </p:cNvPicPr>
+          <p:nvPr/>
+        </p:nvPicPr>
+        <p:blipFill>
+          <a:blip r:embed="rId3"/>
+          <a:stretch>
+            <a:fillRect/>
+          </a:stretch>
+        </p:blipFill>
+        <p:spPr>
+          <a:xfrm>
+            <a:off x="5876318" y="1261872"/>
+            <a:ext cx="5852160" cy="4681728"/>
+          </a:xfrm>
+          <a:prstGeom prst="rect">
+            <a:avLst/>
+          </a:prstGeom>
+        </p:spPr>
+      </p:pic>
+      <p:pic>
+        <p:nvPicPr>
+          <p:cNvPr id="8" name="Picture 7" descr="causa-raiz-paso3.png"/>
+          <p:cNvPicPr>
+            <a:picLocks noChangeAspect="1"/>
+          </p:cNvPicPr>
+          <p:nvPr/>
+        </p:nvPicPr>
+        <p:blipFill>
+          <a:blip r:embed="rId4"/>
+          <a:stretch>
+            <a:fillRect/>
+          </a:stretch>
+        </p:blipFill>
+        <p:spPr>
+          <a:xfrm>
+            <a:off x="5876318" y="1261872"/>
+            <a:ext cx="5852160" cy="4681728"/>
+          </a:xfrm>
+          <a:prstGeom prst="rect">
+            <a:avLst/>
+          </a:prstGeom>
+        </p:spPr>
+      </p:pic>
+      <p:sp>
+        <p:nvSpPr>
+          <p:cNvPr id="13" name="TextBox 12"/>
           <p:cNvSpPr txBox="1"/>
           <p:nvPr/>
         </p:nvSpPr>
         <p:spPr>
           <a:xfrm>
-            <a:off x="457200" y="1170432"/>
-            <a:ext cx="11277295" cy="5230368"/>
+            <a:off x="5870301" y="5961888"/>
+            <a:ext cx="5864193" cy="320040"/>
+          </a:xfrm>
+          <a:prstGeom prst="rect">
+            <a:avLst/>
+          </a:prstGeom>
+          <a:noFill/>
+        </p:spPr>
+        <p:txBody>
+          <a:bodyPr wrap="square">
+            <a:spAutoFit/>
+          </a:bodyPr>
+          <a:lstStyle/>
+          <a:p>
+            <a:pPr algn="ctr"/>
+            <a:r>
+              <a:rPr sz="1100" b="0" i="1">
+                <a:solidFill>
+                  <a:srgbClr val="666666"/>
+                </a:solidFill>
+                <a:latin typeface="Calibri"/>
+              </a:rPr>
+              <a:t>Clic para avanzar la animación</a:t>
+            </a:r>
+          </a:p>
+        </p:txBody>
+      </p:sp>
+      <p:sp>
+        <p:nvSpPr>
+          <p:cNvPr id="14" name="TextBox 13"/>
+          <p:cNvSpPr txBox="1"/>
+          <p:nvPr/>
+        </p:nvSpPr>
+        <p:spPr>
+          <a:xfrm>
+            <a:off x="457200" y="1353312"/>
+            <a:ext cx="5093061" cy="5047488"/>
           </a:xfrm>
           <a:prstGeom prst="rect">
             <a:avLst/>
@@ -9529,7 +10234,7 @@
                 </a:solidFill>
                 <a:latin typeface="Calibri"/>
               </a:rPr>
-              <a:t>–   La palabra clave del oficio es blameless, sin culpables: la regla es que se analiza el sistema y no la persona.</a:t>
+              <a:t>–   Antes de mirar los casos hay que instalar la distincion que separa un buen analisis de una anecdota: causa proxima y causa raiz.</a:t>
             </a:r>
           </a:p>
           <a:p>
@@ -9545,7 +10250,7 @@
                 </a:solidFill>
                 <a:latin typeface="Calibri"/>
               </a:rPr>
-              <a:t>–   No es cortesia ni buena onda corporativa, es un calculo practico, porque en cuanto el documento sirve para castigar a alguien la gente deja de reportar los errores pequenos y la organizacion pierde la unica fuente de informacion que tiene para evitar los grandes.</a:t>
+              <a:t>–   La causa proxima es el ultimo evento de la cadena, el que se ve.</a:t>
             </a:r>
           </a:p>
           <a:p>
@@ -9561,14 +10266,30 @@
                 </a:solidFill>
                 <a:latin typeface="Calibri"/>
               </a:rPr>
-              <a:t>–   Un incidente, para nuestros fines, es cualquier evento que degrada el servicio o pone en riesgo los datos, y merece post-mortem tanto el que llego al usuario como el que se detuvo a tiempo.</a:t>
-            </a:r>
-          </a:p>
-        </p:txBody>
-      </p:sp>
-      <p:sp>
-        <p:nvSpPr>
-          <p:cNvPr id="6" name="TextBox 5"/>
+              <a:t>–   La causa raiz es la condicion que permitio que ese evento tuviera consecuencias.</a:t>
+            </a:r>
+          </a:p>
+          <a:p>
+            <a:pPr>
+              <a:spcAft>
+                <a:spcPts val="800"/>
+              </a:spcAft>
+            </a:pPr>
+            <a:r>
+              <a:rPr sz="2000" b="0" i="0">
+                <a:solidFill>
+                  <a:srgbClr val="333333"/>
+                </a:solidFill>
+                <a:latin typeface="Calibri"/>
+              </a:rPr>
+              <a:t>–   Un ejemplo con la clínica: el disco del servidor falla un viernes y se pierden tres semanas de historias clinicas.</a:t>
+            </a:r>
+          </a:p>
+        </p:txBody>
+      </p:sp>
+      <p:sp>
+        <p:nvSpPr>
+          <p:cNvPr id="15" name="TextBox 14"/>
           <p:cNvSpPr txBox="1"/>
           <p:nvPr/>
         </p:nvSpPr>
@@ -9606,6 +10327,142 @@
   <p:clrMapOvr>
     <a:masterClrMapping/>
   </p:clrMapOvr>
+  <p:timing>
+    <p:tnLst>
+      <p:par>
+        <p:cTn id="1" dur="indefinite" restart="never" nodeType="tmRoot">
+          <p:childTnLst>
+            <p:seq concurrent="1" nextAc="seek">
+              <p:cTn id="2" dur="indefinite" nodeType="mainSeq">
+                <p:childTnLst>
+                  <p:par>
+                    <p:cTn id="3" fill="hold">
+                      <p:stCondLst>
+                        <p:cond delay="indefinite"/>
+                      </p:stCondLst>
+                      <p:childTnLst>
+                        <p:par>
+                          <p:cTn id="4" fill="hold">
+                            <p:stCondLst>
+                              <p:cond delay="0"/>
+                            </p:stCondLst>
+                            <p:childTnLst>
+                              <p:par>
+                                <p:cTn id="5" presetID="10" presetClass="entr" presetSubtype="0" fill="hold" nodeType="clickEffect">
+                                  <p:stCondLst>
+                                    <p:cond delay="0"/>
+                                  </p:stCondLst>
+                                  <p:childTnLst>
+                                    <p:set>
+                                      <p:cBhvr>
+                                        <p:cTn id="6" dur="1" fill="hold">
+                                          <p:stCondLst>
+                                            <p:cond delay="0"/>
+                                          </p:stCondLst>
+                                        </p:cTn>
+                                        <p:tgtEl>
+                                          <p:spTgt spid="7"/>
+                                        </p:tgtEl>
+                                        <p:attrNameLst>
+                                          <p:attrName>style.visibility</p:attrName>
+                                        </p:attrNameLst>
+                                      </p:cBhvr>
+                                      <p:to>
+                                        <p:strVal val="visible"/>
+                                      </p:to>
+                                    </p:set>
+                                    <p:animEffect transition="in" filter="fade">
+                                      <p:cBhvr>
+                                        <p:cTn id="7" dur="450"/>
+                                        <p:tgtEl>
+                                          <p:spTgt spid="7"/>
+                                        </p:tgtEl>
+                                      </p:cBhvr>
+                                    </p:animEffect>
+                                  </p:childTnLst>
+                                </p:cTn>
+                              </p:par>
+                            </p:childTnLst>
+                          </p:cTn>
+                        </p:par>
+                      </p:childTnLst>
+                    </p:cTn>
+                  </p:par>
+                  <p:par>
+                    <p:cTn id="8" fill="hold">
+                      <p:stCondLst>
+                        <p:cond delay="indefinite"/>
+                      </p:stCondLst>
+                      <p:childTnLst>
+                        <p:par>
+                          <p:cTn id="9" fill="hold">
+                            <p:stCondLst>
+                              <p:cond delay="0"/>
+                            </p:stCondLst>
+                            <p:childTnLst>
+                              <p:par>
+                                <p:cTn id="10" presetID="10" presetClass="entr" presetSubtype="0" fill="hold" nodeType="clickEffect">
+                                  <p:stCondLst>
+                                    <p:cond delay="0"/>
+                                  </p:stCondLst>
+                                  <p:childTnLst>
+                                    <p:set>
+                                      <p:cBhvr>
+                                        <p:cTn id="11" dur="1" fill="hold">
+                                          <p:stCondLst>
+                                            <p:cond delay="0"/>
+                                          </p:stCondLst>
+                                        </p:cTn>
+                                        <p:tgtEl>
+                                          <p:spTgt spid="8"/>
+                                        </p:tgtEl>
+                                        <p:attrNameLst>
+                                          <p:attrName>style.visibility</p:attrName>
+                                        </p:attrNameLst>
+                                      </p:cBhvr>
+                                      <p:to>
+                                        <p:strVal val="visible"/>
+                                      </p:to>
+                                    </p:set>
+                                    <p:animEffect transition="in" filter="fade">
+                                      <p:cBhvr>
+                                        <p:cTn id="12" dur="450"/>
+                                        <p:tgtEl>
+                                          <p:spTgt spid="8"/>
+                                        </p:tgtEl>
+                                      </p:cBhvr>
+                                    </p:animEffect>
+                                  </p:childTnLst>
+                                </p:cTn>
+                              </p:par>
+                            </p:childTnLst>
+                          </p:cTn>
+                        </p:par>
+                      </p:childTnLst>
+                    </p:cTn>
+                  </p:par>
+                </p:childTnLst>
+              </p:cTn>
+              <p:prevCondLst>
+                <p:cond evt="onPrev" delay="0">
+                  <p:tgtEl>
+                    <p:sldTgt/>
+                  </p:tgtEl>
+                </p:cond>
+              </p:prevCondLst>
+              <p:nextCondLst>
+                <p:cond evt="onNext" delay="0">
+                  <p:tgtEl>
+                    <p:sldTgt/>
+                  </p:tgtEl>
+                </p:cond>
+              </p:nextCondLst>
+            </p:seq>
+          </p:childTnLst>
+        </p:cTn>
+      </p:par>
+    </p:tnLst>
+  </p:timing>
 </p:sld>
 </file>
 
@@ -9742,21 +10599,173 @@
                 </a:solidFill>
                 <a:latin typeface="Calibri"/>
               </a:rPr>
-              <a:t>Causa proxima y causa raiz: la distincion que separa el analisis de la anecdota (1/2)</a:t>
-            </a:r>
-          </a:p>
-        </p:txBody>
-      </p:sp>
-      <p:sp>
-        <p:nvSpPr>
-          <p:cNvPr id="5" name="TextBox 4"/>
+              <a:t>Caso uno: el respaldo que nunca se restauro (GitLab, 2017)</a:t>
+            </a:r>
+          </a:p>
+        </p:txBody>
+      </p:sp>
+      <p:sp>
+        <p:nvSpPr>
+          <p:cNvPr id="5" name="Rounded Rectangle 4"/>
+          <p:cNvSpPr/>
+          <p:nvPr/>
+        </p:nvSpPr>
+        <p:spPr>
+          <a:xfrm>
+            <a:off x="5803166" y="1188719"/>
+            <a:ext cx="5998464" cy="4828032"/>
+          </a:xfrm>
+          <a:prstGeom prst="roundRect">
+            <a:avLst>
+              <a:gd name="adj" fmla="val 4000"/>
+            </a:avLst>
+          </a:prstGeom>
+          <a:solidFill>
+            <a:srgbClr val="E8EEF4"/>
+          </a:solidFill>
+          <a:ln>
+            <a:noFill/>
+          </a:ln>
+        </p:spPr>
+        <p:style>
+          <a:lnRef idx="1">
+            <a:schemeClr val="accent1"/>
+          </a:lnRef>
+          <a:fillRef idx="3">
+            <a:schemeClr val="accent1"/>
+          </a:fillRef>
+          <a:effectRef idx="2">
+            <a:schemeClr val="accent1"/>
+          </a:effectRef>
+          <a:fontRef idx="minor">
+            <a:schemeClr val="lt1"/>
+          </a:fontRef>
+        </p:style>
+        <p:txBody>
+          <a:bodyPr rtlCol="0" anchor="ctr"/>
+          <a:lstStyle/>
+          <a:p>
+            <a:pPr algn="ctr"/>
+          </a:p>
+        </p:txBody>
+      </p:sp>
+      <p:pic>
+        <p:nvPicPr>
+          <p:cNvPr id="6" name="Picture 5" descr="gitlab-2017-paso1.png"/>
+          <p:cNvPicPr>
+            <a:picLocks noChangeAspect="1"/>
+          </p:cNvPicPr>
+          <p:nvPr/>
+        </p:nvPicPr>
+        <p:blipFill>
+          <a:blip r:embed="rId2"/>
+          <a:stretch>
+            <a:fillRect/>
+          </a:stretch>
+        </p:blipFill>
+        <p:spPr>
+          <a:xfrm>
+            <a:off x="5876318" y="1261872"/>
+            <a:ext cx="5852160" cy="4681728"/>
+          </a:xfrm>
+          <a:prstGeom prst="rect">
+            <a:avLst/>
+          </a:prstGeom>
+        </p:spPr>
+      </p:pic>
+      <p:pic>
+        <p:nvPicPr>
+          <p:cNvPr id="7" name="Picture 6" descr="gitlab-2017-paso2.png"/>
+          <p:cNvPicPr>
+            <a:picLocks noChangeAspect="1"/>
+          </p:cNvPicPr>
+          <p:nvPr/>
+        </p:nvPicPr>
+        <p:blipFill>
+          <a:blip r:embed="rId3"/>
+          <a:stretch>
+            <a:fillRect/>
+          </a:stretch>
+        </p:blipFill>
+        <p:spPr>
+          <a:xfrm>
+            <a:off x="5876318" y="1261872"/>
+            <a:ext cx="5852160" cy="4681728"/>
+          </a:xfrm>
+          <a:prstGeom prst="rect">
+            <a:avLst/>
+          </a:prstGeom>
+        </p:spPr>
+      </p:pic>
+      <p:pic>
+        <p:nvPicPr>
+          <p:cNvPr id="8" name="Picture 7" descr="gitlab-2017-paso3.png"/>
+          <p:cNvPicPr>
+            <a:picLocks noChangeAspect="1"/>
+          </p:cNvPicPr>
+          <p:nvPr/>
+        </p:nvPicPr>
+        <p:blipFill>
+          <a:blip r:embed="rId4"/>
+          <a:stretch>
+            <a:fillRect/>
+          </a:stretch>
+        </p:blipFill>
+        <p:spPr>
+          <a:xfrm>
+            <a:off x="5876318" y="1261872"/>
+            <a:ext cx="5852160" cy="4681728"/>
+          </a:xfrm>
+          <a:prstGeom prst="rect">
+            <a:avLst/>
+          </a:prstGeom>
+        </p:spPr>
+      </p:pic>
+      <p:sp>
+        <p:nvSpPr>
+          <p:cNvPr id="13" name="TextBox 12"/>
           <p:cNvSpPr txBox="1"/>
           <p:nvPr/>
         </p:nvSpPr>
         <p:spPr>
           <a:xfrm>
-            <a:off x="457200" y="1170432"/>
-            <a:ext cx="11277295" cy="5230368"/>
+            <a:off x="5870301" y="5961888"/>
+            <a:ext cx="5864193" cy="320040"/>
+          </a:xfrm>
+          <a:prstGeom prst="rect">
+            <a:avLst/>
+          </a:prstGeom>
+          <a:noFill/>
+        </p:spPr>
+        <p:txBody>
+          <a:bodyPr wrap="square">
+            <a:spAutoFit/>
+          </a:bodyPr>
+          <a:lstStyle/>
+          <a:p>
+            <a:pPr algn="ctr"/>
+            <a:r>
+              <a:rPr sz="1100" b="0" i="1">
+                <a:solidFill>
+                  <a:srgbClr val="666666"/>
+                </a:solidFill>
+                <a:latin typeface="Calibri"/>
+              </a:rPr>
+              <a:t>Clic para avanzar la animación</a:t>
+            </a:r>
+          </a:p>
+        </p:txBody>
+      </p:sp>
+      <p:sp>
+        <p:nvSpPr>
+          <p:cNvPr id="14" name="TextBox 13"/>
+          <p:cNvSpPr txBox="1"/>
+          <p:nvPr/>
+        </p:nvSpPr>
+        <p:spPr>
+          <a:xfrm>
+            <a:off x="457200" y="1353312"/>
+            <a:ext cx="5093061" cy="5047488"/>
           </a:xfrm>
           <a:prstGeom prst="rect">
             <a:avLst/>
@@ -9781,7 +10790,7 @@
                 </a:solidFill>
                 <a:latin typeface="Calibri"/>
               </a:rPr>
-              <a:t>–   Antes de mirar los casos hay que instalar la distincion que separa un buen analisis de una anecdota: causa proxima y causa raiz.</a:t>
+              <a:t>–   Caso uno, el respaldo que nunca se restauro, con el ejemplo publico mejor documentado que existe.</a:t>
             </a:r>
           </a:p>
           <a:p>
@@ -9797,7 +10806,7 @@
                 </a:solidFill>
                 <a:latin typeface="Calibri"/>
               </a:rPr>
-              <a:t>–   La causa proxima es el ultimo evento de la cadena, el que se ve.</a:t>
+              <a:t>–   El 31 de enero de 2017 GitLab sufrio la perdida de datos de su servicio en la nube: durante la atencion de un problema de replicacion</a:t>
             </a:r>
           </a:p>
           <a:p>
@@ -9813,62 +10822,14 @@
                 </a:solidFill>
                 <a:latin typeface="Calibri"/>
               </a:rPr>
-              <a:t>–   La causa raiz es la condicion que permitio que ese evento tuviera consecuencias.</a:t>
-            </a:r>
-          </a:p>
-          <a:p>
-            <a:pPr>
-              <a:spcAft>
-                <a:spcPts val="800"/>
-              </a:spcAft>
-            </a:pPr>
-            <a:r>
-              <a:rPr sz="2000" b="0" i="0">
-                <a:solidFill>
-                  <a:srgbClr val="333333"/>
-                </a:solidFill>
-                <a:latin typeface="Calibri"/>
-              </a:rPr>
-              <a:t>–   Un ejemplo con la clínica: el disco del servidor falla un viernes y se pierden tres semanas de historias clinicas.</a:t>
-            </a:r>
-          </a:p>
-          <a:p>
-            <a:pPr>
-              <a:spcAft>
-                <a:spcPts val="800"/>
-              </a:spcAft>
-            </a:pPr>
-            <a:r>
-              <a:rPr sz="2000" b="0" i="0">
-                <a:solidFill>
-                  <a:srgbClr val="333333"/>
-                </a:solidFill>
-                <a:latin typeface="Calibri"/>
-              </a:rPr>
-              <a:t>–   La causa proxima es el disco.</a:t>
-            </a:r>
-          </a:p>
-          <a:p>
-            <a:pPr>
-              <a:spcAft>
-                <a:spcPts val="800"/>
-              </a:spcAft>
-            </a:pPr>
-            <a:r>
-              <a:rPr sz="2000" b="0" i="0">
-                <a:solidFill>
-                  <a:srgbClr val="333333"/>
-                </a:solidFill>
-                <a:latin typeface="Calibri"/>
-              </a:rPr>
-              <a:t>–   La causa raiz es que existia un archivo de respaldo que nadie habia restaurado nunca para comprobar que sirviera, y que nadie vigilaba si el respaldo del dia se habia ejecutado.</a:t>
-            </a:r>
-          </a:p>
-        </p:txBody>
-      </p:sp>
-      <p:sp>
-        <p:nvSpPr>
-          <p:cNvPr id="6" name="TextBox 5"/>
+              <a:t>–   Un ingeniero ejecuto un borrado recursivo sobre el directorio de datos del servidor equivocado y elimino cerca de trescientos gigabytes.</a:t>
+            </a:r>
+          </a:p>
+        </p:txBody>
+      </p:sp>
+      <p:sp>
+        <p:nvSpPr>
+          <p:cNvPr id="15" name="TextBox 14"/>
           <p:cNvSpPr txBox="1"/>
           <p:nvPr/>
         </p:nvSpPr>
@@ -9906,6 +10867,142 @@
   <p:clrMapOvr>
     <a:masterClrMapping/>
   </p:clrMapOvr>
+  <p:timing>
+    <p:tnLst>
+      <p:par>
+        <p:cTn id="1" dur="indefinite" restart="never" nodeType="tmRoot">
+          <p:childTnLst>
+            <p:seq concurrent="1" nextAc="seek">
+              <p:cTn id="2" dur="indefinite" nodeType="mainSeq">
+                <p:childTnLst>
+                  <p:par>
+                    <p:cTn id="3" fill="hold">
+                      <p:stCondLst>
+                        <p:cond delay="indefinite"/>
+                      </p:stCondLst>
+                      <p:childTnLst>
+                        <p:par>
+                          <p:cTn id="4" fill="hold">
+                            <p:stCondLst>
+                              <p:cond delay="0"/>
+                            </p:stCondLst>
+                            <p:childTnLst>
+                              <p:par>
+                                <p:cTn id="5" presetID="10" presetClass="entr" presetSubtype="0" fill="hold" nodeType="clickEffect">
+                                  <p:stCondLst>
+                                    <p:cond delay="0"/>
+                                  </p:stCondLst>
+                                  <p:childTnLst>
+                                    <p:set>
+                                      <p:cBhvr>
+                                        <p:cTn id="6" dur="1" fill="hold">
+                                          <p:stCondLst>
+                                            <p:cond delay="0"/>
+                                          </p:stCondLst>
+                                        </p:cTn>
+                                        <p:tgtEl>
+                                          <p:spTgt spid="7"/>
+                                        </p:tgtEl>
+                                        <p:attrNameLst>
+                                          <p:attrName>style.visibility</p:attrName>
+                                        </p:attrNameLst>
+                                      </p:cBhvr>
+                                      <p:to>
+                                        <p:strVal val="visible"/>
+                                      </p:to>
+                                    </p:set>
+                                    <p:animEffect transition="in" filter="fade">
+                                      <p:cBhvr>
+                                        <p:cTn id="7" dur="450"/>
+                                        <p:tgtEl>
+                                          <p:spTgt spid="7"/>
+                                        </p:tgtEl>
+                                      </p:cBhvr>
+                                    </p:animEffect>
+                                  </p:childTnLst>
+                                </p:cTn>
+                              </p:par>
+                            </p:childTnLst>
+                          </p:cTn>
+                        </p:par>
+                      </p:childTnLst>
+                    </p:cTn>
+                  </p:par>
+                  <p:par>
+                    <p:cTn id="8" fill="hold">
+                      <p:stCondLst>
+                        <p:cond delay="indefinite"/>
+                      </p:stCondLst>
+                      <p:childTnLst>
+                        <p:par>
+                          <p:cTn id="9" fill="hold">
+                            <p:stCondLst>
+                              <p:cond delay="0"/>
+                            </p:stCondLst>
+                            <p:childTnLst>
+                              <p:par>
+                                <p:cTn id="10" presetID="10" presetClass="entr" presetSubtype="0" fill="hold" nodeType="clickEffect">
+                                  <p:stCondLst>
+                                    <p:cond delay="0"/>
+                                  </p:stCondLst>
+                                  <p:childTnLst>
+                                    <p:set>
+                                      <p:cBhvr>
+                                        <p:cTn id="11" dur="1" fill="hold">
+                                          <p:stCondLst>
+                                            <p:cond delay="0"/>
+                                          </p:stCondLst>
+                                        </p:cTn>
+                                        <p:tgtEl>
+                                          <p:spTgt spid="8"/>
+                                        </p:tgtEl>
+                                        <p:attrNameLst>
+                                          <p:attrName>style.visibility</p:attrName>
+                                        </p:attrNameLst>
+                                      </p:cBhvr>
+                                      <p:to>
+                                        <p:strVal val="visible"/>
+                                      </p:to>
+                                    </p:set>
+                                    <p:animEffect transition="in" filter="fade">
+                                      <p:cBhvr>
+                                        <p:cTn id="12" dur="450"/>
+                                        <p:tgtEl>
+                                          <p:spTgt spid="8"/>
+                                        </p:tgtEl>
+                                      </p:cBhvr>
+                                    </p:animEffect>
+                                  </p:childTnLst>
+                                </p:cTn>
+                              </p:par>
+                            </p:childTnLst>
+                          </p:cTn>
+                        </p:par>
+                      </p:childTnLst>
+                    </p:cTn>
+                  </p:par>
+                </p:childTnLst>
+              </p:cTn>
+              <p:prevCondLst>
+                <p:cond evt="onPrev" delay="0">
+                  <p:tgtEl>
+                    <p:sldTgt/>
+                  </p:tgtEl>
+                </p:cond>
+              </p:prevCondLst>
+              <p:nextCondLst>
+                <p:cond evt="onNext" delay="0">
+                  <p:tgtEl>
+                    <p:sldTgt/>
+                  </p:tgtEl>
+                </p:cond>
+              </p:nextCondLst>
+            </p:seq>
+          </p:childTnLst>
+        </p:cTn>
+      </p:par>
+    </p:tnLst>
+  </p:timing>
 </p:sld>
 </file>
 
@@ -10042,21 +11139,173 @@
                 </a:solidFill>
                 <a:latin typeface="Calibri"/>
               </a:rPr>
-              <a:t>Causa proxima y causa raiz: la distincion que separa el analisis de la anecdota (2/2)</a:t>
-            </a:r>
-          </a:p>
-        </p:txBody>
-      </p:sp>
-      <p:sp>
-        <p:nvSpPr>
-          <p:cNvPr id="5" name="TextBox 4"/>
+              <a:t>Caso dos: permisos excesivos (Capital One, 2019)</a:t>
+            </a:r>
+          </a:p>
+        </p:txBody>
+      </p:sp>
+      <p:sp>
+        <p:nvSpPr>
+          <p:cNvPr id="5" name="Rounded Rectangle 4"/>
+          <p:cNvSpPr/>
+          <p:nvPr/>
+        </p:nvSpPr>
+        <p:spPr>
+          <a:xfrm>
+            <a:off x="5803166" y="1188719"/>
+            <a:ext cx="5998464" cy="4828032"/>
+          </a:xfrm>
+          <a:prstGeom prst="roundRect">
+            <a:avLst>
+              <a:gd name="adj" fmla="val 4000"/>
+            </a:avLst>
+          </a:prstGeom>
+          <a:solidFill>
+            <a:srgbClr val="E8EEF4"/>
+          </a:solidFill>
+          <a:ln>
+            <a:noFill/>
+          </a:ln>
+        </p:spPr>
+        <p:style>
+          <a:lnRef idx="1">
+            <a:schemeClr val="accent1"/>
+          </a:lnRef>
+          <a:fillRef idx="3">
+            <a:schemeClr val="accent1"/>
+          </a:fillRef>
+          <a:effectRef idx="2">
+            <a:schemeClr val="accent1"/>
+          </a:effectRef>
+          <a:fontRef idx="minor">
+            <a:schemeClr val="lt1"/>
+          </a:fontRef>
+        </p:style>
+        <p:txBody>
+          <a:bodyPr rtlCol="0" anchor="ctr"/>
+          <a:lstStyle/>
+          <a:p>
+            <a:pPr algn="ctr"/>
+          </a:p>
+        </p:txBody>
+      </p:sp>
+      <p:pic>
+        <p:nvPicPr>
+          <p:cNvPr id="6" name="Picture 5" descr="capital-one-paso1.png"/>
+          <p:cNvPicPr>
+            <a:picLocks noChangeAspect="1"/>
+          </p:cNvPicPr>
+          <p:nvPr/>
+        </p:nvPicPr>
+        <p:blipFill>
+          <a:blip r:embed="rId2"/>
+          <a:stretch>
+            <a:fillRect/>
+          </a:stretch>
+        </p:blipFill>
+        <p:spPr>
+          <a:xfrm>
+            <a:off x="5876318" y="1261872"/>
+            <a:ext cx="5852160" cy="4681728"/>
+          </a:xfrm>
+          <a:prstGeom prst="rect">
+            <a:avLst/>
+          </a:prstGeom>
+        </p:spPr>
+      </p:pic>
+      <p:pic>
+        <p:nvPicPr>
+          <p:cNvPr id="7" name="Picture 6" descr="capital-one-paso2.png"/>
+          <p:cNvPicPr>
+            <a:picLocks noChangeAspect="1"/>
+          </p:cNvPicPr>
+          <p:nvPr/>
+        </p:nvPicPr>
+        <p:blipFill>
+          <a:blip r:embed="rId3"/>
+          <a:stretch>
+            <a:fillRect/>
+          </a:stretch>
+        </p:blipFill>
+        <p:spPr>
+          <a:xfrm>
+            <a:off x="5876318" y="1261872"/>
+            <a:ext cx="5852160" cy="4681728"/>
+          </a:xfrm>
+          <a:prstGeom prst="rect">
+            <a:avLst/>
+          </a:prstGeom>
+        </p:spPr>
+      </p:pic>
+      <p:pic>
+        <p:nvPicPr>
+          <p:cNvPr id="8" name="Picture 7" descr="capital-one-paso3.png"/>
+          <p:cNvPicPr>
+            <a:picLocks noChangeAspect="1"/>
+          </p:cNvPicPr>
+          <p:nvPr/>
+        </p:nvPicPr>
+        <p:blipFill>
+          <a:blip r:embed="rId4"/>
+          <a:stretch>
+            <a:fillRect/>
+          </a:stretch>
+        </p:blipFill>
+        <p:spPr>
+          <a:xfrm>
+            <a:off x="5876318" y="1261872"/>
+            <a:ext cx="5852160" cy="4681728"/>
+          </a:xfrm>
+          <a:prstGeom prst="rect">
+            <a:avLst/>
+          </a:prstGeom>
+        </p:spPr>
+      </p:pic>
+      <p:sp>
+        <p:nvSpPr>
+          <p:cNvPr id="13" name="TextBox 12"/>
           <p:cNvSpPr txBox="1"/>
           <p:nvPr/>
         </p:nvSpPr>
         <p:spPr>
           <a:xfrm>
-            <a:off x="457200" y="1170432"/>
-            <a:ext cx="11277295" cy="5230368"/>
+            <a:off x="5870301" y="5961888"/>
+            <a:ext cx="5864193" cy="320040"/>
+          </a:xfrm>
+          <a:prstGeom prst="rect">
+            <a:avLst/>
+          </a:prstGeom>
+          <a:noFill/>
+        </p:spPr>
+        <p:txBody>
+          <a:bodyPr wrap="square">
+            <a:spAutoFit/>
+          </a:bodyPr>
+          <a:lstStyle/>
+          <a:p>
+            <a:pPr algn="ctr"/>
+            <a:r>
+              <a:rPr sz="1100" b="0" i="1">
+                <a:solidFill>
+                  <a:srgbClr val="666666"/>
+                </a:solidFill>
+                <a:latin typeface="Calibri"/>
+              </a:rPr>
+              <a:t>Clic para avanzar la animación</a:t>
+            </a:r>
+          </a:p>
+        </p:txBody>
+      </p:sp>
+      <p:sp>
+        <p:nvSpPr>
+          <p:cNvPr id="14" name="TextBox 13"/>
+          <p:cNvSpPr txBox="1"/>
+          <p:nvPr/>
+        </p:nvSpPr>
+        <p:spPr>
+          <a:xfrm>
+            <a:off x="457200" y="1353312"/>
+            <a:ext cx="5093061" cy="5047488"/>
           </a:xfrm>
           <a:prstGeom prst="rect">
             <a:avLst/>
@@ -10081,7 +11330,7 @@
                 </a:solidFill>
                 <a:latin typeface="Calibri"/>
               </a:rPr>
-              <a:t>–   Los discos fallan siempre, eso no es noticia; lo que se puede cambiar es lo segundo.</a:t>
+              <a:t>–   En julio de 2019 Capital One informo un acceso no autorizado que afecto informacion de aproximadamente cien millones de personas en Estados Unidos y…</a:t>
             </a:r>
           </a:p>
           <a:p>
@@ -10097,7 +11346,7 @@
                 </a:solidFill>
                 <a:latin typeface="Calibri"/>
               </a:rPr>
-              <a:t>–   La tecnica mas simple para llegar ahi es preguntar por que cinco veces seguidas, y hay dos criterios de parada utiles: si la respuesta nombra una persona, todavia no llego a la causa raiz</a:t>
+              <a:t>–   La cadena tecnica publicada es instructiva porque no hubo ninguna hazana.</a:t>
             </a:r>
           </a:p>
           <a:p>
@@ -10113,30 +11362,14 @@
                 </a:solidFill>
                 <a:latin typeface="Calibri"/>
               </a:rPr>
-              <a:t>–   Porque senalar a quien ejecuto el comando equivocado no explica por que el sistema permitia ejecutarlo sin confirmacion ni por que no habia como volver atras</a:t>
-            </a:r>
-          </a:p>
-          <a:p>
-            <a:pPr>
-              <a:spcAft>
-                <a:spcPts val="800"/>
-              </a:spcAft>
-            </a:pPr>
-            <a:r>
-              <a:rPr sz="2000" b="0" i="0">
-                <a:solidFill>
-                  <a:srgbClr val="333333"/>
-                </a:solidFill>
-                <a:latin typeface="Calibri"/>
-              </a:rPr>
-              <a:t>–   Y si la respuesta describe algo que se puede cambiar en un procedimiento, un permiso, una restriccion o una alarma, entonces si llego.</a:t>
-            </a:r>
-          </a:p>
-        </p:txBody>
-      </p:sp>
-      <p:sp>
-        <p:nvSpPr>
-          <p:cNvPr id="6" name="TextBox 5"/>
+              <a:t>–   Y ese rol tenia permiso para listar y leer todos los buckets de almacenamiento, muchos mas de los que necesitaba para su trabajo.</a:t>
+            </a:r>
+          </a:p>
+        </p:txBody>
+      </p:sp>
+      <p:sp>
+        <p:nvSpPr>
+          <p:cNvPr id="15" name="TextBox 14"/>
           <p:cNvSpPr txBox="1"/>
           <p:nvPr/>
         </p:nvSpPr>
@@ -10174,6 +11407,142 @@
   <p:clrMapOvr>
     <a:masterClrMapping/>
   </p:clrMapOvr>
+  <p:timing>
+    <p:tnLst>
+      <p:par>
+        <p:cTn id="1" dur="indefinite" restart="never" nodeType="tmRoot">
+          <p:childTnLst>
+            <p:seq concurrent="1" nextAc="seek">
+              <p:cTn id="2" dur="indefinite" nodeType="mainSeq">
+                <p:childTnLst>
+                  <p:par>
+                    <p:cTn id="3" fill="hold">
+                      <p:stCondLst>
+                        <p:cond delay="indefinite"/>
+                      </p:stCondLst>
+                      <p:childTnLst>
+                        <p:par>
+                          <p:cTn id="4" fill="hold">
+                            <p:stCondLst>
+                              <p:cond delay="0"/>
+                            </p:stCondLst>
+                            <p:childTnLst>
+                              <p:par>
+                                <p:cTn id="5" presetID="10" presetClass="entr" presetSubtype="0" fill="hold" nodeType="clickEffect">
+                                  <p:stCondLst>
+                                    <p:cond delay="0"/>
+                                  </p:stCondLst>
+                                  <p:childTnLst>
+                                    <p:set>
+                                      <p:cBhvr>
+                                        <p:cTn id="6" dur="1" fill="hold">
+                                          <p:stCondLst>
+                                            <p:cond delay="0"/>
+                                          </p:stCondLst>
+                                        </p:cTn>
+                                        <p:tgtEl>
+                                          <p:spTgt spid="7"/>
+                                        </p:tgtEl>
+                                        <p:attrNameLst>
+                                          <p:attrName>style.visibility</p:attrName>
+                                        </p:attrNameLst>
+                                      </p:cBhvr>
+                                      <p:to>
+                                        <p:strVal val="visible"/>
+                                      </p:to>
+                                    </p:set>
+                                    <p:animEffect transition="in" filter="fade">
+                                      <p:cBhvr>
+                                        <p:cTn id="7" dur="450"/>
+                                        <p:tgtEl>
+                                          <p:spTgt spid="7"/>
+                                        </p:tgtEl>
+                                      </p:cBhvr>
+                                    </p:animEffect>
+                                  </p:childTnLst>
+                                </p:cTn>
+                              </p:par>
+                            </p:childTnLst>
+                          </p:cTn>
+                        </p:par>
+                      </p:childTnLst>
+                    </p:cTn>
+                  </p:par>
+                  <p:par>
+                    <p:cTn id="8" fill="hold">
+                      <p:stCondLst>
+                        <p:cond delay="indefinite"/>
+                      </p:stCondLst>
+                      <p:childTnLst>
+                        <p:par>
+                          <p:cTn id="9" fill="hold">
+                            <p:stCondLst>
+                              <p:cond delay="0"/>
+                            </p:stCondLst>
+                            <p:childTnLst>
+                              <p:par>
+                                <p:cTn id="10" presetID="10" presetClass="entr" presetSubtype="0" fill="hold" nodeType="clickEffect">
+                                  <p:stCondLst>
+                                    <p:cond delay="0"/>
+                                  </p:stCondLst>
+                                  <p:childTnLst>
+                                    <p:set>
+                                      <p:cBhvr>
+                                        <p:cTn id="11" dur="1" fill="hold">
+                                          <p:stCondLst>
+                                            <p:cond delay="0"/>
+                                          </p:stCondLst>
+                                        </p:cTn>
+                                        <p:tgtEl>
+                                          <p:spTgt spid="8"/>
+                                        </p:tgtEl>
+                                        <p:attrNameLst>
+                                          <p:attrName>style.visibility</p:attrName>
+                                        </p:attrNameLst>
+                                      </p:cBhvr>
+                                      <p:to>
+                                        <p:strVal val="visible"/>
+                                      </p:to>
+                                    </p:set>
+                                    <p:animEffect transition="in" filter="fade">
+                                      <p:cBhvr>
+                                        <p:cTn id="12" dur="450"/>
+                                        <p:tgtEl>
+                                          <p:spTgt spid="8"/>
+                                        </p:tgtEl>
+                                      </p:cBhvr>
+                                    </p:animEffect>
+                                  </p:childTnLst>
+                                </p:cTn>
+                              </p:par>
+                            </p:childTnLst>
+                          </p:cTn>
+                        </p:par>
+                      </p:childTnLst>
+                    </p:cTn>
+                  </p:par>
+                </p:childTnLst>
+              </p:cTn>
+              <p:prevCondLst>
+                <p:cond evt="onPrev" delay="0">
+                  <p:tgtEl>
+                    <p:sldTgt/>
+                  </p:tgtEl>
+                </p:cond>
+              </p:prevCondLst>
+              <p:nextCondLst>
+                <p:cond evt="onNext" delay="0">
+                  <p:tgtEl>
+                    <p:sldTgt/>
+                  </p:tgtEl>
+                </p:cond>
+              </p:nextCondLst>
+            </p:seq>
+          </p:childTnLst>
+        </p:cTn>
+      </p:par>
+    </p:tnLst>
+  </p:timing>
 </p:sld>
 </file>
 
@@ -10310,21 +11679,173 @@
                 </a:solidFill>
                 <a:latin typeface="Calibri"/>
               </a:rPr>
-              <a:t>Caso uno: el respaldo que nunca se restauro (GitLab, 2017) (1/2)</a:t>
-            </a:r>
-          </a:p>
-        </p:txBody>
-      </p:sp>
-      <p:sp>
-        <p:nvSpPr>
-          <p:cNvPr id="5" name="TextBox 4"/>
+              <a:t>Caso tres: perdida de datos en una migracion (MySpace, 2019)</a:t>
+            </a:r>
+          </a:p>
+        </p:txBody>
+      </p:sp>
+      <p:sp>
+        <p:nvSpPr>
+          <p:cNvPr id="5" name="Rounded Rectangle 4"/>
+          <p:cNvSpPr/>
+          <p:nvPr/>
+        </p:nvSpPr>
+        <p:spPr>
+          <a:xfrm>
+            <a:off x="5803166" y="1188719"/>
+            <a:ext cx="5998464" cy="4828032"/>
+          </a:xfrm>
+          <a:prstGeom prst="roundRect">
+            <a:avLst>
+              <a:gd name="adj" fmla="val 4000"/>
+            </a:avLst>
+          </a:prstGeom>
+          <a:solidFill>
+            <a:srgbClr val="E8EEF4"/>
+          </a:solidFill>
+          <a:ln>
+            <a:noFill/>
+          </a:ln>
+        </p:spPr>
+        <p:style>
+          <a:lnRef idx="1">
+            <a:schemeClr val="accent1"/>
+          </a:lnRef>
+          <a:fillRef idx="3">
+            <a:schemeClr val="accent1"/>
+          </a:fillRef>
+          <a:effectRef idx="2">
+            <a:schemeClr val="accent1"/>
+          </a:effectRef>
+          <a:fontRef idx="minor">
+            <a:schemeClr val="lt1"/>
+          </a:fontRef>
+        </p:style>
+        <p:txBody>
+          <a:bodyPr rtlCol="0" anchor="ctr"/>
+          <a:lstStyle/>
+          <a:p>
+            <a:pPr algn="ctr"/>
+          </a:p>
+        </p:txBody>
+      </p:sp>
+      <p:pic>
+        <p:nvPicPr>
+          <p:cNvPr id="6" name="Picture 5" descr="migracion-sin-retorno-paso1.png"/>
+          <p:cNvPicPr>
+            <a:picLocks noChangeAspect="1"/>
+          </p:cNvPicPr>
+          <p:nvPr/>
+        </p:nvPicPr>
+        <p:blipFill>
+          <a:blip r:embed="rId2"/>
+          <a:stretch>
+            <a:fillRect/>
+          </a:stretch>
+        </p:blipFill>
+        <p:spPr>
+          <a:xfrm>
+            <a:off x="5876318" y="1261872"/>
+            <a:ext cx="5852160" cy="4681728"/>
+          </a:xfrm>
+          <a:prstGeom prst="rect">
+            <a:avLst/>
+          </a:prstGeom>
+        </p:spPr>
+      </p:pic>
+      <p:pic>
+        <p:nvPicPr>
+          <p:cNvPr id="7" name="Picture 6" descr="migracion-sin-retorno-paso1.png"/>
+          <p:cNvPicPr>
+            <a:picLocks noChangeAspect="1"/>
+          </p:cNvPicPr>
+          <p:nvPr/>
+        </p:nvPicPr>
+        <p:blipFill>
+          <a:blip r:embed="rId2"/>
+          <a:stretch>
+            <a:fillRect/>
+          </a:stretch>
+        </p:blipFill>
+        <p:spPr>
+          <a:xfrm>
+            <a:off x="5876318" y="1261872"/>
+            <a:ext cx="5852160" cy="4681728"/>
+          </a:xfrm>
+          <a:prstGeom prst="rect">
+            <a:avLst/>
+          </a:prstGeom>
+        </p:spPr>
+      </p:pic>
+      <p:pic>
+        <p:nvPicPr>
+          <p:cNvPr id="8" name="Picture 7" descr="migracion-sin-retorno-paso3.png"/>
+          <p:cNvPicPr>
+            <a:picLocks noChangeAspect="1"/>
+          </p:cNvPicPr>
+          <p:nvPr/>
+        </p:nvPicPr>
+        <p:blipFill>
+          <a:blip r:embed="rId3"/>
+          <a:stretch>
+            <a:fillRect/>
+          </a:stretch>
+        </p:blipFill>
+        <p:spPr>
+          <a:xfrm>
+            <a:off x="5876318" y="1261872"/>
+            <a:ext cx="5852160" cy="4681728"/>
+          </a:xfrm>
+          <a:prstGeom prst="rect">
+            <a:avLst/>
+          </a:prstGeom>
+        </p:spPr>
+      </p:pic>
+      <p:sp>
+        <p:nvSpPr>
+          <p:cNvPr id="13" name="TextBox 12"/>
           <p:cNvSpPr txBox="1"/>
           <p:nvPr/>
         </p:nvSpPr>
         <p:spPr>
           <a:xfrm>
-            <a:off x="457200" y="1170432"/>
-            <a:ext cx="11277295" cy="5230368"/>
+            <a:off x="5870301" y="5961888"/>
+            <a:ext cx="5864193" cy="320040"/>
+          </a:xfrm>
+          <a:prstGeom prst="rect">
+            <a:avLst/>
+          </a:prstGeom>
+          <a:noFill/>
+        </p:spPr>
+        <p:txBody>
+          <a:bodyPr wrap="square">
+            <a:spAutoFit/>
+          </a:bodyPr>
+          <a:lstStyle/>
+          <a:p>
+            <a:pPr algn="ctr"/>
+            <a:r>
+              <a:rPr sz="1100" b="0" i="1">
+                <a:solidFill>
+                  <a:srgbClr val="666666"/>
+                </a:solidFill>
+                <a:latin typeface="Calibri"/>
+              </a:rPr>
+              <a:t>Clic para avanzar la animación</a:t>
+            </a:r>
+          </a:p>
+        </p:txBody>
+      </p:sp>
+      <p:sp>
+        <p:nvSpPr>
+          <p:cNvPr id="14" name="TextBox 13"/>
+          <p:cNvSpPr txBox="1"/>
+          <p:nvPr/>
+        </p:nvSpPr>
+        <p:spPr>
+          <a:xfrm>
+            <a:off x="457200" y="1353312"/>
+            <a:ext cx="5093061" cy="5047488"/>
           </a:xfrm>
           <a:prstGeom prst="rect">
             <a:avLst/>
@@ -10349,7 +11870,7 @@
                 </a:solidFill>
                 <a:latin typeface="Calibri"/>
               </a:rPr>
-              <a:t>–   Caso uno, el respaldo que nunca se restauro, con el ejemplo publico mejor documentado que existe.</a:t>
+              <a:t>–   En marzo de 2019 MySpace reconocio que habia perdido la musica subida a la plataforma entre 2003 y 2015.</a:t>
             </a:r>
           </a:p>
           <a:p>
@@ -10365,7 +11886,7 @@
                 </a:solidFill>
                 <a:latin typeface="Calibri"/>
               </a:rPr>
-              <a:t>–   El 31 de enero de 2017 GitLab sufrio la perdida de datos de su servicio en la nube: durante la atencion de un problema de replicacion</a:t>
+              <a:t>–   No hubo ataque ni desastre natural, solo una migracion sin copia verificada de la que ya no se podia volver atras.</a:t>
             </a:r>
           </a:p>
           <a:p>
@@ -10381,7 +11902,7 @@
                 </a:solidFill>
                 <a:latin typeface="Calibri"/>
               </a:rPr>
-              <a:t>–   Un ingeniero ejecuto un borrado recursivo sobre el directorio de datos del servidor equivocado y elimino cerca de trescientos gigabytes.</a:t>
+              <a:t>–   En la banca hay un caso paralelo y bien documentado con el sistema de TSB en Reino Unido en 2018.</a:t>
             </a:r>
           </a:p>
           <a:p>
@@ -10397,14 +11918,14 @@
                 </a:solidFill>
                 <a:latin typeface="Calibri"/>
               </a:rPr>
-              <a:t>–   La leccion tecnica es exacta: un respaldo que nunca se restauro de prueba no es un respaldo, es una carpeta con un nombre tranquilizador.</a:t>
-            </a:r>
-          </a:p>
-        </p:txBody>
-      </p:sp>
-      <p:sp>
-        <p:nvSpPr>
-          <p:cNvPr id="6" name="TextBox 5"/>
+              <a:t>–   Con costos reportados del orden de cientos de millones de libras y sanciones posteriores del regulador</a:t>
+            </a:r>
+          </a:p>
+        </p:txBody>
+      </p:sp>
+      <p:sp>
+        <p:nvSpPr>
+          <p:cNvPr id="15" name="TextBox 14"/>
           <p:cNvSpPr txBox="1"/>
           <p:nvPr/>
         </p:nvSpPr>
@@ -10442,6 +11963,142 @@
   <p:clrMapOvr>
     <a:masterClrMapping/>
   </p:clrMapOvr>
+  <p:timing>
+    <p:tnLst>
+      <p:par>
+        <p:cTn id="1" dur="indefinite" restart="never" nodeType="tmRoot">
+          <p:childTnLst>
+            <p:seq concurrent="1" nextAc="seek">
+              <p:cTn id="2" dur="indefinite" nodeType="mainSeq">
+                <p:childTnLst>
+                  <p:par>
+                    <p:cTn id="3" fill="hold">
+                      <p:stCondLst>
+                        <p:cond delay="indefinite"/>
+                      </p:stCondLst>
+                      <p:childTnLst>
+                        <p:par>
+                          <p:cTn id="4" fill="hold">
+                            <p:stCondLst>
+                              <p:cond delay="0"/>
+                            </p:stCondLst>
+                            <p:childTnLst>
+                              <p:par>
+                                <p:cTn id="5" presetID="10" presetClass="entr" presetSubtype="0" fill="hold" nodeType="clickEffect">
+                                  <p:stCondLst>
+                                    <p:cond delay="0"/>
+                                  </p:stCondLst>
+                                  <p:childTnLst>
+                                    <p:set>
+                                      <p:cBhvr>
+                                        <p:cTn id="6" dur="1" fill="hold">
+                                          <p:stCondLst>
+                                            <p:cond delay="0"/>
+                                          </p:stCondLst>
+                                        </p:cTn>
+                                        <p:tgtEl>
+                                          <p:spTgt spid="7"/>
+                                        </p:tgtEl>
+                                        <p:attrNameLst>
+                                          <p:attrName>style.visibility</p:attrName>
+                                        </p:attrNameLst>
+                                      </p:cBhvr>
+                                      <p:to>
+                                        <p:strVal val="visible"/>
+                                      </p:to>
+                                    </p:set>
+                                    <p:animEffect transition="in" filter="fade">
+                                      <p:cBhvr>
+                                        <p:cTn id="7" dur="450"/>
+                                        <p:tgtEl>
+                                          <p:spTgt spid="7"/>
+                                        </p:tgtEl>
+                                      </p:cBhvr>
+                                    </p:animEffect>
+                                  </p:childTnLst>
+                                </p:cTn>
+                              </p:par>
+                            </p:childTnLst>
+                          </p:cTn>
+                        </p:par>
+                      </p:childTnLst>
+                    </p:cTn>
+                  </p:par>
+                  <p:par>
+                    <p:cTn id="8" fill="hold">
+                      <p:stCondLst>
+                        <p:cond delay="indefinite"/>
+                      </p:stCondLst>
+                      <p:childTnLst>
+                        <p:par>
+                          <p:cTn id="9" fill="hold">
+                            <p:stCondLst>
+                              <p:cond delay="0"/>
+                            </p:stCondLst>
+                            <p:childTnLst>
+                              <p:par>
+                                <p:cTn id="10" presetID="10" presetClass="entr" presetSubtype="0" fill="hold" nodeType="clickEffect">
+                                  <p:stCondLst>
+                                    <p:cond delay="0"/>
+                                  </p:stCondLst>
+                                  <p:childTnLst>
+                                    <p:set>
+                                      <p:cBhvr>
+                                        <p:cTn id="11" dur="1" fill="hold">
+                                          <p:stCondLst>
+                                            <p:cond delay="0"/>
+                                          </p:stCondLst>
+                                        </p:cTn>
+                                        <p:tgtEl>
+                                          <p:spTgt spid="8"/>
+                                        </p:tgtEl>
+                                        <p:attrNameLst>
+                                          <p:attrName>style.visibility</p:attrName>
+                                        </p:attrNameLst>
+                                      </p:cBhvr>
+                                      <p:to>
+                                        <p:strVal val="visible"/>
+                                      </p:to>
+                                    </p:set>
+                                    <p:animEffect transition="in" filter="fade">
+                                      <p:cBhvr>
+                                        <p:cTn id="12" dur="450"/>
+                                        <p:tgtEl>
+                                          <p:spTgt spid="8"/>
+                                        </p:tgtEl>
+                                      </p:cBhvr>
+                                    </p:animEffect>
+                                  </p:childTnLst>
+                                </p:cTn>
+                              </p:par>
+                            </p:childTnLst>
+                          </p:cTn>
+                        </p:par>
+                      </p:childTnLst>
+                    </p:cTn>
+                  </p:par>
+                </p:childTnLst>
+              </p:cTn>
+              <p:prevCondLst>
+                <p:cond evt="onPrev" delay="0">
+                  <p:tgtEl>
+                    <p:sldTgt/>
+                  </p:tgtEl>
+                </p:cond>
+              </p:prevCondLst>
+              <p:nextCondLst>
+                <p:cond evt="onNext" delay="0">
+                  <p:tgtEl>
+                    <p:sldTgt/>
+                  </p:tgtEl>
+                </p:cond>
+              </p:nextCondLst>
+            </p:seq>
+          </p:childTnLst>
+        </p:cTn>
+      </p:par>
+    </p:tnLst>
+  </p:timing>
 </p:sld>
 </file>
 
@@ -10578,21 +12235,173 @@
                 </a:solidFill>
                 <a:latin typeface="Calibri"/>
               </a:rPr>
-              <a:t>Caso uno: el respaldo que nunca se restauro (GitLab, 2017) (2/2)</a:t>
-            </a:r>
-          </a:p>
-        </p:txBody>
-      </p:sp>
-      <p:sp>
-        <p:nvSpPr>
-          <p:cNvPr id="5" name="TextBox 4"/>
+              <a:t>Caso cuatro: concurrencia, el que no llega a los titulares</a:t>
+            </a:r>
+          </a:p>
+        </p:txBody>
+      </p:sp>
+      <p:sp>
+        <p:nvSpPr>
+          <p:cNvPr id="5" name="Rounded Rectangle 4"/>
+          <p:cNvSpPr/>
+          <p:nvPr/>
+        </p:nvSpPr>
+        <p:spPr>
+          <a:xfrm>
+            <a:off x="5803166" y="1188719"/>
+            <a:ext cx="5998464" cy="4828032"/>
+          </a:xfrm>
+          <a:prstGeom prst="roundRect">
+            <a:avLst>
+              <a:gd name="adj" fmla="val 4000"/>
+            </a:avLst>
+          </a:prstGeom>
+          <a:solidFill>
+            <a:srgbClr val="E8EEF4"/>
+          </a:solidFill>
+          <a:ln>
+            <a:noFill/>
+          </a:ln>
+        </p:spPr>
+        <p:style>
+          <a:lnRef idx="1">
+            <a:schemeClr val="accent1"/>
+          </a:lnRef>
+          <a:fillRef idx="3">
+            <a:schemeClr val="accent1"/>
+          </a:fillRef>
+          <a:effectRef idx="2">
+            <a:schemeClr val="accent1"/>
+          </a:effectRef>
+          <a:fontRef idx="minor">
+            <a:schemeClr val="lt1"/>
+          </a:fontRef>
+        </p:style>
+        <p:txBody>
+          <a:bodyPr rtlCol="0" anchor="ctr"/>
+          <a:lstStyle/>
+          <a:p>
+            <a:pPr algn="ctr"/>
+          </a:p>
+        </p:txBody>
+      </p:sp>
+      <p:pic>
+        <p:nvPicPr>
+          <p:cNvPr id="6" name="Picture 5" descr="actualizacion-perdida-paso1.png"/>
+          <p:cNvPicPr>
+            <a:picLocks noChangeAspect="1"/>
+          </p:cNvPicPr>
+          <p:nvPr/>
+        </p:nvPicPr>
+        <p:blipFill>
+          <a:blip r:embed="rId2"/>
+          <a:stretch>
+            <a:fillRect/>
+          </a:stretch>
+        </p:blipFill>
+        <p:spPr>
+          <a:xfrm>
+            <a:off x="5876318" y="1261872"/>
+            <a:ext cx="5852160" cy="4681728"/>
+          </a:xfrm>
+          <a:prstGeom prst="rect">
+            <a:avLst/>
+          </a:prstGeom>
+        </p:spPr>
+      </p:pic>
+      <p:pic>
+        <p:nvPicPr>
+          <p:cNvPr id="7" name="Picture 6" descr="actualizacion-perdida-paso2.png"/>
+          <p:cNvPicPr>
+            <a:picLocks noChangeAspect="1"/>
+          </p:cNvPicPr>
+          <p:nvPr/>
+        </p:nvPicPr>
+        <p:blipFill>
+          <a:blip r:embed="rId3"/>
+          <a:stretch>
+            <a:fillRect/>
+          </a:stretch>
+        </p:blipFill>
+        <p:spPr>
+          <a:xfrm>
+            <a:off x="5876318" y="1261872"/>
+            <a:ext cx="5852160" cy="4681728"/>
+          </a:xfrm>
+          <a:prstGeom prst="rect">
+            <a:avLst/>
+          </a:prstGeom>
+        </p:spPr>
+      </p:pic>
+      <p:pic>
+        <p:nvPicPr>
+          <p:cNvPr id="8" name="Picture 7" descr="actualizacion-perdida-paso3.png"/>
+          <p:cNvPicPr>
+            <a:picLocks noChangeAspect="1"/>
+          </p:cNvPicPr>
+          <p:nvPr/>
+        </p:nvPicPr>
+        <p:blipFill>
+          <a:blip r:embed="rId4"/>
+          <a:stretch>
+            <a:fillRect/>
+          </a:stretch>
+        </p:blipFill>
+        <p:spPr>
+          <a:xfrm>
+            <a:off x="5876318" y="1261872"/>
+            <a:ext cx="5852160" cy="4681728"/>
+          </a:xfrm>
+          <a:prstGeom prst="rect">
+            <a:avLst/>
+          </a:prstGeom>
+        </p:spPr>
+      </p:pic>
+      <p:sp>
+        <p:nvSpPr>
+          <p:cNvPr id="13" name="TextBox 12"/>
           <p:cNvSpPr txBox="1"/>
           <p:nvPr/>
         </p:nvSpPr>
         <p:spPr>
           <a:xfrm>
-            <a:off x="457200" y="1170432"/>
-            <a:ext cx="11277295" cy="5230368"/>
+            <a:off x="5870301" y="5961888"/>
+            <a:ext cx="5864193" cy="320040"/>
+          </a:xfrm>
+          <a:prstGeom prst="rect">
+            <a:avLst/>
+          </a:prstGeom>
+          <a:noFill/>
+        </p:spPr>
+        <p:txBody>
+          <a:bodyPr wrap="square">
+            <a:spAutoFit/>
+          </a:bodyPr>
+          <a:lstStyle/>
+          <a:p>
+            <a:pPr algn="ctr"/>
+            <a:r>
+              <a:rPr sz="1100" b="0" i="1">
+                <a:solidFill>
+                  <a:srgbClr val="666666"/>
+                </a:solidFill>
+                <a:latin typeface="Calibri"/>
+              </a:rPr>
+              <a:t>Clic para avanzar la animación</a:t>
+            </a:r>
+          </a:p>
+        </p:txBody>
+      </p:sp>
+      <p:sp>
+        <p:nvSpPr>
+          <p:cNvPr id="14" name="TextBox 13"/>
+          <p:cNvSpPr txBox="1"/>
+          <p:nvPr/>
+        </p:nvSpPr>
+        <p:spPr>
+          <a:xfrm>
+            <a:off x="457200" y="1353312"/>
+            <a:ext cx="5093061" cy="5047488"/>
           </a:xfrm>
           <a:prstGeom prst="rect">
             <a:avLst/>
@@ -10617,7 +12426,7 @@
                 </a:solidFill>
                 <a:latin typeface="Calibri"/>
               </a:rPr>
-              <a:t>–   Y hay una segunda leccion igual de importante: un proceso de respaldo que puede fallar sin avisar es peor que no tenerlo, porque produce confianza injustificada.</a:t>
+              <a:t>–   Este merece un tratamiento distinto porque su rasgo caracteristico es que no llega a los titulares con nombre propio tan facilmente.</a:t>
             </a:r>
           </a:p>
           <a:p>
@@ -10633,7 +12442,7 @@
                 </a:solidFill>
                 <a:latin typeface="Calibri"/>
               </a:rPr>
-              <a:t>–   Esto conecta con la Clase 4, donde se definieron RPO, la cantidad maxima de datos que la organizacion acepta perder medida en tiempo, y RTO, el tiempo maximo que acepta estar caida.</a:t>
+              <a:t>–   Cuando el inventario fisico no coincide con el del sistema o cuando dos clientes reclaman el mismo cupo.</a:t>
             </a:r>
           </a:p>
           <a:p>
@@ -10649,14 +12458,30 @@
                 </a:solidFill>
                 <a:latin typeface="Calibri"/>
               </a:rPr>
-              <a:t>–   GitLab descubrio su RPO real el dia del incidente, y ese es justo el error que no se debe repetir: el RPO no se declara, se demuestra restaurando.</a:t>
-            </a:r>
-          </a:p>
-        </p:txBody>
-      </p:sp>
-      <p:sp>
-        <p:nvSpPr>
-          <p:cNvPr id="6" name="TextBox 5"/>
+              <a:t>–   El patron es siempre uno de los tres que se estudiaron en la Clase 10.</a:t>
+            </a:r>
+          </a:p>
+          <a:p>
+            <a:pPr>
+              <a:spcAft>
+                <a:spcPts val="800"/>
+              </a:spcAft>
+            </a:pPr>
+            <a:r>
+              <a:rPr sz="2000" b="0" i="0">
+                <a:solidFill>
+                  <a:srgbClr val="333333"/>
+                </a:solidFill>
+                <a:latin typeface="Calibri"/>
+              </a:rPr>
+              <a:t>–   Actualizacion perdida: dos procesos leen el mismo stock de Insumo.</a:t>
+            </a:r>
+          </a:p>
+        </p:txBody>
+      </p:sp>
+      <p:sp>
+        <p:nvSpPr>
+          <p:cNvPr id="15" name="TextBox 14"/>
           <p:cNvSpPr txBox="1"/>
           <p:nvPr/>
         </p:nvSpPr>
@@ -10694,6 +12519,142 @@
   <p:clrMapOvr>
     <a:masterClrMapping/>
   </p:clrMapOvr>
+  <p:timing>
+    <p:tnLst>
+      <p:par>
+        <p:cTn id="1" dur="indefinite" restart="never" nodeType="tmRoot">
+          <p:childTnLst>
+            <p:seq concurrent="1" nextAc="seek">
+              <p:cTn id="2" dur="indefinite" nodeType="mainSeq">
+                <p:childTnLst>
+                  <p:par>
+                    <p:cTn id="3" fill="hold">
+                      <p:stCondLst>
+                        <p:cond delay="indefinite"/>
+                      </p:stCondLst>
+                      <p:childTnLst>
+                        <p:par>
+                          <p:cTn id="4" fill="hold">
+                            <p:stCondLst>
+                              <p:cond delay="0"/>
+                            </p:stCondLst>
+                            <p:childTnLst>
+                              <p:par>
+                                <p:cTn id="5" presetID="10" presetClass="entr" presetSubtype="0" fill="hold" nodeType="clickEffect">
+                                  <p:stCondLst>
+                                    <p:cond delay="0"/>
+                                  </p:stCondLst>
+                                  <p:childTnLst>
+                                    <p:set>
+                                      <p:cBhvr>
+                                        <p:cTn id="6" dur="1" fill="hold">
+                                          <p:stCondLst>
+                                            <p:cond delay="0"/>
+                                          </p:stCondLst>
+                                        </p:cTn>
+                                        <p:tgtEl>
+                                          <p:spTgt spid="7"/>
+                                        </p:tgtEl>
+                                        <p:attrNameLst>
+                                          <p:attrName>style.visibility</p:attrName>
+                                        </p:attrNameLst>
+                                      </p:cBhvr>
+                                      <p:to>
+                                        <p:strVal val="visible"/>
+                                      </p:to>
+                                    </p:set>
+                                    <p:animEffect transition="in" filter="fade">
+                                      <p:cBhvr>
+                                        <p:cTn id="7" dur="450"/>
+                                        <p:tgtEl>
+                                          <p:spTgt spid="7"/>
+                                        </p:tgtEl>
+                                      </p:cBhvr>
+                                    </p:animEffect>
+                                  </p:childTnLst>
+                                </p:cTn>
+                              </p:par>
+                            </p:childTnLst>
+                          </p:cTn>
+                        </p:par>
+                      </p:childTnLst>
+                    </p:cTn>
+                  </p:par>
+                  <p:par>
+                    <p:cTn id="8" fill="hold">
+                      <p:stCondLst>
+                        <p:cond delay="indefinite"/>
+                      </p:stCondLst>
+                      <p:childTnLst>
+                        <p:par>
+                          <p:cTn id="9" fill="hold">
+                            <p:stCondLst>
+                              <p:cond delay="0"/>
+                            </p:stCondLst>
+                            <p:childTnLst>
+                              <p:par>
+                                <p:cTn id="10" presetID="10" presetClass="entr" presetSubtype="0" fill="hold" nodeType="clickEffect">
+                                  <p:stCondLst>
+                                    <p:cond delay="0"/>
+                                  </p:stCondLst>
+                                  <p:childTnLst>
+                                    <p:set>
+                                      <p:cBhvr>
+                                        <p:cTn id="11" dur="1" fill="hold">
+                                          <p:stCondLst>
+                                            <p:cond delay="0"/>
+                                          </p:stCondLst>
+                                        </p:cTn>
+                                        <p:tgtEl>
+                                          <p:spTgt spid="8"/>
+                                        </p:tgtEl>
+                                        <p:attrNameLst>
+                                          <p:attrName>style.visibility</p:attrName>
+                                        </p:attrNameLst>
+                                      </p:cBhvr>
+                                      <p:to>
+                                        <p:strVal val="visible"/>
+                                      </p:to>
+                                    </p:set>
+                                    <p:animEffect transition="in" filter="fade">
+                                      <p:cBhvr>
+                                        <p:cTn id="12" dur="450"/>
+                                        <p:tgtEl>
+                                          <p:spTgt spid="8"/>
+                                        </p:tgtEl>
+                                      </p:cBhvr>
+                                    </p:animEffect>
+                                  </p:childTnLst>
+                                </p:cTn>
+                              </p:par>
+                            </p:childTnLst>
+                          </p:cTn>
+                        </p:par>
+                      </p:childTnLst>
+                    </p:cTn>
+                  </p:par>
+                </p:childTnLst>
+              </p:cTn>
+              <p:prevCondLst>
+                <p:cond evt="onPrev" delay="0">
+                  <p:tgtEl>
+                    <p:sldTgt/>
+                  </p:tgtEl>
+                </p:cond>
+              </p:prevCondLst>
+              <p:nextCondLst>
+                <p:cond evt="onNext" delay="0">
+                  <p:tgtEl>
+                    <p:sldTgt/>
+                  </p:tgtEl>
+                </p:cond>
+              </p:nextCondLst>
+            </p:seq>
+          </p:childTnLst>
+        </p:cTn>
+      </p:par>
+    </p:tnLst>
+  </p:timing>
 </p:sld>
 </file>
 

--- a/Bases de Datos II/Clases/Clase 13 - Analisis de casos reales/Presentacion.pptx
+++ b/Bases de Datos II/Clases/Clase 13 - Analisis de casos reales/Presentacion.pptx
@@ -7,8 +7,8 @@
   <p:sldIdLst>
     <p:sldId id="256" r:id="rId7"/>
     <p:sldId id="257" r:id="rId8"/>
-    <p:sldId id="258" r:id="rId10"/>
-    <p:sldId id="259" r:id="rId11"/>
+    <p:sldId id="258" r:id="rId9"/>
+    <p:sldId id="259" r:id="rId10"/>
     <p:sldId id="260" r:id="rId12"/>
     <p:sldId id="261" r:id="rId13"/>
     <p:sldId id="262" r:id="rId14"/>
@@ -514,43 +514,47 @@
           <a:lstStyle/>
           <a:p>
             <a:r>
-              <a:t>TEXTO COMPLETO DE LA LÁMINA (se proyecta resumido):</a:t>
-            </a:r>
-          </a:p>
-          <a:p/>
-          <a:p>
-            <a:r>
-              <a:t>Tema de hoy: Analisis de casos reales · la clínica</a:t>
-            </a:r>
-          </a:p>
-          <a:p/>
-          <a:p>
-            <a:r>
-              <a:t>Herramienta: Google Docs · Bloque 120 min</a:t>
-            </a:r>
-          </a:p>
-          <a:p/>
-          <a:p>
-            <a:r>
-              <a:t>Gratis + navegador · free tier · sin software de pago obligatorio.</a:t>
-            </a:r>
-          </a:p>
-          <a:p/>
-          <a:p>
-            <a:r>
-              <a:t>Recorrido: teoría del tema, una lámina por concepto, y demo del docente sobre la base de la clínica.</a:t>
-            </a:r>
-          </a:p>
-          <a:p/>
-          <a:p>
-            <a:r>
-              <a:t>Cada lámina se sostiene sola: sirve para repasar aunque hayas faltado.</a:t>
-            </a:r>
-          </a:p>
-          <a:p/>
-          <a:p>
-            <a:r>
-              <a:t>Conceptos de hoy: Clase autonoma · Causa proxima y causa raiz · Caso uno · Caso dos.</a:t>
+              <a:t>DESARROLLO (para explicarlo, no se proyecta):</a:t>
+            </a:r>
+          </a:p>
+          <a:p>
+            <a:r>
+              <a:t>Esta clase es autonoma y cae en festivo, asi que no hay encuentro sincronico: este texto es a la vez el fundamento del docente y la lectura que el estudiante recibe, y por eso debe alcanzar para trabajar solo.</a:t>
+            </a:r>
+          </a:p>
+          <a:p>
+            <a:r>
+              <a:t>El tema es el analisis de casos reales, y el primer punto es que esto no es relleno de fin de semestre sino una practica profesional con nombre propio.</a:t>
+            </a:r>
+          </a:p>
+          <a:p>
+            <a:r>
+              <a:t>Cuando un sistema falla en produccion, los equipos serios escriben un post-mortem</a:t>
+            </a:r>
+          </a:p>
+          <a:p>
+            <a:r>
+              <a:t>Que es un documento breve producido despues del incidente y que responde cuatro preguntas: que paso, cuando y con que impacto medible, por que fue posible, y que se va a cambiar para que no vuelva a ocurrir de la misma manera.</a:t>
+            </a:r>
+          </a:p>
+          <a:p>
+            <a:r>
+              <a:t>La palabra clave del oficio es blameless, sin culpables: la regla es que se analiza el sistema y no la persona.</a:t>
+            </a:r>
+          </a:p>
+          <a:p>
+            <a:r>
+              <a:t>No es cortesia ni buena onda corporativa, es un calculo practico, porque en cuanto el documento sirve para castigar a alguien la gente deja de reportar los errores pequenos y la organizacion pierde la unica fuente de informacion que tiene para evitar los grandes.</a:t>
+            </a:r>
+          </a:p>
+          <a:p>
+            <a:r>
+              <a:t>Un incidente, para nuestros fines, es cualquier evento que degrada el servicio o pone en riesgo los datos, y merece post-mortem tanto el que llego al usuario como el que se detuvo a tiempo.</a:t>
+            </a:r>
+          </a:p>
+          <a:p>
+            <a:r>
+              <a:t>Fuera de la lamina (habla de la practica): El entregable de hoy es una tabla de cuatro columnas, Contexto, Fallo, Leccion y Cambio en la clínica, con tres casos, y se sube a PostgreSQL en el navegador.</a:t>
             </a:r>
           </a:p>
         </p:txBody>
@@ -625,42 +629,62 @@
           </a:p>
           <a:p>
             <a:r>
-              <a:t>Esta clase es autonoma y cae en festivo, asi que no hay encuentro sincronico: este texto es a la vez el fundamento del docente y la lectura que el estudiante recibe, y por eso debe alcanzar para trabajar solo.</a:t>
-            </a:r>
-          </a:p>
-          <a:p>
-            <a:r>
-              <a:t>El tema es el analisis de casos reales, y el primer punto es que esto no es relleno de fin de semestre sino una practica profesional con nombre propio.</a:t>
-            </a:r>
-          </a:p>
-          <a:p>
-            <a:r>
-              <a:t>Cuando un sistema falla en produccion, los equipos serios escriben un post-mortem</a:t>
-            </a:r>
-          </a:p>
-          <a:p>
-            <a:r>
-              <a:t>Que es un documento breve producido despues del incidente y que responde cuatro preguntas: que paso, cuando y con que impacto medible, por que fue posible, y que se va a cambiar para que no vuelva a ocurrir de la misma manera.</a:t>
-            </a:r>
-          </a:p>
-          <a:p>
-            <a:r>
-              <a:t>La palabra clave del oficio es blameless, sin culpables: la regla es que se analiza el sistema y no la persona.</a:t>
-            </a:r>
-          </a:p>
-          <a:p>
-            <a:r>
-              <a:t>No es cortesia ni buena onda corporativa, es un calculo practico, porque en cuanto el documento sirve para castigar a alguien la gente deja de reportar los errores pequenos y la organizacion pierde la unica fuente de informacion que tiene para evitar los grandes.</a:t>
-            </a:r>
-          </a:p>
-          <a:p>
-            <a:r>
-              <a:t>Un incidente, para nuestros fines, es cualquier evento que degrada el servicio o pone en riesgo los datos, y merece post-mortem tanto el que llego al usuario como el que se detuvo a tiempo.</a:t>
-            </a:r>
-          </a:p>
-          <a:p>
-            <a:r>
-              <a:t>Fuera de la lamina (habla de la practica): El entregable de hoy es una tabla de cuatro columnas, Contexto, Fallo, Leccion y Cambio en la clínica, con tres casos, y se sube a PostgreSQL en el navegador.</a:t>
+              <a:t>Antes de mirar los casos hay que instalar la distincion que separa un buen analisis de una anecdota: causa proxima y causa raiz.</a:t>
+            </a:r>
+          </a:p>
+          <a:p>
+            <a:r>
+              <a:t>La causa proxima es el ultimo evento de la cadena, el que se ve.</a:t>
+            </a:r>
+          </a:p>
+          <a:p>
+            <a:r>
+              <a:t>La causa raiz es la condicion que permitio que ese evento tuviera consecuencias.</a:t>
+            </a:r>
+          </a:p>
+          <a:p>
+            <a:r>
+              <a:t>Un ejemplo con la clínica: el disco del servidor falla un viernes y se pierden tres semanas de historias clinicas.</a:t>
+            </a:r>
+          </a:p>
+          <a:p>
+            <a:r>
+              <a:t>La causa proxima es el disco.</a:t>
+            </a:r>
+          </a:p>
+          <a:p>
+            <a:r>
+              <a:t>La causa raiz es que existia un archivo de respaldo que nadie habia restaurado nunca para comprobar que sirviera, y que nadie vigilaba si el respaldo del dia se habia ejecutado.</a:t>
+            </a:r>
+          </a:p>
+          <a:p>
+            <a:r>
+              <a:t>Los discos fallan siempre, eso no es noticia; lo que se puede cambiar es lo segundo.</a:t>
+            </a:r>
+          </a:p>
+          <a:p>
+            <a:r>
+              <a:t>La tecnica mas simple para llegar ahi es preguntar por que cinco veces seguidas, y hay dos criterios de parada utiles: si la respuesta nombra una persona, todavia no llego a la causa raiz</a:t>
+            </a:r>
+          </a:p>
+          <a:p>
+            <a:r>
+              <a:t>Porque senalar a quien ejecuto el comando equivocado no explica por que el sistema permitia ejecutarlo sin confirmacion ni por que no habia como volver atras</a:t>
+            </a:r>
+          </a:p>
+          <a:p>
+            <a:r>
+              <a:t>Y si la respuesta describe algo que se puede cambiar en un procedimiento, un permiso, una restriccion o una alarma, entonces si llego.</a:t>
+            </a:r>
+          </a:p>
+          <a:p>
+            <a:r>
+              <a:t>NOTAS:</a:t>
+            </a:r>
+          </a:p>
+          <a:p>
+            <a:r>
+              <a:t>Conviene ademas admitir la existencia de factores contribuyentes, que son condiciones que empeoraron el resultado sin haberlo causado, como que el incidente ocurriera de noche, que la documentacion estuviera desactualizada o que el unico que sabia restaurar estuviera de vacaciones.</a:t>
             </a:r>
           </a:p>
         </p:txBody>
@@ -735,52 +759,37 @@
           </a:p>
           <a:p>
             <a:r>
-              <a:t>Antes de mirar los casos hay que instalar la distincion que separa un buen analisis de una anecdota: causa proxima y causa raiz.</a:t>
-            </a:r>
-          </a:p>
-          <a:p>
-            <a:r>
-              <a:t>La causa proxima es el ultimo evento de la cadena, el que se ve.</a:t>
-            </a:r>
-          </a:p>
-          <a:p>
-            <a:r>
-              <a:t>La causa raiz es la condicion que permitio que ese evento tuviera consecuencias.</a:t>
-            </a:r>
-          </a:p>
-          <a:p>
-            <a:r>
-              <a:t>Un ejemplo con la clínica: el disco del servidor falla un viernes y se pierden tres semanas de historias clinicas.</a:t>
-            </a:r>
-          </a:p>
-          <a:p>
-            <a:r>
-              <a:t>La causa proxima es el disco.</a:t>
-            </a:r>
-          </a:p>
-          <a:p>
-            <a:r>
-              <a:t>La causa raiz es que existia un archivo de respaldo que nadie habia restaurado nunca para comprobar que sirviera, y que nadie vigilaba si el respaldo del dia se habia ejecutado.</a:t>
-            </a:r>
-          </a:p>
-          <a:p>
-            <a:r>
-              <a:t>Los discos fallan siempre, eso no es noticia; lo que se puede cambiar es lo segundo.</a:t>
-            </a:r>
-          </a:p>
-          <a:p>
-            <a:r>
-              <a:t>La tecnica mas simple para llegar ahi es preguntar por que cinco veces seguidas, y hay dos criterios de parada utiles: si la respuesta nombra una persona, todavia no llego a la causa raiz</a:t>
-            </a:r>
-          </a:p>
-          <a:p>
-            <a:r>
-              <a:t>Porque senalar a quien ejecuto el comando equivocado no explica por que el sistema permitia ejecutarlo sin confirmacion ni por que no habia como volver atras</a:t>
-            </a:r>
-          </a:p>
-          <a:p>
-            <a:r>
-              <a:t>Y si la respuesta describe algo que se puede cambiar en un procedimiento, un permiso, una restriccion o una alarma, entonces si llego.</a:t>
+              <a:t>Caso uno, el respaldo que nunca se restauro, con el ejemplo publico mejor documentado que existe.</a:t>
+            </a:r>
+          </a:p>
+          <a:p>
+            <a:r>
+              <a:t>El 31 de enero de 2017 GitLab sufrio la perdida de datos de su servicio en la nube: durante la atencion de un problema de replicacion</a:t>
+            </a:r>
+          </a:p>
+          <a:p>
+            <a:r>
+              <a:t>Un ingeniero ejecuto un borrado recursivo sobre el directorio de datos del servidor equivocado y elimino cerca de trescientos gigabytes.</a:t>
+            </a:r>
+          </a:p>
+          <a:p>
+            <a:r>
+              <a:t>La leccion tecnica es exacta: un respaldo que nunca se restauro de prueba no es un respaldo, es una carpeta con un nombre tranquilizador.</a:t>
+            </a:r>
+          </a:p>
+          <a:p>
+            <a:r>
+              <a:t>Y hay una segunda leccion igual de importante: un proceso de respaldo que puede fallar sin avisar es peor que no tenerlo, porque produce confianza injustificada.</a:t>
+            </a:r>
+          </a:p>
+          <a:p>
+            <a:r>
+              <a:t>Esto conecta con la Clase 4, donde se definieron RPO, la cantidad maxima de datos que la organizacion acepta perder medida en tiempo, y RTO, el tiempo maximo que acepta estar caida.</a:t>
+            </a:r>
+          </a:p>
+          <a:p>
+            <a:r>
+              <a:t>GitLab descubrio su RPO real el dia del incidente, y ese es justo el error que no se debe repetir: el RPO no se declara, se demuestra restaurando.</a:t>
             </a:r>
           </a:p>
           <a:p>
@@ -790,7 +799,17 @@
           </a:p>
           <a:p>
             <a:r>
-              <a:t>Conviene ademas admitir la existencia de factores contribuyentes, que son condiciones que empeoraron el resultado sin haberlo causado, como que el incidente ocurriera de noche, que la documentacion estuviera desactualizada o que el unico que sabia restaurar estuviera de vacaciones.</a:t>
+              <a:t>Eso es la causa proxima.</a:t>
+            </a:r>
+          </a:p>
+          <a:p>
+            <a:r>
+              <a:t>Lo que convirtio un error humano corriente en un incidente historico fue que, al intentar recuperar, la compania descubrio que sus cinco mecanismos de respaldo y replicacion fallaban de una u otra forma: entre otras cosas, la herramienta de volcado logico fallaba en silencio por una diferencia de version entre cliente y servidor, y las copias que debian estar en almacenamiento remoto estaban vacias.</a:t>
+            </a:r>
+          </a:p>
+          <a:p>
+            <a:r>
+              <a:t>Terminaron restaurando desde una copia de trabajo de unas seis horas antes y perdieron de forma definitiva la informacion creada en esa ventana, del orden de miles de proyectos y comentarios.</a:t>
             </a:r>
           </a:p>
         </p:txBody>
@@ -865,37 +884,37 @@
           </a:p>
           <a:p>
             <a:r>
-              <a:t>Caso uno, el respaldo que nunca se restauro, con el ejemplo publico mejor documentado que existe.</a:t>
-            </a:r>
-          </a:p>
-          <a:p>
-            <a:r>
-              <a:t>El 31 de enero de 2017 GitLab sufrio la perdida de datos de su servicio en la nube: durante la atencion de un problema de replicacion</a:t>
-            </a:r>
-          </a:p>
-          <a:p>
-            <a:r>
-              <a:t>Un ingeniero ejecuto un borrado recursivo sobre el directorio de datos del servidor equivocado y elimino cerca de trescientos gigabytes.</a:t>
-            </a:r>
-          </a:p>
-          <a:p>
-            <a:r>
-              <a:t>La leccion tecnica es exacta: un respaldo que nunca se restauro de prueba no es un respaldo, es una carpeta con un nombre tranquilizador.</a:t>
-            </a:r>
-          </a:p>
-          <a:p>
-            <a:r>
-              <a:t>Y hay una segunda leccion igual de importante: un proceso de respaldo que puede fallar sin avisar es peor que no tenerlo, porque produce confianza injustificada.</a:t>
-            </a:r>
-          </a:p>
-          <a:p>
-            <a:r>
-              <a:t>Esto conecta con la Clase 4, donde se definieron RPO, la cantidad maxima de datos que la organizacion acepta perder medida en tiempo, y RTO, el tiempo maximo que acepta estar caida.</a:t>
-            </a:r>
-          </a:p>
-          <a:p>
-            <a:r>
-              <a:t>GitLab descubrio su RPO real el dia del incidente, y ese es justo el error que no se debe repetir: el RPO no se declara, se demuestra restaurando.</a:t>
+              <a:t>En julio de 2019 Capital One informo un acceso no autorizado que afecto informacion de aproximadamente cien millones de personas en Estados Unidos y varios millones en Canada, incluyendo solicitudes de credito.</a:t>
+            </a:r>
+          </a:p>
+          <a:p>
+            <a:r>
+              <a:t>La cadena tecnica publicada es instructiva porque no hubo ninguna hazana: una configuracion incorrecta en un cortafuegos de aplicaciones permitio que se le hiciera hacer peticiones internas en nombre del servidor, con eso se obtuvieron credenciales temporales de un rol de servicio</a:t>
+            </a:r>
+          </a:p>
+          <a:p>
+            <a:r>
+              <a:t>Y ese rol tenia permiso para listar y leer todos los buckets de almacenamiento, muchos mas de los que necesitaba para su trabajo.</a:t>
+            </a:r>
+          </a:p>
+          <a:p>
+            <a:r>
+              <a:t>El regulador bancario estadounidense impuso una multa de ochenta millones de dolares en 2020.</a:t>
+            </a:r>
+          </a:p>
+          <a:p>
+            <a:r>
+              <a:t>La causa proxima es la mala configuracion del cortafuegos; la causa raiz es que un componente tenia privilegios mucho mayores que su funcion.</a:t>
+            </a:r>
+          </a:p>
+          <a:p>
+            <a:r>
+              <a:t>La leccion, en el vocabulario de la Clase 2, es el principio de privilegio minimo: cada actor recibe exactamente los permisos que necesita para su tarea y nada mas.</a:t>
+            </a:r>
+          </a:p>
+          <a:p>
+            <a:r>
+              <a:t>Ese atajo es exactamente el que convierte una vulnerabilidad menor en una fuga total.</a:t>
             </a:r>
           </a:p>
           <a:p>
@@ -905,17 +924,12 @@
           </a:p>
           <a:p>
             <a:r>
-              <a:t>Eso es la causa proxima.</a:t>
-            </a:r>
-          </a:p>
-          <a:p>
-            <a:r>
-              <a:t>Lo que convirtio un error humano corriente en un incidente historico fue que, al intentar recuperar, la compania descubrio que sus cinco mecanismos de respaldo y replicacion fallaban de una u otra forma: entre otras cosas, la herramienta de volcado logico fallaba en silencio por una diferencia de version entre cliente y servidor, y las copias que debian estar en almacenamiento remoto estaban vacias.</a:t>
-            </a:r>
-          </a:p>
-          <a:p>
-            <a:r>
-              <a:t>Terminaron restaurando desde una copia de trabajo de unas seis horas antes y perdieron de forma definitiva la informacion creada en esa ventana, del orden de miles de proyectos y comentarios.</a:t>
+              <a:t>Caso dos, permisos excesivos.</a:t>
+            </a:r>
+          </a:p>
+          <a:p>
+            <a:r>
+              <a:t>Y hay que decir la parte incomoda, porque es la que se repite en los proyectos de curso: casi todos los estudiantes hacen que la aplicacion se conecte con un usuario que tiene todo, porque asi nunca aparece un error de permisos y se avanza mas rapido.</a:t>
             </a:r>
           </a:p>
         </p:txBody>
@@ -990,37 +1004,37 @@
           </a:p>
           <a:p>
             <a:r>
-              <a:t>En julio de 2019 Capital One informo un acceso no autorizado que afecto informacion de aproximadamente cien millones de personas en Estados Unidos y varios millones en Canada, incluyendo solicitudes de credito.</a:t>
-            </a:r>
-          </a:p>
-          <a:p>
-            <a:r>
-              <a:t>La cadena tecnica publicada es instructiva porque no hubo ninguna hazana: una configuracion incorrecta en un cortafuegos de aplicaciones permitio que se le hiciera hacer peticiones internas en nombre del servidor, con eso se obtuvieron credenciales temporales de un rol de servicio</a:t>
-            </a:r>
-          </a:p>
-          <a:p>
-            <a:r>
-              <a:t>Y ese rol tenia permiso para listar y leer todos los buckets de almacenamiento, muchos mas de los que necesitaba para su trabajo.</a:t>
-            </a:r>
-          </a:p>
-          <a:p>
-            <a:r>
-              <a:t>El regulador bancario estadounidense impuso una multa de ochenta millones de dolares en 2020.</a:t>
-            </a:r>
-          </a:p>
-          <a:p>
-            <a:r>
-              <a:t>La causa proxima es la mala configuracion del cortafuegos; la causa raiz es que un componente tenia privilegios mucho mayores que su funcion.</a:t>
-            </a:r>
-          </a:p>
-          <a:p>
-            <a:r>
-              <a:t>La leccion, en el vocabulario de la Clase 2, es el principio de privilegio minimo: cada actor recibe exactamente los permisos que necesita para su tarea y nada mas.</a:t>
-            </a:r>
-          </a:p>
-          <a:p>
-            <a:r>
-              <a:t>Ese atajo es exactamente el que convierte una vulnerabilidad menor en una fuga total.</a:t>
+              <a:t>En marzo de 2019 MySpace reconocio que habia perdido la musica subida a la plataforma entre 2003 y 2015, del orden de cincuenta millones de archivos de unos catorce millones de artistas, durante una migracion de servidores</a:t>
+            </a:r>
+          </a:p>
+          <a:p>
+            <a:r>
+              <a:t>No hubo ataque ni desastre natural, solo una migracion sin copia verificada de la que ya no se podia volver atras.</a:t>
+            </a:r>
+          </a:p>
+          <a:p>
+            <a:r>
+              <a:t>En la banca hay un caso paralelo y bien documentado con el sistema de TSB en Reino Unido en 2018, donde el paso a una plataforma nueva dejo a millones de clientes sin acceso confiable durante semanas</a:t>
+            </a:r>
+          </a:p>
+          <a:p>
+            <a:r>
+              <a:t>Con costos reportados del orden de cientos de millones de libras y sanciones posteriores del regulador</a:t>
+            </a:r>
+          </a:p>
+          <a:p>
+            <a:r>
+              <a:t>La causa raiz senalada en los informes no fue un error puntual de programacion sino una migracion probada de forma insuficiente y sin un camino de retorno real.</a:t>
+            </a:r>
+          </a:p>
+          <a:p>
+            <a:r>
+              <a:t>La leccion tecnica es la misma en los dos casos y conecta con la Clase 12: una migracion sin plan de retorno probado es una apuesta, y el plan de retorno se prueba antes, no el dia del cambio.</a:t>
+            </a:r>
+          </a:p>
+          <a:p>
+            <a:r>
+              <a:t>La forma disciplinada de hacerlo es la secuencia de expandir, migrar y contraer, con las dos versiones conviviendo, mas una verificacion de conteos entre origen y destino antes de eliminar nada.</a:t>
             </a:r>
           </a:p>
           <a:p>
@@ -1030,12 +1044,7 @@
           </a:p>
           <a:p>
             <a:r>
-              <a:t>Caso dos, permisos excesivos.</a:t>
-            </a:r>
-          </a:p>
-          <a:p>
-            <a:r>
-              <a:t>Y hay que decir la parte incomoda, porque es la que se repite en los proyectos de curso: casi todos los estudiantes hacen que la aplicacion se conecte con un usuario que tiene todo, porque asi nunca aparece un error de permisos y se avanza mas rapido.</a:t>
+              <a:t>Caso tres, perdida de datos durante una migracion.</a:t>
             </a:r>
           </a:p>
         </p:txBody>
@@ -1110,37 +1119,47 @@
           </a:p>
           <a:p>
             <a:r>
-              <a:t>En marzo de 2019 MySpace reconocio que habia perdido la musica subida a la plataforma entre 2003 y 2015, del orden de cincuenta millones de archivos de unos catorce millones de artistas, durante una migracion de servidores</a:t>
-            </a:r>
-          </a:p>
-          <a:p>
-            <a:r>
-              <a:t>No hubo ataque ni desastre natural, solo una migracion sin copia verificada de la que ya no se podia volver atras.</a:t>
-            </a:r>
-          </a:p>
-          <a:p>
-            <a:r>
-              <a:t>En la banca hay un caso paralelo y bien documentado con el sistema de TSB en Reino Unido en 2018, donde el paso a una plataforma nueva dejo a millones de clientes sin acceso confiable durante semanas</a:t>
-            </a:r>
-          </a:p>
-          <a:p>
-            <a:r>
-              <a:t>Con costos reportados del orden de cientos de millones de libras y sanciones posteriores del regulador</a:t>
-            </a:r>
-          </a:p>
-          <a:p>
-            <a:r>
-              <a:t>La causa raiz senalada en los informes no fue un error puntual de programacion sino una migracion probada de forma insuficiente y sin un camino de retorno real.</a:t>
-            </a:r>
-          </a:p>
-          <a:p>
-            <a:r>
-              <a:t>La leccion tecnica es la misma en los dos casos y conecta con la Clase 12: una migracion sin plan de retorno probado es una apuesta, y el plan de retorno se prueba antes, no el dia del cambio.</a:t>
-            </a:r>
-          </a:p>
-          <a:p>
-            <a:r>
-              <a:t>La forma disciplinada de hacerlo es la secuencia de expandir, migrar y contraer, con las dos versiones conviviendo, mas una verificacion de conteos entre origen y destino antes de eliminar nada.</a:t>
+              <a:t>Este merece un tratamiento distinto porque su rasgo caracteristico es que no llega a los titulares con nombre propio tan facilmente: son fallos que no producen mensajes de error y por eso se descubren semanas despues</a:t>
+            </a:r>
+          </a:p>
+          <a:p>
+            <a:r>
+              <a:t>Cuando el inventario fisico no coincide con el del sistema o cuando dos clientes reclaman el mismo cupo.</a:t>
+            </a:r>
+          </a:p>
+          <a:p>
+            <a:r>
+              <a:t>El patron es siempre uno de los tres que se estudiaron en la Clase 10.</a:t>
+            </a:r>
+          </a:p>
+          <a:p>
+            <a:r>
+              <a:t>Actualizacion perdida: dos procesos leen el mismo stock de Insumo, digamos cinco unidades, ambos restan tres y ambos escriben dos, con lo cual se despacharon seis unidades y el sistema declara dos existencias que no estan.</a:t>
+            </a:r>
+          </a:p>
+          <a:p>
+            <a:r>
+              <a:t>Doble reserva: dos recepcionistas consultan la franja del martes a las diez del veterinario Ruiz, ambas reciben cero filas, ambas insertan.</a:t>
+            </a:r>
+          </a:p>
+          <a:p>
+            <a:r>
+              <a:t>Bloqueo mutuo o deadlock: dos transacciones se esperan en orden cruzado y el motor mata una.</a:t>
+            </a:r>
+          </a:p>
+          <a:p>
+            <a:r>
+              <a:t>La leccion es que ninguna cantidad de validacion previa en la aplicacion resuelve esto</a:t>
+            </a:r>
+          </a:p>
+          <a:p>
+            <a:r>
+              <a:t>Porque entre la consulta y la escritura hay una ventana de tiempo en la que el mundo cambio; se resuelve en la base con restricciones, con bloqueo explicito al leer lo que se va a modificar o con el nivel de aislamiento adecuado.</a:t>
+            </a:r>
+          </a:p>
+          <a:p>
+            <a:r>
+              <a:t>Y hay una leccion organizacional gratis: estos defectos jamas aparecen probando con un usuario, asi que si el estudiante solo probo la clínica desde una sola maquina, no lo probo.</a:t>
             </a:r>
           </a:p>
           <a:p>
@@ -1150,7 +1169,7 @@
           </a:p>
           <a:p>
             <a:r>
-              <a:t>Caso tres, perdida de datos durante una migracion.</a:t>
+              <a:t>Caso cuatro, concurrencia.</a:t>
             </a:r>
           </a:p>
         </p:txBody>
@@ -1225,47 +1244,62 @@
           </a:p>
           <a:p>
             <a:r>
-              <a:t>Este merece un tratamiento distinto porque su rasgo caracteristico es que no llega a los titulares con nombre propio tan facilmente: son fallos que no producen mensajes de error y por eso se descubren semanas despues</a:t>
-            </a:r>
-          </a:p>
-          <a:p>
-            <a:r>
-              <a:t>Cuando el inventario fisico no coincide con el del sistema o cuando dos clientes reclaman el mismo cupo.</a:t>
-            </a:r>
-          </a:p>
-          <a:p>
-            <a:r>
-              <a:t>El patron es siempre uno de los tres que se estudiaron en la Clase 10.</a:t>
-            </a:r>
-          </a:p>
-          <a:p>
-            <a:r>
-              <a:t>Actualizacion perdida: dos procesos leen el mismo stock de Insumo, digamos cinco unidades, ambos restan tres y ambos escriben dos, con lo cual se despacharon seis unidades y el sistema declara dos existencias que no estan.</a:t>
-            </a:r>
-          </a:p>
-          <a:p>
-            <a:r>
-              <a:t>Doble reserva: dos recepcionistas consultan la franja del martes a las diez del veterinario Ruiz, ambas reciben cero filas, ambas insertan.</a:t>
-            </a:r>
-          </a:p>
-          <a:p>
-            <a:r>
-              <a:t>Bloqueo mutuo o deadlock: dos transacciones se esperan en orden cruzado y el motor mata una.</a:t>
-            </a:r>
-          </a:p>
-          <a:p>
-            <a:r>
-              <a:t>La leccion es que ninguna cantidad de validacion previa en la aplicacion resuelve esto</a:t>
-            </a:r>
-          </a:p>
-          <a:p>
-            <a:r>
-              <a:t>Porque entre la consulta y la escritura hay una ventana de tiempo en la que el mundo cambio; se resuelve en la base con restricciones, con bloqueo explicito al leer lo que se va a modificar o con el nivel de aislamiento adecuado.</a:t>
-            </a:r>
-          </a:p>
-          <a:p>
-            <a:r>
-              <a:t>Y hay una leccion organizacional gratis: estos defectos jamas aparecen probando con un usuario, asi que si el estudiante solo probo la clínica desde una sola maquina, no lo probo.</a:t>
+              <a:t>Una leccion es un lugar comun cuando podria haberse escrito antes de conocer el caso: hay que hacer respaldos, hay que cuidar los permisos, hay que probar bien.</a:t>
+            </a:r>
+          </a:p>
+          <a:p>
+            <a:r>
+              <a:t>Una leccion es accionable cuando tiene cuatro elementos verificables: un verbo concreto, el artefacto sobre el cual se actua, una frecuencia o un umbral, y la manera de comprobar que se hizo.</a:t>
+            </a:r>
+          </a:p>
+          <a:p>
+            <a:r>
+              <a:t>Version inutil: hay que probar los respaldos.</a:t>
+            </a:r>
+          </a:p>
+          <a:p>
+            <a:r>
+              <a:t>Version accionable: el primer lunes de cada mes se restaura el respaldo mas reciente en un esquema temporal de Oracle Live SQL o del entorno de pruebas, se comparan los conteos de filas de Dueno, Mascota, Cita y Factura contra produccion</a:t>
+            </a:r>
+          </a:p>
+          <a:p>
+            <a:r>
+              <a:t>Y se registra fecha y resultado en la bitacora del proyecto; si no hay registro del mes, se declara que no hay respaldo.</a:t>
+            </a:r>
+          </a:p>
+          <a:p>
+            <a:r>
+              <a:t>La segunda se puede auditar, la primera es una intencion.</a:t>
+            </a:r>
+          </a:p>
+          <a:p>
+            <a:r>
+              <a:t>Aplique el mismo molde a los otros casos y ya tiene la cuarta columna de la tabla: del caso de permisos sale crear el rol rol_clinica_app con GRANT EXECUTE sobre los procedimientos y revocar todo SELECT</a:t>
+            </a:r>
+          </a:p>
+          <a:p>
+            <a:r>
+              <a:t>INSERT, UPDATE y DELETE directo sobre las tablas, verificado consultando las vistas de privilegios</a:t>
+            </a:r>
+          </a:p>
+          <a:p>
+            <a:r>
+              <a:t>Del caso de concurrencia sale ALTER TABLE Cita ADD CONSTRAINT uq_cita_vet_franja UNIQUE (id_veterinario, fecha_hora) mas SELECT FOR UPDATE al descontar stock, verificado con dos sesiones simultaneas</a:t>
+            </a:r>
+          </a:p>
+          <a:p>
+            <a:r>
+              <a:t>Del caso de migracion sale que todo cambio de esquema tenga script de ida, script de retorno y conteo de verificacion.</a:t>
+            </a:r>
+          </a:p>
+          <a:p>
+            <a:r>
+              <a:t>Sobre las preguntas que llegaran por el canal del curso: si piden inventar un caso, la respuesta es no, cada caso debe ser verificable con una fuente publica o declararse explicitamente como hipotetico</a:t>
+            </a:r>
+          </a:p>
+          <a:p>
+            <a:r>
+              <a:t>Si el caso no tiene detalle tecnico publicado, se escribe solo lo documentado y se marca aparte lo que es inferencia propia, porque separar hecho de suposicion es parte de la nota; y si preguntan cuanto debe medir cada celda.</a:t>
             </a:r>
           </a:p>
           <a:p>
@@ -1275,146 +1309,6 @@
           </a:p>
           <a:p>
             <a:r>
-              <a:t>Caso cuatro, concurrencia.</a:t>
-            </a:r>
-          </a:p>
-        </p:txBody>
-      </p:sp>
-      <p:sp>
-        <p:nvSpPr>
-          <p:cNvPr id="4" name="Slide Number Placeholder 3"/>
-          <p:cNvSpPr>
-            <a:spLocks noGrp="1"/>
-          </p:cNvSpPr>
-          <p:nvPr>
-            <p:ph type="sldNum" idx="5" sz="quarter"/>
-          </p:nvPr>
-        </p:nvSpPr>
-        <p:spPr/>
-      </p:sp>
-    </p:spTree>
-  </p:cSld>
-  <p:clrMapOvr>
-    <a:masterClrMapping/>
-  </p:clrMapOvr>
-</p:notes>
-</file>
-
-<file path=ppt/notesSlides/notesSlide8.xml><?xml version="1.0" encoding="utf-8"?>
-<p:notes xmlns:a="http://schemas.openxmlformats.org/drawingml/2006/main" xmlns:p="http://schemas.openxmlformats.org/presentationml/2006/main" xmlns:r="http://schemas.openxmlformats.org/officeDocument/2006/relationships">
-  <p:cSld>
-    <p:spTree>
-      <p:nvGrpSpPr>
-        <p:cNvPr id="1" name=""/>
-        <p:cNvGrpSpPr/>
-        <p:nvPr/>
-      </p:nvGrpSpPr>
-      <p:grpSpPr>
-        <a:xfrm>
-          <a:off x="0" y="0"/>
-          <a:ext cx="0" cy="0"/>
-          <a:chOff x="0" y="0"/>
-          <a:chExt cx="0" cy="0"/>
-        </a:xfrm>
-      </p:grpSpPr>
-      <p:sp>
-        <p:nvSpPr>
-          <p:cNvPr id="2" name="Slide Image Placeholder 1"/>
-          <p:cNvSpPr>
-            <a:spLocks noGrp="1"/>
-          </p:cNvSpPr>
-          <p:nvPr>
-            <p:ph type="sldImg" idx="2"/>
-          </p:nvPr>
-        </p:nvSpPr>
-        <p:spPr/>
-      </p:sp>
-      <p:sp>
-        <p:nvSpPr>
-          <p:cNvPr id="3" name="Notes Placeholder 2"/>
-          <p:cNvSpPr>
-            <a:spLocks noGrp="1"/>
-          </p:cNvSpPr>
-          <p:nvPr>
-            <p:ph type="body" idx="3" sz="quarter"/>
-          </p:nvPr>
-        </p:nvSpPr>
-        <p:spPr/>
-        <p:txBody>
-          <a:bodyPr/>
-          <a:lstStyle/>
-          <a:p>
-            <a:r>
-              <a:t>DESARROLLO (para explicarlo, no se proyecta):</a:t>
-            </a:r>
-          </a:p>
-          <a:p>
-            <a:r>
-              <a:t>Una leccion es un lugar comun cuando podria haberse escrito antes de conocer el caso: hay que hacer respaldos, hay que cuidar los permisos, hay que probar bien.</a:t>
-            </a:r>
-          </a:p>
-          <a:p>
-            <a:r>
-              <a:t>Una leccion es accionable cuando tiene cuatro elementos verificables: un verbo concreto, el artefacto sobre el cual se actua, una frecuencia o un umbral, y la manera de comprobar que se hizo.</a:t>
-            </a:r>
-          </a:p>
-          <a:p>
-            <a:r>
-              <a:t>Version inutil: hay que probar los respaldos.</a:t>
-            </a:r>
-          </a:p>
-          <a:p>
-            <a:r>
-              <a:t>Version accionable: el primer lunes de cada mes se restaura el respaldo mas reciente en un esquema temporal de Oracle Live SQL o del entorno de pruebas, se comparan los conteos de filas de Dueno, Mascota, Cita y Factura contra produccion</a:t>
-            </a:r>
-          </a:p>
-          <a:p>
-            <a:r>
-              <a:t>Y se registra fecha y resultado en la bitacora del proyecto; si no hay registro del mes, se declara que no hay respaldo.</a:t>
-            </a:r>
-          </a:p>
-          <a:p>
-            <a:r>
-              <a:t>La segunda se puede auditar, la primera es una intencion.</a:t>
-            </a:r>
-          </a:p>
-          <a:p>
-            <a:r>
-              <a:t>Aplique el mismo molde a los otros casos y ya tiene la cuarta columna de la tabla: del caso de permisos sale crear el rol rol_clinica_app con GRANT EXECUTE sobre los procedimientos y revocar todo SELECT</a:t>
-            </a:r>
-          </a:p>
-          <a:p>
-            <a:r>
-              <a:t>INSERT, UPDATE y DELETE directo sobre las tablas, verificado consultando las vistas de privilegios</a:t>
-            </a:r>
-          </a:p>
-          <a:p>
-            <a:r>
-              <a:t>Del caso de concurrencia sale ALTER TABLE Cita ADD CONSTRAINT uq_cita_vet_franja UNIQUE (id_veterinario, fecha_hora) mas SELECT FOR UPDATE al descontar stock, verificado con dos sesiones simultaneas</a:t>
-            </a:r>
-          </a:p>
-          <a:p>
-            <a:r>
-              <a:t>Del caso de migracion sale que todo cambio de esquema tenga script de ida, script de retorno y conteo de verificacion.</a:t>
-            </a:r>
-          </a:p>
-          <a:p>
-            <a:r>
-              <a:t>Sobre las preguntas que llegaran por el canal del curso: si piden inventar un caso, la respuesta es no, cada caso debe ser verificable con una fuente publica o declararse explicitamente como hipotetico</a:t>
-            </a:r>
-          </a:p>
-          <a:p>
-            <a:r>
-              <a:t>Si el caso no tiene detalle tecnico publicado, se escribe solo lo documentado y se marca aparte lo que es inferencia propia, porque separar hecho de suposicion es parte de la nota; y si preguntan cuanto debe medir cada celda.</a:t>
-            </a:r>
-          </a:p>
-          <a:p>
-            <a:r>
-              <a:t>NOTAS:</a:t>
-            </a:r>
-          </a:p>
-          <a:p>
-            <a:r>
               <a:t>Lo que decide la calificacion de hoy no es reunir casos sino escribir lecciones accionables, y esa es la habilidad que el estudiante debe practicar sin ayuda.</a:t>
             </a:r>
           </a:p>
@@ -1426,106 +1320,6 @@
           <a:p>
             <a:r>
               <a:t>Fuera de la lamina (habla de la practica): Sobre las preguntas que llegaran por el canal del curso: si piden inventar un caso, la respuesta es no, cada caso debe ser verificable con una fuente publica o declararse explicitamente como hipotetico; si el caso no tiene detalle tecnico publicado, se escribe solo lo documentado y se marca aparte lo que es inferencia propia, porque separar hecho de suposicion es parte de la nota; y si preguntan cuanto debe medir cada celda, la convencion de este entregable es de tres a cinco lineas.</a:t>
-            </a:r>
-          </a:p>
-        </p:txBody>
-      </p:sp>
-      <p:sp>
-        <p:nvSpPr>
-          <p:cNvPr id="4" name="Slide Number Placeholder 3"/>
-          <p:cNvSpPr>
-            <a:spLocks noGrp="1"/>
-          </p:cNvSpPr>
-          <p:nvPr>
-            <p:ph type="sldNum" idx="5" sz="quarter"/>
-          </p:nvPr>
-        </p:nvSpPr>
-        <p:spPr/>
-      </p:sp>
-    </p:spTree>
-  </p:cSld>
-  <p:clrMapOvr>
-    <a:masterClrMapping/>
-  </p:clrMapOvr>
-</p:notes>
-</file>
-
-<file path=ppt/notesSlides/notesSlide9.xml><?xml version="1.0" encoding="utf-8"?>
-<p:notes xmlns:a="http://schemas.openxmlformats.org/drawingml/2006/main" xmlns:p="http://schemas.openxmlformats.org/presentationml/2006/main" xmlns:r="http://schemas.openxmlformats.org/officeDocument/2006/relationships">
-  <p:cSld>
-    <p:spTree>
-      <p:nvGrpSpPr>
-        <p:cNvPr id="1" name=""/>
-        <p:cNvGrpSpPr/>
-        <p:nvPr/>
-      </p:nvGrpSpPr>
-      <p:grpSpPr>
-        <a:xfrm>
-          <a:off x="0" y="0"/>
-          <a:ext cx="0" cy="0"/>
-          <a:chOff x="0" y="0"/>
-          <a:chExt cx="0" cy="0"/>
-        </a:xfrm>
-      </p:grpSpPr>
-      <p:sp>
-        <p:nvSpPr>
-          <p:cNvPr id="2" name="Slide Image Placeholder 1"/>
-          <p:cNvSpPr>
-            <a:spLocks noGrp="1"/>
-          </p:cNvSpPr>
-          <p:nvPr>
-            <p:ph type="sldImg" idx="2"/>
-          </p:nvPr>
-        </p:nvSpPr>
-        <p:spPr/>
-      </p:sp>
-      <p:sp>
-        <p:nvSpPr>
-          <p:cNvPr id="3" name="Notes Placeholder 2"/>
-          <p:cNvSpPr>
-            <a:spLocks noGrp="1"/>
-          </p:cNvSpPr>
-          <p:nvPr>
-            <p:ph type="body" idx="3" sz="quarter"/>
-          </p:nvPr>
-        </p:nvSpPr>
-        <p:spPr/>
-        <p:txBody>
-          <a:bodyPr/>
-          <a:lstStyle/>
-          <a:p>
-            <a:r>
-              <a:t>TEXTO COMPLETO DE LA LÁMINA (se proyecta resumido):</a:t>
-            </a:r>
-          </a:p>
-          <a:p/>
-          <a:p>
-            <a:r>
-              <a:t>Herramienta: Google Docs</a:t>
-            </a:r>
-          </a:p>
-          <a:p/>
-          <a:p>
-            <a:r>
-              <a:t>Demo: Plantilla: contexto -&gt; fallo -&gt; leccion -&gt; cambio en la clínica.</a:t>
-            </a:r>
-          </a:p>
-          <a:p/>
-          <a:p>
-            <a:r>
-              <a:t>Sigan el mismo dominio de la clínica (no inventen otro caso).</a:t>
-            </a:r>
-          </a:p>
-          <a:p/>
-          <a:p>
-            <a:r>
-              <a:t>Qué observar: cada caso se separa en contexto, fallo, causa raiz y la leccion convertida en una accion verificable sobre la base de la clínica.</a:t>
-            </a:r>
-          </a:p>
-          <a:p/>
-          <a:p>
-            <a:r>
-              <a:t>Qué observar: una leccion accionable tiene verbo, artefacto, frecuencia o umbral, y una forma de comprobar que se hizo.</a:t>
             </a:r>
           </a:p>
         </p:txBody>
@@ -7567,118 +7361,14 @@
       </p:sp>
       <p:sp>
         <p:nvSpPr>
-          <p:cNvPr id="5" name="Rounded Rectangle 4"/>
-          <p:cNvSpPr/>
-          <p:nvPr/>
-        </p:nvSpPr>
-        <p:spPr>
-          <a:xfrm>
-            <a:off x="5797149" y="1573813"/>
-            <a:ext cx="6010497" cy="4057845"/>
-          </a:xfrm>
-          <a:prstGeom prst="roundRect">
-            <a:avLst>
-              <a:gd name="adj" fmla="val 4000"/>
-            </a:avLst>
-          </a:prstGeom>
-          <a:solidFill>
-            <a:srgbClr val="E8EEF4"/>
-          </a:solidFill>
-          <a:ln>
-            <a:noFill/>
-          </a:ln>
-        </p:spPr>
-        <p:style>
-          <a:lnRef idx="1">
-            <a:schemeClr val="accent1"/>
-          </a:lnRef>
-          <a:fillRef idx="3">
-            <a:schemeClr val="accent1"/>
-          </a:fillRef>
-          <a:effectRef idx="2">
-            <a:schemeClr val="accent1"/>
-          </a:effectRef>
-          <a:fontRef idx="minor">
-            <a:schemeClr val="lt1"/>
-          </a:fontRef>
-        </p:style>
-        <p:txBody>
-          <a:bodyPr rtlCol="0" anchor="ctr"/>
-          <a:lstStyle/>
-          <a:p>
-            <a:pPr algn="ctr"/>
-          </a:p>
-        </p:txBody>
-      </p:sp>
-      <p:pic>
-        <p:nvPicPr>
-          <p:cNvPr id="6" name="Picture 5" descr="laptop-code-live-demo.jpg"/>
-          <p:cNvPicPr>
-            <a:picLocks noChangeAspect="1"/>
-          </p:cNvPicPr>
-          <p:nvPr/>
-        </p:nvPicPr>
-        <p:blipFill>
-          <a:blip r:embed="rId2"/>
-          <a:stretch>
-            <a:fillRect/>
-          </a:stretch>
-        </p:blipFill>
-        <p:spPr>
-          <a:xfrm>
-            <a:off x="5870301" y="1646965"/>
-            <a:ext cx="5864193" cy="3911541"/>
-          </a:xfrm>
-          <a:prstGeom prst="rect">
-            <a:avLst/>
-          </a:prstGeom>
-        </p:spPr>
-      </p:pic>
-      <p:sp>
-        <p:nvSpPr>
-          <p:cNvPr id="7" name="TextBox 6"/>
+          <p:cNvPr id="5" name="TextBox 4"/>
           <p:cNvSpPr txBox="1"/>
           <p:nvPr/>
         </p:nvSpPr>
         <p:spPr>
           <a:xfrm>
-            <a:off x="5870301" y="5961888"/>
-            <a:ext cx="5864193" cy="320040"/>
-          </a:xfrm>
-          <a:prstGeom prst="rect">
-            <a:avLst/>
-          </a:prstGeom>
-          <a:noFill/>
-        </p:spPr>
-        <p:txBody>
-          <a:bodyPr wrap="square">
-            <a:spAutoFit/>
-          </a:bodyPr>
-          <a:lstStyle/>
-          <a:p>
-            <a:pPr algn="ctr"/>
-            <a:r>
-              <a:rPr sz="1100" b="0" i="1">
-                <a:solidFill>
-                  <a:srgbClr val="666666"/>
-                </a:solidFill>
-                <a:latin typeface="Calibri"/>
-              </a:rPr>
-              <a:t>Foto: olia danilevich · Pexels</a:t>
-            </a:r>
-          </a:p>
-        </p:txBody>
-      </p:sp>
-      <p:sp>
-        <p:nvSpPr>
-          <p:cNvPr id="8" name="TextBox 7"/>
-          <p:cNvSpPr txBox="1"/>
-          <p:nvPr/>
-        </p:nvSpPr>
-        <p:spPr>
-          <a:xfrm>
-            <a:off x="457200" y="1353312"/>
-            <a:ext cx="5093061" cy="5047488"/>
+            <a:off x="457200" y="1170432"/>
+            <a:ext cx="11277295" cy="5230368"/>
           </a:xfrm>
           <a:prstGeom prst="rect">
             <a:avLst/>
@@ -7755,7 +7445,7 @@
                 </a:solidFill>
                 <a:latin typeface="Calibri"/>
               </a:rPr>
-              <a:t> Plantilla:</a:t>
+              <a:t> Plantilla: contexto -&gt; fallo -&gt; leccion -&gt; cambio en la clínica.</a:t>
             </a:r>
           </a:p>
           <a:p>
@@ -7808,11 +7498,45 @@
               <a:t> cada caso se separa en contexto, fallo, causa raiz y la leccion convertida en una accion verificable sobre la base de la clínica.</a:t>
             </a:r>
           </a:p>
-        </p:txBody>
-      </p:sp>
-      <p:sp>
-        <p:nvSpPr>
-          <p:cNvPr id="9" name="TextBox 8"/>
+          <a:p>
+            <a:pPr>
+              <a:spcAft>
+                <a:spcPts val="800"/>
+              </a:spcAft>
+            </a:pPr>
+            <a:r>
+              <a:rPr sz="2000" b="0" i="0">
+                <a:solidFill>
+                  <a:srgbClr val="333333"/>
+                </a:solidFill>
+                <a:latin typeface="Calibri"/>
+              </a:rPr>
+              <a:t>–   </a:t>
+            </a:r>
+            <a:r>
+              <a:rPr sz="2000" b="1" i="0">
+                <a:solidFill>
+                  <a:srgbClr val="333333"/>
+                </a:solidFill>
+                <a:latin typeface="Calibri"/>
+              </a:rPr>
+              <a:t>Qué observar:</a:t>
+            </a:r>
+            <a:r>
+              <a:rPr sz="2000" b="0" i="0">
+                <a:solidFill>
+                  <a:srgbClr val="333333"/>
+                </a:solidFill>
+                <a:latin typeface="Calibri"/>
+              </a:rPr>
+              <a:t> una leccion accionable tiene verbo, artefacto, frecuencia o umbral, y una forma de comprobar que se hizo.</a:t>
+            </a:r>
+          </a:p>
+        </p:txBody>
+      </p:sp>
+      <p:sp>
+        <p:nvSpPr>
+          <p:cNvPr id="6" name="TextBox 5"/>
           <p:cNvSpPr txBox="1"/>
           <p:nvPr/>
         </p:nvSpPr>
@@ -8225,118 +7949,14 @@
       </p:sp>
       <p:sp>
         <p:nvSpPr>
-          <p:cNvPr id="5" name="Rounded Rectangle 4"/>
-          <p:cNvSpPr/>
-          <p:nvPr/>
-        </p:nvSpPr>
-        <p:spPr>
-          <a:xfrm>
-            <a:off x="5797149" y="1573813"/>
-            <a:ext cx="6010497" cy="4057845"/>
-          </a:xfrm>
-          <a:prstGeom prst="roundRect">
-            <a:avLst>
-              <a:gd name="adj" fmla="val 4000"/>
-            </a:avLst>
-          </a:prstGeom>
-          <a:solidFill>
-            <a:srgbClr val="E8EEF4"/>
-          </a:solidFill>
-          <a:ln>
-            <a:noFill/>
-          </a:ln>
-        </p:spPr>
-        <p:style>
-          <a:lnRef idx="1">
-            <a:schemeClr val="accent1"/>
-          </a:lnRef>
-          <a:fillRef idx="3">
-            <a:schemeClr val="accent1"/>
-          </a:fillRef>
-          <a:effectRef idx="2">
-            <a:schemeClr val="accent1"/>
-          </a:effectRef>
-          <a:fontRef idx="minor">
-            <a:schemeClr val="lt1"/>
-          </a:fontRef>
-        </p:style>
-        <p:txBody>
-          <a:bodyPr rtlCol="0" anchor="ctr"/>
-          <a:lstStyle/>
-          <a:p>
-            <a:pPr algn="ctr"/>
-          </a:p>
-        </p:txBody>
-      </p:sp>
-      <p:pic>
-        <p:nvPicPr>
-          <p:cNvPr id="6" name="Picture 5" descr="notebook-planning-desk-coffee.jpg"/>
-          <p:cNvPicPr>
-            <a:picLocks noChangeAspect="1"/>
-          </p:cNvPicPr>
-          <p:nvPr/>
-        </p:nvPicPr>
-        <p:blipFill>
-          <a:blip r:embed="rId2"/>
-          <a:stretch>
-            <a:fillRect/>
-          </a:stretch>
-        </p:blipFill>
-        <p:spPr>
-          <a:xfrm>
-            <a:off x="5870301" y="1646965"/>
-            <a:ext cx="5864193" cy="3911541"/>
-          </a:xfrm>
-          <a:prstGeom prst="rect">
-            <a:avLst/>
-          </a:prstGeom>
-        </p:spPr>
-      </p:pic>
-      <p:sp>
-        <p:nvSpPr>
-          <p:cNvPr id="7" name="TextBox 6"/>
+          <p:cNvPr id="5" name="TextBox 4"/>
           <p:cNvSpPr txBox="1"/>
           <p:nvPr/>
         </p:nvSpPr>
         <p:spPr>
           <a:xfrm>
-            <a:off x="5870301" y="5961888"/>
-            <a:ext cx="5864193" cy="320040"/>
-          </a:xfrm>
-          <a:prstGeom prst="rect">
-            <a:avLst/>
-          </a:prstGeom>
-          <a:noFill/>
-        </p:spPr>
-        <p:txBody>
-          <a:bodyPr wrap="square">
-            <a:spAutoFit/>
-          </a:bodyPr>
-          <a:lstStyle/>
-          <a:p>
-            <a:pPr algn="ctr"/>
-            <a:r>
-              <a:rPr sz="1100" b="0" i="1">
-                <a:solidFill>
-                  <a:srgbClr val="666666"/>
-                </a:solidFill>
-                <a:latin typeface="Calibri"/>
-              </a:rPr>
-              <a:t>Foto: Cup of  Couple · Pexels</a:t>
-            </a:r>
-          </a:p>
-        </p:txBody>
-      </p:sp>
-      <p:sp>
-        <p:nvSpPr>
-          <p:cNvPr id="8" name="TextBox 7"/>
-          <p:cNvSpPr txBox="1"/>
-          <p:nvPr/>
-        </p:nvSpPr>
-        <p:spPr>
-          <a:xfrm>
-            <a:off x="457200" y="1353312"/>
-            <a:ext cx="5093061" cy="5047488"/>
+            <a:off x="457200" y="1170432"/>
+            <a:ext cx="11277295" cy="5230368"/>
           </a:xfrm>
           <a:prstGeom prst="rect">
             <a:avLst/>
@@ -8457,11 +8077,61 @@
               <a:t>–   Recorrido: teoría del tema, una lámina por concepto, y demo del docente sobre la base de la clínica.</a:t>
             </a:r>
           </a:p>
-        </p:txBody>
-      </p:sp>
-      <p:sp>
-        <p:nvSpPr>
-          <p:cNvPr id="9" name="TextBox 8"/>
+          <a:p>
+            <a:pPr>
+              <a:spcAft>
+                <a:spcPts val="800"/>
+              </a:spcAft>
+            </a:pPr>
+            <a:r>
+              <a:rPr sz="2000" b="0" i="0">
+                <a:solidFill>
+                  <a:srgbClr val="333333"/>
+                </a:solidFill>
+                <a:latin typeface="Calibri"/>
+              </a:rPr>
+              <a:t>–   Cada lámina se sostiene sola: sirve para repasar aunque hayas faltado.</a:t>
+            </a:r>
+          </a:p>
+          <a:p>
+            <a:pPr>
+              <a:spcAft>
+                <a:spcPts val="800"/>
+              </a:spcAft>
+            </a:pPr>
+            <a:r>
+              <a:rPr sz="2000" b="0" i="0">
+                <a:solidFill>
+                  <a:srgbClr val="333333"/>
+                </a:solidFill>
+                <a:latin typeface="Calibri"/>
+              </a:rPr>
+              <a:t>–   </a:t>
+            </a:r>
+            <a:r>
+              <a:rPr sz="2000" b="1" i="0">
+                <a:solidFill>
+                  <a:srgbClr val="333333"/>
+                </a:solidFill>
+                <a:latin typeface="Calibri"/>
+              </a:rPr>
+              <a:t>Conceptos de hoy:</a:t>
+            </a:r>
+            <a:r>
+              <a:rPr sz="2000" b="0" i="0">
+                <a:solidFill>
+                  <a:srgbClr val="333333"/>
+                </a:solidFill>
+                <a:latin typeface="Calibri"/>
+              </a:rPr>
+              <a:t> Clase autonoma · Causa proxima y causa raiz · Caso uno · Caso dos.</a:t>
+            </a:r>
+          </a:p>
+        </p:txBody>
+      </p:sp>
+      <p:sp>
+        <p:nvSpPr>
+          <p:cNvPr id="6" name="TextBox 5"/>
           <p:cNvSpPr txBox="1"/>
           <p:nvPr/>
         </p:nvSpPr>

--- a/Bases de Datos II/Clases/Clase 13 - Analisis de casos reales/Presentacion.pptx
+++ b/Bases de Datos II/Clases/Clase 13 - Analisis de casos reales/Presentacion.pptx
@@ -873,7 +873,7 @@
           <a:lstStyle/>
           <a:p>
             <a:r>
-              <a:t>QUÉ ES (dilo así): El reparto orientativo de las dos horas de trabajo autónomo: teoría con una lámina por concepto, un análisis guiado completo y la práctica opcional de la carpeta.</a:t>
+              <a:t>QUÉ ES (dilo así): El reparto sugerido de las dos horas de trabajo autónomo: teoría con una lámina por concepto, un análisis guiado completo y la práctica opcional de la carpeta.</a:t>
             </a:r>
           </a:p>
           <a:p/>
@@ -2492,7 +2492,7 @@
           </a:p>
           <a:p>
             <a:r>
-              <a:t>  • Abajo: Lo que dice el plan: Seq Scan sobre la tabla grande, que recorre todo para quedarse con pocas filas, es la firma de un índice que falta. La lección accionable: solo las columnas que se muestran e índice en el filtro, medido con EXPLAIN ANALYZE antes y después.</a:t>
+              <a:t>  • Abajo: Lo que dice el plan: Seq Scan sobre la tabla grande, que recorre todo para quedarse con pocas filas, es la firma de un índice que falta. La lección concreta: solo las columnas que se muestran e índice en el filtro, medido con EXPLAIN ANALYZE antes y después.</a:t>
             </a:r>
           </a:p>
           <a:p/>
@@ -10919,7 +10919,7 @@
                 </a:solidFill>
                 <a:latin typeface="Calibri"/>
               </a:rPr>
-              <a:t>Lecciones accionables: los cuatro elementos verificables</a:t>
+              <a:t>Lecciones concretas: los cuatro elementos verificables</a:t>
             </a:r>
           </a:p>
         </p:txBody>
@@ -11153,7 +11153,7 @@
                 </a:solidFill>
                 <a:latin typeface="Calibri"/>
               </a:rPr>
-              <a:t>accionable</a:t>
+              <a:t>concreta</a:t>
             </a:r>
             <a:r>
               <a:rPr sz="2000" b="0" i="0">
@@ -11162,7 +11162,7 @@
                 </a:solidFill>
                 <a:latin typeface="Calibri"/>
               </a:rPr>
-              <a:t> si tiene verbo concreto, artefacto, frecuencia o umbral, y forma de comprobarla.</a:t>
+              <a:t> si tiene verbo de acción, artefacto, frecuencia o umbral, y forma de comprobarla.</a:t>
             </a:r>
           </a:p>
           <a:p>
@@ -17553,7 +17553,7 @@
                 </a:solidFill>
                 <a:latin typeface="Calibri"/>
               </a:rPr>
-              <a:t>lección accionable</a:t>
+              <a:t>lección concreta</a:t>
             </a:r>
             <a:r>
               <a:rPr sz="2000" b="0" i="0">
